--- a/docs/presentation.pptx
+++ b/docs/presentation.pptx
@@ -8275,7 +8275,7 @@
       </p:sp>
       <p:pic>
         <p:nvPicPr>
-          <p:cNvPr id="5" name="Picture 4" descr="card_sim_impact.png"/>
+          <p:cNvPr id="5" name="Picture 4" descr="card_sim_impact_auc.png"/>
           <p:cNvPicPr>
             <a:picLocks noChangeAspect="1"/>
           </p:cNvPicPr>
@@ -8331,14 +8331,108 @@
                 </a:solidFill>
                 <a:latin typeface="Arial"/>
               </a:rPr>
-              <a:t>Рисунок 8 – Атрибуція механізмів зриву в симуляторі fusion-sim (50 розрядів): 10 з 12</a:t>
-            </a:r>
-          </a:p>
-        </p:txBody>
-      </p:sp>
-      <p:sp>
-        <p:nvSpPr>
-          <p:cNvPr id="7" name="TextBox 6"/>
+              <a:t>Рисунок 8 – Атрибуція механізмів зриву в симуляторі fusion-sim (50 розрядів): 10 з 12 (поле «поріг» замінено на ROC AUC цього прогону)</a:t>
+            </a:r>
+          </a:p>
+        </p:txBody>
+      </p:sp>
+      <p:sp>
+        <p:nvSpPr>
+          <p:cNvPr id="7" name="Rectangle 6"/>
+          <p:cNvSpPr/>
+          <p:nvPr/>
+        </p:nvSpPr>
+        <p:spPr>
+          <a:xfrm>
+            <a:off x="548640" y="5041141"/>
+            <a:ext cx="6035040" cy="914400"/>
+          </a:xfrm>
+          <a:prstGeom prst="rect">
+            <a:avLst/>
+          </a:prstGeom>
+          <a:solidFill>
+            <a:srgbClr val="F8FAFC"/>
+          </a:solidFill>
+          <a:ln w="12700">
+            <a:solidFill>
+              <a:srgbClr val="E2E8F0"/>
+            </a:solidFill>
+          </a:ln>
+          <a:effectLst/>
+        </p:spPr>
+        <p:style>
+          <a:lnRef idx="1">
+            <a:schemeClr val="accent1"/>
+          </a:lnRef>
+          <a:fillRef idx="3">
+            <a:schemeClr val="accent1"/>
+          </a:fillRef>
+          <a:effectRef idx="2">
+            <a:schemeClr val="accent1"/>
+          </a:effectRef>
+          <a:fontRef idx="minor">
+            <a:schemeClr val="lt1"/>
+          </a:fontRef>
+        </p:style>
+        <p:txBody>
+          <a:bodyPr rtlCol="0" anchor="ctr"/>
+          <a:lstStyle/>
+          <a:p>
+            <a:pPr algn="ctr"/>
+          </a:p>
+        </p:txBody>
+      </p:sp>
+      <p:sp>
+        <p:nvSpPr>
+          <p:cNvPr id="8" name="TextBox 7"/>
+          <p:cNvSpPr txBox="1"/>
+          <p:nvPr/>
+        </p:nvSpPr>
+        <p:spPr>
+          <a:xfrm>
+            <a:off x="685800" y="5132581"/>
+            <a:ext cx="5760720" cy="731520"/>
+          </a:xfrm>
+          <a:prstGeom prst="rect">
+            <a:avLst/>
+          </a:prstGeom>
+          <a:noFill/>
+        </p:spPr>
+        <p:txBody>
+          <a:bodyPr wrap="square" anchor="t" lIns="0" rIns="0" tIns="0" bIns="0">
+            <a:spAutoFit/>
+          </a:bodyPr>
+          <a:lstStyle/>
+          <a:p>
+            <a:pPr algn="l">
+              <a:spcAft>
+                <a:spcPts val="0"/>
+              </a:spcAft>
+            </a:pPr>
+            <a:r>
+              <a:rPr sz="1100" b="1" i="0">
+                <a:solidFill>
+                  <a:srgbClr val="0E7490"/>
+                </a:solidFill>
+                <a:latin typeface="Arial"/>
+              </a:rPr>
+              <a:t>Чому ROC AUC замість порогу. </a:t>
+            </a:r>
+            <a:r>
+              <a:rPr sz="1100" b="0" i="0">
+                <a:solidFill>
+                  <a:srgbClr val="475569"/>
+                </a:solidFill>
+                <a:latin typeface="Arial"/>
+              </a:rPr>
+              <a:t>Поріг спрацювання неінформативний: його підбирає засіб оцінки під бюджет хибних тривог, а на 50 розрядах поріг задає один тихий розряд (див. розділ 5); тому наведено ROC AUC.</a:t>
+            </a:r>
+          </a:p>
+        </p:txBody>
+      </p:sp>
+      <p:sp>
+        <p:nvSpPr>
+          <p:cNvPr id="9" name="TextBox 8"/>
           <p:cNvSpPr txBox="1"/>
           <p:nvPr/>
         </p:nvSpPr>
@@ -8393,7 +8487,7 @@
       </p:sp>
       <p:sp>
         <p:nvSpPr>
-          <p:cNvPr id="8" name="TextBox 7"/>
+          <p:cNvPr id="10" name="TextBox 9"/>
           <p:cNvSpPr txBox="1"/>
           <p:nvPr/>
         </p:nvSpPr>
@@ -8947,7 +9041,7 @@
         <p:spPr>
           <a:xfrm>
             <a:off x="521207" y="1252728"/>
-            <a:ext cx="6364224" cy="1099221"/>
+            <a:ext cx="5541264" cy="963000"/>
           </a:xfrm>
           <a:prstGeom prst="rect">
             <a:avLst/>
@@ -8984,7 +9078,7 @@
       </p:sp>
       <p:pic>
         <p:nvPicPr>
-          <p:cNvPr id="5" name="Picture 4" descr="card_xgb_phys.png"/>
+          <p:cNvPr id="5" name="Picture 4" descr="card_xgb_phys_auc.png"/>
           <p:cNvPicPr>
             <a:picLocks noChangeAspect="1"/>
           </p:cNvPicPr>
@@ -8999,7 +9093,7 @@
         <p:spPr>
           <a:xfrm>
             <a:off x="548640" y="1280160"/>
-            <a:ext cx="6309360" cy="1044357"/>
+            <a:ext cx="5486400" cy="908136"/>
           </a:xfrm>
           <a:prstGeom prst="rect">
             <a:avLst/>
@@ -9014,8 +9108,8 @@
         </p:nvSpPr>
         <p:spPr>
           <a:xfrm>
-            <a:off x="548640" y="2379381"/>
-            <a:ext cx="6309360" cy="365760"/>
+            <a:off x="548640" y="2243160"/>
+            <a:ext cx="5486400" cy="365760"/>
           </a:xfrm>
           <a:prstGeom prst="rect">
             <a:avLst/>
@@ -9040,7 +9134,7 @@
                 </a:solidFill>
                 <a:latin typeface="Arial"/>
               </a:rPr>
-              <a:t>Рисунок 9 – Physics: 25,4 % вчасно, пропущено 6</a:t>
+              <a:t>Рисунок 9 – Physics: 25,4 % вчасно, пропущено 6 (поле «поріг» замінено на ROC AUC; ROC AUC валідаційна, по кроках)</a:t>
             </a:r>
           </a:p>
         </p:txBody>
@@ -9053,8 +9147,8 @@
         </p:nvSpPr>
         <p:spPr>
           <a:xfrm>
-            <a:off x="521207" y="2800005"/>
-            <a:ext cx="6364224" cy="1099221"/>
+            <a:off x="521207" y="2727792"/>
+            <a:ext cx="5541264" cy="963000"/>
           </a:xfrm>
           <a:prstGeom prst="rect">
             <a:avLst/>
@@ -9091,7 +9185,7 @@
       </p:sp>
       <p:pic>
         <p:nvPicPr>
-          <p:cNvPr id="8" name="Picture 7" descr="card_xgb_dyn.png"/>
+          <p:cNvPr id="8" name="Picture 7" descr="card_xgb_dyn_auc.png"/>
           <p:cNvPicPr>
             <a:picLocks noChangeAspect="1"/>
           </p:cNvPicPr>
@@ -9105,8 +9199,8 @@
         </p:blipFill>
         <p:spPr>
           <a:xfrm>
-            <a:off x="548640" y="2827437"/>
-            <a:ext cx="6309360" cy="1044357"/>
+            <a:off x="548640" y="2755224"/>
+            <a:ext cx="5486400" cy="908136"/>
           </a:xfrm>
           <a:prstGeom prst="rect">
             <a:avLst/>
@@ -9121,8 +9215,8 @@
         </p:nvSpPr>
         <p:spPr>
           <a:xfrm>
-            <a:off x="548640" y="3926659"/>
-            <a:ext cx="6309360" cy="365760"/>
+            <a:off x="548640" y="3718225"/>
+            <a:ext cx="5486400" cy="365760"/>
           </a:xfrm>
           <a:prstGeom prst="rect">
             <a:avLst/>
@@ -9147,7 +9241,7 @@
                 </a:solidFill>
                 <a:latin typeface="Arial"/>
               </a:rPr>
-              <a:t>Рисунок 10 – Dynamics: 34,9 % вчасно, пропущено 9</a:t>
+              <a:t>Рисунок 10 – Dynamics: 34,9 % вчасно, пропущено 9 (поле «поріг» замінено на ROC AUC; ROC AUC валідаційна, по кроках)</a:t>
             </a:r>
           </a:p>
         </p:txBody>
@@ -9160,8 +9254,8 @@
         </p:nvSpPr>
         <p:spPr>
           <a:xfrm>
-            <a:off x="521207" y="4347283"/>
-            <a:ext cx="6364224" cy="1099221"/>
+            <a:off x="521207" y="4202857"/>
+            <a:ext cx="5541264" cy="963000"/>
           </a:xfrm>
           <a:prstGeom prst="rect">
             <a:avLst/>
@@ -9198,7 +9292,7 @@
       </p:sp>
       <p:pic>
         <p:nvPicPr>
-          <p:cNvPr id="11" name="Picture 10" descr="card_xgb_formula.png"/>
+          <p:cNvPr id="11" name="Picture 10" descr="card_xgb_formula_auc.png"/>
           <p:cNvPicPr>
             <a:picLocks noChangeAspect="1"/>
           </p:cNvPicPr>
@@ -9212,8 +9306,8 @@
         </p:blipFill>
         <p:spPr>
           <a:xfrm>
-            <a:off x="548640" y="4374715"/>
-            <a:ext cx="6309360" cy="1044357"/>
+            <a:off x="548640" y="4230289"/>
+            <a:ext cx="5486400" cy="908136"/>
           </a:xfrm>
           <a:prstGeom prst="rect">
             <a:avLst/>
@@ -9228,8 +9322,8 @@
         </p:nvSpPr>
         <p:spPr>
           <a:xfrm>
-            <a:off x="548640" y="5473936"/>
-            <a:ext cx="6309360" cy="365760"/>
+            <a:off x="548640" y="5193290"/>
+            <a:ext cx="5486400" cy="365760"/>
           </a:xfrm>
           <a:prstGeom prst="rect">
             <a:avLst/>
@@ -9254,14 +9348,108 @@
                 </a:solidFill>
                 <a:latin typeface="Arial"/>
               </a:rPr>
-              <a:t>Рисунок 11 – Formula: 25,4 % вчасно, пропущено 5</a:t>
-            </a:r>
-          </a:p>
-        </p:txBody>
-      </p:sp>
-      <p:sp>
-        <p:nvSpPr>
-          <p:cNvPr id="13" name="TextBox 12"/>
+              <a:t>Рисунок 11 – Formula: 25,4 % вчасно, пропущено 5 (поле «поріг» замінено на ROC AUC; ROC AUC валідаційна, по кроках)</a:t>
+            </a:r>
+          </a:p>
+        </p:txBody>
+      </p:sp>
+      <p:sp>
+        <p:nvSpPr>
+          <p:cNvPr id="13" name="Rectangle 12"/>
+          <p:cNvSpPr/>
+          <p:nvPr/>
+        </p:nvSpPr>
+        <p:spPr>
+          <a:xfrm>
+            <a:off x="548640" y="5687066"/>
+            <a:ext cx="5486400" cy="914400"/>
+          </a:xfrm>
+          <a:prstGeom prst="rect">
+            <a:avLst/>
+          </a:prstGeom>
+          <a:solidFill>
+            <a:srgbClr val="F8FAFC"/>
+          </a:solidFill>
+          <a:ln w="12700">
+            <a:solidFill>
+              <a:srgbClr val="E2E8F0"/>
+            </a:solidFill>
+          </a:ln>
+          <a:effectLst/>
+        </p:spPr>
+        <p:style>
+          <a:lnRef idx="1">
+            <a:schemeClr val="accent1"/>
+          </a:lnRef>
+          <a:fillRef idx="3">
+            <a:schemeClr val="accent1"/>
+          </a:fillRef>
+          <a:effectRef idx="2">
+            <a:schemeClr val="accent1"/>
+          </a:effectRef>
+          <a:fontRef idx="minor">
+            <a:schemeClr val="lt1"/>
+          </a:fontRef>
+        </p:style>
+        <p:txBody>
+          <a:bodyPr rtlCol="0" anchor="ctr"/>
+          <a:lstStyle/>
+          <a:p>
+            <a:pPr algn="ctr"/>
+          </a:p>
+        </p:txBody>
+      </p:sp>
+      <p:sp>
+        <p:nvSpPr>
+          <p:cNvPr id="14" name="TextBox 13"/>
+          <p:cNvSpPr txBox="1"/>
+          <p:nvPr/>
+        </p:nvSpPr>
+        <p:spPr>
+          <a:xfrm>
+            <a:off x="685800" y="5778506"/>
+            <a:ext cx="5212080" cy="731520"/>
+          </a:xfrm>
+          <a:prstGeom prst="rect">
+            <a:avLst/>
+          </a:prstGeom>
+          <a:noFill/>
+        </p:spPr>
+        <p:txBody>
+          <a:bodyPr wrap="square" anchor="t" lIns="0" rIns="0" tIns="0" bIns="0">
+            <a:spAutoFit/>
+          </a:bodyPr>
+          <a:lstStyle/>
+          <a:p>
+            <a:pPr algn="l">
+              <a:spcAft>
+                <a:spcPts val="0"/>
+              </a:spcAft>
+            </a:pPr>
+            <a:r>
+              <a:rPr sz="1100" b="1" i="0">
+                <a:solidFill>
+                  <a:srgbClr val="0E7490"/>
+                </a:solidFill>
+                <a:latin typeface="Arial"/>
+              </a:rPr>
+              <a:t>Чому ROC AUC замість порогу. </a:t>
+            </a:r>
+            <a:r>
+              <a:rPr sz="1100" b="0" i="0">
+                <a:solidFill>
+                  <a:srgbClr val="475569"/>
+                </a:solidFill>
+                <a:latin typeface="Arial"/>
+              </a:rPr>
+              <a:t>Поріг спрацювання неінформативний: його підбирає засіб оцінки під бюджет хибних тривог, шкала ймовірностей у моделей різна, а на малій вибірці поріг задає один тихий розряд. Тому на скриншотах замість порогу наведено ROC AUC, яка від порогу не залежить.</a:t>
+            </a:r>
+          </a:p>
+        </p:txBody>
+      </p:sp>
+      <p:sp>
+        <p:nvSpPr>
+          <p:cNvPr id="15" name="TextBox 14"/>
           <p:cNvSpPr txBox="1"/>
           <p:nvPr/>
         </p:nvSpPr>
@@ -9384,13 +9572,13 @@
       </p:sp>
       <p:sp>
         <p:nvSpPr>
-          <p:cNvPr id="14" name="TextBox 13"/>
+          <p:cNvPr id="16" name="TextBox 15"/>
           <p:cNvSpPr txBox="1"/>
           <p:nvPr/>
         </p:nvSpPr>
         <p:spPr>
           <a:xfrm>
-            <a:off x="7315200" y="4956048"/>
+            <a:off x="7315200" y="3703320"/>
             <a:ext cx="4343400" cy="320040"/>
           </a:xfrm>
           <a:prstGeom prst="rect">
@@ -9423,15 +9611,15 @@
       </p:sp>
       <p:graphicFrame>
         <p:nvGraphicFramePr>
-          <p:cNvPr id="15" name="Table 14"/>
+          <p:cNvPr id="17" name="Table 16"/>
           <p:cNvGraphicFramePr>
             <a:graphicFrameLocks noGrp="1"/>
           </p:cNvGraphicFramePr>
           <p:nvPr/>
         </p:nvGraphicFramePr>
         <p:xfrm>
-          <a:off x="7315200" y="5367528"/>
-          <a:ext cx="4343400" cy="987552"/>
+          <a:off x="7315200" y="4069080"/>
+          <a:ext cx="4343400" cy="694944"/>
         </p:xfrm>
         <a:graphic>
           <a:graphicData uri="http://schemas.openxmlformats.org/drawingml/2006/table">
@@ -9443,7 +9631,7 @@
                 <a:gridCol w="2514600"/>
                 <a:gridCol w="1828800"/>
               </a:tblGrid>
-              <a:tr h="329184">
+              <a:tr h="347472">
                 <a:tc>
                   <a:txBody>
                     <a:bodyPr wrap="square"/>
@@ -9491,7 +9679,7 @@
                   </a:tcPr>
                 </a:tc>
               </a:tr>
-              <a:tr h="329184">
+              <a:tr h="347472">
                 <a:tc>
                   <a:txBody>
                     <a:bodyPr wrap="square"/>
@@ -9539,54 +9727,6 @@
                   </a:tcPr>
                 </a:tc>
               </a:tr>
-              <a:tr h="329184">
-                <a:tc>
-                  <a:txBody>
-                    <a:bodyPr wrap="square"/>
-                    <a:lstStyle/>
-                    <a:p>
-                      <a:pPr algn="l"/>
-                      <a:r>
-                        <a:rPr sz="1100" b="1">
-                          <a:solidFill>
-                            <a:srgbClr val="0F172A"/>
-                          </a:solidFill>
-                          <a:latin typeface="Arial"/>
-                        </a:rPr>
-                        <a:t>поріг для FPR 5 %</a:t>
-                      </a:r>
-                    </a:p>
-                  </a:txBody>
-                  <a:tcPr marL="91440" marR="91440" marT="27432" marB="27432" anchor="ctr">
-                    <a:solidFill>
-                      <a:srgbClr val="FFFFFF"/>
-                    </a:solidFill>
-                  </a:tcPr>
-                </a:tc>
-                <a:tc>
-                  <a:txBody>
-                    <a:bodyPr wrap="square"/>
-                    <a:lstStyle/>
-                    <a:p>
-                      <a:pPr algn="ctr"/>
-                      <a:r>
-                        <a:rPr sz="1200" b="0">
-                          <a:solidFill>
-                            <a:srgbClr val="0F172A"/>
-                          </a:solidFill>
-                          <a:latin typeface="Arial"/>
-                        </a:rPr>
-                        <a:t>0,73–0,76</a:t>
-                      </a:r>
-                    </a:p>
-                  </a:txBody>
-                  <a:tcPr marL="91440" marR="91440" marT="27432" marB="27432" anchor="ctr">
-                    <a:solidFill>
-                      <a:srgbClr val="FFFFFF"/>
-                    </a:solidFill>
-                  </a:tcPr>
-                </a:tc>
-              </a:tr>
             </a:tbl>
           </a:graphicData>
         </a:graphic>
@@ -9741,7 +9881,7 @@
       </p:sp>
       <p:pic>
         <p:nvPicPr>
-          <p:cNvPr id="5" name="Picture 4" descr="card_v6.png"/>
+          <p:cNvPr id="5" name="Picture 4" descr="card_v6_auc.png"/>
           <p:cNvPicPr>
             <a:picLocks noChangeAspect="1"/>
           </p:cNvPicPr>
@@ -9797,7 +9937,7 @@
                 </a:solidFill>
                 <a:latin typeface="Arial"/>
               </a:rPr>
-              <a:t>Рисунок 12 – v6: 63,5 % вчасно на спільній вибірці, пропущено 0</a:t>
+              <a:t>Рисунок 12 – v6: 63,5 % вчасно на спільній вибірці, пропущено 0 (поле «поріг» замінено на ROC AUC; офіційні набори toksym)</a:t>
             </a:r>
           </a:p>
         </p:txBody>
@@ -9810,7 +9950,7 @@
         </p:nvSpPr>
         <p:spPr>
           <a:xfrm>
-            <a:off x="521207" y="2573234"/>
+            <a:off x="521207" y="2637242"/>
             <a:ext cx="6547103" cy="866394"/>
           </a:xfrm>
           <a:prstGeom prst="rect">
@@ -9848,7 +9988,7 @@
       </p:sp>
       <p:pic>
         <p:nvPicPr>
-          <p:cNvPr id="8" name="Picture 7" descr="card_v6b.png"/>
+          <p:cNvPr id="8" name="Picture 7" descr="card_v6b_auc.png"/>
           <p:cNvPicPr>
             <a:picLocks noChangeAspect="1"/>
           </p:cNvPicPr>
@@ -9862,7 +10002,7 @@
         </p:blipFill>
         <p:spPr>
           <a:xfrm>
-            <a:off x="548640" y="2600666"/>
+            <a:off x="548640" y="2664674"/>
             <a:ext cx="6492240" cy="811530"/>
           </a:xfrm>
           <a:prstGeom prst="rect">
@@ -9878,7 +10018,7 @@
         </p:nvSpPr>
         <p:spPr>
           <a:xfrm>
-            <a:off x="548640" y="3467060"/>
+            <a:off x="548640" y="3531068"/>
             <a:ext cx="6492240" cy="365760"/>
           </a:xfrm>
           <a:prstGeom prst="rect">
@@ -9904,14 +10044,108 @@
                 </a:solidFill>
                 <a:latin typeface="Arial"/>
               </a:rPr>
-              <a:t>Рисунок 13 – v6b: 57,1 % вчасно на спільній вибірці, пропущено 1</a:t>
-            </a:r>
-          </a:p>
-        </p:txBody>
-      </p:sp>
-      <p:sp>
-        <p:nvSpPr>
-          <p:cNvPr id="10" name="TextBox 9"/>
+              <a:t>Рисунок 13 – v6b: 57,1 % вчасно на спільній вибірці, пропущено 1 (поле «поріг» замінено на ROC AUC; офіційні набори toksym)</a:t>
+            </a:r>
+          </a:p>
+        </p:txBody>
+      </p:sp>
+      <p:sp>
+        <p:nvSpPr>
+          <p:cNvPr id="10" name="Rectangle 9"/>
+          <p:cNvSpPr/>
+          <p:nvPr/>
+        </p:nvSpPr>
+        <p:spPr>
+          <a:xfrm>
+            <a:off x="548640" y="4024844"/>
+            <a:ext cx="6492240" cy="914400"/>
+          </a:xfrm>
+          <a:prstGeom prst="rect">
+            <a:avLst/>
+          </a:prstGeom>
+          <a:solidFill>
+            <a:srgbClr val="F8FAFC"/>
+          </a:solidFill>
+          <a:ln w="12700">
+            <a:solidFill>
+              <a:srgbClr val="E2E8F0"/>
+            </a:solidFill>
+          </a:ln>
+          <a:effectLst/>
+        </p:spPr>
+        <p:style>
+          <a:lnRef idx="1">
+            <a:schemeClr val="accent1"/>
+          </a:lnRef>
+          <a:fillRef idx="3">
+            <a:schemeClr val="accent1"/>
+          </a:fillRef>
+          <a:effectRef idx="2">
+            <a:schemeClr val="accent1"/>
+          </a:effectRef>
+          <a:fontRef idx="minor">
+            <a:schemeClr val="lt1"/>
+          </a:fontRef>
+        </p:style>
+        <p:txBody>
+          <a:bodyPr rtlCol="0" anchor="ctr"/>
+          <a:lstStyle/>
+          <a:p>
+            <a:pPr algn="ctr"/>
+          </a:p>
+        </p:txBody>
+      </p:sp>
+      <p:sp>
+        <p:nvSpPr>
+          <p:cNvPr id="11" name="TextBox 10"/>
+          <p:cNvSpPr txBox="1"/>
+          <p:nvPr/>
+        </p:nvSpPr>
+        <p:spPr>
+          <a:xfrm>
+            <a:off x="685800" y="4116284"/>
+            <a:ext cx="6217920" cy="731520"/>
+          </a:xfrm>
+          <a:prstGeom prst="rect">
+            <a:avLst/>
+          </a:prstGeom>
+          <a:noFill/>
+        </p:spPr>
+        <p:txBody>
+          <a:bodyPr wrap="square" anchor="t" lIns="0" rIns="0" tIns="0" bIns="0">
+            <a:spAutoFit/>
+          </a:bodyPr>
+          <a:lstStyle/>
+          <a:p>
+            <a:pPr algn="l">
+              <a:spcAft>
+                <a:spcPts val="0"/>
+              </a:spcAft>
+            </a:pPr>
+            <a:r>
+              <a:rPr sz="1100" b="1" i="0">
+                <a:solidFill>
+                  <a:srgbClr val="0E7490"/>
+                </a:solidFill>
+                <a:latin typeface="Arial"/>
+              </a:rPr>
+              <a:t>Чому ROC AUC замість порогу. </a:t>
+            </a:r>
+            <a:r>
+              <a:rPr sz="1100" b="0" i="0">
+                <a:solidFill>
+                  <a:srgbClr val="475569"/>
+                </a:solidFill>
+                <a:latin typeface="Arial"/>
+              </a:rPr>
+              <a:t>Поріг спрацювання неінформативний: його підбирає засіб оцінки під бюджет хибних тривог, шкала ймовірностей у моделей різна, а на малій вибірці поріг задає один тихий розряд. Тому на скриншотах замість порогу наведено ROC AUC, яка від порогу не залежить.</a:t>
+            </a:r>
+          </a:p>
+        </p:txBody>
+      </p:sp>
+      <p:sp>
+        <p:nvSpPr>
+          <p:cNvPr id="12" name="TextBox 11"/>
           <p:cNvSpPr txBox="1"/>
           <p:nvPr/>
         </p:nvSpPr>
@@ -10009,13 +10243,13 @@
       </p:sp>
       <p:sp>
         <p:nvSpPr>
-          <p:cNvPr id="11" name="TextBox 10"/>
+          <p:cNvPr id="13" name="TextBox 12"/>
           <p:cNvSpPr txBox="1"/>
           <p:nvPr/>
         </p:nvSpPr>
         <p:spPr>
           <a:xfrm>
-            <a:off x="7315200" y="4297680"/>
+            <a:off x="7315200" y="3703320"/>
             <a:ext cx="4343400" cy="320040"/>
           </a:xfrm>
           <a:prstGeom prst="rect">
@@ -10048,15 +10282,15 @@
       </p:sp>
       <p:graphicFrame>
         <p:nvGraphicFramePr>
-          <p:cNvPr id="12" name="Table 11"/>
+          <p:cNvPr id="14" name="Table 13"/>
           <p:cNvGraphicFramePr>
             <a:graphicFrameLocks noGrp="1"/>
           </p:cNvGraphicFramePr>
           <p:nvPr/>
         </p:nvGraphicFramePr>
         <p:xfrm>
-          <a:off x="7315200" y="4709160"/>
-          <a:ext cx="4343400" cy="1645920"/>
+          <a:off x="7315200" y="4069080"/>
+          <a:ext cx="4343400" cy="1737360"/>
         </p:xfrm>
         <a:graphic>
           <a:graphicData uri="http://schemas.openxmlformats.org/drawingml/2006/table">
@@ -10068,7 +10302,7 @@
                 <a:gridCol w="2514600"/>
                 <a:gridCol w="1828800"/>
               </a:tblGrid>
-              <a:tr h="329184">
+              <a:tr h="347472">
                 <a:tc>
                   <a:txBody>
                     <a:bodyPr wrap="square"/>
@@ -10116,7 +10350,7 @@
                   </a:tcPr>
                 </a:tc>
               </a:tr>
-              <a:tr h="329184">
+              <a:tr h="347472">
                 <a:tc>
                   <a:txBody>
                     <a:bodyPr wrap="square"/>
@@ -10164,7 +10398,7 @@
                   </a:tcPr>
                 </a:tc>
               </a:tr>
-              <a:tr h="329184">
+              <a:tr h="347472">
                 <a:tc>
                   <a:txBody>
                     <a:bodyPr wrap="square"/>
@@ -10212,7 +10446,7 @@
                   </a:tcPr>
                 </a:tc>
               </a:tr>
-              <a:tr h="329184">
+              <a:tr h="347472">
                 <a:tc>
                   <a:txBody>
                     <a:bodyPr wrap="square"/>
@@ -10260,7 +10494,7 @@
                   </a:tcPr>
                 </a:tc>
               </a:tr>
-              <a:tr h="329184">
+              <a:tr h="347472">
                 <a:tc>
                   <a:txBody>
                     <a:bodyPr wrap="square"/>
@@ -10531,7 +10765,7 @@
         </p:nvSpPr>
         <p:spPr>
           <a:xfrm>
-            <a:off x="521207" y="3156430"/>
+            <a:off x="521207" y="3220438"/>
             <a:ext cx="6089903" cy="1635724"/>
           </a:xfrm>
           <a:prstGeom prst="rect">
@@ -10583,7 +10817,7 @@
         </p:blipFill>
         <p:spPr>
           <a:xfrm>
-            <a:off x="548640" y="3183862"/>
+            <a:off x="548640" y="3247870"/>
             <a:ext cx="6035040" cy="1580860"/>
           </a:xfrm>
           <a:prstGeom prst="rect">
@@ -10599,7 +10833,7 @@
         </p:nvSpPr>
         <p:spPr>
           <a:xfrm>
-            <a:off x="548640" y="4819587"/>
+            <a:off x="548640" y="4883595"/>
             <a:ext cx="6035040" cy="365760"/>
           </a:xfrm>
           <a:prstGeom prst="rect">
@@ -10736,7 +10970,7 @@
         </p:nvSpPr>
         <p:spPr>
           <a:xfrm>
-            <a:off x="7315200" y="4626864"/>
+            <a:off x="7315200" y="3703320"/>
             <a:ext cx="4343400" cy="320040"/>
           </a:xfrm>
           <a:prstGeom prst="rect">
@@ -10776,8 +11010,8 @@
           <p:nvPr/>
         </p:nvGraphicFramePr>
         <p:xfrm>
-          <a:off x="7315200" y="5038344"/>
-          <a:ext cx="4343400" cy="1316736"/>
+          <a:off x="7315200" y="4069080"/>
+          <a:ext cx="4343400" cy="1389888"/>
         </p:xfrm>
         <a:graphic>
           <a:graphicData uri="http://schemas.openxmlformats.org/drawingml/2006/table">
@@ -10789,7 +11023,7 @@
                 <a:gridCol w="2514600"/>
                 <a:gridCol w="1828800"/>
               </a:tblGrid>
-              <a:tr h="329184">
+              <a:tr h="347472">
                 <a:tc>
                   <a:txBody>
                     <a:bodyPr wrap="square"/>
@@ -10837,7 +11071,7 @@
                   </a:tcPr>
                 </a:tc>
               </a:tr>
-              <a:tr h="329184">
+              <a:tr h="347472">
                 <a:tc>
                   <a:txBody>
                     <a:bodyPr wrap="square"/>
@@ -10885,7 +11119,7 @@
                   </a:tcPr>
                 </a:tc>
               </a:tr>
-              <a:tr h="329184">
+              <a:tr h="347472">
                 <a:tc>
                   <a:txBody>
                     <a:bodyPr wrap="square"/>
@@ -10933,7 +11167,7 @@
                   </a:tcPr>
                 </a:tc>
               </a:tr>
-              <a:tr h="329184">
+              <a:tr h="347472">
                 <a:tc>
                   <a:txBody>
                     <a:bodyPr wrap="square"/>
@@ -11302,7 +11536,7 @@
         </p:nvSpPr>
         <p:spPr>
           <a:xfrm>
-            <a:off x="7315200" y="4626864"/>
+            <a:off x="7315200" y="3703320"/>
             <a:ext cx="4343400" cy="320040"/>
           </a:xfrm>
           <a:prstGeom prst="rect">
@@ -11342,8 +11576,8 @@
           <p:nvPr/>
         </p:nvGraphicFramePr>
         <p:xfrm>
-          <a:off x="7315200" y="5038344"/>
-          <a:ext cx="4343400" cy="1316736"/>
+          <a:off x="7315200" y="4069080"/>
+          <a:ext cx="4343400" cy="1389888"/>
         </p:xfrm>
         <a:graphic>
           <a:graphicData uri="http://schemas.openxmlformats.org/drawingml/2006/table">
@@ -11355,7 +11589,7 @@
                 <a:gridCol w="2514600"/>
                 <a:gridCol w="1828800"/>
               </a:tblGrid>
-              <a:tr h="329184">
+              <a:tr h="347472">
                 <a:tc>
                   <a:txBody>
                     <a:bodyPr wrap="square"/>
@@ -11403,7 +11637,7 @@
                   </a:tcPr>
                 </a:tc>
               </a:tr>
-              <a:tr h="329184">
+              <a:tr h="347472">
                 <a:tc>
                   <a:txBody>
                     <a:bodyPr wrap="square"/>
@@ -11451,7 +11685,7 @@
                   </a:tcPr>
                 </a:tc>
               </a:tr>
-              <a:tr h="329184">
+              <a:tr h="347472">
                 <a:tc>
                   <a:txBody>
                     <a:bodyPr wrap="square"/>
@@ -11499,7 +11733,7 @@
                   </a:tcPr>
                 </a:tc>
               </a:tr>
-              <a:tr h="329184">
+              <a:tr h="347472">
                 <a:tc>
                   <a:txBody>
                     <a:bodyPr wrap="square"/>
@@ -11991,7 +12225,7 @@
       </p:sp>
       <p:pic>
         <p:nvPicPr>
-          <p:cNvPr id="5" name="Picture 4" descr="ui_clean_big_01.png"/>
+          <p:cNvPr id="5" name="Picture 4" descr="ui_clean_big_01_auc.png"/>
           <p:cNvPicPr>
             <a:picLocks noChangeAspect="1"/>
           </p:cNvPicPr>
@@ -12047,7 +12281,7 @@
                 </a:solidFill>
                 <a:latin typeface="Arial"/>
               </a:rPr>
-              <a:t>Рисунок 17 – clean_big, запас 0,1 с: 63,5 % вчасно, пропущено 0</a:t>
+              <a:t>Рисунок 17 – clean_big, запас 0,1 с: 63,5 % вчасно, пропущено 0 (поле «поріг» замінено на ROC AUC; офіційні набори toksym)</a:t>
             </a:r>
           </a:p>
         </p:txBody>
@@ -12060,7 +12294,7 @@
         </p:nvSpPr>
         <p:spPr>
           <a:xfrm>
-            <a:off x="521207" y="2599877"/>
+            <a:off x="521207" y="2663885"/>
             <a:ext cx="6547103" cy="899093"/>
           </a:xfrm>
           <a:prstGeom prst="rect">
@@ -12098,7 +12332,7 @@
       </p:sp>
       <p:pic>
         <p:nvPicPr>
-          <p:cNvPr id="8" name="Picture 7" descr="ui_clean_big_003.png"/>
+          <p:cNvPr id="8" name="Picture 7" descr="ui_clean_big_003_auc.png"/>
           <p:cNvPicPr>
             <a:picLocks noChangeAspect="1"/>
           </p:cNvPicPr>
@@ -12112,7 +12346,7 @@
         </p:blipFill>
         <p:spPr>
           <a:xfrm>
-            <a:off x="548640" y="2627309"/>
+            <a:off x="548640" y="2691317"/>
             <a:ext cx="6492240" cy="844229"/>
           </a:xfrm>
           <a:prstGeom prst="rect">
@@ -12128,7 +12362,7 @@
         </p:nvSpPr>
         <p:spPr>
           <a:xfrm>
-            <a:off x="548640" y="3526402"/>
+            <a:off x="548640" y="3590410"/>
             <a:ext cx="6492240" cy="365760"/>
           </a:xfrm>
           <a:prstGeom prst="rect">
@@ -12154,14 +12388,108 @@
                 </a:solidFill>
                 <a:latin typeface="Arial"/>
               </a:rPr>
-              <a:t>Рисунок 18 – clean_big, запас 30 мс: 96,8 % вчасно, пропущено 0</a:t>
-            </a:r>
-          </a:p>
-        </p:txBody>
-      </p:sp>
-      <p:sp>
-        <p:nvSpPr>
-          <p:cNvPr id="10" name="TextBox 9"/>
+              <a:t>Рисунок 18 – clean_big, запас 30 мс: 96,8 % вчасно, пропущено 0 (поле «поріг» замінено на ROC AUC; офіційні набори toksym)</a:t>
+            </a:r>
+          </a:p>
+        </p:txBody>
+      </p:sp>
+      <p:sp>
+        <p:nvSpPr>
+          <p:cNvPr id="10" name="Rectangle 9"/>
+          <p:cNvSpPr/>
+          <p:nvPr/>
+        </p:nvSpPr>
+        <p:spPr>
+          <a:xfrm>
+            <a:off x="548640" y="4084186"/>
+            <a:ext cx="6492240" cy="914400"/>
+          </a:xfrm>
+          <a:prstGeom prst="rect">
+            <a:avLst/>
+          </a:prstGeom>
+          <a:solidFill>
+            <a:srgbClr val="F8FAFC"/>
+          </a:solidFill>
+          <a:ln w="12700">
+            <a:solidFill>
+              <a:srgbClr val="E2E8F0"/>
+            </a:solidFill>
+          </a:ln>
+          <a:effectLst/>
+        </p:spPr>
+        <p:style>
+          <a:lnRef idx="1">
+            <a:schemeClr val="accent1"/>
+          </a:lnRef>
+          <a:fillRef idx="3">
+            <a:schemeClr val="accent1"/>
+          </a:fillRef>
+          <a:effectRef idx="2">
+            <a:schemeClr val="accent1"/>
+          </a:effectRef>
+          <a:fontRef idx="minor">
+            <a:schemeClr val="lt1"/>
+          </a:fontRef>
+        </p:style>
+        <p:txBody>
+          <a:bodyPr rtlCol="0" anchor="ctr"/>
+          <a:lstStyle/>
+          <a:p>
+            <a:pPr algn="ctr"/>
+          </a:p>
+        </p:txBody>
+      </p:sp>
+      <p:sp>
+        <p:nvSpPr>
+          <p:cNvPr id="11" name="TextBox 10"/>
+          <p:cNvSpPr txBox="1"/>
+          <p:nvPr/>
+        </p:nvSpPr>
+        <p:spPr>
+          <a:xfrm>
+            <a:off x="685800" y="4175626"/>
+            <a:ext cx="6217920" cy="731520"/>
+          </a:xfrm>
+          <a:prstGeom prst="rect">
+            <a:avLst/>
+          </a:prstGeom>
+          <a:noFill/>
+        </p:spPr>
+        <p:txBody>
+          <a:bodyPr wrap="square" anchor="t" lIns="0" rIns="0" tIns="0" bIns="0">
+            <a:spAutoFit/>
+          </a:bodyPr>
+          <a:lstStyle/>
+          <a:p>
+            <a:pPr algn="l">
+              <a:spcAft>
+                <a:spcPts val="0"/>
+              </a:spcAft>
+            </a:pPr>
+            <a:r>
+              <a:rPr sz="1100" b="1" i="0">
+                <a:solidFill>
+                  <a:srgbClr val="0E7490"/>
+                </a:solidFill>
+                <a:latin typeface="Arial"/>
+              </a:rPr>
+              <a:t>Чому ROC AUC замість порогу. </a:t>
+            </a:r>
+            <a:r>
+              <a:rPr sz="1100" b="0" i="0">
+                <a:solidFill>
+                  <a:srgbClr val="475569"/>
+                </a:solidFill>
+                <a:latin typeface="Arial"/>
+              </a:rPr>
+              <a:t>Поріг спрацювання неінформативний: його підбирає засіб оцінки під бюджет хибних тривог, шкала ймовірностей у моделей різна, а на малій вибірці поріг задає один тихий розряд. Тому на скриншотах замість порогу наведено ROC AUC, яка від порогу не залежить.</a:t>
+            </a:r>
+          </a:p>
+        </p:txBody>
+      </p:sp>
+      <p:sp>
+        <p:nvSpPr>
+          <p:cNvPr id="12" name="TextBox 11"/>
           <p:cNvSpPr txBox="1"/>
           <p:nvPr/>
         </p:nvSpPr>
@@ -12259,13 +12587,13 @@
       </p:sp>
       <p:sp>
         <p:nvSpPr>
-          <p:cNvPr id="11" name="TextBox 10"/>
+          <p:cNvPr id="13" name="TextBox 12"/>
           <p:cNvSpPr txBox="1"/>
           <p:nvPr/>
         </p:nvSpPr>
         <p:spPr>
           <a:xfrm>
-            <a:off x="7315200" y="4626864"/>
+            <a:off x="7315200" y="3703320"/>
             <a:ext cx="4343400" cy="320040"/>
           </a:xfrm>
           <a:prstGeom prst="rect">
@@ -12298,15 +12626,15 @@
       </p:sp>
       <p:graphicFrame>
         <p:nvGraphicFramePr>
-          <p:cNvPr id="12" name="Table 11"/>
+          <p:cNvPr id="14" name="Table 13"/>
           <p:cNvGraphicFramePr>
             <a:graphicFrameLocks noGrp="1"/>
           </p:cNvGraphicFramePr>
           <p:nvPr/>
         </p:nvGraphicFramePr>
         <p:xfrm>
-          <a:off x="7315200" y="5038344"/>
-          <a:ext cx="4343400" cy="1316736"/>
+          <a:off x="7315200" y="4069080"/>
+          <a:ext cx="4343400" cy="1389888"/>
         </p:xfrm>
         <a:graphic>
           <a:graphicData uri="http://schemas.openxmlformats.org/drawingml/2006/table">
@@ -12318,7 +12646,7 @@
                 <a:gridCol w="2514600"/>
                 <a:gridCol w="1828800"/>
               </a:tblGrid>
-              <a:tr h="329184">
+              <a:tr h="347472">
                 <a:tc>
                   <a:txBody>
                     <a:bodyPr wrap="square"/>
@@ -12366,7 +12694,7 @@
                   </a:tcPr>
                 </a:tc>
               </a:tr>
-              <a:tr h="329184">
+              <a:tr h="347472">
                 <a:tc>
                   <a:txBody>
                     <a:bodyPr wrap="square"/>
@@ -12414,7 +12742,7 @@
                   </a:tcPr>
                 </a:tc>
               </a:tr>
-              <a:tr h="329184">
+              <a:tr h="347472">
                 <a:tc>
                   <a:txBody>
                     <a:bodyPr wrap="square"/>
@@ -12462,7 +12790,7 @@
                   </a:tcPr>
                 </a:tc>
               </a:tr>
-              <a:tr h="329184">
+              <a:tr h="347472">
                 <a:tc>
                   <a:txBody>
                     <a:bodyPr wrap="square"/>
@@ -12574,7 +12902,7 @@
                 </a:solidFill>
                 <a:latin typeface="Arial"/>
               </a:rPr>
-              <a:t>Додаток А.6 Ансамбль ens5: відхилено за вимогою реального часу</a:t>
+              <a:t>Додаток А.6 Ансамбль ens5: відхилено через затримку</a:t>
             </a:r>
           </a:p>
         </p:txBody>
@@ -12664,7 +12992,7 @@
       </p:sp>
       <p:pic>
         <p:nvPicPr>
-          <p:cNvPr id="5" name="Picture 4" descr="card_ens5.png"/>
+          <p:cNvPr id="5" name="Picture 4" descr="card_ens5_auc.png"/>
           <p:cNvPicPr>
             <a:picLocks noChangeAspect="1"/>
           </p:cNvPicPr>
@@ -12720,14 +13048,108 @@
                 </a:solidFill>
                 <a:latin typeface="Arial"/>
               </a:rPr>
-              <a:t>Рисунок 19 – ens5: 60,3 % вчасно на спільній вибірці, пропущено 0</a:t>
-            </a:r>
-          </a:p>
-        </p:txBody>
-      </p:sp>
-      <p:sp>
-        <p:nvSpPr>
-          <p:cNvPr id="7" name="TextBox 6"/>
+              <a:t>Рисунок 19 – ens5: 60,3 % вчасно на спільній вибірці, пропущено 0 (поле «поріг» замінено на ROC AUC; офіційні набори toksym)</a:t>
+            </a:r>
+          </a:p>
+        </p:txBody>
+      </p:sp>
+      <p:sp>
+        <p:nvSpPr>
+          <p:cNvPr id="7" name="Rectangle 6"/>
+          <p:cNvSpPr/>
+          <p:nvPr/>
+        </p:nvSpPr>
+        <p:spPr>
+          <a:xfrm>
+            <a:off x="548640" y="2673029"/>
+            <a:ext cx="6492240" cy="914400"/>
+          </a:xfrm>
+          <a:prstGeom prst="rect">
+            <a:avLst/>
+          </a:prstGeom>
+          <a:solidFill>
+            <a:srgbClr val="F8FAFC"/>
+          </a:solidFill>
+          <a:ln w="12700">
+            <a:solidFill>
+              <a:srgbClr val="E2E8F0"/>
+            </a:solidFill>
+          </a:ln>
+          <a:effectLst/>
+        </p:spPr>
+        <p:style>
+          <a:lnRef idx="1">
+            <a:schemeClr val="accent1"/>
+          </a:lnRef>
+          <a:fillRef idx="3">
+            <a:schemeClr val="accent1"/>
+          </a:fillRef>
+          <a:effectRef idx="2">
+            <a:schemeClr val="accent1"/>
+          </a:effectRef>
+          <a:fontRef idx="minor">
+            <a:schemeClr val="lt1"/>
+          </a:fontRef>
+        </p:style>
+        <p:txBody>
+          <a:bodyPr rtlCol="0" anchor="ctr"/>
+          <a:lstStyle/>
+          <a:p>
+            <a:pPr algn="ctr"/>
+          </a:p>
+        </p:txBody>
+      </p:sp>
+      <p:sp>
+        <p:nvSpPr>
+          <p:cNvPr id="8" name="TextBox 7"/>
+          <p:cNvSpPr txBox="1"/>
+          <p:nvPr/>
+        </p:nvSpPr>
+        <p:spPr>
+          <a:xfrm>
+            <a:off x="685800" y="2764469"/>
+            <a:ext cx="6217920" cy="731520"/>
+          </a:xfrm>
+          <a:prstGeom prst="rect">
+            <a:avLst/>
+          </a:prstGeom>
+          <a:noFill/>
+        </p:spPr>
+        <p:txBody>
+          <a:bodyPr wrap="square" anchor="t" lIns="0" rIns="0" tIns="0" bIns="0">
+            <a:spAutoFit/>
+          </a:bodyPr>
+          <a:lstStyle/>
+          <a:p>
+            <a:pPr algn="l">
+              <a:spcAft>
+                <a:spcPts val="0"/>
+              </a:spcAft>
+            </a:pPr>
+            <a:r>
+              <a:rPr sz="1100" b="1" i="0">
+                <a:solidFill>
+                  <a:srgbClr val="0E7490"/>
+                </a:solidFill>
+                <a:latin typeface="Arial"/>
+              </a:rPr>
+              <a:t>Чому ROC AUC замість порогу. </a:t>
+            </a:r>
+            <a:r>
+              <a:rPr sz="1100" b="0" i="0">
+                <a:solidFill>
+                  <a:srgbClr val="475569"/>
+                </a:solidFill>
+                <a:latin typeface="Arial"/>
+              </a:rPr>
+              <a:t>Поріг спрацювання неінформативний: його підбирає засіб оцінки під бюджет хибних тривог, шкала ймовірностей у моделей різна, а на малій вибірці поріг задає один тихий розряд. Тому на скриншотах замість порогу наведено ROC AUC, яка від порогу не залежить.</a:t>
+            </a:r>
+          </a:p>
+        </p:txBody>
+      </p:sp>
+      <p:sp>
+        <p:nvSpPr>
+          <p:cNvPr id="9" name="TextBox 8"/>
           <p:cNvSpPr txBox="1"/>
           <p:nvPr/>
         </p:nvSpPr>
@@ -12825,13 +13247,13 @@
       </p:sp>
       <p:sp>
         <p:nvSpPr>
-          <p:cNvPr id="8" name="TextBox 7"/>
+          <p:cNvPr id="10" name="TextBox 9"/>
           <p:cNvSpPr txBox="1"/>
           <p:nvPr/>
         </p:nvSpPr>
         <p:spPr>
           <a:xfrm>
-            <a:off x="7315200" y="4626864"/>
+            <a:off x="7315200" y="3703320"/>
             <a:ext cx="4343400" cy="320040"/>
           </a:xfrm>
           <a:prstGeom prst="rect">
@@ -12864,15 +13286,15 @@
       </p:sp>
       <p:graphicFrame>
         <p:nvGraphicFramePr>
-          <p:cNvPr id="9" name="Table 8"/>
+          <p:cNvPr id="11" name="Table 10"/>
           <p:cNvGraphicFramePr>
             <a:graphicFrameLocks noGrp="1"/>
           </p:cNvGraphicFramePr>
           <p:nvPr/>
         </p:nvGraphicFramePr>
         <p:xfrm>
-          <a:off x="7315200" y="5038344"/>
-          <a:ext cx="4343400" cy="1316736"/>
+          <a:off x="7315200" y="4069080"/>
+          <a:ext cx="4343400" cy="1389888"/>
         </p:xfrm>
         <a:graphic>
           <a:graphicData uri="http://schemas.openxmlformats.org/drawingml/2006/table">
@@ -12884,7 +13306,7 @@
                 <a:gridCol w="2514600"/>
                 <a:gridCol w="1828800"/>
               </a:tblGrid>
-              <a:tr h="329184">
+              <a:tr h="347472">
                 <a:tc>
                   <a:txBody>
                     <a:bodyPr wrap="square"/>
@@ -12932,7 +13354,7 @@
                   </a:tcPr>
                 </a:tc>
               </a:tr>
-              <a:tr h="329184">
+              <a:tr h="347472">
                 <a:tc>
                   <a:txBody>
                     <a:bodyPr wrap="square"/>
@@ -12980,7 +13402,7 @@
                   </a:tcPr>
                 </a:tc>
               </a:tr>
-              <a:tr h="329184">
+              <a:tr h="347472">
                 <a:tc>
                   <a:txBody>
                     <a:bodyPr wrap="square"/>
@@ -13028,7 +13450,7 @@
                   </a:tcPr>
                 </a:tc>
               </a:tr>
-              <a:tr h="329184">
+              <a:tr h="347472">
                 <a:tc>
                   <a:txBody>
                     <a:bodyPr wrap="square"/>
@@ -13230,7 +13652,7 @@
       </p:sp>
       <p:pic>
         <p:nvPicPr>
-          <p:cNvPr id="5" name="Picture 4" descr="card_sim_impact.png"/>
+          <p:cNvPr id="5" name="Picture 4" descr="card_sim_impact_auc.png"/>
           <p:cNvPicPr>
             <a:picLocks noChangeAspect="1"/>
           </p:cNvPicPr>
@@ -13286,14 +13708,108 @@
                 </a:solidFill>
                 <a:latin typeface="Arial"/>
               </a:rPr>
-              <a:t>Рисунок 20 – ImpactNet у симуляторі fusion-sim, 50 розрядів</a:t>
-            </a:r>
-          </a:p>
-        </p:txBody>
-      </p:sp>
-      <p:sp>
-        <p:nvSpPr>
-          <p:cNvPr id="7" name="TextBox 6"/>
+              <a:t>Рисунок 20 – ImpactNet у симуляторі fusion-sim, 50 розрядів (поле «поріг» замінено на ROC AUC; ROC AUC цього прогону)</a:t>
+            </a:r>
+          </a:p>
+        </p:txBody>
+      </p:sp>
+      <p:sp>
+        <p:nvSpPr>
+          <p:cNvPr id="7" name="Rectangle 6"/>
+          <p:cNvSpPr/>
+          <p:nvPr/>
+        </p:nvSpPr>
+        <p:spPr>
+          <a:xfrm>
+            <a:off x="548640" y="5038582"/>
+            <a:ext cx="6492240" cy="914400"/>
+          </a:xfrm>
+          <a:prstGeom prst="rect">
+            <a:avLst/>
+          </a:prstGeom>
+          <a:solidFill>
+            <a:srgbClr val="F8FAFC"/>
+          </a:solidFill>
+          <a:ln w="12700">
+            <a:solidFill>
+              <a:srgbClr val="E2E8F0"/>
+            </a:solidFill>
+          </a:ln>
+          <a:effectLst/>
+        </p:spPr>
+        <p:style>
+          <a:lnRef idx="1">
+            <a:schemeClr val="accent1"/>
+          </a:lnRef>
+          <a:fillRef idx="3">
+            <a:schemeClr val="accent1"/>
+          </a:fillRef>
+          <a:effectRef idx="2">
+            <a:schemeClr val="accent1"/>
+          </a:effectRef>
+          <a:fontRef idx="minor">
+            <a:schemeClr val="lt1"/>
+          </a:fontRef>
+        </p:style>
+        <p:txBody>
+          <a:bodyPr rtlCol="0" anchor="ctr"/>
+          <a:lstStyle/>
+          <a:p>
+            <a:pPr algn="ctr"/>
+          </a:p>
+        </p:txBody>
+      </p:sp>
+      <p:sp>
+        <p:nvSpPr>
+          <p:cNvPr id="8" name="TextBox 7"/>
+          <p:cNvSpPr txBox="1"/>
+          <p:nvPr/>
+        </p:nvSpPr>
+        <p:spPr>
+          <a:xfrm>
+            <a:off x="685800" y="5130022"/>
+            <a:ext cx="6217920" cy="731520"/>
+          </a:xfrm>
+          <a:prstGeom prst="rect">
+            <a:avLst/>
+          </a:prstGeom>
+          <a:noFill/>
+        </p:spPr>
+        <p:txBody>
+          <a:bodyPr wrap="square" anchor="t" lIns="0" rIns="0" tIns="0" bIns="0">
+            <a:spAutoFit/>
+          </a:bodyPr>
+          <a:lstStyle/>
+          <a:p>
+            <a:pPr algn="l">
+              <a:spcAft>
+                <a:spcPts val="0"/>
+              </a:spcAft>
+            </a:pPr>
+            <a:r>
+              <a:rPr sz="1100" b="1" i="0">
+                <a:solidFill>
+                  <a:srgbClr val="0E7490"/>
+                </a:solidFill>
+                <a:latin typeface="Arial"/>
+              </a:rPr>
+              <a:t>Чому ROC AUC замість порогу. </a:t>
+            </a:r>
+            <a:r>
+              <a:rPr sz="1100" b="0" i="0">
+                <a:solidFill>
+                  <a:srgbClr val="475569"/>
+                </a:solidFill>
+                <a:latin typeface="Arial"/>
+              </a:rPr>
+              <a:t>Поріг спрацювання неінформативний: його підбирає засіб оцінки під бюджет хибних тривог, шкала ймовірностей у моделей різна, а на малій вибірці поріг задає один тихий розряд. Тому на скриншотах замість порогу наведено ROC AUC, яка від порогу не залежить.</a:t>
+            </a:r>
+          </a:p>
+        </p:txBody>
+      </p:sp>
+      <p:sp>
+        <p:nvSpPr>
+          <p:cNvPr id="9" name="TextBox 8"/>
           <p:cNvSpPr txBox="1"/>
           <p:nvPr/>
         </p:nvSpPr>
@@ -13391,13 +13907,13 @@
       </p:sp>
       <p:sp>
         <p:nvSpPr>
-          <p:cNvPr id="8" name="TextBox 7"/>
+          <p:cNvPr id="10" name="TextBox 9"/>
           <p:cNvSpPr txBox="1"/>
           <p:nvPr/>
         </p:nvSpPr>
         <p:spPr>
           <a:xfrm>
-            <a:off x="7315200" y="4956048"/>
+            <a:off x="7315200" y="3703320"/>
             <a:ext cx="4343400" cy="320040"/>
           </a:xfrm>
           <a:prstGeom prst="rect">
@@ -13430,15 +13946,15 @@
       </p:sp>
       <p:graphicFrame>
         <p:nvGraphicFramePr>
-          <p:cNvPr id="9" name="Table 8"/>
+          <p:cNvPr id="11" name="Table 10"/>
           <p:cNvGraphicFramePr>
             <a:graphicFrameLocks noGrp="1"/>
           </p:cNvGraphicFramePr>
           <p:nvPr/>
         </p:nvGraphicFramePr>
         <p:xfrm>
-          <a:off x="7315200" y="5367528"/>
-          <a:ext cx="4343400" cy="987552"/>
+          <a:off x="7315200" y="4069080"/>
+          <a:ext cx="4343400" cy="1389888"/>
         </p:xfrm>
         <a:graphic>
           <a:graphicData uri="http://schemas.openxmlformats.org/drawingml/2006/table">
@@ -13450,7 +13966,7 @@
                 <a:gridCol w="2514600"/>
                 <a:gridCol w="1828800"/>
               </a:tblGrid>
-              <a:tr h="329184">
+              <a:tr h="347472">
                 <a:tc>
                   <a:txBody>
                     <a:bodyPr wrap="square"/>
@@ -13498,7 +14014,7 @@
                   </a:tcPr>
                 </a:tc>
               </a:tr>
-              <a:tr h="329184">
+              <a:tr h="347472">
                 <a:tc>
                   <a:txBody>
                     <a:bodyPr wrap="square"/>
@@ -13546,7 +14062,55 @@
                   </a:tcPr>
                 </a:tc>
               </a:tr>
-              <a:tr h="329184">
+              <a:tr h="347472">
+                <a:tc>
+                  <a:txBody>
+                    <a:bodyPr wrap="square"/>
+                    <a:lstStyle/>
+                    <a:p>
+                      <a:pPr algn="l"/>
+                      <a:r>
+                        <a:rPr sz="1100" b="1">
+                          <a:solidFill>
+                            <a:srgbClr val="0F172A"/>
+                          </a:solidFill>
+                          <a:latin typeface="Arial"/>
+                        </a:rPr>
+                        <a:t>ROC AUC, 0,1 с (цей прогін)</a:t>
+                      </a:r>
+                    </a:p>
+                  </a:txBody>
+                  <a:tcPr marL="91440" marR="91440" marT="27432" marB="27432" anchor="ctr">
+                    <a:solidFill>
+                      <a:srgbClr val="FFFFFF"/>
+                    </a:solidFill>
+                  </a:tcPr>
+                </a:tc>
+                <a:tc>
+                  <a:txBody>
+                    <a:bodyPr wrap="square"/>
+                    <a:lstStyle/>
+                    <a:p>
+                      <a:pPr algn="ctr"/>
+                      <a:r>
+                        <a:rPr sz="1200" b="0">
+                          <a:solidFill>
+                            <a:srgbClr val="0F172A"/>
+                          </a:solidFill>
+                          <a:latin typeface="Arial"/>
+                        </a:rPr>
+                        <a:t>0,885</a:t>
+                      </a:r>
+                    </a:p>
+                  </a:txBody>
+                  <a:tcPr marL="91440" marR="91440" marT="27432" marB="27432" anchor="ctr">
+                    <a:solidFill>
+                      <a:srgbClr val="FFFFFF"/>
+                    </a:solidFill>
+                  </a:tcPr>
+                </a:tc>
+              </a:tr>
+              <a:tr h="347472">
                 <a:tc>
                   <a:txBody>
                     <a:bodyPr wrap="square"/>

--- a/docs/presentation.pptx
+++ b/docs/presentation.pptx
@@ -873,7 +873,7 @@
           <a:lstStyle/>
           <a:p>
             <a:r>
-              <a:t>≈50 с. Симулятор fusion-sim з керуванням у реальному часі: модель тривоги, ImpactNet і порадник. Замкнений контур на 40 розрядах: 11 зривів без керування, 5 з керуванням. Атрибуція на новому рушії: 10 з 12 механізмів, межа Грінвальда і радіація — без помилок; кінк недооцінено. Рушій не моделює шум діагностик, тому калібрування моделей, навчених на шумних даних, переноситься не повністю; наступний крок — додати вимірювальний тракт toksym.</a:t>
+              <a:t>≈50 с. Симулятор fusion-sim з керуванням у реальному часі: модель тривоги, ImpactNet і порадник. Замкнений контур на 40 розрядах: 11 зривів без керування, 5 з керуванням. Атрибуція на новому рушії, 200 розрядів: 34 з 49; Грінвальд 16 з 16, радіація 14 з 17, кінк лише 4 з 16. Рушій не моделює шум діагностик, тому калібрування моделей, навчених на шумних даних, переноситься не повністю; наступний крок — додати вимірювальний тракт toksym.</a:t>
             </a:r>
           </a:p>
         </p:txBody>
@@ -8331,7 +8331,7 @@
                 </a:solidFill>
                 <a:latin typeface="Arial"/>
               </a:rPr>
-              <a:t>Рисунок 8 – Атрибуція механізмів зриву в симуляторі fusion-sim (50 розрядів): 10 з 12 (поле «поріг» замінено на ROC AUC цього прогону)</a:t>
+              <a:t>Рисунок 8 – Атрибуція механізмів зриву в симуляторі fusion-sim, пробний прогін 50 розрядів: 10 з 12 (поле «поріг» замінено на ROC AUC цього прогону)</a:t>
             </a:r>
           </a:p>
         </p:txBody>
@@ -8493,8 +8493,8 @@
         </p:nvSpPr>
         <p:spPr>
           <a:xfrm>
-            <a:off x="6949440" y="2880360"/>
-            <a:ext cx="4709160" cy="2286000"/>
+            <a:off x="6949440" y="2743200"/>
+            <a:ext cx="4709160" cy="2743200"/>
           </a:xfrm>
           <a:prstGeom prst="rect">
             <a:avLst/>
@@ -8509,7 +8509,7 @@
           <a:p>
             <a:pPr algn="l">
               <a:spcAft>
-                <a:spcPts val="1000"/>
+                <a:spcPts val="800"/>
               </a:spcAft>
             </a:pPr>
             <a:r>
@@ -8534,7 +8534,7 @@
           <a:p>
             <a:pPr algn="l">
               <a:spcAft>
-                <a:spcPts val="1000"/>
+                <a:spcPts val="800"/>
               </a:spcAft>
             </a:pPr>
             <a:r>
@@ -8544,7 +8544,7 @@
                 </a:solidFill>
                 <a:latin typeface="Arial"/>
               </a:rPr>
-              <a:t>Обмеження – </a:t>
+              <a:t>Атрибуція, 200 розрядів – </a:t>
             </a:r>
             <a:r>
               <a:rPr sz="1300" b="0" i="0">
@@ -8553,13 +8553,13 @@
                 </a:solidFill>
                 <a:latin typeface="Arial"/>
               </a:rPr>
-              <a:t>40 розрядів; рушій без шуму діагностик; кінк недооцінено (0 з 2)</a:t>
+              <a:t>механізм визначено в 34 з 49 зривів (69 %): Грінвальд 16 з 16, радіація 14 з 17, кінк 4 з 16</a:t>
             </a:r>
           </a:p>
           <a:p>
             <a:pPr algn="l">
               <a:spcAft>
-                <a:spcPts val="1000"/>
+                <a:spcPts val="800"/>
               </a:spcAft>
             </a:pPr>
             <a:r>
@@ -8569,6 +8569,31 @@
                 </a:solidFill>
                 <a:latin typeface="Arial"/>
               </a:rPr>
+              <a:t>Обмеження – </a:t>
+            </a:r>
+            <a:r>
+              <a:rPr sz="1300" b="0" i="0">
+                <a:solidFill>
+                  <a:srgbClr val="0F172A"/>
+                </a:solidFill>
+                <a:latin typeface="Arial"/>
+              </a:rPr>
+              <a:t>рушій без шуму діагностик; частку кінку (q95) недооцінено: 18 % проти 32 %</a:t>
+            </a:r>
+          </a:p>
+          <a:p>
+            <a:pPr algn="l">
+              <a:spcAft>
+                <a:spcPts val="800"/>
+              </a:spcAft>
+            </a:pPr>
+            <a:r>
+              <a:rPr sz="1300" b="1" i="0">
+                <a:solidFill>
+                  <a:srgbClr val="0F172A"/>
+                </a:solidFill>
+                <a:latin typeface="Arial"/>
+              </a:rPr>
               <a:t>Наступні кроки – </a:t>
             </a:r>
             <a:r>
@@ -8578,7 +8603,64 @@
                 </a:solidFill>
                 <a:latin typeface="Arial"/>
               </a:rPr>
-              <a:t>вимірювальний тракт toksym у fusion-sim, 200 розрядів, оцінка ціни керування</a:t>
+              <a:t>вимірювальний тракт toksym у fusion-sim, калібрування q95, оцінка ціни керування</a:t>
+            </a:r>
+          </a:p>
+        </p:txBody>
+      </p:sp>
+      <p:sp>
+        <p:nvSpPr>
+          <p:cNvPr id="11" name="TextBox 10"/>
+          <p:cNvSpPr txBox="1"/>
+          <p:nvPr/>
+        </p:nvSpPr>
+        <p:spPr>
+          <a:xfrm>
+            <a:off x="6949440" y="5623560"/>
+            <a:ext cx="4709160" cy="640080"/>
+          </a:xfrm>
+          <a:prstGeom prst="rect">
+            <a:avLst/>
+          </a:prstGeom>
+          <a:noFill/>
+        </p:spPr>
+        <p:txBody>
+          <a:bodyPr wrap="square" anchor="t" lIns="0" rIns="0" tIns="0" bIns="0">
+            <a:spAutoFit/>
+          </a:bodyPr>
+          <a:lstStyle/>
+          <a:p>
+            <a:pPr algn="l">
+              <a:spcAft>
+                <a:spcPts val="0"/>
+              </a:spcAft>
+            </a:pPr>
+            <a:r>
+              <a:rPr sz="1000" b="1" i="0">
+                <a:solidFill>
+                  <a:srgbClr val="475569"/>
+                </a:solidFill>
+                <a:latin typeface="Arial"/>
+              </a:rPr>
+              <a:t>Симулятор: </a:t>
+            </a:r>
+            <a:r>
+              <a:rPr sz="1000" b="0" i="0">
+                <a:solidFill>
+                  <a:srgbClr val="1D4ED8"/>
+                </a:solidFill>
+                <a:latin typeface="Arial"/>
+              </a:rPr>
+              <a:t>github.com/lurbaby/plasma_simulator</a:t>
+            </a:r>
+            <a:r>
+              <a:rPr sz="1000" b="0" i="0">
+                <a:solidFill>
+                  <a:srgbClr val="475569"/>
+                </a:solidFill>
+                <a:latin typeface="Arial"/>
+              </a:rPr>
+              <a:t> (форк fusionsimulator.io, D. Burgess, GPL-3.0; командою додано залік toksym і керування актуаторами з моделі)</a:t>
             </a:r>
           </a:p>
         </p:txBody>
@@ -8696,7 +8778,7 @@
         <p:spPr>
           <a:xfrm>
             <a:off x="548640" y="1325880"/>
-            <a:ext cx="7863840" cy="4206240"/>
+            <a:ext cx="6035040" cy="4206240"/>
           </a:xfrm>
           <a:prstGeom prst="rect">
             <a:avLst/>
@@ -8812,7 +8894,7 @@
       </p:sp>
       <p:pic>
         <p:nvPicPr>
-          <p:cNvPr id="5" name="Picture 4" descr="repo_qr.png"/>
+          <p:cNvPr id="5" name="Picture 4" descr="qr_plasma-disruption-prediction.png"/>
           <p:cNvPicPr>
             <a:picLocks noChangeAspect="1"/>
           </p:cNvPicPr>
@@ -8826,8 +8908,8 @@
         </p:blipFill>
         <p:spPr>
           <a:xfrm>
-            <a:off x="9052560" y="1371600"/>
-            <a:ext cx="2468880" cy="2468880"/>
+            <a:off x="7086600" y="1371600"/>
+            <a:ext cx="2103120" cy="2103120"/>
           </a:xfrm>
           <a:prstGeom prst="rect">
             <a:avLst/>
@@ -8842,8 +8924,8 @@
         </p:nvSpPr>
         <p:spPr>
           <a:xfrm>
-            <a:off x="8595360" y="3977639"/>
-            <a:ext cx="3383280" cy="822960"/>
+            <a:off x="6812280" y="3611880"/>
+            <a:ext cx="2651760" cy="1097280"/>
           </a:xfrm>
           <a:prstGeom prst="rect">
             <a:avLst/>
@@ -8874,24 +8956,121 @@
           <a:p>
             <a:pPr algn="ctr">
               <a:spcAft>
+                <a:spcPts val="200"/>
+              </a:spcAft>
+            </a:pPr>
+            <a:r>
+              <a:rPr sz="1000" b="0" i="0">
+                <a:solidFill>
+                  <a:srgbClr val="1D4ED8"/>
+                </a:solidFill>
+                <a:latin typeface="Arial"/>
+              </a:rPr>
+              <a:t>github.com/
+llllenah/plasma-disruption-prediction</a:t>
+            </a:r>
+          </a:p>
+        </p:txBody>
+      </p:sp>
+      <p:pic>
+        <p:nvPicPr>
+          <p:cNvPr id="7" name="Picture 6" descr="qr_plasma_simulator.png"/>
+          <p:cNvPicPr>
+            <a:picLocks noChangeAspect="1"/>
+          </p:cNvPicPr>
+          <p:nvPr/>
+        </p:nvPicPr>
+        <p:blipFill>
+          <a:blip r:embed="rId4"/>
+          <a:stretch>
+            <a:fillRect/>
+          </a:stretch>
+        </p:blipFill>
+        <p:spPr>
+          <a:xfrm>
+            <a:off x="9646919" y="1371600"/>
+            <a:ext cx="2103120" cy="2103120"/>
+          </a:xfrm>
+          <a:prstGeom prst="rect">
+            <a:avLst/>
+          </a:prstGeom>
+        </p:spPr>
+      </p:pic>
+      <p:sp>
+        <p:nvSpPr>
+          <p:cNvPr id="8" name="TextBox 7"/>
+          <p:cNvSpPr txBox="1"/>
+          <p:nvPr/>
+        </p:nvSpPr>
+        <p:spPr>
+          <a:xfrm>
+            <a:off x="9372600" y="3611880"/>
+            <a:ext cx="2651760" cy="1097280"/>
+          </a:xfrm>
+          <a:prstGeom prst="rect">
+            <a:avLst/>
+          </a:prstGeom>
+          <a:noFill/>
+        </p:spPr>
+        <p:txBody>
+          <a:bodyPr wrap="square" anchor="t" lIns="0" rIns="0" tIns="0" bIns="0">
+            <a:spAutoFit/>
+          </a:bodyPr>
+          <a:lstStyle/>
+          <a:p>
+            <a:pPr algn="ctr">
+              <a:spcAft>
+                <a:spcPts val="200"/>
+              </a:spcAft>
+            </a:pPr>
+            <a:r>
+              <a:rPr sz="1300" b="1" i="0">
+                <a:solidFill>
+                  <a:srgbClr val="0F172A"/>
+                </a:solidFill>
+                <a:latin typeface="Arial"/>
+              </a:rPr>
+              <a:t>Симулятор з керуванням</a:t>
+            </a:r>
+          </a:p>
+          <a:p>
+            <a:pPr algn="ctr">
+              <a:spcAft>
+                <a:spcPts val="200"/>
+              </a:spcAft>
+            </a:pPr>
+            <a:r>
+              <a:rPr sz="1000" b="0" i="0">
+                <a:solidFill>
+                  <a:srgbClr val="1D4ED8"/>
+                </a:solidFill>
+                <a:latin typeface="Arial"/>
+              </a:rPr>
+              <a:t>github.com/
+lurbaby/plasma_simulator</a:t>
+            </a:r>
+          </a:p>
+          <a:p>
+            <a:pPr algn="ctr">
+              <a:spcAft>
                 <a:spcPts val="0"/>
               </a:spcAft>
             </a:pPr>
             <a:r>
               <a:rPr sz="1000" b="0" i="0">
                 <a:solidFill>
-                  <a:srgbClr val="1D4ED8"/>
-                </a:solidFill>
-                <a:latin typeface="Arial"/>
-              </a:rPr>
-              <a:t>github.com/llllenah/plasma-disruption-prediction</a:t>
-            </a:r>
-          </a:p>
-        </p:txBody>
-      </p:sp>
-      <p:sp>
-        <p:nvSpPr>
-          <p:cNvPr id="7" name="TextBox 6"/>
+                  <a:srgbClr val="475569"/>
+                </a:solidFill>
+                <a:latin typeface="Arial"/>
+              </a:rPr>
+              <a:t>форк fusionsimulator.io, GPL-3.0</a:t>
+            </a:r>
+          </a:p>
+        </p:txBody>
+      </p:sp>
+      <p:sp>
+        <p:nvSpPr>
+          <p:cNvPr id="9" name="TextBox 8"/>
           <p:cNvSpPr txBox="1"/>
           <p:nvPr/>
         </p:nvSpPr>
@@ -13708,7 +13887,7 @@
                 </a:solidFill>
                 <a:latin typeface="Arial"/>
               </a:rPr>
-              <a:t>Рисунок 20 – ImpactNet у симуляторі fusion-sim, 50 розрядів (поле «поріг» замінено на ROC AUC; ROC AUC цього прогону)</a:t>
+              <a:t>Рисунок 20 – ImpactNet у симуляторі fusion-sim, пробний прогін 50 розрядів (поле «поріг» замінено на ROC AUC; ROC AUC цього прогону)</a:t>
             </a:r>
           </a:p>
         </p:txBody>
@@ -13875,7 +14054,7 @@
                 </a:solidFill>
                 <a:latin typeface="Arial"/>
               </a:rPr>
-              <a:t>механізм визначено в 10 з 12 зривів: межа Грінвальда 7 з 7, радіація 3 з 3</a:t>
+              <a:t>200 розрядів: механізм визначено в 34 з 49 зривів; Грінвальд 16 з 16, радіація 14 з 17</a:t>
             </a:r>
           </a:p>
           <a:p>
@@ -13900,7 +14079,7 @@
                 </a:solidFill>
                 <a:latin typeface="Arial"/>
               </a:rPr>
-              <a:t>кінк 0 з 2: частку q95 недооцінено (17 % → 5 %); потрібне калібрування для безшумного рушія</a:t>
+              <a:t>кінк 4 з 16: частку q95 недооцінено (32 % → 18 %); на toksym 49 з 49, тож причина в зсуві рушія, потрібне калібрування</a:t>
             </a:r>
           </a:p>
         </p:txBody>
@@ -13954,7 +14133,7 @@
         </p:nvGraphicFramePr>
         <p:xfrm>
           <a:off x="7315200" y="4069080"/>
-          <a:ext cx="4343400" cy="1389888"/>
+          <a:ext cx="4343400" cy="2084832"/>
         </p:xfrm>
         <a:graphic>
           <a:graphicData uri="http://schemas.openxmlformats.org/drawingml/2006/table">
@@ -14028,7 +14207,55 @@
                           </a:solidFill>
                           <a:latin typeface="Arial"/>
                         </a:rPr>
-                        <a:t>механізм визначено</a:t>
+                        <a:t>механізм, 200 розрядів</a:t>
+                      </a:r>
+                    </a:p>
+                  </a:txBody>
+                  <a:tcPr marL="91440" marR="91440" marT="27432" marB="27432" anchor="ctr">
+                    <a:solidFill>
+                      <a:srgbClr val="FFFFFF"/>
+                    </a:solidFill>
+                  </a:tcPr>
+                </a:tc>
+                <a:tc>
+                  <a:txBody>
+                    <a:bodyPr wrap="square"/>
+                    <a:lstStyle/>
+                    <a:p>
+                      <a:pPr algn="ctr"/>
+                      <a:r>
+                        <a:rPr sz="1200" b="0">
+                          <a:solidFill>
+                            <a:srgbClr val="0F172A"/>
+                          </a:solidFill>
+                          <a:latin typeface="Arial"/>
+                        </a:rPr>
+                        <a:t>34 з 49 (69 %)</a:t>
+                      </a:r>
+                    </a:p>
+                  </a:txBody>
+                  <a:tcPr marL="91440" marR="91440" marT="27432" marB="27432" anchor="ctr">
+                    <a:solidFill>
+                      <a:srgbClr val="FFFFFF"/>
+                    </a:solidFill>
+                  </a:tcPr>
+                </a:tc>
+              </a:tr>
+              <a:tr h="347472">
+                <a:tc>
+                  <a:txBody>
+                    <a:bodyPr wrap="square"/>
+                    <a:lstStyle/>
+                    <a:p>
+                      <a:pPr algn="l"/>
+                      <a:r>
+                        <a:rPr sz="1100" b="1">
+                          <a:solidFill>
+                            <a:srgbClr val="0F172A"/>
+                          </a:solidFill>
+                          <a:latin typeface="Arial"/>
+                        </a:rPr>
+                        <a:t>механізм, 50 розрядів</a:t>
                       </a:r>
                     </a:p>
                   </a:txBody>
@@ -14076,7 +14303,55 @@
                           </a:solidFill>
                           <a:latin typeface="Arial"/>
                         </a:rPr>
-                        <a:t>ROC AUC, 0,1 с (цей прогін)</a:t>
+                        <a:t>вчасно, 0,1 с, 200 розрядів</a:t>
+                      </a:r>
+                    </a:p>
+                  </a:txBody>
+                  <a:tcPr marL="91440" marR="91440" marT="27432" marB="27432" anchor="ctr">
+                    <a:solidFill>
+                      <a:srgbClr val="FFFFFF"/>
+                    </a:solidFill>
+                  </a:tcPr>
+                </a:tc>
+                <a:tc>
+                  <a:txBody>
+                    <a:bodyPr wrap="square"/>
+                    <a:lstStyle/>
+                    <a:p>
+                      <a:pPr algn="ctr"/>
+                      <a:r>
+                        <a:rPr sz="1200" b="0">
+                          <a:solidFill>
+                            <a:srgbClr val="0F172A"/>
+                          </a:solidFill>
+                          <a:latin typeface="Arial"/>
+                        </a:rPr>
+                        <a:t>51,0 %</a:t>
+                      </a:r>
+                    </a:p>
+                  </a:txBody>
+                  <a:tcPr marL="91440" marR="91440" marT="27432" marB="27432" anchor="ctr">
+                    <a:solidFill>
+                      <a:srgbClr val="FFFFFF"/>
+                    </a:solidFill>
+                  </a:tcPr>
+                </a:tc>
+              </a:tr>
+              <a:tr h="347472">
+                <a:tc>
+                  <a:txBody>
+                    <a:bodyPr wrap="square"/>
+                    <a:lstStyle/>
+                    <a:p>
+                      <a:pPr algn="l"/>
+                      <a:r>
+                        <a:rPr sz="1100" b="1">
+                          <a:solidFill>
+                            <a:srgbClr val="0F172A"/>
+                          </a:solidFill>
+                          <a:latin typeface="Arial"/>
+                        </a:rPr>
+                        <a:t>ROC AUC, 0,1 с (50 розрядів)</a:t>
                       </a:r>
                     </a:p>
                   </a:txBody>
@@ -14124,7 +14399,7 @@
                           </a:solidFill>
                           <a:latin typeface="Arial"/>
                         </a:rPr>
-                        <a:t>R² λ (toksym, тест)</a:t>
+                        <a:t>механізм, toksym (тест)</a:t>
                       </a:r>
                     </a:p>
                   </a:txBody>
@@ -14147,7 +14422,7 @@
                           </a:solidFill>
                           <a:latin typeface="Arial"/>
                         </a:rPr>
-                        <a:t>0,996</a:t>
+                        <a:t>49 з 49</a:t>
                       </a:r>
                     </a:p>
                   </a:txBody>

--- a/docs/presentation.pptx
+++ b/docs/presentation.pptx
@@ -21,12 +21,6 @@
     <p:sldId id="269" r:id="rId21"/>
     <p:sldId id="270" r:id="rId22"/>
     <p:sldId id="271" r:id="rId23"/>
-    <p:sldId id="272" r:id="rId24"/>
-    <p:sldId id="273" r:id="rId25"/>
-    <p:sldId id="274" r:id="rId26"/>
-    <p:sldId id="275" r:id="rId27"/>
-    <p:sldId id="276" r:id="rId28"/>
-    <p:sldId id="277" r:id="rId29"/>
   </p:sldIdLst>
   <p:sldSz cx="12191695" cy="6858000" type="screen4x3"/>
   <p:notesSz cx="6858000" cy="9144000"/>
@@ -943,7 +937,7 @@
           <a:lstStyle/>
           <a:p>
             <a:r>
-              <a:t>≈40 с. Модель раннього попередження без формул і без підказок симулятора: об'єм 0,924 проти 0,765, ROC AUC 0,998 на 30 мс. ImpactNet визначає механізм зриву: 49 з 49. Замкнений контур удвічі зменшує кількість зривів. Поріг спрацювання неінформативний, моделі порівнюються за ROC AUC. Код і звіти — у репозиторії.</a:t>
+              <a:t>≈50 с. Моделі навчені на toksym; fusion-sim — інший рушій, без шуму діагностик. 200 розрядів, жодного донавчання. Модель тривоги переноситься: ROC AUC 0,902 проти 0,934 на запасі 0,1 с. ImpactNet: межа Грінвальда 16 з 16, радіація 14 з 17, кінк лише 4 з 16. В 11 з 16 кінкових зривів мережа видає ту саму частку Грінвальда 97,6 % — це насичення входу, а не фізика. Масштабування часток не рятує: 36 з 49 при 5-кратній перевірці. Отже, потрібне донавчання на даних нового рушія.</a:t>
             </a:r>
           </a:p>
         </p:txBody>
@@ -1013,217 +1007,7 @@
           <a:lstStyle/>
           <a:p>
             <a:r>
-              <a:t>Картка моделі для відповідей на питання журі.</a:t>
-            </a:r>
-          </a:p>
-        </p:txBody>
-      </p:sp>
-      <p:sp>
-        <p:nvSpPr>
-          <p:cNvPr id="4" name="Slide Number Placeholder 3"/>
-          <p:cNvSpPr>
-            <a:spLocks noGrp="1"/>
-          </p:cNvSpPr>
-          <p:nvPr>
-            <p:ph type="sldNum" idx="5" sz="quarter"/>
-          </p:nvPr>
-        </p:nvSpPr>
-        <p:spPr/>
-      </p:sp>
-    </p:spTree>
-  </p:cSld>
-  <p:clrMapOvr>
-    <a:masterClrMapping/>
-  </p:clrMapOvr>
-</p:notes>
-</file>
-
-<file path=ppt/notesSlides/notesSlide17.xml><?xml version="1.0" encoding="utf-8"?>
-<p:notes xmlns:a="http://schemas.openxmlformats.org/drawingml/2006/main" xmlns:p="http://schemas.openxmlformats.org/presentationml/2006/main" xmlns:r="http://schemas.openxmlformats.org/officeDocument/2006/relationships">
-  <p:cSld>
-    <p:spTree>
-      <p:nvGrpSpPr>
-        <p:cNvPr id="1" name=""/>
-        <p:cNvGrpSpPr/>
-        <p:nvPr/>
-      </p:nvGrpSpPr>
-      <p:grpSpPr>
-        <a:xfrm>
-          <a:off x="0" y="0"/>
-          <a:ext cx="0" cy="0"/>
-          <a:chOff x="0" y="0"/>
-          <a:chExt cx="0" cy="0"/>
-        </a:xfrm>
-      </p:grpSpPr>
-      <p:sp>
-        <p:nvSpPr>
-          <p:cNvPr id="2" name="Slide Image Placeholder 1"/>
-          <p:cNvSpPr>
-            <a:spLocks noGrp="1"/>
-          </p:cNvSpPr>
-          <p:nvPr>
-            <p:ph type="sldImg" idx="2"/>
-          </p:nvPr>
-        </p:nvSpPr>
-        <p:spPr/>
-      </p:sp>
-      <p:sp>
-        <p:nvSpPr>
-          <p:cNvPr id="3" name="Notes Placeholder 2"/>
-          <p:cNvSpPr>
-            <a:spLocks noGrp="1"/>
-          </p:cNvSpPr>
-          <p:nvPr>
-            <p:ph type="body" idx="3" sz="quarter"/>
-          </p:nvPr>
-        </p:nvSpPr>
-        <p:spPr/>
-        <p:txBody>
-          <a:bodyPr/>
-          <a:lstStyle/>
-          <a:p>
-            <a:r>
-              <a:t>Картка моделі для відповідей на питання журі.</a:t>
-            </a:r>
-          </a:p>
-        </p:txBody>
-      </p:sp>
-      <p:sp>
-        <p:nvSpPr>
-          <p:cNvPr id="4" name="Slide Number Placeholder 3"/>
-          <p:cNvSpPr>
-            <a:spLocks noGrp="1"/>
-          </p:cNvSpPr>
-          <p:nvPr>
-            <p:ph type="sldNum" idx="5" sz="quarter"/>
-          </p:nvPr>
-        </p:nvSpPr>
-        <p:spPr/>
-      </p:sp>
-    </p:spTree>
-  </p:cSld>
-  <p:clrMapOvr>
-    <a:masterClrMapping/>
-  </p:clrMapOvr>
-</p:notes>
-</file>
-
-<file path=ppt/notesSlides/notesSlide18.xml><?xml version="1.0" encoding="utf-8"?>
-<p:notes xmlns:a="http://schemas.openxmlformats.org/drawingml/2006/main" xmlns:p="http://schemas.openxmlformats.org/presentationml/2006/main" xmlns:r="http://schemas.openxmlformats.org/officeDocument/2006/relationships">
-  <p:cSld>
-    <p:spTree>
-      <p:nvGrpSpPr>
-        <p:cNvPr id="1" name=""/>
-        <p:cNvGrpSpPr/>
-        <p:nvPr/>
-      </p:nvGrpSpPr>
-      <p:grpSpPr>
-        <a:xfrm>
-          <a:off x="0" y="0"/>
-          <a:ext cx="0" cy="0"/>
-          <a:chOff x="0" y="0"/>
-          <a:chExt cx="0" cy="0"/>
-        </a:xfrm>
-      </p:grpSpPr>
-      <p:sp>
-        <p:nvSpPr>
-          <p:cNvPr id="2" name="Slide Image Placeholder 1"/>
-          <p:cNvSpPr>
-            <a:spLocks noGrp="1"/>
-          </p:cNvSpPr>
-          <p:nvPr>
-            <p:ph type="sldImg" idx="2"/>
-          </p:nvPr>
-        </p:nvSpPr>
-        <p:spPr/>
-      </p:sp>
-      <p:sp>
-        <p:nvSpPr>
-          <p:cNvPr id="3" name="Notes Placeholder 2"/>
-          <p:cNvSpPr>
-            <a:spLocks noGrp="1"/>
-          </p:cNvSpPr>
-          <p:nvPr>
-            <p:ph type="body" idx="3" sz="quarter"/>
-          </p:nvPr>
-        </p:nvSpPr>
-        <p:spPr/>
-        <p:txBody>
-          <a:bodyPr/>
-          <a:lstStyle/>
-          <a:p>
-            <a:r>
-              <a:t>Картка моделі для відповідей на питання журі.</a:t>
-            </a:r>
-          </a:p>
-        </p:txBody>
-      </p:sp>
-      <p:sp>
-        <p:nvSpPr>
-          <p:cNvPr id="4" name="Slide Number Placeholder 3"/>
-          <p:cNvSpPr>
-            <a:spLocks noGrp="1"/>
-          </p:cNvSpPr>
-          <p:nvPr>
-            <p:ph type="sldNum" idx="5" sz="quarter"/>
-          </p:nvPr>
-        </p:nvSpPr>
-        <p:spPr/>
-      </p:sp>
-    </p:spTree>
-  </p:cSld>
-  <p:clrMapOvr>
-    <a:masterClrMapping/>
-  </p:clrMapOvr>
-</p:notes>
-</file>
-
-<file path=ppt/notesSlides/notesSlide19.xml><?xml version="1.0" encoding="utf-8"?>
-<p:notes xmlns:a="http://schemas.openxmlformats.org/drawingml/2006/main" xmlns:p="http://schemas.openxmlformats.org/presentationml/2006/main" xmlns:r="http://schemas.openxmlformats.org/officeDocument/2006/relationships">
-  <p:cSld>
-    <p:spTree>
-      <p:nvGrpSpPr>
-        <p:cNvPr id="1" name=""/>
-        <p:cNvGrpSpPr/>
-        <p:nvPr/>
-      </p:nvGrpSpPr>
-      <p:grpSpPr>
-        <a:xfrm>
-          <a:off x="0" y="0"/>
-          <a:ext cx="0" cy="0"/>
-          <a:chOff x="0" y="0"/>
-          <a:chExt cx="0" cy="0"/>
-        </a:xfrm>
-      </p:grpSpPr>
-      <p:sp>
-        <p:nvSpPr>
-          <p:cNvPr id="2" name="Slide Image Placeholder 1"/>
-          <p:cNvSpPr>
-            <a:spLocks noGrp="1"/>
-          </p:cNvSpPr>
-          <p:nvPr>
-            <p:ph type="sldImg" idx="2"/>
-          </p:nvPr>
-        </p:nvSpPr>
-        <p:spPr/>
-      </p:sp>
-      <p:sp>
-        <p:nvSpPr>
-          <p:cNvPr id="3" name="Notes Placeholder 2"/>
-          <p:cNvSpPr>
-            <a:spLocks noGrp="1"/>
-          </p:cNvSpPr>
-          <p:nvPr>
-            <p:ph type="body" idx="3" sz="quarter"/>
-          </p:nvPr>
-        </p:nvSpPr>
-        <p:spPr/>
-        <p:txBody>
-          <a:bodyPr/>
-          <a:lstStyle/>
-          <a:p>
-            <a:r>
-              <a:t>Картка моделі для відповідей на питання журі.</a:t>
+              <a:t>≈40 с. Модель раннього попередження без формул і без підказок симулятора: об'єм 0,924 проти 0,765, ROC AUC 0,998 на 30 мс. ImpactNet визначає механізм зриву: 49 з 49. Замкнений контур удвічі зменшує кількість зривів; на іншому рушії тривога переноситься без донавчання. Поріг спрацювання неінформативний, моделі порівнюються за ROC AUC. Код і звіти — у репозиторії.</a:t>
             </a:r>
           </a:p>
         </p:txBody>
@@ -1318,216 +1102,6 @@
 </p:notes>
 </file>
 
-<file path=ppt/notesSlides/notesSlide20.xml><?xml version="1.0" encoding="utf-8"?>
-<p:notes xmlns:a="http://schemas.openxmlformats.org/drawingml/2006/main" xmlns:p="http://schemas.openxmlformats.org/presentationml/2006/main" xmlns:r="http://schemas.openxmlformats.org/officeDocument/2006/relationships">
-  <p:cSld>
-    <p:spTree>
-      <p:nvGrpSpPr>
-        <p:cNvPr id="1" name=""/>
-        <p:cNvGrpSpPr/>
-        <p:nvPr/>
-      </p:nvGrpSpPr>
-      <p:grpSpPr>
-        <a:xfrm>
-          <a:off x="0" y="0"/>
-          <a:ext cx="0" cy="0"/>
-          <a:chOff x="0" y="0"/>
-          <a:chExt cx="0" cy="0"/>
-        </a:xfrm>
-      </p:grpSpPr>
-      <p:sp>
-        <p:nvSpPr>
-          <p:cNvPr id="2" name="Slide Image Placeholder 1"/>
-          <p:cNvSpPr>
-            <a:spLocks noGrp="1"/>
-          </p:cNvSpPr>
-          <p:nvPr>
-            <p:ph type="sldImg" idx="2"/>
-          </p:nvPr>
-        </p:nvSpPr>
-        <p:spPr/>
-      </p:sp>
-      <p:sp>
-        <p:nvSpPr>
-          <p:cNvPr id="3" name="Notes Placeholder 2"/>
-          <p:cNvSpPr>
-            <a:spLocks noGrp="1"/>
-          </p:cNvSpPr>
-          <p:nvPr>
-            <p:ph type="body" idx="3" sz="quarter"/>
-          </p:nvPr>
-        </p:nvSpPr>
-        <p:spPr/>
-        <p:txBody>
-          <a:bodyPr/>
-          <a:lstStyle/>
-          <a:p>
-            <a:r>
-              <a:t>Картка моделі для відповідей на питання журі.</a:t>
-            </a:r>
-          </a:p>
-        </p:txBody>
-      </p:sp>
-      <p:sp>
-        <p:nvSpPr>
-          <p:cNvPr id="4" name="Slide Number Placeholder 3"/>
-          <p:cNvSpPr>
-            <a:spLocks noGrp="1"/>
-          </p:cNvSpPr>
-          <p:nvPr>
-            <p:ph type="sldNum" idx="5" sz="quarter"/>
-          </p:nvPr>
-        </p:nvSpPr>
-        <p:spPr/>
-      </p:sp>
-    </p:spTree>
-  </p:cSld>
-  <p:clrMapOvr>
-    <a:masterClrMapping/>
-  </p:clrMapOvr>
-</p:notes>
-</file>
-
-<file path=ppt/notesSlides/notesSlide21.xml><?xml version="1.0" encoding="utf-8"?>
-<p:notes xmlns:a="http://schemas.openxmlformats.org/drawingml/2006/main" xmlns:p="http://schemas.openxmlformats.org/presentationml/2006/main" xmlns:r="http://schemas.openxmlformats.org/officeDocument/2006/relationships">
-  <p:cSld>
-    <p:spTree>
-      <p:nvGrpSpPr>
-        <p:cNvPr id="1" name=""/>
-        <p:cNvGrpSpPr/>
-        <p:nvPr/>
-      </p:nvGrpSpPr>
-      <p:grpSpPr>
-        <a:xfrm>
-          <a:off x="0" y="0"/>
-          <a:ext cx="0" cy="0"/>
-          <a:chOff x="0" y="0"/>
-          <a:chExt cx="0" cy="0"/>
-        </a:xfrm>
-      </p:grpSpPr>
-      <p:sp>
-        <p:nvSpPr>
-          <p:cNvPr id="2" name="Slide Image Placeholder 1"/>
-          <p:cNvSpPr>
-            <a:spLocks noGrp="1"/>
-          </p:cNvSpPr>
-          <p:nvPr>
-            <p:ph type="sldImg" idx="2"/>
-          </p:nvPr>
-        </p:nvSpPr>
-        <p:spPr/>
-      </p:sp>
-      <p:sp>
-        <p:nvSpPr>
-          <p:cNvPr id="3" name="Notes Placeholder 2"/>
-          <p:cNvSpPr>
-            <a:spLocks noGrp="1"/>
-          </p:cNvSpPr>
-          <p:nvPr>
-            <p:ph type="body" idx="3" sz="quarter"/>
-          </p:nvPr>
-        </p:nvSpPr>
-        <p:spPr/>
-        <p:txBody>
-          <a:bodyPr/>
-          <a:lstStyle/>
-          <a:p>
-            <a:r>
-              <a:t>Картка моделі для відповідей на питання журі.</a:t>
-            </a:r>
-          </a:p>
-        </p:txBody>
-      </p:sp>
-      <p:sp>
-        <p:nvSpPr>
-          <p:cNvPr id="4" name="Slide Number Placeholder 3"/>
-          <p:cNvSpPr>
-            <a:spLocks noGrp="1"/>
-          </p:cNvSpPr>
-          <p:nvPr>
-            <p:ph type="sldNum" idx="5" sz="quarter"/>
-          </p:nvPr>
-        </p:nvSpPr>
-        <p:spPr/>
-      </p:sp>
-    </p:spTree>
-  </p:cSld>
-  <p:clrMapOvr>
-    <a:masterClrMapping/>
-  </p:clrMapOvr>
-</p:notes>
-</file>
-
-<file path=ppt/notesSlides/notesSlide22.xml><?xml version="1.0" encoding="utf-8"?>
-<p:notes xmlns:a="http://schemas.openxmlformats.org/drawingml/2006/main" xmlns:p="http://schemas.openxmlformats.org/presentationml/2006/main" xmlns:r="http://schemas.openxmlformats.org/officeDocument/2006/relationships">
-  <p:cSld>
-    <p:spTree>
-      <p:nvGrpSpPr>
-        <p:cNvPr id="1" name=""/>
-        <p:cNvGrpSpPr/>
-        <p:nvPr/>
-      </p:nvGrpSpPr>
-      <p:grpSpPr>
-        <a:xfrm>
-          <a:off x="0" y="0"/>
-          <a:ext cx="0" cy="0"/>
-          <a:chOff x="0" y="0"/>
-          <a:chExt cx="0" cy="0"/>
-        </a:xfrm>
-      </p:grpSpPr>
-      <p:sp>
-        <p:nvSpPr>
-          <p:cNvPr id="2" name="Slide Image Placeholder 1"/>
-          <p:cNvSpPr>
-            <a:spLocks noGrp="1"/>
-          </p:cNvSpPr>
-          <p:nvPr>
-            <p:ph type="sldImg" idx="2"/>
-          </p:nvPr>
-        </p:nvSpPr>
-        <p:spPr/>
-      </p:sp>
-      <p:sp>
-        <p:nvSpPr>
-          <p:cNvPr id="3" name="Notes Placeholder 2"/>
-          <p:cNvSpPr>
-            <a:spLocks noGrp="1"/>
-          </p:cNvSpPr>
-          <p:nvPr>
-            <p:ph type="body" idx="3" sz="quarter"/>
-          </p:nvPr>
-        </p:nvSpPr>
-        <p:spPr/>
-        <p:txBody>
-          <a:bodyPr/>
-          <a:lstStyle/>
-          <a:p>
-            <a:r>
-              <a:t>Картка моделі для відповідей на питання журі.</a:t>
-            </a:r>
-          </a:p>
-        </p:txBody>
-      </p:sp>
-      <p:sp>
-        <p:nvSpPr>
-          <p:cNvPr id="4" name="Slide Number Placeholder 3"/>
-          <p:cNvSpPr>
-            <a:spLocks noGrp="1"/>
-          </p:cNvSpPr>
-          <p:nvPr>
-            <p:ph type="sldNum" idx="5" sz="quarter"/>
-          </p:nvPr>
-        </p:nvSpPr>
-        <p:spPr/>
-      </p:sp>
-    </p:spTree>
-  </p:cSld>
-  <p:clrMapOvr>
-    <a:masterClrMapping/>
-  </p:clrMapOvr>
-</p:notes>
-</file>
-
 <file path=ppt/notesSlides/notesSlide3.xml><?xml version="1.0" encoding="utf-8"?>
 <p:notes xmlns:a="http://schemas.openxmlformats.org/drawingml/2006/main" xmlns:p="http://schemas.openxmlformats.org/presentationml/2006/main" xmlns:r="http://schemas.openxmlformats.org/officeDocument/2006/relationships">
   <p:cSld>
@@ -1923,7 +1497,7 @@
           <a:lstStyle/>
           <a:p>
             <a:r>
-              <a:t>≈45 с. Усі моделі прогнано в інтерфейсі заліку на однакових 200 розрядах, запас 0,1 с, бюджет 5 %. XGBoost без пам'яті — 25–35 % і 5–9 пропущених зривів; наші моделі з пам'яттю на трьох масштабах і детектором передвісника — 57–67 % і 0–1 пропущених. Висновок: визначальна інформація — динаміка сигналу, а не статичні фізичні проксі. Картки моделей — у додатку А.</a:t>
+              <a:t>≈45 с. Усі моделі прогнано в інтерфейсі заліку на однакових 200 розрядах, запас 0,1 с, бюджет 5 %. XGBoost без пам'яті — 25–35 % і 5–9 пропущених зривів; наші моделі з пам'яттю на трьох масштабах і детектором передвісника — 57–64 % і 0–1 пропущених. Ансамбль трохи кращий, але втричі повільніший. Висновок: визначальна інформація — динаміка сигналу, а не статичні фізичні проксі. На скриншотах поле «поріг» замінено на ROC AUC.</a:t>
             </a:r>
           </a:p>
         </p:txBody>
@@ -5885,7 +5459,7 @@
                 </a:solidFill>
                 <a:latin typeface="Arial"/>
               </a:rPr>
-              <a:t>Таблиця 5 – Операційні межі та керувальні впливи</a:t>
+              <a:t>Таблиця 4 – Операційні межі та керувальні впливи</a:t>
             </a:r>
           </a:p>
         </p:txBody>
@@ -7809,7 +7383,7 @@
                 </a:solidFill>
                 <a:latin typeface="Arial"/>
               </a:rPr>
-              <a:t>Таблиця 6 – Атрибуція механізмів залежно від способу навчання</a:t>
+              <a:t>Таблиця 5 – Атрибуція механізмів залежно від способу навчання</a:t>
             </a:r>
           </a:p>
         </p:txBody>
@@ -8494,7 +8068,7 @@
         <p:spPr>
           <a:xfrm>
             <a:off x="6949440" y="2743200"/>
-            <a:ext cx="4709160" cy="2743200"/>
+            <a:ext cx="4709160" cy="2286000"/>
           </a:xfrm>
           <a:prstGeom prst="rect">
             <a:avLst/>
@@ -8528,7 +8102,7 @@
                 </a:solidFill>
                 <a:latin typeface="Arial"/>
               </a:rPr>
-              <a:t>діагностики, модель тривоги, ImpactNet, порадник, зміна уставок; цикл 5 мс</a:t>
+              <a:t>діагностики → модель тривоги (коли) → ImpactNet (чому) → порадник → зміна уставок; цикл 5 мс</a:t>
             </a:r>
           </a:p>
           <a:p>
@@ -8544,7 +8118,7 @@
                 </a:solidFill>
                 <a:latin typeface="Arial"/>
               </a:rPr>
-              <a:t>Атрибуція, 200 розрядів – </a:t>
+              <a:t>Порадник – </a:t>
             </a:r>
             <a:r>
               <a:rPr sz="1300" b="0" i="0">
@@ -8553,7 +8127,7 @@
                 </a:solidFill>
                 <a:latin typeface="Arial"/>
               </a:rPr>
-              <a:t>механізм визначено в 34 з 49 зривів (69 %): Грінвальд 16 з 16, радіація 14 з 17, кінк 4 з 16</a:t>
+              <a:t>головна загроза з часток ImpactNet → конкретна дія (наприклад, знизити уставку густини); автокерування виконує її, коли p моделі вище порогу</a:t>
             </a:r>
           </a:p>
           <a:p>
@@ -8578,32 +8152,7 @@
                 </a:solidFill>
                 <a:latin typeface="Arial"/>
               </a:rPr>
-              <a:t>рушій без шуму діагностик; частку кінку (q95) недооцінено: 18 % проти 32 %</a:t>
-            </a:r>
-          </a:p>
-          <a:p>
-            <a:pPr algn="l">
-              <a:spcAft>
-                <a:spcPts val="800"/>
-              </a:spcAft>
-            </a:pPr>
-            <a:r>
-              <a:rPr sz="1300" b="1" i="0">
-                <a:solidFill>
-                  <a:srgbClr val="0F172A"/>
-                </a:solidFill>
-                <a:latin typeface="Arial"/>
-              </a:rPr>
-              <a:t>Наступні кроки – </a:t>
-            </a:r>
-            <a:r>
-              <a:rPr sz="1300" b="0" i="0">
-                <a:solidFill>
-                  <a:srgbClr val="0F172A"/>
-                </a:solidFill>
-                <a:latin typeface="Arial"/>
-              </a:rPr>
-              <a:t>вимірювальний тракт toksym у fusion-sim, калібрування q95, оцінка ціни керування</a:t>
+              <a:t>40 розрядів; ціну керування (втрату продуктивності) ще не оцінено</a:t>
             </a:r>
           </a:p>
         </p:txBody>
@@ -8725,7 +8274,7 @@
                 </a:solidFill>
                 <a:latin typeface="Arial"/>
               </a:rPr>
-              <a:t>14 Висновки</a:t>
+              <a:t>14 Перенесення моделей на інший рушій без донавчання</a:t>
             </a:r>
           </a:p>
         </p:txBody>
@@ -8769,132 +8318,9 @@
           </a:p>
         </p:txBody>
       </p:sp>
-      <p:sp>
-        <p:nvSpPr>
-          <p:cNvPr id="4" name="TextBox 3"/>
-          <p:cNvSpPr txBox="1"/>
-          <p:nvPr/>
-        </p:nvSpPr>
-        <p:spPr>
-          <a:xfrm>
-            <a:off x="548640" y="1325880"/>
-            <a:ext cx="6035040" cy="4206240"/>
-          </a:xfrm>
-          <a:prstGeom prst="rect">
-            <a:avLst/>
-          </a:prstGeom>
-          <a:noFill/>
-        </p:spPr>
-        <p:txBody>
-          <a:bodyPr wrap="square" anchor="t" lIns="0" rIns="0" tIns="0" bIns="0">
-            <a:spAutoFit/>
-          </a:bodyPr>
-          <a:lstStyle/>
-          <a:p>
-            <a:pPr algn="l">
-              <a:spcAft>
-                <a:spcPts val="1200"/>
-              </a:spcAft>
-            </a:pPr>
-            <a:r>
-              <a:rPr sz="1500" b="1" i="0">
-                <a:solidFill>
-                  <a:srgbClr val="0F172A"/>
-                </a:solidFill>
-                <a:latin typeface="Arial"/>
-              </a:rPr>
-              <a:t>1. </a:t>
-            </a:r>
-            <a:r>
-              <a:rPr sz="1500" b="0" i="0">
-                <a:solidFill>
-                  <a:srgbClr val="0F172A"/>
-                </a:solidFill>
-                <a:latin typeface="Arial"/>
-              </a:rPr>
-              <a:t>Модель раннього попередження без формул шпаргалки і мітки сценарію досягає об'єму 0,924 (базове рішення 0,765) і ROC AUC 0,998 на запасі 30 мс.</a:t>
-            </a:r>
-          </a:p>
-          <a:p>
-            <a:pPr algn="l">
-              <a:spcAft>
-                <a:spcPts val="1200"/>
-              </a:spcAft>
-            </a:pPr>
-            <a:r>
-              <a:rPr sz="1500" b="1" i="0">
-                <a:solidFill>
-                  <a:srgbClr val="0F172A"/>
-                </a:solidFill>
-                <a:latin typeface="Arial"/>
-              </a:rPr>
-              <a:t>2. </a:t>
-            </a:r>
-            <a:r>
-              <a:rPr sz="1500" b="0" i="0">
-                <a:solidFill>
-                  <a:srgbClr val="0F172A"/>
-                </a:solidFill>
-                <a:latin typeface="Arial"/>
-              </a:rPr>
-              <a:t>Нейромережа ImpactNet визначає механізм зриву в 49 з 49 випадків і відтворює інтенсивність зриву з R² 0,996; з фізичним апріорі вона навчається і без розмітки λ.</a:t>
-            </a:r>
-          </a:p>
-          <a:p>
-            <a:pPr algn="l">
-              <a:spcAft>
-                <a:spcPts val="1200"/>
-              </a:spcAft>
-            </a:pPr>
-            <a:r>
-              <a:rPr sz="1500" b="1" i="0">
-                <a:solidFill>
-                  <a:srgbClr val="0F172A"/>
-                </a:solidFill>
-                <a:latin typeface="Arial"/>
-              </a:rPr>
-              <a:t>3. </a:t>
-            </a:r>
-            <a:r>
-              <a:rPr sz="1500" b="0" i="0">
-                <a:solidFill>
-                  <a:srgbClr val="0F172A"/>
-                </a:solidFill>
-                <a:latin typeface="Arial"/>
-              </a:rPr>
-              <a:t>Поріг спрацювання не характеризує модель; коректне порівняння — за ROC AUC.</a:t>
-            </a:r>
-          </a:p>
-          <a:p>
-            <a:pPr algn="l">
-              <a:spcAft>
-                <a:spcPts val="0"/>
-              </a:spcAft>
-            </a:pPr>
-            <a:r>
-              <a:rPr sz="1500" b="1" i="0">
-                <a:solidFill>
-                  <a:srgbClr val="0F172A"/>
-                </a:solidFill>
-                <a:latin typeface="Arial"/>
-              </a:rPr>
-              <a:t>4. </a:t>
-            </a:r>
-            <a:r>
-              <a:rPr sz="1500" b="0" i="0">
-                <a:solidFill>
-                  <a:srgbClr val="0F172A"/>
-                </a:solidFill>
-                <a:latin typeface="Arial"/>
-              </a:rPr>
-              <a:t>Замкнений контур керування в симуляторі зменшує кількість зривів з 11 до 5 на 40 розрядах; потрібна перевірка з шумом діагностик на більшій вибірці.</a:t>
-            </a:r>
-          </a:p>
-        </p:txBody>
-      </p:sp>
       <p:pic>
         <p:nvPicPr>
-          <p:cNvPr id="5" name="Picture 4" descr="qr_plasma-disruption-prediction.png"/>
+          <p:cNvPr id="4" name="Picture 3" descr="sim200.png"/>
           <p:cNvPicPr>
             <a:picLocks noChangeAspect="1"/>
           </p:cNvPicPr>
@@ -8908,8 +8334,8 @@
         </p:blipFill>
         <p:spPr>
           <a:xfrm>
-            <a:off x="7086600" y="1371600"/>
-            <a:ext cx="2103120" cy="2103120"/>
+            <a:off x="548640" y="1234440"/>
+            <a:ext cx="7589520" cy="3360613"/>
           </a:xfrm>
           <a:prstGeom prst="rect">
             <a:avLst/>
@@ -8918,166 +8344,14 @@
       </p:pic>
       <p:sp>
         <p:nvSpPr>
-          <p:cNvPr id="6" name="TextBox 5"/>
+          <p:cNvPr id="5" name="TextBox 4"/>
           <p:cNvSpPr txBox="1"/>
           <p:nvPr/>
         </p:nvSpPr>
         <p:spPr>
           <a:xfrm>
-            <a:off x="6812280" y="3611880"/>
-            <a:ext cx="2651760" cy="1097280"/>
-          </a:xfrm>
-          <a:prstGeom prst="rect">
-            <a:avLst/>
-          </a:prstGeom>
-          <a:noFill/>
-        </p:spPr>
-        <p:txBody>
-          <a:bodyPr wrap="square" anchor="t" lIns="0" rIns="0" tIns="0" bIns="0">
-            <a:spAutoFit/>
-          </a:bodyPr>
-          <a:lstStyle/>
-          <a:p>
-            <a:pPr algn="ctr">
-              <a:spcAft>
-                <a:spcPts val="200"/>
-              </a:spcAft>
-            </a:pPr>
-            <a:r>
-              <a:rPr sz="1300" b="1" i="0">
-                <a:solidFill>
-                  <a:srgbClr val="0F172A"/>
-                </a:solidFill>
-                <a:latin typeface="Arial"/>
-              </a:rPr>
-              <a:t>Код, моделі, звіти заліку</a:t>
-            </a:r>
-          </a:p>
-          <a:p>
-            <a:pPr algn="ctr">
-              <a:spcAft>
-                <a:spcPts val="200"/>
-              </a:spcAft>
-            </a:pPr>
-            <a:r>
-              <a:rPr sz="1000" b="0" i="0">
-                <a:solidFill>
-                  <a:srgbClr val="1D4ED8"/>
-                </a:solidFill>
-                <a:latin typeface="Arial"/>
-              </a:rPr>
-              <a:t>github.com/
-llllenah/plasma-disruption-prediction</a:t>
-            </a:r>
-          </a:p>
-        </p:txBody>
-      </p:sp>
-      <p:pic>
-        <p:nvPicPr>
-          <p:cNvPr id="7" name="Picture 6" descr="qr_plasma_simulator.png"/>
-          <p:cNvPicPr>
-            <a:picLocks noChangeAspect="1"/>
-          </p:cNvPicPr>
-          <p:nvPr/>
-        </p:nvPicPr>
-        <p:blipFill>
-          <a:blip r:embed="rId4"/>
-          <a:stretch>
-            <a:fillRect/>
-          </a:stretch>
-        </p:blipFill>
-        <p:spPr>
-          <a:xfrm>
-            <a:off x="9646919" y="1371600"/>
-            <a:ext cx="2103120" cy="2103120"/>
-          </a:xfrm>
-          <a:prstGeom prst="rect">
-            <a:avLst/>
-          </a:prstGeom>
-        </p:spPr>
-      </p:pic>
-      <p:sp>
-        <p:nvSpPr>
-          <p:cNvPr id="8" name="TextBox 7"/>
-          <p:cNvSpPr txBox="1"/>
-          <p:nvPr/>
-        </p:nvSpPr>
-        <p:spPr>
-          <a:xfrm>
-            <a:off x="9372600" y="3611880"/>
-            <a:ext cx="2651760" cy="1097280"/>
-          </a:xfrm>
-          <a:prstGeom prst="rect">
-            <a:avLst/>
-          </a:prstGeom>
-          <a:noFill/>
-        </p:spPr>
-        <p:txBody>
-          <a:bodyPr wrap="square" anchor="t" lIns="0" rIns="0" tIns="0" bIns="0">
-            <a:spAutoFit/>
-          </a:bodyPr>
-          <a:lstStyle/>
-          <a:p>
-            <a:pPr algn="ctr">
-              <a:spcAft>
-                <a:spcPts val="200"/>
-              </a:spcAft>
-            </a:pPr>
-            <a:r>
-              <a:rPr sz="1300" b="1" i="0">
-                <a:solidFill>
-                  <a:srgbClr val="0F172A"/>
-                </a:solidFill>
-                <a:latin typeface="Arial"/>
-              </a:rPr>
-              <a:t>Симулятор з керуванням</a:t>
-            </a:r>
-          </a:p>
-          <a:p>
-            <a:pPr algn="ctr">
-              <a:spcAft>
-                <a:spcPts val="200"/>
-              </a:spcAft>
-            </a:pPr>
-            <a:r>
-              <a:rPr sz="1000" b="0" i="0">
-                <a:solidFill>
-                  <a:srgbClr val="1D4ED8"/>
-                </a:solidFill>
-                <a:latin typeface="Arial"/>
-              </a:rPr>
-              <a:t>github.com/
-lurbaby/plasma_simulator</a:t>
-            </a:r>
-          </a:p>
-          <a:p>
-            <a:pPr algn="ctr">
-              <a:spcAft>
-                <a:spcPts val="0"/>
-              </a:spcAft>
-            </a:pPr>
-            <a:r>
-              <a:rPr sz="1000" b="0" i="0">
-                <a:solidFill>
-                  <a:srgbClr val="475569"/>
-                </a:solidFill>
-                <a:latin typeface="Arial"/>
-              </a:rPr>
-              <a:t>форк fusionsimulator.io, GPL-3.0</a:t>
-            </a:r>
-          </a:p>
-        </p:txBody>
-      </p:sp>
-      <p:sp>
-        <p:nvSpPr>
-          <p:cNvPr id="9" name="TextBox 8"/>
-          <p:cNvSpPr txBox="1"/>
-          <p:nvPr/>
-        </p:nvSpPr>
-        <p:spPr>
-          <a:xfrm>
-            <a:off x="548640" y="5715000"/>
-            <a:ext cx="7315200" cy="457200"/>
+            <a:off x="548640" y="4640773"/>
+            <a:ext cx="7589520" cy="365760"/>
           </a:xfrm>
           <a:prstGeom prst="rect">
             <a:avLst/>
@@ -9096,13 +8370,161 @@
               </a:spcAft>
             </a:pPr>
             <a:r>
-              <a:rPr sz="2000" b="1" i="0">
+              <a:rPr sz="1100" b="0" i="0">
+                <a:solidFill>
+                  <a:srgbClr val="475569"/>
+                </a:solidFill>
+                <a:latin typeface="Arial"/>
+              </a:rPr>
+              <a:t>Рисунок 9 – Модель v8 + ImpactNet у симуляторі fusion-sim, 200 розрядів, 49 зарахованих зривів (run.json прогону)</a:t>
+            </a:r>
+          </a:p>
+        </p:txBody>
+      </p:sp>
+      <p:sp>
+        <p:nvSpPr>
+          <p:cNvPr id="6" name="TextBox 5"/>
+          <p:cNvSpPr txBox="1"/>
+          <p:nvPr/>
+        </p:nvSpPr>
+        <p:spPr>
+          <a:xfrm>
+            <a:off x="8458200" y="1325880"/>
+            <a:ext cx="3200400" cy="3200400"/>
+          </a:xfrm>
+          <a:prstGeom prst="rect">
+            <a:avLst/>
+          </a:prstGeom>
+          <a:noFill/>
+        </p:spPr>
+        <p:txBody>
+          <a:bodyPr wrap="square" anchor="t" lIns="0" rIns="0" tIns="0" bIns="0">
+            <a:spAutoFit/>
+          </a:bodyPr>
+          <a:lstStyle/>
+          <a:p>
+            <a:pPr algn="l">
+              <a:spcAft>
+                <a:spcPts val="700"/>
+              </a:spcAft>
+            </a:pPr>
+            <a:r>
+              <a:rPr sz="1200" b="1" i="0">
                 <a:solidFill>
                   <a:srgbClr val="0F172A"/>
                 </a:solidFill>
                 <a:latin typeface="Arial"/>
               </a:rPr>
-              <a:t>Дякуємо за увагу</a:t>
+              <a:t>Тривога – </a:t>
+            </a:r>
+            <a:r>
+              <a:rPr sz="1200" b="0" i="0">
+                <a:solidFill>
+                  <a:srgbClr val="0F172A"/>
+                </a:solidFill>
+                <a:latin typeface="Arial"/>
+              </a:rPr>
+              <a:t>переноситься: ROC AUC 0,902 проти 0,934 на 0,1 с, 0,970 на 30 мс</a:t>
+            </a:r>
+          </a:p>
+          <a:p>
+            <a:pPr algn="l">
+              <a:spcAft>
+                <a:spcPts val="700"/>
+              </a:spcAft>
+            </a:pPr>
+            <a:r>
+              <a:rPr sz="1200" b="1" i="0">
+                <a:solidFill>
+                  <a:srgbClr val="0F172A"/>
+                </a:solidFill>
+                <a:latin typeface="Arial"/>
+              </a:rPr>
+              <a:t>Грінвальд, радіація – </a:t>
+            </a:r>
+            <a:r>
+              <a:rPr sz="1200" b="0" i="0">
+                <a:solidFill>
+                  <a:srgbClr val="0F172A"/>
+                </a:solidFill>
+                <a:latin typeface="Arial"/>
+              </a:rPr>
+              <a:t>переносяться: 16 з 16 і 14 з 17</a:t>
+            </a:r>
+          </a:p>
+          <a:p>
+            <a:pPr algn="l">
+              <a:spcAft>
+                <a:spcPts val="700"/>
+              </a:spcAft>
+            </a:pPr>
+            <a:r>
+              <a:rPr sz="1200" b="1" i="0">
+                <a:solidFill>
+                  <a:srgbClr val="0F172A"/>
+                </a:solidFill>
+                <a:latin typeface="Arial"/>
+              </a:rPr>
+              <a:t>Кінк – </a:t>
+            </a:r>
+            <a:r>
+              <a:rPr sz="1200" b="0" i="0">
+                <a:solidFill>
+                  <a:srgbClr val="0F172A"/>
+                </a:solidFill>
+                <a:latin typeface="Arial"/>
+              </a:rPr>
+              <a:t>4 з 16: в 11 розрядах мережа видає однакові 97,6 % Грінвальда, тобто насичений вхід, а не фізика</a:t>
+            </a:r>
+          </a:p>
+          <a:p>
+            <a:pPr algn="l">
+              <a:spcAft>
+                <a:spcPts val="700"/>
+              </a:spcAft>
+            </a:pPr>
+            <a:r>
+              <a:rPr sz="1200" b="1" i="0">
+                <a:solidFill>
+                  <a:srgbClr val="0F172A"/>
+                </a:solidFill>
+                <a:latin typeface="Arial"/>
+              </a:rPr>
+              <a:t>Калібрування – </a:t>
+            </a:r>
+            <a:r>
+              <a:rPr sz="1200" b="0" i="0">
+                <a:solidFill>
+                  <a:srgbClr val="0F172A"/>
+                </a:solidFill>
+                <a:latin typeface="Arial"/>
+              </a:rPr>
+              <a:t>масштабування часток не допомагає: 36 з 49 (5-кратна перевірка)</a:t>
+            </a:r>
+          </a:p>
+          <a:p>
+            <a:pPr algn="l">
+              <a:spcAft>
+                <a:spcPts val="700"/>
+              </a:spcAft>
+            </a:pPr>
+            <a:r>
+              <a:rPr sz="1200" b="1" i="0">
+                <a:solidFill>
+                  <a:srgbClr val="0F172A"/>
+                </a:solidFill>
+                <a:latin typeface="Arial"/>
+              </a:rPr>
+              <a:t>Далі – </a:t>
+            </a:r>
+            <a:r>
+              <a:rPr sz="1200" b="0" i="0">
+                <a:solidFill>
+                  <a:srgbClr val="0F172A"/>
+                </a:solidFill>
+                <a:latin typeface="Arial"/>
+              </a:rPr>
+              <a:t>донавчання ImpactNet на даних fusion-sim і шум діагностик у рушії</a:t>
             </a:r>
           </a:p>
         </p:txBody>
@@ -9167,7 +8589,7 @@
                 </a:solidFill>
                 <a:latin typeface="Arial"/>
               </a:rPr>
-              <a:t>Додаток А.1 XGBoost на сирих, фізичних і динамічних ознаках</a:t>
+              <a:t>15 Висновки</a:t>
             </a:r>
           </a:p>
         </p:txBody>
@@ -9213,51 +8635,130 @@
       </p:sp>
       <p:sp>
         <p:nvSpPr>
-          <p:cNvPr id="4" name="Rectangle 3"/>
-          <p:cNvSpPr/>
+          <p:cNvPr id="4" name="TextBox 3"/>
+          <p:cNvSpPr txBox="1"/>
           <p:nvPr/>
         </p:nvSpPr>
         <p:spPr>
           <a:xfrm>
-            <a:off x="521207" y="1252728"/>
-            <a:ext cx="5541264" cy="963000"/>
+            <a:off x="548640" y="1325880"/>
+            <a:ext cx="6035040" cy="4206240"/>
           </a:xfrm>
           <a:prstGeom prst="rect">
             <a:avLst/>
           </a:prstGeom>
           <a:noFill/>
-          <a:ln w="12700">
-            <a:solidFill>
-              <a:srgbClr val="E2E8F0"/>
-            </a:solidFill>
-          </a:ln>
-          <a:effectLst/>
-        </p:spPr>
-        <p:style>
-          <a:lnRef idx="1">
-            <a:schemeClr val="accent1"/>
-          </a:lnRef>
-          <a:fillRef idx="3">
-            <a:schemeClr val="accent1"/>
-          </a:fillRef>
-          <a:effectRef idx="2">
-            <a:schemeClr val="accent1"/>
-          </a:effectRef>
-          <a:fontRef idx="minor">
-            <a:schemeClr val="lt1"/>
-          </a:fontRef>
-        </p:style>
-        <p:txBody>
-          <a:bodyPr rtlCol="0" anchor="ctr"/>
-          <a:lstStyle/>
-          <a:p>
-            <a:pPr algn="ctr"/>
+        </p:spPr>
+        <p:txBody>
+          <a:bodyPr wrap="square" anchor="t" lIns="0" rIns="0" tIns="0" bIns="0">
+            <a:spAutoFit/>
+          </a:bodyPr>
+          <a:lstStyle/>
+          <a:p>
+            <a:pPr algn="l">
+              <a:spcAft>
+                <a:spcPts val="1200"/>
+              </a:spcAft>
+            </a:pPr>
+            <a:r>
+              <a:rPr sz="1500" b="1" i="0">
+                <a:solidFill>
+                  <a:srgbClr val="0F172A"/>
+                </a:solidFill>
+                <a:latin typeface="Arial"/>
+              </a:rPr>
+              <a:t>1. </a:t>
+            </a:r>
+            <a:r>
+              <a:rPr sz="1500" b="0" i="0">
+                <a:solidFill>
+                  <a:srgbClr val="0F172A"/>
+                </a:solidFill>
+                <a:latin typeface="Arial"/>
+              </a:rPr>
+              <a:t>Модель раннього попередження без формул шпаргалки і мітки сценарію досягає об'єму 0,924 (базове рішення 0,765) і ROC AUC 0,998 на запасі 30 мс.</a:t>
+            </a:r>
+          </a:p>
+          <a:p>
+            <a:pPr algn="l">
+              <a:spcAft>
+                <a:spcPts val="1200"/>
+              </a:spcAft>
+            </a:pPr>
+            <a:r>
+              <a:rPr sz="1500" b="1" i="0">
+                <a:solidFill>
+                  <a:srgbClr val="0F172A"/>
+                </a:solidFill>
+                <a:latin typeface="Arial"/>
+              </a:rPr>
+              <a:t>2. </a:t>
+            </a:r>
+            <a:r>
+              <a:rPr sz="1500" b="0" i="0">
+                <a:solidFill>
+                  <a:srgbClr val="0F172A"/>
+                </a:solidFill>
+                <a:latin typeface="Arial"/>
+              </a:rPr>
+              <a:t>Нейромережа ImpactNet визначає механізм зриву в 49 з 49 випадків і відтворює інтенсивність зриву з R² 0,996; з фізичним апріорі вона навчається і без розмітки λ.</a:t>
+            </a:r>
+          </a:p>
+          <a:p>
+            <a:pPr algn="l">
+              <a:spcAft>
+                <a:spcPts val="1200"/>
+              </a:spcAft>
+            </a:pPr>
+            <a:r>
+              <a:rPr sz="1500" b="1" i="0">
+                <a:solidFill>
+                  <a:srgbClr val="0F172A"/>
+                </a:solidFill>
+                <a:latin typeface="Arial"/>
+              </a:rPr>
+              <a:t>3. </a:t>
+            </a:r>
+            <a:r>
+              <a:rPr sz="1500" b="0" i="0">
+                <a:solidFill>
+                  <a:srgbClr val="0F172A"/>
+                </a:solidFill>
+                <a:latin typeface="Arial"/>
+              </a:rPr>
+              <a:t>Поріг спрацювання не характеризує модель; коректне порівняння — за ROC AUC.</a:t>
+            </a:r>
+          </a:p>
+          <a:p>
+            <a:pPr algn="l">
+              <a:spcAft>
+                <a:spcPts val="0"/>
+              </a:spcAft>
+            </a:pPr>
+            <a:r>
+              <a:rPr sz="1500" b="1" i="0">
+                <a:solidFill>
+                  <a:srgbClr val="0F172A"/>
+                </a:solidFill>
+                <a:latin typeface="Arial"/>
+              </a:rPr>
+              <a:t>4. </a:t>
+            </a:r>
+            <a:r>
+              <a:rPr sz="1500" b="0" i="0">
+                <a:solidFill>
+                  <a:srgbClr val="0F172A"/>
+                </a:solidFill>
+                <a:latin typeface="Arial"/>
+              </a:rPr>
+              <a:t>Замкнений контур керування в симуляторі зменшує кількість зривів з 11 до 5 на 40 розрядах; на іншому рушії тривога працює без донавчання (ROC AUC 0,902), кінк потребує донавчання.</a:t>
+            </a:r>
           </a:p>
         </p:txBody>
       </p:sp>
       <p:pic>
         <p:nvPicPr>
-          <p:cNvPr id="5" name="Picture 4" descr="card_xgb_phys_auc.png"/>
+          <p:cNvPr id="5" name="Picture 4" descr="qr_plasma-disruption-prediction.png"/>
           <p:cNvPicPr>
             <a:picLocks noChangeAspect="1"/>
           </p:cNvPicPr>
@@ -9271,8 +8772,8 @@
         </p:blipFill>
         <p:spPr>
           <a:xfrm>
-            <a:off x="548640" y="1280160"/>
-            <a:ext cx="5486400" cy="908136"/>
+            <a:off x="7086600" y="1371600"/>
+            <a:ext cx="2103120" cy="2103120"/>
           </a:xfrm>
           <a:prstGeom prst="rect">
             <a:avLst/>
@@ -9287,8 +8788,8 @@
         </p:nvSpPr>
         <p:spPr>
           <a:xfrm>
-            <a:off x="548640" y="2243160"/>
-            <a:ext cx="5486400" cy="365760"/>
+            <a:off x="6812280" y="3611880"/>
+            <a:ext cx="2651760" cy="1097280"/>
           </a:xfrm>
           <a:prstGeom prst="rect">
             <a:avLst/>
@@ -9301,70 +8802,43 @@
           </a:bodyPr>
           <a:lstStyle/>
           <a:p>
-            <a:pPr algn="l">
+            <a:pPr algn="ctr">
               <a:spcAft>
-                <a:spcPts val="0"/>
+                <a:spcPts val="200"/>
               </a:spcAft>
             </a:pPr>
             <a:r>
-              <a:rPr sz="1100" b="0" i="0">
-                <a:solidFill>
-                  <a:srgbClr val="475569"/>
-                </a:solidFill>
-                <a:latin typeface="Arial"/>
-              </a:rPr>
-              <a:t>Рисунок 9 – Physics: 25,4 % вчасно, пропущено 6 (поле «поріг» замінено на ROC AUC; ROC AUC валідаційна, по кроках)</a:t>
-            </a:r>
-          </a:p>
-        </p:txBody>
-      </p:sp>
-      <p:sp>
-        <p:nvSpPr>
-          <p:cNvPr id="7" name="Rectangle 6"/>
-          <p:cNvSpPr/>
-          <p:nvPr/>
-        </p:nvSpPr>
-        <p:spPr>
-          <a:xfrm>
-            <a:off x="521207" y="2727792"/>
-            <a:ext cx="5541264" cy="963000"/>
-          </a:xfrm>
-          <a:prstGeom prst="rect">
-            <a:avLst/>
-          </a:prstGeom>
-          <a:noFill/>
-          <a:ln w="12700">
-            <a:solidFill>
-              <a:srgbClr val="E2E8F0"/>
-            </a:solidFill>
-          </a:ln>
-          <a:effectLst/>
-        </p:spPr>
-        <p:style>
-          <a:lnRef idx="1">
-            <a:schemeClr val="accent1"/>
-          </a:lnRef>
-          <a:fillRef idx="3">
-            <a:schemeClr val="accent1"/>
-          </a:fillRef>
-          <a:effectRef idx="2">
-            <a:schemeClr val="accent1"/>
-          </a:effectRef>
-          <a:fontRef idx="minor">
-            <a:schemeClr val="lt1"/>
-          </a:fontRef>
-        </p:style>
-        <p:txBody>
-          <a:bodyPr rtlCol="0" anchor="ctr"/>
-          <a:lstStyle/>
-          <a:p>
-            <a:pPr algn="ctr"/>
+              <a:rPr sz="1300" b="1" i="0">
+                <a:solidFill>
+                  <a:srgbClr val="0F172A"/>
+                </a:solidFill>
+                <a:latin typeface="Arial"/>
+              </a:rPr>
+              <a:t>Код, моделі, звіти заліку</a:t>
+            </a:r>
+          </a:p>
+          <a:p>
+            <a:pPr algn="ctr">
+              <a:spcAft>
+                <a:spcPts val="200"/>
+              </a:spcAft>
+            </a:pPr>
+            <a:r>
+              <a:rPr sz="1000" b="0" i="0">
+                <a:solidFill>
+                  <a:srgbClr val="1D4ED8"/>
+                </a:solidFill>
+                <a:latin typeface="Arial"/>
+              </a:rPr>
+              <a:t>github.com/
+llllenah/plasma-disruption-prediction</a:t>
+            </a:r>
           </a:p>
         </p:txBody>
       </p:sp>
       <p:pic>
         <p:nvPicPr>
-          <p:cNvPr id="8" name="Picture 7" descr="card_xgb_dyn_auc.png"/>
+          <p:cNvPr id="7" name="Picture 6" descr="qr_plasma_simulator.png"/>
           <p:cNvPicPr>
             <a:picLocks noChangeAspect="1"/>
           </p:cNvPicPr>
@@ -9378,8 +8852,8 @@
         </p:blipFill>
         <p:spPr>
           <a:xfrm>
-            <a:off x="548640" y="2755224"/>
-            <a:ext cx="5486400" cy="908136"/>
+            <a:off x="9646919" y="1371600"/>
+            <a:ext cx="2103120" cy="2103120"/>
           </a:xfrm>
           <a:prstGeom prst="rect">
             <a:avLst/>
@@ -9388,14 +8862,86 @@
       </p:pic>
       <p:sp>
         <p:nvSpPr>
+          <p:cNvPr id="8" name="TextBox 7"/>
+          <p:cNvSpPr txBox="1"/>
+          <p:nvPr/>
+        </p:nvSpPr>
+        <p:spPr>
+          <a:xfrm>
+            <a:off x="9372600" y="3611880"/>
+            <a:ext cx="2651760" cy="1097280"/>
+          </a:xfrm>
+          <a:prstGeom prst="rect">
+            <a:avLst/>
+          </a:prstGeom>
+          <a:noFill/>
+        </p:spPr>
+        <p:txBody>
+          <a:bodyPr wrap="square" anchor="t" lIns="0" rIns="0" tIns="0" bIns="0">
+            <a:spAutoFit/>
+          </a:bodyPr>
+          <a:lstStyle/>
+          <a:p>
+            <a:pPr algn="ctr">
+              <a:spcAft>
+                <a:spcPts val="200"/>
+              </a:spcAft>
+            </a:pPr>
+            <a:r>
+              <a:rPr sz="1300" b="1" i="0">
+                <a:solidFill>
+                  <a:srgbClr val="0F172A"/>
+                </a:solidFill>
+                <a:latin typeface="Arial"/>
+              </a:rPr>
+              <a:t>Симулятор з керуванням</a:t>
+            </a:r>
+          </a:p>
+          <a:p>
+            <a:pPr algn="ctr">
+              <a:spcAft>
+                <a:spcPts val="200"/>
+              </a:spcAft>
+            </a:pPr>
+            <a:r>
+              <a:rPr sz="1000" b="0" i="0">
+                <a:solidFill>
+                  <a:srgbClr val="1D4ED8"/>
+                </a:solidFill>
+                <a:latin typeface="Arial"/>
+              </a:rPr>
+              <a:t>github.com/
+lurbaby/plasma_simulator</a:t>
+            </a:r>
+          </a:p>
+          <a:p>
+            <a:pPr algn="ctr">
+              <a:spcAft>
+                <a:spcPts val="0"/>
+              </a:spcAft>
+            </a:pPr>
+            <a:r>
+              <a:rPr sz="1000" b="0" i="0">
+                <a:solidFill>
+                  <a:srgbClr val="475569"/>
+                </a:solidFill>
+                <a:latin typeface="Arial"/>
+              </a:rPr>
+              <a:t>форк fusionsimulator.io, GPL-3.0</a:t>
+            </a:r>
+          </a:p>
+        </p:txBody>
+      </p:sp>
+      <p:sp>
+        <p:nvSpPr>
           <p:cNvPr id="9" name="TextBox 8"/>
           <p:cNvSpPr txBox="1"/>
           <p:nvPr/>
         </p:nvSpPr>
         <p:spPr>
           <a:xfrm>
-            <a:off x="548640" y="3718225"/>
-            <a:ext cx="5486400" cy="365760"/>
+            <a:off x="548640" y="5715000"/>
+            <a:ext cx="7315200" cy="457200"/>
           </a:xfrm>
           <a:prstGeom prst="rect">
             <a:avLst/>
@@ -9414,2556 +8960,17 @@
               </a:spcAft>
             </a:pPr>
             <a:r>
-              <a:rPr sz="1100" b="0" i="0">
-                <a:solidFill>
-                  <a:srgbClr val="475569"/>
-                </a:solidFill>
-                <a:latin typeface="Arial"/>
-              </a:rPr>
-              <a:t>Рисунок 10 – Dynamics: 34,9 % вчасно, пропущено 9 (поле «поріг» замінено на ROC AUC; ROC AUC валідаційна, по кроках)</a:t>
-            </a:r>
-          </a:p>
-        </p:txBody>
-      </p:sp>
-      <p:sp>
-        <p:nvSpPr>
-          <p:cNvPr id="10" name="Rectangle 9"/>
-          <p:cNvSpPr/>
-          <p:nvPr/>
-        </p:nvSpPr>
-        <p:spPr>
-          <a:xfrm>
-            <a:off x="521207" y="4202857"/>
-            <a:ext cx="5541264" cy="963000"/>
-          </a:xfrm>
-          <a:prstGeom prst="rect">
-            <a:avLst/>
-          </a:prstGeom>
-          <a:noFill/>
-          <a:ln w="12700">
-            <a:solidFill>
-              <a:srgbClr val="E2E8F0"/>
-            </a:solidFill>
-          </a:ln>
-          <a:effectLst/>
-        </p:spPr>
-        <p:style>
-          <a:lnRef idx="1">
-            <a:schemeClr val="accent1"/>
-          </a:lnRef>
-          <a:fillRef idx="3">
-            <a:schemeClr val="accent1"/>
-          </a:fillRef>
-          <a:effectRef idx="2">
-            <a:schemeClr val="accent1"/>
-          </a:effectRef>
-          <a:fontRef idx="minor">
-            <a:schemeClr val="lt1"/>
-          </a:fontRef>
-        </p:style>
-        <p:txBody>
-          <a:bodyPr rtlCol="0" anchor="ctr"/>
-          <a:lstStyle/>
-          <a:p>
-            <a:pPr algn="ctr"/>
-          </a:p>
-        </p:txBody>
-      </p:sp>
-      <p:pic>
-        <p:nvPicPr>
-          <p:cNvPr id="11" name="Picture 10" descr="card_xgb_formula_auc.png"/>
-          <p:cNvPicPr>
-            <a:picLocks noChangeAspect="1"/>
-          </p:cNvPicPr>
-          <p:nvPr/>
-        </p:nvPicPr>
-        <p:blipFill>
-          <a:blip r:embed="rId5"/>
-          <a:stretch>
-            <a:fillRect/>
-          </a:stretch>
-        </p:blipFill>
-        <p:spPr>
-          <a:xfrm>
-            <a:off x="548640" y="4230289"/>
-            <a:ext cx="5486400" cy="908136"/>
-          </a:xfrm>
-          <a:prstGeom prst="rect">
-            <a:avLst/>
-          </a:prstGeom>
-        </p:spPr>
-      </p:pic>
-      <p:sp>
-        <p:nvSpPr>
-          <p:cNvPr id="12" name="TextBox 11"/>
-          <p:cNvSpPr txBox="1"/>
-          <p:nvPr/>
-        </p:nvSpPr>
-        <p:spPr>
-          <a:xfrm>
-            <a:off x="548640" y="5193290"/>
-            <a:ext cx="5486400" cy="365760"/>
-          </a:xfrm>
-          <a:prstGeom prst="rect">
-            <a:avLst/>
-          </a:prstGeom>
-          <a:noFill/>
-        </p:spPr>
-        <p:txBody>
-          <a:bodyPr wrap="square" anchor="t" lIns="0" rIns="0" tIns="0" bIns="0">
-            <a:spAutoFit/>
-          </a:bodyPr>
-          <a:lstStyle/>
-          <a:p>
-            <a:pPr algn="l">
-              <a:spcAft>
-                <a:spcPts val="0"/>
-              </a:spcAft>
-            </a:pPr>
-            <a:r>
-              <a:rPr sz="1100" b="0" i="0">
-                <a:solidFill>
-                  <a:srgbClr val="475569"/>
-                </a:solidFill>
-                <a:latin typeface="Arial"/>
-              </a:rPr>
-              <a:t>Рисунок 11 – Formula: 25,4 % вчасно, пропущено 5 (поле «поріг» замінено на ROC AUC; ROC AUC валідаційна, по кроках)</a:t>
-            </a:r>
-          </a:p>
-        </p:txBody>
-      </p:sp>
-      <p:sp>
-        <p:nvSpPr>
-          <p:cNvPr id="13" name="Rectangle 12"/>
-          <p:cNvSpPr/>
-          <p:nvPr/>
-        </p:nvSpPr>
-        <p:spPr>
-          <a:xfrm>
-            <a:off x="548640" y="5687066"/>
-            <a:ext cx="5486400" cy="914400"/>
-          </a:xfrm>
-          <a:prstGeom prst="rect">
-            <a:avLst/>
-          </a:prstGeom>
-          <a:solidFill>
-            <a:srgbClr val="F8FAFC"/>
-          </a:solidFill>
-          <a:ln w="12700">
-            <a:solidFill>
-              <a:srgbClr val="E2E8F0"/>
-            </a:solidFill>
-          </a:ln>
-          <a:effectLst/>
-        </p:spPr>
-        <p:style>
-          <a:lnRef idx="1">
-            <a:schemeClr val="accent1"/>
-          </a:lnRef>
-          <a:fillRef idx="3">
-            <a:schemeClr val="accent1"/>
-          </a:fillRef>
-          <a:effectRef idx="2">
-            <a:schemeClr val="accent1"/>
-          </a:effectRef>
-          <a:fontRef idx="minor">
-            <a:schemeClr val="lt1"/>
-          </a:fontRef>
-        </p:style>
-        <p:txBody>
-          <a:bodyPr rtlCol="0" anchor="ctr"/>
-          <a:lstStyle/>
-          <a:p>
-            <a:pPr algn="ctr"/>
-          </a:p>
-        </p:txBody>
-      </p:sp>
-      <p:sp>
-        <p:nvSpPr>
-          <p:cNvPr id="14" name="TextBox 13"/>
-          <p:cNvSpPr txBox="1"/>
-          <p:nvPr/>
-        </p:nvSpPr>
-        <p:spPr>
-          <a:xfrm>
-            <a:off x="685800" y="5778506"/>
-            <a:ext cx="5212080" cy="731520"/>
-          </a:xfrm>
-          <a:prstGeom prst="rect">
-            <a:avLst/>
-          </a:prstGeom>
-          <a:noFill/>
-        </p:spPr>
-        <p:txBody>
-          <a:bodyPr wrap="square" anchor="t" lIns="0" rIns="0" tIns="0" bIns="0">
-            <a:spAutoFit/>
-          </a:bodyPr>
-          <a:lstStyle/>
-          <a:p>
-            <a:pPr algn="l">
-              <a:spcAft>
-                <a:spcPts val="0"/>
-              </a:spcAft>
-            </a:pPr>
-            <a:r>
-              <a:rPr sz="1100" b="1" i="0">
-                <a:solidFill>
-                  <a:srgbClr val="0E7490"/>
-                </a:solidFill>
-                <a:latin typeface="Arial"/>
-              </a:rPr>
-              <a:t>Чому ROC AUC замість порогу. </a:t>
-            </a:r>
-            <a:r>
-              <a:rPr sz="1100" b="0" i="0">
-                <a:solidFill>
-                  <a:srgbClr val="475569"/>
-                </a:solidFill>
-                <a:latin typeface="Arial"/>
-              </a:rPr>
-              <a:t>Поріг спрацювання неінформативний: його підбирає засіб оцінки під бюджет хибних тривог, шкала ймовірностей у моделей різна, а на малій вибірці поріг задає один тихий розряд. Тому на скриншотах замість порогу наведено ROC AUC, яка від порогу не залежить.</a:t>
-            </a:r>
-          </a:p>
-        </p:txBody>
-      </p:sp>
-      <p:sp>
-        <p:nvSpPr>
-          <p:cNvPr id="15" name="TextBox 14"/>
-          <p:cNvSpPr txBox="1"/>
-          <p:nvPr/>
-        </p:nvSpPr>
-        <p:spPr>
-          <a:xfrm>
-            <a:off x="7315200" y="1325880"/>
-            <a:ext cx="4343400" cy="2743200"/>
-          </a:xfrm>
-          <a:prstGeom prst="rect">
-            <a:avLst/>
-          </a:prstGeom>
-          <a:noFill/>
-        </p:spPr>
-        <p:txBody>
-          <a:bodyPr wrap="square" anchor="t" lIns="0" rIns="0" tIns="0" bIns="0">
-            <a:spAutoFit/>
-          </a:bodyPr>
-          <a:lstStyle/>
-          <a:p>
-            <a:pPr algn="l">
-              <a:spcAft>
-                <a:spcPts val="800"/>
-              </a:spcAft>
-            </a:pPr>
-            <a:r>
-              <a:rPr sz="1300" b="1" i="0">
+              <a:rPr sz="2000" b="1" i="0">
                 <a:solidFill>
                   <a:srgbClr val="0F172A"/>
                 </a:solidFill>
                 <a:latin typeface="Arial"/>
               </a:rPr>
-              <a:t>Ознаки – </a:t>
-            </a:r>
-            <a:r>
-              <a:rPr sz="1300" b="0" i="0">
-                <a:solidFill>
-                  <a:srgbClr val="0F172A"/>
-                </a:solidFill>
-                <a:latin typeface="Arial"/>
-              </a:rPr>
-              <a:t>градієнтний бустинг на кожному кроці без пам'яті; варіанти Raw, Physics, Dynamics, Formula</a:t>
-            </a:r>
-          </a:p>
-          <a:p>
-            <a:pPr algn="l">
-              <a:spcAft>
-                <a:spcPts val="800"/>
-              </a:spcAft>
-            </a:pPr>
-            <a:r>
-              <a:rPr sz="1300" b="1" i="0">
-                <a:solidFill>
-                  <a:srgbClr val="0F172A"/>
-                </a:solidFill>
-                <a:latin typeface="Arial"/>
-              </a:rPr>
-              <a:t>Відмінність – </a:t>
-            </a:r>
-            <a:r>
-              <a:rPr sz="1300" b="0" i="0">
-                <a:solidFill>
-                  <a:srgbClr val="0F172A"/>
-                </a:solidFill>
-                <a:latin typeface="Arial"/>
-              </a:rPr>
-              <a:t>Physics додає 25 агрегатів (потужність нагріву, хорди, RMS Мірнова, Dα, ECE, болометри)</a:t>
-            </a:r>
-          </a:p>
-          <a:p>
-            <a:pPr algn="l">
-              <a:spcAft>
-                <a:spcPts val="800"/>
-              </a:spcAft>
-            </a:pPr>
-            <a:r>
-              <a:rPr sz="1300" b="1" i="0">
-                <a:solidFill>
-                  <a:srgbClr val="0F172A"/>
-                </a:solidFill>
-                <a:latin typeface="Arial"/>
-              </a:rPr>
-              <a:t/>
-            </a:r>
-            <a:r>
-              <a:rPr sz="1300" b="0" i="0">
-                <a:solidFill>
-                  <a:srgbClr val="0F172A"/>
-                </a:solidFill>
-                <a:latin typeface="Arial"/>
-              </a:rPr>
-              <a:t>Dynamics додає 119 часових ознак: лаги 5–100 мс, різниці, швидкості, ковзні статистики</a:t>
-            </a:r>
-          </a:p>
-          <a:p>
-            <a:pPr algn="l">
-              <a:spcAft>
-                <a:spcPts val="800"/>
-              </a:spcAft>
-            </a:pPr>
-            <a:r>
-              <a:rPr sz="1300" b="1" i="0">
-                <a:solidFill>
-                  <a:srgbClr val="0F172A"/>
-                </a:solidFill>
-                <a:latin typeface="Arial"/>
-              </a:rPr>
-              <a:t/>
-            </a:r>
-            <a:r>
-              <a:rPr sz="1300" b="0" i="0">
-                <a:solidFill>
-                  <a:srgbClr val="0F172A"/>
-                </a:solidFill>
-                <a:latin typeface="Arial"/>
-              </a:rPr>
-              <a:t>Formula додає 5 проксі формул шпаргалки (лише для порівняння)</a:t>
-            </a:r>
-          </a:p>
-        </p:txBody>
-      </p:sp>
-      <p:sp>
-        <p:nvSpPr>
-          <p:cNvPr id="16" name="TextBox 15"/>
-          <p:cNvSpPr txBox="1"/>
-          <p:nvPr/>
-        </p:nvSpPr>
-        <p:spPr>
-          <a:xfrm>
-            <a:off x="7315200" y="3703320"/>
-            <a:ext cx="4343400" cy="320040"/>
-          </a:xfrm>
-          <a:prstGeom prst="rect">
-            <a:avLst/>
-          </a:prstGeom>
-          <a:noFill/>
-        </p:spPr>
-        <p:txBody>
-          <a:bodyPr wrap="square" anchor="t" lIns="0" rIns="0" tIns="0" bIns="0">
-            <a:spAutoFit/>
-          </a:bodyPr>
-          <a:lstStyle/>
-          <a:p>
-            <a:pPr algn="l">
-              <a:spcAft>
-                <a:spcPts val="0"/>
-              </a:spcAft>
-            </a:pPr>
-            <a:r>
-              <a:rPr sz="1100" b="0" i="0">
-                <a:solidFill>
-                  <a:srgbClr val="475569"/>
-                </a:solidFill>
-                <a:latin typeface="Arial"/>
-              </a:rPr>
-              <a:t>Таблиця 7 – Показники</a:t>
-            </a:r>
-          </a:p>
-        </p:txBody>
-      </p:sp>
-      <p:graphicFrame>
-        <p:nvGraphicFramePr>
-          <p:cNvPr id="17" name="Table 16"/>
-          <p:cNvGraphicFramePr>
-            <a:graphicFrameLocks noGrp="1"/>
-          </p:cNvGraphicFramePr>
-          <p:nvPr/>
-        </p:nvGraphicFramePr>
-        <p:xfrm>
-          <a:off x="7315200" y="4069080"/>
-          <a:ext cx="4343400" cy="694944"/>
-        </p:xfrm>
-        <a:graphic>
-          <a:graphicData uri="http://schemas.openxmlformats.org/drawingml/2006/table">
-            <a:tbl>
-              <a:tblPr firstRow="0" bandRow="0">
-                <a:tableStyleId>{5C22544A-7EE6-4342-B048-85BDC9FD1C3A}</a:tableStyleId>
-              </a:tblPr>
-              <a:tblGrid>
-                <a:gridCol w="2514600"/>
-                <a:gridCol w="1828800"/>
-              </a:tblGrid>
-              <a:tr h="347472">
-                <a:tc>
-                  <a:txBody>
-                    <a:bodyPr wrap="square"/>
-                    <a:lstStyle/>
-                    <a:p>
-                      <a:pPr algn="l"/>
-                      <a:r>
-                        <a:rPr sz="1100" b="1">
-                          <a:solidFill>
-                            <a:srgbClr val="475569"/>
-                          </a:solidFill>
-                          <a:latin typeface="Arial"/>
-                        </a:rPr>
-                        <a:t>показник</a:t>
-                      </a:r>
-                    </a:p>
-                  </a:txBody>
-                  <a:tcPr marL="91440" marR="91440" marT="27432" marB="27432" anchor="ctr">
-                    <a:solidFill>
-                      <a:srgbClr val="F1F5F9"/>
-                    </a:solidFill>
-                  </a:tcPr>
-                </a:tc>
-                <a:tc>
-                  <a:txBody>
-                    <a:bodyPr wrap="square"/>
-                    <a:lstStyle/>
-                    <a:p>
-                      <a:pPr algn="ctr"/>
-                      <a:r>
-                        <a:rPr sz="1100" b="1">
-                          <a:solidFill>
-                            <a:srgbClr val="475569"/>
-                          </a:solidFill>
-                          <a:latin typeface="Arial"/>
-                        </a:rPr>
-                        <a:t>значення</a:t>
-                      </a:r>
-                    </a:p>
-                  </a:txBody>
-                  <a:tcPr marL="91440" marR="91440" marT="27432" marB="27432" anchor="ctr">
-                    <a:solidFill>
-                      <a:srgbClr val="F1F5F9"/>
-                    </a:solidFill>
-                  </a:tcPr>
-                </a:tc>
-              </a:tr>
-              <a:tr h="347472">
-                <a:tc>
-                  <a:txBody>
-                    <a:bodyPr wrap="square"/>
-                    <a:lstStyle/>
-                    <a:p>
-                      <a:pPr algn="l"/>
-                      <a:r>
-                        <a:rPr sz="1100" b="1">
-                          <a:solidFill>
-                            <a:srgbClr val="0F172A"/>
-                          </a:solidFill>
-                          <a:latin typeface="Arial"/>
-                        </a:rPr>
-                        <a:t>ROC AUC валідаційна (по кроках)</a:t>
-                      </a:r>
-                    </a:p>
-                  </a:txBody>
-                  <a:tcPr marL="91440" marR="91440" marT="27432" marB="27432" anchor="ctr">
-                    <a:solidFill>
-                      <a:srgbClr val="FFFFFF"/>
-                    </a:solidFill>
-                  </a:tcPr>
-                </a:tc>
-                <a:tc>
-                  <a:txBody>
-                    <a:bodyPr wrap="square"/>
-                    <a:lstStyle/>
-                    <a:p>
-                      <a:pPr algn="ctr"/>
-                      <a:r>
-                        <a:rPr sz="1200" b="0">
-                          <a:solidFill>
-                            <a:srgbClr val="0F172A"/>
-                          </a:solidFill>
-                          <a:latin typeface="Arial"/>
-                        </a:rPr>
-                        <a:t>0,94–0,96</a:t>
-                      </a:r>
-                    </a:p>
-                  </a:txBody>
-                  <a:tcPr marL="91440" marR="91440" marT="27432" marB="27432" anchor="ctr">
-                    <a:solidFill>
-                      <a:srgbClr val="FFFFFF"/>
-                    </a:solidFill>
-                  </a:tcPr>
-                </a:tc>
-              </a:tr>
-            </a:tbl>
-          </a:graphicData>
-        </a:graphic>
-      </p:graphicFrame>
-    </p:spTree>
-  </p:cSld>
-  <p:clrMapOvr>
-    <a:masterClrMapping/>
-  </p:clrMapOvr>
-</p:sld>
-</file>
-
-<file path=ppt/slides/slide17.xml><?xml version="1.0" encoding="utf-8"?>
-<p:sld xmlns:a="http://schemas.openxmlformats.org/drawingml/2006/main" xmlns:p="http://schemas.openxmlformats.org/presentationml/2006/main" xmlns:r="http://schemas.openxmlformats.org/officeDocument/2006/relationships">
-  <p:cSld>
-    <p:bg>
-      <p:bgPr>
-        <a:solidFill>
-          <a:srgbClr val="FFFFFF"/>
-        </a:solidFill>
-        <a:effectLst/>
-      </p:bgPr>
-    </p:bg>
-    <p:spTree>
-      <p:nvGrpSpPr>
-        <p:cNvPr id="1" name=""/>
-        <p:cNvGrpSpPr/>
-        <p:nvPr/>
-      </p:nvGrpSpPr>
-      <p:grpSpPr/>
-      <p:sp>
-        <p:nvSpPr>
-          <p:cNvPr id="2" name="TextBox 1"/>
-          <p:cNvSpPr txBox="1"/>
-          <p:nvPr/>
-        </p:nvSpPr>
-        <p:spPr>
-          <a:xfrm>
-            <a:off x="548640" y="411480"/>
-            <a:ext cx="11064240" cy="640080"/>
-          </a:xfrm>
-          <a:prstGeom prst="rect">
-            <a:avLst/>
-          </a:prstGeom>
-          <a:noFill/>
-        </p:spPr>
-        <p:txBody>
-          <a:bodyPr wrap="square" anchor="t" lIns="0" rIns="0" tIns="0" bIns="0">
-            <a:spAutoFit/>
-          </a:bodyPr>
-          <a:lstStyle/>
-          <a:p>
-            <a:pPr algn="l">
-              <a:spcAft>
-                <a:spcPts val="0"/>
-              </a:spcAft>
-            </a:pPr>
-            <a:r>
-              <a:rPr sz="2600" b="1" i="0">
-                <a:solidFill>
-                  <a:srgbClr val="0F172A"/>
-                </a:solidFill>
-                <a:latin typeface="Arial"/>
-              </a:rPr>
-              <a:t>Додаток А.2 v6 і v6b: двоголовий бустинг з фізичними ознаками</a:t>
-            </a:r>
-          </a:p>
-        </p:txBody>
-      </p:sp>
-      <p:sp>
-        <p:nvSpPr>
-          <p:cNvPr id="3" name="TextBox 2"/>
-          <p:cNvSpPr txBox="1"/>
-          <p:nvPr/>
-        </p:nvSpPr>
-        <p:spPr>
-          <a:xfrm>
-            <a:off x="11247120" y="6446520"/>
-            <a:ext cx="457200" cy="274320"/>
-          </a:xfrm>
-          <a:prstGeom prst="rect">
-            <a:avLst/>
-          </a:prstGeom>
-          <a:noFill/>
-        </p:spPr>
-        <p:txBody>
-          <a:bodyPr wrap="square" anchor="t" lIns="0" rIns="0" tIns="0" bIns="0">
-            <a:spAutoFit/>
-          </a:bodyPr>
-          <a:lstStyle/>
-          <a:p>
-            <a:pPr algn="r">
-              <a:spcAft>
-                <a:spcPts val="0"/>
-              </a:spcAft>
-            </a:pPr>
-            <a:r>
-              <a:rPr sz="1000" b="0" i="0">
-                <a:solidFill>
-                  <a:srgbClr val="94A3B8"/>
-                </a:solidFill>
-                <a:latin typeface="Arial"/>
-              </a:rPr>
-              <a:t>17</a:t>
-            </a:r>
-          </a:p>
-        </p:txBody>
-      </p:sp>
-      <p:sp>
-        <p:nvSpPr>
-          <p:cNvPr id="4" name="Rectangle 3"/>
-          <p:cNvSpPr/>
-          <p:nvPr/>
-        </p:nvSpPr>
-        <p:spPr>
-          <a:xfrm>
-            <a:off x="521207" y="1252728"/>
-            <a:ext cx="6547103" cy="872450"/>
-          </a:xfrm>
-          <a:prstGeom prst="rect">
-            <a:avLst/>
-          </a:prstGeom>
-          <a:noFill/>
-          <a:ln w="12700">
-            <a:solidFill>
-              <a:srgbClr val="E2E8F0"/>
-            </a:solidFill>
-          </a:ln>
-          <a:effectLst/>
-        </p:spPr>
-        <p:style>
-          <a:lnRef idx="1">
-            <a:schemeClr val="accent1"/>
-          </a:lnRef>
-          <a:fillRef idx="3">
-            <a:schemeClr val="accent1"/>
-          </a:fillRef>
-          <a:effectRef idx="2">
-            <a:schemeClr val="accent1"/>
-          </a:effectRef>
-          <a:fontRef idx="minor">
-            <a:schemeClr val="lt1"/>
-          </a:fontRef>
-        </p:style>
-        <p:txBody>
-          <a:bodyPr rtlCol="0" anchor="ctr"/>
-          <a:lstStyle/>
-          <a:p>
-            <a:pPr algn="ctr"/>
-          </a:p>
-        </p:txBody>
-      </p:sp>
-      <p:pic>
-        <p:nvPicPr>
-          <p:cNvPr id="5" name="Picture 4" descr="card_v6_auc.png"/>
-          <p:cNvPicPr>
-            <a:picLocks noChangeAspect="1"/>
-          </p:cNvPicPr>
-          <p:nvPr/>
-        </p:nvPicPr>
-        <p:blipFill>
-          <a:blip r:embed="rId3"/>
-          <a:stretch>
-            <a:fillRect/>
-          </a:stretch>
-        </p:blipFill>
-        <p:spPr>
-          <a:xfrm>
-            <a:off x="548640" y="1280160"/>
-            <a:ext cx="6492240" cy="817586"/>
-          </a:xfrm>
-          <a:prstGeom prst="rect">
-            <a:avLst/>
-          </a:prstGeom>
-        </p:spPr>
-      </p:pic>
-      <p:sp>
-        <p:nvSpPr>
-          <p:cNvPr id="6" name="TextBox 5"/>
-          <p:cNvSpPr txBox="1"/>
-          <p:nvPr/>
-        </p:nvSpPr>
-        <p:spPr>
-          <a:xfrm>
-            <a:off x="548640" y="2152610"/>
-            <a:ext cx="6492240" cy="365760"/>
-          </a:xfrm>
-          <a:prstGeom prst="rect">
-            <a:avLst/>
-          </a:prstGeom>
-          <a:noFill/>
-        </p:spPr>
-        <p:txBody>
-          <a:bodyPr wrap="square" anchor="t" lIns="0" rIns="0" tIns="0" bIns="0">
-            <a:spAutoFit/>
-          </a:bodyPr>
-          <a:lstStyle/>
-          <a:p>
-            <a:pPr algn="l">
-              <a:spcAft>
-                <a:spcPts val="0"/>
-              </a:spcAft>
-            </a:pPr>
-            <a:r>
-              <a:rPr sz="1100" b="0" i="0">
-                <a:solidFill>
-                  <a:srgbClr val="475569"/>
-                </a:solidFill>
-                <a:latin typeface="Arial"/>
-              </a:rPr>
-              <a:t>Рисунок 12 – v6: 63,5 % вчасно на спільній вибірці, пропущено 0 (поле «поріг» замінено на ROC AUC; офіційні набори toksym)</a:t>
-            </a:r>
-          </a:p>
-        </p:txBody>
-      </p:sp>
-      <p:sp>
-        <p:nvSpPr>
-          <p:cNvPr id="7" name="Rectangle 6"/>
-          <p:cNvSpPr/>
-          <p:nvPr/>
-        </p:nvSpPr>
-        <p:spPr>
-          <a:xfrm>
-            <a:off x="521207" y="2637242"/>
-            <a:ext cx="6547103" cy="866394"/>
-          </a:xfrm>
-          <a:prstGeom prst="rect">
-            <a:avLst/>
-          </a:prstGeom>
-          <a:noFill/>
-          <a:ln w="12700">
-            <a:solidFill>
-              <a:srgbClr val="E2E8F0"/>
-            </a:solidFill>
-          </a:ln>
-          <a:effectLst/>
-        </p:spPr>
-        <p:style>
-          <a:lnRef idx="1">
-            <a:schemeClr val="accent1"/>
-          </a:lnRef>
-          <a:fillRef idx="3">
-            <a:schemeClr val="accent1"/>
-          </a:fillRef>
-          <a:effectRef idx="2">
-            <a:schemeClr val="accent1"/>
-          </a:effectRef>
-          <a:fontRef idx="minor">
-            <a:schemeClr val="lt1"/>
-          </a:fontRef>
-        </p:style>
-        <p:txBody>
-          <a:bodyPr rtlCol="0" anchor="ctr"/>
-          <a:lstStyle/>
-          <a:p>
-            <a:pPr algn="ctr"/>
-          </a:p>
-        </p:txBody>
-      </p:sp>
-      <p:pic>
-        <p:nvPicPr>
-          <p:cNvPr id="8" name="Picture 7" descr="card_v6b_auc.png"/>
-          <p:cNvPicPr>
-            <a:picLocks noChangeAspect="1"/>
-          </p:cNvPicPr>
-          <p:nvPr/>
-        </p:nvPicPr>
-        <p:blipFill>
-          <a:blip r:embed="rId4"/>
-          <a:stretch>
-            <a:fillRect/>
-          </a:stretch>
-        </p:blipFill>
-        <p:spPr>
-          <a:xfrm>
-            <a:off x="548640" y="2664674"/>
-            <a:ext cx="6492240" cy="811530"/>
-          </a:xfrm>
-          <a:prstGeom prst="rect">
-            <a:avLst/>
-          </a:prstGeom>
-        </p:spPr>
-      </p:pic>
-      <p:sp>
-        <p:nvSpPr>
-          <p:cNvPr id="9" name="TextBox 8"/>
-          <p:cNvSpPr txBox="1"/>
-          <p:nvPr/>
-        </p:nvSpPr>
-        <p:spPr>
-          <a:xfrm>
-            <a:off x="548640" y="3531068"/>
-            <a:ext cx="6492240" cy="365760"/>
-          </a:xfrm>
-          <a:prstGeom prst="rect">
-            <a:avLst/>
-          </a:prstGeom>
-          <a:noFill/>
-        </p:spPr>
-        <p:txBody>
-          <a:bodyPr wrap="square" anchor="t" lIns="0" rIns="0" tIns="0" bIns="0">
-            <a:spAutoFit/>
-          </a:bodyPr>
-          <a:lstStyle/>
-          <a:p>
-            <a:pPr algn="l">
-              <a:spcAft>
-                <a:spcPts val="0"/>
-              </a:spcAft>
-            </a:pPr>
-            <a:r>
-              <a:rPr sz="1100" b="0" i="0">
-                <a:solidFill>
-                  <a:srgbClr val="475569"/>
-                </a:solidFill>
-                <a:latin typeface="Arial"/>
-              </a:rPr>
-              <a:t>Рисунок 13 – v6b: 57,1 % вчасно на спільній вибірці, пропущено 1 (поле «поріг» замінено на ROC AUC; офіційні набори toksym)</a:t>
-            </a:r>
-          </a:p>
-        </p:txBody>
-      </p:sp>
-      <p:sp>
-        <p:nvSpPr>
-          <p:cNvPr id="10" name="Rectangle 9"/>
-          <p:cNvSpPr/>
-          <p:nvPr/>
-        </p:nvSpPr>
-        <p:spPr>
-          <a:xfrm>
-            <a:off x="548640" y="4024844"/>
-            <a:ext cx="6492240" cy="914400"/>
-          </a:xfrm>
-          <a:prstGeom prst="rect">
-            <a:avLst/>
-          </a:prstGeom>
-          <a:solidFill>
-            <a:srgbClr val="F8FAFC"/>
-          </a:solidFill>
-          <a:ln w="12700">
-            <a:solidFill>
-              <a:srgbClr val="E2E8F0"/>
-            </a:solidFill>
-          </a:ln>
-          <a:effectLst/>
-        </p:spPr>
-        <p:style>
-          <a:lnRef idx="1">
-            <a:schemeClr val="accent1"/>
-          </a:lnRef>
-          <a:fillRef idx="3">
-            <a:schemeClr val="accent1"/>
-          </a:fillRef>
-          <a:effectRef idx="2">
-            <a:schemeClr val="accent1"/>
-          </a:effectRef>
-          <a:fontRef idx="minor">
-            <a:schemeClr val="lt1"/>
-          </a:fontRef>
-        </p:style>
-        <p:txBody>
-          <a:bodyPr rtlCol="0" anchor="ctr"/>
-          <a:lstStyle/>
-          <a:p>
-            <a:pPr algn="ctr"/>
-          </a:p>
-        </p:txBody>
-      </p:sp>
-      <p:sp>
-        <p:nvSpPr>
-          <p:cNvPr id="11" name="TextBox 10"/>
-          <p:cNvSpPr txBox="1"/>
-          <p:nvPr/>
-        </p:nvSpPr>
-        <p:spPr>
-          <a:xfrm>
-            <a:off x="685800" y="4116284"/>
-            <a:ext cx="6217920" cy="731520"/>
-          </a:xfrm>
-          <a:prstGeom prst="rect">
-            <a:avLst/>
-          </a:prstGeom>
-          <a:noFill/>
-        </p:spPr>
-        <p:txBody>
-          <a:bodyPr wrap="square" anchor="t" lIns="0" rIns="0" tIns="0" bIns="0">
-            <a:spAutoFit/>
-          </a:bodyPr>
-          <a:lstStyle/>
-          <a:p>
-            <a:pPr algn="l">
-              <a:spcAft>
-                <a:spcPts val="0"/>
-              </a:spcAft>
-            </a:pPr>
-            <a:r>
-              <a:rPr sz="1100" b="1" i="0">
-                <a:solidFill>
-                  <a:srgbClr val="0E7490"/>
-                </a:solidFill>
-                <a:latin typeface="Arial"/>
-              </a:rPr>
-              <a:t>Чому ROC AUC замість порогу. </a:t>
-            </a:r>
-            <a:r>
-              <a:rPr sz="1100" b="0" i="0">
-                <a:solidFill>
-                  <a:srgbClr val="475569"/>
-                </a:solidFill>
-                <a:latin typeface="Arial"/>
-              </a:rPr>
-              <a:t>Поріг спрацювання неінформативний: його підбирає засіб оцінки під бюджет хибних тривог, шкала ймовірностей у моделей різна, а на малій вибірці поріг задає один тихий розряд. Тому на скриншотах замість порогу наведено ROC AUC, яка від порогу не залежить.</a:t>
-            </a:r>
-          </a:p>
-        </p:txBody>
-      </p:sp>
-      <p:sp>
-        <p:nvSpPr>
-          <p:cNvPr id="12" name="TextBox 11"/>
-          <p:cNvSpPr txBox="1"/>
-          <p:nvPr/>
-        </p:nvSpPr>
-        <p:spPr>
-          <a:xfrm>
-            <a:off x="7315200" y="1325880"/>
-            <a:ext cx="4343400" cy="2286000"/>
-          </a:xfrm>
-          <a:prstGeom prst="rect">
-            <a:avLst/>
-          </a:prstGeom>
-          <a:noFill/>
-        </p:spPr>
-        <p:txBody>
-          <a:bodyPr wrap="square" anchor="t" lIns="0" rIns="0" tIns="0" bIns="0">
-            <a:spAutoFit/>
-          </a:bodyPr>
-          <a:lstStyle/>
-          <a:p>
-            <a:pPr algn="l">
-              <a:spcAft>
-                <a:spcPts val="800"/>
-              </a:spcAft>
-            </a:pPr>
-            <a:r>
-              <a:rPr sz="1300" b="1" i="0">
-                <a:solidFill>
-                  <a:srgbClr val="0F172A"/>
-                </a:solidFill>
-                <a:latin typeface="Arial"/>
-              </a:rPr>
-              <a:t>Ознаки – </a:t>
-            </a:r>
-            <a:r>
-              <a:rPr sz="1300" b="0" i="0">
-                <a:solidFill>
-                  <a:srgbClr val="0F172A"/>
-                </a:solidFill>
-                <a:latin typeface="Arial"/>
-              </a:rPr>
-              <a:t>сирі канали, формули шпаргалки (f_GW, q95, βN, P_rad/P_in) і мітка сценарію</a:t>
-            </a:r>
-          </a:p>
-          <a:p>
-            <a:pPr algn="l">
-              <a:spcAft>
-                <a:spcPts val="800"/>
-              </a:spcAft>
-            </a:pPr>
-            <a:r>
-              <a:rPr sz="1300" b="1" i="0">
-                <a:solidFill>
-                  <a:srgbClr val="0F172A"/>
-                </a:solidFill>
-                <a:latin typeface="Arial"/>
-              </a:rPr>
-              <a:t>Відмінність – </a:t>
-            </a:r>
-            <a:r>
-              <a:rPr sz="1300" b="0" i="0">
-                <a:solidFill>
-                  <a:srgbClr val="0F172A"/>
-                </a:solidFill>
-                <a:latin typeface="Arial"/>
-              </a:rPr>
-              <a:t>дві голови HGB: передвісник (≤ 0,1 с) і раннє попередження (≤ 4,5 с)</a:t>
-            </a:r>
-          </a:p>
-          <a:p>
-            <a:pPr algn="l">
-              <a:spcAft>
-                <a:spcPts val="800"/>
-              </a:spcAft>
-            </a:pPr>
-            <a:r>
-              <a:rPr sz="1300" b="1" i="0">
-                <a:solidFill>
-                  <a:srgbClr val="0F172A"/>
-                </a:solidFill>
-                <a:latin typeface="Arial"/>
-              </a:rPr>
-              <a:t/>
-            </a:r>
-            <a:r>
-              <a:rPr sz="1300" b="0" i="0">
-                <a:solidFill>
-                  <a:srgbClr val="0F172A"/>
-                </a:solidFill>
-                <a:latin typeface="Arial"/>
-              </a:rPr>
-              <a:t>v6b — варіант з іншим налаштуванням голови B</a:t>
-            </a:r>
-          </a:p>
-        </p:txBody>
-      </p:sp>
-      <p:sp>
-        <p:nvSpPr>
-          <p:cNvPr id="13" name="TextBox 12"/>
-          <p:cNvSpPr txBox="1"/>
-          <p:nvPr/>
-        </p:nvSpPr>
-        <p:spPr>
-          <a:xfrm>
-            <a:off x="7315200" y="3703320"/>
-            <a:ext cx="4343400" cy="320040"/>
-          </a:xfrm>
-          <a:prstGeom prst="rect">
-            <a:avLst/>
-          </a:prstGeom>
-          <a:noFill/>
-        </p:spPr>
-        <p:txBody>
-          <a:bodyPr wrap="square" anchor="t" lIns="0" rIns="0" tIns="0" bIns="0">
-            <a:spAutoFit/>
-          </a:bodyPr>
-          <a:lstStyle/>
-          <a:p>
-            <a:pPr algn="l">
-              <a:spcAft>
-                <a:spcPts val="0"/>
-              </a:spcAft>
-            </a:pPr>
-            <a:r>
-              <a:rPr sz="1100" b="0" i="0">
-                <a:solidFill>
-                  <a:srgbClr val="475569"/>
-                </a:solidFill>
-                <a:latin typeface="Arial"/>
-              </a:rPr>
-              <a:t>Таблиця 8 – Показники (офіційні набори toksym)</a:t>
-            </a:r>
-          </a:p>
-        </p:txBody>
-      </p:sp>
-      <p:graphicFrame>
-        <p:nvGraphicFramePr>
-          <p:cNvPr id="14" name="Table 13"/>
-          <p:cNvGraphicFramePr>
-            <a:graphicFrameLocks noGrp="1"/>
-          </p:cNvGraphicFramePr>
-          <p:nvPr/>
-        </p:nvGraphicFramePr>
-        <p:xfrm>
-          <a:off x="7315200" y="4069080"/>
-          <a:ext cx="4343400" cy="1737360"/>
-        </p:xfrm>
-        <a:graphic>
-          <a:graphicData uri="http://schemas.openxmlformats.org/drawingml/2006/table">
-            <a:tbl>
-              <a:tblPr firstRow="0" bandRow="0">
-                <a:tableStyleId>{5C22544A-7EE6-4342-B048-85BDC9FD1C3A}</a:tableStyleId>
-              </a:tblPr>
-              <a:tblGrid>
-                <a:gridCol w="2514600"/>
-                <a:gridCol w="1828800"/>
-              </a:tblGrid>
-              <a:tr h="347472">
-                <a:tc>
-                  <a:txBody>
-                    <a:bodyPr wrap="square"/>
-                    <a:lstStyle/>
-                    <a:p>
-                      <a:pPr algn="l"/>
-                      <a:r>
-                        <a:rPr sz="1100" b="1">
-                          <a:solidFill>
-                            <a:srgbClr val="475569"/>
-                          </a:solidFill>
-                          <a:latin typeface="Arial"/>
-                        </a:rPr>
-                        <a:t>показник</a:t>
-                      </a:r>
-                    </a:p>
-                  </a:txBody>
-                  <a:tcPr marL="91440" marR="91440" marT="27432" marB="27432" anchor="ctr">
-                    <a:solidFill>
-                      <a:srgbClr val="F1F5F9"/>
-                    </a:solidFill>
-                  </a:tcPr>
-                </a:tc>
-                <a:tc>
-                  <a:txBody>
-                    <a:bodyPr wrap="square"/>
-                    <a:lstStyle/>
-                    <a:p>
-                      <a:pPr algn="ctr"/>
-                      <a:r>
-                        <a:rPr sz="1100" b="1">
-                          <a:solidFill>
-                            <a:srgbClr val="475569"/>
-                          </a:solidFill>
-                          <a:latin typeface="Arial"/>
-                        </a:rPr>
-                        <a:t>значення</a:t>
-                      </a:r>
-                    </a:p>
-                  </a:txBody>
-                  <a:tcPr marL="91440" marR="91440" marT="27432" marB="27432" anchor="ctr">
-                    <a:solidFill>
-                      <a:srgbClr val="F1F5F9"/>
-                    </a:solidFill>
-                  </a:tcPr>
-                </a:tc>
-              </a:tr>
-              <a:tr h="347472">
-                <a:tc>
-                  <a:txBody>
-                    <a:bodyPr wrap="square"/>
-                    <a:lstStyle/>
-                    <a:p>
-                      <a:pPr algn="l"/>
-                      <a:r>
-                        <a:rPr sz="1100" b="1">
-                          <a:solidFill>
-                            <a:srgbClr val="0F172A"/>
-                          </a:solidFill>
-                          <a:latin typeface="Arial"/>
-                        </a:rPr>
-                        <a:t>ROC AUC, 30 мс</a:t>
-                      </a:r>
-                    </a:p>
-                  </a:txBody>
-                  <a:tcPr marL="91440" marR="91440" marT="27432" marB="27432" anchor="ctr">
-                    <a:solidFill>
-                      <a:srgbClr val="FFFFFF"/>
-                    </a:solidFill>
-                  </a:tcPr>
-                </a:tc>
-                <a:tc>
-                  <a:txBody>
-                    <a:bodyPr wrap="square"/>
-                    <a:lstStyle/>
-                    <a:p>
-                      <a:pPr algn="ctr"/>
-                      <a:r>
-                        <a:rPr sz="1200" b="0">
-                          <a:solidFill>
-                            <a:srgbClr val="0F172A"/>
-                          </a:solidFill>
-                          <a:latin typeface="Arial"/>
-                        </a:rPr>
-                        <a:t>0,993</a:t>
-                      </a:r>
-                    </a:p>
-                  </a:txBody>
-                  <a:tcPr marL="91440" marR="91440" marT="27432" marB="27432" anchor="ctr">
-                    <a:solidFill>
-                      <a:srgbClr val="FFFFFF"/>
-                    </a:solidFill>
-                  </a:tcPr>
-                </a:tc>
-              </a:tr>
-              <a:tr h="347472">
-                <a:tc>
-                  <a:txBody>
-                    <a:bodyPr wrap="square"/>
-                    <a:lstStyle/>
-                    <a:p>
-                      <a:pPr algn="l"/>
-                      <a:r>
-                        <a:rPr sz="1100" b="1">
-                          <a:solidFill>
-                            <a:srgbClr val="0F172A"/>
-                          </a:solidFill>
-                          <a:latin typeface="Arial"/>
-                        </a:rPr>
-                        <a:t>ROC AUC, 0,1 с</a:t>
-                      </a:r>
-                    </a:p>
-                  </a:txBody>
-                  <a:tcPr marL="91440" marR="91440" marT="27432" marB="27432" anchor="ctr">
-                    <a:solidFill>
-                      <a:srgbClr val="FFFFFF"/>
-                    </a:solidFill>
-                  </a:tcPr>
-                </a:tc>
-                <a:tc>
-                  <a:txBody>
-                    <a:bodyPr wrap="square"/>
-                    <a:lstStyle/>
-                    <a:p>
-                      <a:pPr algn="ctr"/>
-                      <a:r>
-                        <a:rPr sz="1200" b="0">
-                          <a:solidFill>
-                            <a:srgbClr val="0F172A"/>
-                          </a:solidFill>
-                          <a:latin typeface="Arial"/>
-                        </a:rPr>
-                        <a:t>0,925</a:t>
-                      </a:r>
-                    </a:p>
-                  </a:txBody>
-                  <a:tcPr marL="91440" marR="91440" marT="27432" marB="27432" anchor="ctr">
-                    <a:solidFill>
-                      <a:srgbClr val="FFFFFF"/>
-                    </a:solidFill>
-                  </a:tcPr>
-                </a:tc>
-              </a:tr>
-              <a:tr h="347472">
-                <a:tc>
-                  <a:txBody>
-                    <a:bodyPr wrap="square"/>
-                    <a:lstStyle/>
-                    <a:p>
-                      <a:pPr algn="l"/>
-                      <a:r>
-                        <a:rPr sz="1100" b="1">
-                          <a:solidFill>
-                            <a:srgbClr val="0F172A"/>
-                          </a:solidFill>
-                          <a:latin typeface="Arial"/>
-                        </a:rPr>
-                        <a:t>об'єм</a:t>
-                      </a:r>
-                    </a:p>
-                  </a:txBody>
-                  <a:tcPr marL="91440" marR="91440" marT="27432" marB="27432" anchor="ctr">
-                    <a:solidFill>
-                      <a:srgbClr val="FFFFFF"/>
-                    </a:solidFill>
-                  </a:tcPr>
-                </a:tc>
-                <a:tc>
-                  <a:txBody>
-                    <a:bodyPr wrap="square"/>
-                    <a:lstStyle/>
-                    <a:p>
-                      <a:pPr algn="ctr"/>
-                      <a:r>
-                        <a:rPr sz="1200" b="0">
-                          <a:solidFill>
-                            <a:srgbClr val="0F172A"/>
-                          </a:solidFill>
-                          <a:latin typeface="Arial"/>
-                        </a:rPr>
-                        <a:t>0,938</a:t>
-                      </a:r>
-                    </a:p>
-                  </a:txBody>
-                  <a:tcPr marL="91440" marR="91440" marT="27432" marB="27432" anchor="ctr">
-                    <a:solidFill>
-                      <a:srgbClr val="FFFFFF"/>
-                    </a:solidFill>
-                  </a:tcPr>
-                </a:tc>
-              </a:tr>
-              <a:tr h="347472">
-                <a:tc>
-                  <a:txBody>
-                    <a:bodyPr wrap="square"/>
-                    <a:lstStyle/>
-                    <a:p>
-                      <a:pPr algn="l"/>
-                      <a:r>
-                        <a:rPr sz="1100" b="1">
-                          <a:solidFill>
-                            <a:srgbClr val="0F172A"/>
-                          </a:solidFill>
-                          <a:latin typeface="Arial"/>
-                        </a:rPr>
-                        <a:t>об'єм v6b</a:t>
-                      </a:r>
-                    </a:p>
-                  </a:txBody>
-                  <a:tcPr marL="91440" marR="91440" marT="27432" marB="27432" anchor="ctr">
-                    <a:solidFill>
-                      <a:srgbClr val="FFFFFF"/>
-                    </a:solidFill>
-                  </a:tcPr>
-                </a:tc>
-                <a:tc>
-                  <a:txBody>
-                    <a:bodyPr wrap="square"/>
-                    <a:lstStyle/>
-                    <a:p>
-                      <a:pPr algn="ctr"/>
-                      <a:r>
-                        <a:rPr sz="1200" b="0">
-                          <a:solidFill>
-                            <a:srgbClr val="0F172A"/>
-                          </a:solidFill>
-                          <a:latin typeface="Arial"/>
-                        </a:rPr>
-                        <a:t>0,935</a:t>
-                      </a:r>
-                    </a:p>
-                  </a:txBody>
-                  <a:tcPr marL="91440" marR="91440" marT="27432" marB="27432" anchor="ctr">
-                    <a:solidFill>
-                      <a:srgbClr val="FFFFFF"/>
-                    </a:solidFill>
-                  </a:tcPr>
-                </a:tc>
-              </a:tr>
-            </a:tbl>
-          </a:graphicData>
-        </a:graphic>
-      </p:graphicFrame>
-    </p:spTree>
-  </p:cSld>
-  <p:clrMapOvr>
-    <a:masterClrMapping/>
-  </p:clrMapOvr>
-</p:sld>
-</file>
-
-<file path=ppt/slides/slide18.xml><?xml version="1.0" encoding="utf-8"?>
-<p:sld xmlns:a="http://schemas.openxmlformats.org/drawingml/2006/main" xmlns:p="http://schemas.openxmlformats.org/presentationml/2006/main" xmlns:r="http://schemas.openxmlformats.org/officeDocument/2006/relationships">
-  <p:cSld>
-    <p:bg>
-      <p:bgPr>
-        <a:solidFill>
-          <a:srgbClr val="FFFFFF"/>
-        </a:solidFill>
-        <a:effectLst/>
-      </p:bgPr>
-    </p:bg>
-    <p:spTree>
-      <p:nvGrpSpPr>
-        <p:cNvPr id="1" name=""/>
-        <p:cNvGrpSpPr/>
-        <p:nvPr/>
-      </p:nvGrpSpPr>
-      <p:grpSpPr/>
-      <p:sp>
-        <p:nvSpPr>
-          <p:cNvPr id="2" name="TextBox 1"/>
-          <p:cNvSpPr txBox="1"/>
-          <p:nvPr/>
-        </p:nvSpPr>
-        <p:spPr>
-          <a:xfrm>
-            <a:off x="548640" y="411480"/>
-            <a:ext cx="11064240" cy="640080"/>
-          </a:xfrm>
-          <a:prstGeom prst="rect">
-            <a:avLst/>
-          </a:prstGeom>
-          <a:noFill/>
-        </p:spPr>
-        <p:txBody>
-          <a:bodyPr wrap="square" anchor="t" lIns="0" rIns="0" tIns="0" bIns="0">
-            <a:spAutoFit/>
-          </a:bodyPr>
-          <a:lstStyle/>
-          <a:p>
-            <a:pPr algn="l">
-              <a:spcAft>
-                <a:spcPts val="0"/>
-              </a:spcAft>
-            </a:pPr>
-            <a:r>
-              <a:rPr sz="2600" b="1" i="0">
-                <a:solidFill>
-                  <a:srgbClr val="0F172A"/>
-                </a:solidFill>
-                <a:latin typeface="Arial"/>
-              </a:rPr>
-              <a:t>Додаток А.3 v8: фізичні ознаки і детектор передвісника</a:t>
-            </a:r>
-          </a:p>
-        </p:txBody>
-      </p:sp>
-      <p:sp>
-        <p:nvSpPr>
-          <p:cNvPr id="3" name="TextBox 2"/>
-          <p:cNvSpPr txBox="1"/>
-          <p:nvPr/>
-        </p:nvSpPr>
-        <p:spPr>
-          <a:xfrm>
-            <a:off x="11247120" y="6446520"/>
-            <a:ext cx="457200" cy="274320"/>
-          </a:xfrm>
-          <a:prstGeom prst="rect">
-            <a:avLst/>
-          </a:prstGeom>
-          <a:noFill/>
-        </p:spPr>
-        <p:txBody>
-          <a:bodyPr wrap="square" anchor="t" lIns="0" rIns="0" tIns="0" bIns="0">
-            <a:spAutoFit/>
-          </a:bodyPr>
-          <a:lstStyle/>
-          <a:p>
-            <a:pPr algn="r">
-              <a:spcAft>
-                <a:spcPts val="0"/>
-              </a:spcAft>
-            </a:pPr>
-            <a:r>
-              <a:rPr sz="1000" b="0" i="0">
-                <a:solidFill>
-                  <a:srgbClr val="94A3B8"/>
-                </a:solidFill>
-                <a:latin typeface="Arial"/>
-              </a:rPr>
-              <a:t>18</a:t>
-            </a:r>
-          </a:p>
-        </p:txBody>
-      </p:sp>
-      <p:sp>
-        <p:nvSpPr>
-          <p:cNvPr id="4" name="Rectangle 3"/>
-          <p:cNvSpPr/>
-          <p:nvPr/>
-        </p:nvSpPr>
-        <p:spPr>
-          <a:xfrm>
-            <a:off x="521207" y="1252728"/>
-            <a:ext cx="6089903" cy="1455646"/>
-          </a:xfrm>
-          <a:prstGeom prst="rect">
-            <a:avLst/>
-          </a:prstGeom>
-          <a:noFill/>
-          <a:ln w="12700">
-            <a:solidFill>
-              <a:srgbClr val="E2E8F0"/>
-            </a:solidFill>
-          </a:ln>
-          <a:effectLst/>
-        </p:spPr>
-        <p:style>
-          <a:lnRef idx="1">
-            <a:schemeClr val="accent1"/>
-          </a:lnRef>
-          <a:fillRef idx="3">
-            <a:schemeClr val="accent1"/>
-          </a:fillRef>
-          <a:effectRef idx="2">
-            <a:schemeClr val="accent1"/>
-          </a:effectRef>
-          <a:fontRef idx="minor">
-            <a:schemeClr val="lt1"/>
-          </a:fontRef>
-        </p:style>
-        <p:txBody>
-          <a:bodyPr rtlCol="0" anchor="ctr"/>
-          <a:lstStyle/>
-          <a:p>
-            <a:pPr algn="ctr"/>
-          </a:p>
-        </p:txBody>
-      </p:sp>
-      <p:pic>
-        <p:nvPicPr>
-          <p:cNvPr id="5" name="Picture 4" descr="card_v8_photo.png"/>
-          <p:cNvPicPr>
-            <a:picLocks noChangeAspect="1"/>
-          </p:cNvPicPr>
-          <p:nvPr/>
-        </p:nvPicPr>
-        <p:blipFill>
-          <a:blip r:embed="rId3"/>
-          <a:stretch>
-            <a:fillRect/>
-          </a:stretch>
-        </p:blipFill>
-        <p:spPr>
-          <a:xfrm>
-            <a:off x="548640" y="1280160"/>
-            <a:ext cx="6035040" cy="1400782"/>
-          </a:xfrm>
-          <a:prstGeom prst="rect">
-            <a:avLst/>
-          </a:prstGeom>
-        </p:spPr>
-      </p:pic>
-      <p:sp>
-        <p:nvSpPr>
-          <p:cNvPr id="6" name="TextBox 5"/>
-          <p:cNvSpPr txBox="1"/>
-          <p:nvPr/>
-        </p:nvSpPr>
-        <p:spPr>
-          <a:xfrm>
-            <a:off x="548640" y="2735806"/>
-            <a:ext cx="6035040" cy="365760"/>
-          </a:xfrm>
-          <a:prstGeom prst="rect">
-            <a:avLst/>
-          </a:prstGeom>
-          <a:noFill/>
-        </p:spPr>
-        <p:txBody>
-          <a:bodyPr wrap="square" anchor="t" lIns="0" rIns="0" tIns="0" bIns="0">
-            <a:spAutoFit/>
-          </a:bodyPr>
-          <a:lstStyle/>
-          <a:p>
-            <a:pPr algn="l">
-              <a:spcAft>
-                <a:spcPts val="0"/>
-              </a:spcAft>
-            </a:pPr>
-            <a:r>
-              <a:rPr sz="1100" b="0" i="0">
-                <a:solidFill>
-                  <a:srgbClr val="475569"/>
-                </a:solidFill>
-                <a:latin typeface="Arial"/>
-              </a:rPr>
-              <a:t>Рисунок 14 – v8 в інтерфейсі організаторів (фото екрана): 66,7 % вчасно</a:t>
-            </a:r>
-          </a:p>
-        </p:txBody>
-      </p:sp>
-      <p:sp>
-        <p:nvSpPr>
-          <p:cNvPr id="7" name="Rectangle 6"/>
-          <p:cNvSpPr/>
-          <p:nvPr/>
-        </p:nvSpPr>
-        <p:spPr>
-          <a:xfrm>
-            <a:off x="521207" y="3220438"/>
-            <a:ext cx="6089903" cy="1635724"/>
-          </a:xfrm>
-          <a:prstGeom prst="rect">
-            <a:avLst/>
-          </a:prstGeom>
-          <a:noFill/>
-          <a:ln w="12700">
-            <a:solidFill>
-              <a:srgbClr val="E2E8F0"/>
-            </a:solidFill>
-          </a:ln>
-          <a:effectLst/>
-        </p:spPr>
-        <p:style>
-          <a:lnRef idx="1">
-            <a:schemeClr val="accent1"/>
-          </a:lnRef>
-          <a:fillRef idx="3">
-            <a:schemeClr val="accent1"/>
-          </a:fillRef>
-          <a:effectRef idx="2">
-            <a:schemeClr val="accent1"/>
-          </a:effectRef>
-          <a:fontRef idx="minor">
-            <a:schemeClr val="lt1"/>
-          </a:fontRef>
-        </p:style>
-        <p:txBody>
-          <a:bodyPr rtlCol="0" anchor="ctr"/>
-          <a:lstStyle/>
-          <a:p>
-            <a:pPr algn="ctr"/>
-          </a:p>
-        </p:txBody>
-      </p:sp>
-      <p:pic>
-        <p:nvPicPr>
-          <p:cNvPr id="8" name="Picture 7" descr="ui_v8_new_engine.png"/>
-          <p:cNvPicPr>
-            <a:picLocks noChangeAspect="1"/>
-          </p:cNvPicPr>
-          <p:nvPr/>
-        </p:nvPicPr>
-        <p:blipFill>
-          <a:blip r:embed="rId4"/>
-          <a:stretch>
-            <a:fillRect/>
-          </a:stretch>
-        </p:blipFill>
-        <p:spPr>
-          <a:xfrm>
-            <a:off x="548640" y="3247870"/>
-            <a:ext cx="6035040" cy="1580860"/>
-          </a:xfrm>
-          <a:prstGeom prst="rect">
-            <a:avLst/>
-          </a:prstGeom>
-        </p:spPr>
-      </p:pic>
-      <p:sp>
-        <p:nvSpPr>
-          <p:cNvPr id="9" name="TextBox 8"/>
-          <p:cNvSpPr txBox="1"/>
-          <p:nvPr/>
-        </p:nvSpPr>
-        <p:spPr>
-          <a:xfrm>
-            <a:off x="548640" y="4883595"/>
-            <a:ext cx="6035040" cy="365760"/>
-          </a:xfrm>
-          <a:prstGeom prst="rect">
-            <a:avLst/>
-          </a:prstGeom>
-          <a:noFill/>
-        </p:spPr>
-        <p:txBody>
-          <a:bodyPr wrap="square" anchor="t" lIns="0" rIns="0" tIns="0" bIns="0">
-            <a:spAutoFit/>
-          </a:bodyPr>
-          <a:lstStyle/>
-          <a:p>
-            <a:pPr algn="l">
-              <a:spcAft>
-                <a:spcPts val="0"/>
-              </a:spcAft>
-            </a:pPr>
-            <a:r>
-              <a:rPr sz="1100" b="0" i="0">
-                <a:solidFill>
-                  <a:srgbClr val="475569"/>
-                </a:solidFill>
-                <a:latin typeface="Arial"/>
-              </a:rPr>
-              <a:t>Рисунок 15 – v8 у симуляторі fusion-sim: 51,0 % вчасно</a:t>
-            </a:r>
-          </a:p>
-        </p:txBody>
-      </p:sp>
-      <p:sp>
-        <p:nvSpPr>
-          <p:cNvPr id="10" name="TextBox 9"/>
-          <p:cNvSpPr txBox="1"/>
-          <p:nvPr/>
-        </p:nvSpPr>
-        <p:spPr>
-          <a:xfrm>
-            <a:off x="7315200" y="1325880"/>
-            <a:ext cx="4343400" cy="2286000"/>
-          </a:xfrm>
-          <a:prstGeom prst="rect">
-            <a:avLst/>
-          </a:prstGeom>
-          <a:noFill/>
-        </p:spPr>
-        <p:txBody>
-          <a:bodyPr wrap="square" anchor="t" lIns="0" rIns="0" tIns="0" bIns="0">
-            <a:spAutoFit/>
-          </a:bodyPr>
-          <a:lstStyle/>
-          <a:p>
-            <a:pPr algn="l">
-              <a:spcAft>
-                <a:spcPts val="800"/>
-              </a:spcAft>
-            </a:pPr>
-            <a:r>
-              <a:rPr sz="1300" b="1" i="0">
-                <a:solidFill>
-                  <a:srgbClr val="0F172A"/>
-                </a:solidFill>
-                <a:latin typeface="Arial"/>
-              </a:rPr>
-              <a:t>Ознаки – </a:t>
-            </a:r>
-            <a:r>
-              <a:rPr sz="1300" b="0" i="0">
-                <a:solidFill>
-                  <a:srgbClr val="0F172A"/>
-                </a:solidFill>
-                <a:latin typeface="Arial"/>
-              </a:rPr>
-              <a:t>ознаки v6, енергія швидкої складової сідлової петлі і зондів Мірнова, оцінка λ</a:t>
-            </a:r>
-          </a:p>
-          <a:p>
-            <a:pPr algn="l">
-              <a:spcAft>
-                <a:spcPts val="800"/>
-              </a:spcAft>
-            </a:pPr>
-            <a:r>
-              <a:rPr sz="1300" b="1" i="0">
-                <a:solidFill>
-                  <a:srgbClr val="0F172A"/>
-                </a:solidFill>
-                <a:latin typeface="Arial"/>
-              </a:rPr>
-              <a:t>Відмінність – </a:t>
-            </a:r>
-            <a:r>
-              <a:rPr sz="1300" b="0" i="0">
-                <a:solidFill>
-                  <a:srgbClr val="0F172A"/>
-                </a:solidFill>
-                <a:latin typeface="Arial"/>
-              </a:rPr>
-              <a:t>найвищий об'єм (0,944), але використовує формули шпаргалки і мітку сценарію</a:t>
-            </a:r>
-          </a:p>
-          <a:p>
-            <a:pPr algn="l">
-              <a:spcAft>
-                <a:spcPts val="800"/>
-              </a:spcAft>
-            </a:pPr>
-            <a:r>
-              <a:rPr sz="1300" b="1" i="0">
-                <a:solidFill>
-                  <a:srgbClr val="0F172A"/>
-                </a:solidFill>
-                <a:latin typeface="Arial"/>
-              </a:rPr>
-              <a:t/>
-            </a:r>
-            <a:r>
-              <a:rPr sz="1300" b="0" i="0">
-                <a:solidFill>
-                  <a:srgbClr val="0F172A"/>
-                </a:solidFill>
-                <a:latin typeface="Arial"/>
-              </a:rPr>
-              <a:t>у безшумному симуляторі fusion-sim (200 розрядів): 51 % вчасно, пропущено 0</a:t>
-            </a:r>
-          </a:p>
-        </p:txBody>
-      </p:sp>
-      <p:sp>
-        <p:nvSpPr>
-          <p:cNvPr id="11" name="TextBox 10"/>
-          <p:cNvSpPr txBox="1"/>
-          <p:nvPr/>
-        </p:nvSpPr>
-        <p:spPr>
-          <a:xfrm>
-            <a:off x="7315200" y="3703320"/>
-            <a:ext cx="4343400" cy="320040"/>
-          </a:xfrm>
-          <a:prstGeom prst="rect">
-            <a:avLst/>
-          </a:prstGeom>
-          <a:noFill/>
-        </p:spPr>
-        <p:txBody>
-          <a:bodyPr wrap="square" anchor="t" lIns="0" rIns="0" tIns="0" bIns="0">
-            <a:spAutoFit/>
-          </a:bodyPr>
-          <a:lstStyle/>
-          <a:p>
-            <a:pPr algn="l">
-              <a:spcAft>
-                <a:spcPts val="0"/>
-              </a:spcAft>
-            </a:pPr>
-            <a:r>
-              <a:rPr sz="1100" b="0" i="0">
-                <a:solidFill>
-                  <a:srgbClr val="475569"/>
-                </a:solidFill>
-                <a:latin typeface="Arial"/>
-              </a:rPr>
-              <a:t>Таблиця 9 – Показники (офіційні набори toksym)</a:t>
-            </a:r>
-          </a:p>
-        </p:txBody>
-      </p:sp>
-      <p:graphicFrame>
-        <p:nvGraphicFramePr>
-          <p:cNvPr id="12" name="Table 11"/>
-          <p:cNvGraphicFramePr>
-            <a:graphicFrameLocks noGrp="1"/>
-          </p:cNvGraphicFramePr>
-          <p:nvPr/>
-        </p:nvGraphicFramePr>
-        <p:xfrm>
-          <a:off x="7315200" y="4069080"/>
-          <a:ext cx="4343400" cy="1389888"/>
-        </p:xfrm>
-        <a:graphic>
-          <a:graphicData uri="http://schemas.openxmlformats.org/drawingml/2006/table">
-            <a:tbl>
-              <a:tblPr firstRow="0" bandRow="0">
-                <a:tableStyleId>{5C22544A-7EE6-4342-B048-85BDC9FD1C3A}</a:tableStyleId>
-              </a:tblPr>
-              <a:tblGrid>
-                <a:gridCol w="2514600"/>
-                <a:gridCol w="1828800"/>
-              </a:tblGrid>
-              <a:tr h="347472">
-                <a:tc>
-                  <a:txBody>
-                    <a:bodyPr wrap="square"/>
-                    <a:lstStyle/>
-                    <a:p>
-                      <a:pPr algn="l"/>
-                      <a:r>
-                        <a:rPr sz="1100" b="1">
-                          <a:solidFill>
-                            <a:srgbClr val="475569"/>
-                          </a:solidFill>
-                          <a:latin typeface="Arial"/>
-                        </a:rPr>
-                        <a:t>показник</a:t>
-                      </a:r>
-                    </a:p>
-                  </a:txBody>
-                  <a:tcPr marL="91440" marR="91440" marT="27432" marB="27432" anchor="ctr">
-                    <a:solidFill>
-                      <a:srgbClr val="F1F5F9"/>
-                    </a:solidFill>
-                  </a:tcPr>
-                </a:tc>
-                <a:tc>
-                  <a:txBody>
-                    <a:bodyPr wrap="square"/>
-                    <a:lstStyle/>
-                    <a:p>
-                      <a:pPr algn="ctr"/>
-                      <a:r>
-                        <a:rPr sz="1100" b="1">
-                          <a:solidFill>
-                            <a:srgbClr val="475569"/>
-                          </a:solidFill>
-                          <a:latin typeface="Arial"/>
-                        </a:rPr>
-                        <a:t>значення</a:t>
-                      </a:r>
-                    </a:p>
-                  </a:txBody>
-                  <a:tcPr marL="91440" marR="91440" marT="27432" marB="27432" anchor="ctr">
-                    <a:solidFill>
-                      <a:srgbClr val="F1F5F9"/>
-                    </a:solidFill>
-                  </a:tcPr>
-                </a:tc>
-              </a:tr>
-              <a:tr h="347472">
-                <a:tc>
-                  <a:txBody>
-                    <a:bodyPr wrap="square"/>
-                    <a:lstStyle/>
-                    <a:p>
-                      <a:pPr algn="l"/>
-                      <a:r>
-                        <a:rPr sz="1100" b="1">
-                          <a:solidFill>
-                            <a:srgbClr val="0F172A"/>
-                          </a:solidFill>
-                          <a:latin typeface="Arial"/>
-                        </a:rPr>
-                        <a:t>ROC AUC, 30 мс</a:t>
-                      </a:r>
-                    </a:p>
-                  </a:txBody>
-                  <a:tcPr marL="91440" marR="91440" marT="27432" marB="27432" anchor="ctr">
-                    <a:solidFill>
-                      <a:srgbClr val="FFFFFF"/>
-                    </a:solidFill>
-                  </a:tcPr>
-                </a:tc>
-                <a:tc>
-                  <a:txBody>
-                    <a:bodyPr wrap="square"/>
-                    <a:lstStyle/>
-                    <a:p>
-                      <a:pPr algn="ctr"/>
-                      <a:r>
-                        <a:rPr sz="1200" b="0">
-                          <a:solidFill>
-                            <a:srgbClr val="0F172A"/>
-                          </a:solidFill>
-                          <a:latin typeface="Arial"/>
-                        </a:rPr>
-                        <a:t>0,996</a:t>
-                      </a:r>
-                    </a:p>
-                  </a:txBody>
-                  <a:tcPr marL="91440" marR="91440" marT="27432" marB="27432" anchor="ctr">
-                    <a:solidFill>
-                      <a:srgbClr val="FFFFFF"/>
-                    </a:solidFill>
-                  </a:tcPr>
-                </a:tc>
-              </a:tr>
-              <a:tr h="347472">
-                <a:tc>
-                  <a:txBody>
-                    <a:bodyPr wrap="square"/>
-                    <a:lstStyle/>
-                    <a:p>
-                      <a:pPr algn="l"/>
-                      <a:r>
-                        <a:rPr sz="1100" b="1">
-                          <a:solidFill>
-                            <a:srgbClr val="0F172A"/>
-                          </a:solidFill>
-                          <a:latin typeface="Arial"/>
-                        </a:rPr>
-                        <a:t>ROC AUC, 0,1 с</a:t>
-                      </a:r>
-                    </a:p>
-                  </a:txBody>
-                  <a:tcPr marL="91440" marR="91440" marT="27432" marB="27432" anchor="ctr">
-                    <a:solidFill>
-                      <a:srgbClr val="FFFFFF"/>
-                    </a:solidFill>
-                  </a:tcPr>
-                </a:tc>
-                <a:tc>
-                  <a:txBody>
-                    <a:bodyPr wrap="square"/>
-                    <a:lstStyle/>
-                    <a:p>
-                      <a:pPr algn="ctr"/>
-                      <a:r>
-                        <a:rPr sz="1200" b="0">
-                          <a:solidFill>
-                            <a:srgbClr val="0F172A"/>
-                          </a:solidFill>
-                          <a:latin typeface="Arial"/>
-                        </a:rPr>
-                        <a:t>0,934</a:t>
-                      </a:r>
-                    </a:p>
-                  </a:txBody>
-                  <a:tcPr marL="91440" marR="91440" marT="27432" marB="27432" anchor="ctr">
-                    <a:solidFill>
-                      <a:srgbClr val="FFFFFF"/>
-                    </a:solidFill>
-                  </a:tcPr>
-                </a:tc>
-              </a:tr>
-              <a:tr h="347472">
-                <a:tc>
-                  <a:txBody>
-                    <a:bodyPr wrap="square"/>
-                    <a:lstStyle/>
-                    <a:p>
-                      <a:pPr algn="l"/>
-                      <a:r>
-                        <a:rPr sz="1100" b="1">
-                          <a:solidFill>
-                            <a:srgbClr val="0F172A"/>
-                          </a:solidFill>
-                          <a:latin typeface="Arial"/>
-                        </a:rPr>
-                        <a:t>об'єм</a:t>
-                      </a:r>
-                    </a:p>
-                  </a:txBody>
-                  <a:tcPr marL="91440" marR="91440" marT="27432" marB="27432" anchor="ctr">
-                    <a:solidFill>
-                      <a:srgbClr val="FFFFFF"/>
-                    </a:solidFill>
-                  </a:tcPr>
-                </a:tc>
-                <a:tc>
-                  <a:txBody>
-                    <a:bodyPr wrap="square"/>
-                    <a:lstStyle/>
-                    <a:p>
-                      <a:pPr algn="ctr"/>
-                      <a:r>
-                        <a:rPr sz="1200" b="0">
-                          <a:solidFill>
-                            <a:srgbClr val="0F172A"/>
-                          </a:solidFill>
-                          <a:latin typeface="Arial"/>
-                        </a:rPr>
-                        <a:t>0,944</a:t>
-                      </a:r>
-                    </a:p>
-                  </a:txBody>
-                  <a:tcPr marL="91440" marR="91440" marT="27432" marB="27432" anchor="ctr">
-                    <a:solidFill>
-                      <a:srgbClr val="FFFFFF"/>
-                    </a:solidFill>
-                  </a:tcPr>
-                </a:tc>
-              </a:tr>
-            </a:tbl>
-          </a:graphicData>
-        </a:graphic>
-      </p:graphicFrame>
-    </p:spTree>
-  </p:cSld>
-  <p:clrMapOvr>
-    <a:masterClrMapping/>
-  </p:clrMapOvr>
-</p:sld>
-</file>
-
-<file path=ppt/slides/slide19.xml><?xml version="1.0" encoding="utf-8"?>
-<p:sld xmlns:a="http://schemas.openxmlformats.org/drawingml/2006/main" xmlns:p="http://schemas.openxmlformats.org/presentationml/2006/main" xmlns:r="http://schemas.openxmlformats.org/officeDocument/2006/relationships">
-  <p:cSld>
-    <p:bg>
-      <p:bgPr>
-        <a:solidFill>
-          <a:srgbClr val="FFFFFF"/>
-        </a:solidFill>
-        <a:effectLst/>
-      </p:bgPr>
-    </p:bg>
-    <p:spTree>
-      <p:nvGrpSpPr>
-        <p:cNvPr id="1" name=""/>
-        <p:cNvGrpSpPr/>
-        <p:nvPr/>
-      </p:nvGrpSpPr>
-      <p:grpSpPr/>
-      <p:sp>
-        <p:nvSpPr>
-          <p:cNvPr id="2" name="TextBox 1"/>
-          <p:cNvSpPr txBox="1"/>
-          <p:nvPr/>
-        </p:nvSpPr>
-        <p:spPr>
-          <a:xfrm>
-            <a:off x="548640" y="411480"/>
-            <a:ext cx="11064240" cy="640080"/>
-          </a:xfrm>
-          <a:prstGeom prst="rect">
-            <a:avLst/>
-          </a:prstGeom>
-          <a:noFill/>
-        </p:spPr>
-        <p:txBody>
-          <a:bodyPr wrap="square" anchor="t" lIns="0" rIns="0" tIns="0" bIns="0">
-            <a:spAutoFit/>
-          </a:bodyPr>
-          <a:lstStyle/>
-          <a:p>
-            <a:pPr algn="l">
-              <a:spcAft>
-                <a:spcPts val="0"/>
-              </a:spcAft>
-            </a:pPr>
-            <a:r>
-              <a:rPr sz="2600" b="1" i="0">
-                <a:solidFill>
-                  <a:srgbClr val="0F172A"/>
-                </a:solidFill>
-                <a:latin typeface="Arial"/>
-              </a:rPr>
-              <a:t>Додаток А.4 nocs: без формул шпаргалки, з міткою сценарію</a:t>
-            </a:r>
-          </a:p>
-        </p:txBody>
-      </p:sp>
-      <p:sp>
-        <p:nvSpPr>
-          <p:cNvPr id="3" name="TextBox 2"/>
-          <p:cNvSpPr txBox="1"/>
-          <p:nvPr/>
-        </p:nvSpPr>
-        <p:spPr>
-          <a:xfrm>
-            <a:off x="11247120" y="6446520"/>
-            <a:ext cx="457200" cy="274320"/>
-          </a:xfrm>
-          <a:prstGeom prst="rect">
-            <a:avLst/>
-          </a:prstGeom>
-          <a:noFill/>
-        </p:spPr>
-        <p:txBody>
-          <a:bodyPr wrap="square" anchor="t" lIns="0" rIns="0" tIns="0" bIns="0">
-            <a:spAutoFit/>
-          </a:bodyPr>
-          <a:lstStyle/>
-          <a:p>
-            <a:pPr algn="r">
-              <a:spcAft>
-                <a:spcPts val="0"/>
-              </a:spcAft>
-            </a:pPr>
-            <a:r>
-              <a:rPr sz="1000" b="0" i="0">
-                <a:solidFill>
-                  <a:srgbClr val="94A3B8"/>
-                </a:solidFill>
-                <a:latin typeface="Arial"/>
-              </a:rPr>
-              <a:t>19</a:t>
-            </a:r>
-          </a:p>
-        </p:txBody>
-      </p:sp>
-      <p:sp>
-        <p:nvSpPr>
-          <p:cNvPr id="4" name="Rectangle 3"/>
-          <p:cNvSpPr/>
-          <p:nvPr/>
-        </p:nvSpPr>
-        <p:spPr>
-          <a:xfrm>
-            <a:off x="521207" y="1252728"/>
-            <a:ext cx="6089903" cy="1891615"/>
-          </a:xfrm>
-          <a:prstGeom prst="rect">
-            <a:avLst/>
-          </a:prstGeom>
-          <a:noFill/>
-          <a:ln w="12700">
-            <a:solidFill>
-              <a:srgbClr val="E2E8F0"/>
-            </a:solidFill>
-          </a:ln>
-          <a:effectLst/>
-        </p:spPr>
-        <p:style>
-          <a:lnRef idx="1">
-            <a:schemeClr val="accent1"/>
-          </a:lnRef>
-          <a:fillRef idx="3">
-            <a:schemeClr val="accent1"/>
-          </a:fillRef>
-          <a:effectRef idx="2">
-            <a:schemeClr val="accent1"/>
-          </a:effectRef>
-          <a:fontRef idx="minor">
-            <a:schemeClr val="lt1"/>
-          </a:fontRef>
-        </p:style>
-        <p:txBody>
-          <a:bodyPr rtlCol="0" anchor="ctr"/>
-          <a:lstStyle/>
-          <a:p>
-            <a:pPr algn="ctr"/>
-          </a:p>
-        </p:txBody>
-      </p:sp>
-      <p:pic>
-        <p:nvPicPr>
-          <p:cNvPr id="5" name="Picture 4" descr="card_nocs_photo.png"/>
-          <p:cNvPicPr>
-            <a:picLocks noChangeAspect="1"/>
-          </p:cNvPicPr>
-          <p:nvPr/>
-        </p:nvPicPr>
-        <p:blipFill>
-          <a:blip r:embed="rId3"/>
-          <a:stretch>
-            <a:fillRect/>
-          </a:stretch>
-        </p:blipFill>
-        <p:spPr>
-          <a:xfrm>
-            <a:off x="548640" y="1280160"/>
-            <a:ext cx="6035040" cy="1836751"/>
-          </a:xfrm>
-          <a:prstGeom prst="rect">
-            <a:avLst/>
-          </a:prstGeom>
-        </p:spPr>
-      </p:pic>
-      <p:sp>
-        <p:nvSpPr>
-          <p:cNvPr id="6" name="TextBox 5"/>
-          <p:cNvSpPr txBox="1"/>
-          <p:nvPr/>
-        </p:nvSpPr>
-        <p:spPr>
-          <a:xfrm>
-            <a:off x="548640" y="3171775"/>
-            <a:ext cx="6035040" cy="365760"/>
-          </a:xfrm>
-          <a:prstGeom prst="rect">
-            <a:avLst/>
-          </a:prstGeom>
-          <a:noFill/>
-        </p:spPr>
-        <p:txBody>
-          <a:bodyPr wrap="square" anchor="t" lIns="0" rIns="0" tIns="0" bIns="0">
-            <a:spAutoFit/>
-          </a:bodyPr>
-          <a:lstStyle/>
-          <a:p>
-            <a:pPr algn="l">
-              <a:spcAft>
-                <a:spcPts val="0"/>
-              </a:spcAft>
-            </a:pPr>
-            <a:r>
-              <a:rPr sz="1100" b="0" i="0">
-                <a:solidFill>
-                  <a:srgbClr val="475569"/>
-                </a:solidFill>
-                <a:latin typeface="Arial"/>
-              </a:rPr>
-              <a:t>Рисунок 16 – nocs в інтерфейсі (фото екрана): 65,1 % вчасно</a:t>
-            </a:r>
-          </a:p>
-        </p:txBody>
-      </p:sp>
-      <p:sp>
-        <p:nvSpPr>
-          <p:cNvPr id="7" name="TextBox 6"/>
-          <p:cNvSpPr txBox="1"/>
-          <p:nvPr/>
-        </p:nvSpPr>
-        <p:spPr>
-          <a:xfrm>
-            <a:off x="7315200" y="1325880"/>
-            <a:ext cx="4343400" cy="2286000"/>
-          </a:xfrm>
-          <a:prstGeom prst="rect">
-            <a:avLst/>
-          </a:prstGeom>
-          <a:noFill/>
-        </p:spPr>
-        <p:txBody>
-          <a:bodyPr wrap="square" anchor="t" lIns="0" rIns="0" tIns="0" bIns="0">
-            <a:spAutoFit/>
-          </a:bodyPr>
-          <a:lstStyle/>
-          <a:p>
-            <a:pPr algn="l">
-              <a:spcAft>
-                <a:spcPts val="800"/>
-              </a:spcAft>
-            </a:pPr>
-            <a:r>
-              <a:rPr sz="1300" b="1" i="0">
-                <a:solidFill>
-                  <a:srgbClr val="0F172A"/>
-                </a:solidFill>
-                <a:latin typeface="Arial"/>
-              </a:rPr>
-              <a:t>Ознаки – </a:t>
-            </a:r>
-            <a:r>
-              <a:rPr sz="1300" b="0" i="0">
-                <a:solidFill>
-                  <a:srgbClr val="0F172A"/>
-                </a:solidFill>
-                <a:latin typeface="Arial"/>
-              </a:rPr>
-              <a:t>згладжені сирі канали, уставки, детектор передвісника, мітка сценарію і таймери програми</a:t>
-            </a:r>
-          </a:p>
-          <a:p>
-            <a:pPr algn="l">
-              <a:spcAft>
-                <a:spcPts val="800"/>
-              </a:spcAft>
-            </a:pPr>
-            <a:r>
-              <a:rPr sz="1300" b="1" i="0">
-                <a:solidFill>
-                  <a:srgbClr val="0F172A"/>
-                </a:solidFill>
-                <a:latin typeface="Arial"/>
-              </a:rPr>
-              <a:t>Відмінність – </a:t>
-            </a:r>
-            <a:r>
-              <a:rPr sz="1300" b="0" i="0">
-                <a:solidFill>
-                  <a:srgbClr val="0F172A"/>
-                </a:solidFill>
-                <a:latin typeface="Arial"/>
-              </a:rPr>
-              <a:t>формули шпаргалки вилучено, мітку сценарію залишено</a:t>
-            </a:r>
-          </a:p>
-          <a:p>
-            <a:pPr algn="l">
-              <a:spcAft>
-                <a:spcPts val="800"/>
-              </a:spcAft>
-            </a:pPr>
-            <a:r>
-              <a:rPr sz="1300" b="1" i="0">
-                <a:solidFill>
-                  <a:srgbClr val="0F172A"/>
-                </a:solidFill>
-                <a:latin typeface="Arial"/>
-              </a:rPr>
-              <a:t/>
-            </a:r>
-            <a:r>
-              <a:rPr sz="1300" b="0" i="0">
-                <a:solidFill>
-                  <a:srgbClr val="0F172A"/>
-                </a:solidFill>
-                <a:latin typeface="Arial"/>
-              </a:rPr>
-              <a:t>мітка scen_none гарантує відсутність зарахованого зриву, тобто є артефактом симулятора; модель не обрано</a:t>
-            </a:r>
-          </a:p>
-        </p:txBody>
-      </p:sp>
-      <p:sp>
-        <p:nvSpPr>
-          <p:cNvPr id="8" name="TextBox 7"/>
-          <p:cNvSpPr txBox="1"/>
-          <p:nvPr/>
-        </p:nvSpPr>
-        <p:spPr>
-          <a:xfrm>
-            <a:off x="7315200" y="3703320"/>
-            <a:ext cx="4343400" cy="320040"/>
-          </a:xfrm>
-          <a:prstGeom prst="rect">
-            <a:avLst/>
-          </a:prstGeom>
-          <a:noFill/>
-        </p:spPr>
-        <p:txBody>
-          <a:bodyPr wrap="square" anchor="t" lIns="0" rIns="0" tIns="0" bIns="0">
-            <a:spAutoFit/>
-          </a:bodyPr>
-          <a:lstStyle/>
-          <a:p>
-            <a:pPr algn="l">
-              <a:spcAft>
-                <a:spcPts val="0"/>
-              </a:spcAft>
-            </a:pPr>
-            <a:r>
-              <a:rPr sz="1100" b="0" i="0">
-                <a:solidFill>
-                  <a:srgbClr val="475569"/>
-                </a:solidFill>
-                <a:latin typeface="Arial"/>
-              </a:rPr>
-              <a:t>Таблиця 10 – Показники (офіційні набори toksym)</a:t>
-            </a:r>
-          </a:p>
-        </p:txBody>
-      </p:sp>
-      <p:graphicFrame>
-        <p:nvGraphicFramePr>
-          <p:cNvPr id="9" name="Table 8"/>
-          <p:cNvGraphicFramePr>
-            <a:graphicFrameLocks noGrp="1"/>
-          </p:cNvGraphicFramePr>
-          <p:nvPr/>
-        </p:nvGraphicFramePr>
-        <p:xfrm>
-          <a:off x="7315200" y="4069080"/>
-          <a:ext cx="4343400" cy="1389888"/>
-        </p:xfrm>
-        <a:graphic>
-          <a:graphicData uri="http://schemas.openxmlformats.org/drawingml/2006/table">
-            <a:tbl>
-              <a:tblPr firstRow="0" bandRow="0">
-                <a:tableStyleId>{5C22544A-7EE6-4342-B048-85BDC9FD1C3A}</a:tableStyleId>
-              </a:tblPr>
-              <a:tblGrid>
-                <a:gridCol w="2514600"/>
-                <a:gridCol w="1828800"/>
-              </a:tblGrid>
-              <a:tr h="347472">
-                <a:tc>
-                  <a:txBody>
-                    <a:bodyPr wrap="square"/>
-                    <a:lstStyle/>
-                    <a:p>
-                      <a:pPr algn="l"/>
-                      <a:r>
-                        <a:rPr sz="1100" b="1">
-                          <a:solidFill>
-                            <a:srgbClr val="475569"/>
-                          </a:solidFill>
-                          <a:latin typeface="Arial"/>
-                        </a:rPr>
-                        <a:t>показник</a:t>
-                      </a:r>
-                    </a:p>
-                  </a:txBody>
-                  <a:tcPr marL="91440" marR="91440" marT="27432" marB="27432" anchor="ctr">
-                    <a:solidFill>
-                      <a:srgbClr val="F1F5F9"/>
-                    </a:solidFill>
-                  </a:tcPr>
-                </a:tc>
-                <a:tc>
-                  <a:txBody>
-                    <a:bodyPr wrap="square"/>
-                    <a:lstStyle/>
-                    <a:p>
-                      <a:pPr algn="ctr"/>
-                      <a:r>
-                        <a:rPr sz="1100" b="1">
-                          <a:solidFill>
-                            <a:srgbClr val="475569"/>
-                          </a:solidFill>
-                          <a:latin typeface="Arial"/>
-                        </a:rPr>
-                        <a:t>значення</a:t>
-                      </a:r>
-                    </a:p>
-                  </a:txBody>
-                  <a:tcPr marL="91440" marR="91440" marT="27432" marB="27432" anchor="ctr">
-                    <a:solidFill>
-                      <a:srgbClr val="F1F5F9"/>
-                    </a:solidFill>
-                  </a:tcPr>
-                </a:tc>
-              </a:tr>
-              <a:tr h="347472">
-                <a:tc>
-                  <a:txBody>
-                    <a:bodyPr wrap="square"/>
-                    <a:lstStyle/>
-                    <a:p>
-                      <a:pPr algn="l"/>
-                      <a:r>
-                        <a:rPr sz="1100" b="1">
-                          <a:solidFill>
-                            <a:srgbClr val="0F172A"/>
-                          </a:solidFill>
-                          <a:latin typeface="Arial"/>
-                        </a:rPr>
-                        <a:t>ROC AUC, 30 мс</a:t>
-                      </a:r>
-                    </a:p>
-                  </a:txBody>
-                  <a:tcPr marL="91440" marR="91440" marT="27432" marB="27432" anchor="ctr">
-                    <a:solidFill>
-                      <a:srgbClr val="FFFFFF"/>
-                    </a:solidFill>
-                  </a:tcPr>
-                </a:tc>
-                <a:tc>
-                  <a:txBody>
-                    <a:bodyPr wrap="square"/>
-                    <a:lstStyle/>
-                    <a:p>
-                      <a:pPr algn="ctr"/>
-                      <a:r>
-                        <a:rPr sz="1200" b="0">
-                          <a:solidFill>
-                            <a:srgbClr val="0F172A"/>
-                          </a:solidFill>
-                          <a:latin typeface="Arial"/>
-                        </a:rPr>
-                        <a:t>0,996</a:t>
-                      </a:r>
-                    </a:p>
-                  </a:txBody>
-                  <a:tcPr marL="91440" marR="91440" marT="27432" marB="27432" anchor="ctr">
-                    <a:solidFill>
-                      <a:srgbClr val="FFFFFF"/>
-                    </a:solidFill>
-                  </a:tcPr>
-                </a:tc>
-              </a:tr>
-              <a:tr h="347472">
-                <a:tc>
-                  <a:txBody>
-                    <a:bodyPr wrap="square"/>
-                    <a:lstStyle/>
-                    <a:p>
-                      <a:pPr algn="l"/>
-                      <a:r>
-                        <a:rPr sz="1100" b="1">
-                          <a:solidFill>
-                            <a:srgbClr val="0F172A"/>
-                          </a:solidFill>
-                          <a:latin typeface="Arial"/>
-                        </a:rPr>
-                        <a:t>ROC AUC, 0,1 с</a:t>
-                      </a:r>
-                    </a:p>
-                  </a:txBody>
-                  <a:tcPr marL="91440" marR="91440" marT="27432" marB="27432" anchor="ctr">
-                    <a:solidFill>
-                      <a:srgbClr val="FFFFFF"/>
-                    </a:solidFill>
-                  </a:tcPr>
-                </a:tc>
-                <a:tc>
-                  <a:txBody>
-                    <a:bodyPr wrap="square"/>
-                    <a:lstStyle/>
-                    <a:p>
-                      <a:pPr algn="ctr"/>
-                      <a:r>
-                        <a:rPr sz="1200" b="0">
-                          <a:solidFill>
-                            <a:srgbClr val="0F172A"/>
-                          </a:solidFill>
-                          <a:latin typeface="Arial"/>
-                        </a:rPr>
-                        <a:t>0,900</a:t>
-                      </a:r>
-                    </a:p>
-                  </a:txBody>
-                  <a:tcPr marL="91440" marR="91440" marT="27432" marB="27432" anchor="ctr">
-                    <a:solidFill>
-                      <a:srgbClr val="FFFFFF"/>
-                    </a:solidFill>
-                  </a:tcPr>
-                </a:tc>
-              </a:tr>
-              <a:tr h="347472">
-                <a:tc>
-                  <a:txBody>
-                    <a:bodyPr wrap="square"/>
-                    <a:lstStyle/>
-                    <a:p>
-                      <a:pPr algn="l"/>
-                      <a:r>
-                        <a:rPr sz="1100" b="1">
-                          <a:solidFill>
-                            <a:srgbClr val="0F172A"/>
-                          </a:solidFill>
-                          <a:latin typeface="Arial"/>
-                        </a:rPr>
-                        <a:t>об'єм</a:t>
-                      </a:r>
-                    </a:p>
-                  </a:txBody>
-                  <a:tcPr marL="91440" marR="91440" marT="27432" marB="27432" anchor="ctr">
-                    <a:solidFill>
-                      <a:srgbClr val="FFFFFF"/>
-                    </a:solidFill>
-                  </a:tcPr>
-                </a:tc>
-                <a:tc>
-                  <a:txBody>
-                    <a:bodyPr wrap="square"/>
-                    <a:lstStyle/>
-                    <a:p>
-                      <a:pPr algn="ctr"/>
-                      <a:r>
-                        <a:rPr sz="1200" b="0">
-                          <a:solidFill>
-                            <a:srgbClr val="0F172A"/>
-                          </a:solidFill>
-                          <a:latin typeface="Arial"/>
-                        </a:rPr>
-                        <a:t>0,926</a:t>
-                      </a:r>
-                    </a:p>
-                  </a:txBody>
-                  <a:tcPr marL="91440" marR="91440" marT="27432" marB="27432" anchor="ctr">
-                    <a:solidFill>
-                      <a:srgbClr val="FFFFFF"/>
-                    </a:solidFill>
-                  </a:tcPr>
-                </a:tc>
-              </a:tr>
-            </a:tbl>
-          </a:graphicData>
-        </a:graphic>
-      </p:graphicFrame>
+              <a:t>Дякуємо за увагу</a:t>
+            </a:r>
+          </a:p>
+        </p:txBody>
+      </p:sp>
     </p:spTree>
   </p:cSld>
   <p:clrMapOvr>
@@ -12254,2189 +9261,6 @@
           </a:p>
         </p:txBody>
       </p:sp>
-    </p:spTree>
-  </p:cSld>
-  <p:clrMapOvr>
-    <a:masterClrMapping/>
-  </p:clrMapOvr>
-</p:sld>
-</file>
-
-<file path=ppt/slides/slide20.xml><?xml version="1.0" encoding="utf-8"?>
-<p:sld xmlns:a="http://schemas.openxmlformats.org/drawingml/2006/main" xmlns:p="http://schemas.openxmlformats.org/presentationml/2006/main" xmlns:r="http://schemas.openxmlformats.org/officeDocument/2006/relationships">
-  <p:cSld>
-    <p:bg>
-      <p:bgPr>
-        <a:solidFill>
-          <a:srgbClr val="FFFFFF"/>
-        </a:solidFill>
-        <a:effectLst/>
-      </p:bgPr>
-    </p:bg>
-    <p:spTree>
-      <p:nvGrpSpPr>
-        <p:cNvPr id="1" name=""/>
-        <p:cNvGrpSpPr/>
-        <p:nvPr/>
-      </p:nvGrpSpPr>
-      <p:grpSpPr/>
-      <p:sp>
-        <p:nvSpPr>
-          <p:cNvPr id="2" name="TextBox 1"/>
-          <p:cNvSpPr txBox="1"/>
-          <p:nvPr/>
-        </p:nvSpPr>
-        <p:spPr>
-          <a:xfrm>
-            <a:off x="548640" y="411480"/>
-            <a:ext cx="11064240" cy="640080"/>
-          </a:xfrm>
-          <a:prstGeom prst="rect">
-            <a:avLst/>
-          </a:prstGeom>
-          <a:noFill/>
-        </p:spPr>
-        <p:txBody>
-          <a:bodyPr wrap="square" anchor="t" lIns="0" rIns="0" tIns="0" bIns="0">
-            <a:spAutoFit/>
-          </a:bodyPr>
-          <a:lstStyle/>
-          <a:p>
-            <a:pPr algn="l">
-              <a:spcAft>
-                <a:spcPts val="0"/>
-              </a:spcAft>
-            </a:pPr>
-            <a:r>
-              <a:rPr sz="2600" b="1" i="0">
-                <a:solidFill>
-                  <a:srgbClr val="0F172A"/>
-                </a:solidFill>
-                <a:latin typeface="Arial"/>
-              </a:rPr>
-              <a:t>Додаток А.5 clean_big: фінальне рішення</a:t>
-            </a:r>
-          </a:p>
-        </p:txBody>
-      </p:sp>
-      <p:sp>
-        <p:nvSpPr>
-          <p:cNvPr id="3" name="TextBox 2"/>
-          <p:cNvSpPr txBox="1"/>
-          <p:nvPr/>
-        </p:nvSpPr>
-        <p:spPr>
-          <a:xfrm>
-            <a:off x="11247120" y="6446520"/>
-            <a:ext cx="457200" cy="274320"/>
-          </a:xfrm>
-          <a:prstGeom prst="rect">
-            <a:avLst/>
-          </a:prstGeom>
-          <a:noFill/>
-        </p:spPr>
-        <p:txBody>
-          <a:bodyPr wrap="square" anchor="t" lIns="0" rIns="0" tIns="0" bIns="0">
-            <a:spAutoFit/>
-          </a:bodyPr>
-          <a:lstStyle/>
-          <a:p>
-            <a:pPr algn="r">
-              <a:spcAft>
-                <a:spcPts val="0"/>
-              </a:spcAft>
-            </a:pPr>
-            <a:r>
-              <a:rPr sz="1000" b="0" i="0">
-                <a:solidFill>
-                  <a:srgbClr val="94A3B8"/>
-                </a:solidFill>
-                <a:latin typeface="Arial"/>
-              </a:rPr>
-              <a:t>20</a:t>
-            </a:r>
-          </a:p>
-        </p:txBody>
-      </p:sp>
-      <p:sp>
-        <p:nvSpPr>
-          <p:cNvPr id="4" name="Rectangle 3"/>
-          <p:cNvSpPr/>
-          <p:nvPr/>
-        </p:nvSpPr>
-        <p:spPr>
-          <a:xfrm>
-            <a:off x="521207" y="1252728"/>
-            <a:ext cx="6547103" cy="899093"/>
-          </a:xfrm>
-          <a:prstGeom prst="rect">
-            <a:avLst/>
-          </a:prstGeom>
-          <a:noFill/>
-          <a:ln w="12700">
-            <a:solidFill>
-              <a:srgbClr val="E2E8F0"/>
-            </a:solidFill>
-          </a:ln>
-          <a:effectLst/>
-        </p:spPr>
-        <p:style>
-          <a:lnRef idx="1">
-            <a:schemeClr val="accent1"/>
-          </a:lnRef>
-          <a:fillRef idx="3">
-            <a:schemeClr val="accent1"/>
-          </a:fillRef>
-          <a:effectRef idx="2">
-            <a:schemeClr val="accent1"/>
-          </a:effectRef>
-          <a:fontRef idx="minor">
-            <a:schemeClr val="lt1"/>
-          </a:fontRef>
-        </p:style>
-        <p:txBody>
-          <a:bodyPr rtlCol="0" anchor="ctr"/>
-          <a:lstStyle/>
-          <a:p>
-            <a:pPr algn="ctr"/>
-          </a:p>
-        </p:txBody>
-      </p:sp>
-      <p:pic>
-        <p:nvPicPr>
-          <p:cNvPr id="5" name="Picture 4" descr="ui_clean_big_01_auc.png"/>
-          <p:cNvPicPr>
-            <a:picLocks noChangeAspect="1"/>
-          </p:cNvPicPr>
-          <p:nvPr/>
-        </p:nvPicPr>
-        <p:blipFill>
-          <a:blip r:embed="rId3"/>
-          <a:stretch>
-            <a:fillRect/>
-          </a:stretch>
-        </p:blipFill>
-        <p:spPr>
-          <a:xfrm>
-            <a:off x="548640" y="1280160"/>
-            <a:ext cx="6492240" cy="844229"/>
-          </a:xfrm>
-          <a:prstGeom prst="rect">
-            <a:avLst/>
-          </a:prstGeom>
-        </p:spPr>
-      </p:pic>
-      <p:sp>
-        <p:nvSpPr>
-          <p:cNvPr id="6" name="TextBox 5"/>
-          <p:cNvSpPr txBox="1"/>
-          <p:nvPr/>
-        </p:nvSpPr>
-        <p:spPr>
-          <a:xfrm>
-            <a:off x="548640" y="2179253"/>
-            <a:ext cx="6492240" cy="365760"/>
-          </a:xfrm>
-          <a:prstGeom prst="rect">
-            <a:avLst/>
-          </a:prstGeom>
-          <a:noFill/>
-        </p:spPr>
-        <p:txBody>
-          <a:bodyPr wrap="square" anchor="t" lIns="0" rIns="0" tIns="0" bIns="0">
-            <a:spAutoFit/>
-          </a:bodyPr>
-          <a:lstStyle/>
-          <a:p>
-            <a:pPr algn="l">
-              <a:spcAft>
-                <a:spcPts val="0"/>
-              </a:spcAft>
-            </a:pPr>
-            <a:r>
-              <a:rPr sz="1100" b="0" i="0">
-                <a:solidFill>
-                  <a:srgbClr val="475569"/>
-                </a:solidFill>
-                <a:latin typeface="Arial"/>
-              </a:rPr>
-              <a:t>Рисунок 17 – clean_big, запас 0,1 с: 63,5 % вчасно, пропущено 0 (поле «поріг» замінено на ROC AUC; офіційні набори toksym)</a:t>
-            </a:r>
-          </a:p>
-        </p:txBody>
-      </p:sp>
-      <p:sp>
-        <p:nvSpPr>
-          <p:cNvPr id="7" name="Rectangle 6"/>
-          <p:cNvSpPr/>
-          <p:nvPr/>
-        </p:nvSpPr>
-        <p:spPr>
-          <a:xfrm>
-            <a:off x="521207" y="2663885"/>
-            <a:ext cx="6547103" cy="899093"/>
-          </a:xfrm>
-          <a:prstGeom prst="rect">
-            <a:avLst/>
-          </a:prstGeom>
-          <a:noFill/>
-          <a:ln w="12700">
-            <a:solidFill>
-              <a:srgbClr val="E2E8F0"/>
-            </a:solidFill>
-          </a:ln>
-          <a:effectLst/>
-        </p:spPr>
-        <p:style>
-          <a:lnRef idx="1">
-            <a:schemeClr val="accent1"/>
-          </a:lnRef>
-          <a:fillRef idx="3">
-            <a:schemeClr val="accent1"/>
-          </a:fillRef>
-          <a:effectRef idx="2">
-            <a:schemeClr val="accent1"/>
-          </a:effectRef>
-          <a:fontRef idx="minor">
-            <a:schemeClr val="lt1"/>
-          </a:fontRef>
-        </p:style>
-        <p:txBody>
-          <a:bodyPr rtlCol="0" anchor="ctr"/>
-          <a:lstStyle/>
-          <a:p>
-            <a:pPr algn="ctr"/>
-          </a:p>
-        </p:txBody>
-      </p:sp>
-      <p:pic>
-        <p:nvPicPr>
-          <p:cNvPr id="8" name="Picture 7" descr="ui_clean_big_003_auc.png"/>
-          <p:cNvPicPr>
-            <a:picLocks noChangeAspect="1"/>
-          </p:cNvPicPr>
-          <p:nvPr/>
-        </p:nvPicPr>
-        <p:blipFill>
-          <a:blip r:embed="rId4"/>
-          <a:stretch>
-            <a:fillRect/>
-          </a:stretch>
-        </p:blipFill>
-        <p:spPr>
-          <a:xfrm>
-            <a:off x="548640" y="2691317"/>
-            <a:ext cx="6492240" cy="844229"/>
-          </a:xfrm>
-          <a:prstGeom prst="rect">
-            <a:avLst/>
-          </a:prstGeom>
-        </p:spPr>
-      </p:pic>
-      <p:sp>
-        <p:nvSpPr>
-          <p:cNvPr id="9" name="TextBox 8"/>
-          <p:cNvSpPr txBox="1"/>
-          <p:nvPr/>
-        </p:nvSpPr>
-        <p:spPr>
-          <a:xfrm>
-            <a:off x="548640" y="3590410"/>
-            <a:ext cx="6492240" cy="365760"/>
-          </a:xfrm>
-          <a:prstGeom prst="rect">
-            <a:avLst/>
-          </a:prstGeom>
-          <a:noFill/>
-        </p:spPr>
-        <p:txBody>
-          <a:bodyPr wrap="square" anchor="t" lIns="0" rIns="0" tIns="0" bIns="0">
-            <a:spAutoFit/>
-          </a:bodyPr>
-          <a:lstStyle/>
-          <a:p>
-            <a:pPr algn="l">
-              <a:spcAft>
-                <a:spcPts val="0"/>
-              </a:spcAft>
-            </a:pPr>
-            <a:r>
-              <a:rPr sz="1100" b="0" i="0">
-                <a:solidFill>
-                  <a:srgbClr val="475569"/>
-                </a:solidFill>
-                <a:latin typeface="Arial"/>
-              </a:rPr>
-              <a:t>Рисунок 18 – clean_big, запас 30 мс: 96,8 % вчасно, пропущено 0 (поле «поріг» замінено на ROC AUC; офіційні набори toksym)</a:t>
-            </a:r>
-          </a:p>
-        </p:txBody>
-      </p:sp>
-      <p:sp>
-        <p:nvSpPr>
-          <p:cNvPr id="10" name="Rectangle 9"/>
-          <p:cNvSpPr/>
-          <p:nvPr/>
-        </p:nvSpPr>
-        <p:spPr>
-          <a:xfrm>
-            <a:off x="548640" y="4084186"/>
-            <a:ext cx="6492240" cy="914400"/>
-          </a:xfrm>
-          <a:prstGeom prst="rect">
-            <a:avLst/>
-          </a:prstGeom>
-          <a:solidFill>
-            <a:srgbClr val="F8FAFC"/>
-          </a:solidFill>
-          <a:ln w="12700">
-            <a:solidFill>
-              <a:srgbClr val="E2E8F0"/>
-            </a:solidFill>
-          </a:ln>
-          <a:effectLst/>
-        </p:spPr>
-        <p:style>
-          <a:lnRef idx="1">
-            <a:schemeClr val="accent1"/>
-          </a:lnRef>
-          <a:fillRef idx="3">
-            <a:schemeClr val="accent1"/>
-          </a:fillRef>
-          <a:effectRef idx="2">
-            <a:schemeClr val="accent1"/>
-          </a:effectRef>
-          <a:fontRef idx="minor">
-            <a:schemeClr val="lt1"/>
-          </a:fontRef>
-        </p:style>
-        <p:txBody>
-          <a:bodyPr rtlCol="0" anchor="ctr"/>
-          <a:lstStyle/>
-          <a:p>
-            <a:pPr algn="ctr"/>
-          </a:p>
-        </p:txBody>
-      </p:sp>
-      <p:sp>
-        <p:nvSpPr>
-          <p:cNvPr id="11" name="TextBox 10"/>
-          <p:cNvSpPr txBox="1"/>
-          <p:nvPr/>
-        </p:nvSpPr>
-        <p:spPr>
-          <a:xfrm>
-            <a:off x="685800" y="4175626"/>
-            <a:ext cx="6217920" cy="731520"/>
-          </a:xfrm>
-          <a:prstGeom prst="rect">
-            <a:avLst/>
-          </a:prstGeom>
-          <a:noFill/>
-        </p:spPr>
-        <p:txBody>
-          <a:bodyPr wrap="square" anchor="t" lIns="0" rIns="0" tIns="0" bIns="0">
-            <a:spAutoFit/>
-          </a:bodyPr>
-          <a:lstStyle/>
-          <a:p>
-            <a:pPr algn="l">
-              <a:spcAft>
-                <a:spcPts val="0"/>
-              </a:spcAft>
-            </a:pPr>
-            <a:r>
-              <a:rPr sz="1100" b="1" i="0">
-                <a:solidFill>
-                  <a:srgbClr val="0E7490"/>
-                </a:solidFill>
-                <a:latin typeface="Arial"/>
-              </a:rPr>
-              <a:t>Чому ROC AUC замість порогу. </a:t>
-            </a:r>
-            <a:r>
-              <a:rPr sz="1100" b="0" i="0">
-                <a:solidFill>
-                  <a:srgbClr val="475569"/>
-                </a:solidFill>
-                <a:latin typeface="Arial"/>
-              </a:rPr>
-              <a:t>Поріг спрацювання неінформативний: його підбирає засіб оцінки під бюджет хибних тривог, шкала ймовірностей у моделей різна, а на малій вибірці поріг задає один тихий розряд. Тому на скриншотах замість порогу наведено ROC AUC, яка від порогу не залежить.</a:t>
-            </a:r>
-          </a:p>
-        </p:txBody>
-      </p:sp>
-      <p:sp>
-        <p:nvSpPr>
-          <p:cNvPr id="12" name="TextBox 11"/>
-          <p:cNvSpPr txBox="1"/>
-          <p:nvPr/>
-        </p:nvSpPr>
-        <p:spPr>
-          <a:xfrm>
-            <a:off x="7315200" y="1325880"/>
-            <a:ext cx="4343400" cy="2286000"/>
-          </a:xfrm>
-          <a:prstGeom prst="rect">
-            <a:avLst/>
-          </a:prstGeom>
-          <a:noFill/>
-        </p:spPr>
-        <p:txBody>
-          <a:bodyPr wrap="square" anchor="t" lIns="0" rIns="0" tIns="0" bIns="0">
-            <a:spAutoFit/>
-          </a:bodyPr>
-          <a:lstStyle/>
-          <a:p>
-            <a:pPr algn="l">
-              <a:spcAft>
-                <a:spcPts val="800"/>
-              </a:spcAft>
-            </a:pPr>
-            <a:r>
-              <a:rPr sz="1300" b="1" i="0">
-                <a:solidFill>
-                  <a:srgbClr val="0F172A"/>
-                </a:solidFill>
-                <a:latin typeface="Arial"/>
-              </a:rPr>
-              <a:t>Ознаки – </a:t>
-            </a:r>
-            <a:r>
-              <a:rPr sz="1300" b="0" i="0">
-                <a:solidFill>
-                  <a:srgbClr val="0F172A"/>
-                </a:solidFill>
-                <a:latin typeface="Arial"/>
-              </a:rPr>
-              <a:t>згладжені сирі канали, уставки і команди актуаторів, Dα, Мірнов, SXR, ECE, детектор передвісника</a:t>
-            </a:r>
-          </a:p>
-          <a:p>
-            <a:pPr algn="l">
-              <a:spcAft>
-                <a:spcPts val="800"/>
-              </a:spcAft>
-            </a:pPr>
-            <a:r>
-              <a:rPr sz="1300" b="1" i="0">
-                <a:solidFill>
-                  <a:srgbClr val="0F172A"/>
-                </a:solidFill>
-                <a:latin typeface="Arial"/>
-              </a:rPr>
-              <a:t>Відмінність – </a:t>
-            </a:r>
-            <a:r>
-              <a:rPr sz="1300" b="0" i="0">
-                <a:solidFill>
-                  <a:srgbClr val="0F172A"/>
-                </a:solidFill>
-                <a:latin typeface="Arial"/>
-              </a:rPr>
-              <a:t>без формул шпаргалки, мітки сценарію і таймерів; 4 500 навчальних розрядів</a:t>
-            </a:r>
-          </a:p>
-          <a:p>
-            <a:pPr algn="l">
-              <a:spcAft>
-                <a:spcPts val="800"/>
-              </a:spcAft>
-            </a:pPr>
-            <a:r>
-              <a:rPr sz="1300" b="1" i="0">
-                <a:solidFill>
-                  <a:srgbClr val="0F172A"/>
-                </a:solidFill>
-                <a:latin typeface="Arial"/>
-              </a:rPr>
-              <a:t/>
-            </a:r>
-            <a:r>
-              <a:rPr sz="1300" b="0" i="0">
-                <a:solidFill>
-                  <a:srgbClr val="0F172A"/>
-                </a:solidFill>
-                <a:latin typeface="Arial"/>
-              </a:rPr>
-              <a:t>0,9 мс на крок; 0,2 % кроків понад 5 мс</a:t>
-            </a:r>
-          </a:p>
-        </p:txBody>
-      </p:sp>
-      <p:sp>
-        <p:nvSpPr>
-          <p:cNvPr id="13" name="TextBox 12"/>
-          <p:cNvSpPr txBox="1"/>
-          <p:nvPr/>
-        </p:nvSpPr>
-        <p:spPr>
-          <a:xfrm>
-            <a:off x="7315200" y="3703320"/>
-            <a:ext cx="4343400" cy="320040"/>
-          </a:xfrm>
-          <a:prstGeom prst="rect">
-            <a:avLst/>
-          </a:prstGeom>
-          <a:noFill/>
-        </p:spPr>
-        <p:txBody>
-          <a:bodyPr wrap="square" anchor="t" lIns="0" rIns="0" tIns="0" bIns="0">
-            <a:spAutoFit/>
-          </a:bodyPr>
-          <a:lstStyle/>
-          <a:p>
-            <a:pPr algn="l">
-              <a:spcAft>
-                <a:spcPts val="0"/>
-              </a:spcAft>
-            </a:pPr>
-            <a:r>
-              <a:rPr sz="1100" b="0" i="0">
-                <a:solidFill>
-                  <a:srgbClr val="475569"/>
-                </a:solidFill>
-                <a:latin typeface="Arial"/>
-              </a:rPr>
-              <a:t>Таблиця 11 – Показники (офіційні набори toksym)</a:t>
-            </a:r>
-          </a:p>
-        </p:txBody>
-      </p:sp>
-      <p:graphicFrame>
-        <p:nvGraphicFramePr>
-          <p:cNvPr id="14" name="Table 13"/>
-          <p:cNvGraphicFramePr>
-            <a:graphicFrameLocks noGrp="1"/>
-          </p:cNvGraphicFramePr>
-          <p:nvPr/>
-        </p:nvGraphicFramePr>
-        <p:xfrm>
-          <a:off x="7315200" y="4069080"/>
-          <a:ext cx="4343400" cy="1389888"/>
-        </p:xfrm>
-        <a:graphic>
-          <a:graphicData uri="http://schemas.openxmlformats.org/drawingml/2006/table">
-            <a:tbl>
-              <a:tblPr firstRow="0" bandRow="0">
-                <a:tableStyleId>{5C22544A-7EE6-4342-B048-85BDC9FD1C3A}</a:tableStyleId>
-              </a:tblPr>
-              <a:tblGrid>
-                <a:gridCol w="2514600"/>
-                <a:gridCol w="1828800"/>
-              </a:tblGrid>
-              <a:tr h="347472">
-                <a:tc>
-                  <a:txBody>
-                    <a:bodyPr wrap="square"/>
-                    <a:lstStyle/>
-                    <a:p>
-                      <a:pPr algn="l"/>
-                      <a:r>
-                        <a:rPr sz="1100" b="1">
-                          <a:solidFill>
-                            <a:srgbClr val="475569"/>
-                          </a:solidFill>
-                          <a:latin typeface="Arial"/>
-                        </a:rPr>
-                        <a:t>показник</a:t>
-                      </a:r>
-                    </a:p>
-                  </a:txBody>
-                  <a:tcPr marL="91440" marR="91440" marT="27432" marB="27432" anchor="ctr">
-                    <a:solidFill>
-                      <a:srgbClr val="F1F5F9"/>
-                    </a:solidFill>
-                  </a:tcPr>
-                </a:tc>
-                <a:tc>
-                  <a:txBody>
-                    <a:bodyPr wrap="square"/>
-                    <a:lstStyle/>
-                    <a:p>
-                      <a:pPr algn="ctr"/>
-                      <a:r>
-                        <a:rPr sz="1100" b="1">
-                          <a:solidFill>
-                            <a:srgbClr val="475569"/>
-                          </a:solidFill>
-                          <a:latin typeface="Arial"/>
-                        </a:rPr>
-                        <a:t>значення</a:t>
-                      </a:r>
-                    </a:p>
-                  </a:txBody>
-                  <a:tcPr marL="91440" marR="91440" marT="27432" marB="27432" anchor="ctr">
-                    <a:solidFill>
-                      <a:srgbClr val="F1F5F9"/>
-                    </a:solidFill>
-                  </a:tcPr>
-                </a:tc>
-              </a:tr>
-              <a:tr h="347472">
-                <a:tc>
-                  <a:txBody>
-                    <a:bodyPr wrap="square"/>
-                    <a:lstStyle/>
-                    <a:p>
-                      <a:pPr algn="l"/>
-                      <a:r>
-                        <a:rPr sz="1100" b="1">
-                          <a:solidFill>
-                            <a:srgbClr val="0F172A"/>
-                          </a:solidFill>
-                          <a:latin typeface="Arial"/>
-                        </a:rPr>
-                        <a:t>ROC AUC, 30 мс</a:t>
-                      </a:r>
-                    </a:p>
-                  </a:txBody>
-                  <a:tcPr marL="91440" marR="91440" marT="27432" marB="27432" anchor="ctr">
-                    <a:solidFill>
-                      <a:srgbClr val="FFFFFF"/>
-                    </a:solidFill>
-                  </a:tcPr>
-                </a:tc>
-                <a:tc>
-                  <a:txBody>
-                    <a:bodyPr wrap="square"/>
-                    <a:lstStyle/>
-                    <a:p>
-                      <a:pPr algn="ctr"/>
-                      <a:r>
-                        <a:rPr sz="1200" b="0">
-                          <a:solidFill>
-                            <a:srgbClr val="0F172A"/>
-                          </a:solidFill>
-                          <a:latin typeface="Arial"/>
-                        </a:rPr>
-                        <a:t>0,998</a:t>
-                      </a:r>
-                    </a:p>
-                  </a:txBody>
-                  <a:tcPr marL="91440" marR="91440" marT="27432" marB="27432" anchor="ctr">
-                    <a:solidFill>
-                      <a:srgbClr val="FFFFFF"/>
-                    </a:solidFill>
-                  </a:tcPr>
-                </a:tc>
-              </a:tr>
-              <a:tr h="347472">
-                <a:tc>
-                  <a:txBody>
-                    <a:bodyPr wrap="square"/>
-                    <a:lstStyle/>
-                    <a:p>
-                      <a:pPr algn="l"/>
-                      <a:r>
-                        <a:rPr sz="1100" b="1">
-                          <a:solidFill>
-                            <a:srgbClr val="0F172A"/>
-                          </a:solidFill>
-                          <a:latin typeface="Arial"/>
-                        </a:rPr>
-                        <a:t>ROC AUC, 0,1 с</a:t>
-                      </a:r>
-                    </a:p>
-                  </a:txBody>
-                  <a:tcPr marL="91440" marR="91440" marT="27432" marB="27432" anchor="ctr">
-                    <a:solidFill>
-                      <a:srgbClr val="FFFFFF"/>
-                    </a:solidFill>
-                  </a:tcPr>
-                </a:tc>
-                <a:tc>
-                  <a:txBody>
-                    <a:bodyPr wrap="square"/>
-                    <a:lstStyle/>
-                    <a:p>
-                      <a:pPr algn="ctr"/>
-                      <a:r>
-                        <a:rPr sz="1200" b="0">
-                          <a:solidFill>
-                            <a:srgbClr val="0F172A"/>
-                          </a:solidFill>
-                          <a:latin typeface="Arial"/>
-                        </a:rPr>
-                        <a:t>0,910</a:t>
-                      </a:r>
-                    </a:p>
-                  </a:txBody>
-                  <a:tcPr marL="91440" marR="91440" marT="27432" marB="27432" anchor="ctr">
-                    <a:solidFill>
-                      <a:srgbClr val="FFFFFF"/>
-                    </a:solidFill>
-                  </a:tcPr>
-                </a:tc>
-              </a:tr>
-              <a:tr h="347472">
-                <a:tc>
-                  <a:txBody>
-                    <a:bodyPr wrap="square"/>
-                    <a:lstStyle/>
-                    <a:p>
-                      <a:pPr algn="l"/>
-                      <a:r>
-                        <a:rPr sz="1100" b="1">
-                          <a:solidFill>
-                            <a:srgbClr val="0F172A"/>
-                          </a:solidFill>
-                          <a:latin typeface="Arial"/>
-                        </a:rPr>
-                        <a:t>об'єм</a:t>
-                      </a:r>
-                    </a:p>
-                  </a:txBody>
-                  <a:tcPr marL="91440" marR="91440" marT="27432" marB="27432" anchor="ctr">
-                    <a:solidFill>
-                      <a:srgbClr val="FFFFFF"/>
-                    </a:solidFill>
-                  </a:tcPr>
-                </a:tc>
-                <a:tc>
-                  <a:txBody>
-                    <a:bodyPr wrap="square"/>
-                    <a:lstStyle/>
-                    <a:p>
-                      <a:pPr algn="ctr"/>
-                      <a:r>
-                        <a:rPr sz="1200" b="0">
-                          <a:solidFill>
-                            <a:srgbClr val="0F172A"/>
-                          </a:solidFill>
-                          <a:latin typeface="Arial"/>
-                        </a:rPr>
-                        <a:t>0,924</a:t>
-                      </a:r>
-                    </a:p>
-                  </a:txBody>
-                  <a:tcPr marL="91440" marR="91440" marT="27432" marB="27432" anchor="ctr">
-                    <a:solidFill>
-                      <a:srgbClr val="FFFFFF"/>
-                    </a:solidFill>
-                  </a:tcPr>
-                </a:tc>
-              </a:tr>
-            </a:tbl>
-          </a:graphicData>
-        </a:graphic>
-      </p:graphicFrame>
-    </p:spTree>
-  </p:cSld>
-  <p:clrMapOvr>
-    <a:masterClrMapping/>
-  </p:clrMapOvr>
-</p:sld>
-</file>
-
-<file path=ppt/slides/slide21.xml><?xml version="1.0" encoding="utf-8"?>
-<p:sld xmlns:a="http://schemas.openxmlformats.org/drawingml/2006/main" xmlns:p="http://schemas.openxmlformats.org/presentationml/2006/main" xmlns:r="http://schemas.openxmlformats.org/officeDocument/2006/relationships">
-  <p:cSld>
-    <p:bg>
-      <p:bgPr>
-        <a:solidFill>
-          <a:srgbClr val="FFFFFF"/>
-        </a:solidFill>
-        <a:effectLst/>
-      </p:bgPr>
-    </p:bg>
-    <p:spTree>
-      <p:nvGrpSpPr>
-        <p:cNvPr id="1" name=""/>
-        <p:cNvGrpSpPr/>
-        <p:nvPr/>
-      </p:nvGrpSpPr>
-      <p:grpSpPr/>
-      <p:sp>
-        <p:nvSpPr>
-          <p:cNvPr id="2" name="TextBox 1"/>
-          <p:cNvSpPr txBox="1"/>
-          <p:nvPr/>
-        </p:nvSpPr>
-        <p:spPr>
-          <a:xfrm>
-            <a:off x="548640" y="411480"/>
-            <a:ext cx="11064240" cy="640080"/>
-          </a:xfrm>
-          <a:prstGeom prst="rect">
-            <a:avLst/>
-          </a:prstGeom>
-          <a:noFill/>
-        </p:spPr>
-        <p:txBody>
-          <a:bodyPr wrap="square" anchor="t" lIns="0" rIns="0" tIns="0" bIns="0">
-            <a:spAutoFit/>
-          </a:bodyPr>
-          <a:lstStyle/>
-          <a:p>
-            <a:pPr algn="l">
-              <a:spcAft>
-                <a:spcPts val="0"/>
-              </a:spcAft>
-            </a:pPr>
-            <a:r>
-              <a:rPr sz="2600" b="1" i="0">
-                <a:solidFill>
-                  <a:srgbClr val="0F172A"/>
-                </a:solidFill>
-                <a:latin typeface="Arial"/>
-              </a:rPr>
-              <a:t>Додаток А.6 Ансамбль ens5: відхилено через затримку</a:t>
-            </a:r>
-          </a:p>
-        </p:txBody>
-      </p:sp>
-      <p:sp>
-        <p:nvSpPr>
-          <p:cNvPr id="3" name="TextBox 2"/>
-          <p:cNvSpPr txBox="1"/>
-          <p:nvPr/>
-        </p:nvSpPr>
-        <p:spPr>
-          <a:xfrm>
-            <a:off x="11247120" y="6446520"/>
-            <a:ext cx="457200" cy="274320"/>
-          </a:xfrm>
-          <a:prstGeom prst="rect">
-            <a:avLst/>
-          </a:prstGeom>
-          <a:noFill/>
-        </p:spPr>
-        <p:txBody>
-          <a:bodyPr wrap="square" anchor="t" lIns="0" rIns="0" tIns="0" bIns="0">
-            <a:spAutoFit/>
-          </a:bodyPr>
-          <a:lstStyle/>
-          <a:p>
-            <a:pPr algn="r">
-              <a:spcAft>
-                <a:spcPts val="0"/>
-              </a:spcAft>
-            </a:pPr>
-            <a:r>
-              <a:rPr sz="1000" b="0" i="0">
-                <a:solidFill>
-                  <a:srgbClr val="94A3B8"/>
-                </a:solidFill>
-                <a:latin typeface="Arial"/>
-              </a:rPr>
-              <a:t>21</a:t>
-            </a:r>
-          </a:p>
-        </p:txBody>
-      </p:sp>
-      <p:sp>
-        <p:nvSpPr>
-          <p:cNvPr id="4" name="Rectangle 3"/>
-          <p:cNvSpPr/>
-          <p:nvPr/>
-        </p:nvSpPr>
-        <p:spPr>
-          <a:xfrm>
-            <a:off x="521207" y="1252728"/>
-            <a:ext cx="6547103" cy="899093"/>
-          </a:xfrm>
-          <a:prstGeom prst="rect">
-            <a:avLst/>
-          </a:prstGeom>
-          <a:noFill/>
-          <a:ln w="12700">
-            <a:solidFill>
-              <a:srgbClr val="E2E8F0"/>
-            </a:solidFill>
-          </a:ln>
-          <a:effectLst/>
-        </p:spPr>
-        <p:style>
-          <a:lnRef idx="1">
-            <a:schemeClr val="accent1"/>
-          </a:lnRef>
-          <a:fillRef idx="3">
-            <a:schemeClr val="accent1"/>
-          </a:fillRef>
-          <a:effectRef idx="2">
-            <a:schemeClr val="accent1"/>
-          </a:effectRef>
-          <a:fontRef idx="minor">
-            <a:schemeClr val="lt1"/>
-          </a:fontRef>
-        </p:style>
-        <p:txBody>
-          <a:bodyPr rtlCol="0" anchor="ctr"/>
-          <a:lstStyle/>
-          <a:p>
-            <a:pPr algn="ctr"/>
-          </a:p>
-        </p:txBody>
-      </p:sp>
-      <p:pic>
-        <p:nvPicPr>
-          <p:cNvPr id="5" name="Picture 4" descr="card_ens5_auc.png"/>
-          <p:cNvPicPr>
-            <a:picLocks noChangeAspect="1"/>
-          </p:cNvPicPr>
-          <p:nvPr/>
-        </p:nvPicPr>
-        <p:blipFill>
-          <a:blip r:embed="rId3"/>
-          <a:stretch>
-            <a:fillRect/>
-          </a:stretch>
-        </p:blipFill>
-        <p:spPr>
-          <a:xfrm>
-            <a:off x="548640" y="1280160"/>
-            <a:ext cx="6492240" cy="844229"/>
-          </a:xfrm>
-          <a:prstGeom prst="rect">
-            <a:avLst/>
-          </a:prstGeom>
-        </p:spPr>
-      </p:pic>
-      <p:sp>
-        <p:nvSpPr>
-          <p:cNvPr id="6" name="TextBox 5"/>
-          <p:cNvSpPr txBox="1"/>
-          <p:nvPr/>
-        </p:nvSpPr>
-        <p:spPr>
-          <a:xfrm>
-            <a:off x="548640" y="2179253"/>
-            <a:ext cx="6492240" cy="365760"/>
-          </a:xfrm>
-          <a:prstGeom prst="rect">
-            <a:avLst/>
-          </a:prstGeom>
-          <a:noFill/>
-        </p:spPr>
-        <p:txBody>
-          <a:bodyPr wrap="square" anchor="t" lIns="0" rIns="0" tIns="0" bIns="0">
-            <a:spAutoFit/>
-          </a:bodyPr>
-          <a:lstStyle/>
-          <a:p>
-            <a:pPr algn="l">
-              <a:spcAft>
-                <a:spcPts val="0"/>
-              </a:spcAft>
-            </a:pPr>
-            <a:r>
-              <a:rPr sz="1100" b="0" i="0">
-                <a:solidFill>
-                  <a:srgbClr val="475569"/>
-                </a:solidFill>
-                <a:latin typeface="Arial"/>
-              </a:rPr>
-              <a:t>Рисунок 19 – ens5: 60,3 % вчасно на спільній вибірці, пропущено 0 (поле «поріг» замінено на ROC AUC; офіційні набори toksym)</a:t>
-            </a:r>
-          </a:p>
-        </p:txBody>
-      </p:sp>
-      <p:sp>
-        <p:nvSpPr>
-          <p:cNvPr id="7" name="Rectangle 6"/>
-          <p:cNvSpPr/>
-          <p:nvPr/>
-        </p:nvSpPr>
-        <p:spPr>
-          <a:xfrm>
-            <a:off x="548640" y="2673029"/>
-            <a:ext cx="6492240" cy="914400"/>
-          </a:xfrm>
-          <a:prstGeom prst="rect">
-            <a:avLst/>
-          </a:prstGeom>
-          <a:solidFill>
-            <a:srgbClr val="F8FAFC"/>
-          </a:solidFill>
-          <a:ln w="12700">
-            <a:solidFill>
-              <a:srgbClr val="E2E8F0"/>
-            </a:solidFill>
-          </a:ln>
-          <a:effectLst/>
-        </p:spPr>
-        <p:style>
-          <a:lnRef idx="1">
-            <a:schemeClr val="accent1"/>
-          </a:lnRef>
-          <a:fillRef idx="3">
-            <a:schemeClr val="accent1"/>
-          </a:fillRef>
-          <a:effectRef idx="2">
-            <a:schemeClr val="accent1"/>
-          </a:effectRef>
-          <a:fontRef idx="minor">
-            <a:schemeClr val="lt1"/>
-          </a:fontRef>
-        </p:style>
-        <p:txBody>
-          <a:bodyPr rtlCol="0" anchor="ctr"/>
-          <a:lstStyle/>
-          <a:p>
-            <a:pPr algn="ctr"/>
-          </a:p>
-        </p:txBody>
-      </p:sp>
-      <p:sp>
-        <p:nvSpPr>
-          <p:cNvPr id="8" name="TextBox 7"/>
-          <p:cNvSpPr txBox="1"/>
-          <p:nvPr/>
-        </p:nvSpPr>
-        <p:spPr>
-          <a:xfrm>
-            <a:off x="685800" y="2764469"/>
-            <a:ext cx="6217920" cy="731520"/>
-          </a:xfrm>
-          <a:prstGeom prst="rect">
-            <a:avLst/>
-          </a:prstGeom>
-          <a:noFill/>
-        </p:spPr>
-        <p:txBody>
-          <a:bodyPr wrap="square" anchor="t" lIns="0" rIns="0" tIns="0" bIns="0">
-            <a:spAutoFit/>
-          </a:bodyPr>
-          <a:lstStyle/>
-          <a:p>
-            <a:pPr algn="l">
-              <a:spcAft>
-                <a:spcPts val="0"/>
-              </a:spcAft>
-            </a:pPr>
-            <a:r>
-              <a:rPr sz="1100" b="1" i="0">
-                <a:solidFill>
-                  <a:srgbClr val="0E7490"/>
-                </a:solidFill>
-                <a:latin typeface="Arial"/>
-              </a:rPr>
-              <a:t>Чому ROC AUC замість порогу. </a:t>
-            </a:r>
-            <a:r>
-              <a:rPr sz="1100" b="0" i="0">
-                <a:solidFill>
-                  <a:srgbClr val="475569"/>
-                </a:solidFill>
-                <a:latin typeface="Arial"/>
-              </a:rPr>
-              <a:t>Поріг спрацювання неінформативний: його підбирає засіб оцінки під бюджет хибних тривог, шкала ймовірностей у моделей різна, а на малій вибірці поріг задає один тихий розряд. Тому на скриншотах замість порогу наведено ROC AUC, яка від порогу не залежить.</a:t>
-            </a:r>
-          </a:p>
-        </p:txBody>
-      </p:sp>
-      <p:sp>
-        <p:nvSpPr>
-          <p:cNvPr id="9" name="TextBox 8"/>
-          <p:cNvSpPr txBox="1"/>
-          <p:nvPr/>
-        </p:nvSpPr>
-        <p:spPr>
-          <a:xfrm>
-            <a:off x="7315200" y="1325880"/>
-            <a:ext cx="4343400" cy="2286000"/>
-          </a:xfrm>
-          <a:prstGeom prst="rect">
-            <a:avLst/>
-          </a:prstGeom>
-          <a:noFill/>
-        </p:spPr>
-        <p:txBody>
-          <a:bodyPr wrap="square" anchor="t" lIns="0" rIns="0" tIns="0" bIns="0">
-            <a:spAutoFit/>
-          </a:bodyPr>
-          <a:lstStyle/>
-          <a:p>
-            <a:pPr algn="l">
-              <a:spcAft>
-                <a:spcPts val="800"/>
-              </a:spcAft>
-            </a:pPr>
-            <a:r>
-              <a:rPr sz="1300" b="1" i="0">
-                <a:solidFill>
-                  <a:srgbClr val="0F172A"/>
-                </a:solidFill>
-                <a:latin typeface="Arial"/>
-              </a:rPr>
-              <a:t>Ознаки – </a:t>
-            </a:r>
-            <a:r>
-              <a:rPr sz="1300" b="0" i="0">
-                <a:solidFill>
-                  <a:srgbClr val="0F172A"/>
-                </a:solidFill>
-                <a:latin typeface="Arial"/>
-              </a:rPr>
-              <a:t>5 моделей clean на бутстреп-вибірках 9 000 розрядів, усереднення логітів</a:t>
-            </a:r>
-          </a:p>
-          <a:p>
-            <a:pPr algn="l">
-              <a:spcAft>
-                <a:spcPts val="800"/>
-              </a:spcAft>
-            </a:pPr>
-            <a:r>
-              <a:rPr sz="1300" b="1" i="0">
-                <a:solidFill>
-                  <a:srgbClr val="0F172A"/>
-                </a:solidFill>
-                <a:latin typeface="Arial"/>
-              </a:rPr>
-              <a:t>Відмінність – </a:t>
-            </a:r>
-            <a:r>
-              <a:rPr sz="1300" b="0" i="0">
-                <a:solidFill>
-                  <a:srgbClr val="0F172A"/>
-                </a:solidFill>
-                <a:latin typeface="Arial"/>
-              </a:rPr>
-              <a:t>об'єм 0,930 (+0,006, P = 0,99), але 3 мс на крок і 16 % кроків понад 5 мс на ноутбуці</a:t>
-            </a:r>
-          </a:p>
-          <a:p>
-            <a:pPr algn="l">
-              <a:spcAft>
-                <a:spcPts val="800"/>
-              </a:spcAft>
-            </a:pPr>
-            <a:r>
-              <a:rPr sz="1300" b="1" i="0">
-                <a:solidFill>
-                  <a:srgbClr val="0F172A"/>
-                </a:solidFill>
-                <a:latin typeface="Arial"/>
-              </a:rPr>
-              <a:t/>
-            </a:r>
-            <a:r>
-              <a:rPr sz="1300" b="0" i="0">
-                <a:solidFill>
-                  <a:srgbClr val="0F172A"/>
-                </a:solidFill>
-                <a:latin typeface="Arial"/>
-              </a:rPr>
-              <a:t>вимогу реального часу порушено, до здачі не прийнято</a:t>
-            </a:r>
-          </a:p>
-        </p:txBody>
-      </p:sp>
-      <p:sp>
-        <p:nvSpPr>
-          <p:cNvPr id="10" name="TextBox 9"/>
-          <p:cNvSpPr txBox="1"/>
-          <p:nvPr/>
-        </p:nvSpPr>
-        <p:spPr>
-          <a:xfrm>
-            <a:off x="7315200" y="3703320"/>
-            <a:ext cx="4343400" cy="320040"/>
-          </a:xfrm>
-          <a:prstGeom prst="rect">
-            <a:avLst/>
-          </a:prstGeom>
-          <a:noFill/>
-        </p:spPr>
-        <p:txBody>
-          <a:bodyPr wrap="square" anchor="t" lIns="0" rIns="0" tIns="0" bIns="0">
-            <a:spAutoFit/>
-          </a:bodyPr>
-          <a:lstStyle/>
-          <a:p>
-            <a:pPr algn="l">
-              <a:spcAft>
-                <a:spcPts val="0"/>
-              </a:spcAft>
-            </a:pPr>
-            <a:r>
-              <a:rPr sz="1100" b="0" i="0">
-                <a:solidFill>
-                  <a:srgbClr val="475569"/>
-                </a:solidFill>
-                <a:latin typeface="Arial"/>
-              </a:rPr>
-              <a:t>Таблиця 12 – Показники (офіційні набори toksym)</a:t>
-            </a:r>
-          </a:p>
-        </p:txBody>
-      </p:sp>
-      <p:graphicFrame>
-        <p:nvGraphicFramePr>
-          <p:cNvPr id="11" name="Table 10"/>
-          <p:cNvGraphicFramePr>
-            <a:graphicFrameLocks noGrp="1"/>
-          </p:cNvGraphicFramePr>
-          <p:nvPr/>
-        </p:nvGraphicFramePr>
-        <p:xfrm>
-          <a:off x="7315200" y="4069080"/>
-          <a:ext cx="4343400" cy="1389888"/>
-        </p:xfrm>
-        <a:graphic>
-          <a:graphicData uri="http://schemas.openxmlformats.org/drawingml/2006/table">
-            <a:tbl>
-              <a:tblPr firstRow="0" bandRow="0">
-                <a:tableStyleId>{5C22544A-7EE6-4342-B048-85BDC9FD1C3A}</a:tableStyleId>
-              </a:tblPr>
-              <a:tblGrid>
-                <a:gridCol w="2514600"/>
-                <a:gridCol w="1828800"/>
-              </a:tblGrid>
-              <a:tr h="347472">
-                <a:tc>
-                  <a:txBody>
-                    <a:bodyPr wrap="square"/>
-                    <a:lstStyle/>
-                    <a:p>
-                      <a:pPr algn="l"/>
-                      <a:r>
-                        <a:rPr sz="1100" b="1">
-                          <a:solidFill>
-                            <a:srgbClr val="475569"/>
-                          </a:solidFill>
-                          <a:latin typeface="Arial"/>
-                        </a:rPr>
-                        <a:t>показник</a:t>
-                      </a:r>
-                    </a:p>
-                  </a:txBody>
-                  <a:tcPr marL="91440" marR="91440" marT="27432" marB="27432" anchor="ctr">
-                    <a:solidFill>
-                      <a:srgbClr val="F1F5F9"/>
-                    </a:solidFill>
-                  </a:tcPr>
-                </a:tc>
-                <a:tc>
-                  <a:txBody>
-                    <a:bodyPr wrap="square"/>
-                    <a:lstStyle/>
-                    <a:p>
-                      <a:pPr algn="ctr"/>
-                      <a:r>
-                        <a:rPr sz="1100" b="1">
-                          <a:solidFill>
-                            <a:srgbClr val="475569"/>
-                          </a:solidFill>
-                          <a:latin typeface="Arial"/>
-                        </a:rPr>
-                        <a:t>значення</a:t>
-                      </a:r>
-                    </a:p>
-                  </a:txBody>
-                  <a:tcPr marL="91440" marR="91440" marT="27432" marB="27432" anchor="ctr">
-                    <a:solidFill>
-                      <a:srgbClr val="F1F5F9"/>
-                    </a:solidFill>
-                  </a:tcPr>
-                </a:tc>
-              </a:tr>
-              <a:tr h="347472">
-                <a:tc>
-                  <a:txBody>
-                    <a:bodyPr wrap="square"/>
-                    <a:lstStyle/>
-                    <a:p>
-                      <a:pPr algn="l"/>
-                      <a:r>
-                        <a:rPr sz="1100" b="1">
-                          <a:solidFill>
-                            <a:srgbClr val="0F172A"/>
-                          </a:solidFill>
-                          <a:latin typeface="Arial"/>
-                        </a:rPr>
-                        <a:t>ROC AUC, 30 мс</a:t>
-                      </a:r>
-                    </a:p>
-                  </a:txBody>
-                  <a:tcPr marL="91440" marR="91440" marT="27432" marB="27432" anchor="ctr">
-                    <a:solidFill>
-                      <a:srgbClr val="FFFFFF"/>
-                    </a:solidFill>
-                  </a:tcPr>
-                </a:tc>
-                <a:tc>
-                  <a:txBody>
-                    <a:bodyPr wrap="square"/>
-                    <a:lstStyle/>
-                    <a:p>
-                      <a:pPr algn="ctr"/>
-                      <a:r>
-                        <a:rPr sz="1200" b="0">
-                          <a:solidFill>
-                            <a:srgbClr val="0F172A"/>
-                          </a:solidFill>
-                          <a:latin typeface="Arial"/>
-                        </a:rPr>
-                        <a:t>0,998</a:t>
-                      </a:r>
-                    </a:p>
-                  </a:txBody>
-                  <a:tcPr marL="91440" marR="91440" marT="27432" marB="27432" anchor="ctr">
-                    <a:solidFill>
-                      <a:srgbClr val="FFFFFF"/>
-                    </a:solidFill>
-                  </a:tcPr>
-                </a:tc>
-              </a:tr>
-              <a:tr h="347472">
-                <a:tc>
-                  <a:txBody>
-                    <a:bodyPr wrap="square"/>
-                    <a:lstStyle/>
-                    <a:p>
-                      <a:pPr algn="l"/>
-                      <a:r>
-                        <a:rPr sz="1100" b="1">
-                          <a:solidFill>
-                            <a:srgbClr val="0F172A"/>
-                          </a:solidFill>
-                          <a:latin typeface="Arial"/>
-                        </a:rPr>
-                        <a:t>ROC AUC, 0,1 с</a:t>
-                      </a:r>
-                    </a:p>
-                  </a:txBody>
-                  <a:tcPr marL="91440" marR="91440" marT="27432" marB="27432" anchor="ctr">
-                    <a:solidFill>
-                      <a:srgbClr val="FFFFFF"/>
-                    </a:solidFill>
-                  </a:tcPr>
-                </a:tc>
-                <a:tc>
-                  <a:txBody>
-                    <a:bodyPr wrap="square"/>
-                    <a:lstStyle/>
-                    <a:p>
-                      <a:pPr algn="ctr"/>
-                      <a:r>
-                        <a:rPr sz="1200" b="0">
-                          <a:solidFill>
-                            <a:srgbClr val="0F172A"/>
-                          </a:solidFill>
-                          <a:latin typeface="Arial"/>
-                        </a:rPr>
-                        <a:t>0,918</a:t>
-                      </a:r>
-                    </a:p>
-                  </a:txBody>
-                  <a:tcPr marL="91440" marR="91440" marT="27432" marB="27432" anchor="ctr">
-                    <a:solidFill>
-                      <a:srgbClr val="FFFFFF"/>
-                    </a:solidFill>
-                  </a:tcPr>
-                </a:tc>
-              </a:tr>
-              <a:tr h="347472">
-                <a:tc>
-                  <a:txBody>
-                    <a:bodyPr wrap="square"/>
-                    <a:lstStyle/>
-                    <a:p>
-                      <a:pPr algn="l"/>
-                      <a:r>
-                        <a:rPr sz="1100" b="1">
-                          <a:solidFill>
-                            <a:srgbClr val="0F172A"/>
-                          </a:solidFill>
-                          <a:latin typeface="Arial"/>
-                        </a:rPr>
-                        <a:t>об'єм</a:t>
-                      </a:r>
-                    </a:p>
-                  </a:txBody>
-                  <a:tcPr marL="91440" marR="91440" marT="27432" marB="27432" anchor="ctr">
-                    <a:solidFill>
-                      <a:srgbClr val="FFFFFF"/>
-                    </a:solidFill>
-                  </a:tcPr>
-                </a:tc>
-                <a:tc>
-                  <a:txBody>
-                    <a:bodyPr wrap="square"/>
-                    <a:lstStyle/>
-                    <a:p>
-                      <a:pPr algn="ctr"/>
-                      <a:r>
-                        <a:rPr sz="1200" b="0">
-                          <a:solidFill>
-                            <a:srgbClr val="0F172A"/>
-                          </a:solidFill>
-                          <a:latin typeface="Arial"/>
-                        </a:rPr>
-                        <a:t>0,931</a:t>
-                      </a:r>
-                    </a:p>
-                  </a:txBody>
-                  <a:tcPr marL="91440" marR="91440" marT="27432" marB="27432" anchor="ctr">
-                    <a:solidFill>
-                      <a:srgbClr val="FFFFFF"/>
-                    </a:solidFill>
-                  </a:tcPr>
-                </a:tc>
-              </a:tr>
-            </a:tbl>
-          </a:graphicData>
-        </a:graphic>
-      </p:graphicFrame>
-    </p:spTree>
-  </p:cSld>
-  <p:clrMapOvr>
-    <a:masterClrMapping/>
-  </p:clrMapOvr>
-</p:sld>
-</file>
-
-<file path=ppt/slides/slide22.xml><?xml version="1.0" encoding="utf-8"?>
-<p:sld xmlns:a="http://schemas.openxmlformats.org/drawingml/2006/main" xmlns:p="http://schemas.openxmlformats.org/presentationml/2006/main" xmlns:r="http://schemas.openxmlformats.org/officeDocument/2006/relationships">
-  <p:cSld>
-    <p:bg>
-      <p:bgPr>
-        <a:solidFill>
-          <a:srgbClr val="FFFFFF"/>
-        </a:solidFill>
-        <a:effectLst/>
-      </p:bgPr>
-    </p:bg>
-    <p:spTree>
-      <p:nvGrpSpPr>
-        <p:cNvPr id="1" name=""/>
-        <p:cNvGrpSpPr/>
-        <p:nvPr/>
-      </p:nvGrpSpPr>
-      <p:grpSpPr/>
-      <p:sp>
-        <p:nvSpPr>
-          <p:cNvPr id="2" name="TextBox 1"/>
-          <p:cNvSpPr txBox="1"/>
-          <p:nvPr/>
-        </p:nvSpPr>
-        <p:spPr>
-          <a:xfrm>
-            <a:off x="548640" y="411480"/>
-            <a:ext cx="11064240" cy="640080"/>
-          </a:xfrm>
-          <a:prstGeom prst="rect">
-            <a:avLst/>
-          </a:prstGeom>
-          <a:noFill/>
-        </p:spPr>
-        <p:txBody>
-          <a:bodyPr wrap="square" anchor="t" lIns="0" rIns="0" tIns="0" bIns="0">
-            <a:spAutoFit/>
-          </a:bodyPr>
-          <a:lstStyle/>
-          <a:p>
-            <a:pPr algn="l">
-              <a:spcAft>
-                <a:spcPts val="0"/>
-              </a:spcAft>
-            </a:pPr>
-            <a:r>
-              <a:rPr sz="2600" b="1" i="0">
-                <a:solidFill>
-                  <a:srgbClr val="0F172A"/>
-                </a:solidFill>
-                <a:latin typeface="Arial"/>
-              </a:rPr>
-              <a:t>Додаток А.7 ImpactNet у симуляторі fusion-sim</a:t>
-            </a:r>
-          </a:p>
-        </p:txBody>
-      </p:sp>
-      <p:sp>
-        <p:nvSpPr>
-          <p:cNvPr id="3" name="TextBox 2"/>
-          <p:cNvSpPr txBox="1"/>
-          <p:nvPr/>
-        </p:nvSpPr>
-        <p:spPr>
-          <a:xfrm>
-            <a:off x="11247120" y="6446520"/>
-            <a:ext cx="457200" cy="274320"/>
-          </a:xfrm>
-          <a:prstGeom prst="rect">
-            <a:avLst/>
-          </a:prstGeom>
-          <a:noFill/>
-        </p:spPr>
-        <p:txBody>
-          <a:bodyPr wrap="square" anchor="t" lIns="0" rIns="0" tIns="0" bIns="0">
-            <a:spAutoFit/>
-          </a:bodyPr>
-          <a:lstStyle/>
-          <a:p>
-            <a:pPr algn="r">
-              <a:spcAft>
-                <a:spcPts val="0"/>
-              </a:spcAft>
-            </a:pPr>
-            <a:r>
-              <a:rPr sz="1000" b="0" i="0">
-                <a:solidFill>
-                  <a:srgbClr val="94A3B8"/>
-                </a:solidFill>
-                <a:latin typeface="Arial"/>
-              </a:rPr>
-              <a:t>22</a:t>
-            </a:r>
-          </a:p>
-        </p:txBody>
-      </p:sp>
-      <p:sp>
-        <p:nvSpPr>
-          <p:cNvPr id="4" name="Rectangle 3"/>
-          <p:cNvSpPr/>
-          <p:nvPr/>
-        </p:nvSpPr>
-        <p:spPr>
-          <a:xfrm>
-            <a:off x="521207" y="1252728"/>
-            <a:ext cx="6547103" cy="3264646"/>
-          </a:xfrm>
-          <a:prstGeom prst="rect">
-            <a:avLst/>
-          </a:prstGeom>
-          <a:noFill/>
-          <a:ln w="12700">
-            <a:solidFill>
-              <a:srgbClr val="E2E8F0"/>
-            </a:solidFill>
-          </a:ln>
-          <a:effectLst/>
-        </p:spPr>
-        <p:style>
-          <a:lnRef idx="1">
-            <a:schemeClr val="accent1"/>
-          </a:lnRef>
-          <a:fillRef idx="3">
-            <a:schemeClr val="accent1"/>
-          </a:fillRef>
-          <a:effectRef idx="2">
-            <a:schemeClr val="accent1"/>
-          </a:effectRef>
-          <a:fontRef idx="minor">
-            <a:schemeClr val="lt1"/>
-          </a:fontRef>
-        </p:style>
-        <p:txBody>
-          <a:bodyPr rtlCol="0" anchor="ctr"/>
-          <a:lstStyle/>
-          <a:p>
-            <a:pPr algn="ctr"/>
-          </a:p>
-        </p:txBody>
-      </p:sp>
-      <p:pic>
-        <p:nvPicPr>
-          <p:cNvPr id="5" name="Picture 4" descr="card_sim_impact_auc.png"/>
-          <p:cNvPicPr>
-            <a:picLocks noChangeAspect="1"/>
-          </p:cNvPicPr>
-          <p:nvPr/>
-        </p:nvPicPr>
-        <p:blipFill>
-          <a:blip r:embed="rId3"/>
-          <a:stretch>
-            <a:fillRect/>
-          </a:stretch>
-        </p:blipFill>
-        <p:spPr>
-          <a:xfrm>
-            <a:off x="548640" y="1280160"/>
-            <a:ext cx="6492240" cy="3209782"/>
-          </a:xfrm>
-          <a:prstGeom prst="rect">
-            <a:avLst/>
-          </a:prstGeom>
-        </p:spPr>
-      </p:pic>
-      <p:sp>
-        <p:nvSpPr>
-          <p:cNvPr id="6" name="TextBox 5"/>
-          <p:cNvSpPr txBox="1"/>
-          <p:nvPr/>
-        </p:nvSpPr>
-        <p:spPr>
-          <a:xfrm>
-            <a:off x="548640" y="4544806"/>
-            <a:ext cx="6492240" cy="365760"/>
-          </a:xfrm>
-          <a:prstGeom prst="rect">
-            <a:avLst/>
-          </a:prstGeom>
-          <a:noFill/>
-        </p:spPr>
-        <p:txBody>
-          <a:bodyPr wrap="square" anchor="t" lIns="0" rIns="0" tIns="0" bIns="0">
-            <a:spAutoFit/>
-          </a:bodyPr>
-          <a:lstStyle/>
-          <a:p>
-            <a:pPr algn="l">
-              <a:spcAft>
-                <a:spcPts val="0"/>
-              </a:spcAft>
-            </a:pPr>
-            <a:r>
-              <a:rPr sz="1100" b="0" i="0">
-                <a:solidFill>
-                  <a:srgbClr val="475569"/>
-                </a:solidFill>
-                <a:latin typeface="Arial"/>
-              </a:rPr>
-              <a:t>Рисунок 20 – ImpactNet у симуляторі fusion-sim, пробний прогін 50 розрядів (поле «поріг» замінено на ROC AUC; ROC AUC цього прогону)</a:t>
-            </a:r>
-          </a:p>
-        </p:txBody>
-      </p:sp>
-      <p:sp>
-        <p:nvSpPr>
-          <p:cNvPr id="7" name="Rectangle 6"/>
-          <p:cNvSpPr/>
-          <p:nvPr/>
-        </p:nvSpPr>
-        <p:spPr>
-          <a:xfrm>
-            <a:off x="548640" y="5038582"/>
-            <a:ext cx="6492240" cy="914400"/>
-          </a:xfrm>
-          <a:prstGeom prst="rect">
-            <a:avLst/>
-          </a:prstGeom>
-          <a:solidFill>
-            <a:srgbClr val="F8FAFC"/>
-          </a:solidFill>
-          <a:ln w="12700">
-            <a:solidFill>
-              <a:srgbClr val="E2E8F0"/>
-            </a:solidFill>
-          </a:ln>
-          <a:effectLst/>
-        </p:spPr>
-        <p:style>
-          <a:lnRef idx="1">
-            <a:schemeClr val="accent1"/>
-          </a:lnRef>
-          <a:fillRef idx="3">
-            <a:schemeClr val="accent1"/>
-          </a:fillRef>
-          <a:effectRef idx="2">
-            <a:schemeClr val="accent1"/>
-          </a:effectRef>
-          <a:fontRef idx="minor">
-            <a:schemeClr val="lt1"/>
-          </a:fontRef>
-        </p:style>
-        <p:txBody>
-          <a:bodyPr rtlCol="0" anchor="ctr"/>
-          <a:lstStyle/>
-          <a:p>
-            <a:pPr algn="ctr"/>
-          </a:p>
-        </p:txBody>
-      </p:sp>
-      <p:sp>
-        <p:nvSpPr>
-          <p:cNvPr id="8" name="TextBox 7"/>
-          <p:cNvSpPr txBox="1"/>
-          <p:nvPr/>
-        </p:nvSpPr>
-        <p:spPr>
-          <a:xfrm>
-            <a:off x="685800" y="5130022"/>
-            <a:ext cx="6217920" cy="731520"/>
-          </a:xfrm>
-          <a:prstGeom prst="rect">
-            <a:avLst/>
-          </a:prstGeom>
-          <a:noFill/>
-        </p:spPr>
-        <p:txBody>
-          <a:bodyPr wrap="square" anchor="t" lIns="0" rIns="0" tIns="0" bIns="0">
-            <a:spAutoFit/>
-          </a:bodyPr>
-          <a:lstStyle/>
-          <a:p>
-            <a:pPr algn="l">
-              <a:spcAft>
-                <a:spcPts val="0"/>
-              </a:spcAft>
-            </a:pPr>
-            <a:r>
-              <a:rPr sz="1100" b="1" i="0">
-                <a:solidFill>
-                  <a:srgbClr val="0E7490"/>
-                </a:solidFill>
-                <a:latin typeface="Arial"/>
-              </a:rPr>
-              <a:t>Чому ROC AUC замість порогу. </a:t>
-            </a:r>
-            <a:r>
-              <a:rPr sz="1100" b="0" i="0">
-                <a:solidFill>
-                  <a:srgbClr val="475569"/>
-                </a:solidFill>
-                <a:latin typeface="Arial"/>
-              </a:rPr>
-              <a:t>Поріг спрацювання неінформативний: його підбирає засіб оцінки під бюджет хибних тривог, шкала ймовірностей у моделей різна, а на малій вибірці поріг задає один тихий розряд. Тому на скриншотах замість порогу наведено ROC AUC, яка від порогу не залежить.</a:t>
-            </a:r>
-          </a:p>
-        </p:txBody>
-      </p:sp>
-      <p:sp>
-        <p:nvSpPr>
-          <p:cNvPr id="9" name="TextBox 8"/>
-          <p:cNvSpPr txBox="1"/>
-          <p:nvPr/>
-        </p:nvSpPr>
-        <p:spPr>
-          <a:xfrm>
-            <a:off x="7315200" y="1325880"/>
-            <a:ext cx="4343400" cy="2286000"/>
-          </a:xfrm>
-          <a:prstGeom prst="rect">
-            <a:avLst/>
-          </a:prstGeom>
-          <a:noFill/>
-        </p:spPr>
-        <p:txBody>
-          <a:bodyPr wrap="square" anchor="t" lIns="0" rIns="0" tIns="0" bIns="0">
-            <a:spAutoFit/>
-          </a:bodyPr>
-          <a:lstStyle/>
-          <a:p>
-            <a:pPr algn="l">
-              <a:spcAft>
-                <a:spcPts val="800"/>
-              </a:spcAft>
-            </a:pPr>
-            <a:r>
-              <a:rPr sz="1300" b="1" i="0">
-                <a:solidFill>
-                  <a:srgbClr val="0F172A"/>
-                </a:solidFill>
-                <a:latin typeface="Arial"/>
-              </a:rPr>
-              <a:t>Ознаки – </a:t>
-            </a:r>
-            <a:r>
-              <a:rPr sz="1300" b="0" i="0">
-                <a:solidFill>
-                  <a:srgbClr val="0F172A"/>
-                </a:solidFill>
-                <a:latin typeface="Arial"/>
-              </a:rPr>
-              <a:t>100 діагностик, маски відмов, 18 фізичних величин; згортки, GRU, фізичне апріорі</a:t>
-            </a:r>
-          </a:p>
-          <a:p>
-            <a:pPr algn="l">
-              <a:spcAft>
-                <a:spcPts val="800"/>
-              </a:spcAft>
-            </a:pPr>
-            <a:r>
-              <a:rPr sz="1300" b="1" i="0">
-                <a:solidFill>
-                  <a:srgbClr val="0F172A"/>
-                </a:solidFill>
-                <a:latin typeface="Arial"/>
-              </a:rPr>
-              <a:t>Відмінність – </a:t>
-            </a:r>
-            <a:r>
-              <a:rPr sz="1300" b="0" i="0">
-                <a:solidFill>
-                  <a:srgbClr val="0F172A"/>
-                </a:solidFill>
-                <a:latin typeface="Arial"/>
-              </a:rPr>
-              <a:t>200 розрядів: механізм визначено в 34 з 49 зривів; Грінвальд 16 з 16, радіація 14 з 17</a:t>
-            </a:r>
-          </a:p>
-          <a:p>
-            <a:pPr algn="l">
-              <a:spcAft>
-                <a:spcPts val="800"/>
-              </a:spcAft>
-            </a:pPr>
-            <a:r>
-              <a:rPr sz="1300" b="1" i="0">
-                <a:solidFill>
-                  <a:srgbClr val="0F172A"/>
-                </a:solidFill>
-                <a:latin typeface="Arial"/>
-              </a:rPr>
-              <a:t/>
-            </a:r>
-            <a:r>
-              <a:rPr sz="1300" b="0" i="0">
-                <a:solidFill>
-                  <a:srgbClr val="0F172A"/>
-                </a:solidFill>
-                <a:latin typeface="Arial"/>
-              </a:rPr>
-              <a:t>кінк 4 з 16: частку q95 недооцінено (32 % → 18 %); на toksym 49 з 49, тож причина в зсуві рушія, потрібне калібрування</a:t>
-            </a:r>
-          </a:p>
-        </p:txBody>
-      </p:sp>
-      <p:sp>
-        <p:nvSpPr>
-          <p:cNvPr id="10" name="TextBox 9"/>
-          <p:cNvSpPr txBox="1"/>
-          <p:nvPr/>
-        </p:nvSpPr>
-        <p:spPr>
-          <a:xfrm>
-            <a:off x="7315200" y="3703320"/>
-            <a:ext cx="4343400" cy="320040"/>
-          </a:xfrm>
-          <a:prstGeom prst="rect">
-            <a:avLst/>
-          </a:prstGeom>
-          <a:noFill/>
-        </p:spPr>
-        <p:txBody>
-          <a:bodyPr wrap="square" anchor="t" lIns="0" rIns="0" tIns="0" bIns="0">
-            <a:spAutoFit/>
-          </a:bodyPr>
-          <a:lstStyle/>
-          <a:p>
-            <a:pPr algn="l">
-              <a:spcAft>
-                <a:spcPts val="0"/>
-              </a:spcAft>
-            </a:pPr>
-            <a:r>
-              <a:rPr sz="1100" b="0" i="0">
-                <a:solidFill>
-                  <a:srgbClr val="475569"/>
-                </a:solidFill>
-                <a:latin typeface="Arial"/>
-              </a:rPr>
-              <a:t>Таблиця 13 – Показники</a:t>
-            </a:r>
-          </a:p>
-        </p:txBody>
-      </p:sp>
-      <p:graphicFrame>
-        <p:nvGraphicFramePr>
-          <p:cNvPr id="11" name="Table 10"/>
-          <p:cNvGraphicFramePr>
-            <a:graphicFrameLocks noGrp="1"/>
-          </p:cNvGraphicFramePr>
-          <p:nvPr/>
-        </p:nvGraphicFramePr>
-        <p:xfrm>
-          <a:off x="7315200" y="4069080"/>
-          <a:ext cx="4343400" cy="2084832"/>
-        </p:xfrm>
-        <a:graphic>
-          <a:graphicData uri="http://schemas.openxmlformats.org/drawingml/2006/table">
-            <a:tbl>
-              <a:tblPr firstRow="0" bandRow="0">
-                <a:tableStyleId>{5C22544A-7EE6-4342-B048-85BDC9FD1C3A}</a:tableStyleId>
-              </a:tblPr>
-              <a:tblGrid>
-                <a:gridCol w="2514600"/>
-                <a:gridCol w="1828800"/>
-              </a:tblGrid>
-              <a:tr h="347472">
-                <a:tc>
-                  <a:txBody>
-                    <a:bodyPr wrap="square"/>
-                    <a:lstStyle/>
-                    <a:p>
-                      <a:pPr algn="l"/>
-                      <a:r>
-                        <a:rPr sz="1100" b="1">
-                          <a:solidFill>
-                            <a:srgbClr val="475569"/>
-                          </a:solidFill>
-                          <a:latin typeface="Arial"/>
-                        </a:rPr>
-                        <a:t>показник</a:t>
-                      </a:r>
-                    </a:p>
-                  </a:txBody>
-                  <a:tcPr marL="91440" marR="91440" marT="27432" marB="27432" anchor="ctr">
-                    <a:solidFill>
-                      <a:srgbClr val="F1F5F9"/>
-                    </a:solidFill>
-                  </a:tcPr>
-                </a:tc>
-                <a:tc>
-                  <a:txBody>
-                    <a:bodyPr wrap="square"/>
-                    <a:lstStyle/>
-                    <a:p>
-                      <a:pPr algn="ctr"/>
-                      <a:r>
-                        <a:rPr sz="1100" b="1">
-                          <a:solidFill>
-                            <a:srgbClr val="475569"/>
-                          </a:solidFill>
-                          <a:latin typeface="Arial"/>
-                        </a:rPr>
-                        <a:t>значення</a:t>
-                      </a:r>
-                    </a:p>
-                  </a:txBody>
-                  <a:tcPr marL="91440" marR="91440" marT="27432" marB="27432" anchor="ctr">
-                    <a:solidFill>
-                      <a:srgbClr val="F1F5F9"/>
-                    </a:solidFill>
-                  </a:tcPr>
-                </a:tc>
-              </a:tr>
-              <a:tr h="347472">
-                <a:tc>
-                  <a:txBody>
-                    <a:bodyPr wrap="square"/>
-                    <a:lstStyle/>
-                    <a:p>
-                      <a:pPr algn="l"/>
-                      <a:r>
-                        <a:rPr sz="1100" b="1">
-                          <a:solidFill>
-                            <a:srgbClr val="0F172A"/>
-                          </a:solidFill>
-                          <a:latin typeface="Arial"/>
-                        </a:rPr>
-                        <a:t>механізм, 200 розрядів</a:t>
-                      </a:r>
-                    </a:p>
-                  </a:txBody>
-                  <a:tcPr marL="91440" marR="91440" marT="27432" marB="27432" anchor="ctr">
-                    <a:solidFill>
-                      <a:srgbClr val="FFFFFF"/>
-                    </a:solidFill>
-                  </a:tcPr>
-                </a:tc>
-                <a:tc>
-                  <a:txBody>
-                    <a:bodyPr wrap="square"/>
-                    <a:lstStyle/>
-                    <a:p>
-                      <a:pPr algn="ctr"/>
-                      <a:r>
-                        <a:rPr sz="1200" b="0">
-                          <a:solidFill>
-                            <a:srgbClr val="0F172A"/>
-                          </a:solidFill>
-                          <a:latin typeface="Arial"/>
-                        </a:rPr>
-                        <a:t>34 з 49 (69 %)</a:t>
-                      </a:r>
-                    </a:p>
-                  </a:txBody>
-                  <a:tcPr marL="91440" marR="91440" marT="27432" marB="27432" anchor="ctr">
-                    <a:solidFill>
-                      <a:srgbClr val="FFFFFF"/>
-                    </a:solidFill>
-                  </a:tcPr>
-                </a:tc>
-              </a:tr>
-              <a:tr h="347472">
-                <a:tc>
-                  <a:txBody>
-                    <a:bodyPr wrap="square"/>
-                    <a:lstStyle/>
-                    <a:p>
-                      <a:pPr algn="l"/>
-                      <a:r>
-                        <a:rPr sz="1100" b="1">
-                          <a:solidFill>
-                            <a:srgbClr val="0F172A"/>
-                          </a:solidFill>
-                          <a:latin typeface="Arial"/>
-                        </a:rPr>
-                        <a:t>механізм, 50 розрядів</a:t>
-                      </a:r>
-                    </a:p>
-                  </a:txBody>
-                  <a:tcPr marL="91440" marR="91440" marT="27432" marB="27432" anchor="ctr">
-                    <a:solidFill>
-                      <a:srgbClr val="FFFFFF"/>
-                    </a:solidFill>
-                  </a:tcPr>
-                </a:tc>
-                <a:tc>
-                  <a:txBody>
-                    <a:bodyPr wrap="square"/>
-                    <a:lstStyle/>
-                    <a:p>
-                      <a:pPr algn="ctr"/>
-                      <a:r>
-                        <a:rPr sz="1200" b="0">
-                          <a:solidFill>
-                            <a:srgbClr val="0F172A"/>
-                          </a:solidFill>
-                          <a:latin typeface="Arial"/>
-                        </a:rPr>
-                        <a:t>10 з 12 (83 %)</a:t>
-                      </a:r>
-                    </a:p>
-                  </a:txBody>
-                  <a:tcPr marL="91440" marR="91440" marT="27432" marB="27432" anchor="ctr">
-                    <a:solidFill>
-                      <a:srgbClr val="FFFFFF"/>
-                    </a:solidFill>
-                  </a:tcPr>
-                </a:tc>
-              </a:tr>
-              <a:tr h="347472">
-                <a:tc>
-                  <a:txBody>
-                    <a:bodyPr wrap="square"/>
-                    <a:lstStyle/>
-                    <a:p>
-                      <a:pPr algn="l"/>
-                      <a:r>
-                        <a:rPr sz="1100" b="1">
-                          <a:solidFill>
-                            <a:srgbClr val="0F172A"/>
-                          </a:solidFill>
-                          <a:latin typeface="Arial"/>
-                        </a:rPr>
-                        <a:t>вчасно, 0,1 с, 200 розрядів</a:t>
-                      </a:r>
-                    </a:p>
-                  </a:txBody>
-                  <a:tcPr marL="91440" marR="91440" marT="27432" marB="27432" anchor="ctr">
-                    <a:solidFill>
-                      <a:srgbClr val="FFFFFF"/>
-                    </a:solidFill>
-                  </a:tcPr>
-                </a:tc>
-                <a:tc>
-                  <a:txBody>
-                    <a:bodyPr wrap="square"/>
-                    <a:lstStyle/>
-                    <a:p>
-                      <a:pPr algn="ctr"/>
-                      <a:r>
-                        <a:rPr sz="1200" b="0">
-                          <a:solidFill>
-                            <a:srgbClr val="0F172A"/>
-                          </a:solidFill>
-                          <a:latin typeface="Arial"/>
-                        </a:rPr>
-                        <a:t>51,0 %</a:t>
-                      </a:r>
-                    </a:p>
-                  </a:txBody>
-                  <a:tcPr marL="91440" marR="91440" marT="27432" marB="27432" anchor="ctr">
-                    <a:solidFill>
-                      <a:srgbClr val="FFFFFF"/>
-                    </a:solidFill>
-                  </a:tcPr>
-                </a:tc>
-              </a:tr>
-              <a:tr h="347472">
-                <a:tc>
-                  <a:txBody>
-                    <a:bodyPr wrap="square"/>
-                    <a:lstStyle/>
-                    <a:p>
-                      <a:pPr algn="l"/>
-                      <a:r>
-                        <a:rPr sz="1100" b="1">
-                          <a:solidFill>
-                            <a:srgbClr val="0F172A"/>
-                          </a:solidFill>
-                          <a:latin typeface="Arial"/>
-                        </a:rPr>
-                        <a:t>ROC AUC, 0,1 с (50 розрядів)</a:t>
-                      </a:r>
-                    </a:p>
-                  </a:txBody>
-                  <a:tcPr marL="91440" marR="91440" marT="27432" marB="27432" anchor="ctr">
-                    <a:solidFill>
-                      <a:srgbClr val="FFFFFF"/>
-                    </a:solidFill>
-                  </a:tcPr>
-                </a:tc>
-                <a:tc>
-                  <a:txBody>
-                    <a:bodyPr wrap="square"/>
-                    <a:lstStyle/>
-                    <a:p>
-                      <a:pPr algn="ctr"/>
-                      <a:r>
-                        <a:rPr sz="1200" b="0">
-                          <a:solidFill>
-                            <a:srgbClr val="0F172A"/>
-                          </a:solidFill>
-                          <a:latin typeface="Arial"/>
-                        </a:rPr>
-                        <a:t>0,885</a:t>
-                      </a:r>
-                    </a:p>
-                  </a:txBody>
-                  <a:tcPr marL="91440" marR="91440" marT="27432" marB="27432" anchor="ctr">
-                    <a:solidFill>
-                      <a:srgbClr val="FFFFFF"/>
-                    </a:solidFill>
-                  </a:tcPr>
-                </a:tc>
-              </a:tr>
-              <a:tr h="347472">
-                <a:tc>
-                  <a:txBody>
-                    <a:bodyPr wrap="square"/>
-                    <a:lstStyle/>
-                    <a:p>
-                      <a:pPr algn="l"/>
-                      <a:r>
-                        <a:rPr sz="1100" b="1">
-                          <a:solidFill>
-                            <a:srgbClr val="0F172A"/>
-                          </a:solidFill>
-                          <a:latin typeface="Arial"/>
-                        </a:rPr>
-                        <a:t>механізм, toksym (тест)</a:t>
-                      </a:r>
-                    </a:p>
-                  </a:txBody>
-                  <a:tcPr marL="91440" marR="91440" marT="27432" marB="27432" anchor="ctr">
-                    <a:solidFill>
-                      <a:srgbClr val="FFFFFF"/>
-                    </a:solidFill>
-                  </a:tcPr>
-                </a:tc>
-                <a:tc>
-                  <a:txBody>
-                    <a:bodyPr wrap="square"/>
-                    <a:lstStyle/>
-                    <a:p>
-                      <a:pPr algn="ctr"/>
-                      <a:r>
-                        <a:rPr sz="1200" b="0">
-                          <a:solidFill>
-                            <a:srgbClr val="0F172A"/>
-                          </a:solidFill>
-                          <a:latin typeface="Arial"/>
-                        </a:rPr>
-                        <a:t>49 з 49</a:t>
-                      </a:r>
-                    </a:p>
-                  </a:txBody>
-                  <a:tcPr marL="91440" marR="91440" marT="27432" marB="27432" anchor="ctr">
-                    <a:solidFill>
-                      <a:srgbClr val="FFFFFF"/>
-                    </a:solidFill>
-                  </a:tcPr>
-                </a:tc>
-              </a:tr>
-            </a:tbl>
-          </a:graphicData>
-        </a:graphic>
-      </p:graphicFrame>
     </p:spTree>
   </p:cSld>
   <p:clrMapOvr>
@@ -18187,7 +13011,7 @@
                 </a:solidFill>
                 <a:latin typeface="Arial"/>
               </a:rPr>
-              <a:t>7 Порівняльний аналіз моделей на спільній вибірці</a:t>
+              <a:t>7 Що ми перепробували: залік на спільних 200 розрядах</a:t>
             </a:r>
           </a:p>
         </p:txBody>
@@ -18231,9 +13055,53 @@
           </a:p>
         </p:txBody>
       </p:sp>
+      <p:sp>
+        <p:nvSpPr>
+          <p:cNvPr id="4" name="Rectangle 3"/>
+          <p:cNvSpPr/>
+          <p:nvPr/>
+        </p:nvSpPr>
+        <p:spPr>
+          <a:xfrm>
+            <a:off x="521207" y="1207008"/>
+            <a:ext cx="5449824" cy="947865"/>
+          </a:xfrm>
+          <a:prstGeom prst="rect">
+            <a:avLst/>
+          </a:prstGeom>
+          <a:noFill/>
+          <a:ln w="12700">
+            <a:solidFill>
+              <a:srgbClr val="E2E8F0"/>
+            </a:solidFill>
+          </a:ln>
+          <a:effectLst/>
+        </p:spPr>
+        <p:style>
+          <a:lnRef idx="1">
+            <a:schemeClr val="accent1"/>
+          </a:lnRef>
+          <a:fillRef idx="3">
+            <a:schemeClr val="accent1"/>
+          </a:fillRef>
+          <a:effectRef idx="2">
+            <a:schemeClr val="accent1"/>
+          </a:effectRef>
+          <a:fontRef idx="minor">
+            <a:schemeClr val="lt1"/>
+          </a:fontRef>
+        </p:style>
+        <p:txBody>
+          <a:bodyPr rtlCol="0" anchor="ctr"/>
+          <a:lstStyle/>
+          <a:p>
+            <a:pPr algn="ctr"/>
+          </a:p>
+        </p:txBody>
+      </p:sp>
       <p:pic>
         <p:nvPicPr>
-          <p:cNvPr id="4" name="Picture 3" descr="ui_compare.png"/>
+          <p:cNvPr id="5" name="Picture 4" descr="card_xgb_phys_auc.png"/>
           <p:cNvPicPr>
             <a:picLocks noChangeAspect="1"/>
           </p:cNvPicPr>
@@ -18247,8 +13115,8 @@
         </p:blipFill>
         <p:spPr>
           <a:xfrm>
-            <a:off x="548640" y="1280160"/>
-            <a:ext cx="7772400" cy="3610131"/>
+            <a:off x="548640" y="1234440"/>
+            <a:ext cx="5394960" cy="893001"/>
           </a:xfrm>
           <a:prstGeom prst="rect">
             <a:avLst/>
@@ -18257,14 +13125,14 @@
       </p:pic>
       <p:sp>
         <p:nvSpPr>
-          <p:cNvPr id="5" name="TextBox 4"/>
+          <p:cNvPr id="6" name="TextBox 5"/>
           <p:cNvSpPr txBox="1"/>
           <p:nvPr/>
         </p:nvSpPr>
         <p:spPr>
           <a:xfrm>
-            <a:off x="548640" y="4936011"/>
-            <a:ext cx="7772400" cy="365760"/>
+            <a:off x="548640" y="2173161"/>
+            <a:ext cx="5394960" cy="274320"/>
           </a:xfrm>
           <a:prstGeom prst="rect">
             <a:avLst/>
@@ -18289,21 +13157,89 @@
                 </a:solidFill>
                 <a:latin typeface="Arial"/>
               </a:rPr>
-              <a:t>Рисунок 3 – Частка вчасних тривог і кількість пропущених зривів на спільних 200 розрядах (запас 0,1 с, бюджет 5 %)</a:t>
-            </a:r>
-          </a:p>
-        </p:txBody>
-      </p:sp>
-      <p:sp>
-        <p:nvSpPr>
-          <p:cNvPr id="6" name="TextBox 5"/>
+              <a:t>а) XGBoost Physics: крок без пам'яті, 25 фізичних агрегатів</a:t>
+            </a:r>
+          </a:p>
+        </p:txBody>
+      </p:sp>
+      <p:sp>
+        <p:nvSpPr>
+          <p:cNvPr id="7" name="Rectangle 6"/>
+          <p:cNvSpPr/>
+          <p:nvPr/>
+        </p:nvSpPr>
+        <p:spPr>
+          <a:xfrm>
+            <a:off x="6190488" y="1207008"/>
+            <a:ext cx="5449824" cy="947865"/>
+          </a:xfrm>
+          <a:prstGeom prst="rect">
+            <a:avLst/>
+          </a:prstGeom>
+          <a:noFill/>
+          <a:ln w="12700">
+            <a:solidFill>
+              <a:srgbClr val="E2E8F0"/>
+            </a:solidFill>
+          </a:ln>
+          <a:effectLst/>
+        </p:spPr>
+        <p:style>
+          <a:lnRef idx="1">
+            <a:schemeClr val="accent1"/>
+          </a:lnRef>
+          <a:fillRef idx="3">
+            <a:schemeClr val="accent1"/>
+          </a:fillRef>
+          <a:effectRef idx="2">
+            <a:schemeClr val="accent1"/>
+          </a:effectRef>
+          <a:fontRef idx="minor">
+            <a:schemeClr val="lt1"/>
+          </a:fontRef>
+        </p:style>
+        <p:txBody>
+          <a:bodyPr rtlCol="0" anchor="ctr"/>
+          <a:lstStyle/>
+          <a:p>
+            <a:pPr algn="ctr"/>
+          </a:p>
+        </p:txBody>
+      </p:sp>
+      <p:pic>
+        <p:nvPicPr>
+          <p:cNvPr id="8" name="Picture 7" descr="card_xgb_dyn_auc.png"/>
+          <p:cNvPicPr>
+            <a:picLocks noChangeAspect="1"/>
+          </p:cNvPicPr>
+          <p:nvPr/>
+        </p:nvPicPr>
+        <p:blipFill>
+          <a:blip r:embed="rId4"/>
+          <a:stretch>
+            <a:fillRect/>
+          </a:stretch>
+        </p:blipFill>
+        <p:spPr>
+          <a:xfrm>
+            <a:off x="6217920" y="1234440"/>
+            <a:ext cx="5394960" cy="893001"/>
+          </a:xfrm>
+          <a:prstGeom prst="rect">
+            <a:avLst/>
+          </a:prstGeom>
+        </p:spPr>
+      </p:pic>
+      <p:sp>
+        <p:nvSpPr>
+          <p:cNvPr id="9" name="TextBox 8"/>
           <p:cNvSpPr txBox="1"/>
           <p:nvPr/>
         </p:nvSpPr>
         <p:spPr>
           <a:xfrm>
-            <a:off x="8595360" y="1280160"/>
-            <a:ext cx="3063240" cy="320040"/>
+            <a:off x="6217920" y="2173161"/>
+            <a:ext cx="5394960" cy="274320"/>
           </a:xfrm>
           <a:prstGeom prst="rect">
             <a:avLst/>
@@ -18328,332 +13264,89 @@
                 </a:solidFill>
                 <a:latin typeface="Arial"/>
               </a:rPr>
-              <a:t>Таблиця 4 – Узагальнення</a:t>
-            </a:r>
-          </a:p>
-        </p:txBody>
-      </p:sp>
-      <p:graphicFrame>
-        <p:nvGraphicFramePr>
-          <p:cNvPr id="7" name="Table 6"/>
-          <p:cNvGraphicFramePr>
-            <a:graphicFrameLocks noGrp="1"/>
-          </p:cNvGraphicFramePr>
+              <a:t>б) XGBoost Dynamics: + 119 часових ознак (лаги, швидкості)</a:t>
+            </a:r>
+          </a:p>
+        </p:txBody>
+      </p:sp>
+      <p:sp>
+        <p:nvSpPr>
+          <p:cNvPr id="10" name="Rectangle 9"/>
+          <p:cNvSpPr/>
           <p:nvPr/>
-        </p:nvGraphicFramePr>
-        <p:xfrm>
-          <a:off x="8595360" y="1645920"/>
-          <a:ext cx="3063240" cy="2121408"/>
-        </p:xfrm>
-        <a:graphic>
-          <a:graphicData uri="http://schemas.openxmlformats.org/drawingml/2006/table">
-            <a:tbl>
-              <a:tblPr firstRow="0" bandRow="0">
-                <a:tableStyleId>{5C22544A-7EE6-4342-B048-85BDC9FD1C3A}</a:tableStyleId>
-              </a:tblPr>
-              <a:tblGrid>
-                <a:gridCol w="1325880"/>
-                <a:gridCol w="868680"/>
-                <a:gridCol w="868680"/>
-              </a:tblGrid>
-              <a:tr h="530352">
-                <a:tc>
-                  <a:txBody>
-                    <a:bodyPr wrap="square"/>
-                    <a:lstStyle/>
-                    <a:p>
-                      <a:pPr algn="l"/>
-                      <a:r>
-                        <a:rPr sz="1100" b="1">
-                          <a:solidFill>
-                            <a:srgbClr val="475569"/>
-                          </a:solidFill>
-                          <a:latin typeface="Arial"/>
-                        </a:rPr>
-                        <a:t>показник</a:t>
-                      </a:r>
-                    </a:p>
-                  </a:txBody>
-                  <a:tcPr marL="91440" marR="91440" marT="27432" marB="27432" anchor="ctr">
-                    <a:solidFill>
-                      <a:srgbClr val="F1F5F9"/>
-                    </a:solidFill>
-                  </a:tcPr>
-                </a:tc>
-                <a:tc>
-                  <a:txBody>
-                    <a:bodyPr wrap="square"/>
-                    <a:lstStyle/>
-                    <a:p>
-                      <a:pPr algn="ctr"/>
-                      <a:r>
-                        <a:rPr sz="1100" b="1">
-                          <a:solidFill>
-                            <a:srgbClr val="475569"/>
-                          </a:solidFill>
-                          <a:latin typeface="Arial"/>
-                        </a:rPr>
-                        <a:t>XGBoost</a:t>
-                      </a:r>
-                    </a:p>
-                  </a:txBody>
-                  <a:tcPr marL="91440" marR="91440" marT="27432" marB="27432" anchor="ctr">
-                    <a:solidFill>
-                      <a:srgbClr val="F1F5F9"/>
-                    </a:solidFill>
-                  </a:tcPr>
-                </a:tc>
-                <a:tc>
-                  <a:txBody>
-                    <a:bodyPr wrap="square"/>
-                    <a:lstStyle/>
-                    <a:p>
-                      <a:pPr algn="ctr"/>
-                      <a:r>
-                        <a:rPr sz="1100" b="1">
-                          <a:solidFill>
-                            <a:srgbClr val="475569"/>
-                          </a:solidFill>
-                          <a:latin typeface="Arial"/>
-                        </a:rPr>
-                        <a:t>наші</a:t>
-                      </a:r>
-                    </a:p>
-                  </a:txBody>
-                  <a:tcPr marL="91440" marR="91440" marT="27432" marB="27432" anchor="ctr">
-                    <a:solidFill>
-                      <a:srgbClr val="F1F5F9"/>
-                    </a:solidFill>
-                  </a:tcPr>
-                </a:tc>
-              </a:tr>
-              <a:tr h="530352">
-                <a:tc>
-                  <a:txBody>
-                    <a:bodyPr wrap="square"/>
-                    <a:lstStyle/>
-                    <a:p>
-                      <a:pPr algn="l"/>
-                      <a:r>
-                        <a:rPr sz="1100" b="1">
-                          <a:solidFill>
-                            <a:srgbClr val="0F172A"/>
-                          </a:solidFill>
-                          <a:latin typeface="Arial"/>
-                        </a:rPr>
-                        <a:t>вчасно, 0,1 с</a:t>
-                      </a:r>
-                    </a:p>
-                  </a:txBody>
-                  <a:tcPr marL="91440" marR="91440" marT="27432" marB="27432" anchor="ctr">
-                    <a:solidFill>
-                      <a:srgbClr val="FFFFFF"/>
-                    </a:solidFill>
-                  </a:tcPr>
-                </a:tc>
-                <a:tc>
-                  <a:txBody>
-                    <a:bodyPr wrap="square"/>
-                    <a:lstStyle/>
-                    <a:p>
-                      <a:pPr algn="ctr"/>
-                      <a:r>
-                        <a:rPr sz="1200" b="0">
-                          <a:solidFill>
-                            <a:srgbClr val="0F172A"/>
-                          </a:solidFill>
-                          <a:latin typeface="Arial"/>
-                        </a:rPr>
-                        <a:t>25–35 %</a:t>
-                      </a:r>
-                    </a:p>
-                  </a:txBody>
-                  <a:tcPr marL="91440" marR="91440" marT="27432" marB="27432" anchor="ctr">
-                    <a:solidFill>
-                      <a:srgbClr val="FFFFFF"/>
-                    </a:solidFill>
-                  </a:tcPr>
-                </a:tc>
-                <a:tc>
-                  <a:txBody>
-                    <a:bodyPr wrap="square"/>
-                    <a:lstStyle/>
-                    <a:p>
-                      <a:pPr algn="ctr"/>
-                      <a:r>
-                        <a:rPr sz="1200" b="0">
-                          <a:solidFill>
-                            <a:srgbClr val="0F172A"/>
-                          </a:solidFill>
-                          <a:latin typeface="Arial"/>
-                        </a:rPr>
-                        <a:t>57–67 %</a:t>
-                      </a:r>
-                    </a:p>
-                  </a:txBody>
-                  <a:tcPr marL="91440" marR="91440" marT="27432" marB="27432" anchor="ctr">
-                    <a:solidFill>
-                      <a:srgbClr val="FFFFFF"/>
-                    </a:solidFill>
-                  </a:tcPr>
-                </a:tc>
-              </a:tr>
-              <a:tr h="530352">
-                <a:tc>
-                  <a:txBody>
-                    <a:bodyPr wrap="square"/>
-                    <a:lstStyle/>
-                    <a:p>
-                      <a:pPr algn="l"/>
-                      <a:r>
-                        <a:rPr sz="1100" b="1">
-                          <a:solidFill>
-                            <a:srgbClr val="0F172A"/>
-                          </a:solidFill>
-                          <a:latin typeface="Arial"/>
-                        </a:rPr>
-                        <a:t>пропущено</a:t>
-                      </a:r>
-                    </a:p>
-                  </a:txBody>
-                  <a:tcPr marL="91440" marR="91440" marT="27432" marB="27432" anchor="ctr">
-                    <a:solidFill>
-                      <a:srgbClr val="FFFFFF"/>
-                    </a:solidFill>
-                  </a:tcPr>
-                </a:tc>
-                <a:tc>
-                  <a:txBody>
-                    <a:bodyPr wrap="square"/>
-                    <a:lstStyle/>
-                    <a:p>
-                      <a:pPr algn="ctr"/>
-                      <a:r>
-                        <a:rPr sz="1200" b="0">
-                          <a:solidFill>
-                            <a:srgbClr val="0F172A"/>
-                          </a:solidFill>
-                          <a:latin typeface="Arial"/>
-                        </a:rPr>
-                        <a:t>5–9</a:t>
-                      </a:r>
-                    </a:p>
-                  </a:txBody>
-                  <a:tcPr marL="91440" marR="91440" marT="27432" marB="27432" anchor="ctr">
-                    <a:solidFill>
-                      <a:srgbClr val="FFFFFF"/>
-                    </a:solidFill>
-                  </a:tcPr>
-                </a:tc>
-                <a:tc>
-                  <a:txBody>
-                    <a:bodyPr wrap="square"/>
-                    <a:lstStyle/>
-                    <a:p>
-                      <a:pPr algn="ctr"/>
-                      <a:r>
-                        <a:rPr sz="1200" b="0">
-                          <a:solidFill>
-                            <a:srgbClr val="0F172A"/>
-                          </a:solidFill>
-                          <a:latin typeface="Arial"/>
-                        </a:rPr>
-                        <a:t>0–1</a:t>
-                      </a:r>
-                    </a:p>
-                  </a:txBody>
-                  <a:tcPr marL="91440" marR="91440" marT="27432" marB="27432" anchor="ctr">
-                    <a:solidFill>
-                      <a:srgbClr val="FFFFFF"/>
-                    </a:solidFill>
-                  </a:tcPr>
-                </a:tc>
-              </a:tr>
-              <a:tr h="530352">
-                <a:tc>
-                  <a:txBody>
-                    <a:bodyPr wrap="square"/>
-                    <a:lstStyle/>
-                    <a:p>
-                      <a:pPr algn="l"/>
-                      <a:r>
-                        <a:rPr sz="1100" b="1">
-                          <a:solidFill>
-                            <a:srgbClr val="0F172A"/>
-                          </a:solidFill>
-                          <a:latin typeface="Arial"/>
-                        </a:rPr>
-                        <a:t>медіана випередження, с</a:t>
-                      </a:r>
-                    </a:p>
-                  </a:txBody>
-                  <a:tcPr marL="91440" marR="91440" marT="27432" marB="27432" anchor="ctr">
-                    <a:solidFill>
-                      <a:srgbClr val="FFFFFF"/>
-                    </a:solidFill>
-                  </a:tcPr>
-                </a:tc>
-                <a:tc>
-                  <a:txBody>
-                    <a:bodyPr wrap="square"/>
-                    <a:lstStyle/>
-                    <a:p>
-                      <a:pPr algn="ctr"/>
-                      <a:r>
-                        <a:rPr sz="1200" b="0">
-                          <a:solidFill>
-                            <a:srgbClr val="0F172A"/>
-                          </a:solidFill>
-                          <a:latin typeface="Arial"/>
-                        </a:rPr>
-                        <a:t>0,67–0,90</a:t>
-                      </a:r>
-                    </a:p>
-                  </a:txBody>
-                  <a:tcPr marL="91440" marR="91440" marT="27432" marB="27432" anchor="ctr">
-                    <a:solidFill>
-                      <a:srgbClr val="FFFFFF"/>
-                    </a:solidFill>
-                  </a:tcPr>
-                </a:tc>
-                <a:tc>
-                  <a:txBody>
-                    <a:bodyPr wrap="square"/>
-                    <a:lstStyle/>
-                    <a:p>
-                      <a:pPr algn="ctr"/>
-                      <a:r>
-                        <a:rPr sz="1200" b="0">
-                          <a:solidFill>
-                            <a:srgbClr val="0F172A"/>
-                          </a:solidFill>
-                          <a:latin typeface="Arial"/>
-                        </a:rPr>
-                        <a:t>0,94–1,42</a:t>
-                      </a:r>
-                    </a:p>
-                  </a:txBody>
-                  <a:tcPr marL="91440" marR="91440" marT="27432" marB="27432" anchor="ctr">
-                    <a:solidFill>
-                      <a:srgbClr val="FFFFFF"/>
-                    </a:solidFill>
-                  </a:tcPr>
-                </a:tc>
-              </a:tr>
-            </a:tbl>
-          </a:graphicData>
-        </a:graphic>
-      </p:graphicFrame>
-      <p:sp>
-        <p:nvSpPr>
-          <p:cNvPr id="8" name="TextBox 7"/>
+        </p:nvSpPr>
+        <p:spPr>
+          <a:xfrm>
+            <a:off x="521207" y="2666937"/>
+            <a:ext cx="5449824" cy="734266"/>
+          </a:xfrm>
+          <a:prstGeom prst="rect">
+            <a:avLst/>
+          </a:prstGeom>
+          <a:noFill/>
+          <a:ln w="12700">
+            <a:solidFill>
+              <a:srgbClr val="E2E8F0"/>
+            </a:solidFill>
+          </a:ln>
+          <a:effectLst/>
+        </p:spPr>
+        <p:style>
+          <a:lnRef idx="1">
+            <a:schemeClr val="accent1"/>
+          </a:lnRef>
+          <a:fillRef idx="3">
+            <a:schemeClr val="accent1"/>
+          </a:fillRef>
+          <a:effectRef idx="2">
+            <a:schemeClr val="accent1"/>
+          </a:effectRef>
+          <a:fontRef idx="minor">
+            <a:schemeClr val="lt1"/>
+          </a:fontRef>
+        </p:style>
+        <p:txBody>
+          <a:bodyPr rtlCol="0" anchor="ctr"/>
+          <a:lstStyle/>
+          <a:p>
+            <a:pPr algn="ctr"/>
+          </a:p>
+        </p:txBody>
+      </p:sp>
+      <p:pic>
+        <p:nvPicPr>
+          <p:cNvPr id="11" name="Picture 10" descr="card_v6_auc.png"/>
+          <p:cNvPicPr>
+            <a:picLocks noChangeAspect="1"/>
+          </p:cNvPicPr>
+          <p:nvPr/>
+        </p:nvPicPr>
+        <p:blipFill>
+          <a:blip r:embed="rId5"/>
+          <a:stretch>
+            <a:fillRect/>
+          </a:stretch>
+        </p:blipFill>
+        <p:spPr>
+          <a:xfrm>
+            <a:off x="548640" y="2694369"/>
+            <a:ext cx="5394960" cy="679402"/>
+          </a:xfrm>
+          <a:prstGeom prst="rect">
+            <a:avLst/>
+          </a:prstGeom>
+        </p:spPr>
+      </p:pic>
+      <p:sp>
+        <p:nvSpPr>
+          <p:cNvPr id="12" name="TextBox 11"/>
           <p:cNvSpPr txBox="1"/>
           <p:nvPr/>
         </p:nvSpPr>
         <p:spPr>
           <a:xfrm>
-            <a:off x="8595360" y="4023360"/>
-            <a:ext cx="3063240" cy="1828800"/>
+            <a:off x="548640" y="3419491"/>
+            <a:ext cx="5394960" cy="274320"/>
           </a:xfrm>
           <a:prstGeom prst="rect">
             <a:avLst/>
@@ -18672,13 +13365,421 @@
               </a:spcAft>
             </a:pPr>
             <a:r>
+              <a:rPr sz="1100" b="0" i="0">
+                <a:solidFill>
+                  <a:srgbClr val="475569"/>
+                </a:solidFill>
+                <a:latin typeface="Arial"/>
+              </a:rPr>
+              <a:t>в) v6: дві голови HGB, формули шпаргалки і мітка сценарію</a:t>
+            </a:r>
+          </a:p>
+        </p:txBody>
+      </p:sp>
+      <p:sp>
+        <p:nvSpPr>
+          <p:cNvPr id="13" name="Rectangle 12"/>
+          <p:cNvSpPr/>
+          <p:nvPr/>
+        </p:nvSpPr>
+        <p:spPr>
+          <a:xfrm>
+            <a:off x="6190488" y="2666937"/>
+            <a:ext cx="5449824" cy="729234"/>
+          </a:xfrm>
+          <a:prstGeom prst="rect">
+            <a:avLst/>
+          </a:prstGeom>
+          <a:noFill/>
+          <a:ln w="12700">
+            <a:solidFill>
+              <a:srgbClr val="E2E8F0"/>
+            </a:solidFill>
+          </a:ln>
+          <a:effectLst/>
+        </p:spPr>
+        <p:style>
+          <a:lnRef idx="1">
+            <a:schemeClr val="accent1"/>
+          </a:lnRef>
+          <a:fillRef idx="3">
+            <a:schemeClr val="accent1"/>
+          </a:fillRef>
+          <a:effectRef idx="2">
+            <a:schemeClr val="accent1"/>
+          </a:effectRef>
+          <a:fontRef idx="minor">
+            <a:schemeClr val="lt1"/>
+          </a:fontRef>
+        </p:style>
+        <p:txBody>
+          <a:bodyPr rtlCol="0" anchor="ctr"/>
+          <a:lstStyle/>
+          <a:p>
+            <a:pPr algn="ctr"/>
+          </a:p>
+        </p:txBody>
+      </p:sp>
+      <p:pic>
+        <p:nvPicPr>
+          <p:cNvPr id="14" name="Picture 13" descr="card_v6b_auc.png"/>
+          <p:cNvPicPr>
+            <a:picLocks noChangeAspect="1"/>
+          </p:cNvPicPr>
+          <p:nvPr/>
+        </p:nvPicPr>
+        <p:blipFill>
+          <a:blip r:embed="rId6"/>
+          <a:stretch>
+            <a:fillRect/>
+          </a:stretch>
+        </p:blipFill>
+        <p:spPr>
+          <a:xfrm>
+            <a:off x="6217920" y="2694369"/>
+            <a:ext cx="5394960" cy="674370"/>
+          </a:xfrm>
+          <a:prstGeom prst="rect">
+            <a:avLst/>
+          </a:prstGeom>
+        </p:spPr>
+      </p:pic>
+      <p:sp>
+        <p:nvSpPr>
+          <p:cNvPr id="15" name="TextBox 14"/>
+          <p:cNvSpPr txBox="1"/>
+          <p:nvPr/>
+        </p:nvSpPr>
+        <p:spPr>
+          <a:xfrm>
+            <a:off x="6217920" y="3414459"/>
+            <a:ext cx="5394960" cy="274320"/>
+          </a:xfrm>
+          <a:prstGeom prst="rect">
+            <a:avLst/>
+          </a:prstGeom>
+          <a:noFill/>
+        </p:spPr>
+        <p:txBody>
+          <a:bodyPr wrap="square" anchor="t" lIns="0" rIns="0" tIns="0" bIns="0">
+            <a:spAutoFit/>
+          </a:bodyPr>
+          <a:lstStyle/>
+          <a:p>
+            <a:pPr algn="l">
+              <a:spcAft>
+                <a:spcPts val="0"/>
+              </a:spcAft>
+            </a:pPr>
+            <a:r>
+              <a:rPr sz="1100" b="0" i="0">
+                <a:solidFill>
+                  <a:srgbClr val="475569"/>
+                </a:solidFill>
+                <a:latin typeface="Arial"/>
+              </a:rPr>
+              <a:t>г) v6b: інше налаштування голови раннього попередження</a:t>
+            </a:r>
+          </a:p>
+        </p:txBody>
+      </p:sp>
+      <p:sp>
+        <p:nvSpPr>
+          <p:cNvPr id="16" name="Rectangle 15"/>
+          <p:cNvSpPr/>
+          <p:nvPr/>
+        </p:nvSpPr>
+        <p:spPr>
+          <a:xfrm>
+            <a:off x="521207" y="3913267"/>
+            <a:ext cx="5449824" cy="756406"/>
+          </a:xfrm>
+          <a:prstGeom prst="rect">
+            <a:avLst/>
+          </a:prstGeom>
+          <a:noFill/>
+          <a:ln w="12700">
+            <a:solidFill>
+              <a:srgbClr val="E2E8F0"/>
+            </a:solidFill>
+          </a:ln>
+          <a:effectLst/>
+        </p:spPr>
+        <p:style>
+          <a:lnRef idx="1">
+            <a:schemeClr val="accent1"/>
+          </a:lnRef>
+          <a:fillRef idx="3">
+            <a:schemeClr val="accent1"/>
+          </a:fillRef>
+          <a:effectRef idx="2">
+            <a:schemeClr val="accent1"/>
+          </a:effectRef>
+          <a:fontRef idx="minor">
+            <a:schemeClr val="lt1"/>
+          </a:fontRef>
+        </p:style>
+        <p:txBody>
+          <a:bodyPr rtlCol="0" anchor="ctr"/>
+          <a:lstStyle/>
+          <a:p>
+            <a:pPr algn="ctr"/>
+          </a:p>
+        </p:txBody>
+      </p:sp>
+      <p:pic>
+        <p:nvPicPr>
+          <p:cNvPr id="17" name="Picture 16" descr="card_ens5_auc.png"/>
+          <p:cNvPicPr>
+            <a:picLocks noChangeAspect="1"/>
+          </p:cNvPicPr>
+          <p:nvPr/>
+        </p:nvPicPr>
+        <p:blipFill>
+          <a:blip r:embed="rId7"/>
+          <a:stretch>
+            <a:fillRect/>
+          </a:stretch>
+        </p:blipFill>
+        <p:spPr>
+          <a:xfrm>
+            <a:off x="548640" y="3940699"/>
+            <a:ext cx="5394960" cy="701542"/>
+          </a:xfrm>
+          <a:prstGeom prst="rect">
+            <a:avLst/>
+          </a:prstGeom>
+        </p:spPr>
+      </p:pic>
+      <p:sp>
+        <p:nvSpPr>
+          <p:cNvPr id="18" name="TextBox 17"/>
+          <p:cNvSpPr txBox="1"/>
+          <p:nvPr/>
+        </p:nvSpPr>
+        <p:spPr>
+          <a:xfrm>
+            <a:off x="548640" y="4687962"/>
+            <a:ext cx="5394960" cy="274320"/>
+          </a:xfrm>
+          <a:prstGeom prst="rect">
+            <a:avLst/>
+          </a:prstGeom>
+          <a:noFill/>
+        </p:spPr>
+        <p:txBody>
+          <a:bodyPr wrap="square" anchor="t" lIns="0" rIns="0" tIns="0" bIns="0">
+            <a:spAutoFit/>
+          </a:bodyPr>
+          <a:lstStyle/>
+          <a:p>
+            <a:pPr algn="l">
+              <a:spcAft>
+                <a:spcPts val="0"/>
+              </a:spcAft>
+            </a:pPr>
+            <a:r>
+              <a:rPr sz="1100" b="0" i="0">
+                <a:solidFill>
+                  <a:srgbClr val="475569"/>
+                </a:solidFill>
+                <a:latin typeface="Arial"/>
+              </a:rPr>
+              <a:t>д) ens5: ансамбль 5 моделей, 3 мс на крок, відхилено</a:t>
+            </a:r>
+          </a:p>
+        </p:txBody>
+      </p:sp>
+      <p:sp>
+        <p:nvSpPr>
+          <p:cNvPr id="19" name="Rectangle 18"/>
+          <p:cNvSpPr/>
+          <p:nvPr/>
+        </p:nvSpPr>
+        <p:spPr>
+          <a:xfrm>
+            <a:off x="6190488" y="3913267"/>
+            <a:ext cx="5449824" cy="756406"/>
+          </a:xfrm>
+          <a:prstGeom prst="rect">
+            <a:avLst/>
+          </a:prstGeom>
+          <a:noFill/>
+          <a:ln w="12700">
+            <a:solidFill>
+              <a:srgbClr val="E2E8F0"/>
+            </a:solidFill>
+          </a:ln>
+          <a:effectLst/>
+        </p:spPr>
+        <p:style>
+          <a:lnRef idx="1">
+            <a:schemeClr val="accent1"/>
+          </a:lnRef>
+          <a:fillRef idx="3">
+            <a:schemeClr val="accent1"/>
+          </a:fillRef>
+          <a:effectRef idx="2">
+            <a:schemeClr val="accent1"/>
+          </a:effectRef>
+          <a:fontRef idx="minor">
+            <a:schemeClr val="lt1"/>
+          </a:fontRef>
+        </p:style>
+        <p:txBody>
+          <a:bodyPr rtlCol="0" anchor="ctr"/>
+          <a:lstStyle/>
+          <a:p>
+            <a:pPr algn="ctr"/>
+          </a:p>
+        </p:txBody>
+      </p:sp>
+      <p:pic>
+        <p:nvPicPr>
+          <p:cNvPr id="20" name="Picture 19" descr="ui_clean_big_01_auc.png"/>
+          <p:cNvPicPr>
+            <a:picLocks noChangeAspect="1"/>
+          </p:cNvPicPr>
+          <p:nvPr/>
+        </p:nvPicPr>
+        <p:blipFill>
+          <a:blip r:embed="rId8"/>
+          <a:stretch>
+            <a:fillRect/>
+          </a:stretch>
+        </p:blipFill>
+        <p:spPr>
+          <a:xfrm>
+            <a:off x="6217920" y="3940699"/>
+            <a:ext cx="5394960" cy="701542"/>
+          </a:xfrm>
+          <a:prstGeom prst="rect">
+            <a:avLst/>
+          </a:prstGeom>
+        </p:spPr>
+      </p:pic>
+      <p:sp>
+        <p:nvSpPr>
+          <p:cNvPr id="21" name="TextBox 20"/>
+          <p:cNvSpPr txBox="1"/>
+          <p:nvPr/>
+        </p:nvSpPr>
+        <p:spPr>
+          <a:xfrm>
+            <a:off x="6217920" y="4687962"/>
+            <a:ext cx="5394960" cy="274320"/>
+          </a:xfrm>
+          <a:prstGeom prst="rect">
+            <a:avLst/>
+          </a:prstGeom>
+          <a:noFill/>
+        </p:spPr>
+        <p:txBody>
+          <a:bodyPr wrap="square" anchor="t" lIns="0" rIns="0" tIns="0" bIns="0">
+            <a:spAutoFit/>
+          </a:bodyPr>
+          <a:lstStyle/>
+          <a:p>
+            <a:pPr algn="l">
+              <a:spcAft>
+                <a:spcPts val="0"/>
+              </a:spcAft>
+            </a:pPr>
+            <a:r>
+              <a:rPr sz="1100" b="0" i="0">
+                <a:solidFill>
+                  <a:srgbClr val="475569"/>
+                </a:solidFill>
+                <a:latin typeface="Arial"/>
+              </a:rPr>
+              <a:t>е) clean_big (здача): без формул, сценарію і таймерів</a:t>
+            </a:r>
+          </a:p>
+        </p:txBody>
+      </p:sp>
+      <p:sp>
+        <p:nvSpPr>
+          <p:cNvPr id="22" name="TextBox 21"/>
+          <p:cNvSpPr txBox="1"/>
+          <p:nvPr/>
+        </p:nvSpPr>
+        <p:spPr>
+          <a:xfrm>
+            <a:off x="548640" y="5486400"/>
+            <a:ext cx="10972800" cy="365760"/>
+          </a:xfrm>
+          <a:prstGeom prst="rect">
+            <a:avLst/>
+          </a:prstGeom>
+          <a:noFill/>
+        </p:spPr>
+        <p:txBody>
+          <a:bodyPr wrap="square" anchor="t" lIns="0" rIns="0" tIns="0" bIns="0">
+            <a:spAutoFit/>
+          </a:bodyPr>
+          <a:lstStyle/>
+          <a:p>
+            <a:pPr algn="l">
+              <a:spcAft>
+                <a:spcPts val="0"/>
+              </a:spcAft>
+            </a:pPr>
+            <a:r>
+              <a:rPr sz="1100" b="0" i="0">
+                <a:solidFill>
+                  <a:srgbClr val="475569"/>
+                </a:solidFill>
+                <a:latin typeface="Arial"/>
+              </a:rPr>
+              <a:t>Рисунок 3 – Скриншоти інтерфейсу заліку: запас 0,1 с, бюджет 5 % (поле «поріг» замінено на ROC AUC; XGBoost — валідаційна, решта — офіційні набори toksym)</a:t>
+            </a:r>
+          </a:p>
+        </p:txBody>
+      </p:sp>
+      <p:sp>
+        <p:nvSpPr>
+          <p:cNvPr id="23" name="TextBox 22"/>
+          <p:cNvSpPr txBox="1"/>
+          <p:nvPr/>
+        </p:nvSpPr>
+        <p:spPr>
+          <a:xfrm>
+            <a:off x="548640" y="5897880"/>
+            <a:ext cx="10972800" cy="457200"/>
+          </a:xfrm>
+          <a:prstGeom prst="rect">
+            <a:avLst/>
+          </a:prstGeom>
+          <a:noFill/>
+        </p:spPr>
+        <p:txBody>
+          <a:bodyPr wrap="square" anchor="t" lIns="0" rIns="0" tIns="0" bIns="0">
+            <a:spAutoFit/>
+          </a:bodyPr>
+          <a:lstStyle/>
+          <a:p>
+            <a:pPr algn="l">
+              <a:spcAft>
+                <a:spcPts val="0"/>
+              </a:spcAft>
+            </a:pPr>
+            <a:r>
               <a:rPr sz="1400" b="1" i="0">
                 <a:solidFill>
                   <a:srgbClr val="0F172A"/>
                 </a:solidFill>
                 <a:latin typeface="Arial"/>
               </a:rPr>
-              <a:t>Визначальна інформація — динаміка сигналу (тренди, передвісник), а не статичні фізичні проксі.</a:t>
+              <a:t>Висновок: </a:t>
+            </a:r>
+            <a:r>
+              <a:rPr sz="1400" b="0" i="0">
+                <a:solidFill>
+                  <a:srgbClr val="0F172A"/>
+                </a:solidFill>
+                <a:latin typeface="Arial"/>
+              </a:rPr>
+              <a:t>визначальна інформація — динаміка сигналу і пам'ять (тренди, передвісник), а не статичні фізичні проксі: 57–64 % вчасно проти 25–35 %.</a:t>
             </a:r>
           </a:p>
         </p:txBody>

--- a/docs/presentation.pptx
+++ b/docs/presentation.pptx
@@ -21,6 +21,8 @@
     <p:sldId id="269" r:id="rId21"/>
     <p:sldId id="270" r:id="rId22"/>
     <p:sldId id="271" r:id="rId23"/>
+    <p:sldId id="272" r:id="rId24"/>
+    <p:sldId id="273" r:id="rId25"/>
   </p:sldIdLst>
   <p:sldSz cx="12191695" cy="6858000" type="screen4x3"/>
   <p:notesSz cx="6858000" cy="9144000"/>
@@ -587,7 +589,7 @@
           <a:lstStyle/>
           <a:p>
             <a:r>
-              <a:t>≈45 с. Розряд з тестового набору, сценарій зростання густини. Ймовірність моделі тривоги перетинає поріг за 1,24 с до термічного гасіння. ImpactNet: щойно інтенсивність зриву стає помітною, 98–100 % внеску припадає на межу Грінвальда; оцінка λ мережею збігається з істинною λ симулятора, недоступною мережі.</a:t>
+              <a:t>≈60 с. На кожному кроці 5 мс модель бачить лише минуле. Ознаки — шість груп, кожна відповідає фізичному сценарію зриву: наближення до межі густини (густина відносно програми), охолодження ядра (SXR, ECE), домішки (неон), МГД-активність і замкнена мода (Мірнов, сідлова петля). Три масштаби згладжування дають рівень, тренд і пам'ять про пік. Цілі навчання — лише моменти гасіння з shots.csv. Формул шпаргалки, мітки сценарію і таймерів програми немає.</a:t>
             </a:r>
           </a:p>
         </p:txBody>
@@ -657,7 +659,7 @@
           <a:lstStyle/>
           <a:p>
             <a:r>
-              <a:t>≈50 с. Інтенсивність зриву в симуляторі: λ = 1 − Π(1 − rᵢ³)(1 − r_lm), де rᵢ — сигмоїда відстані до межі Грінвальда, кінк-нестійкості за q95, радіаційного колапсу і межі Тройона. Зрив — пуассонівський процес з інтенсивністю λ. Кожну межу можна відсунути актуатором, але впливи пов'язані: струм плазми діє протилежно на межу Грінвальда і на кінк; густина релаксує за ~0,3 с, домішка неону — за ~0,5 с.</a:t>
+              <a:t>≈45 с. Розряд з тестового набору, сценарій зростання густини. Ймовірність моделі тривоги перетинає поріг за 1,24 с до термічного гасіння. ImpactNet: щойно інтенсивність зриву стає помітною, 98–100 % внеску припадає на межу Грінвальда; оцінка λ мережею збігається з істинною λ симулятора, недоступною мережі.</a:t>
             </a:r>
           </a:p>
         </p:txBody>
@@ -727,7 +729,7 @@
           <a:lstStyle/>
           <a:p>
             <a:r>
-              <a:t>≈50 с. П'ять вихідних нейронів: межа Грінвальда, кінк, радіація, Тройон, інші. Кожен нейрон — параметрична форма ризику симулятора плюс навчена поправка, тому частки сумуються рівно до 100 %, а загальна інтенсивність — та сама λ. Причинні згортки з вікном 155 мс, GRU — пам'ять розряду. Мітки — істинний ризик, на вхід — лише 100 діагностик. Результат: 49 з 49 механізмів, R² 0,996, 0,6 мс на крок.</a:t>
+              <a:t>≈50 с. Інтенсивність зриву в симуляторі: λ = 1 − Π(1 − rᵢ³)(1 − r_lm), де rᵢ — сигмоїда відстані до межі Грінвальда, кінк-нестійкості за q95, радіаційного колапсу і межі Тройона. Зрив — пуассонівський процес з інтенсивністю λ. Кожну межу можна відсунути актуатором, але впливи пов'язані: струм плазми діє протилежно на межу Грінвальда і на кінк; густина релаксує за ~0,3 с, домішка неону — за ~0,5 с.</a:t>
             </a:r>
           </a:p>
         </p:txBody>
@@ -797,7 +799,7 @@
           <a:lstStyle/>
           <a:p>
             <a:r>
-              <a:t>≈50 с. Як сигнал тривоги ImpactNet дає 0,77, але й істинна λ симулятора — лише 0,78: зрив — пуассонівський процес, тихі розряди теж наближаються до меж. Тому функції розділено: модель тривоги визначає момент, ImpactNet — механізм. На реальній установці λ невідома; ImpactNet навчено лише за моментами зривів через пуассонівську правдоподібність — 49 з 49 з фізичним апріорі, 41 без нього.</a:t>
+              <a:t>≈50 с. П'ять вихідних нейронів: межа Грінвальда, кінк, радіація, Тройон, інші. Кожен нейрон — параметрична форма ризику симулятора плюс навчена поправка, тому частки сумуються рівно до 100 %, а загальна інтенсивність — та сама λ. Причинні згортки з вікном 155 мс, GRU — пам'ять розряду. Мітки — істинний ризик, на вхід — лише 100 діагностик. Результат: 49 з 49 механізмів, R² 0,996, 0,6 мс на крок.</a:t>
             </a:r>
           </a:p>
         </p:txBody>
@@ -867,7 +869,7 @@
           <a:lstStyle/>
           <a:p>
             <a:r>
-              <a:t>≈50 с. Симулятор fusion-sim з керуванням у реальному часі: модель тривоги, ImpactNet і порадник. Замкнений контур на 40 розрядах: 11 зривів без керування, 5 з керуванням. Атрибуція на новому рушії, 200 розрядів: 34 з 49; Грінвальд 16 з 16, радіація 14 з 17, кінк лише 4 з 16. Рушій не моделює шум діагностик, тому калібрування моделей, навчених на шумних даних, переноситься не повністю; наступний крок — додати вимірювальний тракт toksym.</a:t>
+              <a:t>≈60 с. Кожен з чотирьох вихідних нейронів — це формула ризику симулятора: сигмоїда від фізичної змінної з порогом c і шириною w, плюс поправка δ від пам'яті мережі. Голова стартує з нулів, тож ненавчена мережа — це чиста фізика; навчання додає лише поправки на шум, затримки і калібрування. Частки, інтенсивність λ та ймовірність зриву за час h виходять з тих самих п'яти чисел. Вчити можна з розміткою ризиків з прихованого стану симулятора (лише як ціль) або лише за моментами зривів — з апріорі механізм визначено в 49 з 49, без апріорі в 41 з 49.</a:t>
             </a:r>
           </a:p>
         </p:txBody>
@@ -937,7 +939,7 @@
           <a:lstStyle/>
           <a:p>
             <a:r>
-              <a:t>≈50 с. Моделі навчені на toksym; fusion-sim — інший рушій, без шуму діагностик. 200 розрядів, жодного донавчання. Модель тривоги переноситься: ROC AUC 0,902 проти 0,934 на запасі 0,1 с. ImpactNet: межа Грінвальда 16 з 16, радіація 14 з 17, кінк лише 4 з 16. В 11 з 16 кінкових зривів мережа видає ту саму частку Грінвальда 97,6 % — це насичення входу, а не фізика. Масштабування часток не рятує: 36 з 49 при 5-кратній перевірці. Отже, потрібне донавчання на даних нового рушія.</a:t>
+              <a:t>≈50 с. Як сигнал тривоги ImpactNet дає 0,77, але й істинна λ симулятора — лише 0,78: зрив — пуассонівський процес, тихі розряди теж наближаються до меж. Тому функції розділено: модель тривоги визначає момент, ImpactNet — механізм. На реальній установці λ невідома; ImpactNet навчено лише за моментами зривів через пуассонівську правдоподібність — 49 з 49 з фізичним апріорі, 41 без нього.</a:t>
             </a:r>
           </a:p>
         </p:txBody>
@@ -963,6 +965,146 @@
 </file>
 
 <file path=ppt/notesSlides/notesSlide16.xml><?xml version="1.0" encoding="utf-8"?>
+<p:notes xmlns:a="http://schemas.openxmlformats.org/drawingml/2006/main" xmlns:p="http://schemas.openxmlformats.org/presentationml/2006/main" xmlns:r="http://schemas.openxmlformats.org/officeDocument/2006/relationships">
+  <p:cSld>
+    <p:spTree>
+      <p:nvGrpSpPr>
+        <p:cNvPr id="1" name=""/>
+        <p:cNvGrpSpPr/>
+        <p:nvPr/>
+      </p:nvGrpSpPr>
+      <p:grpSpPr>
+        <a:xfrm>
+          <a:off x="0" y="0"/>
+          <a:ext cx="0" cy="0"/>
+          <a:chOff x="0" y="0"/>
+          <a:chExt cx="0" cy="0"/>
+        </a:xfrm>
+      </p:grpSpPr>
+      <p:sp>
+        <p:nvSpPr>
+          <p:cNvPr id="2" name="Slide Image Placeholder 1"/>
+          <p:cNvSpPr>
+            <a:spLocks noGrp="1"/>
+          </p:cNvSpPr>
+          <p:nvPr>
+            <p:ph type="sldImg" idx="2"/>
+          </p:nvPr>
+        </p:nvSpPr>
+        <p:spPr/>
+      </p:sp>
+      <p:sp>
+        <p:nvSpPr>
+          <p:cNvPr id="3" name="Notes Placeholder 2"/>
+          <p:cNvSpPr>
+            <a:spLocks noGrp="1"/>
+          </p:cNvSpPr>
+          <p:nvPr>
+            <p:ph type="body" idx="3" sz="quarter"/>
+          </p:nvPr>
+        </p:nvSpPr>
+        <p:spPr/>
+        <p:txBody>
+          <a:bodyPr/>
+          <a:lstStyle/>
+          <a:p>
+            <a:r>
+              <a:t>≈50 с. Симулятор fusion-sim з керуванням у реальному часі: модель тривоги, ImpactNet і порадник. Замкнений контур на 40 розрядах: 11 зривів без керування, 5 з керуванням. Атрибуція на новому рушії, 200 розрядів: 34 з 49; Грінвальд 16 з 16, радіація 14 з 17, кінк лише 4 з 16. Рушій не моделює шум діагностик, тому калібрування моделей, навчених на шумних даних, переноситься не повністю; наступний крок — додати вимірювальний тракт toksym.</a:t>
+            </a:r>
+          </a:p>
+        </p:txBody>
+      </p:sp>
+      <p:sp>
+        <p:nvSpPr>
+          <p:cNvPr id="4" name="Slide Number Placeholder 3"/>
+          <p:cNvSpPr>
+            <a:spLocks noGrp="1"/>
+          </p:cNvSpPr>
+          <p:nvPr>
+            <p:ph type="sldNum" idx="5" sz="quarter"/>
+          </p:nvPr>
+        </p:nvSpPr>
+        <p:spPr/>
+      </p:sp>
+    </p:spTree>
+  </p:cSld>
+  <p:clrMapOvr>
+    <a:masterClrMapping/>
+  </p:clrMapOvr>
+</p:notes>
+</file>
+
+<file path=ppt/notesSlides/notesSlide17.xml><?xml version="1.0" encoding="utf-8"?>
+<p:notes xmlns:a="http://schemas.openxmlformats.org/drawingml/2006/main" xmlns:p="http://schemas.openxmlformats.org/presentationml/2006/main" xmlns:r="http://schemas.openxmlformats.org/officeDocument/2006/relationships">
+  <p:cSld>
+    <p:spTree>
+      <p:nvGrpSpPr>
+        <p:cNvPr id="1" name=""/>
+        <p:cNvGrpSpPr/>
+        <p:nvPr/>
+      </p:nvGrpSpPr>
+      <p:grpSpPr>
+        <a:xfrm>
+          <a:off x="0" y="0"/>
+          <a:ext cx="0" cy="0"/>
+          <a:chOff x="0" y="0"/>
+          <a:chExt cx="0" cy="0"/>
+        </a:xfrm>
+      </p:grpSpPr>
+      <p:sp>
+        <p:nvSpPr>
+          <p:cNvPr id="2" name="Slide Image Placeholder 1"/>
+          <p:cNvSpPr>
+            <a:spLocks noGrp="1"/>
+          </p:cNvSpPr>
+          <p:nvPr>
+            <p:ph type="sldImg" idx="2"/>
+          </p:nvPr>
+        </p:nvSpPr>
+        <p:spPr/>
+      </p:sp>
+      <p:sp>
+        <p:nvSpPr>
+          <p:cNvPr id="3" name="Notes Placeholder 2"/>
+          <p:cNvSpPr>
+            <a:spLocks noGrp="1"/>
+          </p:cNvSpPr>
+          <p:nvPr>
+            <p:ph type="body" idx="3" sz="quarter"/>
+          </p:nvPr>
+        </p:nvSpPr>
+        <p:spPr/>
+        <p:txBody>
+          <a:bodyPr/>
+          <a:lstStyle/>
+          <a:p>
+            <a:r>
+              <a:t>≈50 с. Моделі навчені на toksym; fusion-sim — інший рушій, без шуму діагностик. 200 розрядів, жодного донавчання. Модель тривоги переноситься: ROC AUC 0,902 проти 0,934 на запасі 0,1 с. ImpactNet: межа Грінвальда 16 з 16, радіація 14 з 17, кінк лише 4 з 16. В 11 з 16 кінкових зривів мережа видає ту саму частку Грінвальда 97,6 % — це насичення входу, а не фізика. Масштабування часток не рятує: 36 з 49 при 5-кратній перевірці. Отже, потрібне донавчання на даних нового рушія.</a:t>
+            </a:r>
+          </a:p>
+        </p:txBody>
+      </p:sp>
+      <p:sp>
+        <p:nvSpPr>
+          <p:cNvPr id="4" name="Slide Number Placeholder 3"/>
+          <p:cNvSpPr>
+            <a:spLocks noGrp="1"/>
+          </p:cNvSpPr>
+          <p:nvPr>
+            <p:ph type="sldNum" idx="5" sz="quarter"/>
+          </p:nvPr>
+        </p:nvSpPr>
+        <p:spPr/>
+      </p:sp>
+    </p:spTree>
+  </p:cSld>
+  <p:clrMapOvr>
+    <a:masterClrMapping/>
+  </p:clrMapOvr>
+</p:notes>
+</file>
+
+<file path=ppt/notesSlides/notesSlide18.xml><?xml version="1.0" encoding="utf-8"?>
 <p:notes xmlns:a="http://schemas.openxmlformats.org/drawingml/2006/main" xmlns:p="http://schemas.openxmlformats.org/presentationml/2006/main" xmlns:r="http://schemas.openxmlformats.org/officeDocument/2006/relationships">
   <p:cSld>
     <p:spTree>
@@ -5001,7 +5143,7 @@
                 </a:solidFill>
                 <a:latin typeface="Arial"/>
               </a:rPr>
-              <a:t>9 Приклад роботи моделей на розряді</a:t>
+              <a:t>8.1 Що закладено в модель тривоги: 61 причинна ознака</a:t>
             </a:r>
           </a:p>
         </p:txBody>
@@ -5045,40 +5187,16 @@
           </a:p>
         </p:txBody>
       </p:sp>
-      <p:pic>
-        <p:nvPicPr>
-          <p:cNvPr id="4" name="Picture 3" descr="shot_trace.png"/>
-          <p:cNvPicPr>
-            <a:picLocks noChangeAspect="1"/>
-          </p:cNvPicPr>
-          <p:nvPr/>
-        </p:nvPicPr>
-        <p:blipFill>
-          <a:blip r:embed="rId3"/>
-          <a:stretch>
-            <a:fillRect/>
-          </a:stretch>
-        </p:blipFill>
-        <p:spPr>
-          <a:xfrm>
-            <a:off x="548640" y="1280160"/>
-            <a:ext cx="8138160" cy="4063553"/>
-          </a:xfrm>
-          <a:prstGeom prst="rect">
-            <a:avLst/>
-          </a:prstGeom>
-        </p:spPr>
-      </p:pic>
-      <p:sp>
-        <p:nvSpPr>
-          <p:cNvPr id="5" name="TextBox 4"/>
+      <p:sp>
+        <p:nvSpPr>
+          <p:cNvPr id="4" name="TextBox 3"/>
           <p:cNvSpPr txBox="1"/>
           <p:nvPr/>
         </p:nvSpPr>
         <p:spPr>
           <a:xfrm>
-            <a:off x="548640" y="5389433"/>
-            <a:ext cx="8138160" cy="365760"/>
+            <a:off x="548640" y="1234440"/>
+            <a:ext cx="7680960" cy="320040"/>
           </a:xfrm>
           <a:prstGeom prst="rect">
             <a:avLst/>
@@ -5103,11 +5221,535 @@
                 </a:solidFill>
                 <a:latin typeface="Arial"/>
               </a:rPr>
-              <a:t>Рисунок 5 – Ймовірність моделі раннього попередження (зверху) і розклад інтенсивності зриву ImpactNet (знизу)</a:t>
-            </a:r>
-          </a:p>
-        </p:txBody>
-      </p:sp>
+              <a:t>Таблиця 4 – Групи ознак</a:t>
+            </a:r>
+          </a:p>
+        </p:txBody>
+      </p:sp>
+      <p:graphicFrame>
+        <p:nvGraphicFramePr>
+          <p:cNvPr id="5" name="Table 4"/>
+          <p:cNvGraphicFramePr>
+            <a:graphicFrameLocks noGrp="1"/>
+          </p:cNvGraphicFramePr>
+          <p:nvPr/>
+        </p:nvGraphicFramePr>
+        <p:xfrm>
+          <a:off x="548640" y="1600200"/>
+          <a:ext cx="7680960" cy="4224528"/>
+        </p:xfrm>
+        <a:graphic>
+          <a:graphicData uri="http://schemas.openxmlformats.org/drawingml/2006/table">
+            <a:tbl>
+              <a:tblPr firstRow="0" bandRow="0">
+                <a:tableStyleId>{5C22544A-7EE6-4342-B048-85BDC9FD1C3A}</a:tableStyleId>
+              </a:tblPr>
+              <a:tblGrid>
+                <a:gridCol w="1600200"/>
+                <a:gridCol w="3703320"/>
+                <a:gridCol w="2377440"/>
+              </a:tblGrid>
+              <a:tr h="603504">
+                <a:tc>
+                  <a:txBody>
+                    <a:bodyPr wrap="square"/>
+                    <a:lstStyle/>
+                    <a:p>
+                      <a:pPr algn="l"/>
+                      <a:r>
+                        <a:rPr sz="1100" b="1">
+                          <a:solidFill>
+                            <a:srgbClr val="475569"/>
+                          </a:solidFill>
+                          <a:latin typeface="Arial"/>
+                        </a:rPr>
+                        <a:t>група (кількість)</a:t>
+                      </a:r>
+                    </a:p>
+                  </a:txBody>
+                  <a:tcPr marL="91440" marR="91440" marT="27432" marB="27432" anchor="ctr">
+                    <a:solidFill>
+                      <a:srgbClr val="F1F5F9"/>
+                    </a:solidFill>
+                  </a:tcPr>
+                </a:tc>
+                <a:tc>
+                  <a:txBody>
+                    <a:bodyPr wrap="square"/>
+                    <a:lstStyle/>
+                    <a:p>
+                      <a:pPr algn="ctr"/>
+                      <a:r>
+                        <a:rPr sz="1100" b="1">
+                          <a:solidFill>
+                            <a:srgbClr val="475569"/>
+                          </a:solidFill>
+                          <a:latin typeface="Arial"/>
+                        </a:rPr>
+                        <a:t>що містить</a:t>
+                      </a:r>
+                    </a:p>
+                  </a:txBody>
+                  <a:tcPr marL="91440" marR="91440" marT="27432" marB="27432" anchor="ctr">
+                    <a:solidFill>
+                      <a:srgbClr val="F1F5F9"/>
+                    </a:solidFill>
+                  </a:tcPr>
+                </a:tc>
+                <a:tc>
+                  <a:txBody>
+                    <a:bodyPr wrap="square"/>
+                    <a:lstStyle/>
+                    <a:p>
+                      <a:pPr algn="ctr"/>
+                      <a:r>
+                        <a:rPr sz="1100" b="1">
+                          <a:solidFill>
+                            <a:srgbClr val="475569"/>
+                          </a:solidFill>
+                          <a:latin typeface="Arial"/>
+                        </a:rPr>
+                        <a:t>що це означає фізично</a:t>
+                      </a:r>
+                    </a:p>
+                  </a:txBody>
+                  <a:tcPr marL="91440" marR="91440" marT="27432" marB="27432" anchor="ctr">
+                    <a:solidFill>
+                      <a:srgbClr val="F1F5F9"/>
+                    </a:solidFill>
+                  </a:tcPr>
+                </a:tc>
+              </a:tr>
+              <a:tr h="603504">
+                <a:tc>
+                  <a:txBody>
+                    <a:bodyPr wrap="square"/>
+                    <a:lstStyle/>
+                    <a:p>
+                      <a:pPr algn="l"/>
+                      <a:r>
+                        <a:rPr sz="1100" b="1">
+                          <a:solidFill>
+                            <a:srgbClr val="0F172A"/>
+                          </a:solidFill>
+                          <a:latin typeface="Arial"/>
+                        </a:rPr>
+                        <a:t>фаза розряду (4)</a:t>
+                      </a:r>
+                    </a:p>
+                  </a:txBody>
+                  <a:tcPr marL="91440" marR="91440" marT="27432" marB="27432" anchor="ctr">
+                    <a:solidFill>
+                      <a:srgbClr val="FFFFFF"/>
+                    </a:solidFill>
+                  </a:tcPr>
+                </a:tc>
+                <a:tc>
+                  <a:txBody>
+                    <a:bodyPr wrap="square"/>
+                    <a:lstStyle/>
+                    <a:p>
+                      <a:pPr algn="ctr"/>
+                      <a:r>
+                        <a:rPr sz="1100" b="0">
+                          <a:solidFill>
+                            <a:srgbClr val="0F172A"/>
+                          </a:solidFill>
+                          <a:latin typeface="Arial"/>
+                        </a:rPr>
+                        <a:t>струм відносно програми, наростання, спад, час</a:t>
+                      </a:r>
+                    </a:p>
+                  </a:txBody>
+                  <a:tcPr marL="91440" marR="91440" marT="27432" marB="27432" anchor="ctr">
+                    <a:solidFill>
+                      <a:srgbClr val="FFFFFF"/>
+                    </a:solidFill>
+                  </a:tcPr>
+                </a:tc>
+                <a:tc>
+                  <a:txBody>
+                    <a:bodyPr wrap="square"/>
+                    <a:lstStyle/>
+                    <a:p>
+                      <a:pPr algn="ctr"/>
+                      <a:r>
+                        <a:rPr sz="1100" b="0">
+                          <a:solidFill>
+                            <a:srgbClr val="0F172A"/>
+                          </a:solidFill>
+                          <a:latin typeface="Arial"/>
+                        </a:rPr>
+                        <a:t>де ми в програмі розряду</a:t>
+                      </a:r>
+                    </a:p>
+                  </a:txBody>
+                  <a:tcPr marL="91440" marR="91440" marT="27432" marB="27432" anchor="ctr">
+                    <a:solidFill>
+                      <a:srgbClr val="FFFFFF"/>
+                    </a:solidFill>
+                  </a:tcPr>
+                </a:tc>
+              </a:tr>
+              <a:tr h="603504">
+                <a:tc>
+                  <a:txBody>
+                    <a:bodyPr wrap="square"/>
+                    <a:lstStyle/>
+                    <a:p>
+                      <a:pPr algn="l"/>
+                      <a:r>
+                        <a:rPr sz="1100" b="1">
+                          <a:solidFill>
+                            <a:srgbClr val="0F172A"/>
+                          </a:solidFill>
+                          <a:latin typeface="Arial"/>
+                        </a:rPr>
+                        <a:t>сирі канали (15)</a:t>
+                      </a:r>
+                    </a:p>
+                  </a:txBody>
+                  <a:tcPr marL="91440" marR="91440" marT="27432" marB="27432" anchor="ctr">
+                    <a:solidFill>
+                      <a:srgbClr val="FFFFFF"/>
+                    </a:solidFill>
+                  </a:tcPr>
+                </a:tc>
+                <a:tc>
+                  <a:txBody>
+                    <a:bodyPr wrap="square"/>
+                    <a:lstStyle/>
+                    <a:p>
+                      <a:pPr algn="ctr"/>
+                      <a:r>
+                        <a:rPr sz="1100" b="0">
+                          <a:solidFill>
+                            <a:srgbClr val="0F172A"/>
+                          </a:solidFill>
+                          <a:latin typeface="Arial"/>
+                        </a:rPr>
+                        <a:t>Ip, Bt, діамагнітна енергія, Vloop, хорди густини, подача D₂ і Ne, нейтрони, зонд дивертора</a:t>
+                      </a:r>
+                    </a:p>
+                  </a:txBody>
+                  <a:tcPr marL="91440" marR="91440" marT="27432" marB="27432" anchor="ctr">
+                    <a:solidFill>
+                      <a:srgbClr val="FFFFFF"/>
+                    </a:solidFill>
+                  </a:tcPr>
+                </a:tc>
+                <a:tc>
+                  <a:txBody>
+                    <a:bodyPr wrap="square"/>
+                    <a:lstStyle/>
+                    <a:p>
+                      <a:pPr algn="ctr"/>
+                      <a:r>
+                        <a:rPr sz="1100" b="0">
+                          <a:solidFill>
+                            <a:srgbClr val="0F172A"/>
+                          </a:solidFill>
+                          <a:latin typeface="Arial"/>
+                        </a:rPr>
+                        <a:t>повільний стан плазми</a:t>
+                      </a:r>
+                    </a:p>
+                  </a:txBody>
+                  <a:tcPr marL="91440" marR="91440" marT="27432" marB="27432" anchor="ctr">
+                    <a:solidFill>
+                      <a:srgbClr val="FFFFFF"/>
+                    </a:solidFill>
+                  </a:tcPr>
+                </a:tc>
+              </a:tr>
+              <a:tr h="603504">
+                <a:tc>
+                  <a:txBody>
+                    <a:bodyPr wrap="square"/>
+                    <a:lstStyle/>
+                    <a:p>
+                      <a:pPr algn="l"/>
+                      <a:r>
+                        <a:rPr sz="1100" b="1">
+                          <a:solidFill>
+                            <a:srgbClr val="0F172A"/>
+                          </a:solidFill>
+                          <a:latin typeface="Arial"/>
+                        </a:rPr>
+                        <a:t>6 величин × 5 (30)</a:t>
+                      </a:r>
+                    </a:p>
+                  </a:txBody>
+                  <a:tcPr marL="91440" marR="91440" marT="27432" marB="27432" anchor="ctr">
+                    <a:solidFill>
+                      <a:srgbClr val="FFFFFF"/>
+                    </a:solidFill>
+                  </a:tcPr>
+                </a:tc>
+                <a:tc>
+                  <a:txBody>
+                    <a:bodyPr wrap="square"/>
+                    <a:lstStyle/>
+                    <a:p>
+                      <a:pPr algn="ctr"/>
+                      <a:r>
+                        <a:rPr sz="1100" b="0">
+                          <a:solidFill>
+                            <a:srgbClr val="0F172A"/>
+                          </a:solidFill>
+                          <a:latin typeface="Arial"/>
+                        </a:rPr>
+                        <a:t>ne/програма, SXR і ECE ядра, Dα, RMS Мірнова, сідлова петля: EMA 50 мс, 250 мс, 1 с, тренд, максимум на плато</a:t>
+                      </a:r>
+                    </a:p>
+                  </a:txBody>
+                  <a:tcPr marL="91440" marR="91440" marT="27432" marB="27432" anchor="ctr">
+                    <a:solidFill>
+                      <a:srgbClr val="FFFFFF"/>
+                    </a:solidFill>
+                  </a:tcPr>
+                </a:tc>
+                <a:tc>
+                  <a:txBody>
+                    <a:bodyPr wrap="square"/>
+                    <a:lstStyle/>
+                    <a:p>
+                      <a:pPr algn="ctr"/>
+                      <a:r>
+                        <a:rPr sz="1100" b="0">
+                          <a:solidFill>
+                            <a:srgbClr val="0F172A"/>
+                          </a:solidFill>
+                          <a:latin typeface="Arial"/>
+                        </a:rPr>
+                        <a:t>наближення до межі, швидкість наближення, пам'ять про пік</a:t>
+                      </a:r>
+                    </a:p>
+                  </a:txBody>
+                  <a:tcPr marL="91440" marR="91440" marT="27432" marB="27432" anchor="ctr">
+                    <a:solidFill>
+                      <a:srgbClr val="FFFFFF"/>
+                    </a:solidFill>
+                  </a:tcPr>
+                </a:tc>
+              </a:tr>
+              <a:tr h="603504">
+                <a:tc>
+                  <a:txBody>
+                    <a:bodyPr wrap="square"/>
+                    <a:lstStyle/>
+                    <a:p>
+                      <a:pPr algn="l"/>
+                      <a:r>
+                        <a:rPr sz="1100" b="1">
+                          <a:solidFill>
+                            <a:srgbClr val="0F172A"/>
+                          </a:solidFill>
+                          <a:latin typeface="Arial"/>
+                        </a:rPr>
+                        <a:t>події (4)</a:t>
+                      </a:r>
+                    </a:p>
+                  </a:txBody>
+                  <a:tcPr marL="91440" marR="91440" marT="27432" marB="27432" anchor="ctr">
+                    <a:solidFill>
+                      <a:srgbClr val="FFFFFF"/>
+                    </a:solidFill>
+                  </a:tcPr>
+                </a:tc>
+                <a:tc>
+                  <a:txBody>
+                    <a:bodyPr wrap="square"/>
+                    <a:lstStyle/>
+                    <a:p>
+                      <a:pPr algn="ctr"/>
+                      <a:r>
+                        <a:rPr sz="1100" b="0">
+                          <a:solidFill>
+                            <a:srgbClr val="0F172A"/>
+                          </a:solidFill>
+                          <a:latin typeface="Arial"/>
+                        </a:rPr>
+                        <a:t>стрибок Dα, пік сідлової петлі, падіння Te і SXR</a:t>
+                      </a:r>
+                    </a:p>
+                  </a:txBody>
+                  <a:tcPr marL="91440" marR="91440" marT="27432" marB="27432" anchor="ctr">
+                    <a:solidFill>
+                      <a:srgbClr val="FFFFFF"/>
+                    </a:solidFill>
+                  </a:tcPr>
+                </a:tc>
+                <a:tc>
+                  <a:txBody>
+                    <a:bodyPr wrap="square"/>
+                    <a:lstStyle/>
+                    <a:p>
+                      <a:pPr algn="ctr"/>
+                      <a:r>
+                        <a:rPr sz="1100" b="0">
+                          <a:solidFill>
+                            <a:srgbClr val="0F172A"/>
+                          </a:solidFill>
+                          <a:latin typeface="Arial"/>
+                        </a:rPr>
+                        <a:t>охолодження ядра перед зривом</a:t>
+                      </a:r>
+                    </a:p>
+                  </a:txBody>
+                  <a:tcPr marL="91440" marR="91440" marT="27432" marB="27432" anchor="ctr">
+                    <a:solidFill>
+                      <a:srgbClr val="FFFFFF"/>
+                    </a:solidFill>
+                  </a:tcPr>
+                </a:tc>
+              </a:tr>
+              <a:tr h="603504">
+                <a:tc>
+                  <a:txBody>
+                    <a:bodyPr wrap="square"/>
+                    <a:lstStyle/>
+                    <a:p>
+                      <a:pPr algn="l"/>
+                      <a:r>
+                        <a:rPr sz="1100" b="1">
+                          <a:solidFill>
+                            <a:srgbClr val="0F172A"/>
+                          </a:solidFill>
+                          <a:latin typeface="Arial"/>
+                        </a:rPr>
+                        <a:t>домішки (3)</a:t>
+                      </a:r>
+                    </a:p>
+                  </a:txBody>
+                  <a:tcPr marL="91440" marR="91440" marT="27432" marB="27432" anchor="ctr">
+                    <a:solidFill>
+                      <a:srgbClr val="FFFFFF"/>
+                    </a:solidFill>
+                  </a:tcPr>
+                </a:tc>
+                <a:tc>
+                  <a:txBody>
+                    <a:bodyPr wrap="square"/>
+                    <a:lstStyle/>
+                    <a:p>
+                      <a:pPr algn="ctr"/>
+                      <a:r>
+                        <a:rPr sz="1100" b="0">
+                          <a:solidFill>
+                            <a:srgbClr val="0F172A"/>
+                          </a:solidFill>
+                          <a:latin typeface="Arial"/>
+                        </a:rPr>
+                        <a:t>команда неону, її інтеграл, нахил програми густини</a:t>
+                      </a:r>
+                    </a:p>
+                  </a:txBody>
+                  <a:tcPr marL="91440" marR="91440" marT="27432" marB="27432" anchor="ctr">
+                    <a:solidFill>
+                      <a:srgbClr val="FFFFFF"/>
+                    </a:solidFill>
+                  </a:tcPr>
+                </a:tc>
+                <a:tc>
+                  <a:txBody>
+                    <a:bodyPr wrap="square"/>
+                    <a:lstStyle/>
+                    <a:p>
+                      <a:pPr algn="ctr"/>
+                      <a:r>
+                        <a:rPr sz="1100" b="0">
+                          <a:solidFill>
+                            <a:srgbClr val="0F172A"/>
+                          </a:solidFill>
+                          <a:latin typeface="Arial"/>
+                        </a:rPr>
+                        <a:t>радіаційні втрати</a:t>
+                      </a:r>
+                    </a:p>
+                  </a:txBody>
+                  <a:tcPr marL="91440" marR="91440" marT="27432" marB="27432" anchor="ctr">
+                    <a:solidFill>
+                      <a:srgbClr val="FFFFFF"/>
+                    </a:solidFill>
+                  </a:tcPr>
+                </a:tc>
+              </a:tr>
+              <a:tr h="603504">
+                <a:tc>
+                  <a:txBody>
+                    <a:bodyPr wrap="square"/>
+                    <a:lstStyle/>
+                    <a:p>
+                      <a:pPr algn="l"/>
+                      <a:r>
+                        <a:rPr sz="1100" b="1">
+                          <a:solidFill>
+                            <a:srgbClr val="0F172A"/>
+                          </a:solidFill>
+                          <a:latin typeface="Arial"/>
+                        </a:rPr>
+                        <a:t>передвісник (5)</a:t>
+                      </a:r>
+                    </a:p>
+                  </a:txBody>
+                  <a:tcPr marL="91440" marR="91440" marT="27432" marB="27432" anchor="ctr">
+                    <a:solidFill>
+                      <a:srgbClr val="FFFFFF"/>
+                    </a:solidFill>
+                  </a:tcPr>
+                </a:tc>
+                <a:tc>
+                  <a:txBody>
+                    <a:bodyPr wrap="square"/>
+                    <a:lstStyle/>
+                    <a:p>
+                      <a:pPr algn="ctr"/>
+                      <a:r>
+                        <a:rPr sz="1100" b="0">
+                          <a:solidFill>
+                            <a:srgbClr val="0F172A"/>
+                          </a:solidFill>
+                          <a:latin typeface="Arial"/>
+                        </a:rPr>
+                        <a:t>високочастотна складова сідлової петлі (20, 50 мс) і Мірнова, їх ріст</a:t>
+                      </a:r>
+                    </a:p>
+                  </a:txBody>
+                  <a:tcPr marL="91440" marR="91440" marT="27432" marB="27432" anchor="ctr">
+                    <a:solidFill>
+                      <a:srgbClr val="FFFFFF"/>
+                    </a:solidFill>
+                  </a:tcPr>
+                </a:tc>
+                <a:tc>
+                  <a:txBody>
+                    <a:bodyPr wrap="square"/>
+                    <a:lstStyle/>
+                    <a:p>
+                      <a:pPr algn="ctr"/>
+                      <a:r>
+                        <a:rPr sz="1100" b="0">
+                          <a:solidFill>
+                            <a:srgbClr val="0F172A"/>
+                          </a:solidFill>
+                          <a:latin typeface="Arial"/>
+                        </a:rPr>
+                        <a:t>ріст МГД-моди за 10–100 мс до гасіння</a:t>
+                      </a:r>
+                    </a:p>
+                  </a:txBody>
+                  <a:tcPr marL="91440" marR="91440" marT="27432" marB="27432" anchor="ctr">
+                    <a:solidFill>
+                      <a:srgbClr val="FFFFFF"/>
+                    </a:solidFill>
+                  </a:tcPr>
+                </a:tc>
+              </a:tr>
+            </a:tbl>
+          </a:graphicData>
+        </a:graphic>
+      </p:graphicFrame>
       <p:sp>
         <p:nvSpPr>
           <p:cNvPr id="6" name="TextBox 5"/>
@@ -5116,8 +5758,8 @@
         </p:nvSpPr>
         <p:spPr>
           <a:xfrm>
-            <a:off x="9052560" y="1371600"/>
-            <a:ext cx="2651760" cy="1188720"/>
+            <a:off x="8595360" y="1325880"/>
+            <a:ext cx="3063240" cy="2743200"/>
           </a:xfrm>
           <a:prstGeom prst="rect">
             <a:avLst/>
@@ -5132,143 +5774,101 @@
           <a:p>
             <a:pPr algn="l">
               <a:spcAft>
-                <a:spcPts val="200"/>
-              </a:spcAft>
-            </a:pPr>
-            <a:r>
-              <a:rPr sz="3400" b="1" i="0">
-                <a:solidFill>
-                  <a:srgbClr val="047857"/>
-                </a:solidFill>
-                <a:latin typeface="Arial"/>
-              </a:rPr>
-              <a:t>1,24 с</a:t>
+                <a:spcPts val="800"/>
+              </a:spcAft>
+            </a:pPr>
+            <a:r>
+              <a:rPr sz="1200" b="1" i="0">
+                <a:solidFill>
+                  <a:srgbClr val="0F172A"/>
+                </a:solidFill>
+                <a:latin typeface="Arial"/>
+              </a:rPr>
+              <a:t>Причинність – </a:t>
+            </a:r>
+            <a:r>
+              <a:rPr sz="1200" b="0" i="0">
+                <a:solidFill>
+                  <a:srgbClr val="0F172A"/>
+                </a:solidFill>
+                <a:latin typeface="Arial"/>
+              </a:rPr>
+              <a:t>кожна ознака рахується крок за кроком лише з минулого; той самий код у навчанні і на заліку</a:t>
             </a:r>
           </a:p>
           <a:p>
             <a:pPr algn="l">
               <a:spcAft>
-                <a:spcPts val="0"/>
-              </a:spcAft>
-            </a:pPr>
+                <a:spcPts val="800"/>
+              </a:spcAft>
+            </a:pPr>
+            <a:r>
+              <a:rPr sz="1200" b="1" i="0">
+                <a:solidFill>
+                  <a:srgbClr val="0F172A"/>
+                </a:solidFill>
+                <a:latin typeface="Arial"/>
+              </a:rPr>
+              <a:t>Цілі – </a:t>
+            </a:r>
             <a:r>
               <a:rPr sz="1200" b="0" i="0">
                 <a:solidFill>
-                  <a:srgbClr val="475569"/>
-                </a:solidFill>
-                <a:latin typeface="Arial"/>
-              </a:rPr>
-              <a:t>випередження тривоги (поріг для FPR 5 %)</a:t>
-            </a:r>
-          </a:p>
-        </p:txBody>
-      </p:sp>
-      <p:sp>
-        <p:nvSpPr>
-          <p:cNvPr id="7" name="TextBox 6"/>
-          <p:cNvSpPr txBox="1"/>
-          <p:nvPr/>
-        </p:nvSpPr>
-        <p:spPr>
-          <a:xfrm>
-            <a:off x="9052560" y="2743200"/>
-            <a:ext cx="2651760" cy="1188720"/>
-          </a:xfrm>
-          <a:prstGeom prst="rect">
-            <a:avLst/>
-          </a:prstGeom>
-          <a:noFill/>
-        </p:spPr>
-        <p:txBody>
-          <a:bodyPr wrap="square" anchor="t" lIns="0" rIns="0" tIns="0" bIns="0">
-            <a:spAutoFit/>
-          </a:bodyPr>
-          <a:lstStyle/>
+                  <a:srgbClr val="0F172A"/>
+                </a:solidFill>
+                <a:latin typeface="Arial"/>
+              </a:rPr>
+              <a:t>голова A — «гасіння через ≤ 0,1 с», голова B — «≤ 4,5 с»; лише з shots.csv</a:t>
+            </a:r>
+          </a:p>
           <a:p>
             <a:pPr algn="l">
               <a:spcAft>
-                <a:spcPts val="200"/>
-              </a:spcAft>
-            </a:pPr>
-            <a:r>
-              <a:rPr sz="3400" b="1" i="0">
-                <a:solidFill>
-                  <a:srgbClr val="C2410C"/>
-                </a:solidFill>
-                <a:latin typeface="Arial"/>
-              </a:rPr>
-              <a:t>98–100 %</a:t>
+                <a:spcPts val="800"/>
+              </a:spcAft>
+            </a:pPr>
+            <a:r>
+              <a:rPr sz="1200" b="1" i="0">
+                <a:solidFill>
+                  <a:srgbClr val="0F172A"/>
+                </a:solidFill>
+                <a:latin typeface="Arial"/>
+              </a:rPr>
+              <a:t>Навчання – </a:t>
+            </a:r>
+            <a:r>
+              <a:rPr sz="1200" b="0" i="0">
+                <a:solidFill>
+                  <a:srgbClr val="0F172A"/>
+                </a:solidFill>
+                <a:latin typeface="Arial"/>
+              </a:rPr>
+              <a:t>градієнтний бустинг (HGB), 4 500 розрядів, поділ за сидами</a:t>
             </a:r>
           </a:p>
           <a:p>
             <a:pPr algn="l">
               <a:spcAft>
-                <a:spcPts val="0"/>
-              </a:spcAft>
-            </a:pPr>
+                <a:spcPts val="800"/>
+              </a:spcAft>
+            </a:pPr>
+            <a:r>
+              <a:rPr sz="1200" b="1" i="0">
+                <a:solidFill>
+                  <a:srgbClr val="0F172A"/>
+                </a:solidFill>
+                <a:latin typeface="Arial"/>
+              </a:rPr>
+              <a:t>Вилучено – </a:t>
+            </a:r>
             <a:r>
               <a:rPr sz="1200" b="0" i="0">
                 <a:solidFill>
-                  <a:srgbClr val="475569"/>
-                </a:solidFill>
-                <a:latin typeface="Arial"/>
-              </a:rPr>
-              <a:t>внесок межі Грінвальда (f_GW → 1)</a:t>
-            </a:r>
-          </a:p>
-        </p:txBody>
-      </p:sp>
-      <p:sp>
-        <p:nvSpPr>
-          <p:cNvPr id="8" name="TextBox 7"/>
-          <p:cNvSpPr txBox="1"/>
-          <p:nvPr/>
-        </p:nvSpPr>
-        <p:spPr>
-          <a:xfrm>
-            <a:off x="9052560" y="4114800"/>
-            <a:ext cx="2651760" cy="1188720"/>
-          </a:xfrm>
-          <a:prstGeom prst="rect">
-            <a:avLst/>
-          </a:prstGeom>
-          <a:noFill/>
-        </p:spPr>
-        <p:txBody>
-          <a:bodyPr wrap="square" anchor="t" lIns="0" rIns="0" tIns="0" bIns="0">
-            <a:spAutoFit/>
-          </a:bodyPr>
-          <a:lstStyle/>
-          <a:p>
-            <a:pPr algn="l">
-              <a:spcAft>
-                <a:spcPts val="200"/>
-              </a:spcAft>
-            </a:pPr>
-            <a:r>
-              <a:rPr sz="3400" b="1" i="0">
-                <a:solidFill>
-                  <a:srgbClr val="6D28D9"/>
-                </a:solidFill>
-                <a:latin typeface="Arial"/>
-              </a:rPr>
-              <a:t>0,90 = 0,90</a:t>
-            </a:r>
-          </a:p>
-          <a:p>
-            <a:pPr algn="l">
-              <a:spcAft>
-                <a:spcPts val="0"/>
-              </a:spcAft>
-            </a:pPr>
-            <a:r>
-              <a:rPr sz="1200" b="0" i="0">
-                <a:solidFill>
-                  <a:srgbClr val="475569"/>
-                </a:solidFill>
-                <a:latin typeface="Arial"/>
-              </a:rPr>
-              <a:t>λ ImpactNet і істинна λ у момент зриву</a:t>
+                  <a:srgbClr val="0F172A"/>
+                </a:solidFill>
+                <a:latin typeface="Arial"/>
+              </a:rPr>
+              <a:t>формули шпаргалки, мітку сценарію, таймери від подій програми</a:t>
             </a:r>
           </a:p>
         </p:txBody>
@@ -5333,7 +5933,7 @@
                 </a:solidFill>
                 <a:latin typeface="Arial"/>
               </a:rPr>
-              <a:t>10 Фізична модель зриву: операційні межі</a:t>
+              <a:t>9 Приклад роботи моделей на розряді</a:t>
             </a:r>
           </a:p>
         </p:txBody>
@@ -5377,16 +5977,40 @@
           </a:p>
         </p:txBody>
       </p:sp>
-      <p:sp>
-        <p:nvSpPr>
-          <p:cNvPr id="4" name="TextBox 3"/>
+      <p:pic>
+        <p:nvPicPr>
+          <p:cNvPr id="4" name="Picture 3" descr="shot_trace.png"/>
+          <p:cNvPicPr>
+            <a:picLocks noChangeAspect="1"/>
+          </p:cNvPicPr>
+          <p:nvPr/>
+        </p:nvPicPr>
+        <p:blipFill>
+          <a:blip r:embed="rId3"/>
+          <a:stretch>
+            <a:fillRect/>
+          </a:stretch>
+        </p:blipFill>
+        <p:spPr>
+          <a:xfrm>
+            <a:off x="548640" y="1280160"/>
+            <a:ext cx="8138160" cy="4063553"/>
+          </a:xfrm>
+          <a:prstGeom prst="rect">
+            <a:avLst/>
+          </a:prstGeom>
+        </p:spPr>
+      </p:pic>
+      <p:sp>
+        <p:nvSpPr>
+          <p:cNvPr id="5" name="TextBox 4"/>
           <p:cNvSpPr txBox="1"/>
           <p:nvPr/>
         </p:nvSpPr>
         <p:spPr>
           <a:xfrm>
-            <a:off x="548640" y="1325880"/>
-            <a:ext cx="11064240" cy="548640"/>
+            <a:off x="548640" y="5389433"/>
+            <a:ext cx="8138160" cy="365760"/>
           </a:xfrm>
           <a:prstGeom prst="rect">
             <a:avLst/>
@@ -5405,36 +6029,27 @@
               </a:spcAft>
             </a:pPr>
             <a:r>
-              <a:rPr sz="1900" b="1" i="0">
-                <a:solidFill>
-                  <a:srgbClr val="B45309"/>
-                </a:solidFill>
-                <a:latin typeface="Arial"/>
-              </a:rPr>
-              <a:t>λ = 1 − Π(1 − rᵢ³)(1 − r_lm),   rᵢ = σ((xᵢ − cᵢ)/wᵢ),   </a:t>
-            </a:r>
-            <a:r>
-              <a:rPr sz="1700" b="0" i="0">
+              <a:rPr sz="1100" b="0" i="0">
                 <a:solidFill>
                   <a:srgbClr val="475569"/>
                 </a:solidFill>
                 <a:latin typeface="Arial"/>
               </a:rPr>
-              <a:t>P(зрив за час h) = 1 − exp(−∫λ dt)</a:t>
-            </a:r>
-          </a:p>
-        </p:txBody>
-      </p:sp>
-      <p:sp>
-        <p:nvSpPr>
-          <p:cNvPr id="5" name="TextBox 4"/>
+              <a:t>Рисунок 5 – Ймовірність моделі раннього попередження (зверху) і розклад інтенсивності зриву ImpactNet (знизу)</a:t>
+            </a:r>
+          </a:p>
+        </p:txBody>
+      </p:sp>
+      <p:sp>
+        <p:nvSpPr>
+          <p:cNvPr id="6" name="TextBox 5"/>
           <p:cNvSpPr txBox="1"/>
           <p:nvPr/>
         </p:nvSpPr>
         <p:spPr>
           <a:xfrm>
-            <a:off x="548640" y="2011680"/>
-            <a:ext cx="10972800" cy="320040"/>
+            <a:off x="9052560" y="1371600"/>
+            <a:ext cx="2651760" cy="1188720"/>
           </a:xfrm>
           <a:prstGeom prst="rect">
             <a:avLst/>
@@ -5449,17 +6064,334 @@
           <a:p>
             <a:pPr algn="l">
               <a:spcAft>
+                <a:spcPts val="200"/>
+              </a:spcAft>
+            </a:pPr>
+            <a:r>
+              <a:rPr sz="3400" b="1" i="0">
+                <a:solidFill>
+                  <a:srgbClr val="047857"/>
+                </a:solidFill>
+                <a:latin typeface="Arial"/>
+              </a:rPr>
+              <a:t>1,24 с</a:t>
+            </a:r>
+          </a:p>
+          <a:p>
+            <a:pPr algn="l">
+              <a:spcAft>
                 <a:spcPts val="0"/>
               </a:spcAft>
             </a:pPr>
             <a:r>
+              <a:rPr sz="1200" b="0" i="0">
+                <a:solidFill>
+                  <a:srgbClr val="475569"/>
+                </a:solidFill>
+                <a:latin typeface="Arial"/>
+              </a:rPr>
+              <a:t>випередження тривоги (поріг для FPR 5 %)</a:t>
+            </a:r>
+          </a:p>
+        </p:txBody>
+      </p:sp>
+      <p:sp>
+        <p:nvSpPr>
+          <p:cNvPr id="7" name="TextBox 6"/>
+          <p:cNvSpPr txBox="1"/>
+          <p:nvPr/>
+        </p:nvSpPr>
+        <p:spPr>
+          <a:xfrm>
+            <a:off x="9052560" y="2743200"/>
+            <a:ext cx="2651760" cy="1188720"/>
+          </a:xfrm>
+          <a:prstGeom prst="rect">
+            <a:avLst/>
+          </a:prstGeom>
+          <a:noFill/>
+        </p:spPr>
+        <p:txBody>
+          <a:bodyPr wrap="square" anchor="t" lIns="0" rIns="0" tIns="0" bIns="0">
+            <a:spAutoFit/>
+          </a:bodyPr>
+          <a:lstStyle/>
+          <a:p>
+            <a:pPr algn="l">
+              <a:spcAft>
+                <a:spcPts val="200"/>
+              </a:spcAft>
+            </a:pPr>
+            <a:r>
+              <a:rPr sz="3400" b="1" i="0">
+                <a:solidFill>
+                  <a:srgbClr val="C2410C"/>
+                </a:solidFill>
+                <a:latin typeface="Arial"/>
+              </a:rPr>
+              <a:t>98–100 %</a:t>
+            </a:r>
+          </a:p>
+          <a:p>
+            <a:pPr algn="l">
+              <a:spcAft>
+                <a:spcPts val="0"/>
+              </a:spcAft>
+            </a:pPr>
+            <a:r>
+              <a:rPr sz="1200" b="0" i="0">
+                <a:solidFill>
+                  <a:srgbClr val="475569"/>
+                </a:solidFill>
+                <a:latin typeface="Arial"/>
+              </a:rPr>
+              <a:t>внесок межі Грінвальда (f_GW → 1)</a:t>
+            </a:r>
+          </a:p>
+        </p:txBody>
+      </p:sp>
+      <p:sp>
+        <p:nvSpPr>
+          <p:cNvPr id="8" name="TextBox 7"/>
+          <p:cNvSpPr txBox="1"/>
+          <p:nvPr/>
+        </p:nvSpPr>
+        <p:spPr>
+          <a:xfrm>
+            <a:off x="9052560" y="4114800"/>
+            <a:ext cx="2651760" cy="1188720"/>
+          </a:xfrm>
+          <a:prstGeom prst="rect">
+            <a:avLst/>
+          </a:prstGeom>
+          <a:noFill/>
+        </p:spPr>
+        <p:txBody>
+          <a:bodyPr wrap="square" anchor="t" lIns="0" rIns="0" tIns="0" bIns="0">
+            <a:spAutoFit/>
+          </a:bodyPr>
+          <a:lstStyle/>
+          <a:p>
+            <a:pPr algn="l">
+              <a:spcAft>
+                <a:spcPts val="200"/>
+              </a:spcAft>
+            </a:pPr>
+            <a:r>
+              <a:rPr sz="3400" b="1" i="0">
+                <a:solidFill>
+                  <a:srgbClr val="6D28D9"/>
+                </a:solidFill>
+                <a:latin typeface="Arial"/>
+              </a:rPr>
+              <a:t>0,90 = 0,90</a:t>
+            </a:r>
+          </a:p>
+          <a:p>
+            <a:pPr algn="l">
+              <a:spcAft>
+                <a:spcPts val="0"/>
+              </a:spcAft>
+            </a:pPr>
+            <a:r>
+              <a:rPr sz="1200" b="0" i="0">
+                <a:solidFill>
+                  <a:srgbClr val="475569"/>
+                </a:solidFill>
+                <a:latin typeface="Arial"/>
+              </a:rPr>
+              <a:t>λ ImpactNet і істинна λ у момент зриву</a:t>
+            </a:r>
+          </a:p>
+        </p:txBody>
+      </p:sp>
+    </p:spTree>
+  </p:cSld>
+  <p:clrMapOvr>
+    <a:masterClrMapping/>
+  </p:clrMapOvr>
+</p:sld>
+</file>
+
+<file path=ppt/slides/slide12.xml><?xml version="1.0" encoding="utf-8"?>
+<p:sld xmlns:a="http://schemas.openxmlformats.org/drawingml/2006/main" xmlns:p="http://schemas.openxmlformats.org/presentationml/2006/main" xmlns:r="http://schemas.openxmlformats.org/officeDocument/2006/relationships">
+  <p:cSld>
+    <p:bg>
+      <p:bgPr>
+        <a:solidFill>
+          <a:srgbClr val="FFFFFF"/>
+        </a:solidFill>
+        <a:effectLst/>
+      </p:bgPr>
+    </p:bg>
+    <p:spTree>
+      <p:nvGrpSpPr>
+        <p:cNvPr id="1" name=""/>
+        <p:cNvGrpSpPr/>
+        <p:nvPr/>
+      </p:nvGrpSpPr>
+      <p:grpSpPr/>
+      <p:sp>
+        <p:nvSpPr>
+          <p:cNvPr id="2" name="TextBox 1"/>
+          <p:cNvSpPr txBox="1"/>
+          <p:nvPr/>
+        </p:nvSpPr>
+        <p:spPr>
+          <a:xfrm>
+            <a:off x="548640" y="411480"/>
+            <a:ext cx="11064240" cy="640080"/>
+          </a:xfrm>
+          <a:prstGeom prst="rect">
+            <a:avLst/>
+          </a:prstGeom>
+          <a:noFill/>
+        </p:spPr>
+        <p:txBody>
+          <a:bodyPr wrap="square" anchor="t" lIns="0" rIns="0" tIns="0" bIns="0">
+            <a:spAutoFit/>
+          </a:bodyPr>
+          <a:lstStyle/>
+          <a:p>
+            <a:pPr algn="l">
+              <a:spcAft>
+                <a:spcPts val="0"/>
+              </a:spcAft>
+            </a:pPr>
+            <a:r>
+              <a:rPr sz="2600" b="1" i="0">
+                <a:solidFill>
+                  <a:srgbClr val="0F172A"/>
+                </a:solidFill>
+                <a:latin typeface="Arial"/>
+              </a:rPr>
+              <a:t>10 Фізична модель зриву: операційні межі</a:t>
+            </a:r>
+          </a:p>
+        </p:txBody>
+      </p:sp>
+      <p:sp>
+        <p:nvSpPr>
+          <p:cNvPr id="3" name="TextBox 2"/>
+          <p:cNvSpPr txBox="1"/>
+          <p:nvPr/>
+        </p:nvSpPr>
+        <p:spPr>
+          <a:xfrm>
+            <a:off x="11247120" y="6446520"/>
+            <a:ext cx="457200" cy="274320"/>
+          </a:xfrm>
+          <a:prstGeom prst="rect">
+            <a:avLst/>
+          </a:prstGeom>
+          <a:noFill/>
+        </p:spPr>
+        <p:txBody>
+          <a:bodyPr wrap="square" anchor="t" lIns="0" rIns="0" tIns="0" bIns="0">
+            <a:spAutoFit/>
+          </a:bodyPr>
+          <a:lstStyle/>
+          <a:p>
+            <a:pPr algn="r">
+              <a:spcAft>
+                <a:spcPts val="0"/>
+              </a:spcAft>
+            </a:pPr>
+            <a:r>
+              <a:rPr sz="1000" b="0" i="0">
+                <a:solidFill>
+                  <a:srgbClr val="94A3B8"/>
+                </a:solidFill>
+                <a:latin typeface="Arial"/>
+              </a:rPr>
+              <a:t>12</a:t>
+            </a:r>
+          </a:p>
+        </p:txBody>
+      </p:sp>
+      <p:sp>
+        <p:nvSpPr>
+          <p:cNvPr id="4" name="TextBox 3"/>
+          <p:cNvSpPr txBox="1"/>
+          <p:nvPr/>
+        </p:nvSpPr>
+        <p:spPr>
+          <a:xfrm>
+            <a:off x="548640" y="1325880"/>
+            <a:ext cx="11064240" cy="548640"/>
+          </a:xfrm>
+          <a:prstGeom prst="rect">
+            <a:avLst/>
+          </a:prstGeom>
+          <a:noFill/>
+        </p:spPr>
+        <p:txBody>
+          <a:bodyPr wrap="square" anchor="t" lIns="0" rIns="0" tIns="0" bIns="0">
+            <a:spAutoFit/>
+          </a:bodyPr>
+          <a:lstStyle/>
+          <a:p>
+            <a:pPr algn="l">
+              <a:spcAft>
+                <a:spcPts val="0"/>
+              </a:spcAft>
+            </a:pPr>
+            <a:r>
+              <a:rPr sz="1900" b="1" i="0">
+                <a:solidFill>
+                  <a:srgbClr val="B45309"/>
+                </a:solidFill>
+                <a:latin typeface="Arial"/>
+              </a:rPr>
+              <a:t>λ = 1 − Π(1 − rᵢ³)(1 − r_lm),   rᵢ = σ((xᵢ − cᵢ)/wᵢ),   </a:t>
+            </a:r>
+            <a:r>
+              <a:rPr sz="1700" b="0" i="0">
+                <a:solidFill>
+                  <a:srgbClr val="475569"/>
+                </a:solidFill>
+                <a:latin typeface="Arial"/>
+              </a:rPr>
+              <a:t>P(зрив за час h) = 1 − exp(−∫λ dt)</a:t>
+            </a:r>
+          </a:p>
+        </p:txBody>
+      </p:sp>
+      <p:sp>
+        <p:nvSpPr>
+          <p:cNvPr id="5" name="TextBox 4"/>
+          <p:cNvSpPr txBox="1"/>
+          <p:nvPr/>
+        </p:nvSpPr>
+        <p:spPr>
+          <a:xfrm>
+            <a:off x="548640" y="2011680"/>
+            <a:ext cx="10972800" cy="320040"/>
+          </a:xfrm>
+          <a:prstGeom prst="rect">
+            <a:avLst/>
+          </a:prstGeom>
+          <a:noFill/>
+        </p:spPr>
+        <p:txBody>
+          <a:bodyPr wrap="square" anchor="t" lIns="0" rIns="0" tIns="0" bIns="0">
+            <a:spAutoFit/>
+          </a:bodyPr>
+          <a:lstStyle/>
+          <a:p>
+            <a:pPr algn="l">
+              <a:spcAft>
+                <a:spcPts val="0"/>
+              </a:spcAft>
+            </a:pPr>
+            <a:r>
               <a:rPr sz="1100" b="0" i="0">
                 <a:solidFill>
                   <a:srgbClr val="475569"/>
                 </a:solidFill>
                 <a:latin typeface="Arial"/>
               </a:rPr>
-              <a:t>Таблиця 4 – Операційні межі та керувальні впливи</a:t>
+              <a:t>Таблиця 5 – Операційні межі та керувальні впливи</a:t>
             </a:r>
           </a:p>
         </p:txBody>
@@ -6134,989 +7066,6 @@
 </p:sld>
 </file>
 
-<file path=ppt/slides/slide12.xml><?xml version="1.0" encoding="utf-8"?>
-<p:sld xmlns:a="http://schemas.openxmlformats.org/drawingml/2006/main" xmlns:p="http://schemas.openxmlformats.org/presentationml/2006/main" xmlns:r="http://schemas.openxmlformats.org/officeDocument/2006/relationships">
-  <p:cSld>
-    <p:bg>
-      <p:bgPr>
-        <a:solidFill>
-          <a:srgbClr val="FFFFFF"/>
-        </a:solidFill>
-        <a:effectLst/>
-      </p:bgPr>
-    </p:bg>
-    <p:spTree>
-      <p:nvGrpSpPr>
-        <p:cNvPr id="1" name=""/>
-        <p:cNvGrpSpPr/>
-        <p:nvPr/>
-      </p:nvGrpSpPr>
-      <p:grpSpPr/>
-      <p:sp>
-        <p:nvSpPr>
-          <p:cNvPr id="2" name="TextBox 1"/>
-          <p:cNvSpPr txBox="1"/>
-          <p:nvPr/>
-        </p:nvSpPr>
-        <p:spPr>
-          <a:xfrm>
-            <a:off x="548640" y="411480"/>
-            <a:ext cx="11064240" cy="640080"/>
-          </a:xfrm>
-          <a:prstGeom prst="rect">
-            <a:avLst/>
-          </a:prstGeom>
-          <a:noFill/>
-        </p:spPr>
-        <p:txBody>
-          <a:bodyPr wrap="square" anchor="t" lIns="0" rIns="0" tIns="0" bIns="0">
-            <a:spAutoFit/>
-          </a:bodyPr>
-          <a:lstStyle/>
-          <a:p>
-            <a:pPr algn="l">
-              <a:spcAft>
-                <a:spcPts val="0"/>
-              </a:spcAft>
-            </a:pPr>
-            <a:r>
-              <a:rPr sz="2600" b="1" i="0">
-                <a:solidFill>
-                  <a:srgbClr val="0F172A"/>
-                </a:solidFill>
-                <a:latin typeface="Arial"/>
-              </a:rPr>
-              <a:t>11 Нейромережа ImpactNet: атрибуція механізмів зриву</a:t>
-            </a:r>
-          </a:p>
-        </p:txBody>
-      </p:sp>
-      <p:sp>
-        <p:nvSpPr>
-          <p:cNvPr id="3" name="TextBox 2"/>
-          <p:cNvSpPr txBox="1"/>
-          <p:nvPr/>
-        </p:nvSpPr>
-        <p:spPr>
-          <a:xfrm>
-            <a:off x="11247120" y="6446520"/>
-            <a:ext cx="457200" cy="274320"/>
-          </a:xfrm>
-          <a:prstGeom prst="rect">
-            <a:avLst/>
-          </a:prstGeom>
-          <a:noFill/>
-        </p:spPr>
-        <p:txBody>
-          <a:bodyPr wrap="square" anchor="t" lIns="0" rIns="0" tIns="0" bIns="0">
-            <a:spAutoFit/>
-          </a:bodyPr>
-          <a:lstStyle/>
-          <a:p>
-            <a:pPr algn="r">
-              <a:spcAft>
-                <a:spcPts val="0"/>
-              </a:spcAft>
-            </a:pPr>
-            <a:r>
-              <a:rPr sz="1000" b="0" i="0">
-                <a:solidFill>
-                  <a:srgbClr val="94A3B8"/>
-                </a:solidFill>
-                <a:latin typeface="Arial"/>
-              </a:rPr>
-              <a:t>12</a:t>
-            </a:r>
-          </a:p>
-        </p:txBody>
-      </p:sp>
-      <p:sp>
-        <p:nvSpPr>
-          <p:cNvPr id="4" name="Rounded Rectangle 3"/>
-          <p:cNvSpPr/>
-          <p:nvPr/>
-        </p:nvSpPr>
-        <p:spPr>
-          <a:xfrm>
-            <a:off x="548640" y="1325880"/>
-            <a:ext cx="1554480" cy="1737360"/>
-          </a:xfrm>
-          <a:prstGeom prst="roundRect">
-            <a:avLst>
-              <a:gd name="adj" fmla="val 4000"/>
-            </a:avLst>
-          </a:prstGeom>
-          <a:solidFill>
-            <a:srgbClr val="FFFFFF"/>
-          </a:solidFill>
-          <a:ln w="19050">
-            <a:solidFill>
-              <a:srgbClr val="0E7490"/>
-            </a:solidFill>
-          </a:ln>
-          <a:effectLst/>
-        </p:spPr>
-        <p:style>
-          <a:lnRef idx="1">
-            <a:schemeClr val="accent1"/>
-          </a:lnRef>
-          <a:fillRef idx="3">
-            <a:schemeClr val="accent1"/>
-          </a:fillRef>
-          <a:effectRef idx="2">
-            <a:schemeClr val="accent1"/>
-          </a:effectRef>
-          <a:fontRef idx="minor">
-            <a:schemeClr val="lt1"/>
-          </a:fontRef>
-        </p:style>
-        <p:txBody>
-          <a:bodyPr rtlCol="0" anchor="ctr"/>
-          <a:lstStyle/>
-          <a:p>
-            <a:pPr algn="ctr"/>
-          </a:p>
-        </p:txBody>
-      </p:sp>
-      <p:sp>
-        <p:nvSpPr>
-          <p:cNvPr id="5" name="TextBox 4"/>
-          <p:cNvSpPr txBox="1"/>
-          <p:nvPr/>
-        </p:nvSpPr>
-        <p:spPr>
-          <a:xfrm>
-            <a:off x="621792" y="1371600"/>
-            <a:ext cx="1408176" cy="1645920"/>
-          </a:xfrm>
-          <a:prstGeom prst="rect">
-            <a:avLst/>
-          </a:prstGeom>
-          <a:noFill/>
-        </p:spPr>
-        <p:txBody>
-          <a:bodyPr wrap="square" anchor="ctr" lIns="0" rIns="0" tIns="0" bIns="0">
-            <a:spAutoFit/>
-          </a:bodyPr>
-          <a:lstStyle/>
-          <a:p>
-            <a:pPr algn="ctr">
-              <a:spcAft>
-                <a:spcPts val="500"/>
-              </a:spcAft>
-            </a:pPr>
-            <a:r>
-              <a:rPr sz="1400" b="1" i="0">
-                <a:solidFill>
-                  <a:srgbClr val="0E7490"/>
-                </a:solidFill>
-                <a:latin typeface="Arial"/>
-              </a:rPr>
-              <a:t>218 входів</a:t>
-            </a:r>
-          </a:p>
-          <a:p>
-            <a:pPr algn="ctr">
-              <a:spcAft>
-                <a:spcPts val="0"/>
-              </a:spcAft>
-            </a:pPr>
-            <a:r>
-              <a:rPr sz="1100" b="0" i="0">
-                <a:solidFill>
-                  <a:srgbClr val="475569"/>
-                </a:solidFill>
-                <a:latin typeface="Arial"/>
-              </a:rPr>
-              <a:t>100 діагностик,
-маски відмов,
-18 фізичних величин</a:t>
-            </a:r>
-          </a:p>
-        </p:txBody>
-      </p:sp>
-      <p:sp>
-        <p:nvSpPr>
-          <p:cNvPr id="6" name="Right Arrow 5"/>
-          <p:cNvSpPr/>
-          <p:nvPr/>
-        </p:nvSpPr>
-        <p:spPr>
-          <a:xfrm>
-            <a:off x="2130552" y="2057400"/>
-            <a:ext cx="219456" cy="256032"/>
-          </a:xfrm>
-          <a:prstGeom prst="rightArrow">
-            <a:avLst/>
-          </a:prstGeom>
-          <a:solidFill>
-            <a:srgbClr val="94A3B8"/>
-          </a:solidFill>
-          <a:ln>
-            <a:noFill/>
-          </a:ln>
-          <a:effectLst/>
-        </p:spPr>
-        <p:style>
-          <a:lnRef idx="1">
-            <a:schemeClr val="accent1"/>
-          </a:lnRef>
-          <a:fillRef idx="3">
-            <a:schemeClr val="accent1"/>
-          </a:fillRef>
-          <a:effectRef idx="2">
-            <a:schemeClr val="accent1"/>
-          </a:effectRef>
-          <a:fontRef idx="minor">
-            <a:schemeClr val="lt1"/>
-          </a:fontRef>
-        </p:style>
-        <p:txBody>
-          <a:bodyPr rtlCol="0" anchor="ctr"/>
-          <a:lstStyle/>
-          <a:p>
-            <a:pPr algn="ctr"/>
-          </a:p>
-        </p:txBody>
-      </p:sp>
-      <p:sp>
-        <p:nvSpPr>
-          <p:cNvPr id="7" name="Rounded Rectangle 6"/>
-          <p:cNvSpPr/>
-          <p:nvPr/>
-        </p:nvSpPr>
-        <p:spPr>
-          <a:xfrm>
-            <a:off x="2377440" y="1325880"/>
-            <a:ext cx="1554480" cy="1737360"/>
-          </a:xfrm>
-          <a:prstGeom prst="roundRect">
-            <a:avLst>
-              <a:gd name="adj" fmla="val 4000"/>
-            </a:avLst>
-          </a:prstGeom>
-          <a:solidFill>
-            <a:srgbClr val="FFFFFF"/>
-          </a:solidFill>
-          <a:ln w="19050">
-            <a:solidFill>
-              <a:srgbClr val="1D4ED8"/>
-            </a:solidFill>
-          </a:ln>
-          <a:effectLst/>
-        </p:spPr>
-        <p:style>
-          <a:lnRef idx="1">
-            <a:schemeClr val="accent1"/>
-          </a:lnRef>
-          <a:fillRef idx="3">
-            <a:schemeClr val="accent1"/>
-          </a:fillRef>
-          <a:effectRef idx="2">
-            <a:schemeClr val="accent1"/>
-          </a:effectRef>
-          <a:fontRef idx="minor">
-            <a:schemeClr val="lt1"/>
-          </a:fontRef>
-        </p:style>
-        <p:txBody>
-          <a:bodyPr rtlCol="0" anchor="ctr"/>
-          <a:lstStyle/>
-          <a:p>
-            <a:pPr algn="ctr"/>
-          </a:p>
-        </p:txBody>
-      </p:sp>
-      <p:sp>
-        <p:nvSpPr>
-          <p:cNvPr id="8" name="TextBox 7"/>
-          <p:cNvSpPr txBox="1"/>
-          <p:nvPr/>
-        </p:nvSpPr>
-        <p:spPr>
-          <a:xfrm>
-            <a:off x="2450592" y="1371600"/>
-            <a:ext cx="1408176" cy="1645920"/>
-          </a:xfrm>
-          <a:prstGeom prst="rect">
-            <a:avLst/>
-          </a:prstGeom>
-          <a:noFill/>
-        </p:spPr>
-        <p:txBody>
-          <a:bodyPr wrap="square" anchor="ctr" lIns="0" rIns="0" tIns="0" bIns="0">
-            <a:spAutoFit/>
-          </a:bodyPr>
-          <a:lstStyle/>
-          <a:p>
-            <a:pPr algn="ctr">
-              <a:spcAft>
-                <a:spcPts val="500"/>
-              </a:spcAft>
-            </a:pPr>
-            <a:r>
-              <a:rPr sz="1400" b="1" i="0">
-                <a:solidFill>
-                  <a:srgbClr val="1D4ED8"/>
-                </a:solidFill>
-                <a:latin typeface="Arial"/>
-              </a:rPr>
-              <a:t>Згортки</a:t>
-            </a:r>
-          </a:p>
-          <a:p>
-            <a:pPr algn="ctr">
-              <a:spcAft>
-                <a:spcPts val="0"/>
-              </a:spcAft>
-            </a:pPr>
-            <a:r>
-              <a:rPr sz="1100" b="0" i="0">
-                <a:solidFill>
-                  <a:srgbClr val="475569"/>
-                </a:solidFill>
-                <a:latin typeface="Arial"/>
-              </a:rPr>
-              <a:t>причинні,
-вікно 155 мс</a:t>
-            </a:r>
-          </a:p>
-        </p:txBody>
-      </p:sp>
-      <p:sp>
-        <p:nvSpPr>
-          <p:cNvPr id="9" name="Right Arrow 8"/>
-          <p:cNvSpPr/>
-          <p:nvPr/>
-        </p:nvSpPr>
-        <p:spPr>
-          <a:xfrm>
-            <a:off x="3959352" y="2057400"/>
-            <a:ext cx="219456" cy="256032"/>
-          </a:xfrm>
-          <a:prstGeom prst="rightArrow">
-            <a:avLst/>
-          </a:prstGeom>
-          <a:solidFill>
-            <a:srgbClr val="94A3B8"/>
-          </a:solidFill>
-          <a:ln>
-            <a:noFill/>
-          </a:ln>
-          <a:effectLst/>
-        </p:spPr>
-        <p:style>
-          <a:lnRef idx="1">
-            <a:schemeClr val="accent1"/>
-          </a:lnRef>
-          <a:fillRef idx="3">
-            <a:schemeClr val="accent1"/>
-          </a:fillRef>
-          <a:effectRef idx="2">
-            <a:schemeClr val="accent1"/>
-          </a:effectRef>
-          <a:fontRef idx="minor">
-            <a:schemeClr val="lt1"/>
-          </a:fontRef>
-        </p:style>
-        <p:txBody>
-          <a:bodyPr rtlCol="0" anchor="ctr"/>
-          <a:lstStyle/>
-          <a:p>
-            <a:pPr algn="ctr"/>
-          </a:p>
-        </p:txBody>
-      </p:sp>
-      <p:sp>
-        <p:nvSpPr>
-          <p:cNvPr id="10" name="Rounded Rectangle 9"/>
-          <p:cNvSpPr/>
-          <p:nvPr/>
-        </p:nvSpPr>
-        <p:spPr>
-          <a:xfrm>
-            <a:off x="4206240" y="1325880"/>
-            <a:ext cx="1554480" cy="1737360"/>
-          </a:xfrm>
-          <a:prstGeom prst="roundRect">
-            <a:avLst>
-              <a:gd name="adj" fmla="val 4000"/>
-            </a:avLst>
-          </a:prstGeom>
-          <a:solidFill>
-            <a:srgbClr val="FFFFFF"/>
-          </a:solidFill>
-          <a:ln w="19050">
-            <a:solidFill>
-              <a:srgbClr val="6D28D9"/>
-            </a:solidFill>
-          </a:ln>
-          <a:effectLst/>
-        </p:spPr>
-        <p:style>
-          <a:lnRef idx="1">
-            <a:schemeClr val="accent1"/>
-          </a:lnRef>
-          <a:fillRef idx="3">
-            <a:schemeClr val="accent1"/>
-          </a:fillRef>
-          <a:effectRef idx="2">
-            <a:schemeClr val="accent1"/>
-          </a:effectRef>
-          <a:fontRef idx="minor">
-            <a:schemeClr val="lt1"/>
-          </a:fontRef>
-        </p:style>
-        <p:txBody>
-          <a:bodyPr rtlCol="0" anchor="ctr"/>
-          <a:lstStyle/>
-          <a:p>
-            <a:pPr algn="ctr"/>
-          </a:p>
-        </p:txBody>
-      </p:sp>
-      <p:sp>
-        <p:nvSpPr>
-          <p:cNvPr id="11" name="TextBox 10"/>
-          <p:cNvSpPr txBox="1"/>
-          <p:nvPr/>
-        </p:nvSpPr>
-        <p:spPr>
-          <a:xfrm>
-            <a:off x="4279392" y="1371600"/>
-            <a:ext cx="1408176" cy="1645920"/>
-          </a:xfrm>
-          <a:prstGeom prst="rect">
-            <a:avLst/>
-          </a:prstGeom>
-          <a:noFill/>
-        </p:spPr>
-        <p:txBody>
-          <a:bodyPr wrap="square" anchor="ctr" lIns="0" rIns="0" tIns="0" bIns="0">
-            <a:spAutoFit/>
-          </a:bodyPr>
-          <a:lstStyle/>
-          <a:p>
-            <a:pPr algn="ctr">
-              <a:spcAft>
-                <a:spcPts val="500"/>
-              </a:spcAft>
-            </a:pPr>
-            <a:r>
-              <a:rPr sz="1400" b="1" i="0">
-                <a:solidFill>
-                  <a:srgbClr val="6D28D9"/>
-                </a:solidFill>
-                <a:latin typeface="Arial"/>
-              </a:rPr>
-              <a:t>GRU (128)</a:t>
-            </a:r>
-          </a:p>
-          <a:p>
-            <a:pPr algn="ctr">
-              <a:spcAft>
-                <a:spcPts val="0"/>
-              </a:spcAft>
-            </a:pPr>
-            <a:r>
-              <a:rPr sz="1100" b="0" i="0">
-                <a:solidFill>
-                  <a:srgbClr val="475569"/>
-                </a:solidFill>
-                <a:latin typeface="Arial"/>
-              </a:rPr>
-              <a:t>пам'ять
-розряду</a:t>
-            </a:r>
-          </a:p>
-        </p:txBody>
-      </p:sp>
-      <p:sp>
-        <p:nvSpPr>
-          <p:cNvPr id="12" name="Right Arrow 11"/>
-          <p:cNvSpPr/>
-          <p:nvPr/>
-        </p:nvSpPr>
-        <p:spPr>
-          <a:xfrm>
-            <a:off x="5788152" y="2057400"/>
-            <a:ext cx="219456" cy="256032"/>
-          </a:xfrm>
-          <a:prstGeom prst="rightArrow">
-            <a:avLst/>
-          </a:prstGeom>
-          <a:solidFill>
-            <a:srgbClr val="94A3B8"/>
-          </a:solidFill>
-          <a:ln>
-            <a:noFill/>
-          </a:ln>
-          <a:effectLst/>
-        </p:spPr>
-        <p:style>
-          <a:lnRef idx="1">
-            <a:schemeClr val="accent1"/>
-          </a:lnRef>
-          <a:fillRef idx="3">
-            <a:schemeClr val="accent1"/>
-          </a:fillRef>
-          <a:effectRef idx="2">
-            <a:schemeClr val="accent1"/>
-          </a:effectRef>
-          <a:fontRef idx="minor">
-            <a:schemeClr val="lt1"/>
-          </a:fontRef>
-        </p:style>
-        <p:txBody>
-          <a:bodyPr rtlCol="0" anchor="ctr"/>
-          <a:lstStyle/>
-          <a:p>
-            <a:pPr algn="ctr"/>
-          </a:p>
-        </p:txBody>
-      </p:sp>
-      <p:sp>
-        <p:nvSpPr>
-          <p:cNvPr id="13" name="Rounded Rectangle 12"/>
-          <p:cNvSpPr/>
-          <p:nvPr/>
-        </p:nvSpPr>
-        <p:spPr>
-          <a:xfrm>
-            <a:off x="6035040" y="1325880"/>
-            <a:ext cx="1554480" cy="1737360"/>
-          </a:xfrm>
-          <a:prstGeom prst="roundRect">
-            <a:avLst>
-              <a:gd name="adj" fmla="val 4000"/>
-            </a:avLst>
-          </a:prstGeom>
-          <a:solidFill>
-            <a:srgbClr val="FFFFFF"/>
-          </a:solidFill>
-          <a:ln w="19050">
-            <a:solidFill>
-              <a:srgbClr val="C2410C"/>
-            </a:solidFill>
-          </a:ln>
-          <a:effectLst/>
-        </p:spPr>
-        <p:style>
-          <a:lnRef idx="1">
-            <a:schemeClr val="accent1"/>
-          </a:lnRef>
-          <a:fillRef idx="3">
-            <a:schemeClr val="accent1"/>
-          </a:fillRef>
-          <a:effectRef idx="2">
-            <a:schemeClr val="accent1"/>
-          </a:effectRef>
-          <a:fontRef idx="minor">
-            <a:schemeClr val="lt1"/>
-          </a:fontRef>
-        </p:style>
-        <p:txBody>
-          <a:bodyPr rtlCol="0" anchor="ctr"/>
-          <a:lstStyle/>
-          <a:p>
-            <a:pPr algn="ctr"/>
-          </a:p>
-        </p:txBody>
-      </p:sp>
-      <p:sp>
-        <p:nvSpPr>
-          <p:cNvPr id="14" name="TextBox 13"/>
-          <p:cNvSpPr txBox="1"/>
-          <p:nvPr/>
-        </p:nvSpPr>
-        <p:spPr>
-          <a:xfrm>
-            <a:off x="6108192" y="1371600"/>
-            <a:ext cx="1408176" cy="1645920"/>
-          </a:xfrm>
-          <a:prstGeom prst="rect">
-            <a:avLst/>
-          </a:prstGeom>
-          <a:noFill/>
-        </p:spPr>
-        <p:txBody>
-          <a:bodyPr wrap="square" anchor="ctr" lIns="0" rIns="0" tIns="0" bIns="0">
-            <a:spAutoFit/>
-          </a:bodyPr>
-          <a:lstStyle/>
-          <a:p>
-            <a:pPr algn="ctr">
-              <a:spcAft>
-                <a:spcPts val="500"/>
-              </a:spcAft>
-            </a:pPr>
-            <a:r>
-              <a:rPr sz="1400" b="1" i="0">
-                <a:solidFill>
-                  <a:srgbClr val="C2410C"/>
-                </a:solidFill>
-                <a:latin typeface="Arial"/>
-              </a:rPr>
-              <a:t>5 нейронів</a:t>
-            </a:r>
-          </a:p>
-          <a:p>
-            <a:pPr algn="ctr">
-              <a:spcAft>
-                <a:spcPts val="0"/>
-              </a:spcAft>
-            </a:pPr>
-            <a:r>
-              <a:rPr sz="1100" b="0" i="0">
-                <a:solidFill>
-                  <a:srgbClr val="475569"/>
-                </a:solidFill>
-                <a:latin typeface="Arial"/>
-              </a:rPr>
-              <a:t>фізичне
-апріорі</a:t>
-            </a:r>
-          </a:p>
-        </p:txBody>
-      </p:sp>
-      <p:sp>
-        <p:nvSpPr>
-          <p:cNvPr id="15" name="TextBox 14"/>
-          <p:cNvSpPr txBox="1"/>
-          <p:nvPr/>
-        </p:nvSpPr>
-        <p:spPr>
-          <a:xfrm>
-            <a:off x="548640" y="3200400"/>
-            <a:ext cx="7040880" cy="365760"/>
-          </a:xfrm>
-          <a:prstGeom prst="rect">
-            <a:avLst/>
-          </a:prstGeom>
-          <a:noFill/>
-        </p:spPr>
-        <p:txBody>
-          <a:bodyPr wrap="square" anchor="t" lIns="0" rIns="0" tIns="0" bIns="0">
-            <a:spAutoFit/>
-          </a:bodyPr>
-          <a:lstStyle/>
-          <a:p>
-            <a:pPr algn="l">
-              <a:spcAft>
-                <a:spcPts val="0"/>
-              </a:spcAft>
-            </a:pPr>
-            <a:r>
-              <a:rPr sz="1100" b="0" i="0">
-                <a:solidFill>
-                  <a:srgbClr val="475569"/>
-                </a:solidFill>
-                <a:latin typeface="Arial"/>
-              </a:rPr>
-              <a:t>Рисунок 6 – Структурна схема ImpactNet</a:t>
-            </a:r>
-          </a:p>
-        </p:txBody>
-      </p:sp>
-      <p:sp>
-        <p:nvSpPr>
-          <p:cNvPr id="16" name="TextBox 15"/>
-          <p:cNvSpPr txBox="1"/>
-          <p:nvPr/>
-        </p:nvSpPr>
-        <p:spPr>
-          <a:xfrm>
-            <a:off x="548640" y="3703320"/>
-            <a:ext cx="7040880" cy="2194560"/>
-          </a:xfrm>
-          <a:prstGeom prst="rect">
-            <a:avLst/>
-          </a:prstGeom>
-          <a:noFill/>
-        </p:spPr>
-        <p:txBody>
-          <a:bodyPr wrap="square" anchor="t" lIns="0" rIns="0" tIns="0" bIns="0">
-            <a:spAutoFit/>
-          </a:bodyPr>
-          <a:lstStyle/>
-          <a:p>
-            <a:pPr algn="l">
-              <a:spcAft>
-                <a:spcPts val="800"/>
-              </a:spcAft>
-            </a:pPr>
-            <a:r>
-              <a:rPr sz="1400" b="1" i="0">
-                <a:solidFill>
-                  <a:srgbClr val="0F172A"/>
-                </a:solidFill>
-                <a:latin typeface="Arial"/>
-              </a:rPr>
-              <a:t>Виходи визначаються однозначно через внески механізмів:</a:t>
-            </a:r>
-          </a:p>
-          <a:p>
-            <a:pPr algn="l">
-              <a:spcAft>
-                <a:spcPts val="600"/>
-              </a:spcAft>
-            </a:pPr>
-            <a:r>
-              <a:rPr sz="1400" b="0" i="0">
-                <a:solidFill>
-                  <a:srgbClr val="0F172A"/>
-                </a:solidFill>
-                <a:latin typeface="Arial"/>
-              </a:rPr>
-              <a:t>частка механізму = 100·Cₖ / ΣC, де Cₖ = −ln(1 − rₖᵖ); сума часток дорівнює 100 %</a:t>
-            </a:r>
-          </a:p>
-          <a:p>
-            <a:pPr algn="l">
-              <a:spcAft>
-                <a:spcPts val="600"/>
-              </a:spcAft>
-            </a:pPr>
-            <a:r>
-              <a:rPr sz="1400" b="0" i="0">
-                <a:solidFill>
-                  <a:srgbClr val="0F172A"/>
-                </a:solidFill>
-                <a:latin typeface="Arial"/>
-              </a:rPr>
-              <a:t>λ = 1 − exp(−ΣC) — тотожна формулі симулятора</a:t>
-            </a:r>
-          </a:p>
-          <a:p>
-            <a:pPr algn="l">
-              <a:spcAft>
-                <a:spcPts val="0"/>
-              </a:spcAft>
-            </a:pPr>
-            <a:r>
-              <a:rPr sz="1400" b="0" i="0">
-                <a:solidFill>
-                  <a:srgbClr val="0F172A"/>
-                </a:solidFill>
-                <a:latin typeface="Arial"/>
-              </a:rPr>
-              <a:t>P(зрив за час h) = 1 − exp(−λh)</a:t>
-            </a:r>
-          </a:p>
-        </p:txBody>
-      </p:sp>
-      <p:sp>
-        <p:nvSpPr>
-          <p:cNvPr id="17" name="TextBox 16"/>
-          <p:cNvSpPr txBox="1"/>
-          <p:nvPr/>
-        </p:nvSpPr>
-        <p:spPr>
-          <a:xfrm>
-            <a:off x="8138160" y="1371600"/>
-            <a:ext cx="3566160" cy="1188720"/>
-          </a:xfrm>
-          <a:prstGeom prst="rect">
-            <a:avLst/>
-          </a:prstGeom>
-          <a:noFill/>
-        </p:spPr>
-        <p:txBody>
-          <a:bodyPr wrap="square" anchor="t" lIns="0" rIns="0" tIns="0" bIns="0">
-            <a:spAutoFit/>
-          </a:bodyPr>
-          <a:lstStyle/>
-          <a:p>
-            <a:pPr algn="l">
-              <a:spcAft>
-                <a:spcPts val="200"/>
-              </a:spcAft>
-            </a:pPr>
-            <a:r>
-              <a:rPr sz="3400" b="1" i="0">
-                <a:solidFill>
-                  <a:srgbClr val="6D28D9"/>
-                </a:solidFill>
-                <a:latin typeface="Arial"/>
-              </a:rPr>
-              <a:t>49 з 49</a:t>
-            </a:r>
-          </a:p>
-          <a:p>
-            <a:pPr algn="l">
-              <a:spcAft>
-                <a:spcPts val="0"/>
-              </a:spcAft>
-            </a:pPr>
-            <a:r>
-              <a:rPr sz="1200" b="0" i="0">
-                <a:solidFill>
-                  <a:srgbClr val="475569"/>
-                </a:solidFill>
-                <a:latin typeface="Arial"/>
-              </a:rPr>
-              <a:t>механізм зриву у момент запуску (20 Грінвальд, 15 кінк, 14 радіація)</a:t>
-            </a:r>
-          </a:p>
-        </p:txBody>
-      </p:sp>
-      <p:sp>
-        <p:nvSpPr>
-          <p:cNvPr id="18" name="TextBox 17"/>
-          <p:cNvSpPr txBox="1"/>
-          <p:nvPr/>
-        </p:nvSpPr>
-        <p:spPr>
-          <a:xfrm>
-            <a:off x="8138160" y="2788920"/>
-            <a:ext cx="3566160" cy="1188720"/>
-          </a:xfrm>
-          <a:prstGeom prst="rect">
-            <a:avLst/>
-          </a:prstGeom>
-          <a:noFill/>
-        </p:spPr>
-        <p:txBody>
-          <a:bodyPr wrap="square" anchor="t" lIns="0" rIns="0" tIns="0" bIns="0">
-            <a:spAutoFit/>
-          </a:bodyPr>
-          <a:lstStyle/>
-          <a:p>
-            <a:pPr algn="l">
-              <a:spcAft>
-                <a:spcPts val="200"/>
-              </a:spcAft>
-            </a:pPr>
-            <a:r>
-              <a:rPr sz="3400" b="1" i="0">
-                <a:solidFill>
-                  <a:srgbClr val="047857"/>
-                </a:solidFill>
-                <a:latin typeface="Arial"/>
-              </a:rPr>
-              <a:t>0,996</a:t>
-            </a:r>
-          </a:p>
-          <a:p>
-            <a:pPr algn="l">
-              <a:spcAft>
-                <a:spcPts val="0"/>
-              </a:spcAft>
-            </a:pPr>
-            <a:r>
-              <a:rPr sz="1200" b="0" i="0">
-                <a:solidFill>
-                  <a:srgbClr val="475569"/>
-                </a:solidFill>
-                <a:latin typeface="Arial"/>
-              </a:rPr>
-              <a:t>R² інтенсивності зриву λ на тестовій вибірці</a:t>
-            </a:r>
-          </a:p>
-        </p:txBody>
-      </p:sp>
-      <p:sp>
-        <p:nvSpPr>
-          <p:cNvPr id="19" name="TextBox 18"/>
-          <p:cNvSpPr txBox="1"/>
-          <p:nvPr/>
-        </p:nvSpPr>
-        <p:spPr>
-          <a:xfrm>
-            <a:off x="8138160" y="4206240"/>
-            <a:ext cx="3566160" cy="1188720"/>
-          </a:xfrm>
-          <a:prstGeom prst="rect">
-            <a:avLst/>
-          </a:prstGeom>
-          <a:noFill/>
-        </p:spPr>
-        <p:txBody>
-          <a:bodyPr wrap="square" anchor="t" lIns="0" rIns="0" tIns="0" bIns="0">
-            <a:spAutoFit/>
-          </a:bodyPr>
-          <a:lstStyle/>
-          <a:p>
-            <a:pPr algn="l">
-              <a:spcAft>
-                <a:spcPts val="200"/>
-              </a:spcAft>
-            </a:pPr>
-            <a:r>
-              <a:rPr sz="3400" b="1" i="0">
-                <a:solidFill>
-                  <a:srgbClr val="0E7490"/>
-                </a:solidFill>
-                <a:latin typeface="Arial"/>
-              </a:rPr>
-              <a:t>0,6 мс</a:t>
-            </a:r>
-          </a:p>
-          <a:p>
-            <a:pPr algn="l">
-              <a:spcAft>
-                <a:spcPts val="0"/>
-              </a:spcAft>
-            </a:pPr>
-            <a:r>
-              <a:rPr sz="1200" b="0" i="0">
-                <a:solidFill>
-                  <a:srgbClr val="475569"/>
-                </a:solidFill>
-                <a:latin typeface="Arial"/>
-              </a:rPr>
-              <a:t>тривалість кроку інференсу (numpy)</a:t>
-            </a:r>
-          </a:p>
-        </p:txBody>
-      </p:sp>
-      <p:sp>
-        <p:nvSpPr>
-          <p:cNvPr id="20" name="TextBox 19"/>
-          <p:cNvSpPr txBox="1"/>
-          <p:nvPr/>
-        </p:nvSpPr>
-        <p:spPr>
-          <a:xfrm>
-            <a:off x="548640" y="6035040"/>
-            <a:ext cx="10972800" cy="365760"/>
-          </a:xfrm>
-          <a:prstGeom prst="rect">
-            <a:avLst/>
-          </a:prstGeom>
-          <a:noFill/>
-        </p:spPr>
-        <p:txBody>
-          <a:bodyPr wrap="square" anchor="t" lIns="0" rIns="0" tIns="0" bIns="0">
-            <a:spAutoFit/>
-          </a:bodyPr>
-          <a:lstStyle/>
-          <a:p>
-            <a:pPr algn="l">
-              <a:spcAft>
-                <a:spcPts val="0"/>
-              </a:spcAft>
-            </a:pPr>
-            <a:r>
-              <a:rPr sz="1000" b="0" i="0">
-                <a:solidFill>
-                  <a:srgbClr val="94A3B8"/>
-                </a:solidFill>
-                <a:latin typeface="Arial"/>
-              </a:rPr>
-              <a:t>200 тестових розрядів; порівняння архітектур: GRU ≈ LSTM ≈ TCN &gt; модель без пам'яті; обрано GRU (стан O(1) у потоці)</a:t>
-            </a:r>
-          </a:p>
-        </p:txBody>
-      </p:sp>
-    </p:spTree>
-  </p:cSld>
-  <p:clrMapOvr>
-    <a:masterClrMapping/>
-  </p:clrMapOvr>
-</p:sld>
-</file>
-
 <file path=ppt/slides/slide13.xml><?xml version="1.0" encoding="utf-8"?>
 <p:sld xmlns:a="http://schemas.openxmlformats.org/drawingml/2006/main" xmlns:p="http://schemas.openxmlformats.org/presentationml/2006/main" xmlns:r="http://schemas.openxmlformats.org/officeDocument/2006/relationships">
   <p:cSld>
@@ -7169,7 +7118,7 @@
                 </a:solidFill>
                 <a:latin typeface="Arial"/>
               </a:rPr>
-              <a:t>12 Інтенсивність зриву як сигнал тривоги</a:t>
+              <a:t>11 Нейромережа ImpactNet: атрибуція механізмів зриву</a:t>
             </a:r>
           </a:p>
         </p:txBody>
@@ -7209,6 +7158,1737 @@
                 <a:latin typeface="Arial"/>
               </a:rPr>
               <a:t>13</a:t>
+            </a:r>
+          </a:p>
+        </p:txBody>
+      </p:sp>
+      <p:sp>
+        <p:nvSpPr>
+          <p:cNvPr id="4" name="Rounded Rectangle 3"/>
+          <p:cNvSpPr/>
+          <p:nvPr/>
+        </p:nvSpPr>
+        <p:spPr>
+          <a:xfrm>
+            <a:off x="548640" y="1325880"/>
+            <a:ext cx="1554480" cy="1737360"/>
+          </a:xfrm>
+          <a:prstGeom prst="roundRect">
+            <a:avLst>
+              <a:gd name="adj" fmla="val 4000"/>
+            </a:avLst>
+          </a:prstGeom>
+          <a:solidFill>
+            <a:srgbClr val="FFFFFF"/>
+          </a:solidFill>
+          <a:ln w="19050">
+            <a:solidFill>
+              <a:srgbClr val="0E7490"/>
+            </a:solidFill>
+          </a:ln>
+          <a:effectLst/>
+        </p:spPr>
+        <p:style>
+          <a:lnRef idx="1">
+            <a:schemeClr val="accent1"/>
+          </a:lnRef>
+          <a:fillRef idx="3">
+            <a:schemeClr val="accent1"/>
+          </a:fillRef>
+          <a:effectRef idx="2">
+            <a:schemeClr val="accent1"/>
+          </a:effectRef>
+          <a:fontRef idx="minor">
+            <a:schemeClr val="lt1"/>
+          </a:fontRef>
+        </p:style>
+        <p:txBody>
+          <a:bodyPr rtlCol="0" anchor="ctr"/>
+          <a:lstStyle/>
+          <a:p>
+            <a:pPr algn="ctr"/>
+          </a:p>
+        </p:txBody>
+      </p:sp>
+      <p:sp>
+        <p:nvSpPr>
+          <p:cNvPr id="5" name="TextBox 4"/>
+          <p:cNvSpPr txBox="1"/>
+          <p:nvPr/>
+        </p:nvSpPr>
+        <p:spPr>
+          <a:xfrm>
+            <a:off x="621792" y="1371600"/>
+            <a:ext cx="1408176" cy="1645920"/>
+          </a:xfrm>
+          <a:prstGeom prst="rect">
+            <a:avLst/>
+          </a:prstGeom>
+          <a:noFill/>
+        </p:spPr>
+        <p:txBody>
+          <a:bodyPr wrap="square" anchor="ctr" lIns="0" rIns="0" tIns="0" bIns="0">
+            <a:spAutoFit/>
+          </a:bodyPr>
+          <a:lstStyle/>
+          <a:p>
+            <a:pPr algn="ctr">
+              <a:spcAft>
+                <a:spcPts val="500"/>
+              </a:spcAft>
+            </a:pPr>
+            <a:r>
+              <a:rPr sz="1400" b="1" i="0">
+                <a:solidFill>
+                  <a:srgbClr val="0E7490"/>
+                </a:solidFill>
+                <a:latin typeface="Arial"/>
+              </a:rPr>
+              <a:t>218 входів</a:t>
+            </a:r>
+          </a:p>
+          <a:p>
+            <a:pPr algn="ctr">
+              <a:spcAft>
+                <a:spcPts val="0"/>
+              </a:spcAft>
+            </a:pPr>
+            <a:r>
+              <a:rPr sz="1100" b="0" i="0">
+                <a:solidFill>
+                  <a:srgbClr val="475569"/>
+                </a:solidFill>
+                <a:latin typeface="Arial"/>
+              </a:rPr>
+              <a:t>100 діагностик,
+маски відмов,
+18 фізичних величин</a:t>
+            </a:r>
+          </a:p>
+        </p:txBody>
+      </p:sp>
+      <p:sp>
+        <p:nvSpPr>
+          <p:cNvPr id="6" name="Right Arrow 5"/>
+          <p:cNvSpPr/>
+          <p:nvPr/>
+        </p:nvSpPr>
+        <p:spPr>
+          <a:xfrm>
+            <a:off x="2130552" y="2057400"/>
+            <a:ext cx="219456" cy="256032"/>
+          </a:xfrm>
+          <a:prstGeom prst="rightArrow">
+            <a:avLst/>
+          </a:prstGeom>
+          <a:solidFill>
+            <a:srgbClr val="94A3B8"/>
+          </a:solidFill>
+          <a:ln>
+            <a:noFill/>
+          </a:ln>
+          <a:effectLst/>
+        </p:spPr>
+        <p:style>
+          <a:lnRef idx="1">
+            <a:schemeClr val="accent1"/>
+          </a:lnRef>
+          <a:fillRef idx="3">
+            <a:schemeClr val="accent1"/>
+          </a:fillRef>
+          <a:effectRef idx="2">
+            <a:schemeClr val="accent1"/>
+          </a:effectRef>
+          <a:fontRef idx="minor">
+            <a:schemeClr val="lt1"/>
+          </a:fontRef>
+        </p:style>
+        <p:txBody>
+          <a:bodyPr rtlCol="0" anchor="ctr"/>
+          <a:lstStyle/>
+          <a:p>
+            <a:pPr algn="ctr"/>
+          </a:p>
+        </p:txBody>
+      </p:sp>
+      <p:sp>
+        <p:nvSpPr>
+          <p:cNvPr id="7" name="Rounded Rectangle 6"/>
+          <p:cNvSpPr/>
+          <p:nvPr/>
+        </p:nvSpPr>
+        <p:spPr>
+          <a:xfrm>
+            <a:off x="2377440" y="1325880"/>
+            <a:ext cx="1554480" cy="1737360"/>
+          </a:xfrm>
+          <a:prstGeom prst="roundRect">
+            <a:avLst>
+              <a:gd name="adj" fmla="val 4000"/>
+            </a:avLst>
+          </a:prstGeom>
+          <a:solidFill>
+            <a:srgbClr val="FFFFFF"/>
+          </a:solidFill>
+          <a:ln w="19050">
+            <a:solidFill>
+              <a:srgbClr val="1D4ED8"/>
+            </a:solidFill>
+          </a:ln>
+          <a:effectLst/>
+        </p:spPr>
+        <p:style>
+          <a:lnRef idx="1">
+            <a:schemeClr val="accent1"/>
+          </a:lnRef>
+          <a:fillRef idx="3">
+            <a:schemeClr val="accent1"/>
+          </a:fillRef>
+          <a:effectRef idx="2">
+            <a:schemeClr val="accent1"/>
+          </a:effectRef>
+          <a:fontRef idx="minor">
+            <a:schemeClr val="lt1"/>
+          </a:fontRef>
+        </p:style>
+        <p:txBody>
+          <a:bodyPr rtlCol="0" anchor="ctr"/>
+          <a:lstStyle/>
+          <a:p>
+            <a:pPr algn="ctr"/>
+          </a:p>
+        </p:txBody>
+      </p:sp>
+      <p:sp>
+        <p:nvSpPr>
+          <p:cNvPr id="8" name="TextBox 7"/>
+          <p:cNvSpPr txBox="1"/>
+          <p:nvPr/>
+        </p:nvSpPr>
+        <p:spPr>
+          <a:xfrm>
+            <a:off x="2450592" y="1371600"/>
+            <a:ext cx="1408176" cy="1645920"/>
+          </a:xfrm>
+          <a:prstGeom prst="rect">
+            <a:avLst/>
+          </a:prstGeom>
+          <a:noFill/>
+        </p:spPr>
+        <p:txBody>
+          <a:bodyPr wrap="square" anchor="ctr" lIns="0" rIns="0" tIns="0" bIns="0">
+            <a:spAutoFit/>
+          </a:bodyPr>
+          <a:lstStyle/>
+          <a:p>
+            <a:pPr algn="ctr">
+              <a:spcAft>
+                <a:spcPts val="500"/>
+              </a:spcAft>
+            </a:pPr>
+            <a:r>
+              <a:rPr sz="1400" b="1" i="0">
+                <a:solidFill>
+                  <a:srgbClr val="1D4ED8"/>
+                </a:solidFill>
+                <a:latin typeface="Arial"/>
+              </a:rPr>
+              <a:t>Згортки</a:t>
+            </a:r>
+          </a:p>
+          <a:p>
+            <a:pPr algn="ctr">
+              <a:spcAft>
+                <a:spcPts val="0"/>
+              </a:spcAft>
+            </a:pPr>
+            <a:r>
+              <a:rPr sz="1100" b="0" i="0">
+                <a:solidFill>
+                  <a:srgbClr val="475569"/>
+                </a:solidFill>
+                <a:latin typeface="Arial"/>
+              </a:rPr>
+              <a:t>причинні,
+вікно 155 мс</a:t>
+            </a:r>
+          </a:p>
+        </p:txBody>
+      </p:sp>
+      <p:sp>
+        <p:nvSpPr>
+          <p:cNvPr id="9" name="Right Arrow 8"/>
+          <p:cNvSpPr/>
+          <p:nvPr/>
+        </p:nvSpPr>
+        <p:spPr>
+          <a:xfrm>
+            <a:off x="3959352" y="2057400"/>
+            <a:ext cx="219456" cy="256032"/>
+          </a:xfrm>
+          <a:prstGeom prst="rightArrow">
+            <a:avLst/>
+          </a:prstGeom>
+          <a:solidFill>
+            <a:srgbClr val="94A3B8"/>
+          </a:solidFill>
+          <a:ln>
+            <a:noFill/>
+          </a:ln>
+          <a:effectLst/>
+        </p:spPr>
+        <p:style>
+          <a:lnRef idx="1">
+            <a:schemeClr val="accent1"/>
+          </a:lnRef>
+          <a:fillRef idx="3">
+            <a:schemeClr val="accent1"/>
+          </a:fillRef>
+          <a:effectRef idx="2">
+            <a:schemeClr val="accent1"/>
+          </a:effectRef>
+          <a:fontRef idx="minor">
+            <a:schemeClr val="lt1"/>
+          </a:fontRef>
+        </p:style>
+        <p:txBody>
+          <a:bodyPr rtlCol="0" anchor="ctr"/>
+          <a:lstStyle/>
+          <a:p>
+            <a:pPr algn="ctr"/>
+          </a:p>
+        </p:txBody>
+      </p:sp>
+      <p:sp>
+        <p:nvSpPr>
+          <p:cNvPr id="10" name="Rounded Rectangle 9"/>
+          <p:cNvSpPr/>
+          <p:nvPr/>
+        </p:nvSpPr>
+        <p:spPr>
+          <a:xfrm>
+            <a:off x="4206240" y="1325880"/>
+            <a:ext cx="1554480" cy="1737360"/>
+          </a:xfrm>
+          <a:prstGeom prst="roundRect">
+            <a:avLst>
+              <a:gd name="adj" fmla="val 4000"/>
+            </a:avLst>
+          </a:prstGeom>
+          <a:solidFill>
+            <a:srgbClr val="FFFFFF"/>
+          </a:solidFill>
+          <a:ln w="19050">
+            <a:solidFill>
+              <a:srgbClr val="6D28D9"/>
+            </a:solidFill>
+          </a:ln>
+          <a:effectLst/>
+        </p:spPr>
+        <p:style>
+          <a:lnRef idx="1">
+            <a:schemeClr val="accent1"/>
+          </a:lnRef>
+          <a:fillRef idx="3">
+            <a:schemeClr val="accent1"/>
+          </a:fillRef>
+          <a:effectRef idx="2">
+            <a:schemeClr val="accent1"/>
+          </a:effectRef>
+          <a:fontRef idx="minor">
+            <a:schemeClr val="lt1"/>
+          </a:fontRef>
+        </p:style>
+        <p:txBody>
+          <a:bodyPr rtlCol="0" anchor="ctr"/>
+          <a:lstStyle/>
+          <a:p>
+            <a:pPr algn="ctr"/>
+          </a:p>
+        </p:txBody>
+      </p:sp>
+      <p:sp>
+        <p:nvSpPr>
+          <p:cNvPr id="11" name="TextBox 10"/>
+          <p:cNvSpPr txBox="1"/>
+          <p:nvPr/>
+        </p:nvSpPr>
+        <p:spPr>
+          <a:xfrm>
+            <a:off x="4279392" y="1371600"/>
+            <a:ext cx="1408176" cy="1645920"/>
+          </a:xfrm>
+          <a:prstGeom prst="rect">
+            <a:avLst/>
+          </a:prstGeom>
+          <a:noFill/>
+        </p:spPr>
+        <p:txBody>
+          <a:bodyPr wrap="square" anchor="ctr" lIns="0" rIns="0" tIns="0" bIns="0">
+            <a:spAutoFit/>
+          </a:bodyPr>
+          <a:lstStyle/>
+          <a:p>
+            <a:pPr algn="ctr">
+              <a:spcAft>
+                <a:spcPts val="500"/>
+              </a:spcAft>
+            </a:pPr>
+            <a:r>
+              <a:rPr sz="1400" b="1" i="0">
+                <a:solidFill>
+                  <a:srgbClr val="6D28D9"/>
+                </a:solidFill>
+                <a:latin typeface="Arial"/>
+              </a:rPr>
+              <a:t>GRU (128)</a:t>
+            </a:r>
+          </a:p>
+          <a:p>
+            <a:pPr algn="ctr">
+              <a:spcAft>
+                <a:spcPts val="0"/>
+              </a:spcAft>
+            </a:pPr>
+            <a:r>
+              <a:rPr sz="1100" b="0" i="0">
+                <a:solidFill>
+                  <a:srgbClr val="475569"/>
+                </a:solidFill>
+                <a:latin typeface="Arial"/>
+              </a:rPr>
+              <a:t>пам'ять
+розряду</a:t>
+            </a:r>
+          </a:p>
+        </p:txBody>
+      </p:sp>
+      <p:sp>
+        <p:nvSpPr>
+          <p:cNvPr id="12" name="Right Arrow 11"/>
+          <p:cNvSpPr/>
+          <p:nvPr/>
+        </p:nvSpPr>
+        <p:spPr>
+          <a:xfrm>
+            <a:off x="5788152" y="2057400"/>
+            <a:ext cx="219456" cy="256032"/>
+          </a:xfrm>
+          <a:prstGeom prst="rightArrow">
+            <a:avLst/>
+          </a:prstGeom>
+          <a:solidFill>
+            <a:srgbClr val="94A3B8"/>
+          </a:solidFill>
+          <a:ln>
+            <a:noFill/>
+          </a:ln>
+          <a:effectLst/>
+        </p:spPr>
+        <p:style>
+          <a:lnRef idx="1">
+            <a:schemeClr val="accent1"/>
+          </a:lnRef>
+          <a:fillRef idx="3">
+            <a:schemeClr val="accent1"/>
+          </a:fillRef>
+          <a:effectRef idx="2">
+            <a:schemeClr val="accent1"/>
+          </a:effectRef>
+          <a:fontRef idx="minor">
+            <a:schemeClr val="lt1"/>
+          </a:fontRef>
+        </p:style>
+        <p:txBody>
+          <a:bodyPr rtlCol="0" anchor="ctr"/>
+          <a:lstStyle/>
+          <a:p>
+            <a:pPr algn="ctr"/>
+          </a:p>
+        </p:txBody>
+      </p:sp>
+      <p:sp>
+        <p:nvSpPr>
+          <p:cNvPr id="13" name="Rounded Rectangle 12"/>
+          <p:cNvSpPr/>
+          <p:nvPr/>
+        </p:nvSpPr>
+        <p:spPr>
+          <a:xfrm>
+            <a:off x="6035040" y="1325880"/>
+            <a:ext cx="1554480" cy="1737360"/>
+          </a:xfrm>
+          <a:prstGeom prst="roundRect">
+            <a:avLst>
+              <a:gd name="adj" fmla="val 4000"/>
+            </a:avLst>
+          </a:prstGeom>
+          <a:solidFill>
+            <a:srgbClr val="FFFFFF"/>
+          </a:solidFill>
+          <a:ln w="19050">
+            <a:solidFill>
+              <a:srgbClr val="C2410C"/>
+            </a:solidFill>
+          </a:ln>
+          <a:effectLst/>
+        </p:spPr>
+        <p:style>
+          <a:lnRef idx="1">
+            <a:schemeClr val="accent1"/>
+          </a:lnRef>
+          <a:fillRef idx="3">
+            <a:schemeClr val="accent1"/>
+          </a:fillRef>
+          <a:effectRef idx="2">
+            <a:schemeClr val="accent1"/>
+          </a:effectRef>
+          <a:fontRef idx="minor">
+            <a:schemeClr val="lt1"/>
+          </a:fontRef>
+        </p:style>
+        <p:txBody>
+          <a:bodyPr rtlCol="0" anchor="ctr"/>
+          <a:lstStyle/>
+          <a:p>
+            <a:pPr algn="ctr"/>
+          </a:p>
+        </p:txBody>
+      </p:sp>
+      <p:sp>
+        <p:nvSpPr>
+          <p:cNvPr id="14" name="TextBox 13"/>
+          <p:cNvSpPr txBox="1"/>
+          <p:nvPr/>
+        </p:nvSpPr>
+        <p:spPr>
+          <a:xfrm>
+            <a:off x="6108192" y="1371600"/>
+            <a:ext cx="1408176" cy="1645920"/>
+          </a:xfrm>
+          <a:prstGeom prst="rect">
+            <a:avLst/>
+          </a:prstGeom>
+          <a:noFill/>
+        </p:spPr>
+        <p:txBody>
+          <a:bodyPr wrap="square" anchor="ctr" lIns="0" rIns="0" tIns="0" bIns="0">
+            <a:spAutoFit/>
+          </a:bodyPr>
+          <a:lstStyle/>
+          <a:p>
+            <a:pPr algn="ctr">
+              <a:spcAft>
+                <a:spcPts val="500"/>
+              </a:spcAft>
+            </a:pPr>
+            <a:r>
+              <a:rPr sz="1400" b="1" i="0">
+                <a:solidFill>
+                  <a:srgbClr val="C2410C"/>
+                </a:solidFill>
+                <a:latin typeface="Arial"/>
+              </a:rPr>
+              <a:t>5 нейронів</a:t>
+            </a:r>
+          </a:p>
+          <a:p>
+            <a:pPr algn="ctr">
+              <a:spcAft>
+                <a:spcPts val="0"/>
+              </a:spcAft>
+            </a:pPr>
+            <a:r>
+              <a:rPr sz="1100" b="0" i="0">
+                <a:solidFill>
+                  <a:srgbClr val="475569"/>
+                </a:solidFill>
+                <a:latin typeface="Arial"/>
+              </a:rPr>
+              <a:t>фізичне
+апріорі</a:t>
+            </a:r>
+          </a:p>
+        </p:txBody>
+      </p:sp>
+      <p:sp>
+        <p:nvSpPr>
+          <p:cNvPr id="15" name="TextBox 14"/>
+          <p:cNvSpPr txBox="1"/>
+          <p:nvPr/>
+        </p:nvSpPr>
+        <p:spPr>
+          <a:xfrm>
+            <a:off x="548640" y="3200400"/>
+            <a:ext cx="7040880" cy="365760"/>
+          </a:xfrm>
+          <a:prstGeom prst="rect">
+            <a:avLst/>
+          </a:prstGeom>
+          <a:noFill/>
+        </p:spPr>
+        <p:txBody>
+          <a:bodyPr wrap="square" anchor="t" lIns="0" rIns="0" tIns="0" bIns="0">
+            <a:spAutoFit/>
+          </a:bodyPr>
+          <a:lstStyle/>
+          <a:p>
+            <a:pPr algn="l">
+              <a:spcAft>
+                <a:spcPts val="0"/>
+              </a:spcAft>
+            </a:pPr>
+            <a:r>
+              <a:rPr sz="1100" b="0" i="0">
+                <a:solidFill>
+                  <a:srgbClr val="475569"/>
+                </a:solidFill>
+                <a:latin typeface="Arial"/>
+              </a:rPr>
+              <a:t>Рисунок 6 – Структурна схема ImpactNet</a:t>
+            </a:r>
+          </a:p>
+        </p:txBody>
+      </p:sp>
+      <p:sp>
+        <p:nvSpPr>
+          <p:cNvPr id="16" name="TextBox 15"/>
+          <p:cNvSpPr txBox="1"/>
+          <p:nvPr/>
+        </p:nvSpPr>
+        <p:spPr>
+          <a:xfrm>
+            <a:off x="548640" y="3703320"/>
+            <a:ext cx="7040880" cy="2194560"/>
+          </a:xfrm>
+          <a:prstGeom prst="rect">
+            <a:avLst/>
+          </a:prstGeom>
+          <a:noFill/>
+        </p:spPr>
+        <p:txBody>
+          <a:bodyPr wrap="square" anchor="t" lIns="0" rIns="0" tIns="0" bIns="0">
+            <a:spAutoFit/>
+          </a:bodyPr>
+          <a:lstStyle/>
+          <a:p>
+            <a:pPr algn="l">
+              <a:spcAft>
+                <a:spcPts val="800"/>
+              </a:spcAft>
+            </a:pPr>
+            <a:r>
+              <a:rPr sz="1400" b="1" i="0">
+                <a:solidFill>
+                  <a:srgbClr val="0F172A"/>
+                </a:solidFill>
+                <a:latin typeface="Arial"/>
+              </a:rPr>
+              <a:t>Виходи визначаються однозначно через внески механізмів:</a:t>
+            </a:r>
+          </a:p>
+          <a:p>
+            <a:pPr algn="l">
+              <a:spcAft>
+                <a:spcPts val="600"/>
+              </a:spcAft>
+            </a:pPr>
+            <a:r>
+              <a:rPr sz="1400" b="0" i="0">
+                <a:solidFill>
+                  <a:srgbClr val="0F172A"/>
+                </a:solidFill>
+                <a:latin typeface="Arial"/>
+              </a:rPr>
+              <a:t>частка механізму = 100·Cₖ / ΣC, де Cₖ = −ln(1 − rₖᵖ); сума часток дорівнює 100 %</a:t>
+            </a:r>
+          </a:p>
+          <a:p>
+            <a:pPr algn="l">
+              <a:spcAft>
+                <a:spcPts val="600"/>
+              </a:spcAft>
+            </a:pPr>
+            <a:r>
+              <a:rPr sz="1400" b="0" i="0">
+                <a:solidFill>
+                  <a:srgbClr val="0F172A"/>
+                </a:solidFill>
+                <a:latin typeface="Arial"/>
+              </a:rPr>
+              <a:t>λ = 1 − exp(−ΣC) — тотожна формулі симулятора</a:t>
+            </a:r>
+          </a:p>
+          <a:p>
+            <a:pPr algn="l">
+              <a:spcAft>
+                <a:spcPts val="0"/>
+              </a:spcAft>
+            </a:pPr>
+            <a:r>
+              <a:rPr sz="1400" b="0" i="0">
+                <a:solidFill>
+                  <a:srgbClr val="0F172A"/>
+                </a:solidFill>
+                <a:latin typeface="Arial"/>
+              </a:rPr>
+              <a:t>P(зрив за час h) = 1 − exp(−λh)</a:t>
+            </a:r>
+          </a:p>
+        </p:txBody>
+      </p:sp>
+      <p:sp>
+        <p:nvSpPr>
+          <p:cNvPr id="17" name="TextBox 16"/>
+          <p:cNvSpPr txBox="1"/>
+          <p:nvPr/>
+        </p:nvSpPr>
+        <p:spPr>
+          <a:xfrm>
+            <a:off x="8138160" y="1371600"/>
+            <a:ext cx="3566160" cy="1188720"/>
+          </a:xfrm>
+          <a:prstGeom prst="rect">
+            <a:avLst/>
+          </a:prstGeom>
+          <a:noFill/>
+        </p:spPr>
+        <p:txBody>
+          <a:bodyPr wrap="square" anchor="t" lIns="0" rIns="0" tIns="0" bIns="0">
+            <a:spAutoFit/>
+          </a:bodyPr>
+          <a:lstStyle/>
+          <a:p>
+            <a:pPr algn="l">
+              <a:spcAft>
+                <a:spcPts val="200"/>
+              </a:spcAft>
+            </a:pPr>
+            <a:r>
+              <a:rPr sz="3400" b="1" i="0">
+                <a:solidFill>
+                  <a:srgbClr val="6D28D9"/>
+                </a:solidFill>
+                <a:latin typeface="Arial"/>
+              </a:rPr>
+              <a:t>49 з 49</a:t>
+            </a:r>
+          </a:p>
+          <a:p>
+            <a:pPr algn="l">
+              <a:spcAft>
+                <a:spcPts val="0"/>
+              </a:spcAft>
+            </a:pPr>
+            <a:r>
+              <a:rPr sz="1200" b="0" i="0">
+                <a:solidFill>
+                  <a:srgbClr val="475569"/>
+                </a:solidFill>
+                <a:latin typeface="Arial"/>
+              </a:rPr>
+              <a:t>механізм зриву у момент запуску (20 Грінвальд, 15 кінк, 14 радіація)</a:t>
+            </a:r>
+          </a:p>
+        </p:txBody>
+      </p:sp>
+      <p:sp>
+        <p:nvSpPr>
+          <p:cNvPr id="18" name="TextBox 17"/>
+          <p:cNvSpPr txBox="1"/>
+          <p:nvPr/>
+        </p:nvSpPr>
+        <p:spPr>
+          <a:xfrm>
+            <a:off x="8138160" y="2788920"/>
+            <a:ext cx="3566160" cy="1188720"/>
+          </a:xfrm>
+          <a:prstGeom prst="rect">
+            <a:avLst/>
+          </a:prstGeom>
+          <a:noFill/>
+        </p:spPr>
+        <p:txBody>
+          <a:bodyPr wrap="square" anchor="t" lIns="0" rIns="0" tIns="0" bIns="0">
+            <a:spAutoFit/>
+          </a:bodyPr>
+          <a:lstStyle/>
+          <a:p>
+            <a:pPr algn="l">
+              <a:spcAft>
+                <a:spcPts val="200"/>
+              </a:spcAft>
+            </a:pPr>
+            <a:r>
+              <a:rPr sz="3400" b="1" i="0">
+                <a:solidFill>
+                  <a:srgbClr val="047857"/>
+                </a:solidFill>
+                <a:latin typeface="Arial"/>
+              </a:rPr>
+              <a:t>0,996</a:t>
+            </a:r>
+          </a:p>
+          <a:p>
+            <a:pPr algn="l">
+              <a:spcAft>
+                <a:spcPts val="0"/>
+              </a:spcAft>
+            </a:pPr>
+            <a:r>
+              <a:rPr sz="1200" b="0" i="0">
+                <a:solidFill>
+                  <a:srgbClr val="475569"/>
+                </a:solidFill>
+                <a:latin typeface="Arial"/>
+              </a:rPr>
+              <a:t>R² інтенсивності зриву λ на тестовій вибірці</a:t>
+            </a:r>
+          </a:p>
+        </p:txBody>
+      </p:sp>
+      <p:sp>
+        <p:nvSpPr>
+          <p:cNvPr id="19" name="TextBox 18"/>
+          <p:cNvSpPr txBox="1"/>
+          <p:nvPr/>
+        </p:nvSpPr>
+        <p:spPr>
+          <a:xfrm>
+            <a:off x="8138160" y="4206240"/>
+            <a:ext cx="3566160" cy="1188720"/>
+          </a:xfrm>
+          <a:prstGeom prst="rect">
+            <a:avLst/>
+          </a:prstGeom>
+          <a:noFill/>
+        </p:spPr>
+        <p:txBody>
+          <a:bodyPr wrap="square" anchor="t" lIns="0" rIns="0" tIns="0" bIns="0">
+            <a:spAutoFit/>
+          </a:bodyPr>
+          <a:lstStyle/>
+          <a:p>
+            <a:pPr algn="l">
+              <a:spcAft>
+                <a:spcPts val="200"/>
+              </a:spcAft>
+            </a:pPr>
+            <a:r>
+              <a:rPr sz="3400" b="1" i="0">
+                <a:solidFill>
+                  <a:srgbClr val="0E7490"/>
+                </a:solidFill>
+                <a:latin typeface="Arial"/>
+              </a:rPr>
+              <a:t>0,6 мс</a:t>
+            </a:r>
+          </a:p>
+          <a:p>
+            <a:pPr algn="l">
+              <a:spcAft>
+                <a:spcPts val="0"/>
+              </a:spcAft>
+            </a:pPr>
+            <a:r>
+              <a:rPr sz="1200" b="0" i="0">
+                <a:solidFill>
+                  <a:srgbClr val="475569"/>
+                </a:solidFill>
+                <a:latin typeface="Arial"/>
+              </a:rPr>
+              <a:t>тривалість кроку інференсу (numpy)</a:t>
+            </a:r>
+          </a:p>
+        </p:txBody>
+      </p:sp>
+      <p:sp>
+        <p:nvSpPr>
+          <p:cNvPr id="20" name="TextBox 19"/>
+          <p:cNvSpPr txBox="1"/>
+          <p:nvPr/>
+        </p:nvSpPr>
+        <p:spPr>
+          <a:xfrm>
+            <a:off x="548640" y="6035040"/>
+            <a:ext cx="10972800" cy="365760"/>
+          </a:xfrm>
+          <a:prstGeom prst="rect">
+            <a:avLst/>
+          </a:prstGeom>
+          <a:noFill/>
+        </p:spPr>
+        <p:txBody>
+          <a:bodyPr wrap="square" anchor="t" lIns="0" rIns="0" tIns="0" bIns="0">
+            <a:spAutoFit/>
+          </a:bodyPr>
+          <a:lstStyle/>
+          <a:p>
+            <a:pPr algn="l">
+              <a:spcAft>
+                <a:spcPts val="0"/>
+              </a:spcAft>
+            </a:pPr>
+            <a:r>
+              <a:rPr sz="1000" b="0" i="0">
+                <a:solidFill>
+                  <a:srgbClr val="94A3B8"/>
+                </a:solidFill>
+                <a:latin typeface="Arial"/>
+              </a:rPr>
+              <a:t>200 тестових розрядів; порівняння архітектур: GRU ≈ LSTM ≈ TCN &gt; модель без пам'яті; обрано GRU (стан O(1) у потоці)</a:t>
+            </a:r>
+          </a:p>
+        </p:txBody>
+      </p:sp>
+    </p:spTree>
+  </p:cSld>
+  <p:clrMapOvr>
+    <a:masterClrMapping/>
+  </p:clrMapOvr>
+</p:sld>
+</file>
+
+<file path=ppt/slides/slide14.xml><?xml version="1.0" encoding="utf-8"?>
+<p:sld xmlns:a="http://schemas.openxmlformats.org/drawingml/2006/main" xmlns:p="http://schemas.openxmlformats.org/presentationml/2006/main" xmlns:r="http://schemas.openxmlformats.org/officeDocument/2006/relationships">
+  <p:cSld>
+    <p:bg>
+      <p:bgPr>
+        <a:solidFill>
+          <a:srgbClr val="FFFFFF"/>
+        </a:solidFill>
+        <a:effectLst/>
+      </p:bgPr>
+    </p:bg>
+    <p:spTree>
+      <p:nvGrpSpPr>
+        <p:cNvPr id="1" name=""/>
+        <p:cNvGrpSpPr/>
+        <p:nvPr/>
+      </p:nvGrpSpPr>
+      <p:grpSpPr/>
+      <p:sp>
+        <p:nvSpPr>
+          <p:cNvPr id="2" name="TextBox 1"/>
+          <p:cNvSpPr txBox="1"/>
+          <p:nvPr/>
+        </p:nvSpPr>
+        <p:spPr>
+          <a:xfrm>
+            <a:off x="548640" y="411480"/>
+            <a:ext cx="11064240" cy="640080"/>
+          </a:xfrm>
+          <a:prstGeom prst="rect">
+            <a:avLst/>
+          </a:prstGeom>
+          <a:noFill/>
+        </p:spPr>
+        <p:txBody>
+          <a:bodyPr wrap="square" anchor="t" lIns="0" rIns="0" tIns="0" bIns="0">
+            <a:spAutoFit/>
+          </a:bodyPr>
+          <a:lstStyle/>
+          <a:p>
+            <a:pPr algn="l">
+              <a:spcAft>
+                <a:spcPts val="0"/>
+              </a:spcAft>
+            </a:pPr>
+            <a:r>
+              <a:rPr sz="2600" b="1" i="0">
+                <a:solidFill>
+                  <a:srgbClr val="0F172A"/>
+                </a:solidFill>
+                <a:latin typeface="Arial"/>
+              </a:rPr>
+              <a:t>11.1 Що всередині ImpactNet: фізика плюс поправка мережі</a:t>
+            </a:r>
+          </a:p>
+        </p:txBody>
+      </p:sp>
+      <p:sp>
+        <p:nvSpPr>
+          <p:cNvPr id="3" name="TextBox 2"/>
+          <p:cNvSpPr txBox="1"/>
+          <p:nvPr/>
+        </p:nvSpPr>
+        <p:spPr>
+          <a:xfrm>
+            <a:off x="11247120" y="6446520"/>
+            <a:ext cx="457200" cy="274320"/>
+          </a:xfrm>
+          <a:prstGeom prst="rect">
+            <a:avLst/>
+          </a:prstGeom>
+          <a:noFill/>
+        </p:spPr>
+        <p:txBody>
+          <a:bodyPr wrap="square" anchor="t" lIns="0" rIns="0" tIns="0" bIns="0">
+            <a:spAutoFit/>
+          </a:bodyPr>
+          <a:lstStyle/>
+          <a:p>
+            <a:pPr algn="r">
+              <a:spcAft>
+                <a:spcPts val="0"/>
+              </a:spcAft>
+            </a:pPr>
+            <a:r>
+              <a:rPr sz="1000" b="0" i="0">
+                <a:solidFill>
+                  <a:srgbClr val="94A3B8"/>
+                </a:solidFill>
+                <a:latin typeface="Arial"/>
+              </a:rPr>
+              <a:t>14</a:t>
+            </a:r>
+          </a:p>
+        </p:txBody>
+      </p:sp>
+      <p:sp>
+        <p:nvSpPr>
+          <p:cNvPr id="4" name="Rectangle 3"/>
+          <p:cNvSpPr/>
+          <p:nvPr/>
+        </p:nvSpPr>
+        <p:spPr>
+          <a:xfrm>
+            <a:off x="548640" y="1280160"/>
+            <a:ext cx="6035040" cy="2331720"/>
+          </a:xfrm>
+          <a:prstGeom prst="rect">
+            <a:avLst/>
+          </a:prstGeom>
+          <a:solidFill>
+            <a:srgbClr val="F8FAFC"/>
+          </a:solidFill>
+          <a:ln w="12700">
+            <a:solidFill>
+              <a:srgbClr val="E2E8F0"/>
+            </a:solidFill>
+          </a:ln>
+          <a:effectLst/>
+        </p:spPr>
+        <p:style>
+          <a:lnRef idx="1">
+            <a:schemeClr val="accent1"/>
+          </a:lnRef>
+          <a:fillRef idx="3">
+            <a:schemeClr val="accent1"/>
+          </a:fillRef>
+          <a:effectRef idx="2">
+            <a:schemeClr val="accent1"/>
+          </a:effectRef>
+          <a:fontRef idx="minor">
+            <a:schemeClr val="lt1"/>
+          </a:fontRef>
+        </p:style>
+        <p:txBody>
+          <a:bodyPr rtlCol="0" anchor="ctr"/>
+          <a:lstStyle/>
+          <a:p>
+            <a:pPr algn="ctr"/>
+          </a:p>
+        </p:txBody>
+      </p:sp>
+      <p:sp>
+        <p:nvSpPr>
+          <p:cNvPr id="5" name="TextBox 4"/>
+          <p:cNvSpPr txBox="1"/>
+          <p:nvPr/>
+        </p:nvSpPr>
+        <p:spPr>
+          <a:xfrm>
+            <a:off x="731520" y="1417320"/>
+            <a:ext cx="5760720" cy="2194560"/>
+          </a:xfrm>
+          <a:prstGeom prst="rect">
+            <a:avLst/>
+          </a:prstGeom>
+          <a:noFill/>
+        </p:spPr>
+        <p:txBody>
+          <a:bodyPr wrap="square" anchor="t" lIns="0" rIns="0" tIns="0" bIns="0">
+            <a:spAutoFit/>
+          </a:bodyPr>
+          <a:lstStyle/>
+          <a:p>
+            <a:pPr algn="l">
+              <a:spcAft>
+                <a:spcPts val="400"/>
+              </a:spcAft>
+            </a:pPr>
+            <a:r>
+              <a:rPr sz="1200" b="1" i="0">
+                <a:solidFill>
+                  <a:srgbClr val="475569"/>
+                </a:solidFill>
+                <a:latin typeface="Arial"/>
+              </a:rPr>
+              <a:t>Вихідний нейрон k</a:t>
+            </a:r>
+          </a:p>
+          <a:p>
+            <a:pPr algn="l">
+              <a:spcAft>
+                <a:spcPts val="600"/>
+              </a:spcAft>
+            </a:pPr>
+            <a:r>
+              <a:rPr sz="1700" b="1" i="0">
+                <a:solidFill>
+                  <a:srgbClr val="0F172A"/>
+                </a:solidFill>
+                <a:latin typeface="Arial"/>
+              </a:rPr>
+              <a:t>rₖ = σ( (xₖ − cₖ) / wₖ  +  δₖ(hₜ) )</a:t>
+            </a:r>
+          </a:p>
+          <a:p>
+            <a:pPr algn="l">
+              <a:spcAft>
+                <a:spcPts val="200"/>
+              </a:spcAft>
+            </a:pPr>
+            <a:r>
+              <a:rPr sz="1200" b="0" i="0">
+                <a:solidFill>
+                  <a:srgbClr val="0F172A"/>
+                </a:solidFill>
+                <a:latin typeface="Arial"/>
+              </a:rPr>
+              <a:t>xₖ — фізична змінна: f_GW, 2,2/q95, P_rad/P_in, βN/2,8</a:t>
+            </a:r>
+          </a:p>
+          <a:p>
+            <a:pPr algn="l">
+              <a:spcAft>
+                <a:spcPts val="200"/>
+              </a:spcAft>
+            </a:pPr>
+            <a:r>
+              <a:rPr sz="1200" b="0" i="0">
+                <a:solidFill>
+                  <a:srgbClr val="0F172A"/>
+                </a:solidFill>
+                <a:latin typeface="Arial"/>
+              </a:rPr>
+              <a:t>cₖ, wₖ — поріг і ширина межі, стартують з формули симулятора: 1,00/0,08; 0,90/0,05; 0,80/0,08; 0,85/0,06</a:t>
+            </a:r>
+          </a:p>
+          <a:p>
+            <a:pPr algn="l">
+              <a:spcAft>
+                <a:spcPts val="200"/>
+              </a:spcAft>
+            </a:pPr>
+            <a:r>
+              <a:rPr sz="1200" b="0" i="0">
+                <a:solidFill>
+                  <a:srgbClr val="0F172A"/>
+                </a:solidFill>
+                <a:latin typeface="Arial"/>
+              </a:rPr>
+              <a:t>δₖ(hₜ) — поправка від пам'яті мережі; на старті нуль, тобто ненавчена мережа = чиста фізика</a:t>
+            </a:r>
+          </a:p>
+          <a:p>
+            <a:pPr algn="l">
+              <a:spcAft>
+                <a:spcPts val="0"/>
+              </a:spcAft>
+            </a:pPr>
+            <a:r>
+              <a:rPr sz="1200" b="0" i="0">
+                <a:solidFill>
+                  <a:srgbClr val="0F172A"/>
+                </a:solidFill>
+                <a:latin typeface="Arial"/>
+              </a:rPr>
+              <a:t>5-й нейрон «інші» (замкнена мода тощо) — лише з пам'яті мережі</a:t>
+            </a:r>
+          </a:p>
+        </p:txBody>
+      </p:sp>
+      <p:sp>
+        <p:nvSpPr>
+          <p:cNvPr id="6" name="TextBox 5"/>
+          <p:cNvSpPr txBox="1"/>
+          <p:nvPr/>
+        </p:nvSpPr>
+        <p:spPr>
+          <a:xfrm>
+            <a:off x="548640" y="3794760"/>
+            <a:ext cx="6035040" cy="1463040"/>
+          </a:xfrm>
+          <a:prstGeom prst="rect">
+            <a:avLst/>
+          </a:prstGeom>
+          <a:noFill/>
+        </p:spPr>
+        <p:txBody>
+          <a:bodyPr wrap="square" anchor="t" lIns="0" rIns="0" tIns="0" bIns="0">
+            <a:spAutoFit/>
+          </a:bodyPr>
+          <a:lstStyle/>
+          <a:p>
+            <a:pPr algn="l">
+              <a:spcAft>
+                <a:spcPts val="400"/>
+              </a:spcAft>
+            </a:pPr>
+            <a:r>
+              <a:rPr sz="1200" b="1" i="0">
+                <a:solidFill>
+                  <a:srgbClr val="475569"/>
+                </a:solidFill>
+                <a:latin typeface="Arial"/>
+              </a:rPr>
+              <a:t>З тих самих п'яти чисел</a:t>
+            </a:r>
+          </a:p>
+          <a:p>
+            <a:pPr algn="l">
+              <a:spcAft>
+                <a:spcPts val="200"/>
+              </a:spcAft>
+            </a:pPr>
+            <a:r>
+              <a:rPr sz="1400" b="0" i="0">
+                <a:solidFill>
+                  <a:srgbClr val="0F172A"/>
+                </a:solidFill>
+                <a:latin typeface="Arial"/>
+              </a:rPr>
+              <a:t>Cₖ = −ln(1 − rₖᵖ),   частка = Cₖ / ΣC</a:t>
+            </a:r>
+          </a:p>
+          <a:p>
+            <a:pPr algn="l">
+              <a:spcAft>
+                <a:spcPts val="400"/>
+              </a:spcAft>
+            </a:pPr>
+            <a:r>
+              <a:rPr sz="1400" b="0" i="0">
+                <a:solidFill>
+                  <a:srgbClr val="0F172A"/>
+                </a:solidFill>
+                <a:latin typeface="Arial"/>
+              </a:rPr>
+              <a:t>λ = 1 − e^(−ΣC),   P(зрив за час h) = 1 − e^(−λh)</a:t>
+            </a:r>
+          </a:p>
+          <a:p>
+            <a:pPr algn="l">
+              <a:spcAft>
+                <a:spcPts val="0"/>
+              </a:spcAft>
+            </a:pPr>
+            <a:r>
+              <a:rPr sz="1200" b="0" i="0">
+                <a:solidFill>
+                  <a:srgbClr val="475569"/>
+                </a:solidFill>
+                <a:latin typeface="Arial"/>
+              </a:rPr>
+              <a:t>p = 3 для меж, як у симуляторі; сума часток рівно 100 %</a:t>
+            </a:r>
+          </a:p>
+        </p:txBody>
+      </p:sp>
+      <p:sp>
+        <p:nvSpPr>
+          <p:cNvPr id="7" name="TextBox 6"/>
+          <p:cNvSpPr txBox="1"/>
+          <p:nvPr/>
+        </p:nvSpPr>
+        <p:spPr>
+          <a:xfrm>
+            <a:off x="6949440" y="1234440"/>
+            <a:ext cx="4709160" cy="320040"/>
+          </a:xfrm>
+          <a:prstGeom prst="rect">
+            <a:avLst/>
+          </a:prstGeom>
+          <a:noFill/>
+        </p:spPr>
+        <p:txBody>
+          <a:bodyPr wrap="square" anchor="t" lIns="0" rIns="0" tIns="0" bIns="0">
+            <a:spAutoFit/>
+          </a:bodyPr>
+          <a:lstStyle/>
+          <a:p>
+            <a:pPr algn="l">
+              <a:spcAft>
+                <a:spcPts val="0"/>
+              </a:spcAft>
+            </a:pPr>
+            <a:r>
+              <a:rPr sz="1100" b="0" i="0">
+                <a:solidFill>
+                  <a:srgbClr val="475569"/>
+                </a:solidFill>
+                <a:latin typeface="Arial"/>
+              </a:rPr>
+              <a:t>Таблиця 6 – Входи і навчання</a:t>
+            </a:r>
+          </a:p>
+        </p:txBody>
+      </p:sp>
+      <p:graphicFrame>
+        <p:nvGraphicFramePr>
+          <p:cNvPr id="8" name="Table 7"/>
+          <p:cNvGraphicFramePr>
+            <a:graphicFrameLocks noGrp="1"/>
+          </p:cNvGraphicFramePr>
+          <p:nvPr/>
+        </p:nvGraphicFramePr>
+        <p:xfrm>
+          <a:off x="6949440" y="1600200"/>
+          <a:ext cx="4709160" cy="4059936"/>
+        </p:xfrm>
+        <a:graphic>
+          <a:graphicData uri="http://schemas.openxmlformats.org/drawingml/2006/table">
+            <a:tbl>
+              <a:tblPr firstRow="0" bandRow="0">
+                <a:tableStyleId>{5C22544A-7EE6-4342-B048-85BDC9FD1C3A}</a:tableStyleId>
+              </a:tblPr>
+              <a:tblGrid>
+                <a:gridCol w="1508760"/>
+                <a:gridCol w="3200400"/>
+              </a:tblGrid>
+              <a:tr h="676656">
+                <a:tc>
+                  <a:txBody>
+                    <a:bodyPr wrap="square"/>
+                    <a:lstStyle/>
+                    <a:p>
+                      <a:pPr algn="l"/>
+                      <a:r>
+                        <a:rPr sz="1100" b="1">
+                          <a:solidFill>
+                            <a:srgbClr val="475569"/>
+                          </a:solidFill>
+                          <a:latin typeface="Arial"/>
+                        </a:rPr>
+                        <a:t>складова</a:t>
+                      </a:r>
+                    </a:p>
+                  </a:txBody>
+                  <a:tcPr marL="91440" marR="91440" marT="27432" marB="27432" anchor="ctr">
+                    <a:solidFill>
+                      <a:srgbClr val="F1F5F9"/>
+                    </a:solidFill>
+                  </a:tcPr>
+                </a:tc>
+                <a:tc>
+                  <a:txBody>
+                    <a:bodyPr wrap="square"/>
+                    <a:lstStyle/>
+                    <a:p>
+                      <a:pPr algn="ctr"/>
+                      <a:r>
+                        <a:rPr sz="1100" b="1">
+                          <a:solidFill>
+                            <a:srgbClr val="475569"/>
+                          </a:solidFill>
+                          <a:latin typeface="Arial"/>
+                        </a:rPr>
+                        <a:t>що закладено</a:t>
+                      </a:r>
+                    </a:p>
+                  </a:txBody>
+                  <a:tcPr marL="91440" marR="91440" marT="27432" marB="27432" anchor="ctr">
+                    <a:solidFill>
+                      <a:srgbClr val="F1F5F9"/>
+                    </a:solidFill>
+                  </a:tcPr>
+                </a:tc>
+              </a:tr>
+              <a:tr h="676656">
+                <a:tc>
+                  <a:txBody>
+                    <a:bodyPr wrap="square"/>
+                    <a:lstStyle/>
+                    <a:p>
+                      <a:pPr algn="l"/>
+                      <a:r>
+                        <a:rPr sz="1100" b="1">
+                          <a:solidFill>
+                            <a:srgbClr val="0F172A"/>
+                          </a:solidFill>
+                          <a:latin typeface="Arial"/>
+                        </a:rPr>
+                        <a:t>100 каналів</a:t>
+                      </a:r>
+                    </a:p>
+                  </a:txBody>
+                  <a:tcPr marL="91440" marR="91440" marT="27432" marB="27432" anchor="ctr">
+                    <a:solidFill>
+                      <a:srgbClr val="FFFFFF"/>
+                    </a:solidFill>
+                  </a:tcPr>
+                </a:tc>
+                <a:tc>
+                  <a:txBody>
+                    <a:bodyPr wrap="square"/>
+                    <a:lstStyle/>
+                    <a:p>
+                      <a:pPr algn="ctr"/>
+                      <a:r>
+                        <a:rPr sz="1100" b="0">
+                          <a:solidFill>
+                            <a:srgbClr val="0F172A"/>
+                          </a:solidFill>
+                          <a:latin typeface="Arial"/>
+                        </a:rPr>
+                        <a:t>asinh-стиснення хвостів, медіана та IQR з навчальної вибірки</a:t>
+                      </a:r>
+                    </a:p>
+                  </a:txBody>
+                  <a:tcPr marL="91440" marR="91440" marT="27432" marB="27432" anchor="ctr">
+                    <a:solidFill>
+                      <a:srgbClr val="FFFFFF"/>
+                    </a:solidFill>
+                  </a:tcPr>
+                </a:tc>
+              </a:tr>
+              <a:tr h="676656">
+                <a:tc>
+                  <a:txBody>
+                    <a:bodyPr wrap="square"/>
+                    <a:lstStyle/>
+                    <a:p>
+                      <a:pPr algn="l"/>
+                      <a:r>
+                        <a:rPr sz="1100" b="1">
+                          <a:solidFill>
+                            <a:srgbClr val="0F172A"/>
+                          </a:solidFill>
+                          <a:latin typeface="Arial"/>
+                        </a:rPr>
+                        <a:t>100 масок відмов</a:t>
+                      </a:r>
+                    </a:p>
+                  </a:txBody>
+                  <a:tcPr marL="91440" marR="91440" marT="27432" marB="27432" anchor="ctr">
+                    <a:solidFill>
+                      <a:srgbClr val="FFFFFF"/>
+                    </a:solidFill>
+                  </a:tcPr>
+                </a:tc>
+                <a:tc>
+                  <a:txBody>
+                    <a:bodyPr wrap="square"/>
+                    <a:lstStyle/>
+                    <a:p>
+                      <a:pPr algn="ctr"/>
+                      <a:r>
+                        <a:rPr sz="1100" b="0">
+                          <a:solidFill>
+                            <a:srgbClr val="0F172A"/>
+                          </a:solidFill>
+                          <a:latin typeface="Arial"/>
+                        </a:rPr>
+                        <a:t>1, якщо прилад не дав даних: мережа знає, чому не вірити</a:t>
+                      </a:r>
+                    </a:p>
+                  </a:txBody>
+                  <a:tcPr marL="91440" marR="91440" marT="27432" marB="27432" anchor="ctr">
+                    <a:solidFill>
+                      <a:srgbClr val="FFFFFF"/>
+                    </a:solidFill>
+                  </a:tcPr>
+                </a:tc>
+              </a:tr>
+              <a:tr h="676656">
+                <a:tc>
+                  <a:txBody>
+                    <a:bodyPr wrap="square"/>
+                    <a:lstStyle/>
+                    <a:p>
+                      <a:pPr algn="l"/>
+                      <a:r>
+                        <a:rPr sz="1100" b="1">
+                          <a:solidFill>
+                            <a:srgbClr val="0F172A"/>
+                          </a:solidFill>
+                          <a:latin typeface="Arial"/>
+                        </a:rPr>
+                        <a:t>18 фізичних величин</a:t>
+                      </a:r>
+                    </a:p>
+                  </a:txBody>
+                  <a:tcPr marL="91440" marR="91440" marT="27432" marB="27432" anchor="ctr">
+                    <a:solidFill>
+                      <a:srgbClr val="FFFFFF"/>
+                    </a:solidFill>
+                  </a:tcPr>
+                </a:tc>
+                <a:tc>
+                  <a:txBody>
+                    <a:bodyPr wrap="square"/>
+                    <a:lstStyle/>
+                    <a:p>
+                      <a:pPr algn="ctr"/>
+                      <a:r>
+                        <a:rPr sz="1100" b="0">
+                          <a:solidFill>
+                            <a:srgbClr val="0F172A"/>
+                          </a:solidFill>
+                          <a:latin typeface="Arial"/>
+                        </a:rPr>
+                        <a:t>f_GW, q95, P_rad/P_in, βN, W, dW/dt, τE, H98, запас до L-H, Te ядра …; причинно з каналів</a:t>
+                      </a:r>
+                    </a:p>
+                  </a:txBody>
+                  <a:tcPr marL="91440" marR="91440" marT="27432" marB="27432" anchor="ctr">
+                    <a:solidFill>
+                      <a:srgbClr val="FFFFFF"/>
+                    </a:solidFill>
+                  </a:tcPr>
+                </a:tc>
+              </a:tr>
+              <a:tr h="676656">
+                <a:tc>
+                  <a:txBody>
+                    <a:bodyPr wrap="square"/>
+                    <a:lstStyle/>
+                    <a:p>
+                      <a:pPr algn="l"/>
+                      <a:r>
+                        <a:rPr sz="1100" b="1">
+                          <a:solidFill>
+                            <a:srgbClr val="0F172A"/>
+                          </a:solidFill>
+                          <a:latin typeface="Arial"/>
+                        </a:rPr>
+                        <a:t>пам'ять</a:t>
+                      </a:r>
+                    </a:p>
+                  </a:txBody>
+                  <a:tcPr marL="91440" marR="91440" marT="27432" marB="27432" anchor="ctr">
+                    <a:solidFill>
+                      <a:srgbClr val="FFFFFF"/>
+                    </a:solidFill>
+                  </a:tcPr>
+                </a:tc>
+                <a:tc>
+                  <a:txBody>
+                    <a:bodyPr wrap="square"/>
+                    <a:lstStyle/>
+                    <a:p>
+                      <a:pPr algn="ctr"/>
+                      <a:r>
+                        <a:rPr sz="1100" b="0">
+                          <a:solidFill>
+                            <a:srgbClr val="0F172A"/>
+                          </a:solidFill>
+                          <a:latin typeface="Arial"/>
+                        </a:rPr>
+                        <a:t>згортки 155 мс (швидкі передвісники) + GRU(128): стан O(1) у потоці</a:t>
+                      </a:r>
+                    </a:p>
+                  </a:txBody>
+                  <a:tcPr marL="91440" marR="91440" marT="27432" marB="27432" anchor="ctr">
+                    <a:solidFill>
+                      <a:srgbClr val="FFFFFF"/>
+                    </a:solidFill>
+                  </a:tcPr>
+                </a:tc>
+              </a:tr>
+              <a:tr h="676656">
+                <a:tc>
+                  <a:txBody>
+                    <a:bodyPr wrap="square"/>
+                    <a:lstStyle/>
+                    <a:p>
+                      <a:pPr algn="l"/>
+                      <a:r>
+                        <a:rPr sz="1100" b="1">
+                          <a:solidFill>
+                            <a:srgbClr val="0F172A"/>
+                          </a:solidFill>
+                          <a:latin typeface="Arial"/>
+                        </a:rPr>
+                        <a:t>навчання</a:t>
+                      </a:r>
+                    </a:p>
+                  </a:txBody>
+                  <a:tcPr marL="91440" marR="91440" marT="27432" marB="27432" anchor="ctr">
+                    <a:solidFill>
+                      <a:srgbClr val="FFFFFF"/>
+                    </a:solidFill>
+                  </a:tcPr>
+                </a:tc>
+                <a:tc>
+                  <a:txBody>
+                    <a:bodyPr wrap="square"/>
+                    <a:lstStyle/>
+                    <a:p>
+                      <a:pPr algn="ctr"/>
+                      <a:r>
+                        <a:rPr sz="1100" b="0">
+                          <a:solidFill>
+                            <a:srgbClr val="0F172A"/>
+                          </a:solidFill>
+                          <a:latin typeface="Arial"/>
+                        </a:rPr>
+                        <a:t>ризики з прихованого стану симулятора — лише як ціль, ніколи як вхід; або лише моменти зривів</a:t>
+                      </a:r>
+                    </a:p>
+                  </a:txBody>
+                  <a:tcPr marL="91440" marR="91440" marT="27432" marB="27432" anchor="ctr">
+                    <a:solidFill>
+                      <a:srgbClr val="FFFFFF"/>
+                    </a:solidFill>
+                  </a:tcPr>
+                </a:tc>
+              </a:tr>
+            </a:tbl>
+          </a:graphicData>
+        </a:graphic>
+      </p:graphicFrame>
+      <p:sp>
+        <p:nvSpPr>
+          <p:cNvPr id="9" name="TextBox 8"/>
+          <p:cNvSpPr txBox="1"/>
+          <p:nvPr/>
+        </p:nvSpPr>
+        <p:spPr>
+          <a:xfrm>
+            <a:off x="548640" y="5486400"/>
+            <a:ext cx="6035040" cy="365760"/>
+          </a:xfrm>
+          <a:prstGeom prst="rect">
+            <a:avLst/>
+          </a:prstGeom>
+          <a:noFill/>
+        </p:spPr>
+        <p:txBody>
+          <a:bodyPr wrap="square" anchor="t" lIns="0" rIns="0" tIns="0" bIns="0">
+            <a:spAutoFit/>
+          </a:bodyPr>
+          <a:lstStyle/>
+          <a:p>
+            <a:pPr algn="l">
+              <a:spcAft>
+                <a:spcPts val="0"/>
+              </a:spcAft>
+            </a:pPr>
+            <a:r>
+              <a:rPr sz="1000" b="0" i="0">
+                <a:solidFill>
+                  <a:srgbClr val="94A3B8"/>
+                </a:solidFill>
+                <a:latin typeface="Arial"/>
+              </a:rPr>
+              <a:t>Без фізичного апріорі, лише за моментами зривів: механізм визначено в 41 з 49; з апріорі — 49 з 49</a:t>
+            </a:r>
+          </a:p>
+        </p:txBody>
+      </p:sp>
+    </p:spTree>
+  </p:cSld>
+  <p:clrMapOvr>
+    <a:masterClrMapping/>
+  </p:clrMapOvr>
+</p:sld>
+</file>
+
+<file path=ppt/slides/slide15.xml><?xml version="1.0" encoding="utf-8"?>
+<p:sld xmlns:a="http://schemas.openxmlformats.org/drawingml/2006/main" xmlns:p="http://schemas.openxmlformats.org/presentationml/2006/main" xmlns:r="http://schemas.openxmlformats.org/officeDocument/2006/relationships">
+  <p:cSld>
+    <p:bg>
+      <p:bgPr>
+        <a:solidFill>
+          <a:srgbClr val="FFFFFF"/>
+        </a:solidFill>
+        <a:effectLst/>
+      </p:bgPr>
+    </p:bg>
+    <p:spTree>
+      <p:nvGrpSpPr>
+        <p:cNvPr id="1" name=""/>
+        <p:cNvGrpSpPr/>
+        <p:nvPr/>
+      </p:nvGrpSpPr>
+      <p:grpSpPr/>
+      <p:sp>
+        <p:nvSpPr>
+          <p:cNvPr id="2" name="TextBox 1"/>
+          <p:cNvSpPr txBox="1"/>
+          <p:nvPr/>
+        </p:nvSpPr>
+        <p:spPr>
+          <a:xfrm>
+            <a:off x="548640" y="411480"/>
+            <a:ext cx="11064240" cy="640080"/>
+          </a:xfrm>
+          <a:prstGeom prst="rect">
+            <a:avLst/>
+          </a:prstGeom>
+          <a:noFill/>
+        </p:spPr>
+        <p:txBody>
+          <a:bodyPr wrap="square" anchor="t" lIns="0" rIns="0" tIns="0" bIns="0">
+            <a:spAutoFit/>
+          </a:bodyPr>
+          <a:lstStyle/>
+          <a:p>
+            <a:pPr algn="l">
+              <a:spcAft>
+                <a:spcPts val="0"/>
+              </a:spcAft>
+            </a:pPr>
+            <a:r>
+              <a:rPr sz="2600" b="1" i="0">
+                <a:solidFill>
+                  <a:srgbClr val="0F172A"/>
+                </a:solidFill>
+                <a:latin typeface="Arial"/>
+              </a:rPr>
+              <a:t>12 Інтенсивність зриву як сигнал тривоги</a:t>
+            </a:r>
+          </a:p>
+        </p:txBody>
+      </p:sp>
+      <p:sp>
+        <p:nvSpPr>
+          <p:cNvPr id="3" name="TextBox 2"/>
+          <p:cNvSpPr txBox="1"/>
+          <p:nvPr/>
+        </p:nvSpPr>
+        <p:spPr>
+          <a:xfrm>
+            <a:off x="11247120" y="6446520"/>
+            <a:ext cx="457200" cy="274320"/>
+          </a:xfrm>
+          <a:prstGeom prst="rect">
+            <a:avLst/>
+          </a:prstGeom>
+          <a:noFill/>
+        </p:spPr>
+        <p:txBody>
+          <a:bodyPr wrap="square" anchor="t" lIns="0" rIns="0" tIns="0" bIns="0">
+            <a:spAutoFit/>
+          </a:bodyPr>
+          <a:lstStyle/>
+          <a:p>
+            <a:pPr algn="r">
+              <a:spcAft>
+                <a:spcPts val="0"/>
+              </a:spcAft>
+            </a:pPr>
+            <a:r>
+              <a:rPr sz="1000" b="0" i="0">
+                <a:solidFill>
+                  <a:srgbClr val="94A3B8"/>
+                </a:solidFill>
+                <a:latin typeface="Arial"/>
+              </a:rPr>
+              <a:t>15</a:t>
             </a:r>
           </a:p>
         </p:txBody>
@@ -7383,7 +9063,7 @@
                 </a:solidFill>
                 <a:latin typeface="Arial"/>
               </a:rPr>
-              <a:t>Таблиця 5 – Атрибуція механізмів залежно від способу навчання</a:t>
+              <a:t>Таблиця 7 – Атрибуція механізмів залежно від способу навчання</a:t>
             </a:r>
           </a:p>
         </p:txBody>
@@ -7707,836 +9387,6 @@
 </p:sld>
 </file>
 
-<file path=ppt/slides/slide14.xml><?xml version="1.0" encoding="utf-8"?>
-<p:sld xmlns:a="http://schemas.openxmlformats.org/drawingml/2006/main" xmlns:p="http://schemas.openxmlformats.org/presentationml/2006/main" xmlns:r="http://schemas.openxmlformats.org/officeDocument/2006/relationships">
-  <p:cSld>
-    <p:bg>
-      <p:bgPr>
-        <a:solidFill>
-          <a:srgbClr val="FFFFFF"/>
-        </a:solidFill>
-        <a:effectLst/>
-      </p:bgPr>
-    </p:bg>
-    <p:spTree>
-      <p:nvGrpSpPr>
-        <p:cNvPr id="1" name=""/>
-        <p:cNvGrpSpPr/>
-        <p:nvPr/>
-      </p:nvGrpSpPr>
-      <p:grpSpPr/>
-      <p:sp>
-        <p:nvSpPr>
-          <p:cNvPr id="2" name="TextBox 1"/>
-          <p:cNvSpPr txBox="1"/>
-          <p:nvPr/>
-        </p:nvSpPr>
-        <p:spPr>
-          <a:xfrm>
-            <a:off x="548640" y="411480"/>
-            <a:ext cx="11064240" cy="640080"/>
-          </a:xfrm>
-          <a:prstGeom prst="rect">
-            <a:avLst/>
-          </a:prstGeom>
-          <a:noFill/>
-        </p:spPr>
-        <p:txBody>
-          <a:bodyPr wrap="square" anchor="t" lIns="0" rIns="0" tIns="0" bIns="0">
-            <a:spAutoFit/>
-          </a:bodyPr>
-          <a:lstStyle/>
-          <a:p>
-            <a:pPr algn="l">
-              <a:spcAft>
-                <a:spcPts val="0"/>
-              </a:spcAft>
-            </a:pPr>
-            <a:r>
-              <a:rPr sz="2600" b="1" i="0">
-                <a:solidFill>
-                  <a:srgbClr val="0F172A"/>
-                </a:solidFill>
-                <a:latin typeface="Arial"/>
-              </a:rPr>
-              <a:t>13 Замкнений контур керування в симуляторі</a:t>
-            </a:r>
-          </a:p>
-        </p:txBody>
-      </p:sp>
-      <p:sp>
-        <p:nvSpPr>
-          <p:cNvPr id="3" name="TextBox 2"/>
-          <p:cNvSpPr txBox="1"/>
-          <p:nvPr/>
-        </p:nvSpPr>
-        <p:spPr>
-          <a:xfrm>
-            <a:off x="11247120" y="6446520"/>
-            <a:ext cx="457200" cy="274320"/>
-          </a:xfrm>
-          <a:prstGeom prst="rect">
-            <a:avLst/>
-          </a:prstGeom>
-          <a:noFill/>
-        </p:spPr>
-        <p:txBody>
-          <a:bodyPr wrap="square" anchor="t" lIns="0" rIns="0" tIns="0" bIns="0">
-            <a:spAutoFit/>
-          </a:bodyPr>
-          <a:lstStyle/>
-          <a:p>
-            <a:pPr algn="r">
-              <a:spcAft>
-                <a:spcPts val="0"/>
-              </a:spcAft>
-            </a:pPr>
-            <a:r>
-              <a:rPr sz="1000" b="0" i="0">
-                <a:solidFill>
-                  <a:srgbClr val="94A3B8"/>
-                </a:solidFill>
-                <a:latin typeface="Arial"/>
-              </a:rPr>
-              <a:t>14</a:t>
-            </a:r>
-          </a:p>
-        </p:txBody>
-      </p:sp>
-      <p:sp>
-        <p:nvSpPr>
-          <p:cNvPr id="4" name="Rectangle 3"/>
-          <p:cNvSpPr/>
-          <p:nvPr/>
-        </p:nvSpPr>
-        <p:spPr>
-          <a:xfrm>
-            <a:off x="521207" y="1252728"/>
-            <a:ext cx="6089903" cy="3038605"/>
-          </a:xfrm>
-          <a:prstGeom prst="rect">
-            <a:avLst/>
-          </a:prstGeom>
-          <a:noFill/>
-          <a:ln w="12700">
-            <a:solidFill>
-              <a:srgbClr val="E2E8F0"/>
-            </a:solidFill>
-          </a:ln>
-          <a:effectLst/>
-        </p:spPr>
-        <p:style>
-          <a:lnRef idx="1">
-            <a:schemeClr val="accent1"/>
-          </a:lnRef>
-          <a:fillRef idx="3">
-            <a:schemeClr val="accent1"/>
-          </a:fillRef>
-          <a:effectRef idx="2">
-            <a:schemeClr val="accent1"/>
-          </a:effectRef>
-          <a:fontRef idx="minor">
-            <a:schemeClr val="lt1"/>
-          </a:fontRef>
-        </p:style>
-        <p:txBody>
-          <a:bodyPr rtlCol="0" anchor="ctr"/>
-          <a:lstStyle/>
-          <a:p>
-            <a:pPr algn="ctr"/>
-          </a:p>
-        </p:txBody>
-      </p:sp>
-      <p:pic>
-        <p:nvPicPr>
-          <p:cNvPr id="5" name="Picture 4" descr="card_sim_impact_auc.png"/>
-          <p:cNvPicPr>
-            <a:picLocks noChangeAspect="1"/>
-          </p:cNvPicPr>
-          <p:nvPr/>
-        </p:nvPicPr>
-        <p:blipFill>
-          <a:blip r:embed="rId3"/>
-          <a:stretch>
-            <a:fillRect/>
-          </a:stretch>
-        </p:blipFill>
-        <p:spPr>
-          <a:xfrm>
-            <a:off x="548640" y="1280160"/>
-            <a:ext cx="6035040" cy="2983741"/>
-          </a:xfrm>
-          <a:prstGeom prst="rect">
-            <a:avLst/>
-          </a:prstGeom>
-        </p:spPr>
-      </p:pic>
-      <p:sp>
-        <p:nvSpPr>
-          <p:cNvPr id="6" name="TextBox 5"/>
-          <p:cNvSpPr txBox="1"/>
-          <p:nvPr/>
-        </p:nvSpPr>
-        <p:spPr>
-          <a:xfrm>
-            <a:off x="548640" y="4309621"/>
-            <a:ext cx="6035040" cy="365760"/>
-          </a:xfrm>
-          <a:prstGeom prst="rect">
-            <a:avLst/>
-          </a:prstGeom>
-          <a:noFill/>
-        </p:spPr>
-        <p:txBody>
-          <a:bodyPr wrap="square" anchor="t" lIns="0" rIns="0" tIns="0" bIns="0">
-            <a:spAutoFit/>
-          </a:bodyPr>
-          <a:lstStyle/>
-          <a:p>
-            <a:pPr algn="l">
-              <a:spcAft>
-                <a:spcPts val="0"/>
-              </a:spcAft>
-            </a:pPr>
-            <a:r>
-              <a:rPr sz="1100" b="0" i="0">
-                <a:solidFill>
-                  <a:srgbClr val="475569"/>
-                </a:solidFill>
-                <a:latin typeface="Arial"/>
-              </a:rPr>
-              <a:t>Рисунок 8 – Атрибуція механізмів зриву в симуляторі fusion-sim, пробний прогін 50 розрядів: 10 з 12 (поле «поріг» замінено на ROC AUC цього прогону)</a:t>
-            </a:r>
-          </a:p>
-        </p:txBody>
-      </p:sp>
-      <p:sp>
-        <p:nvSpPr>
-          <p:cNvPr id="7" name="Rectangle 6"/>
-          <p:cNvSpPr/>
-          <p:nvPr/>
-        </p:nvSpPr>
-        <p:spPr>
-          <a:xfrm>
-            <a:off x="548640" y="5041141"/>
-            <a:ext cx="6035040" cy="914400"/>
-          </a:xfrm>
-          <a:prstGeom prst="rect">
-            <a:avLst/>
-          </a:prstGeom>
-          <a:solidFill>
-            <a:srgbClr val="F8FAFC"/>
-          </a:solidFill>
-          <a:ln w="12700">
-            <a:solidFill>
-              <a:srgbClr val="E2E8F0"/>
-            </a:solidFill>
-          </a:ln>
-          <a:effectLst/>
-        </p:spPr>
-        <p:style>
-          <a:lnRef idx="1">
-            <a:schemeClr val="accent1"/>
-          </a:lnRef>
-          <a:fillRef idx="3">
-            <a:schemeClr val="accent1"/>
-          </a:fillRef>
-          <a:effectRef idx="2">
-            <a:schemeClr val="accent1"/>
-          </a:effectRef>
-          <a:fontRef idx="minor">
-            <a:schemeClr val="lt1"/>
-          </a:fontRef>
-        </p:style>
-        <p:txBody>
-          <a:bodyPr rtlCol="0" anchor="ctr"/>
-          <a:lstStyle/>
-          <a:p>
-            <a:pPr algn="ctr"/>
-          </a:p>
-        </p:txBody>
-      </p:sp>
-      <p:sp>
-        <p:nvSpPr>
-          <p:cNvPr id="8" name="TextBox 7"/>
-          <p:cNvSpPr txBox="1"/>
-          <p:nvPr/>
-        </p:nvSpPr>
-        <p:spPr>
-          <a:xfrm>
-            <a:off x="685800" y="5132581"/>
-            <a:ext cx="5760720" cy="731520"/>
-          </a:xfrm>
-          <a:prstGeom prst="rect">
-            <a:avLst/>
-          </a:prstGeom>
-          <a:noFill/>
-        </p:spPr>
-        <p:txBody>
-          <a:bodyPr wrap="square" anchor="t" lIns="0" rIns="0" tIns="0" bIns="0">
-            <a:spAutoFit/>
-          </a:bodyPr>
-          <a:lstStyle/>
-          <a:p>
-            <a:pPr algn="l">
-              <a:spcAft>
-                <a:spcPts val="0"/>
-              </a:spcAft>
-            </a:pPr>
-            <a:r>
-              <a:rPr sz="1100" b="1" i="0">
-                <a:solidFill>
-                  <a:srgbClr val="0E7490"/>
-                </a:solidFill>
-                <a:latin typeface="Arial"/>
-              </a:rPr>
-              <a:t>Чому ROC AUC замість порогу. </a:t>
-            </a:r>
-            <a:r>
-              <a:rPr sz="1100" b="0" i="0">
-                <a:solidFill>
-                  <a:srgbClr val="475569"/>
-                </a:solidFill>
-                <a:latin typeface="Arial"/>
-              </a:rPr>
-              <a:t>Поріг спрацювання неінформативний: його підбирає засіб оцінки під бюджет хибних тривог, а на 50 розрядах поріг задає один тихий розряд (див. розділ 5); тому наведено ROC AUC.</a:t>
-            </a:r>
-          </a:p>
-        </p:txBody>
-      </p:sp>
-      <p:sp>
-        <p:nvSpPr>
-          <p:cNvPr id="9" name="TextBox 8"/>
-          <p:cNvSpPr txBox="1"/>
-          <p:nvPr/>
-        </p:nvSpPr>
-        <p:spPr>
-          <a:xfrm>
-            <a:off x="6949440" y="1371600"/>
-            <a:ext cx="4663440" cy="1188720"/>
-          </a:xfrm>
-          <a:prstGeom prst="rect">
-            <a:avLst/>
-          </a:prstGeom>
-          <a:noFill/>
-        </p:spPr>
-        <p:txBody>
-          <a:bodyPr wrap="square" anchor="t" lIns="0" rIns="0" tIns="0" bIns="0">
-            <a:spAutoFit/>
-          </a:bodyPr>
-          <a:lstStyle/>
-          <a:p>
-            <a:pPr algn="l">
-              <a:spcAft>
-                <a:spcPts val="200"/>
-              </a:spcAft>
-            </a:pPr>
-            <a:r>
-              <a:rPr sz="4600" b="1" i="0">
-                <a:solidFill>
-                  <a:srgbClr val="C2410C"/>
-                </a:solidFill>
-                <a:latin typeface="Arial"/>
-              </a:rPr>
-              <a:t>11 → 5</a:t>
-            </a:r>
-          </a:p>
-          <a:p>
-            <a:pPr algn="l">
-              <a:spcAft>
-                <a:spcPts val="0"/>
-              </a:spcAft>
-            </a:pPr>
-            <a:r>
-              <a:rPr sz="1200" b="0" i="0">
-                <a:solidFill>
-                  <a:srgbClr val="475569"/>
-                </a:solidFill>
-                <a:latin typeface="Arial"/>
-              </a:rPr>
-              <a:t>зривів на 40 розрядах з автокеруванням і без нього (−55 %)</a:t>
-            </a:r>
-          </a:p>
-        </p:txBody>
-      </p:sp>
-      <p:sp>
-        <p:nvSpPr>
-          <p:cNvPr id="10" name="TextBox 9"/>
-          <p:cNvSpPr txBox="1"/>
-          <p:nvPr/>
-        </p:nvSpPr>
-        <p:spPr>
-          <a:xfrm>
-            <a:off x="6949440" y="2743200"/>
-            <a:ext cx="4709160" cy="2286000"/>
-          </a:xfrm>
-          <a:prstGeom prst="rect">
-            <a:avLst/>
-          </a:prstGeom>
-          <a:noFill/>
-        </p:spPr>
-        <p:txBody>
-          <a:bodyPr wrap="square" anchor="t" lIns="0" rIns="0" tIns="0" bIns="0">
-            <a:spAutoFit/>
-          </a:bodyPr>
-          <a:lstStyle/>
-          <a:p>
-            <a:pPr algn="l">
-              <a:spcAft>
-                <a:spcPts val="800"/>
-              </a:spcAft>
-            </a:pPr>
-            <a:r>
-              <a:rPr sz="1300" b="1" i="0">
-                <a:solidFill>
-                  <a:srgbClr val="0F172A"/>
-                </a:solidFill>
-                <a:latin typeface="Arial"/>
-              </a:rPr>
-              <a:t>Контур – </a:t>
-            </a:r>
-            <a:r>
-              <a:rPr sz="1300" b="0" i="0">
-                <a:solidFill>
-                  <a:srgbClr val="0F172A"/>
-                </a:solidFill>
-                <a:latin typeface="Arial"/>
-              </a:rPr>
-              <a:t>діагностики → модель тривоги (коли) → ImpactNet (чому) → порадник → зміна уставок; цикл 5 мс</a:t>
-            </a:r>
-          </a:p>
-          <a:p>
-            <a:pPr algn="l">
-              <a:spcAft>
-                <a:spcPts val="800"/>
-              </a:spcAft>
-            </a:pPr>
-            <a:r>
-              <a:rPr sz="1300" b="1" i="0">
-                <a:solidFill>
-                  <a:srgbClr val="0F172A"/>
-                </a:solidFill>
-                <a:latin typeface="Arial"/>
-              </a:rPr>
-              <a:t>Порадник – </a:t>
-            </a:r>
-            <a:r>
-              <a:rPr sz="1300" b="0" i="0">
-                <a:solidFill>
-                  <a:srgbClr val="0F172A"/>
-                </a:solidFill>
-                <a:latin typeface="Arial"/>
-              </a:rPr>
-              <a:t>головна загроза з часток ImpactNet → конкретна дія (наприклад, знизити уставку густини); автокерування виконує її, коли p моделі вище порогу</a:t>
-            </a:r>
-          </a:p>
-          <a:p>
-            <a:pPr algn="l">
-              <a:spcAft>
-                <a:spcPts val="800"/>
-              </a:spcAft>
-            </a:pPr>
-            <a:r>
-              <a:rPr sz="1300" b="1" i="0">
-                <a:solidFill>
-                  <a:srgbClr val="0F172A"/>
-                </a:solidFill>
-                <a:latin typeface="Arial"/>
-              </a:rPr>
-              <a:t>Обмеження – </a:t>
-            </a:r>
-            <a:r>
-              <a:rPr sz="1300" b="0" i="0">
-                <a:solidFill>
-                  <a:srgbClr val="0F172A"/>
-                </a:solidFill>
-                <a:latin typeface="Arial"/>
-              </a:rPr>
-              <a:t>40 розрядів; ціну керування (втрату продуктивності) ще не оцінено</a:t>
-            </a:r>
-          </a:p>
-        </p:txBody>
-      </p:sp>
-      <p:sp>
-        <p:nvSpPr>
-          <p:cNvPr id="11" name="TextBox 10"/>
-          <p:cNvSpPr txBox="1"/>
-          <p:nvPr/>
-        </p:nvSpPr>
-        <p:spPr>
-          <a:xfrm>
-            <a:off x="6949440" y="5623560"/>
-            <a:ext cx="4709160" cy="640080"/>
-          </a:xfrm>
-          <a:prstGeom prst="rect">
-            <a:avLst/>
-          </a:prstGeom>
-          <a:noFill/>
-        </p:spPr>
-        <p:txBody>
-          <a:bodyPr wrap="square" anchor="t" lIns="0" rIns="0" tIns="0" bIns="0">
-            <a:spAutoFit/>
-          </a:bodyPr>
-          <a:lstStyle/>
-          <a:p>
-            <a:pPr algn="l">
-              <a:spcAft>
-                <a:spcPts val="0"/>
-              </a:spcAft>
-            </a:pPr>
-            <a:r>
-              <a:rPr sz="1000" b="1" i="0">
-                <a:solidFill>
-                  <a:srgbClr val="475569"/>
-                </a:solidFill>
-                <a:latin typeface="Arial"/>
-              </a:rPr>
-              <a:t>Симулятор: </a:t>
-            </a:r>
-            <a:r>
-              <a:rPr sz="1000" b="0" i="0">
-                <a:solidFill>
-                  <a:srgbClr val="1D4ED8"/>
-                </a:solidFill>
-                <a:latin typeface="Arial"/>
-              </a:rPr>
-              <a:t>github.com/lurbaby/plasma_simulator</a:t>
-            </a:r>
-            <a:r>
-              <a:rPr sz="1000" b="0" i="0">
-                <a:solidFill>
-                  <a:srgbClr val="475569"/>
-                </a:solidFill>
-                <a:latin typeface="Arial"/>
-              </a:rPr>
-              <a:t> (форк fusionsimulator.io, D. Burgess, GPL-3.0; командою додано залік toksym і керування актуаторами з моделі)</a:t>
-            </a:r>
-          </a:p>
-        </p:txBody>
-      </p:sp>
-    </p:spTree>
-  </p:cSld>
-  <p:clrMapOvr>
-    <a:masterClrMapping/>
-  </p:clrMapOvr>
-</p:sld>
-</file>
-
-<file path=ppt/slides/slide15.xml><?xml version="1.0" encoding="utf-8"?>
-<p:sld xmlns:a="http://schemas.openxmlformats.org/drawingml/2006/main" xmlns:p="http://schemas.openxmlformats.org/presentationml/2006/main" xmlns:r="http://schemas.openxmlformats.org/officeDocument/2006/relationships">
-  <p:cSld>
-    <p:bg>
-      <p:bgPr>
-        <a:solidFill>
-          <a:srgbClr val="FFFFFF"/>
-        </a:solidFill>
-        <a:effectLst/>
-      </p:bgPr>
-    </p:bg>
-    <p:spTree>
-      <p:nvGrpSpPr>
-        <p:cNvPr id="1" name=""/>
-        <p:cNvGrpSpPr/>
-        <p:nvPr/>
-      </p:nvGrpSpPr>
-      <p:grpSpPr/>
-      <p:sp>
-        <p:nvSpPr>
-          <p:cNvPr id="2" name="TextBox 1"/>
-          <p:cNvSpPr txBox="1"/>
-          <p:nvPr/>
-        </p:nvSpPr>
-        <p:spPr>
-          <a:xfrm>
-            <a:off x="548640" y="411480"/>
-            <a:ext cx="11064240" cy="640080"/>
-          </a:xfrm>
-          <a:prstGeom prst="rect">
-            <a:avLst/>
-          </a:prstGeom>
-          <a:noFill/>
-        </p:spPr>
-        <p:txBody>
-          <a:bodyPr wrap="square" anchor="t" lIns="0" rIns="0" tIns="0" bIns="0">
-            <a:spAutoFit/>
-          </a:bodyPr>
-          <a:lstStyle/>
-          <a:p>
-            <a:pPr algn="l">
-              <a:spcAft>
-                <a:spcPts val="0"/>
-              </a:spcAft>
-            </a:pPr>
-            <a:r>
-              <a:rPr sz="2600" b="1" i="0">
-                <a:solidFill>
-                  <a:srgbClr val="0F172A"/>
-                </a:solidFill>
-                <a:latin typeface="Arial"/>
-              </a:rPr>
-              <a:t>14 Перенесення моделей на інший рушій без донавчання</a:t>
-            </a:r>
-          </a:p>
-        </p:txBody>
-      </p:sp>
-      <p:sp>
-        <p:nvSpPr>
-          <p:cNvPr id="3" name="TextBox 2"/>
-          <p:cNvSpPr txBox="1"/>
-          <p:nvPr/>
-        </p:nvSpPr>
-        <p:spPr>
-          <a:xfrm>
-            <a:off x="11247120" y="6446520"/>
-            <a:ext cx="457200" cy="274320"/>
-          </a:xfrm>
-          <a:prstGeom prst="rect">
-            <a:avLst/>
-          </a:prstGeom>
-          <a:noFill/>
-        </p:spPr>
-        <p:txBody>
-          <a:bodyPr wrap="square" anchor="t" lIns="0" rIns="0" tIns="0" bIns="0">
-            <a:spAutoFit/>
-          </a:bodyPr>
-          <a:lstStyle/>
-          <a:p>
-            <a:pPr algn="r">
-              <a:spcAft>
-                <a:spcPts val="0"/>
-              </a:spcAft>
-            </a:pPr>
-            <a:r>
-              <a:rPr sz="1000" b="0" i="0">
-                <a:solidFill>
-                  <a:srgbClr val="94A3B8"/>
-                </a:solidFill>
-                <a:latin typeface="Arial"/>
-              </a:rPr>
-              <a:t>15</a:t>
-            </a:r>
-          </a:p>
-        </p:txBody>
-      </p:sp>
-      <p:pic>
-        <p:nvPicPr>
-          <p:cNvPr id="4" name="Picture 3" descr="sim200.png"/>
-          <p:cNvPicPr>
-            <a:picLocks noChangeAspect="1"/>
-          </p:cNvPicPr>
-          <p:nvPr/>
-        </p:nvPicPr>
-        <p:blipFill>
-          <a:blip r:embed="rId3"/>
-          <a:stretch>
-            <a:fillRect/>
-          </a:stretch>
-        </p:blipFill>
-        <p:spPr>
-          <a:xfrm>
-            <a:off x="548640" y="1234440"/>
-            <a:ext cx="7589520" cy="3360613"/>
-          </a:xfrm>
-          <a:prstGeom prst="rect">
-            <a:avLst/>
-          </a:prstGeom>
-        </p:spPr>
-      </p:pic>
-      <p:sp>
-        <p:nvSpPr>
-          <p:cNvPr id="5" name="TextBox 4"/>
-          <p:cNvSpPr txBox="1"/>
-          <p:nvPr/>
-        </p:nvSpPr>
-        <p:spPr>
-          <a:xfrm>
-            <a:off x="548640" y="4640773"/>
-            <a:ext cx="7589520" cy="365760"/>
-          </a:xfrm>
-          <a:prstGeom prst="rect">
-            <a:avLst/>
-          </a:prstGeom>
-          <a:noFill/>
-        </p:spPr>
-        <p:txBody>
-          <a:bodyPr wrap="square" anchor="t" lIns="0" rIns="0" tIns="0" bIns="0">
-            <a:spAutoFit/>
-          </a:bodyPr>
-          <a:lstStyle/>
-          <a:p>
-            <a:pPr algn="l">
-              <a:spcAft>
-                <a:spcPts val="0"/>
-              </a:spcAft>
-            </a:pPr>
-            <a:r>
-              <a:rPr sz="1100" b="0" i="0">
-                <a:solidFill>
-                  <a:srgbClr val="475569"/>
-                </a:solidFill>
-                <a:latin typeface="Arial"/>
-              </a:rPr>
-              <a:t>Рисунок 9 – Модель v8 + ImpactNet у симуляторі fusion-sim, 200 розрядів, 49 зарахованих зривів (run.json прогону)</a:t>
-            </a:r>
-          </a:p>
-        </p:txBody>
-      </p:sp>
-      <p:sp>
-        <p:nvSpPr>
-          <p:cNvPr id="6" name="TextBox 5"/>
-          <p:cNvSpPr txBox="1"/>
-          <p:nvPr/>
-        </p:nvSpPr>
-        <p:spPr>
-          <a:xfrm>
-            <a:off x="8458200" y="1325880"/>
-            <a:ext cx="3200400" cy="3200400"/>
-          </a:xfrm>
-          <a:prstGeom prst="rect">
-            <a:avLst/>
-          </a:prstGeom>
-          <a:noFill/>
-        </p:spPr>
-        <p:txBody>
-          <a:bodyPr wrap="square" anchor="t" lIns="0" rIns="0" tIns="0" bIns="0">
-            <a:spAutoFit/>
-          </a:bodyPr>
-          <a:lstStyle/>
-          <a:p>
-            <a:pPr algn="l">
-              <a:spcAft>
-                <a:spcPts val="700"/>
-              </a:spcAft>
-            </a:pPr>
-            <a:r>
-              <a:rPr sz="1200" b="1" i="0">
-                <a:solidFill>
-                  <a:srgbClr val="0F172A"/>
-                </a:solidFill>
-                <a:latin typeface="Arial"/>
-              </a:rPr>
-              <a:t>Тривога – </a:t>
-            </a:r>
-            <a:r>
-              <a:rPr sz="1200" b="0" i="0">
-                <a:solidFill>
-                  <a:srgbClr val="0F172A"/>
-                </a:solidFill>
-                <a:latin typeface="Arial"/>
-              </a:rPr>
-              <a:t>переноситься: ROC AUC 0,902 проти 0,934 на 0,1 с, 0,970 на 30 мс</a:t>
-            </a:r>
-          </a:p>
-          <a:p>
-            <a:pPr algn="l">
-              <a:spcAft>
-                <a:spcPts val="700"/>
-              </a:spcAft>
-            </a:pPr>
-            <a:r>
-              <a:rPr sz="1200" b="1" i="0">
-                <a:solidFill>
-                  <a:srgbClr val="0F172A"/>
-                </a:solidFill>
-                <a:latin typeface="Arial"/>
-              </a:rPr>
-              <a:t>Грінвальд, радіація – </a:t>
-            </a:r>
-            <a:r>
-              <a:rPr sz="1200" b="0" i="0">
-                <a:solidFill>
-                  <a:srgbClr val="0F172A"/>
-                </a:solidFill>
-                <a:latin typeface="Arial"/>
-              </a:rPr>
-              <a:t>переносяться: 16 з 16 і 14 з 17</a:t>
-            </a:r>
-          </a:p>
-          <a:p>
-            <a:pPr algn="l">
-              <a:spcAft>
-                <a:spcPts val="700"/>
-              </a:spcAft>
-            </a:pPr>
-            <a:r>
-              <a:rPr sz="1200" b="1" i="0">
-                <a:solidFill>
-                  <a:srgbClr val="0F172A"/>
-                </a:solidFill>
-                <a:latin typeface="Arial"/>
-              </a:rPr>
-              <a:t>Кінк – </a:t>
-            </a:r>
-            <a:r>
-              <a:rPr sz="1200" b="0" i="0">
-                <a:solidFill>
-                  <a:srgbClr val="0F172A"/>
-                </a:solidFill>
-                <a:latin typeface="Arial"/>
-              </a:rPr>
-              <a:t>4 з 16: в 11 розрядах мережа видає однакові 97,6 % Грінвальда, тобто насичений вхід, а не фізика</a:t>
-            </a:r>
-          </a:p>
-          <a:p>
-            <a:pPr algn="l">
-              <a:spcAft>
-                <a:spcPts val="700"/>
-              </a:spcAft>
-            </a:pPr>
-            <a:r>
-              <a:rPr sz="1200" b="1" i="0">
-                <a:solidFill>
-                  <a:srgbClr val="0F172A"/>
-                </a:solidFill>
-                <a:latin typeface="Arial"/>
-              </a:rPr>
-              <a:t>Калібрування – </a:t>
-            </a:r>
-            <a:r>
-              <a:rPr sz="1200" b="0" i="0">
-                <a:solidFill>
-                  <a:srgbClr val="0F172A"/>
-                </a:solidFill>
-                <a:latin typeface="Arial"/>
-              </a:rPr>
-              <a:t>масштабування часток не допомагає: 36 з 49 (5-кратна перевірка)</a:t>
-            </a:r>
-          </a:p>
-          <a:p>
-            <a:pPr algn="l">
-              <a:spcAft>
-                <a:spcPts val="700"/>
-              </a:spcAft>
-            </a:pPr>
-            <a:r>
-              <a:rPr sz="1200" b="1" i="0">
-                <a:solidFill>
-                  <a:srgbClr val="0F172A"/>
-                </a:solidFill>
-                <a:latin typeface="Arial"/>
-              </a:rPr>
-              <a:t>Далі – </a:t>
-            </a:r>
-            <a:r>
-              <a:rPr sz="1200" b="0" i="0">
-                <a:solidFill>
-                  <a:srgbClr val="0F172A"/>
-                </a:solidFill>
-                <a:latin typeface="Arial"/>
-              </a:rPr>
-              <a:t>донавчання ImpactNet на даних fusion-sim і шум діагностик у рушії</a:t>
-            </a:r>
-          </a:p>
-        </p:txBody>
-      </p:sp>
-    </p:spTree>
-  </p:cSld>
-  <p:clrMapOvr>
-    <a:masterClrMapping/>
-  </p:clrMapOvr>
-</p:sld>
-</file>
-
 <file path=ppt/slides/slide16.xml><?xml version="1.0" encoding="utf-8"?>
 <p:sld xmlns:a="http://schemas.openxmlformats.org/drawingml/2006/main" xmlns:p="http://schemas.openxmlformats.org/presentationml/2006/main" xmlns:r="http://schemas.openxmlformats.org/officeDocument/2006/relationships">
   <p:cSld>
@@ -8589,7 +9439,7 @@
                 </a:solidFill>
                 <a:latin typeface="Arial"/>
               </a:rPr>
-              <a:t>15 Висновки</a:t>
+              <a:t>13 Замкнений контур керування в симуляторі</a:t>
             </a:r>
           </a:p>
         </p:txBody>
@@ -8629,6 +9479,836 @@
                 <a:latin typeface="Arial"/>
               </a:rPr>
               <a:t>16</a:t>
+            </a:r>
+          </a:p>
+        </p:txBody>
+      </p:sp>
+      <p:sp>
+        <p:nvSpPr>
+          <p:cNvPr id="4" name="Rectangle 3"/>
+          <p:cNvSpPr/>
+          <p:nvPr/>
+        </p:nvSpPr>
+        <p:spPr>
+          <a:xfrm>
+            <a:off x="521207" y="1252728"/>
+            <a:ext cx="6089903" cy="3038605"/>
+          </a:xfrm>
+          <a:prstGeom prst="rect">
+            <a:avLst/>
+          </a:prstGeom>
+          <a:noFill/>
+          <a:ln w="12700">
+            <a:solidFill>
+              <a:srgbClr val="E2E8F0"/>
+            </a:solidFill>
+          </a:ln>
+          <a:effectLst/>
+        </p:spPr>
+        <p:style>
+          <a:lnRef idx="1">
+            <a:schemeClr val="accent1"/>
+          </a:lnRef>
+          <a:fillRef idx="3">
+            <a:schemeClr val="accent1"/>
+          </a:fillRef>
+          <a:effectRef idx="2">
+            <a:schemeClr val="accent1"/>
+          </a:effectRef>
+          <a:fontRef idx="minor">
+            <a:schemeClr val="lt1"/>
+          </a:fontRef>
+        </p:style>
+        <p:txBody>
+          <a:bodyPr rtlCol="0" anchor="ctr"/>
+          <a:lstStyle/>
+          <a:p>
+            <a:pPr algn="ctr"/>
+          </a:p>
+        </p:txBody>
+      </p:sp>
+      <p:pic>
+        <p:nvPicPr>
+          <p:cNvPr id="5" name="Picture 4" descr="card_sim_impact_auc.png"/>
+          <p:cNvPicPr>
+            <a:picLocks noChangeAspect="1"/>
+          </p:cNvPicPr>
+          <p:nvPr/>
+        </p:nvPicPr>
+        <p:blipFill>
+          <a:blip r:embed="rId3"/>
+          <a:stretch>
+            <a:fillRect/>
+          </a:stretch>
+        </p:blipFill>
+        <p:spPr>
+          <a:xfrm>
+            <a:off x="548640" y="1280160"/>
+            <a:ext cx="6035040" cy="2983741"/>
+          </a:xfrm>
+          <a:prstGeom prst="rect">
+            <a:avLst/>
+          </a:prstGeom>
+        </p:spPr>
+      </p:pic>
+      <p:sp>
+        <p:nvSpPr>
+          <p:cNvPr id="6" name="TextBox 5"/>
+          <p:cNvSpPr txBox="1"/>
+          <p:nvPr/>
+        </p:nvSpPr>
+        <p:spPr>
+          <a:xfrm>
+            <a:off x="548640" y="4309621"/>
+            <a:ext cx="6035040" cy="365760"/>
+          </a:xfrm>
+          <a:prstGeom prst="rect">
+            <a:avLst/>
+          </a:prstGeom>
+          <a:noFill/>
+        </p:spPr>
+        <p:txBody>
+          <a:bodyPr wrap="square" anchor="t" lIns="0" rIns="0" tIns="0" bIns="0">
+            <a:spAutoFit/>
+          </a:bodyPr>
+          <a:lstStyle/>
+          <a:p>
+            <a:pPr algn="l">
+              <a:spcAft>
+                <a:spcPts val="0"/>
+              </a:spcAft>
+            </a:pPr>
+            <a:r>
+              <a:rPr sz="1100" b="0" i="0">
+                <a:solidFill>
+                  <a:srgbClr val="475569"/>
+                </a:solidFill>
+                <a:latin typeface="Arial"/>
+              </a:rPr>
+              <a:t>Рисунок 8 – Атрибуція механізмів зриву в симуляторі fusion-sim, пробний прогін 50 розрядів: 10 з 12 (поле «поріг» замінено на ROC AUC цього прогону)</a:t>
+            </a:r>
+          </a:p>
+        </p:txBody>
+      </p:sp>
+      <p:sp>
+        <p:nvSpPr>
+          <p:cNvPr id="7" name="Rectangle 6"/>
+          <p:cNvSpPr/>
+          <p:nvPr/>
+        </p:nvSpPr>
+        <p:spPr>
+          <a:xfrm>
+            <a:off x="548640" y="5041141"/>
+            <a:ext cx="6035040" cy="914400"/>
+          </a:xfrm>
+          <a:prstGeom prst="rect">
+            <a:avLst/>
+          </a:prstGeom>
+          <a:solidFill>
+            <a:srgbClr val="F8FAFC"/>
+          </a:solidFill>
+          <a:ln w="12700">
+            <a:solidFill>
+              <a:srgbClr val="E2E8F0"/>
+            </a:solidFill>
+          </a:ln>
+          <a:effectLst/>
+        </p:spPr>
+        <p:style>
+          <a:lnRef idx="1">
+            <a:schemeClr val="accent1"/>
+          </a:lnRef>
+          <a:fillRef idx="3">
+            <a:schemeClr val="accent1"/>
+          </a:fillRef>
+          <a:effectRef idx="2">
+            <a:schemeClr val="accent1"/>
+          </a:effectRef>
+          <a:fontRef idx="minor">
+            <a:schemeClr val="lt1"/>
+          </a:fontRef>
+        </p:style>
+        <p:txBody>
+          <a:bodyPr rtlCol="0" anchor="ctr"/>
+          <a:lstStyle/>
+          <a:p>
+            <a:pPr algn="ctr"/>
+          </a:p>
+        </p:txBody>
+      </p:sp>
+      <p:sp>
+        <p:nvSpPr>
+          <p:cNvPr id="8" name="TextBox 7"/>
+          <p:cNvSpPr txBox="1"/>
+          <p:nvPr/>
+        </p:nvSpPr>
+        <p:spPr>
+          <a:xfrm>
+            <a:off x="685800" y="5132581"/>
+            <a:ext cx="5760720" cy="731520"/>
+          </a:xfrm>
+          <a:prstGeom prst="rect">
+            <a:avLst/>
+          </a:prstGeom>
+          <a:noFill/>
+        </p:spPr>
+        <p:txBody>
+          <a:bodyPr wrap="square" anchor="t" lIns="0" rIns="0" tIns="0" bIns="0">
+            <a:spAutoFit/>
+          </a:bodyPr>
+          <a:lstStyle/>
+          <a:p>
+            <a:pPr algn="l">
+              <a:spcAft>
+                <a:spcPts val="0"/>
+              </a:spcAft>
+            </a:pPr>
+            <a:r>
+              <a:rPr sz="1100" b="1" i="0">
+                <a:solidFill>
+                  <a:srgbClr val="0E7490"/>
+                </a:solidFill>
+                <a:latin typeface="Arial"/>
+              </a:rPr>
+              <a:t>Чому ROC AUC замість порогу. </a:t>
+            </a:r>
+            <a:r>
+              <a:rPr sz="1100" b="0" i="0">
+                <a:solidFill>
+                  <a:srgbClr val="475569"/>
+                </a:solidFill>
+                <a:latin typeface="Arial"/>
+              </a:rPr>
+              <a:t>Поріг спрацювання неінформативний: його підбирає засіб оцінки під бюджет хибних тривог, а на 50 розрядах поріг задає один тихий розряд (див. розділ 5); тому наведено ROC AUC.</a:t>
+            </a:r>
+          </a:p>
+        </p:txBody>
+      </p:sp>
+      <p:sp>
+        <p:nvSpPr>
+          <p:cNvPr id="9" name="TextBox 8"/>
+          <p:cNvSpPr txBox="1"/>
+          <p:nvPr/>
+        </p:nvSpPr>
+        <p:spPr>
+          <a:xfrm>
+            <a:off x="6949440" y="1371600"/>
+            <a:ext cx="4663440" cy="1188720"/>
+          </a:xfrm>
+          <a:prstGeom prst="rect">
+            <a:avLst/>
+          </a:prstGeom>
+          <a:noFill/>
+        </p:spPr>
+        <p:txBody>
+          <a:bodyPr wrap="square" anchor="t" lIns="0" rIns="0" tIns="0" bIns="0">
+            <a:spAutoFit/>
+          </a:bodyPr>
+          <a:lstStyle/>
+          <a:p>
+            <a:pPr algn="l">
+              <a:spcAft>
+                <a:spcPts val="200"/>
+              </a:spcAft>
+            </a:pPr>
+            <a:r>
+              <a:rPr sz="4600" b="1" i="0">
+                <a:solidFill>
+                  <a:srgbClr val="C2410C"/>
+                </a:solidFill>
+                <a:latin typeface="Arial"/>
+              </a:rPr>
+              <a:t>11 → 5</a:t>
+            </a:r>
+          </a:p>
+          <a:p>
+            <a:pPr algn="l">
+              <a:spcAft>
+                <a:spcPts val="0"/>
+              </a:spcAft>
+            </a:pPr>
+            <a:r>
+              <a:rPr sz="1200" b="0" i="0">
+                <a:solidFill>
+                  <a:srgbClr val="475569"/>
+                </a:solidFill>
+                <a:latin typeface="Arial"/>
+              </a:rPr>
+              <a:t>зривів на 40 розрядах з автокеруванням і без нього (−55 %)</a:t>
+            </a:r>
+          </a:p>
+        </p:txBody>
+      </p:sp>
+      <p:sp>
+        <p:nvSpPr>
+          <p:cNvPr id="10" name="TextBox 9"/>
+          <p:cNvSpPr txBox="1"/>
+          <p:nvPr/>
+        </p:nvSpPr>
+        <p:spPr>
+          <a:xfrm>
+            <a:off x="6949440" y="2743200"/>
+            <a:ext cx="4709160" cy="2743200"/>
+          </a:xfrm>
+          <a:prstGeom prst="rect">
+            <a:avLst/>
+          </a:prstGeom>
+          <a:noFill/>
+        </p:spPr>
+        <p:txBody>
+          <a:bodyPr wrap="square" anchor="t" lIns="0" rIns="0" tIns="0" bIns="0">
+            <a:spAutoFit/>
+          </a:bodyPr>
+          <a:lstStyle/>
+          <a:p>
+            <a:pPr algn="l">
+              <a:spcAft>
+                <a:spcPts val="800"/>
+              </a:spcAft>
+            </a:pPr>
+            <a:r>
+              <a:rPr sz="1300" b="1" i="0">
+                <a:solidFill>
+                  <a:srgbClr val="0F172A"/>
+                </a:solidFill>
+                <a:latin typeface="Arial"/>
+              </a:rPr>
+              <a:t>Контур – </a:t>
+            </a:r>
+            <a:r>
+              <a:rPr sz="1300" b="0" i="0">
+                <a:solidFill>
+                  <a:srgbClr val="0F172A"/>
+                </a:solidFill>
+                <a:latin typeface="Arial"/>
+              </a:rPr>
+              <a:t>діагностики → модель тривоги (коли) → ImpactNet (чому) → порадник → зміна уставок; цикл 5 мс</a:t>
+            </a:r>
+          </a:p>
+          <a:p>
+            <a:pPr algn="l">
+              <a:spcAft>
+                <a:spcPts val="800"/>
+              </a:spcAft>
+            </a:pPr>
+            <a:r>
+              <a:rPr sz="1300" b="1" i="0">
+                <a:solidFill>
+                  <a:srgbClr val="0F172A"/>
+                </a:solidFill>
+                <a:latin typeface="Arial"/>
+              </a:rPr>
+              <a:t>Порадник – </a:t>
+            </a:r>
+            <a:r>
+              <a:rPr sz="1300" b="0" i="0">
+                <a:solidFill>
+                  <a:srgbClr val="0F172A"/>
+                </a:solidFill>
+                <a:latin typeface="Arial"/>
+              </a:rPr>
+              <a:t>головна загроза з часток ImpactNet → конкретна дія (наприклад, знизити уставку густини); автокерування виконує її, коли p моделі вище порогу</a:t>
+            </a:r>
+          </a:p>
+          <a:p>
+            <a:pPr algn="l">
+              <a:spcAft>
+                <a:spcPts val="800"/>
+              </a:spcAft>
+            </a:pPr>
+            <a:r>
+              <a:rPr sz="1300" b="1" i="0">
+                <a:solidFill>
+                  <a:srgbClr val="0F172A"/>
+                </a:solidFill>
+                <a:latin typeface="Arial"/>
+              </a:rPr>
+              <a:t>Обмеження – </a:t>
+            </a:r>
+            <a:r>
+              <a:rPr sz="1300" b="0" i="0">
+                <a:solidFill>
+                  <a:srgbClr val="0F172A"/>
+                </a:solidFill>
+                <a:latin typeface="Arial"/>
+              </a:rPr>
+              <a:t>40 розрядів; ціну керування (втрату продуктивності) ще не оцінено</a:t>
+            </a:r>
+          </a:p>
+          <a:p>
+            <a:pPr algn="l">
+              <a:spcAft>
+                <a:spcPts val="800"/>
+              </a:spcAft>
+            </a:pPr>
+            <a:r>
+              <a:rPr sz="1300" b="1" i="0">
+                <a:solidFill>
+                  <a:srgbClr val="0F172A"/>
+                </a:solidFill>
+                <a:latin typeface="Arial"/>
+              </a:rPr>
+              <a:t>Далі: прогнозне керування – </a:t>
+            </a:r>
+            <a:r>
+              <a:rPr sz="1300" b="0" i="0">
+                <a:solidFill>
+                  <a:srgbClr val="0F172A"/>
+                </a:solidFill>
+                <a:latin typeface="Arial"/>
+              </a:rPr>
+              <a:t>копія стану → 3–5 кандидатних дій → прогноз на 1–2 с → дія з найменшим очікуваним ризиком і найменшою втратою продуктивності</a:t>
+            </a:r>
+          </a:p>
+        </p:txBody>
+      </p:sp>
+      <p:sp>
+        <p:nvSpPr>
+          <p:cNvPr id="11" name="TextBox 10"/>
+          <p:cNvSpPr txBox="1"/>
+          <p:nvPr/>
+        </p:nvSpPr>
+        <p:spPr>
+          <a:xfrm>
+            <a:off x="6949440" y="5623560"/>
+            <a:ext cx="4709160" cy="640080"/>
+          </a:xfrm>
+          <a:prstGeom prst="rect">
+            <a:avLst/>
+          </a:prstGeom>
+          <a:noFill/>
+        </p:spPr>
+        <p:txBody>
+          <a:bodyPr wrap="square" anchor="t" lIns="0" rIns="0" tIns="0" bIns="0">
+            <a:spAutoFit/>
+          </a:bodyPr>
+          <a:lstStyle/>
+          <a:p>
+            <a:pPr algn="l">
+              <a:spcAft>
+                <a:spcPts val="0"/>
+              </a:spcAft>
+            </a:pPr>
+            <a:r>
+              <a:rPr sz="1000" b="1" i="0">
+                <a:solidFill>
+                  <a:srgbClr val="475569"/>
+                </a:solidFill>
+                <a:latin typeface="Arial"/>
+              </a:rPr>
+              <a:t>Симулятор: </a:t>
+            </a:r>
+            <a:r>
+              <a:rPr sz="1000" b="0" i="0">
+                <a:solidFill>
+                  <a:srgbClr val="1D4ED8"/>
+                </a:solidFill>
+                <a:latin typeface="Arial"/>
+              </a:rPr>
+              <a:t>github.com/lurbaby/plasma_simulator</a:t>
+            </a:r>
+            <a:r>
+              <a:rPr sz="1000" b="0" i="0">
+                <a:solidFill>
+                  <a:srgbClr val="475569"/>
+                </a:solidFill>
+                <a:latin typeface="Arial"/>
+              </a:rPr>
+              <a:t> (форк fusionsimulator.io, D. Burgess, GPL-3.0; командою додано залік toksym і керування актуаторами з моделі)</a:t>
+            </a:r>
+          </a:p>
+        </p:txBody>
+      </p:sp>
+    </p:spTree>
+  </p:cSld>
+  <p:clrMapOvr>
+    <a:masterClrMapping/>
+  </p:clrMapOvr>
+</p:sld>
+</file>
+
+<file path=ppt/slides/slide17.xml><?xml version="1.0" encoding="utf-8"?>
+<p:sld xmlns:a="http://schemas.openxmlformats.org/drawingml/2006/main" xmlns:p="http://schemas.openxmlformats.org/presentationml/2006/main" xmlns:r="http://schemas.openxmlformats.org/officeDocument/2006/relationships">
+  <p:cSld>
+    <p:bg>
+      <p:bgPr>
+        <a:solidFill>
+          <a:srgbClr val="FFFFFF"/>
+        </a:solidFill>
+        <a:effectLst/>
+      </p:bgPr>
+    </p:bg>
+    <p:spTree>
+      <p:nvGrpSpPr>
+        <p:cNvPr id="1" name=""/>
+        <p:cNvGrpSpPr/>
+        <p:nvPr/>
+      </p:nvGrpSpPr>
+      <p:grpSpPr/>
+      <p:sp>
+        <p:nvSpPr>
+          <p:cNvPr id="2" name="TextBox 1"/>
+          <p:cNvSpPr txBox="1"/>
+          <p:nvPr/>
+        </p:nvSpPr>
+        <p:spPr>
+          <a:xfrm>
+            <a:off x="548640" y="411480"/>
+            <a:ext cx="11064240" cy="640080"/>
+          </a:xfrm>
+          <a:prstGeom prst="rect">
+            <a:avLst/>
+          </a:prstGeom>
+          <a:noFill/>
+        </p:spPr>
+        <p:txBody>
+          <a:bodyPr wrap="square" anchor="t" lIns="0" rIns="0" tIns="0" bIns="0">
+            <a:spAutoFit/>
+          </a:bodyPr>
+          <a:lstStyle/>
+          <a:p>
+            <a:pPr algn="l">
+              <a:spcAft>
+                <a:spcPts val="0"/>
+              </a:spcAft>
+            </a:pPr>
+            <a:r>
+              <a:rPr sz="2600" b="1" i="0">
+                <a:solidFill>
+                  <a:srgbClr val="0F172A"/>
+                </a:solidFill>
+                <a:latin typeface="Arial"/>
+              </a:rPr>
+              <a:t>14 Перенесення моделей на інший рушій без донавчання</a:t>
+            </a:r>
+          </a:p>
+        </p:txBody>
+      </p:sp>
+      <p:sp>
+        <p:nvSpPr>
+          <p:cNvPr id="3" name="TextBox 2"/>
+          <p:cNvSpPr txBox="1"/>
+          <p:nvPr/>
+        </p:nvSpPr>
+        <p:spPr>
+          <a:xfrm>
+            <a:off x="11247120" y="6446520"/>
+            <a:ext cx="457200" cy="274320"/>
+          </a:xfrm>
+          <a:prstGeom prst="rect">
+            <a:avLst/>
+          </a:prstGeom>
+          <a:noFill/>
+        </p:spPr>
+        <p:txBody>
+          <a:bodyPr wrap="square" anchor="t" lIns="0" rIns="0" tIns="0" bIns="0">
+            <a:spAutoFit/>
+          </a:bodyPr>
+          <a:lstStyle/>
+          <a:p>
+            <a:pPr algn="r">
+              <a:spcAft>
+                <a:spcPts val="0"/>
+              </a:spcAft>
+            </a:pPr>
+            <a:r>
+              <a:rPr sz="1000" b="0" i="0">
+                <a:solidFill>
+                  <a:srgbClr val="94A3B8"/>
+                </a:solidFill>
+                <a:latin typeface="Arial"/>
+              </a:rPr>
+              <a:t>17</a:t>
+            </a:r>
+          </a:p>
+        </p:txBody>
+      </p:sp>
+      <p:pic>
+        <p:nvPicPr>
+          <p:cNvPr id="4" name="Picture 3" descr="sim200.png"/>
+          <p:cNvPicPr>
+            <a:picLocks noChangeAspect="1"/>
+          </p:cNvPicPr>
+          <p:nvPr/>
+        </p:nvPicPr>
+        <p:blipFill>
+          <a:blip r:embed="rId3"/>
+          <a:stretch>
+            <a:fillRect/>
+          </a:stretch>
+        </p:blipFill>
+        <p:spPr>
+          <a:xfrm>
+            <a:off x="548640" y="1234440"/>
+            <a:ext cx="7589520" cy="3529616"/>
+          </a:xfrm>
+          <a:prstGeom prst="rect">
+            <a:avLst/>
+          </a:prstGeom>
+        </p:spPr>
+      </p:pic>
+      <p:sp>
+        <p:nvSpPr>
+          <p:cNvPr id="5" name="TextBox 4"/>
+          <p:cNvSpPr txBox="1"/>
+          <p:nvPr/>
+        </p:nvSpPr>
+        <p:spPr>
+          <a:xfrm>
+            <a:off x="548640" y="4809776"/>
+            <a:ext cx="7589520" cy="365760"/>
+          </a:xfrm>
+          <a:prstGeom prst="rect">
+            <a:avLst/>
+          </a:prstGeom>
+          <a:noFill/>
+        </p:spPr>
+        <p:txBody>
+          <a:bodyPr wrap="square" anchor="t" lIns="0" rIns="0" tIns="0" bIns="0">
+            <a:spAutoFit/>
+          </a:bodyPr>
+          <a:lstStyle/>
+          <a:p>
+            <a:pPr algn="l">
+              <a:spcAft>
+                <a:spcPts val="0"/>
+              </a:spcAft>
+            </a:pPr>
+            <a:r>
+              <a:rPr sz="1100" b="0" i="0">
+                <a:solidFill>
+                  <a:srgbClr val="475569"/>
+                </a:solidFill>
+                <a:latin typeface="Arial"/>
+              </a:rPr>
+              <a:t>Рисунок 9 – Модель v8 + ImpactNet у симуляторі fusion-sim, 200 розрядів, 49 зарахованих зривів; праворуч — ті самі онлайн-виходи моделі з measured.csv, різниця лише у виборі моменту</a:t>
+            </a:r>
+          </a:p>
+        </p:txBody>
+      </p:sp>
+      <p:sp>
+        <p:nvSpPr>
+          <p:cNvPr id="6" name="TextBox 5"/>
+          <p:cNvSpPr txBox="1"/>
+          <p:nvPr/>
+        </p:nvSpPr>
+        <p:spPr>
+          <a:xfrm>
+            <a:off x="8458200" y="1325880"/>
+            <a:ext cx="3200400" cy="2743200"/>
+          </a:xfrm>
+          <a:prstGeom prst="rect">
+            <a:avLst/>
+          </a:prstGeom>
+          <a:noFill/>
+        </p:spPr>
+        <p:txBody>
+          <a:bodyPr wrap="square" anchor="t" lIns="0" rIns="0" tIns="0" bIns="0">
+            <a:spAutoFit/>
+          </a:bodyPr>
+          <a:lstStyle/>
+          <a:p>
+            <a:pPr algn="l">
+              <a:spcAft>
+                <a:spcPts val="700"/>
+              </a:spcAft>
+            </a:pPr>
+            <a:r>
+              <a:rPr sz="1200" b="1" i="0">
+                <a:solidFill>
+                  <a:srgbClr val="0F172A"/>
+                </a:solidFill>
+                <a:latin typeface="Arial"/>
+              </a:rPr>
+              <a:t>Тривога – </a:t>
+            </a:r>
+            <a:r>
+              <a:rPr sz="1200" b="0" i="0">
+                <a:solidFill>
+                  <a:srgbClr val="0F172A"/>
+                </a:solidFill>
+                <a:latin typeface="Arial"/>
+              </a:rPr>
+              <a:t>переноситься: ROC AUC 0,902 проти 0,934 на 0,1 с, 0,970 на 30 мс</a:t>
+            </a:r>
+          </a:p>
+          <a:p>
+            <a:pPr algn="l">
+              <a:spcAft>
+                <a:spcPts val="700"/>
+              </a:spcAft>
+            </a:pPr>
+            <a:r>
+              <a:rPr sz="1200" b="1" i="0">
+                <a:solidFill>
+                  <a:srgbClr val="0F172A"/>
+                </a:solidFill>
+                <a:latin typeface="Arial"/>
+              </a:rPr>
+              <a:t>Знахідка – </a:t>
+            </a:r>
+            <a:r>
+              <a:rPr sz="1200" b="0" i="0">
+                <a:solidFill>
+                  <a:srgbClr val="0F172A"/>
+                </a:solidFill>
+                <a:latin typeface="Arial"/>
+              </a:rPr>
+              <a:t>симулятор брав частки в момент максимуму λ по всьому розряду, а він припадав на прогрів мережі при t = 5 мс, коли плазми ще нема (типова відповідь «Грінвальд 97,6 %»)</a:t>
+            </a:r>
+          </a:p>
+          <a:p>
+            <a:pPr algn="l">
+              <a:spcAft>
+                <a:spcPts val="700"/>
+              </a:spcAft>
+            </a:pPr>
+            <a:r>
+              <a:rPr sz="1200" b="1" i="0">
+                <a:solidFill>
+                  <a:srgbClr val="0F172A"/>
+                </a:solidFill>
+                <a:latin typeface="Arial"/>
+              </a:rPr>
+              <a:t>Виправлення – </a:t>
+            </a:r>
+            <a:r>
+              <a:rPr sz="1200" b="0" i="0">
+                <a:solidFill>
+                  <a:srgbClr val="0F172A"/>
+                </a:solidFill>
+                <a:latin typeface="Arial"/>
+              </a:rPr>
+              <a:t>максимум λ лише там, де є плазма: 34 → 45 з 49, кінк 4 → 15 з 16, без донавчання</a:t>
+            </a:r>
+          </a:p>
+          <a:p>
+            <a:pPr algn="l">
+              <a:spcAft>
+                <a:spcPts val="700"/>
+              </a:spcAft>
+            </a:pPr>
+            <a:r>
+              <a:rPr sz="1200" b="1" i="0">
+                <a:solidFill>
+                  <a:srgbClr val="0F172A"/>
+                </a:solidFill>
+                <a:latin typeface="Arial"/>
+              </a:rPr>
+              <a:t>Залишок – </a:t>
+            </a:r>
+            <a:r>
+              <a:rPr sz="1200" b="0" i="0">
+                <a:solidFill>
+                  <a:srgbClr val="0F172A"/>
+                </a:solidFill>
+                <a:latin typeface="Arial"/>
+              </a:rPr>
+              <a:t>3 радіаційні зриви названо кінком</a:t>
+            </a:r>
+          </a:p>
+        </p:txBody>
+      </p:sp>
+    </p:spTree>
+  </p:cSld>
+  <p:clrMapOvr>
+    <a:masterClrMapping/>
+  </p:clrMapOvr>
+</p:sld>
+</file>
+
+<file path=ppt/slides/slide18.xml><?xml version="1.0" encoding="utf-8"?>
+<p:sld xmlns:a="http://schemas.openxmlformats.org/drawingml/2006/main" xmlns:p="http://schemas.openxmlformats.org/presentationml/2006/main" xmlns:r="http://schemas.openxmlformats.org/officeDocument/2006/relationships">
+  <p:cSld>
+    <p:bg>
+      <p:bgPr>
+        <a:solidFill>
+          <a:srgbClr val="FFFFFF"/>
+        </a:solidFill>
+        <a:effectLst/>
+      </p:bgPr>
+    </p:bg>
+    <p:spTree>
+      <p:nvGrpSpPr>
+        <p:cNvPr id="1" name=""/>
+        <p:cNvGrpSpPr/>
+        <p:nvPr/>
+      </p:nvGrpSpPr>
+      <p:grpSpPr/>
+      <p:sp>
+        <p:nvSpPr>
+          <p:cNvPr id="2" name="TextBox 1"/>
+          <p:cNvSpPr txBox="1"/>
+          <p:nvPr/>
+        </p:nvSpPr>
+        <p:spPr>
+          <a:xfrm>
+            <a:off x="548640" y="411480"/>
+            <a:ext cx="11064240" cy="640080"/>
+          </a:xfrm>
+          <a:prstGeom prst="rect">
+            <a:avLst/>
+          </a:prstGeom>
+          <a:noFill/>
+        </p:spPr>
+        <p:txBody>
+          <a:bodyPr wrap="square" anchor="t" lIns="0" rIns="0" tIns="0" bIns="0">
+            <a:spAutoFit/>
+          </a:bodyPr>
+          <a:lstStyle/>
+          <a:p>
+            <a:pPr algn="l">
+              <a:spcAft>
+                <a:spcPts val="0"/>
+              </a:spcAft>
+            </a:pPr>
+            <a:r>
+              <a:rPr sz="2600" b="1" i="0">
+                <a:solidFill>
+                  <a:srgbClr val="0F172A"/>
+                </a:solidFill>
+                <a:latin typeface="Arial"/>
+              </a:rPr>
+              <a:t>15 Висновки</a:t>
+            </a:r>
+          </a:p>
+        </p:txBody>
+      </p:sp>
+      <p:sp>
+        <p:nvSpPr>
+          <p:cNvPr id="3" name="TextBox 2"/>
+          <p:cNvSpPr txBox="1"/>
+          <p:nvPr/>
+        </p:nvSpPr>
+        <p:spPr>
+          <a:xfrm>
+            <a:off x="11247120" y="6446520"/>
+            <a:ext cx="457200" cy="274320"/>
+          </a:xfrm>
+          <a:prstGeom prst="rect">
+            <a:avLst/>
+          </a:prstGeom>
+          <a:noFill/>
+        </p:spPr>
+        <p:txBody>
+          <a:bodyPr wrap="square" anchor="t" lIns="0" rIns="0" tIns="0" bIns="0">
+            <a:spAutoFit/>
+          </a:bodyPr>
+          <a:lstStyle/>
+          <a:p>
+            <a:pPr algn="r">
+              <a:spcAft>
+                <a:spcPts val="0"/>
+              </a:spcAft>
+            </a:pPr>
+            <a:r>
+              <a:rPr sz="1000" b="0" i="0">
+                <a:solidFill>
+                  <a:srgbClr val="94A3B8"/>
+                </a:solidFill>
+                <a:latin typeface="Arial"/>
+              </a:rPr>
+              <a:t>18</a:t>
             </a:r>
           </a:p>
         </p:txBody>

--- a/docs/presentation.pptx
+++ b/docs/presentation.pptx
@@ -23,6 +23,7 @@
     <p:sldId id="271" r:id="rId23"/>
     <p:sldId id="272" r:id="rId24"/>
     <p:sldId id="273" r:id="rId25"/>
+    <p:sldId id="274" r:id="rId26"/>
   </p:sldIdLst>
   <p:sldSz cx="12191695" cy="6858000" type="screen4x3"/>
   <p:notesSz cx="6858000" cy="9144000"/>
@@ -1079,7 +1080,7 @@
           <a:lstStyle/>
           <a:p>
             <a:r>
-              <a:t>≈50 с. Моделі навчені на toksym; fusion-sim — інший рушій, без шуму діагностик. 200 розрядів, жодного донавчання. Модель тривоги переноситься: ROC AUC 0,902 проти 0,934 на запасі 0,1 с. ImpactNet: межа Грінвальда 16 з 16, радіація 14 з 17, кінк лише 4 з 16. В 11 з 16 кінкових зривів мережа видає ту саму частку Грінвальда 97,6 % — це насичення входу, а не фізика. Масштабування часток не рятує: 36 з 49 при 5-кратній перевірці. Отже, потрібне донавчання на даних нового рушія.</a:t>
+              <a:t>≈50 с. Порадник зараз реагує на тривогу, але плазма відповідає на зміну уставки із затримкою: густина ≈ 0,3 с, неон ≈ 0,5 с, а на кінкових розрядах тривога приходить лише за 5–75 мс до гасіння. Тому план — прогнозне керування: кожні 0,25 с копія стану програє 5 варіантів дій на 1,5 с уперед з урахуванням запрограмованих хвиль і вибирає дію з найменшою ціною: ймовірність зриву плюс втрата продуктивності. Копія знає прихований стан, тому це верхня межа; на машину переноситься учень — мережа, що вчиться вибирати ту саму дію лише з діагностик.</a:t>
             </a:r>
           </a:p>
         </p:txBody>
@@ -1105,6 +1106,76 @@
 </file>
 
 <file path=ppt/notesSlides/notesSlide18.xml><?xml version="1.0" encoding="utf-8"?>
+<p:notes xmlns:a="http://schemas.openxmlformats.org/drawingml/2006/main" xmlns:p="http://schemas.openxmlformats.org/presentationml/2006/main" xmlns:r="http://schemas.openxmlformats.org/officeDocument/2006/relationships">
+  <p:cSld>
+    <p:spTree>
+      <p:nvGrpSpPr>
+        <p:cNvPr id="1" name=""/>
+        <p:cNvGrpSpPr/>
+        <p:nvPr/>
+      </p:nvGrpSpPr>
+      <p:grpSpPr>
+        <a:xfrm>
+          <a:off x="0" y="0"/>
+          <a:ext cx="0" cy="0"/>
+          <a:chOff x="0" y="0"/>
+          <a:chExt cx="0" cy="0"/>
+        </a:xfrm>
+      </p:grpSpPr>
+      <p:sp>
+        <p:nvSpPr>
+          <p:cNvPr id="2" name="Slide Image Placeholder 1"/>
+          <p:cNvSpPr>
+            <a:spLocks noGrp="1"/>
+          </p:cNvSpPr>
+          <p:nvPr>
+            <p:ph type="sldImg" idx="2"/>
+          </p:nvPr>
+        </p:nvSpPr>
+        <p:spPr/>
+      </p:sp>
+      <p:sp>
+        <p:nvSpPr>
+          <p:cNvPr id="3" name="Notes Placeholder 2"/>
+          <p:cNvSpPr>
+            <a:spLocks noGrp="1"/>
+          </p:cNvSpPr>
+          <p:nvPr>
+            <p:ph type="body" idx="3" sz="quarter"/>
+          </p:nvPr>
+        </p:nvSpPr>
+        <p:spPr/>
+        <p:txBody>
+          <a:bodyPr/>
+          <a:lstStyle/>
+          <a:p>
+            <a:r>
+              <a:t>≈50 с. Моделі навчені на toksym; fusion-sim — інший рушій, без шуму діагностик. 200 розрядів, жодного донавчання. Модель тривоги переноситься: ROC AUC 0,902 проти 0,934 на запасі 0,1 с. ImpactNet: межа Грінвальда 16 з 16, радіація 14 з 17, кінк лише 4 з 16. В 11 з 16 кінкових зривів мережа видає ту саму частку Грінвальда 97,6 % — це насичення входу, а не фізика. Масштабування часток не рятує: 36 з 49 при 5-кратній перевірці. Отже, потрібне донавчання на даних нового рушія.</a:t>
+            </a:r>
+          </a:p>
+        </p:txBody>
+      </p:sp>
+      <p:sp>
+        <p:nvSpPr>
+          <p:cNvPr id="4" name="Slide Number Placeholder 3"/>
+          <p:cNvSpPr>
+            <a:spLocks noGrp="1"/>
+          </p:cNvSpPr>
+          <p:nvPr>
+            <p:ph type="sldNum" idx="5" sz="quarter"/>
+          </p:nvPr>
+        </p:nvSpPr>
+        <p:spPr/>
+      </p:sp>
+    </p:spTree>
+  </p:cSld>
+  <p:clrMapOvr>
+    <a:masterClrMapping/>
+  </p:clrMapOvr>
+</p:notes>
+</file>
+
+<file path=ppt/notesSlides/notesSlide19.xml><?xml version="1.0" encoding="utf-8"?>
 <p:notes xmlns:a="http://schemas.openxmlformats.org/drawingml/2006/main" xmlns:p="http://schemas.openxmlformats.org/presentationml/2006/main" xmlns:r="http://schemas.openxmlformats.org/officeDocument/2006/relationships">
   <p:cSld>
     <p:spTree>
@@ -9748,7 +9819,7 @@
         <p:spPr>
           <a:xfrm>
             <a:off x="6949440" y="2743200"/>
-            <a:ext cx="4709160" cy="2743200"/>
+            <a:ext cx="4709160" cy="2286000"/>
           </a:xfrm>
           <a:prstGeom prst="rect">
             <a:avLst/>
@@ -9832,32 +9903,7 @@
                 </a:solidFill>
                 <a:latin typeface="Arial"/>
               </a:rPr>
-              <a:t>40 розрядів; ціну керування (втрату продуктивності) ще не оцінено</a:t>
-            </a:r>
-          </a:p>
-          <a:p>
-            <a:pPr algn="l">
-              <a:spcAft>
-                <a:spcPts val="800"/>
-              </a:spcAft>
-            </a:pPr>
-            <a:r>
-              <a:rPr sz="1300" b="1" i="0">
-                <a:solidFill>
-                  <a:srgbClr val="0F172A"/>
-                </a:solidFill>
-                <a:latin typeface="Arial"/>
-              </a:rPr>
-              <a:t>Далі: прогнозне керування – </a:t>
-            </a:r>
-            <a:r>
-              <a:rPr sz="1300" b="0" i="0">
-                <a:solidFill>
-                  <a:srgbClr val="0F172A"/>
-                </a:solidFill>
-                <a:latin typeface="Arial"/>
-              </a:rPr>
-              <a:t>копія стану → 3–5 кандидатних дій → прогноз на 1–2 с → дія з найменшим очікуваним ризиком і найменшою втратою продуктивності</a:t>
+              <a:t>40 розрядів: різниця ще не статистично значуща (p ≈ 0,1, точний тест); для p &lt; 0,01 з імовірністю 0,84 потрібно ≈ 200 розрядів на режим; ціну керування ще не оцінено</a:t>
             </a:r>
           </a:p>
         </p:txBody>
@@ -9979,7 +10025,7 @@
                 </a:solidFill>
                 <a:latin typeface="Arial"/>
               </a:rPr>
-              <a:t>14 Перенесення моделей на інший рушій без донавчання</a:t>
+              <a:t>13.1 Наступний крок: прогнозне керування на копії рушія</a:t>
             </a:r>
           </a:p>
         </p:txBody>
@@ -10023,30 +10069,54 @@
           </a:p>
         </p:txBody>
       </p:sp>
-      <p:pic>
-        <p:nvPicPr>
-          <p:cNvPr id="4" name="Picture 3" descr="sim200.png"/>
-          <p:cNvPicPr>
-            <a:picLocks noChangeAspect="1"/>
-          </p:cNvPicPr>
+      <p:sp>
+        <p:nvSpPr>
+          <p:cNvPr id="4" name="Rounded Rectangle 3"/>
+          <p:cNvSpPr/>
           <p:nvPr/>
-        </p:nvPicPr>
-        <p:blipFill>
-          <a:blip r:embed="rId3"/>
-          <a:stretch>
-            <a:fillRect/>
-          </a:stretch>
-        </p:blipFill>
-        <p:spPr>
-          <a:xfrm>
-            <a:off x="548640" y="1234440"/>
-            <a:ext cx="7589520" cy="3529616"/>
-          </a:xfrm>
-          <a:prstGeom prst="rect">
-            <a:avLst/>
+        </p:nvSpPr>
+        <p:spPr>
+          <a:xfrm>
+            <a:off x="548640" y="1325880"/>
+            <a:ext cx="2377440" cy="1325880"/>
+          </a:xfrm>
+          <a:prstGeom prst="roundRect">
+            <a:avLst>
+              <a:gd name="adj" fmla="val 4000"/>
+            </a:avLst>
           </a:prstGeom>
-        </p:spPr>
-      </p:pic>
+          <a:solidFill>
+            <a:srgbClr val="FFFFFF"/>
+          </a:solidFill>
+          <a:ln w="19050">
+            <a:solidFill>
+              <a:srgbClr val="0E7490"/>
+            </a:solidFill>
+          </a:ln>
+          <a:effectLst/>
+        </p:spPr>
+        <p:style>
+          <a:lnRef idx="1">
+            <a:schemeClr val="accent1"/>
+          </a:lnRef>
+          <a:fillRef idx="3">
+            <a:schemeClr val="accent1"/>
+          </a:fillRef>
+          <a:effectRef idx="2">
+            <a:schemeClr val="accent1"/>
+          </a:effectRef>
+          <a:fontRef idx="minor">
+            <a:schemeClr val="lt1"/>
+          </a:fontRef>
+        </p:style>
+        <p:txBody>
+          <a:bodyPr rtlCol="0" anchor="ctr"/>
+          <a:lstStyle/>
+          <a:p>
+            <a:pPr algn="ctr"/>
+          </a:p>
+        </p:txBody>
+      </p:sp>
       <p:sp>
         <p:nvSpPr>
           <p:cNvPr id="5" name="TextBox 4"/>
@@ -10055,8 +10125,8 @@
         </p:nvSpPr>
         <p:spPr>
           <a:xfrm>
-            <a:off x="548640" y="4809776"/>
-            <a:ext cx="7589520" cy="365760"/>
+            <a:off x="640080" y="1417320"/>
+            <a:ext cx="2194560" cy="1188720"/>
           </a:xfrm>
           <a:prstGeom prst="rect">
             <a:avLst/>
@@ -10064,12 +10134,28 @@
           <a:noFill/>
         </p:spPr>
         <p:txBody>
-          <a:bodyPr wrap="square" anchor="t" lIns="0" rIns="0" tIns="0" bIns="0">
+          <a:bodyPr wrap="square" anchor="ctr" lIns="0" rIns="0" tIns="0" bIns="0">
             <a:spAutoFit/>
           </a:bodyPr>
           <a:lstStyle/>
           <a:p>
-            <a:pPr algn="l">
+            <a:pPr algn="ctr">
+              <a:spcAft>
+                <a:spcPts val="400"/>
+              </a:spcAft>
+            </a:pPr>
+            <a:r>
+              <a:rPr sz="1400" b="1" i="0">
+                <a:solidFill>
+                  <a:srgbClr val="0E7490"/>
+                </a:solidFill>
+                <a:latin typeface="Arial"/>
+              </a:rPr>
+              <a:t>Стан розряду</a:t>
+            </a:r>
+          </a:p>
+          <a:p>
+            <a:pPr algn="ctr">
               <a:spcAft>
                 <a:spcPts val="0"/>
               </a:spcAft>
@@ -10081,21 +10167,113 @@
                 </a:solidFill>
                 <a:latin typeface="Arial"/>
               </a:rPr>
-              <a:t>Рисунок 9 – Модель v8 + ImpactNet у симуляторі fusion-sim, 200 розрядів, 49 зарахованих зривів; праворуч — ті самі онлайн-виходи моделі з measured.csv, різниця лише у виборі моменту</a:t>
-            </a:r>
-          </a:p>
-        </p:txBody>
-      </p:sp>
-      <p:sp>
-        <p:nvSpPr>
-          <p:cNvPr id="6" name="TextBox 5"/>
+              <a:t>копія рушія на поточному кроці</a:t>
+            </a:r>
+          </a:p>
+        </p:txBody>
+      </p:sp>
+      <p:sp>
+        <p:nvSpPr>
+          <p:cNvPr id="6" name="Right Arrow 5"/>
+          <p:cNvSpPr/>
+          <p:nvPr/>
+        </p:nvSpPr>
+        <p:spPr>
+          <a:xfrm>
+            <a:off x="2971800" y="1856231"/>
+            <a:ext cx="365760" cy="274320"/>
+          </a:xfrm>
+          <a:prstGeom prst="rightArrow">
+            <a:avLst/>
+          </a:prstGeom>
+          <a:solidFill>
+            <a:srgbClr val="94A3B8"/>
+          </a:solidFill>
+          <a:ln>
+            <a:noFill/>
+          </a:ln>
+          <a:effectLst/>
+        </p:spPr>
+        <p:style>
+          <a:lnRef idx="1">
+            <a:schemeClr val="accent1"/>
+          </a:lnRef>
+          <a:fillRef idx="3">
+            <a:schemeClr val="accent1"/>
+          </a:fillRef>
+          <a:effectRef idx="2">
+            <a:schemeClr val="accent1"/>
+          </a:effectRef>
+          <a:fontRef idx="minor">
+            <a:schemeClr val="lt1"/>
+          </a:fontRef>
+        </p:style>
+        <p:txBody>
+          <a:bodyPr rtlCol="0" anchor="ctr"/>
+          <a:lstStyle/>
+          <a:p>
+            <a:pPr algn="ctr"/>
+          </a:p>
+        </p:txBody>
+      </p:sp>
+      <p:sp>
+        <p:nvSpPr>
+          <p:cNvPr id="7" name="Rounded Rectangle 6"/>
+          <p:cNvSpPr/>
+          <p:nvPr/>
+        </p:nvSpPr>
+        <p:spPr>
+          <a:xfrm>
+            <a:off x="3383280" y="1325880"/>
+            <a:ext cx="2377440" cy="1325880"/>
+          </a:xfrm>
+          <a:prstGeom prst="roundRect">
+            <a:avLst>
+              <a:gd name="adj" fmla="val 4000"/>
+            </a:avLst>
+          </a:prstGeom>
+          <a:solidFill>
+            <a:srgbClr val="FFFFFF"/>
+          </a:solidFill>
+          <a:ln w="19050">
+            <a:solidFill>
+              <a:srgbClr val="6D28D9"/>
+            </a:solidFill>
+          </a:ln>
+          <a:effectLst/>
+        </p:spPr>
+        <p:style>
+          <a:lnRef idx="1">
+            <a:schemeClr val="accent1"/>
+          </a:lnRef>
+          <a:fillRef idx="3">
+            <a:schemeClr val="accent1"/>
+          </a:fillRef>
+          <a:effectRef idx="2">
+            <a:schemeClr val="accent1"/>
+          </a:effectRef>
+          <a:fontRef idx="minor">
+            <a:schemeClr val="lt1"/>
+          </a:fontRef>
+        </p:style>
+        <p:txBody>
+          <a:bodyPr rtlCol="0" anchor="ctr"/>
+          <a:lstStyle/>
+          <a:p>
+            <a:pPr algn="ctr"/>
+          </a:p>
+        </p:txBody>
+      </p:sp>
+      <p:sp>
+        <p:nvSpPr>
+          <p:cNvPr id="8" name="TextBox 7"/>
           <p:cNvSpPr txBox="1"/>
           <p:nvPr/>
         </p:nvSpPr>
         <p:spPr>
           <a:xfrm>
-            <a:off x="8458200" y="1325880"/>
-            <a:ext cx="3200400" cy="2743200"/>
+            <a:off x="3474720" y="1417320"/>
+            <a:ext cx="2194560" cy="1188720"/>
           </a:xfrm>
           <a:prstGeom prst="rect">
             <a:avLst/>
@@ -10103,6 +10281,355 @@
           <a:noFill/>
         </p:spPr>
         <p:txBody>
+          <a:bodyPr wrap="square" anchor="ctr" lIns="0" rIns="0" tIns="0" bIns="0">
+            <a:spAutoFit/>
+          </a:bodyPr>
+          <a:lstStyle/>
+          <a:p>
+            <a:pPr algn="ctr">
+              <a:spcAft>
+                <a:spcPts val="400"/>
+              </a:spcAft>
+            </a:pPr>
+            <a:r>
+              <a:rPr sz="1400" b="1" i="0">
+                <a:solidFill>
+                  <a:srgbClr val="6D28D9"/>
+                </a:solidFill>
+                <a:latin typeface="Arial"/>
+              </a:rPr>
+              <a:t>5 варіантів дій</a:t>
+            </a:r>
+          </a:p>
+          <a:p>
+            <a:pPr algn="ctr">
+              <a:spcAft>
+                <a:spcPts val="0"/>
+              </a:spcAft>
+            </a:pPr>
+            <a:r>
+              <a:rPr sz="1100" b="0" i="0">
+                <a:solidFill>
+                  <a:srgbClr val="475569"/>
+                </a:solidFill>
+                <a:latin typeface="Arial"/>
+              </a:rPr>
+              <a:t>нічого; густина −10 / −20 %; неон; нагрів або струм</a:t>
+            </a:r>
+          </a:p>
+        </p:txBody>
+      </p:sp>
+      <p:sp>
+        <p:nvSpPr>
+          <p:cNvPr id="9" name="Right Arrow 8"/>
+          <p:cNvSpPr/>
+          <p:nvPr/>
+        </p:nvSpPr>
+        <p:spPr>
+          <a:xfrm>
+            <a:off x="5806440" y="1856231"/>
+            <a:ext cx="365760" cy="274320"/>
+          </a:xfrm>
+          <a:prstGeom prst="rightArrow">
+            <a:avLst/>
+          </a:prstGeom>
+          <a:solidFill>
+            <a:srgbClr val="94A3B8"/>
+          </a:solidFill>
+          <a:ln>
+            <a:noFill/>
+          </a:ln>
+          <a:effectLst/>
+        </p:spPr>
+        <p:style>
+          <a:lnRef idx="1">
+            <a:schemeClr val="accent1"/>
+          </a:lnRef>
+          <a:fillRef idx="3">
+            <a:schemeClr val="accent1"/>
+          </a:fillRef>
+          <a:effectRef idx="2">
+            <a:schemeClr val="accent1"/>
+          </a:effectRef>
+          <a:fontRef idx="minor">
+            <a:schemeClr val="lt1"/>
+          </a:fontRef>
+        </p:style>
+        <p:txBody>
+          <a:bodyPr rtlCol="0" anchor="ctr"/>
+          <a:lstStyle/>
+          <a:p>
+            <a:pPr algn="ctr"/>
+          </a:p>
+        </p:txBody>
+      </p:sp>
+      <p:sp>
+        <p:nvSpPr>
+          <p:cNvPr id="10" name="Rounded Rectangle 9"/>
+          <p:cNvSpPr/>
+          <p:nvPr/>
+        </p:nvSpPr>
+        <p:spPr>
+          <a:xfrm>
+            <a:off x="6217920" y="1325880"/>
+            <a:ext cx="2377440" cy="1325880"/>
+          </a:xfrm>
+          <a:prstGeom prst="roundRect">
+            <a:avLst>
+              <a:gd name="adj" fmla="val 4000"/>
+            </a:avLst>
+          </a:prstGeom>
+          <a:solidFill>
+            <a:srgbClr val="FFFFFF"/>
+          </a:solidFill>
+          <a:ln w="19050">
+            <a:solidFill>
+              <a:srgbClr val="1D4ED8"/>
+            </a:solidFill>
+          </a:ln>
+          <a:effectLst/>
+        </p:spPr>
+        <p:style>
+          <a:lnRef idx="1">
+            <a:schemeClr val="accent1"/>
+          </a:lnRef>
+          <a:fillRef idx="3">
+            <a:schemeClr val="accent1"/>
+          </a:fillRef>
+          <a:effectRef idx="2">
+            <a:schemeClr val="accent1"/>
+          </a:effectRef>
+          <a:fontRef idx="minor">
+            <a:schemeClr val="lt1"/>
+          </a:fontRef>
+        </p:style>
+        <p:txBody>
+          <a:bodyPr rtlCol="0" anchor="ctr"/>
+          <a:lstStyle/>
+          <a:p>
+            <a:pPr algn="ctr"/>
+          </a:p>
+        </p:txBody>
+      </p:sp>
+      <p:sp>
+        <p:nvSpPr>
+          <p:cNvPr id="11" name="TextBox 10"/>
+          <p:cNvSpPr txBox="1"/>
+          <p:nvPr/>
+        </p:nvSpPr>
+        <p:spPr>
+          <a:xfrm>
+            <a:off x="6309359" y="1417320"/>
+            <a:ext cx="2194560" cy="1188720"/>
+          </a:xfrm>
+          <a:prstGeom prst="rect">
+            <a:avLst/>
+          </a:prstGeom>
+          <a:noFill/>
+        </p:spPr>
+        <p:txBody>
+          <a:bodyPr wrap="square" anchor="ctr" lIns="0" rIns="0" tIns="0" bIns="0">
+            <a:spAutoFit/>
+          </a:bodyPr>
+          <a:lstStyle/>
+          <a:p>
+            <a:pPr algn="ctr">
+              <a:spcAft>
+                <a:spcPts val="400"/>
+              </a:spcAft>
+            </a:pPr>
+            <a:r>
+              <a:rPr sz="1400" b="1" i="0">
+                <a:solidFill>
+                  <a:srgbClr val="1D4ED8"/>
+                </a:solidFill>
+                <a:latin typeface="Arial"/>
+              </a:rPr>
+              <a:t>Прогноз 1,5 с</a:t>
+            </a:r>
+          </a:p>
+          <a:p>
+            <a:pPr algn="ctr">
+              <a:spcAft>
+                <a:spcPts val="0"/>
+              </a:spcAft>
+            </a:pPr>
+            <a:r>
+              <a:rPr sz="1100" b="0" i="0">
+                <a:solidFill>
+                  <a:srgbClr val="475569"/>
+                </a:solidFill>
+                <a:latin typeface="Arial"/>
+              </a:rPr>
+              <a:t>запрограмовані хвилі + уставки варіанта; сума λ за горизонт</a:t>
+            </a:r>
+          </a:p>
+        </p:txBody>
+      </p:sp>
+      <p:sp>
+        <p:nvSpPr>
+          <p:cNvPr id="12" name="Right Arrow 11"/>
+          <p:cNvSpPr/>
+          <p:nvPr/>
+        </p:nvSpPr>
+        <p:spPr>
+          <a:xfrm>
+            <a:off x="8641080" y="1856231"/>
+            <a:ext cx="365760" cy="274320"/>
+          </a:xfrm>
+          <a:prstGeom prst="rightArrow">
+            <a:avLst/>
+          </a:prstGeom>
+          <a:solidFill>
+            <a:srgbClr val="94A3B8"/>
+          </a:solidFill>
+          <a:ln>
+            <a:noFill/>
+          </a:ln>
+          <a:effectLst/>
+        </p:spPr>
+        <p:style>
+          <a:lnRef idx="1">
+            <a:schemeClr val="accent1"/>
+          </a:lnRef>
+          <a:fillRef idx="3">
+            <a:schemeClr val="accent1"/>
+          </a:fillRef>
+          <a:effectRef idx="2">
+            <a:schemeClr val="accent1"/>
+          </a:effectRef>
+          <a:fontRef idx="minor">
+            <a:schemeClr val="lt1"/>
+          </a:fontRef>
+        </p:style>
+        <p:txBody>
+          <a:bodyPr rtlCol="0" anchor="ctr"/>
+          <a:lstStyle/>
+          <a:p>
+            <a:pPr algn="ctr"/>
+          </a:p>
+        </p:txBody>
+      </p:sp>
+      <p:sp>
+        <p:nvSpPr>
+          <p:cNvPr id="13" name="Rounded Rectangle 12"/>
+          <p:cNvSpPr/>
+          <p:nvPr/>
+        </p:nvSpPr>
+        <p:spPr>
+          <a:xfrm>
+            <a:off x="9052560" y="1325880"/>
+            <a:ext cx="2377440" cy="1325880"/>
+          </a:xfrm>
+          <a:prstGeom prst="roundRect">
+            <a:avLst>
+              <a:gd name="adj" fmla="val 4000"/>
+            </a:avLst>
+          </a:prstGeom>
+          <a:solidFill>
+            <a:srgbClr val="FFFFFF"/>
+          </a:solidFill>
+          <a:ln w="19050">
+            <a:solidFill>
+              <a:srgbClr val="C2410C"/>
+            </a:solidFill>
+          </a:ln>
+          <a:effectLst/>
+        </p:spPr>
+        <p:style>
+          <a:lnRef idx="1">
+            <a:schemeClr val="accent1"/>
+          </a:lnRef>
+          <a:fillRef idx="3">
+            <a:schemeClr val="accent1"/>
+          </a:fillRef>
+          <a:effectRef idx="2">
+            <a:schemeClr val="accent1"/>
+          </a:effectRef>
+          <a:fontRef idx="minor">
+            <a:schemeClr val="lt1"/>
+          </a:fontRef>
+        </p:style>
+        <p:txBody>
+          <a:bodyPr rtlCol="0" anchor="ctr"/>
+          <a:lstStyle/>
+          <a:p>
+            <a:pPr algn="ctr"/>
+          </a:p>
+        </p:txBody>
+      </p:sp>
+      <p:sp>
+        <p:nvSpPr>
+          <p:cNvPr id="14" name="TextBox 13"/>
+          <p:cNvSpPr txBox="1"/>
+          <p:nvPr/>
+        </p:nvSpPr>
+        <p:spPr>
+          <a:xfrm>
+            <a:off x="9144000" y="1417320"/>
+            <a:ext cx="2194560" cy="1188720"/>
+          </a:xfrm>
+          <a:prstGeom prst="rect">
+            <a:avLst/>
+          </a:prstGeom>
+          <a:noFill/>
+        </p:spPr>
+        <p:txBody>
+          <a:bodyPr wrap="square" anchor="ctr" lIns="0" rIns="0" tIns="0" bIns="0">
+            <a:spAutoFit/>
+          </a:bodyPr>
+          <a:lstStyle/>
+          <a:p>
+            <a:pPr algn="ctr">
+              <a:spcAft>
+                <a:spcPts val="400"/>
+              </a:spcAft>
+            </a:pPr>
+            <a:r>
+              <a:rPr sz="1400" b="1" i="0">
+                <a:solidFill>
+                  <a:srgbClr val="C2410C"/>
+                </a:solidFill>
+                <a:latin typeface="Arial"/>
+              </a:rPr>
+              <a:t>Вибір дії</a:t>
+            </a:r>
+          </a:p>
+          <a:p>
+            <a:pPr algn="ctr">
+              <a:spcAft>
+                <a:spcPts val="0"/>
+              </a:spcAft>
+            </a:pPr>
+            <a:r>
+              <a:rPr sz="1100" b="0" i="0">
+                <a:solidFill>
+                  <a:srgbClr val="475569"/>
+                </a:solidFill>
+                <a:latin typeface="Arial"/>
+              </a:rPr>
+              <a:t>мінімум ціни J, кожні 0,25 с</a:t>
+            </a:r>
+          </a:p>
+        </p:txBody>
+      </p:sp>
+      <p:sp>
+        <p:nvSpPr>
+          <p:cNvPr id="15" name="TextBox 14"/>
+          <p:cNvSpPr txBox="1"/>
+          <p:nvPr/>
+        </p:nvSpPr>
+        <p:spPr>
+          <a:xfrm>
+            <a:off x="548640" y="2743200"/>
+            <a:ext cx="10972800" cy="365760"/>
+          </a:xfrm>
+          <a:prstGeom prst="rect">
+            <a:avLst/>
+          </a:prstGeom>
+          <a:noFill/>
+        </p:spPr>
+        <p:txBody>
           <a:bodyPr wrap="square" anchor="t" lIns="0" rIns="0" tIns="0" bIns="0">
             <a:spAutoFit/>
           </a:bodyPr>
@@ -10110,7 +10637,454 @@
           <a:p>
             <a:pPr algn="l">
               <a:spcAft>
-                <a:spcPts val="700"/>
+                <a:spcPts val="0"/>
+              </a:spcAft>
+            </a:pPr>
+            <a:r>
+              <a:rPr sz="1100" b="0" i="0">
+                <a:solidFill>
+                  <a:srgbClr val="475569"/>
+                </a:solidFill>
+                <a:latin typeface="Arial"/>
+              </a:rPr>
+              <a:t>Рисунок 9 – Схема прогнозного керування (план; потребує копіювання стану рушія)</a:t>
+            </a:r>
+          </a:p>
+        </p:txBody>
+      </p:sp>
+      <p:sp>
+        <p:nvSpPr>
+          <p:cNvPr id="16" name="TextBox 15"/>
+          <p:cNvSpPr txBox="1"/>
+          <p:nvPr/>
+        </p:nvSpPr>
+        <p:spPr>
+          <a:xfrm>
+            <a:off x="548640" y="3200400"/>
+            <a:ext cx="5669280" cy="822960"/>
+          </a:xfrm>
+          <a:prstGeom prst="rect">
+            <a:avLst/>
+          </a:prstGeom>
+          <a:noFill/>
+        </p:spPr>
+        <p:txBody>
+          <a:bodyPr wrap="square" anchor="t" lIns="0" rIns="0" tIns="0" bIns="0">
+            <a:spAutoFit/>
+          </a:bodyPr>
+          <a:lstStyle/>
+          <a:p>
+            <a:pPr algn="l">
+              <a:spcAft>
+                <a:spcPts val="400"/>
+              </a:spcAft>
+            </a:pPr>
+            <a:r>
+              <a:rPr sz="1500" b="1" i="0">
+                <a:solidFill>
+                  <a:srgbClr val="0F172A"/>
+                </a:solidFill>
+                <a:latin typeface="Arial"/>
+              </a:rPr>
+              <a:t>J = P(зрив за горизонт) + α · втрата продуктивності</a:t>
+            </a:r>
+          </a:p>
+          <a:p>
+            <a:pPr algn="l">
+              <a:spcAft>
+                <a:spcPts val="0"/>
+              </a:spcAft>
+            </a:pPr>
+            <a:r>
+              <a:rPr sz="1200" b="0" i="0">
+                <a:solidFill>
+                  <a:srgbClr val="475569"/>
+                </a:solidFill>
+                <a:latin typeface="Arial"/>
+              </a:rPr>
+              <a:t>P = 1 − exp(−Σλ·Δt) по прогнозу копії; без другого доданку найкращою дією завжди було б «вимкнути все»</a:t>
+            </a:r>
+          </a:p>
+        </p:txBody>
+      </p:sp>
+      <p:sp>
+        <p:nvSpPr>
+          <p:cNvPr id="17" name="TextBox 16"/>
+          <p:cNvSpPr txBox="1"/>
+          <p:nvPr/>
+        </p:nvSpPr>
+        <p:spPr>
+          <a:xfrm>
+            <a:off x="548640" y="4206240"/>
+            <a:ext cx="5669280" cy="320040"/>
+          </a:xfrm>
+          <a:prstGeom prst="rect">
+            <a:avLst/>
+          </a:prstGeom>
+          <a:noFill/>
+        </p:spPr>
+        <p:txBody>
+          <a:bodyPr wrap="square" anchor="t" lIns="0" rIns="0" tIns="0" bIns="0">
+            <a:spAutoFit/>
+          </a:bodyPr>
+          <a:lstStyle/>
+          <a:p>
+            <a:pPr algn="l">
+              <a:spcAft>
+                <a:spcPts val="0"/>
+              </a:spcAft>
+            </a:pPr>
+            <a:r>
+              <a:rPr sz="1100" b="0" i="0">
+                <a:solidFill>
+                  <a:srgbClr val="475569"/>
+                </a:solidFill>
+                <a:latin typeface="Arial"/>
+              </a:rPr>
+              <a:t>Таблиця 8 – Оцінка часових масштабів</a:t>
+            </a:r>
+          </a:p>
+        </p:txBody>
+      </p:sp>
+      <p:graphicFrame>
+        <p:nvGraphicFramePr>
+          <p:cNvPr id="18" name="Table 17"/>
+          <p:cNvGraphicFramePr>
+            <a:graphicFrameLocks noGrp="1"/>
+          </p:cNvGraphicFramePr>
+          <p:nvPr/>
+        </p:nvGraphicFramePr>
+        <p:xfrm>
+          <a:off x="548640" y="4572000"/>
+          <a:ext cx="5669280" cy="1975104"/>
+        </p:xfrm>
+        <a:graphic>
+          <a:graphicData uri="http://schemas.openxmlformats.org/drawingml/2006/table">
+            <a:tbl>
+              <a:tblPr firstRow="0" bandRow="0">
+                <a:tableStyleId>{5C22544A-7EE6-4342-B048-85BDC9FD1C3A}</a:tableStyleId>
+              </a:tblPr>
+              <a:tblGrid>
+                <a:gridCol w="2834640"/>
+                <a:gridCol w="2834640"/>
+              </a:tblGrid>
+              <a:tr h="329184">
+                <a:tc>
+                  <a:txBody>
+                    <a:bodyPr wrap="square"/>
+                    <a:lstStyle/>
+                    <a:p>
+                      <a:pPr algn="l"/>
+                      <a:r>
+                        <a:rPr sz="1100" b="1">
+                          <a:solidFill>
+                            <a:srgbClr val="475569"/>
+                          </a:solidFill>
+                          <a:latin typeface="Arial"/>
+                        </a:rPr>
+                        <a:t>величина</a:t>
+                      </a:r>
+                    </a:p>
+                  </a:txBody>
+                  <a:tcPr marL="91440" marR="91440" marT="27432" marB="27432" anchor="ctr">
+                    <a:solidFill>
+                      <a:srgbClr val="F1F5F9"/>
+                    </a:solidFill>
+                  </a:tcPr>
+                </a:tc>
+                <a:tc>
+                  <a:txBody>
+                    <a:bodyPr wrap="square"/>
+                    <a:lstStyle/>
+                    <a:p>
+                      <a:pPr algn="ctr"/>
+                      <a:r>
+                        <a:rPr sz="1100" b="1">
+                          <a:solidFill>
+                            <a:srgbClr val="475569"/>
+                          </a:solidFill>
+                          <a:latin typeface="Arial"/>
+                        </a:rPr>
+                        <a:t>значення</a:t>
+                      </a:r>
+                    </a:p>
+                  </a:txBody>
+                  <a:tcPr marL="91440" marR="91440" marT="27432" marB="27432" anchor="ctr">
+                    <a:solidFill>
+                      <a:srgbClr val="F1F5F9"/>
+                    </a:solidFill>
+                  </a:tcPr>
+                </a:tc>
+              </a:tr>
+              <a:tr h="329184">
+                <a:tc>
+                  <a:txBody>
+                    <a:bodyPr wrap="square"/>
+                    <a:lstStyle/>
+                    <a:p>
+                      <a:pPr algn="l"/>
+                      <a:r>
+                        <a:rPr sz="1100" b="1">
+                          <a:solidFill>
+                            <a:srgbClr val="0F172A"/>
+                          </a:solidFill>
+                          <a:latin typeface="Arial"/>
+                        </a:rPr>
+                        <a:t>реакція плазми на уставку</a:t>
+                      </a:r>
+                    </a:p>
+                  </a:txBody>
+                  <a:tcPr marL="91440" marR="91440" marT="27432" marB="27432" anchor="ctr">
+                    <a:solidFill>
+                      <a:srgbClr val="FFFFFF"/>
+                    </a:solidFill>
+                  </a:tcPr>
+                </a:tc>
+                <a:tc>
+                  <a:txBody>
+                    <a:bodyPr wrap="square"/>
+                    <a:lstStyle/>
+                    <a:p>
+                      <a:pPr algn="ctr"/>
+                      <a:r>
+                        <a:rPr sz="1100" b="0">
+                          <a:solidFill>
+                            <a:srgbClr val="0F172A"/>
+                          </a:solidFill>
+                          <a:latin typeface="Arial"/>
+                        </a:rPr>
+                        <a:t>густина ≈ 0,3 с, неон ≈ 0,5 с</a:t>
+                      </a:r>
+                    </a:p>
+                  </a:txBody>
+                  <a:tcPr marL="91440" marR="91440" marT="27432" marB="27432" anchor="ctr">
+                    <a:solidFill>
+                      <a:srgbClr val="FFFFFF"/>
+                    </a:solidFill>
+                  </a:tcPr>
+                </a:tc>
+              </a:tr>
+              <a:tr h="329184">
+                <a:tc>
+                  <a:txBody>
+                    <a:bodyPr wrap="square"/>
+                    <a:lstStyle/>
+                    <a:p>
+                      <a:pPr algn="l"/>
+                      <a:r>
+                        <a:rPr sz="1100" b="1">
+                          <a:solidFill>
+                            <a:srgbClr val="0F172A"/>
+                          </a:solidFill>
+                          <a:latin typeface="Arial"/>
+                        </a:rPr>
+                        <a:t>попередження на кінкових розрядах</a:t>
+                      </a:r>
+                    </a:p>
+                  </a:txBody>
+                  <a:tcPr marL="91440" marR="91440" marT="27432" marB="27432" anchor="ctr">
+                    <a:solidFill>
+                      <a:srgbClr val="FFFFFF"/>
+                    </a:solidFill>
+                  </a:tcPr>
+                </a:tc>
+                <a:tc>
+                  <a:txBody>
+                    <a:bodyPr wrap="square"/>
+                    <a:lstStyle/>
+                    <a:p>
+                      <a:pPr algn="ctr"/>
+                      <a:r>
+                        <a:rPr sz="1100" b="0">
+                          <a:solidFill>
+                            <a:srgbClr val="0F172A"/>
+                          </a:solidFill>
+                          <a:latin typeface="Arial"/>
+                        </a:rPr>
+                        <a:t>5–75 мс (200 розрядів fusion-sim)</a:t>
+                      </a:r>
+                    </a:p>
+                  </a:txBody>
+                  <a:tcPr marL="91440" marR="91440" marT="27432" marB="27432" anchor="ctr">
+                    <a:solidFill>
+                      <a:srgbClr val="FFFFFF"/>
+                    </a:solidFill>
+                  </a:tcPr>
+                </a:tc>
+              </a:tr>
+              <a:tr h="329184">
+                <a:tc>
+                  <a:txBody>
+                    <a:bodyPr wrap="square"/>
+                    <a:lstStyle/>
+                    <a:p>
+                      <a:pPr algn="l"/>
+                      <a:r>
+                        <a:rPr sz="1100" b="1">
+                          <a:solidFill>
+                            <a:srgbClr val="0F172A"/>
+                          </a:solidFill>
+                          <a:latin typeface="Arial"/>
+                        </a:rPr>
+                        <a:t>горизонт прогнозу</a:t>
+                      </a:r>
+                    </a:p>
+                  </a:txBody>
+                  <a:tcPr marL="91440" marR="91440" marT="27432" marB="27432" anchor="ctr">
+                    <a:solidFill>
+                      <a:srgbClr val="FFFFFF"/>
+                    </a:solidFill>
+                  </a:tcPr>
+                </a:tc>
+                <a:tc>
+                  <a:txBody>
+                    <a:bodyPr wrap="square"/>
+                    <a:lstStyle/>
+                    <a:p>
+                      <a:pPr algn="ctr"/>
+                      <a:r>
+                        <a:rPr sz="1100" b="0">
+                          <a:solidFill>
+                            <a:srgbClr val="0F172A"/>
+                          </a:solidFill>
+                          <a:latin typeface="Arial"/>
+                        </a:rPr>
+                        <a:t>1,5 с = 300 кроків ≈ 5 τ густини</a:t>
+                      </a:r>
+                    </a:p>
+                  </a:txBody>
+                  <a:tcPr marL="91440" marR="91440" marT="27432" marB="27432" anchor="ctr">
+                    <a:solidFill>
+                      <a:srgbClr val="FFFFFF"/>
+                    </a:solidFill>
+                  </a:tcPr>
+                </a:tc>
+              </a:tr>
+              <a:tr h="329184">
+                <a:tc>
+                  <a:txBody>
+                    <a:bodyPr wrap="square"/>
+                    <a:lstStyle/>
+                    <a:p>
+                      <a:pPr algn="l"/>
+                      <a:r>
+                        <a:rPr sz="1100" b="1">
+                          <a:solidFill>
+                            <a:srgbClr val="0F172A"/>
+                          </a:solidFill>
+                          <a:latin typeface="Arial"/>
+                        </a:rPr>
+                        <a:t>обчислення на рішення</a:t>
+                      </a:r>
+                    </a:p>
+                  </a:txBody>
+                  <a:tcPr marL="91440" marR="91440" marT="27432" marB="27432" anchor="ctr">
+                    <a:solidFill>
+                      <a:srgbClr val="FFFFFF"/>
+                    </a:solidFill>
+                  </a:tcPr>
+                </a:tc>
+                <a:tc>
+                  <a:txBody>
+                    <a:bodyPr wrap="square"/>
+                    <a:lstStyle/>
+                    <a:p>
+                      <a:pPr algn="ctr"/>
+                      <a:r>
+                        <a:rPr sz="1100" b="0">
+                          <a:solidFill>
+                            <a:srgbClr val="0F172A"/>
+                          </a:solidFill>
+                          <a:latin typeface="Arial"/>
+                        </a:rPr>
+                        <a:t>5 × 300 = 1 500 кроків рушія</a:t>
+                      </a:r>
+                    </a:p>
+                  </a:txBody>
+                  <a:tcPr marL="91440" marR="91440" marT="27432" marB="27432" anchor="ctr">
+                    <a:solidFill>
+                      <a:srgbClr val="FFFFFF"/>
+                    </a:solidFill>
+                  </a:tcPr>
+                </a:tc>
+              </a:tr>
+              <a:tr h="329184">
+                <a:tc>
+                  <a:txBody>
+                    <a:bodyPr wrap="square"/>
+                    <a:lstStyle/>
+                    <a:p>
+                      <a:pPr algn="l"/>
+                      <a:r>
+                        <a:rPr sz="1100" b="1">
+                          <a:solidFill>
+                            <a:srgbClr val="0F172A"/>
+                          </a:solidFill>
+                          <a:latin typeface="Arial"/>
+                        </a:rPr>
+                        <a:t>внесення зміни</a:t>
+                      </a:r>
+                    </a:p>
+                  </a:txBody>
+                  <a:tcPr marL="91440" marR="91440" marT="27432" marB="27432" anchor="ctr">
+                    <a:solidFill>
+                      <a:srgbClr val="FFFFFF"/>
+                    </a:solidFill>
+                  </a:tcPr>
+                </a:tc>
+                <a:tc>
+                  <a:txBody>
+                    <a:bodyPr wrap="square"/>
+                    <a:lstStyle/>
+                    <a:p>
+                      <a:pPr algn="ctr"/>
+                      <a:r>
+                        <a:rPr sz="1100" b="0">
+                          <a:solidFill>
+                            <a:srgbClr val="0F172A"/>
+                          </a:solidFill>
+                          <a:latin typeface="Arial"/>
+                        </a:rPr>
+                        <a:t>1–3 кадри = 5–15 мс</a:t>
+                      </a:r>
+                    </a:p>
+                  </a:txBody>
+                  <a:tcPr marL="91440" marR="91440" marT="27432" marB="27432" anchor="ctr">
+                    <a:solidFill>
+                      <a:srgbClr val="FFFFFF"/>
+                    </a:solidFill>
+                  </a:tcPr>
+                </a:tc>
+              </a:tr>
+            </a:tbl>
+          </a:graphicData>
+        </a:graphic>
+      </p:graphicFrame>
+      <p:sp>
+        <p:nvSpPr>
+          <p:cNvPr id="19" name="TextBox 18"/>
+          <p:cNvSpPr txBox="1"/>
+          <p:nvPr/>
+        </p:nvSpPr>
+        <p:spPr>
+          <a:xfrm>
+            <a:off x="6766560" y="3200400"/>
+            <a:ext cx="4892040" cy="2286000"/>
+          </a:xfrm>
+          <a:prstGeom prst="rect">
+            <a:avLst/>
+          </a:prstGeom>
+          <a:noFill/>
+        </p:spPr>
+        <p:txBody>
+          <a:bodyPr wrap="square" anchor="t" lIns="0" rIns="0" tIns="0" bIns="0">
+            <a:spAutoFit/>
+          </a:bodyPr>
+          <a:lstStyle/>
+          <a:p>
+            <a:pPr algn="l">
+              <a:spcAft>
+                <a:spcPts val="800"/>
               </a:spcAft>
             </a:pPr>
             <a:r>
@@ -10120,7 +11094,7 @@
                 </a:solidFill>
                 <a:latin typeface="Arial"/>
               </a:rPr>
-              <a:t>Тривога – </a:t>
+              <a:t>Чому копія – </a:t>
             </a:r>
             <a:r>
               <a:rPr sz="1200" b="0" i="0">
@@ -10129,13 +11103,13 @@
                 </a:solidFill>
                 <a:latin typeface="Arial"/>
               </a:rPr>
-              <a:t>переноситься: ROC AUC 0,902 проти 0,934 на 0,1 с, 0,970 на 30 мс</a:t>
+              <a:t>реактивний порадник запізнюється: тривога за 5–75 мс, а плазма відповідає за 0,3–0,5 с; копія бачить запрограмоване майбутнє і діє заздалегідь</a:t>
             </a:r>
           </a:p>
           <a:p>
             <a:pPr algn="l">
               <a:spcAft>
-                <a:spcPts val="700"/>
+                <a:spcPts val="800"/>
               </a:spcAft>
             </a:pPr>
             <a:r>
@@ -10145,7 +11119,7 @@
                 </a:solidFill>
                 <a:latin typeface="Arial"/>
               </a:rPr>
-              <a:t>Знахідка – </a:t>
+              <a:t>Вчитель → учень – </a:t>
             </a:r>
             <a:r>
               <a:rPr sz="1200" b="0" i="0">
@@ -10154,13 +11128,13 @@
                 </a:solidFill>
                 <a:latin typeface="Arial"/>
               </a:rPr>
-              <a:t>симулятор брав частки в момент максимуму λ по всьому розряду, а він припадав на прогрів мережі при t = 5 мс, коли плазми ще нема (типова відповідь «Грінвальд 97,6 %»)</a:t>
+              <a:t>копія вибирає дію (верхня межа); мережа вчиться вибирати ту саму дію лише з діагностик — це переноситься на реальну машину</a:t>
             </a:r>
           </a:p>
           <a:p>
             <a:pPr algn="l">
               <a:spcAft>
-                <a:spcPts val="700"/>
+                <a:spcPts val="800"/>
               </a:spcAft>
             </a:pPr>
             <a:r>
@@ -10170,7 +11144,7 @@
                 </a:solidFill>
                 <a:latin typeface="Arial"/>
               </a:rPr>
-              <a:t>Виправлення – </a:t>
+              <a:t>Чесно – </a:t>
             </a:r>
             <a:r>
               <a:rPr sz="1200" b="0" i="0">
@@ -10179,32 +11153,7 @@
                 </a:solidFill>
                 <a:latin typeface="Arial"/>
               </a:rPr>
-              <a:t>максимум λ лише там, де є плазма: 34 → 45 з 49, кінк 4 → 15 з 16, без донавчання</a:t>
-            </a:r>
-          </a:p>
-          <a:p>
-            <a:pPr algn="l">
-              <a:spcAft>
-                <a:spcPts val="700"/>
-              </a:spcAft>
-            </a:pPr>
-            <a:r>
-              <a:rPr sz="1200" b="1" i="0">
-                <a:solidFill>
-                  <a:srgbClr val="0F172A"/>
-                </a:solidFill>
-                <a:latin typeface="Arial"/>
-              </a:rPr>
-              <a:t>Залишок – </a:t>
-            </a:r>
-            <a:r>
-              <a:rPr sz="1200" b="0" i="0">
-                <a:solidFill>
-                  <a:srgbClr val="0F172A"/>
-                </a:solidFill>
-                <a:latin typeface="Arial"/>
-              </a:rPr>
-              <a:t>3 радіаційні зриви названо кінком</a:t>
+              <a:t>копія знає прихований стан плазми, тому її результат — верхня межа, а не досяжний на машині показник</a:t>
             </a:r>
           </a:p>
         </p:txBody>
@@ -10269,7 +11218,7 @@
                 </a:solidFill>
                 <a:latin typeface="Arial"/>
               </a:rPr>
-              <a:t>15 Висновки</a:t>
+              <a:t>14 Перенесення моделей на інший рушій без донавчання</a:t>
             </a:r>
           </a:p>
         </p:txBody>
@@ -10309,6 +11258,296 @@
                 <a:latin typeface="Arial"/>
               </a:rPr>
               <a:t>18</a:t>
+            </a:r>
+          </a:p>
+        </p:txBody>
+      </p:sp>
+      <p:pic>
+        <p:nvPicPr>
+          <p:cNvPr id="4" name="Picture 3" descr="sim200.png"/>
+          <p:cNvPicPr>
+            <a:picLocks noChangeAspect="1"/>
+          </p:cNvPicPr>
+          <p:nvPr/>
+        </p:nvPicPr>
+        <p:blipFill>
+          <a:blip r:embed="rId3"/>
+          <a:stretch>
+            <a:fillRect/>
+          </a:stretch>
+        </p:blipFill>
+        <p:spPr>
+          <a:xfrm>
+            <a:off x="548640" y="1234440"/>
+            <a:ext cx="7589520" cy="3529616"/>
+          </a:xfrm>
+          <a:prstGeom prst="rect">
+            <a:avLst/>
+          </a:prstGeom>
+        </p:spPr>
+      </p:pic>
+      <p:sp>
+        <p:nvSpPr>
+          <p:cNvPr id="5" name="TextBox 4"/>
+          <p:cNvSpPr txBox="1"/>
+          <p:nvPr/>
+        </p:nvSpPr>
+        <p:spPr>
+          <a:xfrm>
+            <a:off x="548640" y="4809776"/>
+            <a:ext cx="7589520" cy="365760"/>
+          </a:xfrm>
+          <a:prstGeom prst="rect">
+            <a:avLst/>
+          </a:prstGeom>
+          <a:noFill/>
+        </p:spPr>
+        <p:txBody>
+          <a:bodyPr wrap="square" anchor="t" lIns="0" rIns="0" tIns="0" bIns="0">
+            <a:spAutoFit/>
+          </a:bodyPr>
+          <a:lstStyle/>
+          <a:p>
+            <a:pPr algn="l">
+              <a:spcAft>
+                <a:spcPts val="0"/>
+              </a:spcAft>
+            </a:pPr>
+            <a:r>
+              <a:rPr sz="1100" b="0" i="0">
+                <a:solidFill>
+                  <a:srgbClr val="475569"/>
+                </a:solidFill>
+                <a:latin typeface="Arial"/>
+              </a:rPr>
+              <a:t>Рисунок 10 – Модель v8 + ImpactNet у симуляторі fusion-sim, 200 розрядів, 49 зарахованих зривів; праворуч — ті самі онлайн-виходи моделі з measured.csv, різниця лише у виборі моменту</a:t>
+            </a:r>
+          </a:p>
+        </p:txBody>
+      </p:sp>
+      <p:sp>
+        <p:nvSpPr>
+          <p:cNvPr id="6" name="TextBox 5"/>
+          <p:cNvSpPr txBox="1"/>
+          <p:nvPr/>
+        </p:nvSpPr>
+        <p:spPr>
+          <a:xfrm>
+            <a:off x="8458200" y="1325880"/>
+            <a:ext cx="3200400" cy="2743200"/>
+          </a:xfrm>
+          <a:prstGeom prst="rect">
+            <a:avLst/>
+          </a:prstGeom>
+          <a:noFill/>
+        </p:spPr>
+        <p:txBody>
+          <a:bodyPr wrap="square" anchor="t" lIns="0" rIns="0" tIns="0" bIns="0">
+            <a:spAutoFit/>
+          </a:bodyPr>
+          <a:lstStyle/>
+          <a:p>
+            <a:pPr algn="l">
+              <a:spcAft>
+                <a:spcPts val="700"/>
+              </a:spcAft>
+            </a:pPr>
+            <a:r>
+              <a:rPr sz="1200" b="1" i="0">
+                <a:solidFill>
+                  <a:srgbClr val="0F172A"/>
+                </a:solidFill>
+                <a:latin typeface="Arial"/>
+              </a:rPr>
+              <a:t>Тривога – </a:t>
+            </a:r>
+            <a:r>
+              <a:rPr sz="1200" b="0" i="0">
+                <a:solidFill>
+                  <a:srgbClr val="0F172A"/>
+                </a:solidFill>
+                <a:latin typeface="Arial"/>
+              </a:rPr>
+              <a:t>переноситься: ROC AUC 0,902 проти 0,934 на 0,1 с, 0,970 на 30 мс</a:t>
+            </a:r>
+          </a:p>
+          <a:p>
+            <a:pPr algn="l">
+              <a:spcAft>
+                <a:spcPts val="700"/>
+              </a:spcAft>
+            </a:pPr>
+            <a:r>
+              <a:rPr sz="1200" b="1" i="0">
+                <a:solidFill>
+                  <a:srgbClr val="0F172A"/>
+                </a:solidFill>
+                <a:latin typeface="Arial"/>
+              </a:rPr>
+              <a:t>Знахідка – </a:t>
+            </a:r>
+            <a:r>
+              <a:rPr sz="1200" b="0" i="0">
+                <a:solidFill>
+                  <a:srgbClr val="0F172A"/>
+                </a:solidFill>
+                <a:latin typeface="Arial"/>
+              </a:rPr>
+              <a:t>симулятор брав частки в момент максимуму λ по всьому розряду, а він припадав на прогрів мережі при t = 5 мс, коли плазми ще нема (типова відповідь «Грінвальд 97,6 %»)</a:t>
+            </a:r>
+          </a:p>
+          <a:p>
+            <a:pPr algn="l">
+              <a:spcAft>
+                <a:spcPts val="700"/>
+              </a:spcAft>
+            </a:pPr>
+            <a:r>
+              <a:rPr sz="1200" b="1" i="0">
+                <a:solidFill>
+                  <a:srgbClr val="0F172A"/>
+                </a:solidFill>
+                <a:latin typeface="Arial"/>
+              </a:rPr>
+              <a:t>Виправлення – </a:t>
+            </a:r>
+            <a:r>
+              <a:rPr sz="1200" b="0" i="0">
+                <a:solidFill>
+                  <a:srgbClr val="0F172A"/>
+                </a:solidFill>
+                <a:latin typeface="Arial"/>
+              </a:rPr>
+              <a:t>максимум λ лише там, де є плазма: 34 → 45 з 49, кінк 4 → 15 з 16, без донавчання</a:t>
+            </a:r>
+          </a:p>
+          <a:p>
+            <a:pPr algn="l">
+              <a:spcAft>
+                <a:spcPts val="700"/>
+              </a:spcAft>
+            </a:pPr>
+            <a:r>
+              <a:rPr sz="1200" b="1" i="0">
+                <a:solidFill>
+                  <a:srgbClr val="0F172A"/>
+                </a:solidFill>
+                <a:latin typeface="Arial"/>
+              </a:rPr>
+              <a:t>Залишок – </a:t>
+            </a:r>
+            <a:r>
+              <a:rPr sz="1200" b="0" i="0">
+                <a:solidFill>
+                  <a:srgbClr val="0F172A"/>
+                </a:solidFill>
+                <a:latin typeface="Arial"/>
+              </a:rPr>
+              <a:t>3 радіаційні зриви названо кінком</a:t>
+            </a:r>
+          </a:p>
+        </p:txBody>
+      </p:sp>
+    </p:spTree>
+  </p:cSld>
+  <p:clrMapOvr>
+    <a:masterClrMapping/>
+  </p:clrMapOvr>
+</p:sld>
+</file>
+
+<file path=ppt/slides/slide19.xml><?xml version="1.0" encoding="utf-8"?>
+<p:sld xmlns:a="http://schemas.openxmlformats.org/drawingml/2006/main" xmlns:p="http://schemas.openxmlformats.org/presentationml/2006/main" xmlns:r="http://schemas.openxmlformats.org/officeDocument/2006/relationships">
+  <p:cSld>
+    <p:bg>
+      <p:bgPr>
+        <a:solidFill>
+          <a:srgbClr val="FFFFFF"/>
+        </a:solidFill>
+        <a:effectLst/>
+      </p:bgPr>
+    </p:bg>
+    <p:spTree>
+      <p:nvGrpSpPr>
+        <p:cNvPr id="1" name=""/>
+        <p:cNvGrpSpPr/>
+        <p:nvPr/>
+      </p:nvGrpSpPr>
+      <p:grpSpPr/>
+      <p:sp>
+        <p:nvSpPr>
+          <p:cNvPr id="2" name="TextBox 1"/>
+          <p:cNvSpPr txBox="1"/>
+          <p:nvPr/>
+        </p:nvSpPr>
+        <p:spPr>
+          <a:xfrm>
+            <a:off x="548640" y="411480"/>
+            <a:ext cx="11064240" cy="640080"/>
+          </a:xfrm>
+          <a:prstGeom prst="rect">
+            <a:avLst/>
+          </a:prstGeom>
+          <a:noFill/>
+        </p:spPr>
+        <p:txBody>
+          <a:bodyPr wrap="square" anchor="t" lIns="0" rIns="0" tIns="0" bIns="0">
+            <a:spAutoFit/>
+          </a:bodyPr>
+          <a:lstStyle/>
+          <a:p>
+            <a:pPr algn="l">
+              <a:spcAft>
+                <a:spcPts val="0"/>
+              </a:spcAft>
+            </a:pPr>
+            <a:r>
+              <a:rPr sz="2600" b="1" i="0">
+                <a:solidFill>
+                  <a:srgbClr val="0F172A"/>
+                </a:solidFill>
+                <a:latin typeface="Arial"/>
+              </a:rPr>
+              <a:t>15 Висновки</a:t>
+            </a:r>
+          </a:p>
+        </p:txBody>
+      </p:sp>
+      <p:sp>
+        <p:nvSpPr>
+          <p:cNvPr id="3" name="TextBox 2"/>
+          <p:cNvSpPr txBox="1"/>
+          <p:nvPr/>
+        </p:nvSpPr>
+        <p:spPr>
+          <a:xfrm>
+            <a:off x="11247120" y="6446520"/>
+            <a:ext cx="457200" cy="274320"/>
+          </a:xfrm>
+          <a:prstGeom prst="rect">
+            <a:avLst/>
+          </a:prstGeom>
+          <a:noFill/>
+        </p:spPr>
+        <p:txBody>
+          <a:bodyPr wrap="square" anchor="t" lIns="0" rIns="0" tIns="0" bIns="0">
+            <a:spAutoFit/>
+          </a:bodyPr>
+          <a:lstStyle/>
+          <a:p>
+            <a:pPr algn="r">
+              <a:spcAft>
+                <a:spcPts val="0"/>
+              </a:spcAft>
+            </a:pPr>
+            <a:r>
+              <a:rPr sz="1000" b="0" i="0">
+                <a:solidFill>
+                  <a:srgbClr val="94A3B8"/>
+                </a:solidFill>
+                <a:latin typeface="Arial"/>
+              </a:rPr>
+              <a:t>19</a:t>
             </a:r>
           </a:p>
         </p:txBody>

--- a/docs/presentation.pptx
+++ b/docs/presentation.pptx
@@ -1080,7 +1080,7 @@
           <a:lstStyle/>
           <a:p>
             <a:r>
-              <a:t>≈50 с. Порадник зараз реагує на тривогу, але плазма відповідає на зміну уставки із затримкою: густина ≈ 0,3 с, неон ≈ 0,5 с, а на кінкових розрядах тривога приходить лише за 5–75 мс до гасіння. Тому план — прогнозне керування: кожні 0,25 с копія стану програє 5 варіантів дій на 1,5 с уперед з урахуванням запрограмованих хвиль і вибирає дію з найменшою ціною: ймовірність зриву плюс втрата продуктивності. Копія знає прихований стан, тому це верхня межа; на машину переноситься учень — мережа, що вчиться вибирати ту саму дію лише з діагностик.</a:t>
+              <a:t>≈60 с. Порадник зараз реагує на тривогу, але плазма відповідає на зміну уставки із затримкою: густина ≈ 0,3 с, неон ≈ 0,5 с, а на кінкових розрядах тривога приходить лише за 5–75 мс до гасіння. План — прогнозне керування: кожні 0,25 с копія стану програє 5 варіантів дій на 1,5 с уперед і вибирає дію з найменшою ціною: ймовірність зриву плюс втрата продуктивності. Уставки в копії тримаються на поточному рівні, щоб вчитель не бачив запланованих збурень — інакше учень не зможе його навчитися. Копія знає прихований стан, тому вона — вчитель і верхня межа; на машину переноситься учень, що вибирає дію лише з діагностик і запускається від λ, яку оцінює ImpactNet. Після першого учня — раунд DAgger.</a:t>
             </a:r>
           </a:p>
         </p:txBody>
@@ -10025,7 +10025,7 @@
                 </a:solidFill>
                 <a:latin typeface="Arial"/>
               </a:rPr>
-              <a:t>13.1 Наступний крок: прогнозне керування на копії рушія</a:t>
+              <a:t>13.1 Наступний крок: прогнозне керування і навчання учня</a:t>
             </a:r>
           </a:p>
         </p:txBody>
@@ -10167,7 +10167,7 @@
                 </a:solidFill>
                 <a:latin typeface="Arial"/>
               </a:rPr>
-              <a:t>копія рушія на поточному кроці</a:t>
+              <a:t>копія рушія; уставки на поточному рівні, без запланованих збурень</a:t>
             </a:r>
           </a:p>
         </p:txBody>
@@ -10314,7 +10314,7 @@
                 </a:solidFill>
                 <a:latin typeface="Arial"/>
               </a:rPr>
-              <a:t>нічого; густина −10 / −20 %; неон; нагрів або струм</a:t>
+              <a:t>нічого; густина −10 / −20 %; неон; нагрів або струм; «послабити»</a:t>
             </a:r>
           </a:p>
         </p:txBody>
@@ -10461,7 +10461,7 @@
                 </a:solidFill>
                 <a:latin typeface="Arial"/>
               </a:rPr>
-              <a:t>запрограмовані хвилі + уставки варіанта; сума λ за горизонт</a:t>
+              <a:t>сума λ і втрата продуктивності для кожного варіанта</a:t>
             </a:r>
           </a:p>
         </p:txBody>
@@ -10608,7 +10608,7 @@
                 </a:solidFill>
                 <a:latin typeface="Arial"/>
               </a:rPr>
-              <a:t>мінімум ціни J, кожні 0,25 с</a:t>
+              <a:t>мінімум ціни J, кожні 0,25 с; запуск від λ, а не від тривоги</a:t>
             </a:r>
           </a:p>
         </p:txBody>
@@ -10647,7 +10647,7 @@
                 </a:solidFill>
                 <a:latin typeface="Arial"/>
               </a:rPr>
-              <a:t>Рисунок 9 – Схема прогнозного керування (план; потребує копіювання стану рушія)</a:t>
+              <a:t>Рисунок 9 – Схема вчителя: прогнозне керування на копії рушія (план; потребує копіювання стану рушія)</a:t>
             </a:r>
           </a:p>
         </p:txBody>
@@ -11068,8 +11068,8 @@
         </p:nvSpPr>
         <p:spPr>
           <a:xfrm>
-            <a:off x="6766560" y="3200400"/>
-            <a:ext cx="4892040" cy="2286000"/>
+            <a:off x="6766560" y="3154680"/>
+            <a:ext cx="4892040" cy="2743200"/>
           </a:xfrm>
           <a:prstGeom prst="rect">
             <a:avLst/>
@@ -11084,7 +11084,7 @@
           <a:p>
             <a:pPr algn="l">
               <a:spcAft>
-                <a:spcPts val="800"/>
+                <a:spcPts val="700"/>
               </a:spcAft>
             </a:pPr>
             <a:r>
@@ -11103,13 +11103,13 @@
                 </a:solidFill>
                 <a:latin typeface="Arial"/>
               </a:rPr>
-              <a:t>реактивний порадник запізнюється: тривога за 5–75 мс, а плазма відповідає за 0,3–0,5 с; копія бачить запрограмоване майбутнє і діє заздалегідь</a:t>
+              <a:t>реактивний порадник запізнюється: тривога за 5–75 мс, а плазма відповідає за 0,3–0,5 с</a:t>
             </a:r>
           </a:p>
           <a:p>
             <a:pPr algn="l">
               <a:spcAft>
-                <a:spcPts val="800"/>
+                <a:spcPts val="700"/>
               </a:spcAft>
             </a:pPr>
             <a:r>
@@ -11119,7 +11119,7 @@
                 </a:solidFill>
                 <a:latin typeface="Arial"/>
               </a:rPr>
-              <a:t>Вчитель → учень – </a:t>
+              <a:t>Дані для учня – </a:t>
             </a:r>
             <a:r>
               <a:rPr sz="1200" b="0" i="0">
@@ -11128,13 +11128,13 @@
                 </a:solidFill>
                 <a:latin typeface="Arial"/>
               </a:rPr>
-              <a:t>копія вибирає дію (верхня межа); мережа вчиться вибирати ту саму дію лише з діагностик — це переноситься на реальну машину</a:t>
+              <a:t>ризик і втрата продуктивності кожного варіанта окремо (α підбирається потім, м'які мітки) та поточні множники уставок (щоб не повторювати дію)</a:t>
             </a:r>
           </a:p>
           <a:p>
             <a:pPr algn="l">
               <a:spcAft>
-                <a:spcPts val="800"/>
+                <a:spcPts val="700"/>
               </a:spcAft>
             </a:pPr>
             <a:r>
@@ -11144,6 +11144,31 @@
                 </a:solidFill>
                 <a:latin typeface="Arial"/>
               </a:rPr>
+              <a:t>Учень – </a:t>
+            </a:r>
+            <a:r>
+              <a:rPr sz="1200" b="0" i="0">
+                <a:solidFill>
+                  <a:srgbClr val="0F172A"/>
+                </a:solidFill>
+                <a:latin typeface="Arial"/>
+              </a:rPr>
+              <a:t>вибирає дію лише з діагностик; запускається від λ, яку оцінює ImpactNet; далі раунд DAgger: учень керує, вчитель розмічає</a:t>
+            </a:r>
+          </a:p>
+          <a:p>
+            <a:pPr algn="l">
+              <a:spcAft>
+                <a:spcPts val="700"/>
+              </a:spcAft>
+            </a:pPr>
+            <a:r>
+              <a:rPr sz="1200" b="1" i="0">
+                <a:solidFill>
+                  <a:srgbClr val="0F172A"/>
+                </a:solidFill>
+                <a:latin typeface="Arial"/>
+              </a:rPr>
               <a:t>Чесно – </a:t>
             </a:r>
             <a:r>
@@ -11153,7 +11178,7 @@
                 </a:solidFill>
                 <a:latin typeface="Arial"/>
               </a:rPr>
-              <a:t>копія знає прихований стан плазми, тому її результат — верхня межа, а не досяжний на машині показник</a:t>
+              <a:t>копія знає прихований стан плазми, тому її результат — верхня межа; на машину переноситься учень</a:t>
             </a:r>
           </a:p>
         </p:txBody>

--- a/docs/presentation.pptx
+++ b/docs/presentation.pptx
@@ -1010,7 +1010,7 @@
           <a:lstStyle/>
           <a:p>
             <a:r>
-              <a:t>≈50 с. Симулятор fusion-sim з керуванням у реальному часі: модель тривоги, ImpactNet і порадник. Замкнений контур на 40 розрядах: 11 зривів без керування, 5 з керуванням. Атрибуція на новому рушії, 200 розрядів: 34 з 49; Грінвальд 16 з 16, радіація 14 з 17, кінк лише 4 з 16. Рушій не моделює шум діагностик, тому калібрування моделей, навчених на шумних даних, переноситься не повністю; наступний крок — додати вимірювальний тракт toksym.</a:t>
+              <a:t>≈60 с. Ланцюг «побачити → пояснити → виправити»: v8 дає тривогу, ImpactNet — ризик і причину, учень fixer вибирає одну з 8 дій. 100 нових розрядів, однакових у всіх режимах. Без керування 31 зрив, якому можна запобігти; порадник на правилах — 21; вчитель на копії рушія — 5; учень, який бачить лише прилади, — теж 5. Учень зрівнявся з ідеальним двійником. Жодного розряду не зіпсовано: 26 врятовано, 0 зіпсовано, p = 3·10⁻⁸. Енергія плазми не впала. Спонтанні зриви, 8–9 зі 100, не відверне ніхто; без них 95 % розрядів без зриву проти 69 %.</a:t>
             </a:r>
           </a:p>
         </p:txBody>
@@ -1080,7 +1080,7 @@
           <a:lstStyle/>
           <a:p>
             <a:r>
-              <a:t>≈60 с. Порадник зараз реагує на тривогу, але плазма відповідає на зміну уставки із затримкою: густина ≈ 0,3 с, неон ≈ 0,5 с, а на кінкових розрядах тривога приходить лише за 5–75 мс до гасіння. План — прогнозне керування: кожні 0,25 с копія стану програє 5 варіантів дій на 1,5 с уперед і вибирає дію з найменшою ціною: ймовірність зриву плюс втрата продуктивності. Уставки в копії тримаються на поточному рівні, щоб вчитель не бачив запланованих збурень — інакше учень не зможе його навчитися. Копія знає прихований стан, тому вона — вчитель і верхня межа; на машину переноситься учень, що вибирає дію лише з діагностик і запускається від λ, яку оцінює ImpactNet. Після першого учня — раунд DAgger.</a:t>
+              <a:t>≈60 с. Вчитель кожні 0,25 с копіює стан рушія разом з генератором випадкових чисел і програє 8 дій на 1 с уперед, рахуючи ймовірність зриву і втрату продуктивності; вибирає найдешевшу. Копія знає розклад машини, як його знає система керування, але не бачить незапланованих збурень газу. Копія знає прихований стан, тому вчитель — лише верхня межа. Учень — 16 регресорів градієнтного бустингу — вчиться передбачати оцінки вчителя для кожної дії лише з приладів, виходів ImpactNet і поточних множників уставок; плюс один раунд DAgger. На нових розрядах учень дорівнює вчителю.</a:t>
             </a:r>
           </a:p>
         </p:txBody>
@@ -1220,7 +1220,7 @@
           <a:lstStyle/>
           <a:p>
             <a:r>
-              <a:t>≈40 с. Модель раннього попередження без формул і без підказок симулятора: об'єм 0,924 проти 0,765, ROC AUC 0,998 на 30 мс. ImpactNet визначає механізм зриву: 49 з 49. Замкнений контур удвічі зменшує кількість зривів; на іншому рушії тривога переноситься без донавчання. Поріг спрацювання неінформативний, моделі порівнюються за ROC AUC. Код і звіти — у репозиторії.</a:t>
+              <a:t>≈40 с. Модель раннього попередження без формул і без підказок симулятора: об'єм 0,924 проти 0,765, ROC AUC 0,998 на 30 мс. ImpactNet визначає механізм зриву: 49 з 49. У замкненому контурі учень, що бачить лише прилади, зменшує кількість зривів, яким можна запобігти, з 31 до 5 без втрати продуктивності; на іншому рушії тривога переноситься без донавчання. Поріг спрацювання неінформативний, моделі порівнюються за ROC AUC. Код і звіти — у репозиторії.</a:t>
             </a:r>
           </a:p>
         </p:txBody>
@@ -9510,7 +9510,7 @@
                 </a:solidFill>
                 <a:latin typeface="Arial"/>
               </a:rPr>
-              <a:t>13 Замкнений контур керування в симуляторі</a:t>
+              <a:t>13 Замкнений контур: модель запобігає зриву в реальному часі</a:t>
             </a:r>
           </a:p>
         </p:txBody>
@@ -9554,53 +9554,9 @@
           </a:p>
         </p:txBody>
       </p:sp>
-      <p:sp>
-        <p:nvSpPr>
-          <p:cNvPr id="4" name="Rectangle 3"/>
-          <p:cNvSpPr/>
-          <p:nvPr/>
-        </p:nvSpPr>
-        <p:spPr>
-          <a:xfrm>
-            <a:off x="521207" y="1252728"/>
-            <a:ext cx="6089903" cy="3038605"/>
-          </a:xfrm>
-          <a:prstGeom prst="rect">
-            <a:avLst/>
-          </a:prstGeom>
-          <a:noFill/>
-          <a:ln w="12700">
-            <a:solidFill>
-              <a:srgbClr val="E2E8F0"/>
-            </a:solidFill>
-          </a:ln>
-          <a:effectLst/>
-        </p:spPr>
-        <p:style>
-          <a:lnRef idx="1">
-            <a:schemeClr val="accent1"/>
-          </a:lnRef>
-          <a:fillRef idx="3">
-            <a:schemeClr val="accent1"/>
-          </a:fillRef>
-          <a:effectRef idx="2">
-            <a:schemeClr val="accent1"/>
-          </a:effectRef>
-          <a:fontRef idx="minor">
-            <a:schemeClr val="lt1"/>
-          </a:fontRef>
-        </p:style>
-        <p:txBody>
-          <a:bodyPr rtlCol="0" anchor="ctr"/>
-          <a:lstStyle/>
-          <a:p>
-            <a:pPr algn="ctr"/>
-          </a:p>
-        </p:txBody>
-      </p:sp>
       <p:pic>
         <p:nvPicPr>
-          <p:cNvPr id="5" name="Picture 4" descr="card_sim_impact_auc.png"/>
+          <p:cNvPr id="4" name="Picture 3" descr="fixer.png"/>
           <p:cNvPicPr>
             <a:picLocks noChangeAspect="1"/>
           </p:cNvPicPr>
@@ -9614,8 +9570,8 @@
         </p:blipFill>
         <p:spPr>
           <a:xfrm>
-            <a:off x="548640" y="1280160"/>
-            <a:ext cx="6035040" cy="2983741"/>
+            <a:off x="548640" y="1234440"/>
+            <a:ext cx="7406640" cy="3044010"/>
           </a:xfrm>
           <a:prstGeom prst="rect">
             <a:avLst/>
@@ -9624,14 +9580,14 @@
       </p:pic>
       <p:sp>
         <p:nvSpPr>
-          <p:cNvPr id="6" name="TextBox 5"/>
+          <p:cNvPr id="5" name="TextBox 4"/>
           <p:cNvSpPr txBox="1"/>
           <p:nvPr/>
         </p:nvSpPr>
         <p:spPr>
           <a:xfrm>
-            <a:off x="548640" y="4309621"/>
-            <a:ext cx="6035040" cy="365760"/>
+            <a:off x="548640" y="4324170"/>
+            <a:ext cx="7406640" cy="365760"/>
           </a:xfrm>
           <a:prstGeom prst="rect">
             <a:avLst/>
@@ -9656,67 +9612,21 @@
                 </a:solidFill>
                 <a:latin typeface="Arial"/>
               </a:rPr>
-              <a:t>Рисунок 8 – Атрибуція механізмів зриву в симуляторі fusion-sim, пробний прогін 50 розрядів: 10 з 12 (поле «поріг» замінено на ROC AUC цього прогону)</a:t>
-            </a:r>
-          </a:p>
-        </p:txBody>
-      </p:sp>
-      <p:sp>
-        <p:nvSpPr>
-          <p:cNvPr id="7" name="Rectangle 6"/>
-          <p:cNvSpPr/>
-          <p:nvPr/>
-        </p:nvSpPr>
-        <p:spPr>
-          <a:xfrm>
-            <a:off x="548640" y="5041141"/>
-            <a:ext cx="6035040" cy="914400"/>
-          </a:xfrm>
-          <a:prstGeom prst="rect">
-            <a:avLst/>
-          </a:prstGeom>
-          <a:solidFill>
-            <a:srgbClr val="F8FAFC"/>
-          </a:solidFill>
-          <a:ln w="12700">
-            <a:solidFill>
-              <a:srgbClr val="E2E8F0"/>
-            </a:solidFill>
-          </a:ln>
-          <a:effectLst/>
-        </p:spPr>
-        <p:style>
-          <a:lnRef idx="1">
-            <a:schemeClr val="accent1"/>
-          </a:lnRef>
-          <a:fillRef idx="3">
-            <a:schemeClr val="accent1"/>
-          </a:fillRef>
-          <a:effectRef idx="2">
-            <a:schemeClr val="accent1"/>
-          </a:effectRef>
-          <a:fontRef idx="minor">
-            <a:schemeClr val="lt1"/>
-          </a:fontRef>
-        </p:style>
-        <p:txBody>
-          <a:bodyPr rtlCol="0" anchor="ctr"/>
-          <a:lstStyle/>
-          <a:p>
-            <a:pPr algn="ctr"/>
-          </a:p>
-        </p:txBody>
-      </p:sp>
-      <p:sp>
-        <p:nvSpPr>
-          <p:cNvPr id="8" name="TextBox 7"/>
+              <a:t>Рисунок 8 – Керування в симуляторі fusion-sim: 100 нових розрядів (seed 2000), однакові в усіх режимах; за звітом fusionsim teach</a:t>
+            </a:r>
+          </a:p>
+        </p:txBody>
+      </p:sp>
+      <p:sp>
+        <p:nvSpPr>
+          <p:cNvPr id="6" name="TextBox 5"/>
           <p:cNvSpPr txBox="1"/>
           <p:nvPr/>
         </p:nvSpPr>
         <p:spPr>
           <a:xfrm>
-            <a:off x="685800" y="5132581"/>
-            <a:ext cx="5760720" cy="731520"/>
+            <a:off x="8275320" y="1280160"/>
+            <a:ext cx="3383280" cy="1188720"/>
           </a:xfrm>
           <a:prstGeom prst="rect">
             <a:avLst/>
@@ -9731,40 +9641,47 @@
           <a:p>
             <a:pPr algn="l">
               <a:spcAft>
+                <a:spcPts val="200"/>
+              </a:spcAft>
+            </a:pPr>
+            <a:r>
+              <a:rPr sz="4000" b="1" i="0">
+                <a:solidFill>
+                  <a:srgbClr val="047857"/>
+                </a:solidFill>
+                <a:latin typeface="Arial"/>
+              </a:rPr>
+              <a:t>31 → 5</a:t>
+            </a:r>
+          </a:p>
+          <a:p>
+            <a:pPr algn="l">
+              <a:spcAft>
                 <a:spcPts val="0"/>
               </a:spcAft>
             </a:pPr>
             <a:r>
-              <a:rPr sz="1100" b="1" i="0">
-                <a:solidFill>
-                  <a:srgbClr val="0E7490"/>
-                </a:solidFill>
-                <a:latin typeface="Arial"/>
-              </a:rPr>
-              <a:t>Чому ROC AUC замість порогу. </a:t>
-            </a:r>
-            <a:r>
-              <a:rPr sz="1100" b="0" i="0">
+              <a:rPr sz="1200" b="0" i="0">
                 <a:solidFill>
                   <a:srgbClr val="475569"/>
                 </a:solidFill>
                 <a:latin typeface="Arial"/>
               </a:rPr>
-              <a:t>Поріг спрацювання неінформативний: його підбирає засіб оцінки під бюджет хибних тривог, а на 50 розрядах поріг задає один тихий розряд (див. розділ 5); тому наведено ROC AUC.</a:t>
-            </a:r>
-          </a:p>
-        </p:txBody>
-      </p:sp>
-      <p:sp>
-        <p:nvSpPr>
-          <p:cNvPr id="9" name="TextBox 8"/>
+              <a:t>зривів, яким можна запобігти: без керування → учень</a:t>
+            </a:r>
+          </a:p>
+        </p:txBody>
+      </p:sp>
+      <p:sp>
+        <p:nvSpPr>
+          <p:cNvPr id="7" name="TextBox 6"/>
           <p:cNvSpPr txBox="1"/>
           <p:nvPr/>
         </p:nvSpPr>
         <p:spPr>
           <a:xfrm>
-            <a:off x="6949440" y="1371600"/>
-            <a:ext cx="4663440" cy="1188720"/>
+            <a:off x="8275320" y="2514600"/>
+            <a:ext cx="3383280" cy="2286000"/>
           </a:xfrm>
           <a:prstGeom prst="rect">
             <a:avLst/>
@@ -9779,47 +9696,90 @@
           <a:p>
             <a:pPr algn="l">
               <a:spcAft>
-                <a:spcPts val="200"/>
-              </a:spcAft>
-            </a:pPr>
-            <a:r>
-              <a:rPr sz="4600" b="1" i="0">
-                <a:solidFill>
-                  <a:srgbClr val="C2410C"/>
-                </a:solidFill>
-                <a:latin typeface="Arial"/>
-              </a:rPr>
-              <a:t>11 → 5</a:t>
+                <a:spcPts val="700"/>
+              </a:spcAft>
+            </a:pPr>
+            <a:r>
+              <a:rPr sz="1200" b="1" i="0">
+                <a:solidFill>
+                  <a:srgbClr val="0F172A"/>
+                </a:solidFill>
+                <a:latin typeface="Arial"/>
+              </a:rPr>
+              <a:t>Ланцюг – </a:t>
+            </a:r>
+            <a:r>
+              <a:rPr sz="1200" b="0" i="0">
+                <a:solidFill>
+                  <a:srgbClr val="0F172A"/>
+                </a:solidFill>
+                <a:latin typeface="Arial"/>
+              </a:rPr>
+              <a:t>v8 (коли) → ImpactNet (чому) → учень (що змінити): 8 дій, кожні 0,25 с</a:t>
             </a:r>
           </a:p>
           <a:p>
             <a:pPr algn="l">
               <a:spcAft>
-                <a:spcPts val="0"/>
-              </a:spcAft>
-            </a:pPr>
+                <a:spcPts val="700"/>
+              </a:spcAft>
+            </a:pPr>
+            <a:r>
+              <a:rPr sz="1200" b="1" i="0">
+                <a:solidFill>
+                  <a:srgbClr val="0F172A"/>
+                </a:solidFill>
+                <a:latin typeface="Arial"/>
+              </a:rPr>
+              <a:t>Без шкоди – </a:t>
+            </a:r>
             <a:r>
               <a:rPr sz="1200" b="0" i="0">
                 <a:solidFill>
-                  <a:srgbClr val="475569"/>
-                </a:solidFill>
-                <a:latin typeface="Arial"/>
-              </a:rPr>
-              <a:t>зривів на 40 розрядах з автокеруванням і без нього (−55 %)</a:t>
-            </a:r>
-          </a:p>
-        </p:txBody>
-      </p:sp>
-      <p:sp>
-        <p:nvSpPr>
-          <p:cNvPr id="10" name="TextBox 9"/>
+                  <a:srgbClr val="0F172A"/>
+                </a:solidFill>
+                <a:latin typeface="Arial"/>
+              </a:rPr>
+              <a:t>врятовано 26, зіпсовано 0 (тест Мак-Немара, p = 3·10⁻⁸); енергія W 2,371 → 2,374 МДж</a:t>
+            </a:r>
+          </a:p>
+          <a:p>
+            <a:pPr algn="l">
+              <a:spcAft>
+                <a:spcPts val="700"/>
+              </a:spcAft>
+            </a:pPr>
+            <a:r>
+              <a:rPr sz="1200" b="1" i="0">
+                <a:solidFill>
+                  <a:srgbClr val="0F172A"/>
+                </a:solidFill>
+                <a:latin typeface="Arial"/>
+              </a:rPr>
+              <a:t>Межа – </a:t>
+            </a:r>
+            <a:r>
+              <a:rPr sz="1200" b="0" i="0">
+                <a:solidFill>
+                  <a:srgbClr val="0F172A"/>
+                </a:solidFill>
+                <a:latin typeface="Arial"/>
+              </a:rPr>
+              <a:t>спонтанні зриви (8–9 зі 100) не відверне ніхто; без них 95 % розрядів без зриву проти 69 %</a:t>
+            </a:r>
+          </a:p>
+        </p:txBody>
+      </p:sp>
+      <p:sp>
+        <p:nvSpPr>
+          <p:cNvPr id="8" name="TextBox 7"/>
           <p:cNvSpPr txBox="1"/>
           <p:nvPr/>
         </p:nvSpPr>
         <p:spPr>
           <a:xfrm>
-            <a:off x="6949440" y="2743200"/>
-            <a:ext cx="4709160" cy="2286000"/>
+            <a:off x="548640" y="5989320"/>
+            <a:ext cx="11064240" cy="457200"/>
           </a:xfrm>
           <a:prstGeom prst="rect">
             <a:avLst/>
@@ -9834,104 +9794,6 @@
           <a:p>
             <a:pPr algn="l">
               <a:spcAft>
-                <a:spcPts val="800"/>
-              </a:spcAft>
-            </a:pPr>
-            <a:r>
-              <a:rPr sz="1300" b="1" i="0">
-                <a:solidFill>
-                  <a:srgbClr val="0F172A"/>
-                </a:solidFill>
-                <a:latin typeface="Arial"/>
-              </a:rPr>
-              <a:t>Контур – </a:t>
-            </a:r>
-            <a:r>
-              <a:rPr sz="1300" b="0" i="0">
-                <a:solidFill>
-                  <a:srgbClr val="0F172A"/>
-                </a:solidFill>
-                <a:latin typeface="Arial"/>
-              </a:rPr>
-              <a:t>діагностики → модель тривоги (коли) → ImpactNet (чому) → порадник → зміна уставок; цикл 5 мс</a:t>
-            </a:r>
-          </a:p>
-          <a:p>
-            <a:pPr algn="l">
-              <a:spcAft>
-                <a:spcPts val="800"/>
-              </a:spcAft>
-            </a:pPr>
-            <a:r>
-              <a:rPr sz="1300" b="1" i="0">
-                <a:solidFill>
-                  <a:srgbClr val="0F172A"/>
-                </a:solidFill>
-                <a:latin typeface="Arial"/>
-              </a:rPr>
-              <a:t>Порадник – </a:t>
-            </a:r>
-            <a:r>
-              <a:rPr sz="1300" b="0" i="0">
-                <a:solidFill>
-                  <a:srgbClr val="0F172A"/>
-                </a:solidFill>
-                <a:latin typeface="Arial"/>
-              </a:rPr>
-              <a:t>головна загроза з часток ImpactNet → конкретна дія (наприклад, знизити уставку густини); автокерування виконує її, коли p моделі вище порогу</a:t>
-            </a:r>
-          </a:p>
-          <a:p>
-            <a:pPr algn="l">
-              <a:spcAft>
-                <a:spcPts val="800"/>
-              </a:spcAft>
-            </a:pPr>
-            <a:r>
-              <a:rPr sz="1300" b="1" i="0">
-                <a:solidFill>
-                  <a:srgbClr val="0F172A"/>
-                </a:solidFill>
-                <a:latin typeface="Arial"/>
-              </a:rPr>
-              <a:t>Обмеження – </a:t>
-            </a:r>
-            <a:r>
-              <a:rPr sz="1300" b="0" i="0">
-                <a:solidFill>
-                  <a:srgbClr val="0F172A"/>
-                </a:solidFill>
-                <a:latin typeface="Arial"/>
-              </a:rPr>
-              <a:t>40 розрядів: різниця ще не статистично значуща (p ≈ 0,1, точний тест); для p &lt; 0,01 з імовірністю 0,84 потрібно ≈ 200 розрядів на режим; ціну керування ще не оцінено</a:t>
-            </a:r>
-          </a:p>
-        </p:txBody>
-      </p:sp>
-      <p:sp>
-        <p:nvSpPr>
-          <p:cNvPr id="11" name="TextBox 10"/>
-          <p:cNvSpPr txBox="1"/>
-          <p:nvPr/>
-        </p:nvSpPr>
-        <p:spPr>
-          <a:xfrm>
-            <a:off x="6949440" y="5623560"/>
-            <a:ext cx="4709160" cy="640080"/>
-          </a:xfrm>
-          <a:prstGeom prst="rect">
-            <a:avLst/>
-          </a:prstGeom>
-          <a:noFill/>
-        </p:spPr>
-        <p:txBody>
-          <a:bodyPr wrap="square" anchor="t" lIns="0" rIns="0" tIns="0" bIns="0">
-            <a:spAutoFit/>
-          </a:bodyPr>
-          <a:lstStyle/>
-          <a:p>
-            <a:pPr algn="l">
-              <a:spcAft>
                 <a:spcPts val="0"/>
               </a:spcAft>
             </a:pPr>
@@ -9960,7 +9822,7 @@
                 </a:solidFill>
                 <a:latin typeface="Arial"/>
               </a:rPr>
-              <a:t> (форк fusionsimulator.io, D. Burgess, GPL-3.0; командою додано залік toksym і керування актуаторами з моделі)</a:t>
+              <a:t> (форк fusionsimulator.io, D. Burgess, GPL-3.0; командою додано залік toksym, fixer, вчителя й учня). Довірчий інтервал на 100 розрядах ±9 п. п.</a:t>
             </a:r>
           </a:p>
         </p:txBody>
@@ -10025,7 +9887,7 @@
                 </a:solidFill>
                 <a:latin typeface="Arial"/>
               </a:rPr>
-              <a:t>13.1 Наступний крок: прогнозне керування і навчання учня</a:t>
+              <a:t>13.1 Як навчено керування: вчитель на копії рушія і учень</a:t>
             </a:r>
           </a:p>
         </p:txBody>
@@ -10151,7 +10013,7 @@
                 </a:solidFill>
                 <a:latin typeface="Arial"/>
               </a:rPr>
-              <a:t>Стан розряду</a:t>
+              <a:t>Копія стану</a:t>
             </a:r>
           </a:p>
           <a:p>
@@ -10167,7 +10029,7 @@
                 </a:solidFill>
                 <a:latin typeface="Arial"/>
               </a:rPr>
-              <a:t>копія рушія; уставки на поточному рівні, без запланованих збурень</a:t>
+              <a:t>рушій + генератор випадковості; розклад машини за планом, газ на поточному рівні</a:t>
             </a:r>
           </a:p>
         </p:txBody>
@@ -10298,7 +10160,7 @@
                 </a:solidFill>
                 <a:latin typeface="Arial"/>
               </a:rPr>
-              <a:t>5 варіантів дій</a:t>
+              <a:t>8 дій</a:t>
             </a:r>
           </a:p>
           <a:p>
@@ -10314,7 +10176,7 @@
                 </a:solidFill>
                 <a:latin typeface="Arial"/>
               </a:rPr>
-              <a:t>нічого; густина −10 / −20 %; неон; нагрів або струм; «послабити»</a:t>
+              <a:t>нічого; густина −10 / −20 %; неон; Iₚ −10 %; нагрів ±20 %; повернути</a:t>
             </a:r>
           </a:p>
         </p:txBody>
@@ -10445,7 +10307,7 @@
                 </a:solidFill>
                 <a:latin typeface="Arial"/>
               </a:rPr>
-              <a:t>Прогноз 1,5 с</a:t>
+              <a:t>Прогноз 1 с</a:t>
             </a:r>
           </a:p>
           <a:p>
@@ -10461,7 +10323,7 @@
                 </a:solidFill>
                 <a:latin typeface="Arial"/>
               </a:rPr>
-              <a:t>сума λ і втрата продуктивності для кожного варіанта</a:t>
+              <a:t>крок 20 мс; P = 1 − e^(−∫λdt) і втрата продуктивності</a:t>
             </a:r>
           </a:p>
         </p:txBody>
@@ -10592,7 +10454,7 @@
                 </a:solidFill>
                 <a:latin typeface="Arial"/>
               </a:rPr>
-              <a:t>Вибір дії</a:t>
+              <a:t>Найдешевша дія</a:t>
             </a:r>
           </a:p>
           <a:p>
@@ -10608,7 +10470,7 @@
                 </a:solidFill>
                 <a:latin typeface="Arial"/>
               </a:rPr>
-              <a:t>мінімум ціни J, кожні 0,25 с; запуск від λ, а не від тривоги</a:t>
+              <a:t>J = P + α · втрата; множники на програму, розряд іде далі</a:t>
             </a:r>
           </a:p>
         </p:txBody>
@@ -10647,7 +10509,7 @@
                 </a:solidFill>
                 <a:latin typeface="Arial"/>
               </a:rPr>
-              <a:t>Рисунок 9 – Схема вчителя: прогнозне керування на копії рушія (план; потребує копіювання стану рушія)</a:t>
+              <a:t>Рисунок 9 – Вчитель: прогнозне керування на копії рушія (бачить прихований стан, тому це верхня межа)</a:t>
             </a:r>
           </a:p>
         </p:txBody>
@@ -10661,7 +10523,7 @@
         <p:spPr>
           <a:xfrm>
             <a:off x="548640" y="3200400"/>
-            <a:ext cx="5669280" cy="822960"/>
+            <a:ext cx="5669280" cy="320040"/>
           </a:xfrm>
           <a:prstGeom prst="rect">
             <a:avLst/>
@@ -10676,87 +10538,32 @@
           <a:p>
             <a:pPr algn="l">
               <a:spcAft>
-                <a:spcPts val="400"/>
-              </a:spcAft>
-            </a:pPr>
-            <a:r>
-              <a:rPr sz="1500" b="1" i="0">
-                <a:solidFill>
-                  <a:srgbClr val="0F172A"/>
-                </a:solidFill>
-                <a:latin typeface="Arial"/>
-              </a:rPr>
-              <a:t>J = P(зрив за горизонт) + α · втрата продуктивності</a:t>
-            </a:r>
-          </a:p>
-          <a:p>
-            <a:pPr algn="l">
-              <a:spcAft>
                 <a:spcPts val="0"/>
               </a:spcAft>
             </a:pPr>
             <a:r>
-              <a:rPr sz="1200" b="0" i="0">
+              <a:rPr sz="1100" b="0" i="0">
                 <a:solidFill>
                   <a:srgbClr val="475569"/>
                 </a:solidFill>
                 <a:latin typeface="Arial"/>
               </a:rPr>
-              <a:t>P = 1 − exp(−Σλ·Δt) по прогнозу копії; без другого доданку найкращою дією завжди було б «вимкнути все»</a:t>
-            </a:r>
-          </a:p>
-        </p:txBody>
-      </p:sp>
-      <p:sp>
-        <p:nvSpPr>
-          <p:cNvPr id="17" name="TextBox 16"/>
-          <p:cNvSpPr txBox="1"/>
-          <p:nvPr/>
-        </p:nvSpPr>
-        <p:spPr>
-          <a:xfrm>
-            <a:off x="548640" y="4206240"/>
-            <a:ext cx="5669280" cy="320040"/>
-          </a:xfrm>
-          <a:prstGeom prst="rect">
-            <a:avLst/>
-          </a:prstGeom>
-          <a:noFill/>
-        </p:spPr>
-        <p:txBody>
-          <a:bodyPr wrap="square" anchor="t" lIns="0" rIns="0" tIns="0" bIns="0">
-            <a:spAutoFit/>
-          </a:bodyPr>
-          <a:lstStyle/>
-          <a:p>
-            <a:pPr algn="l">
-              <a:spcAft>
-                <a:spcPts val="0"/>
-              </a:spcAft>
-            </a:pPr>
-            <a:r>
-              <a:rPr sz="1100" b="0" i="0">
-                <a:solidFill>
-                  <a:srgbClr val="475569"/>
-                </a:solidFill>
-                <a:latin typeface="Arial"/>
-              </a:rPr>
-              <a:t>Таблиця 8 – Оцінка часових масштабів</a:t>
+              <a:t>Таблиця 8 – Учень і його навчання</a:t>
             </a:r>
           </a:p>
         </p:txBody>
       </p:sp>
       <p:graphicFrame>
         <p:nvGraphicFramePr>
-          <p:cNvPr id="18" name="Table 17"/>
+          <p:cNvPr id="17" name="Table 16"/>
           <p:cNvGraphicFramePr>
             <a:graphicFrameLocks noGrp="1"/>
           </p:cNvGraphicFramePr>
           <p:nvPr/>
         </p:nvGraphicFramePr>
         <p:xfrm>
-          <a:off x="548640" y="4572000"/>
-          <a:ext cx="5669280" cy="1975104"/>
+          <a:off x="548640" y="3566160"/>
+          <a:ext cx="5669280" cy="2743200"/>
         </p:xfrm>
         <a:graphic>
           <a:graphicData uri="http://schemas.openxmlformats.org/drawingml/2006/table">
@@ -10765,10 +10572,10 @@
                 <a:tableStyleId>{5C22544A-7EE6-4342-B048-85BDC9FD1C3A}</a:tableStyleId>
               </a:tblPr>
               <a:tblGrid>
-                <a:gridCol w="2834640"/>
-                <a:gridCol w="2834640"/>
+                <a:gridCol w="1234440"/>
+                <a:gridCol w="4434840"/>
               </a:tblGrid>
-              <a:tr h="329184">
+              <a:tr h="457200">
                 <a:tc>
                   <a:txBody>
                     <a:bodyPr wrap="square"/>
@@ -10782,7 +10589,7 @@
                           </a:solidFill>
                           <a:latin typeface="Arial"/>
                         </a:rPr>
-                        <a:t>величина</a:t>
+                        <a:t>складова</a:t>
                       </a:r>
                     </a:p>
                   </a:txBody>
@@ -10805,7 +10612,7 @@
                           </a:solidFill>
                           <a:latin typeface="Arial"/>
                         </a:rPr>
-                        <a:t>значення</a:t>
+                        <a:t>що закладено</a:t>
                       </a:r>
                     </a:p>
                   </a:txBody>
@@ -10816,7 +10623,7 @@
                   </a:tcPr>
                 </a:tc>
               </a:tr>
-              <a:tr h="329184">
+              <a:tr h="457200">
                 <a:tc>
                   <a:txBody>
                     <a:bodyPr wrap="square"/>
@@ -10830,7 +10637,7 @@
                           </a:solidFill>
                           <a:latin typeface="Arial"/>
                         </a:rPr>
-                        <a:t>реакція плазми на уставку</a:t>
+                        <a:t>модель</a:t>
                       </a:r>
                     </a:p>
                   </a:txBody>
@@ -10853,7 +10660,7 @@
                           </a:solidFill>
                           <a:latin typeface="Arial"/>
                         </a:rPr>
-                        <a:t>густина ≈ 0,3 с, неон ≈ 0,5 с</a:t>
+                        <a:t>16 регресорів HGB: P(зрив за 1 с) і втрата для кожної з 8 дій</a:t>
                       </a:r>
                     </a:p>
                   </a:txBody>
@@ -10864,7 +10671,7 @@
                   </a:tcPr>
                 </a:tc>
               </a:tr>
-              <a:tr h="329184">
+              <a:tr h="457200">
                 <a:tc>
                   <a:txBody>
                     <a:bodyPr wrap="square"/>
@@ -10878,7 +10685,7 @@
                           </a:solidFill>
                           <a:latin typeface="Arial"/>
                         </a:rPr>
-                        <a:t>попередження на кінкових розрядах</a:t>
+                        <a:t>ознаки (56)</a:t>
                       </a:r>
                     </a:p>
                   </a:txBody>
@@ -10901,7 +10708,7 @@
                           </a:solidFill>
                           <a:latin typeface="Arial"/>
                         </a:rPr>
-                        <a:t>5–75 мс (200 розрядів fusion-sim)</a:t>
+                        <a:t>λ, ризики й частки ImpactNet; f_GW, q95, P_rad/P_in, βN з приладів; 16 каналів; множники; тренди</a:t>
                       </a:r>
                     </a:p>
                   </a:txBody>
@@ -10912,7 +10719,7 @@
                   </a:tcPr>
                 </a:tc>
               </a:tr>
-              <a:tr h="329184">
+              <a:tr h="457200">
                 <a:tc>
                   <a:txBody>
                     <a:bodyPr wrap="square"/>
@@ -10926,7 +10733,7 @@
                           </a:solidFill>
                           <a:latin typeface="Arial"/>
                         </a:rPr>
-                        <a:t>горизонт прогнозу</a:t>
+                        <a:t>заборонено</a:t>
                       </a:r>
                     </a:p>
                   </a:txBody>
@@ -10949,7 +10756,7 @@
                           </a:solidFill>
                           <a:latin typeface="Arial"/>
                         </a:rPr>
-                        <a:t>1,5 с = 300 кроків ≈ 5 τ густини</a:t>
+                        <a:t>справжня λ рушія, внутрішні змінні, майбутнє програми</a:t>
                       </a:r>
                     </a:p>
                   </a:txBody>
@@ -10960,7 +10767,7 @@
                   </a:tcPr>
                 </a:tc>
               </a:tr>
-              <a:tr h="329184">
+              <a:tr h="457200">
                 <a:tc>
                   <a:txBody>
                     <a:bodyPr wrap="square"/>
@@ -10974,7 +10781,7 @@
                           </a:solidFill>
                           <a:latin typeface="Arial"/>
                         </a:rPr>
-                        <a:t>обчислення на рішення</a:t>
+                        <a:t>дані</a:t>
                       </a:r>
                     </a:p>
                   </a:txBody>
@@ -10997,7 +10804,7 @@
                           </a:solidFill>
                           <a:latin typeface="Arial"/>
                         </a:rPr>
-                        <a:t>5 × 300 = 1 500 кроків рушія</a:t>
+                        <a:t>300 розрядів вчителя (seed 1000) + розряди без керування + 1 раунд DAgger</a:t>
                       </a:r>
                     </a:p>
                   </a:txBody>
@@ -11008,7 +10815,7 @@
                   </a:tcPr>
                 </a:tc>
               </a:tr>
-              <a:tr h="329184">
+              <a:tr h="457200">
                 <a:tc>
                   <a:txBody>
                     <a:bodyPr wrap="square"/>
@@ -11022,7 +10829,7 @@
                           </a:solidFill>
                           <a:latin typeface="Arial"/>
                         </a:rPr>
-                        <a:t>внесення зміни</a:t>
+                        <a:t>перевірка</a:t>
                       </a:r>
                     </a:p>
                   </a:txBody>
@@ -11045,7 +10852,7 @@
                           </a:solidFill>
                           <a:latin typeface="Arial"/>
                         </a:rPr>
-                        <a:t>1–3 кадри = 5–15 мс</a:t>
+                        <a:t>100 нових розрядів (seed 2000), ті самі в усіх режимах</a:t>
                       </a:r>
                     </a:p>
                   </a:txBody>
@@ -11062,13 +10869,13 @@
       </p:graphicFrame>
       <p:sp>
         <p:nvSpPr>
-          <p:cNvPr id="19" name="TextBox 18"/>
+          <p:cNvPr id="18" name="TextBox 17"/>
           <p:cNvSpPr txBox="1"/>
           <p:nvPr/>
         </p:nvSpPr>
         <p:spPr>
           <a:xfrm>
-            <a:off x="6766560" y="3154680"/>
+            <a:off x="6766560" y="3200400"/>
             <a:ext cx="4892040" cy="2743200"/>
           </a:xfrm>
           <a:prstGeom prst="rect">
@@ -11103,7 +10910,7 @@
                 </a:solidFill>
                 <a:latin typeface="Arial"/>
               </a:rPr>
-              <a:t>реактивний порадник запізнюється: тривога за 5–75 мс, а плазма відповідає за 0,3–0,5 с</a:t>
+              <a:t>плазма відповідає на уставку за 0,3–0,5 с, а тривога на кінкових розрядах — за 5–75 мс; копія бачить наслідки дії на 1 с уперед</a:t>
             </a:r>
           </a:p>
           <a:p>
@@ -11119,7 +10926,7 @@
                 </a:solidFill>
                 <a:latin typeface="Arial"/>
               </a:rPr>
-              <a:t>Дані для учня – </a:t>
+              <a:t>Чесний вчитель – </a:t>
             </a:r>
             <a:r>
               <a:rPr sz="1200" b="0" i="0">
@@ -11128,7 +10935,7 @@
                 </a:solidFill>
                 <a:latin typeface="Arial"/>
               </a:rPr>
-              <a:t>ризик і втрата продуктивності кожного варіанта окремо (α підбирається потім, м'які мітки) та поточні множники уставок (щоб не повторювати дію)</a:t>
+              <a:t>газ у копії на поточному рівні: незаплановані збурення не видно, інакше учень не зміг би навчитися</a:t>
             </a:r>
           </a:p>
           <a:p>
@@ -11144,7 +10951,7 @@
                 </a:solidFill>
                 <a:latin typeface="Arial"/>
               </a:rPr>
-              <a:t>Учень – </a:t>
+              <a:t>Швидкість – </a:t>
             </a:r>
             <a:r>
               <a:rPr sz="1200" b="0" i="0">
@@ -11153,7 +10960,7 @@
                 </a:solidFill>
                 <a:latin typeface="Arial"/>
               </a:rPr>
-              <a:t>вибирає дію лише з діагностик; запускається від λ, яку оцінює ImpactNet; далі раунд DAgger: учень керує, вчитель розмічає</a:t>
+              <a:t>рішення ≈ 17 мс (9 копій × 50 кроків); у браузері — по одній дії на кадр</a:t>
             </a:r>
           </a:p>
           <a:p>
@@ -11169,7 +10976,7 @@
                 </a:solidFill>
                 <a:latin typeface="Arial"/>
               </a:rPr>
-              <a:t>Чесно – </a:t>
+              <a:t>Результат – </a:t>
             </a:r>
             <a:r>
               <a:rPr sz="1200" b="0" i="0">
@@ -11178,7 +10985,7 @@
                 </a:solidFill>
                 <a:latin typeface="Arial"/>
               </a:rPr>
-              <a:t>копія знає прихований стан плазми, тому її результат — верхня межа; на машину переноситься учень</a:t>
+              <a:t>учень = вчитель: 5 зривів зі 31; з копії на машину переноситься саме учень</a:t>
             </a:r>
           </a:p>
         </p:txBody>
@@ -11695,7 +11502,7 @@
                 </a:solidFill>
                 <a:latin typeface="Arial"/>
               </a:rPr>
-              <a:t>Замкнений контур керування в симуляторі зменшує кількість зривів з 11 до 5 на 40 розрядах; на іншому рушії тривога працює без донавчання (ROC AUC 0,902), кінк потребує донавчання.</a:t>
+              <a:t>У замкненому контурі учень, що бачить лише прилади, зменшує кількість зривів, яким можна запобігти, з 31 до 5 на 100 нових розрядах без втрати продуктивності — як ідеальний двійник.</a:t>
             </a:r>
           </a:p>
         </p:txBody>

--- a/docs/presentation.pptx
+++ b/docs/presentation.pptx
@@ -24,6 +24,11 @@
     <p:sldId id="272" r:id="rId24"/>
     <p:sldId id="273" r:id="rId25"/>
     <p:sldId id="274" r:id="rId26"/>
+    <p:sldId id="275" r:id="rId27"/>
+    <p:sldId id="276" r:id="rId28"/>
+    <p:sldId id="277" r:id="rId29"/>
+    <p:sldId id="278" r:id="rId30"/>
+    <p:sldId id="279" r:id="rId31"/>
   </p:sldIdLst>
   <p:sldSz cx="12191695" cy="6858000" type="screen4x3"/>
   <p:notesSz cx="6858000" cy="9144000"/>
@@ -1291,6 +1296,356 @@
           <a:p>
             <a:r>
               <a:t>≈45 с. Зрив — швидка втрата утримання плазми: після запуску 50–100 мс розвивається передвісник, далі термічне гасіння за 1–2 мс. Модель отримує 100 діагностичних сигналів кожні 5 мс і повертає ймовірність зриву лише з минулих даних. Тривога зараховується, якщо випереджає термічне гасіння щонайменше на заданий запас; поріг підбирається під бюджет хибних тривог. Інтегральна метрика — об'єм, середня площа під кривою TPR(FPR) за запасами 10 мс–1 с. На рисунку — реальні сигнали розряду: густина повільно зростає до межі, модель б'є тривогу за 1,24 с до гасіння.</a:t>
+            </a:r>
+          </a:p>
+        </p:txBody>
+      </p:sp>
+      <p:sp>
+        <p:nvSpPr>
+          <p:cNvPr id="4" name="Slide Number Placeholder 3"/>
+          <p:cNvSpPr>
+            <a:spLocks noGrp="1"/>
+          </p:cNvSpPr>
+          <p:nvPr>
+            <p:ph type="sldNum" idx="5" sz="quarter"/>
+          </p:nvPr>
+        </p:nvSpPr>
+        <p:spPr/>
+      </p:sp>
+    </p:spTree>
+  </p:cSld>
+  <p:clrMapOvr>
+    <a:masterClrMapping/>
+  </p:clrMapOvr>
+</p:notes>
+</file>
+
+<file path=ppt/notesSlides/notesSlide20.xml><?xml version="1.0" encoding="utf-8"?>
+<p:notes xmlns:a="http://schemas.openxmlformats.org/drawingml/2006/main" xmlns:p="http://schemas.openxmlformats.org/presentationml/2006/main" xmlns:r="http://schemas.openxmlformats.org/officeDocument/2006/relationships">
+  <p:cSld>
+    <p:spTree>
+      <p:nvGrpSpPr>
+        <p:cNvPr id="1" name=""/>
+        <p:cNvGrpSpPr/>
+        <p:nvPr/>
+      </p:nvGrpSpPr>
+      <p:grpSpPr>
+        <a:xfrm>
+          <a:off x="0" y="0"/>
+          <a:ext cx="0" cy="0"/>
+          <a:chOff x="0" y="0"/>
+          <a:chExt cx="0" cy="0"/>
+        </a:xfrm>
+      </p:grpSpPr>
+      <p:sp>
+        <p:nvSpPr>
+          <p:cNvPr id="2" name="Slide Image Placeholder 1"/>
+          <p:cNvSpPr>
+            <a:spLocks noGrp="1"/>
+          </p:cNvSpPr>
+          <p:nvPr>
+            <p:ph type="sldImg" idx="2"/>
+          </p:nvPr>
+        </p:nvSpPr>
+        <p:spPr/>
+      </p:sp>
+      <p:sp>
+        <p:nvSpPr>
+          <p:cNvPr id="3" name="Notes Placeholder 2"/>
+          <p:cNvSpPr>
+            <a:spLocks noGrp="1"/>
+          </p:cNvSpPr>
+          <p:nvPr>
+            <p:ph type="body" idx="3" sz="quarter"/>
+          </p:nvPr>
+        </p:nvSpPr>
+        <p:spPr/>
+        <p:txBody>
+          <a:bodyPr/>
+          <a:lstStyle/>
+          <a:p>
+            <a:r>
+              <a:t>Сканування струму і уставки густини (91 розряд). При малому струмі домінує межа Грінвальда, при великому — низький q95 (кінк); між ними вікно низького ризику. За густиною λ зростає на два порядки, коли f_GW підходить до 1.</a:t>
+            </a:r>
+          </a:p>
+        </p:txBody>
+      </p:sp>
+      <p:sp>
+        <p:nvSpPr>
+          <p:cNvPr id="4" name="Slide Number Placeholder 3"/>
+          <p:cNvSpPr>
+            <a:spLocks noGrp="1"/>
+          </p:cNvSpPr>
+          <p:nvPr>
+            <p:ph type="sldNum" idx="5" sz="quarter"/>
+          </p:nvPr>
+        </p:nvSpPr>
+        <p:spPr/>
+      </p:sp>
+    </p:spTree>
+  </p:cSld>
+  <p:clrMapOvr>
+    <a:masterClrMapping/>
+  </p:clrMapOvr>
+</p:notes>
+</file>
+
+<file path=ppt/notesSlides/notesSlide21.xml><?xml version="1.0" encoding="utf-8"?>
+<p:notes xmlns:a="http://schemas.openxmlformats.org/drawingml/2006/main" xmlns:p="http://schemas.openxmlformats.org/presentationml/2006/main" xmlns:r="http://schemas.openxmlformats.org/officeDocument/2006/relationships">
+  <p:cSld>
+    <p:spTree>
+      <p:nvGrpSpPr>
+        <p:cNvPr id="1" name=""/>
+        <p:cNvGrpSpPr/>
+        <p:nvPr/>
+      </p:nvGrpSpPr>
+      <p:grpSpPr>
+        <a:xfrm>
+          <a:off x="0" y="0"/>
+          <a:ext cx="0" cy="0"/>
+          <a:chOff x="0" y="0"/>
+          <a:chExt cx="0" cy="0"/>
+        </a:xfrm>
+      </p:grpSpPr>
+      <p:sp>
+        <p:nvSpPr>
+          <p:cNvPr id="2" name="Slide Image Placeholder 1"/>
+          <p:cNvSpPr>
+            <a:spLocks noGrp="1"/>
+          </p:cNvSpPr>
+          <p:nvPr>
+            <p:ph type="sldImg" idx="2"/>
+          </p:nvPr>
+        </p:nvSpPr>
+        <p:spPr/>
+      </p:sp>
+      <p:sp>
+        <p:nvSpPr>
+          <p:cNvPr id="3" name="Notes Placeholder 2"/>
+          <p:cNvSpPr>
+            <a:spLocks noGrp="1"/>
+          </p:cNvSpPr>
+          <p:nvPr>
+            <p:ph type="body" idx="3" sz="quarter"/>
+          </p:nvPr>
+        </p:nvSpPr>
+        <p:spPr/>
+        <p:txBody>
+          <a:bodyPr/>
+          <a:lstStyle/>
+          <a:p>
+            <a:r>
+              <a:t>Перевірка, чи можна ловити зрив швидкими магнітними сигналами dB/dt, dIₚ/dt і зондами Мірнова. Камера JET діє як фільтр із постійною часу 4–5,5 мс і послаблює магнітні імпульси в 1,3–2,5 раза.</a:t>
+            </a:r>
+          </a:p>
+        </p:txBody>
+      </p:sp>
+      <p:sp>
+        <p:nvSpPr>
+          <p:cNvPr id="4" name="Slide Number Placeholder 3"/>
+          <p:cNvSpPr>
+            <a:spLocks noGrp="1"/>
+          </p:cNvSpPr>
+          <p:nvPr>
+            <p:ph type="sldNum" idx="5" sz="quarter"/>
+          </p:nvPr>
+        </p:nvSpPr>
+        <p:spPr/>
+      </p:sp>
+    </p:spTree>
+  </p:cSld>
+  <p:clrMapOvr>
+    <a:masterClrMapping/>
+  </p:clrMapOvr>
+</p:notes>
+</file>
+
+<file path=ppt/notesSlides/notesSlide22.xml><?xml version="1.0" encoding="utf-8"?>
+<p:notes xmlns:a="http://schemas.openxmlformats.org/drawingml/2006/main" xmlns:p="http://schemas.openxmlformats.org/presentationml/2006/main" xmlns:r="http://schemas.openxmlformats.org/officeDocument/2006/relationships">
+  <p:cSld>
+    <p:spTree>
+      <p:nvGrpSpPr>
+        <p:cNvPr id="1" name=""/>
+        <p:cNvGrpSpPr/>
+        <p:nvPr/>
+      </p:nvGrpSpPr>
+      <p:grpSpPr>
+        <a:xfrm>
+          <a:off x="0" y="0"/>
+          <a:ext cx="0" cy="0"/>
+          <a:chOff x="0" y="0"/>
+          <a:chExt cx="0" cy="0"/>
+        </a:xfrm>
+      </p:grpSpPr>
+      <p:sp>
+        <p:nvSpPr>
+          <p:cNvPr id="2" name="Slide Image Placeholder 1"/>
+          <p:cNvSpPr>
+            <a:spLocks noGrp="1"/>
+          </p:cNvSpPr>
+          <p:nvPr>
+            <p:ph type="sldImg" idx="2"/>
+          </p:nvPr>
+        </p:nvSpPr>
+        <p:spPr/>
+      </p:sp>
+      <p:sp>
+        <p:nvSpPr>
+          <p:cNvPr id="3" name="Notes Placeholder 2"/>
+          <p:cNvSpPr>
+            <a:spLocks noGrp="1"/>
+          </p:cNvSpPr>
+          <p:nvPr>
+            <p:ph type="body" idx="3" sz="quarter"/>
+          </p:nvPr>
+        </p:nvSpPr>
+        <p:spPr/>
+        <p:txBody>
+          <a:bodyPr/>
+          <a:lstStyle/>
+          <a:p>
+            <a:r>
+              <a:t>Гіпотеза: числова похідна струму як ранній маркер. Перевірка на розряді 5: за 300 мс до гасіння похідна не перетинає поріг; термічне гасіння передує гасінню струму, струм утримує індуктивність плазми. Тригер запізнюється або пропускає зрив.</a:t>
+            </a:r>
+          </a:p>
+        </p:txBody>
+      </p:sp>
+      <p:sp>
+        <p:nvSpPr>
+          <p:cNvPr id="4" name="Slide Number Placeholder 3"/>
+          <p:cNvSpPr>
+            <a:spLocks noGrp="1"/>
+          </p:cNvSpPr>
+          <p:nvPr>
+            <p:ph type="sldNum" idx="5" sz="quarter"/>
+          </p:nvPr>
+        </p:nvSpPr>
+        <p:spPr/>
+      </p:sp>
+    </p:spTree>
+  </p:cSld>
+  <p:clrMapOvr>
+    <a:masterClrMapping/>
+  </p:clrMapOvr>
+</p:notes>
+</file>
+
+<file path=ppt/notesSlides/notesSlide23.xml><?xml version="1.0" encoding="utf-8"?>
+<p:notes xmlns:a="http://schemas.openxmlformats.org/drawingml/2006/main" xmlns:p="http://schemas.openxmlformats.org/presentationml/2006/main" xmlns:r="http://schemas.openxmlformats.org/officeDocument/2006/relationships">
+  <p:cSld>
+    <p:spTree>
+      <p:nvGrpSpPr>
+        <p:cNvPr id="1" name=""/>
+        <p:cNvGrpSpPr/>
+        <p:nvPr/>
+      </p:nvGrpSpPr>
+      <p:grpSpPr>
+        <a:xfrm>
+          <a:off x="0" y="0"/>
+          <a:ext cx="0" cy="0"/>
+          <a:chOff x="0" y="0"/>
+          <a:chExt cx="0" cy="0"/>
+        </a:xfrm>
+      </p:grpSpPr>
+      <p:sp>
+        <p:nvSpPr>
+          <p:cNvPr id="2" name="Slide Image Placeholder 1"/>
+          <p:cNvSpPr>
+            <a:spLocks noGrp="1"/>
+          </p:cNvSpPr>
+          <p:nvPr>
+            <p:ph type="sldImg" idx="2"/>
+          </p:nvPr>
+        </p:nvSpPr>
+        <p:spPr/>
+      </p:sp>
+      <p:sp>
+        <p:nvSpPr>
+          <p:cNvPr id="3" name="Notes Placeholder 2"/>
+          <p:cNvSpPr>
+            <a:spLocks noGrp="1"/>
+          </p:cNvSpPr>
+          <p:nvPr>
+            <p:ph type="body" idx="3" sz="quarter"/>
+          </p:nvPr>
+        </p:nvSpPr>
+        <p:spPr/>
+        <p:txBody>
+          <a:bodyPr/>
+          <a:lstStyle/>
+          <a:p>
+            <a:r>
+              <a:t>Розряд 27: проста сума котушок Мірнова гаситься взаємно, просторовий RMS показує наростання лише за 50–90 мс до гасіння, а одиночні сплески — це ELM, які дають хибні тривоги. Звідси наш дизайн: МГД-сигнали — лише для передвісника, раннє попередження — за межами f_GW, q95, βN, P_rad/P_in.</a:t>
+            </a:r>
+          </a:p>
+        </p:txBody>
+      </p:sp>
+      <p:sp>
+        <p:nvSpPr>
+          <p:cNvPr id="4" name="Slide Number Placeholder 3"/>
+          <p:cNvSpPr>
+            <a:spLocks noGrp="1"/>
+          </p:cNvSpPr>
+          <p:nvPr>
+            <p:ph type="sldNum" idx="5" sz="quarter"/>
+          </p:nvPr>
+        </p:nvSpPr>
+        <p:spPr/>
+      </p:sp>
+    </p:spTree>
+  </p:cSld>
+  <p:clrMapOvr>
+    <a:masterClrMapping/>
+  </p:clrMapOvr>
+</p:notes>
+</file>
+
+<file path=ppt/notesSlides/notesSlide24.xml><?xml version="1.0" encoding="utf-8"?>
+<p:notes xmlns:a="http://schemas.openxmlformats.org/drawingml/2006/main" xmlns:p="http://schemas.openxmlformats.org/presentationml/2006/main" xmlns:r="http://schemas.openxmlformats.org/officeDocument/2006/relationships">
+  <p:cSld>
+    <p:spTree>
+      <p:nvGrpSpPr>
+        <p:cNvPr id="1" name=""/>
+        <p:cNvGrpSpPr/>
+        <p:nvPr/>
+      </p:nvGrpSpPr>
+      <p:grpSpPr>
+        <a:xfrm>
+          <a:off x="0" y="0"/>
+          <a:ext cx="0" cy="0"/>
+          <a:chOff x="0" y="0"/>
+          <a:chExt cx="0" cy="0"/>
+        </a:xfrm>
+      </p:grpSpPr>
+      <p:sp>
+        <p:nvSpPr>
+          <p:cNvPr id="2" name="Slide Image Placeholder 1"/>
+          <p:cNvSpPr>
+            <a:spLocks noGrp="1"/>
+          </p:cNvSpPr>
+          <p:nvPr>
+            <p:ph type="sldImg" idx="2"/>
+          </p:nvPr>
+        </p:nvSpPr>
+        <p:spPr/>
+      </p:sp>
+      <p:sp>
+        <p:nvSpPr>
+          <p:cNvPr id="3" name="Notes Placeholder 2"/>
+          <p:cNvSpPr>
+            <a:spLocks noGrp="1"/>
+          </p:cNvSpPr>
+          <p:nvPr>
+            <p:ph type="body" idx="3" sz="quarter"/>
+          </p:nvPr>
+        </p:nvSpPr>
+        <p:spPr/>
+        <p:txBody>
+          <a:bodyPr/>
+          <a:lstStyle/>
+          <a:p>
+            <a:r>
+              <a:t>Підсумок фізичного аналізу: які евристики не спрацювали і які рішення лягли в основу моделей.</a:t>
             </a:r>
           </a:p>
         </p:txBody>
@@ -12012,6 +12367,2107 @@
           </a:p>
         </p:txBody>
       </p:sp>
+    </p:spTree>
+  </p:cSld>
+  <p:clrMapOvr>
+    <a:masterClrMapping/>
+  </p:clrMapOvr>
+</p:sld>
+</file>
+
+<file path=ppt/slides/slide20.xml><?xml version="1.0" encoding="utf-8"?>
+<p:sld xmlns:a="http://schemas.openxmlformats.org/drawingml/2006/main" xmlns:p="http://schemas.openxmlformats.org/presentationml/2006/main" xmlns:r="http://schemas.openxmlformats.org/officeDocument/2006/relationships">
+  <p:cSld>
+    <p:bg>
+      <p:bgPr>
+        <a:solidFill>
+          <a:srgbClr val="FFFFFF"/>
+        </a:solidFill>
+        <a:effectLst/>
+      </p:bgPr>
+    </p:bg>
+    <p:spTree>
+      <p:nvGrpSpPr>
+        <p:cNvPr id="1" name=""/>
+        <p:cNvGrpSpPr/>
+        <p:nvPr/>
+      </p:nvGrpSpPr>
+      <p:grpSpPr/>
+      <p:sp>
+        <p:nvSpPr>
+          <p:cNvPr id="2" name="TextBox 1"/>
+          <p:cNvSpPr txBox="1"/>
+          <p:nvPr/>
+        </p:nvSpPr>
+        <p:spPr>
+          <a:xfrm>
+            <a:off x="548640" y="411480"/>
+            <a:ext cx="11064240" cy="640080"/>
+          </a:xfrm>
+          <a:prstGeom prst="rect">
+            <a:avLst/>
+          </a:prstGeom>
+          <a:noFill/>
+        </p:spPr>
+        <p:txBody>
+          <a:bodyPr wrap="square" anchor="t" lIns="0" rIns="0" tIns="0" bIns="0">
+            <a:spAutoFit/>
+          </a:bodyPr>
+          <a:lstStyle/>
+          <a:p>
+            <a:pPr algn="l">
+              <a:spcAft>
+                <a:spcPts val="0"/>
+              </a:spcAft>
+            </a:pPr>
+            <a:r>
+              <a:rPr sz="2600" b="1" i="0">
+                <a:solidFill>
+                  <a:srgbClr val="0F172A"/>
+                </a:solidFill>
+                <a:latin typeface="Arial"/>
+              </a:rPr>
+              <a:t>Додаток А.1 Фізичні драйвери: конкуренція меж Грінвальда і low-q</a:t>
+            </a:r>
+          </a:p>
+        </p:txBody>
+      </p:sp>
+      <p:sp>
+        <p:nvSpPr>
+          <p:cNvPr id="3" name="TextBox 2"/>
+          <p:cNvSpPr txBox="1"/>
+          <p:nvPr/>
+        </p:nvSpPr>
+        <p:spPr>
+          <a:xfrm>
+            <a:off x="11247120" y="6446520"/>
+            <a:ext cx="457200" cy="274320"/>
+          </a:xfrm>
+          <a:prstGeom prst="rect">
+            <a:avLst/>
+          </a:prstGeom>
+          <a:noFill/>
+        </p:spPr>
+        <p:txBody>
+          <a:bodyPr wrap="square" anchor="t" lIns="0" rIns="0" tIns="0" bIns="0">
+            <a:spAutoFit/>
+          </a:bodyPr>
+          <a:lstStyle/>
+          <a:p>
+            <a:pPr algn="r">
+              <a:spcAft>
+                <a:spcPts val="0"/>
+              </a:spcAft>
+            </a:pPr>
+            <a:r>
+              <a:rPr sz="1000" b="0" i="0">
+                <a:solidFill>
+                  <a:srgbClr val="94A3B8"/>
+                </a:solidFill>
+                <a:latin typeface="Arial"/>
+              </a:rPr>
+              <a:t>20</a:t>
+            </a:r>
+          </a:p>
+        </p:txBody>
+      </p:sp>
+      <p:sp>
+        <p:nvSpPr>
+          <p:cNvPr id="4" name="Rectangle 3"/>
+          <p:cNvSpPr/>
+          <p:nvPr/>
+        </p:nvSpPr>
+        <p:spPr>
+          <a:xfrm>
+            <a:off x="521207" y="1252728"/>
+            <a:ext cx="7735824" cy="3966794"/>
+          </a:xfrm>
+          <a:prstGeom prst="rect">
+            <a:avLst/>
+          </a:prstGeom>
+          <a:noFill/>
+          <a:ln w="12700">
+            <a:solidFill>
+              <a:srgbClr val="E2E8F0"/>
+            </a:solidFill>
+          </a:ln>
+          <a:effectLst/>
+        </p:spPr>
+        <p:style>
+          <a:lnRef idx="1">
+            <a:schemeClr val="accent1"/>
+          </a:lnRef>
+          <a:fillRef idx="3">
+            <a:schemeClr val="accent1"/>
+          </a:fillRef>
+          <a:effectRef idx="2">
+            <a:schemeClr val="accent1"/>
+          </a:effectRef>
+          <a:fontRef idx="minor">
+            <a:schemeClr val="lt1"/>
+          </a:fontRef>
+        </p:style>
+        <p:txBody>
+          <a:bodyPr rtlCol="0" anchor="ctr"/>
+          <a:lstStyle/>
+          <a:p>
+            <a:pPr algn="ctr"/>
+          </a:p>
+        </p:txBody>
+      </p:sp>
+      <p:pic>
+        <p:nvPicPr>
+          <p:cNvPr id="5" name="Picture 4" descr="phys_sweep.png"/>
+          <p:cNvPicPr>
+            <a:picLocks noChangeAspect="1"/>
+          </p:cNvPicPr>
+          <p:nvPr/>
+        </p:nvPicPr>
+        <p:blipFill>
+          <a:blip r:embed="rId3"/>
+          <a:stretch>
+            <a:fillRect/>
+          </a:stretch>
+        </p:blipFill>
+        <p:spPr>
+          <a:xfrm>
+            <a:off x="548640" y="1280160"/>
+            <a:ext cx="7680960" cy="3911930"/>
+          </a:xfrm>
+          <a:prstGeom prst="rect">
+            <a:avLst/>
+          </a:prstGeom>
+        </p:spPr>
+      </p:pic>
+      <p:sp>
+        <p:nvSpPr>
+          <p:cNvPr id="6" name="TextBox 5"/>
+          <p:cNvSpPr txBox="1"/>
+          <p:nvPr/>
+        </p:nvSpPr>
+        <p:spPr>
+          <a:xfrm>
+            <a:off x="548640" y="5237810"/>
+            <a:ext cx="7680960" cy="365760"/>
+          </a:xfrm>
+          <a:prstGeom prst="rect">
+            <a:avLst/>
+          </a:prstGeom>
+          <a:noFill/>
+        </p:spPr>
+        <p:txBody>
+          <a:bodyPr wrap="square" anchor="t" lIns="0" rIns="0" tIns="0" bIns="0">
+            <a:spAutoFit/>
+          </a:bodyPr>
+          <a:lstStyle/>
+          <a:p>
+            <a:pPr algn="l">
+              <a:spcAft>
+                <a:spcPts val="0"/>
+              </a:spcAft>
+            </a:pPr>
+            <a:r>
+              <a:rPr sz="1100" b="0" i="0">
+                <a:solidFill>
+                  <a:srgbClr val="475569"/>
+                </a:solidFill>
+                <a:latin typeface="Arial"/>
+              </a:rPr>
+              <a:t>Рисунок 11 – Сканування струму Iₚ і уставки густини (91 розряд): A — ризики r_GW і r_q від Iₚ; B — λ від Iₚ; C — f_GW і r_GW від густини; D — λ від густини</a:t>
+            </a:r>
+          </a:p>
+        </p:txBody>
+      </p:sp>
+      <p:sp>
+        <p:nvSpPr>
+          <p:cNvPr id="7" name="Rectangle 6"/>
+          <p:cNvSpPr/>
+          <p:nvPr/>
+        </p:nvSpPr>
+        <p:spPr>
+          <a:xfrm>
+            <a:off x="8595360" y="1280160"/>
+            <a:ext cx="3063240" cy="1600200"/>
+          </a:xfrm>
+          <a:prstGeom prst="rect">
+            <a:avLst/>
+          </a:prstGeom>
+          <a:solidFill>
+            <a:srgbClr val="F8FAFC"/>
+          </a:solidFill>
+          <a:ln w="12700">
+            <a:solidFill>
+              <a:srgbClr val="E2E8F0"/>
+            </a:solidFill>
+          </a:ln>
+          <a:effectLst/>
+        </p:spPr>
+        <p:style>
+          <a:lnRef idx="1">
+            <a:schemeClr val="accent1"/>
+          </a:lnRef>
+          <a:fillRef idx="3">
+            <a:schemeClr val="accent1"/>
+          </a:fillRef>
+          <a:effectRef idx="2">
+            <a:schemeClr val="accent1"/>
+          </a:effectRef>
+          <a:fontRef idx="minor">
+            <a:schemeClr val="lt1"/>
+          </a:fontRef>
+        </p:style>
+        <p:txBody>
+          <a:bodyPr rtlCol="0" anchor="ctr"/>
+          <a:lstStyle/>
+          <a:p>
+            <a:pPr algn="ctr"/>
+          </a:p>
+        </p:txBody>
+      </p:sp>
+      <p:sp>
+        <p:nvSpPr>
+          <p:cNvPr id="8" name="TextBox 7"/>
+          <p:cNvSpPr txBox="1"/>
+          <p:nvPr/>
+        </p:nvSpPr>
+        <p:spPr>
+          <a:xfrm>
+            <a:off x="8732520" y="1371600"/>
+            <a:ext cx="2834640" cy="1463040"/>
+          </a:xfrm>
+          <a:prstGeom prst="rect">
+            <a:avLst/>
+          </a:prstGeom>
+          <a:noFill/>
+        </p:spPr>
+        <p:txBody>
+          <a:bodyPr wrap="square" anchor="t" lIns="0" rIns="0" tIns="0" bIns="0">
+            <a:spAutoFit/>
+          </a:bodyPr>
+          <a:lstStyle/>
+          <a:p>
+            <a:pPr algn="l">
+              <a:spcAft>
+                <a:spcPts val="800"/>
+              </a:spcAft>
+            </a:pPr>
+            <a:r>
+              <a:rPr sz="1300" b="1" i="0">
+                <a:solidFill>
+                  <a:srgbClr val="0F172A"/>
+                </a:solidFill>
+                <a:latin typeface="Arial"/>
+              </a:rPr>
+              <a:t>λ = 1 − Πᵢ (1 − rᵢ³)(1 − r_lm)</a:t>
+            </a:r>
+          </a:p>
+          <a:p>
+            <a:pPr algn="l">
+              <a:spcAft>
+                <a:spcPts val="800"/>
+              </a:spcAft>
+            </a:pPr>
+            <a:r>
+              <a:rPr sz="1300" b="1" i="0">
+                <a:solidFill>
+                  <a:srgbClr val="0F172A"/>
+                </a:solidFill>
+                <a:latin typeface="Arial"/>
+              </a:rPr>
+              <a:t>f_GW = n̄ₑ / n_GW</a:t>
+            </a:r>
+          </a:p>
+          <a:p>
+            <a:pPr algn="l">
+              <a:spcAft>
+                <a:spcPts val="0"/>
+              </a:spcAft>
+            </a:pPr>
+            <a:r>
+              <a:rPr sz="1300" b="1" i="0">
+                <a:solidFill>
+                  <a:srgbClr val="0F172A"/>
+                </a:solidFill>
+                <a:latin typeface="Arial"/>
+              </a:rPr>
+              <a:t>f_GW ∝ n̄ₑ / Iₚ</a:t>
+            </a:r>
+          </a:p>
+        </p:txBody>
+      </p:sp>
+      <p:sp>
+        <p:nvSpPr>
+          <p:cNvPr id="9" name="TextBox 8"/>
+          <p:cNvSpPr txBox="1"/>
+          <p:nvPr/>
+        </p:nvSpPr>
+        <p:spPr>
+          <a:xfrm>
+            <a:off x="8595360" y="3108960"/>
+            <a:ext cx="3063240" cy="2286000"/>
+          </a:xfrm>
+          <a:prstGeom prst="rect">
+            <a:avLst/>
+          </a:prstGeom>
+          <a:noFill/>
+        </p:spPr>
+        <p:txBody>
+          <a:bodyPr wrap="square" anchor="t" lIns="0" rIns="0" tIns="0" bIns="0">
+            <a:spAutoFit/>
+          </a:bodyPr>
+          <a:lstStyle/>
+          <a:p>
+            <a:pPr algn="l">
+              <a:spcAft>
+                <a:spcPts val="700"/>
+              </a:spcAft>
+            </a:pPr>
+            <a:r>
+              <a:rPr sz="1200" b="1" i="0">
+                <a:solidFill>
+                  <a:srgbClr val="0F172A"/>
+                </a:solidFill>
+                <a:latin typeface="Arial"/>
+              </a:rPr>
+              <a:t>Струм – </a:t>
+            </a:r>
+            <a:r>
+              <a:rPr sz="1200" b="0" i="0">
+                <a:solidFill>
+                  <a:srgbClr val="0F172A"/>
+                </a:solidFill>
+                <a:latin typeface="Arial"/>
+              </a:rPr>
+              <a:t>малий Iₚ — межа Грінвальда, великий — low-q (кінк); між ними вікно низького ризику ≈ 2,6–3,6 МА</a:t>
+            </a:r>
+          </a:p>
+          <a:p>
+            <a:pPr algn="l">
+              <a:spcAft>
+                <a:spcPts val="700"/>
+              </a:spcAft>
+            </a:pPr>
+            <a:r>
+              <a:rPr sz="1200" b="1" i="0">
+                <a:solidFill>
+                  <a:srgbClr val="0F172A"/>
+                </a:solidFill>
+                <a:latin typeface="Arial"/>
+              </a:rPr>
+              <a:t>Густина – </a:t>
+            </a:r>
+            <a:r>
+              <a:rPr sz="1200" b="0" i="0">
+                <a:solidFill>
+                  <a:srgbClr val="0F172A"/>
+                </a:solidFill>
+                <a:latin typeface="Arial"/>
+              </a:rPr>
+              <a:t>коли f_GW підходить до 1, λ зростає на два порядки</a:t>
+            </a:r>
+          </a:p>
+          <a:p>
+            <a:pPr algn="l">
+              <a:spcAft>
+                <a:spcPts val="700"/>
+              </a:spcAft>
+            </a:pPr>
+            <a:r>
+              <a:rPr sz="1200" b="1" i="0">
+                <a:solidFill>
+                  <a:srgbClr val="0F172A"/>
+                </a:solidFill>
+                <a:latin typeface="Arial"/>
+              </a:rPr>
+              <a:t>Висновок – </a:t>
+            </a:r>
+            <a:r>
+              <a:rPr sz="1200" b="0" i="0">
+                <a:solidFill>
+                  <a:srgbClr val="0F172A"/>
+                </a:solidFill>
+                <a:latin typeface="Arial"/>
+              </a:rPr>
+              <a:t>межі конкурують: зниження одного ризику підвищує інший, тому керування має знати механізм</a:t>
+            </a:r>
+          </a:p>
+        </p:txBody>
+      </p:sp>
+    </p:spTree>
+  </p:cSld>
+  <p:clrMapOvr>
+    <a:masterClrMapping/>
+  </p:clrMapOvr>
+</p:sld>
+</file>
+
+<file path=ppt/slides/slide21.xml><?xml version="1.0" encoding="utf-8"?>
+<p:sld xmlns:a="http://schemas.openxmlformats.org/drawingml/2006/main" xmlns:p="http://schemas.openxmlformats.org/presentationml/2006/main" xmlns:r="http://schemas.openxmlformats.org/officeDocument/2006/relationships">
+  <p:cSld>
+    <p:bg>
+      <p:bgPr>
+        <a:solidFill>
+          <a:srgbClr val="FFFFFF"/>
+        </a:solidFill>
+        <a:effectLst/>
+      </p:bgPr>
+    </p:bg>
+    <p:spTree>
+      <p:nvGrpSpPr>
+        <p:cNvPr id="1" name=""/>
+        <p:cNvGrpSpPr/>
+        <p:nvPr/>
+      </p:nvGrpSpPr>
+      <p:grpSpPr/>
+      <p:sp>
+        <p:nvSpPr>
+          <p:cNvPr id="2" name="TextBox 1"/>
+          <p:cNvSpPr txBox="1"/>
+          <p:nvPr/>
+        </p:nvSpPr>
+        <p:spPr>
+          <a:xfrm>
+            <a:off x="548640" y="411480"/>
+            <a:ext cx="11064240" cy="640080"/>
+          </a:xfrm>
+          <a:prstGeom prst="rect">
+            <a:avLst/>
+          </a:prstGeom>
+          <a:noFill/>
+        </p:spPr>
+        <p:txBody>
+          <a:bodyPr wrap="square" anchor="t" lIns="0" rIns="0" tIns="0" bIns="0">
+            <a:spAutoFit/>
+          </a:bodyPr>
+          <a:lstStyle/>
+          <a:p>
+            <a:pPr algn="l">
+              <a:spcAft>
+                <a:spcPts val="0"/>
+              </a:spcAft>
+            </a:pPr>
+            <a:r>
+              <a:rPr sz="2600" b="1" i="0">
+                <a:solidFill>
+                  <a:srgbClr val="0F172A"/>
+                </a:solidFill>
+                <a:latin typeface="Arial"/>
+              </a:rPr>
+              <a:t>Додаток А.2 Екранування камери і швидкі магнітні тригери</a:t>
+            </a:r>
+          </a:p>
+        </p:txBody>
+      </p:sp>
+      <p:sp>
+        <p:nvSpPr>
+          <p:cNvPr id="3" name="TextBox 2"/>
+          <p:cNvSpPr txBox="1"/>
+          <p:nvPr/>
+        </p:nvSpPr>
+        <p:spPr>
+          <a:xfrm>
+            <a:off x="11247120" y="6446520"/>
+            <a:ext cx="457200" cy="274320"/>
+          </a:xfrm>
+          <a:prstGeom prst="rect">
+            <a:avLst/>
+          </a:prstGeom>
+          <a:noFill/>
+        </p:spPr>
+        <p:txBody>
+          <a:bodyPr wrap="square" anchor="t" lIns="0" rIns="0" tIns="0" bIns="0">
+            <a:spAutoFit/>
+          </a:bodyPr>
+          <a:lstStyle/>
+          <a:p>
+            <a:pPr algn="r">
+              <a:spcAft>
+                <a:spcPts val="0"/>
+              </a:spcAft>
+            </a:pPr>
+            <a:r>
+              <a:rPr sz="1000" b="0" i="0">
+                <a:solidFill>
+                  <a:srgbClr val="94A3B8"/>
+                </a:solidFill>
+                <a:latin typeface="Arial"/>
+              </a:rPr>
+              <a:t>21</a:t>
+            </a:r>
+          </a:p>
+        </p:txBody>
+      </p:sp>
+      <p:sp>
+        <p:nvSpPr>
+          <p:cNvPr id="4" name="Rectangle 3"/>
+          <p:cNvSpPr/>
+          <p:nvPr/>
+        </p:nvSpPr>
+        <p:spPr>
+          <a:xfrm>
+            <a:off x="548640" y="1325880"/>
+            <a:ext cx="5394960" cy="1508760"/>
+          </a:xfrm>
+          <a:prstGeom prst="rect">
+            <a:avLst/>
+          </a:prstGeom>
+          <a:solidFill>
+            <a:srgbClr val="F8FAFC"/>
+          </a:solidFill>
+          <a:ln w="12700">
+            <a:solidFill>
+              <a:srgbClr val="E2E8F0"/>
+            </a:solidFill>
+          </a:ln>
+          <a:effectLst/>
+        </p:spPr>
+        <p:style>
+          <a:lnRef idx="1">
+            <a:schemeClr val="accent1"/>
+          </a:lnRef>
+          <a:fillRef idx="3">
+            <a:schemeClr val="accent1"/>
+          </a:fillRef>
+          <a:effectRef idx="2">
+            <a:schemeClr val="accent1"/>
+          </a:effectRef>
+          <a:fontRef idx="minor">
+            <a:schemeClr val="lt1"/>
+          </a:fontRef>
+        </p:style>
+        <p:txBody>
+          <a:bodyPr rtlCol="0" anchor="ctr"/>
+          <a:lstStyle/>
+          <a:p>
+            <a:pPr algn="ctr"/>
+          </a:p>
+        </p:txBody>
+      </p:sp>
+      <p:sp>
+        <p:nvSpPr>
+          <p:cNvPr id="5" name="TextBox 4"/>
+          <p:cNvSpPr txBox="1"/>
+          <p:nvPr/>
+        </p:nvSpPr>
+        <p:spPr>
+          <a:xfrm>
+            <a:off x="731520" y="1463040"/>
+            <a:ext cx="5029200" cy="1920240"/>
+          </a:xfrm>
+          <a:prstGeom prst="rect">
+            <a:avLst/>
+          </a:prstGeom>
+          <a:noFill/>
+        </p:spPr>
+        <p:txBody>
+          <a:bodyPr wrap="square" anchor="t" lIns="0" rIns="0" tIns="0" bIns="0">
+            <a:spAutoFit/>
+          </a:bodyPr>
+          <a:lstStyle/>
+          <a:p>
+            <a:pPr algn="l">
+              <a:spcAft>
+                <a:spcPts val="400"/>
+              </a:spcAft>
+            </a:pPr>
+            <a:r>
+              <a:rPr sz="1200" b="1" i="0">
+                <a:solidFill>
+                  <a:srgbClr val="475569"/>
+                </a:solidFill>
+                <a:latin typeface="Arial"/>
+              </a:rPr>
+              <a:t>Постійна часу камери</a:t>
+            </a:r>
+          </a:p>
+          <a:p>
+            <a:pPr algn="l">
+              <a:spcAft>
+                <a:spcPts val="1000"/>
+              </a:spcAft>
+            </a:pPr>
+            <a:r>
+              <a:rPr sz="2000" b="1" i="0">
+                <a:solidFill>
+                  <a:srgbClr val="0F172A"/>
+                </a:solidFill>
+                <a:latin typeface="Arial"/>
+              </a:rPr>
+              <a:t>τ_w = L_v / R_v ≈ 4–5,5 мс</a:t>
+            </a:r>
+          </a:p>
+          <a:p>
+            <a:pPr algn="l">
+              <a:spcAft>
+                <a:spcPts val="0"/>
+              </a:spcAft>
+            </a:pPr>
+            <a:r>
+              <a:rPr sz="1200" b="0" i="0">
+                <a:solidFill>
+                  <a:srgbClr val="475569"/>
+                </a:solidFill>
+                <a:latin typeface="Arial"/>
+              </a:rPr>
+              <a:t>Оцінка для JET, камера якого має високоомні сильфони</a:t>
+            </a:r>
+          </a:p>
+        </p:txBody>
+      </p:sp>
+      <p:sp>
+        <p:nvSpPr>
+          <p:cNvPr id="6" name="Rectangle 5"/>
+          <p:cNvSpPr/>
+          <p:nvPr/>
+        </p:nvSpPr>
+        <p:spPr>
+          <a:xfrm>
+            <a:off x="6263640" y="1325880"/>
+            <a:ext cx="5394960" cy="1508760"/>
+          </a:xfrm>
+          <a:prstGeom prst="rect">
+            <a:avLst/>
+          </a:prstGeom>
+          <a:solidFill>
+            <a:srgbClr val="F8FAFC"/>
+          </a:solidFill>
+          <a:ln w="12700">
+            <a:solidFill>
+              <a:srgbClr val="E2E8F0"/>
+            </a:solidFill>
+          </a:ln>
+          <a:effectLst/>
+        </p:spPr>
+        <p:style>
+          <a:lnRef idx="1">
+            <a:schemeClr val="accent1"/>
+          </a:lnRef>
+          <a:fillRef idx="3">
+            <a:schemeClr val="accent1"/>
+          </a:fillRef>
+          <a:effectRef idx="2">
+            <a:schemeClr val="accent1"/>
+          </a:effectRef>
+          <a:fontRef idx="minor">
+            <a:schemeClr val="lt1"/>
+          </a:fontRef>
+        </p:style>
+        <p:txBody>
+          <a:bodyPr rtlCol="0" anchor="ctr"/>
+          <a:lstStyle/>
+          <a:p>
+            <a:pPr algn="ctr"/>
+          </a:p>
+        </p:txBody>
+      </p:sp>
+      <p:sp>
+        <p:nvSpPr>
+          <p:cNvPr id="7" name="TextBox 6"/>
+          <p:cNvSpPr txBox="1"/>
+          <p:nvPr/>
+        </p:nvSpPr>
+        <p:spPr>
+          <a:xfrm>
+            <a:off x="6446520" y="1463040"/>
+            <a:ext cx="5029200" cy="1920240"/>
+          </a:xfrm>
+          <a:prstGeom prst="rect">
+            <a:avLst/>
+          </a:prstGeom>
+          <a:noFill/>
+        </p:spPr>
+        <p:txBody>
+          <a:bodyPr wrap="square" anchor="t" lIns="0" rIns="0" tIns="0" bIns="0">
+            <a:spAutoFit/>
+          </a:bodyPr>
+          <a:lstStyle/>
+          <a:p>
+            <a:pPr algn="l">
+              <a:spcAft>
+                <a:spcPts val="400"/>
+              </a:spcAft>
+            </a:pPr>
+            <a:r>
+              <a:rPr sz="1200" b="1" i="0">
+                <a:solidFill>
+                  <a:srgbClr val="475569"/>
+                </a:solidFill>
+                <a:latin typeface="Arial"/>
+              </a:rPr>
+              <a:t>Коефіцієнт екранування</a:t>
+            </a:r>
+          </a:p>
+          <a:p>
+            <a:pPr algn="l">
+              <a:spcAft>
+                <a:spcPts val="600"/>
+              </a:spcAft>
+            </a:pPr>
+            <a:r>
+              <a:rPr sz="1500" b="1" i="0">
+                <a:solidFill>
+                  <a:srgbClr val="0F172A"/>
+                </a:solidFill>
+                <a:latin typeface="Arial"/>
+              </a:rPr>
+              <a:t>S = (dB/dt)max без камери / (dB/dt)max з камерою</a:t>
+            </a:r>
+          </a:p>
+          <a:p>
+            <a:pPr algn="l">
+              <a:spcAft>
+                <a:spcPts val="0"/>
+              </a:spcAft>
+            </a:pPr>
+            <a:r>
+              <a:rPr sz="2000" b="1" i="0">
+                <a:solidFill>
+                  <a:srgbClr val="0F172A"/>
+                </a:solidFill>
+                <a:latin typeface="Arial"/>
+              </a:rPr>
+              <a:t>S ≈ 1,3–2,5</a:t>
+            </a:r>
+          </a:p>
+        </p:txBody>
+      </p:sp>
+      <p:sp>
+        <p:nvSpPr>
+          <p:cNvPr id="8" name="TextBox 7"/>
+          <p:cNvSpPr txBox="1"/>
+          <p:nvPr/>
+        </p:nvSpPr>
+        <p:spPr>
+          <a:xfrm>
+            <a:off x="548640" y="3154680"/>
+            <a:ext cx="11064240" cy="1828800"/>
+          </a:xfrm>
+          <a:prstGeom prst="rect">
+            <a:avLst/>
+          </a:prstGeom>
+          <a:noFill/>
+        </p:spPr>
+        <p:txBody>
+          <a:bodyPr wrap="square" anchor="t" lIns="0" rIns="0" tIns="0" bIns="0">
+            <a:spAutoFit/>
+          </a:bodyPr>
+          <a:lstStyle/>
+          <a:p>
+            <a:pPr algn="l">
+              <a:spcAft>
+                <a:spcPts val="1000"/>
+              </a:spcAft>
+            </a:pPr>
+            <a:r>
+              <a:rPr sz="1400" b="1" i="0">
+                <a:solidFill>
+                  <a:srgbClr val="0F172A"/>
+                </a:solidFill>
+                <a:latin typeface="Arial"/>
+              </a:rPr>
+              <a:t>Фільтр – </a:t>
+            </a:r>
+            <a:r>
+              <a:rPr sz="1400" b="0" i="0">
+                <a:solidFill>
+                  <a:srgbClr val="0F172A"/>
+                </a:solidFill>
+                <a:latin typeface="Arial"/>
+              </a:rPr>
+              <a:t>камера діє як згладжувальний фільтр із затримкою близько 5 мс і розтягує магнітні імпульси в часі</a:t>
+            </a:r>
+          </a:p>
+          <a:p>
+            <a:pPr algn="l">
+              <a:spcAft>
+                <a:spcPts val="1000"/>
+              </a:spcAft>
+            </a:pPr>
+            <a:r>
+              <a:rPr sz="1400" b="1" i="0">
+                <a:solidFill>
+                  <a:srgbClr val="0F172A"/>
+                </a:solidFill>
+                <a:latin typeface="Arial"/>
+              </a:rPr>
+              <a:t>Наслідок – </a:t>
+            </a:r>
+            <a:r>
+              <a:rPr sz="1400" b="0" i="0">
+                <a:solidFill>
+                  <a:srgbClr val="0F172A"/>
+                </a:solidFill>
+                <a:latin typeface="Arial"/>
+              </a:rPr>
+              <a:t>швидкі магнітні похідні приходять до приладів ослабленими і запізнілими — це перевіряють наступні два слайди</a:t>
+            </a:r>
+          </a:p>
+        </p:txBody>
+      </p:sp>
+    </p:spTree>
+  </p:cSld>
+  <p:clrMapOvr>
+    <a:masterClrMapping/>
+  </p:clrMapOvr>
+</p:sld>
+</file>
+
+<file path=ppt/slides/slide22.xml><?xml version="1.0" encoding="utf-8"?>
+<p:sld xmlns:a="http://schemas.openxmlformats.org/drawingml/2006/main" xmlns:p="http://schemas.openxmlformats.org/presentationml/2006/main" xmlns:r="http://schemas.openxmlformats.org/officeDocument/2006/relationships">
+  <p:cSld>
+    <p:bg>
+      <p:bgPr>
+        <a:solidFill>
+          <a:srgbClr val="FFFFFF"/>
+        </a:solidFill>
+        <a:effectLst/>
+      </p:bgPr>
+    </p:bg>
+    <p:spTree>
+      <p:nvGrpSpPr>
+        <p:cNvPr id="1" name=""/>
+        <p:cNvGrpSpPr/>
+        <p:nvPr/>
+      </p:nvGrpSpPr>
+      <p:grpSpPr/>
+      <p:sp>
+        <p:nvSpPr>
+          <p:cNvPr id="2" name="TextBox 1"/>
+          <p:cNvSpPr txBox="1"/>
+          <p:nvPr/>
+        </p:nvSpPr>
+        <p:spPr>
+          <a:xfrm>
+            <a:off x="548640" y="411480"/>
+            <a:ext cx="11064240" cy="640080"/>
+          </a:xfrm>
+          <a:prstGeom prst="rect">
+            <a:avLst/>
+          </a:prstGeom>
+          <a:noFill/>
+        </p:spPr>
+        <p:txBody>
+          <a:bodyPr wrap="square" anchor="t" lIns="0" rIns="0" tIns="0" bIns="0">
+            <a:spAutoFit/>
+          </a:bodyPr>
+          <a:lstStyle/>
+          <a:p>
+            <a:pPr algn="l">
+              <a:spcAft>
+                <a:spcPts val="0"/>
+              </a:spcAft>
+            </a:pPr>
+            <a:r>
+              <a:rPr sz="2600" b="1" i="0">
+                <a:solidFill>
+                  <a:srgbClr val="0F172A"/>
+                </a:solidFill>
+                <a:latin typeface="Arial"/>
+              </a:rPr>
+              <a:t>Додаток А.3 Гіпотеза швидкого тригера dIₚ/dt та її перевірка</a:t>
+            </a:r>
+          </a:p>
+        </p:txBody>
+      </p:sp>
+      <p:sp>
+        <p:nvSpPr>
+          <p:cNvPr id="3" name="TextBox 2"/>
+          <p:cNvSpPr txBox="1"/>
+          <p:nvPr/>
+        </p:nvSpPr>
+        <p:spPr>
+          <a:xfrm>
+            <a:off x="11247120" y="6446520"/>
+            <a:ext cx="457200" cy="274320"/>
+          </a:xfrm>
+          <a:prstGeom prst="rect">
+            <a:avLst/>
+          </a:prstGeom>
+          <a:noFill/>
+        </p:spPr>
+        <p:txBody>
+          <a:bodyPr wrap="square" anchor="t" lIns="0" rIns="0" tIns="0" bIns="0">
+            <a:spAutoFit/>
+          </a:bodyPr>
+          <a:lstStyle/>
+          <a:p>
+            <a:pPr algn="r">
+              <a:spcAft>
+                <a:spcPts val="0"/>
+              </a:spcAft>
+            </a:pPr>
+            <a:r>
+              <a:rPr sz="1000" b="0" i="0">
+                <a:solidFill>
+                  <a:srgbClr val="94A3B8"/>
+                </a:solidFill>
+                <a:latin typeface="Arial"/>
+              </a:rPr>
+              <a:t>22</a:t>
+            </a:r>
+          </a:p>
+        </p:txBody>
+      </p:sp>
+      <p:sp>
+        <p:nvSpPr>
+          <p:cNvPr id="4" name="Rectangle 3"/>
+          <p:cNvSpPr/>
+          <p:nvPr/>
+        </p:nvSpPr>
+        <p:spPr>
+          <a:xfrm>
+            <a:off x="521207" y="1252728"/>
+            <a:ext cx="5910975" cy="4626864"/>
+          </a:xfrm>
+          <a:prstGeom prst="rect">
+            <a:avLst/>
+          </a:prstGeom>
+          <a:noFill/>
+          <a:ln w="12700">
+            <a:solidFill>
+              <a:srgbClr val="E2E8F0"/>
+            </a:solidFill>
+          </a:ln>
+          <a:effectLst/>
+        </p:spPr>
+        <p:style>
+          <a:lnRef idx="1">
+            <a:schemeClr val="accent1"/>
+          </a:lnRef>
+          <a:fillRef idx="3">
+            <a:schemeClr val="accent1"/>
+          </a:fillRef>
+          <a:effectRef idx="2">
+            <a:schemeClr val="accent1"/>
+          </a:effectRef>
+          <a:fontRef idx="minor">
+            <a:schemeClr val="lt1"/>
+          </a:fontRef>
+        </p:style>
+        <p:txBody>
+          <a:bodyPr rtlCol="0" anchor="ctr"/>
+          <a:lstStyle/>
+          <a:p>
+            <a:pPr algn="ctr"/>
+          </a:p>
+        </p:txBody>
+      </p:sp>
+      <p:pic>
+        <p:nvPicPr>
+          <p:cNvPr id="5" name="Picture 4" descr="phys_dipdt.png"/>
+          <p:cNvPicPr>
+            <a:picLocks noChangeAspect="1"/>
+          </p:cNvPicPr>
+          <p:nvPr/>
+        </p:nvPicPr>
+        <p:blipFill>
+          <a:blip r:embed="rId3"/>
+          <a:stretch>
+            <a:fillRect/>
+          </a:stretch>
+        </p:blipFill>
+        <p:spPr>
+          <a:xfrm>
+            <a:off x="548640" y="1280160"/>
+            <a:ext cx="5856111" cy="4572000"/>
+          </a:xfrm>
+          <a:prstGeom prst="rect">
+            <a:avLst/>
+          </a:prstGeom>
+        </p:spPr>
+      </p:pic>
+      <p:sp>
+        <p:nvSpPr>
+          <p:cNvPr id="6" name="TextBox 5"/>
+          <p:cNvSpPr txBox="1"/>
+          <p:nvPr/>
+        </p:nvSpPr>
+        <p:spPr>
+          <a:xfrm>
+            <a:off x="548640" y="5897880"/>
+            <a:ext cx="5856111" cy="365760"/>
+          </a:xfrm>
+          <a:prstGeom prst="rect">
+            <a:avLst/>
+          </a:prstGeom>
+          <a:noFill/>
+        </p:spPr>
+        <p:txBody>
+          <a:bodyPr wrap="square" anchor="t" lIns="0" rIns="0" tIns="0" bIns="0">
+            <a:spAutoFit/>
+          </a:bodyPr>
+          <a:lstStyle/>
+          <a:p>
+            <a:pPr algn="l">
+              <a:spcAft>
+                <a:spcPts val="0"/>
+              </a:spcAft>
+            </a:pPr>
+            <a:r>
+              <a:rPr sz="1100" b="0" i="0">
+                <a:solidFill>
+                  <a:srgbClr val="475569"/>
+                </a:solidFill>
+                <a:latin typeface="Arial"/>
+              </a:rPr>
+              <a:t>Рисунок 12 – Перевірка магнітного тригера на розряді 5: Iₚ, dIₚ/dt з порогом −10 МА/с і сигнал тривоги</a:t>
+            </a:r>
+          </a:p>
+        </p:txBody>
+      </p:sp>
+      <p:sp>
+        <p:nvSpPr>
+          <p:cNvPr id="7" name="TextBox 6"/>
+          <p:cNvSpPr txBox="1"/>
+          <p:nvPr/>
+        </p:nvSpPr>
+        <p:spPr>
+          <a:xfrm>
+            <a:off x="6861951" y="1371600"/>
+            <a:ext cx="4750928" cy="2743200"/>
+          </a:xfrm>
+          <a:prstGeom prst="rect">
+            <a:avLst/>
+          </a:prstGeom>
+          <a:noFill/>
+        </p:spPr>
+        <p:txBody>
+          <a:bodyPr wrap="square" anchor="t" lIns="0" rIns="0" tIns="0" bIns="0">
+            <a:spAutoFit/>
+          </a:bodyPr>
+          <a:lstStyle/>
+          <a:p>
+            <a:pPr algn="l">
+              <a:spcAft>
+                <a:spcPts val="900"/>
+              </a:spcAft>
+            </a:pPr>
+            <a:r>
+              <a:rPr sz="1300" b="1" i="0">
+                <a:solidFill>
+                  <a:srgbClr val="0F172A"/>
+                </a:solidFill>
+                <a:latin typeface="Arial"/>
+              </a:rPr>
+              <a:t>Гіпотеза – </a:t>
+            </a:r>
+            <a:r>
+              <a:rPr sz="1300" b="0" i="0">
+                <a:solidFill>
+                  <a:srgbClr val="0F172A"/>
+                </a:solidFill>
+                <a:latin typeface="Arial"/>
+              </a:rPr>
+              <a:t>D_I(t) = (Iₚ(t) − Iₚ(t − Δt)) / Δt на кожному кроці (Δt = 5 мс); тривога при D_I &lt; −10 МА/с</a:t>
+            </a:r>
+          </a:p>
+          <a:p>
+            <a:pPr algn="l">
+              <a:spcAft>
+                <a:spcPts val="900"/>
+              </a:spcAft>
+            </a:pPr>
+            <a:r>
+              <a:rPr sz="1300" b="1" i="0">
+                <a:solidFill>
+                  <a:srgbClr val="0F172A"/>
+                </a:solidFill>
+                <a:latin typeface="Arial"/>
+              </a:rPr>
+              <a:t>Фізика – </a:t>
+            </a:r>
+            <a:r>
+              <a:rPr sz="1300" b="0" i="0">
+                <a:solidFill>
+                  <a:srgbClr val="0F172A"/>
+                </a:solidFill>
+                <a:latin typeface="Arial"/>
+              </a:rPr>
+              <a:t>термічне гасіння t_Q передує гасінню струму: у момент t_Q струм ще утримує індуктивність плазми</a:t>
+            </a:r>
+          </a:p>
+          <a:p>
+            <a:pPr algn="l">
+              <a:spcAft>
+                <a:spcPts val="900"/>
+              </a:spcAft>
+            </a:pPr>
+            <a:r>
+              <a:rPr sz="1300" b="1" i="0">
+                <a:solidFill>
+                  <a:srgbClr val="0F172A"/>
+                </a:solidFill>
+                <a:latin typeface="Arial"/>
+              </a:rPr>
+              <a:t>Результат – </a:t>
+            </a:r>
+            <a:r>
+              <a:rPr sz="1300" b="0" i="0">
+                <a:solidFill>
+                  <a:srgbClr val="0F172A"/>
+                </a:solidFill>
+                <a:latin typeface="Arial"/>
+              </a:rPr>
+              <a:t>у заліковому вікні 300 мс поріг не перетнуто: тригер запізнюється або пропускає зрив</a:t>
+            </a:r>
+          </a:p>
+          <a:p>
+            <a:pPr algn="l">
+              <a:spcAft>
+                <a:spcPts val="900"/>
+              </a:spcAft>
+            </a:pPr>
+            <a:r>
+              <a:rPr sz="1300" b="1" i="0">
+                <a:solidFill>
+                  <a:srgbClr val="0F172A"/>
+                </a:solidFill>
+                <a:latin typeface="Arial"/>
+              </a:rPr>
+              <a:t>Висновок – </a:t>
+            </a:r>
+            <a:r>
+              <a:rPr sz="1300" b="0" i="0">
+                <a:solidFill>
+                  <a:srgbClr val="0F172A"/>
+                </a:solidFill>
+                <a:latin typeface="Arial"/>
+              </a:rPr>
+              <a:t>dIₚ/dt як тригер раннього попередження відкинуто</a:t>
+            </a:r>
+          </a:p>
+        </p:txBody>
+      </p:sp>
+    </p:spTree>
+  </p:cSld>
+  <p:clrMapOvr>
+    <a:masterClrMapping/>
+  </p:clrMapOvr>
+</p:sld>
+</file>
+
+<file path=ppt/slides/slide23.xml><?xml version="1.0" encoding="utf-8"?>
+<p:sld xmlns:a="http://schemas.openxmlformats.org/drawingml/2006/main" xmlns:p="http://schemas.openxmlformats.org/presentationml/2006/main" xmlns:r="http://schemas.openxmlformats.org/officeDocument/2006/relationships">
+  <p:cSld>
+    <p:bg>
+      <p:bgPr>
+        <a:solidFill>
+          <a:srgbClr val="FFFFFF"/>
+        </a:solidFill>
+        <a:effectLst/>
+      </p:bgPr>
+    </p:bg>
+    <p:spTree>
+      <p:nvGrpSpPr>
+        <p:cNvPr id="1" name=""/>
+        <p:cNvGrpSpPr/>
+        <p:nvPr/>
+      </p:nvGrpSpPr>
+      <p:grpSpPr/>
+      <p:sp>
+        <p:nvSpPr>
+          <p:cNvPr id="2" name="TextBox 1"/>
+          <p:cNvSpPr txBox="1"/>
+          <p:nvPr/>
+        </p:nvSpPr>
+        <p:spPr>
+          <a:xfrm>
+            <a:off x="548640" y="411480"/>
+            <a:ext cx="11064240" cy="640080"/>
+          </a:xfrm>
+          <a:prstGeom prst="rect">
+            <a:avLst/>
+          </a:prstGeom>
+          <a:noFill/>
+        </p:spPr>
+        <p:txBody>
+          <a:bodyPr wrap="square" anchor="t" lIns="0" rIns="0" tIns="0" bIns="0">
+            <a:spAutoFit/>
+          </a:bodyPr>
+          <a:lstStyle/>
+          <a:p>
+            <a:pPr algn="l">
+              <a:spcAft>
+                <a:spcPts val="0"/>
+              </a:spcAft>
+            </a:pPr>
+            <a:r>
+              <a:rPr sz="2600" b="1" i="0">
+                <a:solidFill>
+                  <a:srgbClr val="0F172A"/>
+                </a:solidFill>
+                <a:latin typeface="Arial"/>
+              </a:rPr>
+              <a:t>Додаток А.4 Спростування гіпотези: зонди Мірнова і пастка ELM</a:t>
+            </a:r>
+          </a:p>
+        </p:txBody>
+      </p:sp>
+      <p:sp>
+        <p:nvSpPr>
+          <p:cNvPr id="3" name="TextBox 2"/>
+          <p:cNvSpPr txBox="1"/>
+          <p:nvPr/>
+        </p:nvSpPr>
+        <p:spPr>
+          <a:xfrm>
+            <a:off x="11247120" y="6446520"/>
+            <a:ext cx="457200" cy="274320"/>
+          </a:xfrm>
+          <a:prstGeom prst="rect">
+            <a:avLst/>
+          </a:prstGeom>
+          <a:noFill/>
+        </p:spPr>
+        <p:txBody>
+          <a:bodyPr wrap="square" anchor="t" lIns="0" rIns="0" tIns="0" bIns="0">
+            <a:spAutoFit/>
+          </a:bodyPr>
+          <a:lstStyle/>
+          <a:p>
+            <a:pPr algn="r">
+              <a:spcAft>
+                <a:spcPts val="0"/>
+              </a:spcAft>
+            </a:pPr>
+            <a:r>
+              <a:rPr sz="1000" b="0" i="0">
+                <a:solidFill>
+                  <a:srgbClr val="94A3B8"/>
+                </a:solidFill>
+                <a:latin typeface="Arial"/>
+              </a:rPr>
+              <a:t>23</a:t>
+            </a:r>
+          </a:p>
+        </p:txBody>
+      </p:sp>
+      <p:sp>
+        <p:nvSpPr>
+          <p:cNvPr id="4" name="Rectangle 3"/>
+          <p:cNvSpPr/>
+          <p:nvPr/>
+        </p:nvSpPr>
+        <p:spPr>
+          <a:xfrm>
+            <a:off x="521207" y="1252728"/>
+            <a:ext cx="7644384" cy="3774047"/>
+          </a:xfrm>
+          <a:prstGeom prst="rect">
+            <a:avLst/>
+          </a:prstGeom>
+          <a:noFill/>
+          <a:ln w="12700">
+            <a:solidFill>
+              <a:srgbClr val="E2E8F0"/>
+            </a:solidFill>
+          </a:ln>
+          <a:effectLst/>
+        </p:spPr>
+        <p:style>
+          <a:lnRef idx="1">
+            <a:schemeClr val="accent1"/>
+          </a:lnRef>
+          <a:fillRef idx="3">
+            <a:schemeClr val="accent1"/>
+          </a:fillRef>
+          <a:effectRef idx="2">
+            <a:schemeClr val="accent1"/>
+          </a:effectRef>
+          <a:fontRef idx="minor">
+            <a:schemeClr val="lt1"/>
+          </a:fontRef>
+        </p:style>
+        <p:txBody>
+          <a:bodyPr rtlCol="0" anchor="ctr"/>
+          <a:lstStyle/>
+          <a:p>
+            <a:pPr algn="ctr"/>
+          </a:p>
+        </p:txBody>
+      </p:sp>
+      <p:pic>
+        <p:nvPicPr>
+          <p:cNvPr id="5" name="Picture 4" descr="phys_mirnov.png"/>
+          <p:cNvPicPr>
+            <a:picLocks noChangeAspect="1"/>
+          </p:cNvPicPr>
+          <p:nvPr/>
+        </p:nvPicPr>
+        <p:blipFill>
+          <a:blip r:embed="rId3"/>
+          <a:stretch>
+            <a:fillRect/>
+          </a:stretch>
+        </p:blipFill>
+        <p:spPr>
+          <a:xfrm>
+            <a:off x="548640" y="1280160"/>
+            <a:ext cx="7589520" cy="3719183"/>
+          </a:xfrm>
+          <a:prstGeom prst="rect">
+            <a:avLst/>
+          </a:prstGeom>
+        </p:spPr>
+      </p:pic>
+      <p:sp>
+        <p:nvSpPr>
+          <p:cNvPr id="6" name="TextBox 5"/>
+          <p:cNvSpPr txBox="1"/>
+          <p:nvPr/>
+        </p:nvSpPr>
+        <p:spPr>
+          <a:xfrm>
+            <a:off x="548640" y="5045063"/>
+            <a:ext cx="7589520" cy="365760"/>
+          </a:xfrm>
+          <a:prstGeom prst="rect">
+            <a:avLst/>
+          </a:prstGeom>
+          <a:noFill/>
+        </p:spPr>
+        <p:txBody>
+          <a:bodyPr wrap="square" anchor="t" lIns="0" rIns="0" tIns="0" bIns="0">
+            <a:spAutoFit/>
+          </a:bodyPr>
+          <a:lstStyle/>
+          <a:p>
+            <a:pPr algn="l">
+              <a:spcAft>
+                <a:spcPts val="0"/>
+              </a:spcAft>
+            </a:pPr>
+            <a:r>
+              <a:rPr sz="1100" b="0" i="0">
+                <a:solidFill>
+                  <a:srgbClr val="475569"/>
+                </a:solidFill>
+                <a:latin typeface="Arial"/>
+              </a:rPr>
+              <a:t>Рисунок 13 – Розряд 27: Iₚ, сигнал котушок Мірнова (проста сума і просторовий RMS), детектор замкненої моди</a:t>
+            </a:r>
+          </a:p>
+        </p:txBody>
+      </p:sp>
+      <p:sp>
+        <p:nvSpPr>
+          <p:cNvPr id="7" name="TextBox 6"/>
+          <p:cNvSpPr txBox="1"/>
+          <p:nvPr/>
+        </p:nvSpPr>
+        <p:spPr>
+          <a:xfrm>
+            <a:off x="8503920" y="1371600"/>
+            <a:ext cx="3154680" cy="2743200"/>
+          </a:xfrm>
+          <a:prstGeom prst="rect">
+            <a:avLst/>
+          </a:prstGeom>
+          <a:noFill/>
+        </p:spPr>
+        <p:txBody>
+          <a:bodyPr wrap="square" anchor="t" lIns="0" rIns="0" tIns="0" bIns="0">
+            <a:spAutoFit/>
+          </a:bodyPr>
+          <a:lstStyle/>
+          <a:p>
+            <a:pPr algn="l">
+              <a:spcAft>
+                <a:spcPts val="800"/>
+              </a:spcAft>
+            </a:pPr>
+            <a:r>
+              <a:rPr sz="1200" b="1" i="0">
+                <a:solidFill>
+                  <a:srgbClr val="0F172A"/>
+                </a:solidFill>
+                <a:latin typeface="Arial"/>
+              </a:rPr>
+              <a:t>Сума каналів – </a:t>
+            </a:r>
+            <a:r>
+              <a:rPr sz="1200" b="0" i="0">
+                <a:solidFill>
+                  <a:srgbClr val="0F172A"/>
+                </a:solidFill>
+                <a:latin typeface="Arial"/>
+              </a:rPr>
+              <a:t>ΣBᵢ гаситься взаємно: моди компенсують одна одну</a:t>
+            </a:r>
+          </a:p>
+          <a:p>
+            <a:pPr algn="l">
+              <a:spcAft>
+                <a:spcPts val="800"/>
+              </a:spcAft>
+            </a:pPr>
+            <a:r>
+              <a:rPr sz="1200" b="1" i="0">
+                <a:solidFill>
+                  <a:srgbClr val="0F172A"/>
+                </a:solidFill>
+                <a:latin typeface="Arial"/>
+              </a:rPr>
+              <a:t>Просторовий RMS – </a:t>
+            </a:r>
+            <a:r>
+              <a:rPr sz="1200" b="0" i="0">
+                <a:solidFill>
+                  <a:srgbClr val="0F172A"/>
+                </a:solidFill>
+                <a:latin typeface="Arial"/>
+              </a:rPr>
+              <a:t>R(t) = √(⅛ ΣBᵢ²) показує наростання лише за 50–90 мс до t_Q</a:t>
+            </a:r>
+          </a:p>
+          <a:p>
+            <a:pPr algn="l">
+              <a:spcAft>
+                <a:spcPts val="800"/>
+              </a:spcAft>
+            </a:pPr>
+            <a:r>
+              <a:rPr sz="1200" b="1" i="0">
+                <a:solidFill>
+                  <a:srgbClr val="0F172A"/>
+                </a:solidFill>
+                <a:latin typeface="Arial"/>
+              </a:rPr>
+              <a:t>Пастка ELM – </a:t>
+            </a:r>
+            <a:r>
+              <a:rPr sz="1200" b="0" i="0">
+                <a:solidFill>
+                  <a:srgbClr val="0F172A"/>
+                </a:solidFill>
+                <a:latin typeface="Arial"/>
+              </a:rPr>
+              <a:t>одиночні сплески — ELM; стаціонарний поріг дає хибні тривоги</a:t>
+            </a:r>
+          </a:p>
+          <a:p>
+            <a:pPr algn="l">
+              <a:spcAft>
+                <a:spcPts val="800"/>
+              </a:spcAft>
+            </a:pPr>
+            <a:r>
+              <a:rPr sz="1200" b="1" i="0">
+                <a:solidFill>
+                  <a:srgbClr val="0F172A"/>
+                </a:solidFill>
+                <a:latin typeface="Arial"/>
+              </a:rPr>
+              <a:t>У моделі – </a:t>
+            </a:r>
+            <a:r>
+              <a:rPr sz="1200" b="0" i="0">
+                <a:solidFill>
+                  <a:srgbClr val="0F172A"/>
+                </a:solidFill>
+                <a:latin typeface="Arial"/>
+              </a:rPr>
+              <a:t>МГД — лише для передвісника (голова A); раннє попередження (голова B) — за межами f_GW, q95, βN, P_rad/P_in</a:t>
+            </a:r>
+          </a:p>
+        </p:txBody>
+      </p:sp>
+    </p:spTree>
+  </p:cSld>
+  <p:clrMapOvr>
+    <a:masterClrMapping/>
+  </p:clrMapOvr>
+</p:sld>
+</file>
+
+<file path=ppt/slides/slide24.xml><?xml version="1.0" encoding="utf-8"?>
+<p:sld xmlns:a="http://schemas.openxmlformats.org/drawingml/2006/main" xmlns:p="http://schemas.openxmlformats.org/presentationml/2006/main" xmlns:r="http://schemas.openxmlformats.org/officeDocument/2006/relationships">
+  <p:cSld>
+    <p:bg>
+      <p:bgPr>
+        <a:solidFill>
+          <a:srgbClr val="FFFFFF"/>
+        </a:solidFill>
+        <a:effectLst/>
+      </p:bgPr>
+    </p:bg>
+    <p:spTree>
+      <p:nvGrpSpPr>
+        <p:cNvPr id="1" name=""/>
+        <p:cNvGrpSpPr/>
+        <p:nvPr/>
+      </p:nvGrpSpPr>
+      <p:grpSpPr/>
+      <p:sp>
+        <p:nvSpPr>
+          <p:cNvPr id="2" name="TextBox 1"/>
+          <p:cNvSpPr txBox="1"/>
+          <p:nvPr/>
+        </p:nvSpPr>
+        <p:spPr>
+          <a:xfrm>
+            <a:off x="548640" y="411480"/>
+            <a:ext cx="11064240" cy="640080"/>
+          </a:xfrm>
+          <a:prstGeom prst="rect">
+            <a:avLst/>
+          </a:prstGeom>
+          <a:noFill/>
+        </p:spPr>
+        <p:txBody>
+          <a:bodyPr wrap="square" anchor="t" lIns="0" rIns="0" tIns="0" bIns="0">
+            <a:spAutoFit/>
+          </a:bodyPr>
+          <a:lstStyle/>
+          <a:p>
+            <a:pPr algn="l">
+              <a:spcAft>
+                <a:spcPts val="0"/>
+              </a:spcAft>
+            </a:pPr>
+            <a:r>
+              <a:rPr sz="2600" b="1" i="0">
+                <a:solidFill>
+                  <a:srgbClr val="0F172A"/>
+                </a:solidFill>
+                <a:latin typeface="Arial"/>
+              </a:rPr>
+              <a:t>Додаток А.5 Фізичний аналіз: що відкинуто і що впроваджено</a:t>
+            </a:r>
+          </a:p>
+        </p:txBody>
+      </p:sp>
+      <p:sp>
+        <p:nvSpPr>
+          <p:cNvPr id="3" name="TextBox 2"/>
+          <p:cNvSpPr txBox="1"/>
+          <p:nvPr/>
+        </p:nvSpPr>
+        <p:spPr>
+          <a:xfrm>
+            <a:off x="11247120" y="6446520"/>
+            <a:ext cx="457200" cy="274320"/>
+          </a:xfrm>
+          <a:prstGeom prst="rect">
+            <a:avLst/>
+          </a:prstGeom>
+          <a:noFill/>
+        </p:spPr>
+        <p:txBody>
+          <a:bodyPr wrap="square" anchor="t" lIns="0" rIns="0" tIns="0" bIns="0">
+            <a:spAutoFit/>
+          </a:bodyPr>
+          <a:lstStyle/>
+          <a:p>
+            <a:pPr algn="r">
+              <a:spcAft>
+                <a:spcPts val="0"/>
+              </a:spcAft>
+            </a:pPr>
+            <a:r>
+              <a:rPr sz="1000" b="0" i="0">
+                <a:solidFill>
+                  <a:srgbClr val="94A3B8"/>
+                </a:solidFill>
+                <a:latin typeface="Arial"/>
+              </a:rPr>
+              <a:t>24</a:t>
+            </a:r>
+          </a:p>
+        </p:txBody>
+      </p:sp>
+      <p:sp>
+        <p:nvSpPr>
+          <p:cNvPr id="4" name="TextBox 3"/>
+          <p:cNvSpPr txBox="1"/>
+          <p:nvPr/>
+        </p:nvSpPr>
+        <p:spPr>
+          <a:xfrm>
+            <a:off x="548640" y="1234440"/>
+            <a:ext cx="11064240" cy="320040"/>
+          </a:xfrm>
+          <a:prstGeom prst="rect">
+            <a:avLst/>
+          </a:prstGeom>
+          <a:noFill/>
+        </p:spPr>
+        <p:txBody>
+          <a:bodyPr wrap="square" anchor="t" lIns="0" rIns="0" tIns="0" bIns="0">
+            <a:spAutoFit/>
+          </a:bodyPr>
+          <a:lstStyle/>
+          <a:p>
+            <a:pPr algn="l">
+              <a:spcAft>
+                <a:spcPts val="0"/>
+              </a:spcAft>
+            </a:pPr>
+            <a:r>
+              <a:rPr sz="1100" b="0" i="0">
+                <a:solidFill>
+                  <a:srgbClr val="475569"/>
+                </a:solidFill>
+                <a:latin typeface="Arial"/>
+              </a:rPr>
+              <a:t>Таблиця 9 – Невдалі евристики і впроваджені рішення</a:t>
+            </a:r>
+          </a:p>
+        </p:txBody>
+      </p:sp>
+      <p:graphicFrame>
+        <p:nvGraphicFramePr>
+          <p:cNvPr id="5" name="Table 4"/>
+          <p:cNvGraphicFramePr>
+            <a:graphicFrameLocks noGrp="1"/>
+          </p:cNvGraphicFramePr>
+          <p:nvPr/>
+        </p:nvGraphicFramePr>
+        <p:xfrm>
+          <a:off x="548640" y="1600200"/>
+          <a:ext cx="11064240" cy="4389120"/>
+        </p:xfrm>
+        <a:graphic>
+          <a:graphicData uri="http://schemas.openxmlformats.org/drawingml/2006/table">
+            <a:tbl>
+              <a:tblPr firstRow="0" bandRow="0">
+                <a:tableStyleId>{5C22544A-7EE6-4342-B048-85BDC9FD1C3A}</a:tableStyleId>
+              </a:tblPr>
+              <a:tblGrid>
+                <a:gridCol w="2103120"/>
+                <a:gridCol w="4480560"/>
+                <a:gridCol w="4480560"/>
+              </a:tblGrid>
+              <a:tr h="731520">
+                <a:tc>
+                  <a:txBody>
+                    <a:bodyPr wrap="square"/>
+                    <a:lstStyle/>
+                    <a:p>
+                      <a:pPr algn="l"/>
+                      <a:r>
+                        <a:rPr sz="1200" b="1">
+                          <a:solidFill>
+                            <a:srgbClr val="475569"/>
+                          </a:solidFill>
+                          <a:latin typeface="Arial"/>
+                        </a:rPr>
+                        <a:t>категорія</a:t>
+                      </a:r>
+                    </a:p>
+                  </a:txBody>
+                  <a:tcPr marL="91440" marR="91440" marT="27432" marB="27432" anchor="ctr">
+                    <a:solidFill>
+                      <a:srgbClr val="F1F5F9"/>
+                    </a:solidFill>
+                  </a:tcPr>
+                </a:tc>
+                <a:tc>
+                  <a:txBody>
+                    <a:bodyPr wrap="square"/>
+                    <a:lstStyle/>
+                    <a:p>
+                      <a:pPr algn="ctr"/>
+                      <a:r>
+                        <a:rPr sz="1200" b="1">
+                          <a:solidFill>
+                            <a:srgbClr val="475569"/>
+                          </a:solidFill>
+                          <a:latin typeface="Arial"/>
+                        </a:rPr>
+                        <a:t>що відкинуто</a:t>
+                      </a:r>
+                    </a:p>
+                  </a:txBody>
+                  <a:tcPr marL="91440" marR="91440" marT="27432" marB="27432" anchor="ctr">
+                    <a:solidFill>
+                      <a:srgbClr val="F1F5F9"/>
+                    </a:solidFill>
+                  </a:tcPr>
+                </a:tc>
+                <a:tc>
+                  <a:txBody>
+                    <a:bodyPr wrap="square"/>
+                    <a:lstStyle/>
+                    <a:p>
+                      <a:pPr algn="ctr"/>
+                      <a:r>
+                        <a:rPr sz="1200" b="1">
+                          <a:solidFill>
+                            <a:srgbClr val="475569"/>
+                          </a:solidFill>
+                          <a:latin typeface="Arial"/>
+                        </a:rPr>
+                        <a:t>що впроваджено</a:t>
+                      </a:r>
+                    </a:p>
+                  </a:txBody>
+                  <a:tcPr marL="91440" marR="91440" marT="27432" marB="27432" anchor="ctr">
+                    <a:solidFill>
+                      <a:srgbClr val="F1F5F9"/>
+                    </a:solidFill>
+                  </a:tcPr>
+                </a:tc>
+              </a:tr>
+              <a:tr h="731520">
+                <a:tc>
+                  <a:txBody>
+                    <a:bodyPr wrap="square"/>
+                    <a:lstStyle/>
+                    <a:p>
+                      <a:pPr algn="l"/>
+                      <a:r>
+                        <a:rPr sz="1200" b="1">
+                          <a:solidFill>
+                            <a:srgbClr val="0F172A"/>
+                          </a:solidFill>
+                          <a:latin typeface="Arial"/>
+                        </a:rPr>
+                        <a:t>магнітні похідні</a:t>
+                      </a:r>
+                    </a:p>
+                  </a:txBody>
+                  <a:tcPr marL="91440" marR="91440" marT="27432" marB="27432" anchor="ctr">
+                    <a:solidFill>
+                      <a:srgbClr val="FFFFFF"/>
+                    </a:solidFill>
+                  </a:tcPr>
+                </a:tc>
+                <a:tc>
+                  <a:txBody>
+                    <a:bodyPr wrap="square"/>
+                    <a:lstStyle/>
+                    <a:p>
+                      <a:pPr algn="ctr"/>
+                      <a:r>
+                        <a:rPr sz="1200" b="0">
+                          <a:solidFill>
+                            <a:srgbClr val="0F172A"/>
+                          </a:solidFill>
+                          <a:latin typeface="Arial"/>
+                        </a:rPr>
+                        <a:t>поріг за dIₚ/dt або dB_p/dt: запізнюється, виникає лише на гасінні струму</a:t>
+                      </a:r>
+                    </a:p>
+                  </a:txBody>
+                  <a:tcPr marL="91440" marR="91440" marT="27432" marB="27432" anchor="ctr">
+                    <a:solidFill>
+                      <a:srgbClr val="FFFFFF"/>
+                    </a:solidFill>
+                  </a:tcPr>
+                </a:tc>
+                <a:tc>
+                  <a:txBody>
+                    <a:bodyPr wrap="square"/>
+                    <a:lstStyle/>
+                    <a:p>
+                      <a:pPr algn="ctr"/>
+                      <a:r>
+                        <a:rPr sz="1200" b="0">
+                          <a:solidFill>
+                            <a:srgbClr val="0F172A"/>
+                          </a:solidFill>
+                          <a:latin typeface="Arial"/>
+                        </a:rPr>
+                        <a:t>контроль запізнення; відмова від dIₚ/dt як тригера попередження</a:t>
+                      </a:r>
+                    </a:p>
+                  </a:txBody>
+                  <a:tcPr marL="91440" marR="91440" marT="27432" marB="27432" anchor="ctr">
+                    <a:solidFill>
+                      <a:srgbClr val="FFFFFF"/>
+                    </a:solidFill>
+                  </a:tcPr>
+                </a:tc>
+              </a:tr>
+              <a:tr h="731520">
+                <a:tc>
+                  <a:txBody>
+                    <a:bodyPr wrap="square"/>
+                    <a:lstStyle/>
+                    <a:p>
+                      <a:pPr algn="l"/>
+                      <a:r>
+                        <a:rPr sz="1200" b="1">
+                          <a:solidFill>
+                            <a:srgbClr val="0F172A"/>
+                          </a:solidFill>
+                          <a:latin typeface="Arial"/>
+                        </a:rPr>
+                        <a:t>котушки Мірнова</a:t>
+                      </a:r>
+                    </a:p>
+                  </a:txBody>
+                  <a:tcPr marL="91440" marR="91440" marT="27432" marB="27432" anchor="ctr">
+                    <a:solidFill>
+                      <a:srgbClr val="FFFFFF"/>
+                    </a:solidFill>
+                  </a:tcPr>
+                </a:tc>
+                <a:tc>
+                  <a:txBody>
+                    <a:bodyPr wrap="square"/>
+                    <a:lstStyle/>
+                    <a:p>
+                      <a:pPr algn="ctr"/>
+                      <a:r>
+                        <a:rPr sz="1200" b="0">
+                          <a:solidFill>
+                            <a:srgbClr val="0F172A"/>
+                          </a:solidFill>
+                          <a:latin typeface="Arial"/>
+                        </a:rPr>
+                        <a:t>скалярна сума каналів ΣBᵢ: взаємне гасіння мод</a:t>
+                      </a:r>
+                    </a:p>
+                  </a:txBody>
+                  <a:tcPr marL="91440" marR="91440" marT="27432" marB="27432" anchor="ctr">
+                    <a:solidFill>
+                      <a:srgbClr val="FFFFFF"/>
+                    </a:solidFill>
+                  </a:tcPr>
+                </a:tc>
+                <a:tc>
+                  <a:txBody>
+                    <a:bodyPr wrap="square"/>
+                    <a:lstStyle/>
+                    <a:p>
+                      <a:pPr algn="ctr"/>
+                      <a:r>
+                        <a:rPr sz="1200" b="0">
+                          <a:solidFill>
+                            <a:srgbClr val="0F172A"/>
+                          </a:solidFill>
+                          <a:latin typeface="Arial"/>
+                        </a:rPr>
+                        <a:t>просторовий RMS √(⅛ ΣBᵢ²), фур'є-моди, крос-кореляція</a:t>
+                      </a:r>
+                    </a:p>
+                  </a:txBody>
+                  <a:tcPr marL="91440" marR="91440" marT="27432" marB="27432" anchor="ctr">
+                    <a:solidFill>
+                      <a:srgbClr val="FFFFFF"/>
+                    </a:solidFill>
+                  </a:tcPr>
+                </a:tc>
+              </a:tr>
+              <a:tr h="731520">
+                <a:tc>
+                  <a:txBody>
+                    <a:bodyPr wrap="square"/>
+                    <a:lstStyle/>
+                    <a:p>
+                      <a:pPr algn="l"/>
+                      <a:r>
+                        <a:rPr sz="1200" b="1">
+                          <a:solidFill>
+                            <a:srgbClr val="0F172A"/>
+                          </a:solidFill>
+                          <a:latin typeface="Arial"/>
+                        </a:rPr>
+                        <a:t>горизонт прогнозу</a:t>
+                      </a:r>
+                    </a:p>
+                  </a:txBody>
+                  <a:tcPr marL="91440" marR="91440" marT="27432" marB="27432" anchor="ctr">
+                    <a:solidFill>
+                      <a:srgbClr val="FFFFFF"/>
+                    </a:solidFill>
+                  </a:tcPr>
+                </a:tc>
+                <a:tc>
+                  <a:txBody>
+                    <a:bodyPr wrap="square"/>
+                    <a:lstStyle/>
+                    <a:p>
+                      <a:pPr algn="ctr"/>
+                      <a:r>
+                        <a:rPr sz="1200" b="0">
+                          <a:solidFill>
+                            <a:srgbClr val="0F172A"/>
+                          </a:solidFill>
+                          <a:latin typeface="Arial"/>
+                        </a:rPr>
+                        <a:t>300 мс лише з МГД-каналів: вони ростуть лише за 50–90 мс</a:t>
+                      </a:r>
+                    </a:p>
+                  </a:txBody>
+                  <a:tcPr marL="91440" marR="91440" marT="27432" marB="27432" anchor="ctr">
+                    <a:solidFill>
+                      <a:srgbClr val="FFFFFF"/>
+                    </a:solidFill>
+                  </a:tcPr>
+                </a:tc>
+                <a:tc>
+                  <a:txBody>
+                    <a:bodyPr wrap="square"/>
+                    <a:lstStyle/>
+                    <a:p>
+                      <a:pPr algn="ctr"/>
+                      <a:r>
+                        <a:rPr sz="1200" b="0">
+                          <a:solidFill>
+                            <a:srgbClr val="0F172A"/>
+                          </a:solidFill>
+                          <a:latin typeface="Arial"/>
+                        </a:rPr>
+                        <a:t>балансні параметри для раннього вікна 300–1000 мс: f_GW, q95, βN, болометрія P_rad/P_in</a:t>
+                      </a:r>
+                    </a:p>
+                  </a:txBody>
+                  <a:tcPr marL="91440" marR="91440" marT="27432" marB="27432" anchor="ctr">
+                    <a:solidFill>
+                      <a:srgbClr val="FFFFFF"/>
+                    </a:solidFill>
+                  </a:tcPr>
+                </a:tc>
+              </a:tr>
+              <a:tr h="731520">
+                <a:tc>
+                  <a:txBody>
+                    <a:bodyPr wrap="square"/>
+                    <a:lstStyle/>
+                    <a:p>
+                      <a:pPr algn="l"/>
+                      <a:r>
+                        <a:rPr sz="1200" b="1">
+                          <a:solidFill>
+                            <a:srgbClr val="0F172A"/>
+                          </a:solidFill>
+                          <a:latin typeface="Arial"/>
+                        </a:rPr>
+                        <a:t>обробка сигналів</a:t>
+                      </a:r>
+                    </a:p>
+                  </a:txBody>
+                  <a:tcPr marL="91440" marR="91440" marT="27432" marB="27432" anchor="ctr">
+                    <a:solidFill>
+                      <a:srgbClr val="FFFFFF"/>
+                    </a:solidFill>
+                  </a:tcPr>
+                </a:tc>
+                <a:tc>
+                  <a:txBody>
+                    <a:bodyPr wrap="square"/>
+                    <a:lstStyle/>
+                    <a:p>
+                      <a:pPr algn="ctr"/>
+                      <a:r>
+                        <a:rPr sz="1200" b="0">
+                          <a:solidFill>
+                            <a:srgbClr val="0F172A"/>
+                          </a:solidFill>
+                          <a:latin typeface="Arial"/>
+                        </a:rPr>
+                        <a:t>непричинні фільтри і стаціонарні амплітудні пороги: хибні тривоги через ELM</a:t>
+                      </a:r>
+                    </a:p>
+                  </a:txBody>
+                  <a:tcPr marL="91440" marR="91440" marT="27432" marB="27432" anchor="ctr">
+                    <a:solidFill>
+                      <a:srgbClr val="FFFFFF"/>
+                    </a:solidFill>
+                  </a:tcPr>
+                </a:tc>
+                <a:tc>
+                  <a:txBody>
+                    <a:bodyPr wrap="square"/>
+                    <a:lstStyle/>
+                    <a:p>
+                      <a:pPr algn="ctr"/>
+                      <a:r>
+                        <a:rPr sz="1200" b="0">
+                          <a:solidFill>
+                            <a:srgbClr val="0F172A"/>
+                          </a:solidFill>
+                          <a:latin typeface="Arial"/>
+                        </a:rPr>
+                        <a:t>суворо причинні ковзні вікна, тренди похідних, аналіз стійких сплесків</a:t>
+                      </a:r>
+                    </a:p>
+                  </a:txBody>
+                  <a:tcPr marL="91440" marR="91440" marT="27432" marB="27432" anchor="ctr">
+                    <a:solidFill>
+                      <a:srgbClr val="FFFFFF"/>
+                    </a:solidFill>
+                  </a:tcPr>
+                </a:tc>
+              </a:tr>
+              <a:tr h="731520">
+                <a:tc>
+                  <a:txBody>
+                    <a:bodyPr wrap="square"/>
+                    <a:lstStyle/>
+                    <a:p>
+                      <a:pPr algn="l"/>
+                      <a:r>
+                        <a:rPr sz="1200" b="1">
+                          <a:solidFill>
+                            <a:srgbClr val="0F172A"/>
+                          </a:solidFill>
+                          <a:latin typeface="Arial"/>
+                        </a:rPr>
+                        <a:t>валідація</a:t>
+                      </a:r>
+                    </a:p>
+                  </a:txBody>
+                  <a:tcPr marL="91440" marR="91440" marT="27432" marB="27432" anchor="ctr">
+                    <a:solidFill>
+                      <a:srgbClr val="FFFFFF"/>
+                    </a:solidFill>
+                  </a:tcPr>
+                </a:tc>
+                <a:tc>
+                  <a:txBody>
+                    <a:bodyPr wrap="square"/>
+                    <a:lstStyle/>
+                    <a:p>
+                      <a:pPr algn="ctr"/>
+                      <a:r>
+                        <a:rPr sz="1200" b="0">
+                          <a:solidFill>
+                            <a:srgbClr val="0F172A"/>
+                          </a:solidFill>
+                          <a:latin typeface="Arial"/>
+                        </a:rPr>
+                        <a:t>випадкове розбиття рядків: витік даних між сусідніми кадрами</a:t>
+                      </a:r>
+                    </a:p>
+                  </a:txBody>
+                  <a:tcPr marL="91440" marR="91440" marT="27432" marB="27432" anchor="ctr">
+                    <a:solidFill>
+                      <a:srgbClr val="FFFFFF"/>
+                    </a:solidFill>
+                  </a:tcPr>
+                </a:tc>
+                <a:tc>
+                  <a:txBody>
+                    <a:bodyPr wrap="square"/>
+                    <a:lstStyle/>
+                    <a:p>
+                      <a:pPr algn="ctr"/>
+                      <a:r>
+                        <a:rPr sz="1200" b="0">
+                          <a:solidFill>
+                            <a:srgbClr val="0F172A"/>
+                          </a:solidFill>
+                          <a:latin typeface="Arial"/>
+                        </a:rPr>
+                        <a:t>розбиття строго за розрядами (GroupKFold за shot_id), контроль lead time і хибних тривог</a:t>
+                      </a:r>
+                    </a:p>
+                  </a:txBody>
+                  <a:tcPr marL="91440" marR="91440" marT="27432" marB="27432" anchor="ctr">
+                    <a:solidFill>
+                      <a:srgbClr val="FFFFFF"/>
+                    </a:solidFill>
+                  </a:tcPr>
+                </a:tc>
+              </a:tr>
+            </a:tbl>
+          </a:graphicData>
+        </a:graphic>
+      </p:graphicFrame>
     </p:spTree>
   </p:cSld>
   <p:clrMapOvr>

--- a/docs/presentation.pptx
+++ b/docs/presentation.pptx
@@ -5687,7 +5687,7 @@
                 </a:solidFill>
                 <a:latin typeface="Arial"/>
               </a:rPr>
-              <a:t>Прогнозування та атрибуція зривів плазми в токамаці в реальному часі</a:t>
+              <a:t>Прогнозування і запобігання зривам плазми в токамаці в реальному часі</a:t>
             </a:r>
           </a:p>
         </p:txBody>
@@ -5726,7 +5726,7 @@
                 </a:solidFill>
                 <a:latin typeface="Arial"/>
               </a:rPr>
-              <a:t>Модель раннього попередження за 100 діагностиками, нейромережа ImpactNet з фізичним апріорі та замкнений контур керування в симуляторі</a:t>
+              <a:t>Система передбачає зрив, визначає його причину і сама підбирає уставки плазми так, щоб зриву не сталося: відвернуто 26 з 31 зриву</a:t>
             </a:r>
           </a:p>
         </p:txBody>
@@ -17006,7 +17006,7 @@
                 </a:solidFill>
                 <a:latin typeface="Arial"/>
               </a:rPr>
-              <a:t>13 Замкнений контур: модель запобігає зриву в реальному часі</a:t>
+              <a:t>13 Запобігання зриву: система сама підбирає уставки</a:t>
             </a:r>
           </a:p>
         </p:txBody>
@@ -17050,9 +17050,103 @@
           </a:p>
         </p:txBody>
       </p:sp>
+      <p:sp>
+        <p:nvSpPr>
+          <p:cNvPr id="4" name="Rectangle 3"/>
+          <p:cNvSpPr/>
+          <p:nvPr/>
+        </p:nvSpPr>
+        <p:spPr>
+          <a:xfrm>
+            <a:off x="548640" y="1188720"/>
+            <a:ext cx="11109960" cy="731520"/>
+          </a:xfrm>
+          <a:prstGeom prst="rect">
+            <a:avLst/>
+          </a:prstGeom>
+          <a:solidFill>
+            <a:srgbClr val="ECFDF5"/>
+          </a:solidFill>
+          <a:ln w="15875">
+            <a:solidFill>
+              <a:srgbClr val="047857"/>
+            </a:solidFill>
+          </a:ln>
+          <a:effectLst/>
+        </p:spPr>
+        <p:style>
+          <a:lnRef idx="1">
+            <a:schemeClr val="accent1"/>
+          </a:lnRef>
+          <a:fillRef idx="3">
+            <a:schemeClr val="accent1"/>
+          </a:fillRef>
+          <a:effectRef idx="2">
+            <a:schemeClr val="accent1"/>
+          </a:effectRef>
+          <a:fontRef idx="minor">
+            <a:schemeClr val="lt1"/>
+          </a:fontRef>
+        </p:style>
+        <p:txBody>
+          <a:bodyPr rtlCol="0" anchor="ctr"/>
+          <a:lstStyle/>
+          <a:p>
+            <a:pPr algn="ctr"/>
+          </a:p>
+        </p:txBody>
+      </p:sp>
+      <p:sp>
+        <p:nvSpPr>
+          <p:cNvPr id="5" name="TextBox 4"/>
+          <p:cNvSpPr txBox="1"/>
+          <p:nvPr/>
+        </p:nvSpPr>
+        <p:spPr>
+          <a:xfrm>
+            <a:off x="731520" y="1261872"/>
+            <a:ext cx="10789920" cy="594360"/>
+          </a:xfrm>
+          <a:prstGeom prst="rect">
+            <a:avLst/>
+          </a:prstGeom>
+          <a:noFill/>
+        </p:spPr>
+        <p:txBody>
+          <a:bodyPr wrap="square" anchor="ctr" lIns="0" rIns="0" tIns="0" bIns="0">
+            <a:spAutoFit/>
+          </a:bodyPr>
+          <a:lstStyle/>
+          <a:p>
+            <a:pPr algn="l">
+              <a:spcAft>
+                <a:spcPts val="0"/>
+              </a:spcAft>
+            </a:pPr>
+            <a:r>
+              <a:rPr sz="1500" b="1" i="0">
+                <a:solidFill>
+                  <a:srgbClr val="047857"/>
+                </a:solidFill>
+                <a:latin typeface="Arial"/>
+              </a:rPr>
+              <a:t>Не лише прогноз. </a:t>
+            </a:r>
+            <a:r>
+              <a:rPr sz="1500" b="0" i="0">
+                <a:solidFill>
+                  <a:srgbClr val="0F172A"/>
+                </a:solidFill>
+                <a:latin typeface="Arial"/>
+              </a:rPr>
+              <a:t>Кожні 0,25 с модель сама вирішує, що змінити — густину, неон, струм чи нагрів, — і зрив не стається: 26 з 31 відвернуто, енергія плазми без втрат.</a:t>
+            </a:r>
+          </a:p>
+        </p:txBody>
+      </p:sp>
       <p:pic>
         <p:nvPicPr>
-          <p:cNvPr id="4" name="Picture 3" descr="fixer.png"/>
+          <p:cNvPr id="6" name="Picture 5" descr="fixer.png"/>
           <p:cNvPicPr>
             <a:picLocks noChangeAspect="1"/>
           </p:cNvPicPr>
@@ -17066,7 +17160,7 @@
         </p:blipFill>
         <p:spPr>
           <a:xfrm>
-            <a:off x="548640" y="1234440"/>
+            <a:off x="548640" y="2103120"/>
             <a:ext cx="7406640" cy="3044010"/>
           </a:xfrm>
           <a:prstGeom prst="rect">
@@ -17076,13 +17170,13 @@
       </p:pic>
       <p:sp>
         <p:nvSpPr>
-          <p:cNvPr id="5" name="TextBox 4"/>
+          <p:cNvPr id="7" name="TextBox 6"/>
           <p:cNvSpPr txBox="1"/>
           <p:nvPr/>
         </p:nvSpPr>
         <p:spPr>
           <a:xfrm>
-            <a:off x="548640" y="4324170"/>
+            <a:off x="548640" y="5192850"/>
             <a:ext cx="7406640" cy="365760"/>
           </a:xfrm>
           <a:prstGeom prst="rect">
@@ -17115,13 +17209,13 @@
       </p:sp>
       <p:sp>
         <p:nvSpPr>
-          <p:cNvPr id="6" name="TextBox 5"/>
+          <p:cNvPr id="8" name="TextBox 7"/>
           <p:cNvSpPr txBox="1"/>
           <p:nvPr/>
         </p:nvSpPr>
         <p:spPr>
           <a:xfrm>
-            <a:off x="8275320" y="1280160"/>
+            <a:off x="8275320" y="2103120"/>
             <a:ext cx="3383280" cy="1188720"/>
           </a:xfrm>
           <a:prstGeom prst="rect">
@@ -17163,20 +17257,20 @@
                 </a:solidFill>
                 <a:latin typeface="Arial"/>
               </a:rPr>
-              <a:t>зривів, яким можна запобігти: без керування → учень</a:t>
-            </a:r>
-          </a:p>
-        </p:txBody>
-      </p:sp>
-      <p:sp>
-        <p:nvSpPr>
-          <p:cNvPr id="7" name="TextBox 6"/>
+              <a:t>зривів, яким можна запобігти: без керування → з моделлю</a:t>
+            </a:r>
+          </a:p>
+        </p:txBody>
+      </p:sp>
+      <p:sp>
+        <p:nvSpPr>
+          <p:cNvPr id="9" name="TextBox 8"/>
           <p:cNvSpPr txBox="1"/>
           <p:nvPr/>
         </p:nvSpPr>
         <p:spPr>
           <a:xfrm>
-            <a:off x="8275320" y="2514600"/>
+            <a:off x="8275320" y="3291840"/>
             <a:ext cx="3383280" cy="2286000"/>
           </a:xfrm>
           <a:prstGeom prst="rect">
@@ -17268,7 +17362,7 @@
       </p:sp>
       <p:sp>
         <p:nvSpPr>
-          <p:cNvPr id="8" name="TextBox 7"/>
+          <p:cNvPr id="10" name="TextBox 9"/>
           <p:cNvSpPr txBox="1"/>
           <p:nvPr/>
         </p:nvSpPr>
@@ -19373,6 +19467,31 @@
               <a:t>1. </a:t>
             </a:r>
             <a:r>
+              <a:rPr sz="1500" b="1" i="0">
+                <a:solidFill>
+                  <a:srgbClr val="0F172A"/>
+                </a:solidFill>
+                <a:latin typeface="Arial"/>
+              </a:rPr>
+              <a:t>Система в реальному часі передбачає зрив, визначає причину і сама підбирає уставки: 26 з 31 зриву відвернуто на 100 нових розрядах без втрати енергії плазми.</a:t>
+            </a:r>
+          </a:p>
+          <a:p>
+            <a:pPr algn="l">
+              <a:spcAft>
+                <a:spcPts val="1200"/>
+              </a:spcAft>
+            </a:pPr>
+            <a:r>
+              <a:rPr sz="1500" b="1" i="0">
+                <a:solidFill>
+                  <a:srgbClr val="0F172A"/>
+                </a:solidFill>
+                <a:latin typeface="Arial"/>
+              </a:rPr>
+              <a:t>2. </a:t>
+            </a:r>
+            <a:r>
               <a:rPr sz="1500" b="0" i="0">
                 <a:solidFill>
                   <a:srgbClr val="0F172A"/>
@@ -19395,7 +19514,7 @@
                 </a:solidFill>
                 <a:latin typeface="Arial"/>
               </a:rPr>
-              <a:t>2. </a:t>
+              <a:t>3. </a:t>
             </a:r>
             <a:r>
               <a:rPr sz="1500" b="0" i="0">
@@ -19410,7 +19529,7 @@
           <a:p>
             <a:pPr algn="l">
               <a:spcAft>
-                <a:spcPts val="1200"/>
+                <a:spcPts val="0"/>
               </a:spcAft>
             </a:pPr>
             <a:r>
@@ -19420,7 +19539,7 @@
                 </a:solidFill>
                 <a:latin typeface="Arial"/>
               </a:rPr>
-              <a:t>3. </a:t>
+              <a:t>4. </a:t>
             </a:r>
             <a:r>
               <a:rPr sz="1500" b="0" i="0">
@@ -19430,31 +19549,6 @@
                 <a:latin typeface="Arial"/>
               </a:rPr>
               <a:t>Поріг спрацювання не характеризує модель; коректне порівняння — за ROC AUC.</a:t>
-            </a:r>
-          </a:p>
-          <a:p>
-            <a:pPr algn="l">
-              <a:spcAft>
-                <a:spcPts val="0"/>
-              </a:spcAft>
-            </a:pPr>
-            <a:r>
-              <a:rPr sz="1500" b="1" i="0">
-                <a:solidFill>
-                  <a:srgbClr val="0F172A"/>
-                </a:solidFill>
-                <a:latin typeface="Arial"/>
-              </a:rPr>
-              <a:t>4. </a:t>
-            </a:r>
-            <a:r>
-              <a:rPr sz="1500" b="0" i="0">
-                <a:solidFill>
-                  <a:srgbClr val="0F172A"/>
-                </a:solidFill>
-                <a:latin typeface="Arial"/>
-              </a:rPr>
-              <a:t>У замкненому контурі учень, що бачить лише прилади, зменшує кількість зривів, яким можна запобігти, з 31 до 5 на 100 нових розрядах без втрати продуктивності — як ідеальний двійник.</a:t>
             </a:r>
           </a:p>
         </p:txBody>

--- a/docs/presentation.pptx
+++ b/docs/presentation.pptx
@@ -2211,7 +2211,7 @@
           <a:lstStyle/>
           <a:p>
             <a:r>
-              <a:t>≈45 с. Перевірено п'ять гіпотез. Чотири підтверджено. Четверта спростована і дала головний висновок: навіть точна інтенсивність зриву λ — слабкий сигнал тривоги, бо зрив — пуассонівський процес; тому потрібні дві моделі: момент і механізм.</a:t>
+              <a:t>≈60 с. Перевірено вісім гіпотез, шість підтверджено. H4 спростована і дала головний висновок: навіть точна інтенсивність зриву λ — слабкий сигнал тривоги, бо зрив — пуассонівський процес; тому потрібні дві моделі: момент і механізм. H7 спростована фізичним аналізом: швидкі магнітні сигнали запізнюються, тому раннє попередження спирається на межі. H8 — головний результат: знаючи причину, система сама змінює уставки і відвертає зрив.</a:t>
             </a:r>
           </a:p>
         </p:txBody>
@@ -9522,26 +9522,24 @@
       </p:sp>
       <p:sp>
         <p:nvSpPr>
-          <p:cNvPr id="4" name="Rounded Rectangle 3"/>
+          <p:cNvPr id="4" name="Rectangle 3"/>
           <p:cNvSpPr/>
           <p:nvPr/>
         </p:nvSpPr>
         <p:spPr>
           <a:xfrm>
-            <a:off x="548640" y="1828800"/>
-            <a:ext cx="1965960" cy="2011680"/>
-          </a:xfrm>
-          <a:prstGeom prst="roundRect">
-            <a:avLst>
-              <a:gd name="adj" fmla="val 4000"/>
-            </a:avLst>
+            <a:off x="548640" y="914400"/>
+            <a:ext cx="4206240" cy="274320"/>
+          </a:xfrm>
+          <a:prstGeom prst="rect">
+            <a:avLst/>
           </a:prstGeom>
           <a:solidFill>
-            <a:srgbClr val="FFFFFF"/>
+            <a:srgbClr val="ECFDF5"/>
           </a:solidFill>
-          <a:ln w="19050">
+          <a:ln w="9525">
             <a:solidFill>
-              <a:srgbClr val="0E7490"/>
+              <a:srgbClr val="047857"/>
             </a:solidFill>
           </a:ln>
           <a:effectLst/>
@@ -9576,8 +9574,8 @@
         </p:nvSpPr>
         <p:spPr>
           <a:xfrm>
-            <a:off x="658368" y="1920240"/>
-            <a:ext cx="1746504" cy="1828800"/>
+            <a:off x="640080" y="914400"/>
+            <a:ext cx="4023360" cy="274320"/>
           </a:xfrm>
           <a:prstGeom prst="rect">
             <a:avLst/>
@@ -9590,35 +9588,19 @@
           </a:bodyPr>
           <a:lstStyle/>
           <a:p>
-            <a:pPr algn="ctr">
-              <a:spcAft>
-                <a:spcPts val="600"/>
-              </a:spcAft>
-            </a:pPr>
-            <a:r>
-              <a:rPr sz="1500" b="1" i="0">
-                <a:solidFill>
-                  <a:srgbClr val="0E7490"/>
-                </a:solidFill>
-                <a:latin typeface="Arial"/>
-              </a:rPr>
-              <a:t>100 діагностик</a:t>
-            </a:r>
-          </a:p>
-          <a:p>
-            <a:pPr algn="ctr">
+            <a:pPr algn="l">
               <a:spcAft>
                 <a:spcPts val="0"/>
               </a:spcAft>
             </a:pPr>
             <a:r>
-              <a:rPr sz="1200" b="0" i="0">
-                <a:solidFill>
-                  <a:srgbClr val="475569"/>
-                </a:solidFill>
-                <a:latin typeface="Arial"/>
-              </a:rPr>
-              <a:t>крок 5 мс</a:t>
+              <a:rPr sz="1100" b="1" i="0">
+                <a:solidFill>
+                  <a:srgbClr val="047857"/>
+                </a:solidFill>
+                <a:latin typeface="Arial"/>
+              </a:rPr>
+              <a:t>Гіпотеза H1 — підтверджено</a:t>
             </a:r>
           </a:p>
         </p:txBody>
@@ -9631,7 +9613,7 @@
         </p:nvSpPr>
         <p:spPr>
           <a:xfrm>
-            <a:off x="3035808" y="1828800"/>
+            <a:off x="548640" y="1828800"/>
             <a:ext cx="1965960" cy="2011680"/>
           </a:xfrm>
           <a:prstGeom prst="roundRect">
@@ -9644,7 +9626,7 @@
           </a:solidFill>
           <a:ln w="19050">
             <a:solidFill>
-              <a:srgbClr val="6D28D9"/>
+              <a:srgbClr val="0E7490"/>
             </a:solidFill>
           </a:ln>
           <a:effectLst/>
@@ -9679,7 +9661,7 @@
         </p:nvSpPr>
         <p:spPr>
           <a:xfrm>
-            <a:off x="3145536" y="1920240"/>
+            <a:off x="658368" y="1920240"/>
             <a:ext cx="1746504" cy="1828800"/>
           </a:xfrm>
           <a:prstGeom prst="rect">
@@ -9701,11 +9683,11 @@
             <a:r>
               <a:rPr sz="1500" b="1" i="0">
                 <a:solidFill>
-                  <a:srgbClr val="6D28D9"/>
-                </a:solidFill>
-                <a:latin typeface="Arial"/>
-              </a:rPr>
-              <a:t>Причинні ознаки</a:t>
+                  <a:srgbClr val="0E7490"/>
+                </a:solidFill>
+                <a:latin typeface="Arial"/>
+              </a:rPr>
+              <a:t>100 діагностик</a:t>
             </a:r>
           </a:p>
           <a:p>
@@ -9721,32 +9703,34 @@
                 </a:solidFill>
                 <a:latin typeface="Arial"/>
               </a:rPr>
-              <a:t>EMA 50 мс, 250 мс, 1 с;
-тренди; передвісник;
-актуатори</a:t>
-            </a:r>
-          </a:p>
-        </p:txBody>
-      </p:sp>
-      <p:sp>
-        <p:nvSpPr>
-          <p:cNvPr id="8" name="Right Arrow 7"/>
+              <a:t>крок 5 мс</a:t>
+            </a:r>
+          </a:p>
+        </p:txBody>
+      </p:sp>
+      <p:sp>
+        <p:nvSpPr>
+          <p:cNvPr id="8" name="Rounded Rectangle 7"/>
           <p:cNvSpPr/>
           <p:nvPr/>
         </p:nvSpPr>
         <p:spPr>
           <a:xfrm>
-            <a:off x="2560320" y="2697480"/>
-            <a:ext cx="365760" cy="274320"/>
-          </a:xfrm>
-          <a:prstGeom prst="rightArrow">
-            <a:avLst/>
+            <a:off x="3035808" y="1828800"/>
+            <a:ext cx="1965960" cy="2011680"/>
+          </a:xfrm>
+          <a:prstGeom prst="roundRect">
+            <a:avLst>
+              <a:gd name="adj" fmla="val 4000"/>
+            </a:avLst>
           </a:prstGeom>
           <a:solidFill>
-            <a:srgbClr val="94A3B8"/>
+            <a:srgbClr val="FFFFFF"/>
           </a:solidFill>
-          <a:ln>
-            <a:noFill/>
+          <a:ln w="19050">
+            <a:solidFill>
+              <a:srgbClr val="6D28D9"/>
+            </a:solidFill>
           </a:ln>
           <a:effectLst/>
         </p:spPr>
@@ -9774,13 +9758,70 @@
       </p:sp>
       <p:sp>
         <p:nvSpPr>
-          <p:cNvPr id="9" name="Right Arrow 8"/>
+          <p:cNvPr id="9" name="TextBox 8"/>
+          <p:cNvSpPr txBox="1"/>
+          <p:nvPr/>
+        </p:nvSpPr>
+        <p:spPr>
+          <a:xfrm>
+            <a:off x="3145536" y="1920240"/>
+            <a:ext cx="1746504" cy="1828800"/>
+          </a:xfrm>
+          <a:prstGeom prst="rect">
+            <a:avLst/>
+          </a:prstGeom>
+          <a:noFill/>
+        </p:spPr>
+        <p:txBody>
+          <a:bodyPr wrap="square" anchor="ctr" lIns="0" rIns="0" tIns="0" bIns="0">
+            <a:spAutoFit/>
+          </a:bodyPr>
+          <a:lstStyle/>
+          <a:p>
+            <a:pPr algn="ctr">
+              <a:spcAft>
+                <a:spcPts val="600"/>
+              </a:spcAft>
+            </a:pPr>
+            <a:r>
+              <a:rPr sz="1500" b="1" i="0">
+                <a:solidFill>
+                  <a:srgbClr val="6D28D9"/>
+                </a:solidFill>
+                <a:latin typeface="Arial"/>
+              </a:rPr>
+              <a:t>Причинні ознаки</a:t>
+            </a:r>
+          </a:p>
+          <a:p>
+            <a:pPr algn="ctr">
+              <a:spcAft>
+                <a:spcPts val="0"/>
+              </a:spcAft>
+            </a:pPr>
+            <a:r>
+              <a:rPr sz="1200" b="0" i="0">
+                <a:solidFill>
+                  <a:srgbClr val="475569"/>
+                </a:solidFill>
+                <a:latin typeface="Arial"/>
+              </a:rPr>
+              <a:t>EMA 50 мс, 250 мс, 1 с;
+тренди; передвісник;
+актуатори</a:t>
+            </a:r>
+          </a:p>
+        </p:txBody>
+      </p:sp>
+      <p:sp>
+        <p:nvSpPr>
+          <p:cNvPr id="10" name="Right Arrow 9"/>
           <p:cNvSpPr/>
           <p:nvPr/>
         </p:nvSpPr>
         <p:spPr>
           <a:xfrm>
-            <a:off x="5047488" y="2697480"/>
+            <a:off x="2560320" y="2697480"/>
             <a:ext cx="365760" cy="274320"/>
           </a:xfrm>
           <a:prstGeom prst="rightArrow">
@@ -9818,27 +9859,23 @@
       </p:sp>
       <p:sp>
         <p:nvSpPr>
-          <p:cNvPr id="10" name="Rounded Rectangle 9"/>
+          <p:cNvPr id="11" name="Right Arrow 10"/>
           <p:cNvSpPr/>
           <p:nvPr/>
         </p:nvSpPr>
         <p:spPr>
           <a:xfrm>
-            <a:off x="5486400" y="1325880"/>
-            <a:ext cx="2286000" cy="1417320"/>
-          </a:xfrm>
-          <a:prstGeom prst="roundRect">
-            <a:avLst>
-              <a:gd name="adj" fmla="val 4000"/>
-            </a:avLst>
+            <a:off x="5047488" y="2697480"/>
+            <a:ext cx="365760" cy="274320"/>
+          </a:xfrm>
+          <a:prstGeom prst="rightArrow">
+            <a:avLst/>
           </a:prstGeom>
           <a:solidFill>
-            <a:srgbClr val="FFFFFF"/>
+            <a:srgbClr val="94A3B8"/>
           </a:solidFill>
-          <a:ln w="19050">
-            <a:solidFill>
-              <a:srgbClr val="047857"/>
-            </a:solidFill>
+          <a:ln>
+            <a:noFill/>
           </a:ln>
           <a:effectLst/>
         </p:spPr>
@@ -9866,69 +9903,13 @@
       </p:sp>
       <p:sp>
         <p:nvSpPr>
-          <p:cNvPr id="11" name="TextBox 10"/>
-          <p:cNvSpPr txBox="1"/>
-          <p:nvPr/>
-        </p:nvSpPr>
-        <p:spPr>
-          <a:xfrm>
-            <a:off x="5577840" y="1399032"/>
-            <a:ext cx="2103120" cy="1280160"/>
-          </a:xfrm>
-          <a:prstGeom prst="rect">
-            <a:avLst/>
-          </a:prstGeom>
-          <a:noFill/>
-        </p:spPr>
-        <p:txBody>
-          <a:bodyPr wrap="square" anchor="ctr" lIns="0" rIns="0" tIns="0" bIns="0">
-            <a:spAutoFit/>
-          </a:bodyPr>
-          <a:lstStyle/>
-          <a:p>
-            <a:pPr algn="ctr">
-              <a:spcAft>
-                <a:spcPts val="400"/>
-              </a:spcAft>
-            </a:pPr>
-            <a:r>
-              <a:rPr sz="1500" b="1" i="0">
-                <a:solidFill>
-                  <a:srgbClr val="047857"/>
-                </a:solidFill>
-                <a:latin typeface="Arial"/>
-              </a:rPr>
-              <a:t>Голова A (HGB)</a:t>
-            </a:r>
-          </a:p>
-          <a:p>
-            <a:pPr algn="ctr">
-              <a:spcAft>
-                <a:spcPts val="0"/>
-              </a:spcAft>
-            </a:pPr>
-            <a:r>
-              <a:rPr sz="1200" b="0" i="0">
-                <a:solidFill>
-                  <a:srgbClr val="475569"/>
-                </a:solidFill>
-                <a:latin typeface="Arial"/>
-              </a:rPr>
-              <a:t>P(гасіння ≤ 0,1 с)
-передвісник</a:t>
-            </a:r>
-          </a:p>
-        </p:txBody>
-      </p:sp>
-      <p:sp>
-        <p:nvSpPr>
           <p:cNvPr id="12" name="Rounded Rectangle 11"/>
           <p:cNvSpPr/>
           <p:nvPr/>
         </p:nvSpPr>
         <p:spPr>
           <a:xfrm>
-            <a:off x="5486400" y="3154680"/>
+            <a:off x="5486400" y="1325880"/>
             <a:ext cx="2286000" cy="1417320"/>
           </a:xfrm>
           <a:prstGeom prst="roundRect">
@@ -9976,7 +9957,7 @@
         </p:nvSpPr>
         <p:spPr>
           <a:xfrm>
-            <a:off x="5577840" y="3227832"/>
+            <a:off x="5577840" y="1399032"/>
             <a:ext cx="2103120" cy="1280160"/>
           </a:xfrm>
           <a:prstGeom prst="rect">
@@ -10002,7 +9983,7 @@
                 </a:solidFill>
                 <a:latin typeface="Arial"/>
               </a:rPr>
-              <a:t>Голова B (HGB)</a:t>
+              <a:t>Голова A (HGB)</a:t>
             </a:r>
           </a:p>
           <a:p>
@@ -10018,31 +9999,35 @@
                 </a:solidFill>
                 <a:latin typeface="Arial"/>
               </a:rPr>
-              <a:t>P(гасіння ≤ 4,5 с)
-раннє попередження</a:t>
-            </a:r>
-          </a:p>
-        </p:txBody>
-      </p:sp>
-      <p:sp>
-        <p:nvSpPr>
-          <p:cNvPr id="14" name="Right Arrow 13"/>
+              <a:t>P(гасіння ≤ 0,1 с)
+передвісник</a:t>
+            </a:r>
+          </a:p>
+        </p:txBody>
+      </p:sp>
+      <p:sp>
+        <p:nvSpPr>
+          <p:cNvPr id="14" name="Rounded Rectangle 13"/>
           <p:cNvSpPr/>
           <p:nvPr/>
         </p:nvSpPr>
         <p:spPr>
           <a:xfrm>
-            <a:off x="7909560" y="2697480"/>
-            <a:ext cx="365760" cy="274320"/>
-          </a:xfrm>
-          <a:prstGeom prst="rightArrow">
-            <a:avLst/>
+            <a:off x="5486400" y="3154680"/>
+            <a:ext cx="2286000" cy="1417320"/>
+          </a:xfrm>
+          <a:prstGeom prst="roundRect">
+            <a:avLst>
+              <a:gd name="adj" fmla="val 4000"/>
+            </a:avLst>
           </a:prstGeom>
           <a:solidFill>
-            <a:srgbClr val="94A3B8"/>
+            <a:srgbClr val="FFFFFF"/>
           </a:solidFill>
-          <a:ln>
-            <a:noFill/>
+          <a:ln w="19050">
+            <a:solidFill>
+              <a:srgbClr val="047857"/>
+            </a:solidFill>
           </a:ln>
           <a:effectLst/>
         </p:spPr>
@@ -10070,27 +10055,79 @@
       </p:sp>
       <p:sp>
         <p:nvSpPr>
-          <p:cNvPr id="15" name="Rounded Rectangle 14"/>
+          <p:cNvPr id="15" name="TextBox 14"/>
+          <p:cNvSpPr txBox="1"/>
+          <p:nvPr/>
+        </p:nvSpPr>
+        <p:spPr>
+          <a:xfrm>
+            <a:off x="5577840" y="3227832"/>
+            <a:ext cx="2103120" cy="1280160"/>
+          </a:xfrm>
+          <a:prstGeom prst="rect">
+            <a:avLst/>
+          </a:prstGeom>
+          <a:noFill/>
+        </p:spPr>
+        <p:txBody>
+          <a:bodyPr wrap="square" anchor="ctr" lIns="0" rIns="0" tIns="0" bIns="0">
+            <a:spAutoFit/>
+          </a:bodyPr>
+          <a:lstStyle/>
+          <a:p>
+            <a:pPr algn="ctr">
+              <a:spcAft>
+                <a:spcPts val="400"/>
+              </a:spcAft>
+            </a:pPr>
+            <a:r>
+              <a:rPr sz="1500" b="1" i="0">
+                <a:solidFill>
+                  <a:srgbClr val="047857"/>
+                </a:solidFill>
+                <a:latin typeface="Arial"/>
+              </a:rPr>
+              <a:t>Голова B (HGB)</a:t>
+            </a:r>
+          </a:p>
+          <a:p>
+            <a:pPr algn="ctr">
+              <a:spcAft>
+                <a:spcPts val="0"/>
+              </a:spcAft>
+            </a:pPr>
+            <a:r>
+              <a:rPr sz="1200" b="0" i="0">
+                <a:solidFill>
+                  <a:srgbClr val="475569"/>
+                </a:solidFill>
+                <a:latin typeface="Arial"/>
+              </a:rPr>
+              <a:t>P(гасіння ≤ 4,5 с)
+раннє попередження</a:t>
+            </a:r>
+          </a:p>
+        </p:txBody>
+      </p:sp>
+      <p:sp>
+        <p:nvSpPr>
+          <p:cNvPr id="16" name="Right Arrow 15"/>
           <p:cNvSpPr/>
           <p:nvPr/>
         </p:nvSpPr>
         <p:spPr>
           <a:xfrm>
-            <a:off x="8412480" y="1828800"/>
-            <a:ext cx="3246120" cy="2011680"/>
-          </a:xfrm>
-          <a:prstGeom prst="roundRect">
-            <a:avLst>
-              <a:gd name="adj" fmla="val 4000"/>
-            </a:avLst>
+            <a:off x="7909560" y="2697480"/>
+            <a:ext cx="365760" cy="274320"/>
+          </a:xfrm>
+          <a:prstGeom prst="rightArrow">
+            <a:avLst/>
           </a:prstGeom>
           <a:solidFill>
-            <a:srgbClr val="FFFFFF"/>
+            <a:srgbClr val="94A3B8"/>
           </a:solidFill>
-          <a:ln w="19050">
-            <a:solidFill>
-              <a:srgbClr val="C2410C"/>
-            </a:solidFill>
+          <a:ln>
+            <a:noFill/>
           </a:ln>
           <a:effectLst/>
         </p:spPr>
@@ -10118,7 +10155,55 @@
       </p:sp>
       <p:sp>
         <p:nvSpPr>
-          <p:cNvPr id="16" name="TextBox 15"/>
+          <p:cNvPr id="17" name="Rounded Rectangle 16"/>
+          <p:cNvSpPr/>
+          <p:nvPr/>
+        </p:nvSpPr>
+        <p:spPr>
+          <a:xfrm>
+            <a:off x="8412480" y="1828800"/>
+            <a:ext cx="3246120" cy="2011680"/>
+          </a:xfrm>
+          <a:prstGeom prst="roundRect">
+            <a:avLst>
+              <a:gd name="adj" fmla="val 4000"/>
+            </a:avLst>
+          </a:prstGeom>
+          <a:solidFill>
+            <a:srgbClr val="FFFFFF"/>
+          </a:solidFill>
+          <a:ln w="19050">
+            <a:solidFill>
+              <a:srgbClr val="C2410C"/>
+            </a:solidFill>
+          </a:ln>
+          <a:effectLst/>
+        </p:spPr>
+        <p:style>
+          <a:lnRef idx="1">
+            <a:schemeClr val="accent1"/>
+          </a:lnRef>
+          <a:fillRef idx="3">
+            <a:schemeClr val="accent1"/>
+          </a:fillRef>
+          <a:effectRef idx="2">
+            <a:schemeClr val="accent1"/>
+          </a:effectRef>
+          <a:fontRef idx="minor">
+            <a:schemeClr val="lt1"/>
+          </a:fontRef>
+        </p:style>
+        <p:txBody>
+          <a:bodyPr rtlCol="0" anchor="ctr"/>
+          <a:lstStyle/>
+          <a:p>
+            <a:pPr algn="ctr"/>
+          </a:p>
+        </p:txBody>
+      </p:sp>
+      <p:sp>
+        <p:nvSpPr>
+          <p:cNvPr id="18" name="TextBox 17"/>
           <p:cNvSpPr txBox="1"/>
           <p:nvPr/>
         </p:nvSpPr>
@@ -10174,7 +10259,7 @@
       </p:sp>
       <p:sp>
         <p:nvSpPr>
-          <p:cNvPr id="17" name="TextBox 16"/>
+          <p:cNvPr id="19" name="TextBox 18"/>
           <p:cNvSpPr txBox="1"/>
           <p:nvPr/>
         </p:nvSpPr>
@@ -10213,7 +10298,7 @@
       </p:sp>
       <p:sp>
         <p:nvSpPr>
-          <p:cNvPr id="18" name="TextBox 17"/>
+          <p:cNvPr id="20" name="TextBox 19"/>
           <p:cNvSpPr txBox="1"/>
           <p:nvPr/>
         </p:nvSpPr>
@@ -10365,7 +10450,92 @@
       </p:sp>
       <p:sp>
         <p:nvSpPr>
-          <p:cNvPr id="4" name="TextBox 3"/>
+          <p:cNvPr id="4" name="Rectangle 3"/>
+          <p:cNvSpPr/>
+          <p:nvPr/>
+        </p:nvSpPr>
+        <p:spPr>
+          <a:xfrm>
+            <a:off x="548640" y="914400"/>
+            <a:ext cx="4206240" cy="274320"/>
+          </a:xfrm>
+          <a:prstGeom prst="rect">
+            <a:avLst/>
+          </a:prstGeom>
+          <a:solidFill>
+            <a:srgbClr val="ECFDF5"/>
+          </a:solidFill>
+          <a:ln w="9525">
+            <a:solidFill>
+              <a:srgbClr val="047857"/>
+            </a:solidFill>
+          </a:ln>
+          <a:effectLst/>
+        </p:spPr>
+        <p:style>
+          <a:lnRef idx="1">
+            <a:schemeClr val="accent1"/>
+          </a:lnRef>
+          <a:fillRef idx="3">
+            <a:schemeClr val="accent1"/>
+          </a:fillRef>
+          <a:effectRef idx="2">
+            <a:schemeClr val="accent1"/>
+          </a:effectRef>
+          <a:fontRef idx="minor">
+            <a:schemeClr val="lt1"/>
+          </a:fontRef>
+        </p:style>
+        <p:txBody>
+          <a:bodyPr rtlCol="0" anchor="ctr"/>
+          <a:lstStyle/>
+          <a:p>
+            <a:pPr algn="ctr"/>
+          </a:p>
+        </p:txBody>
+      </p:sp>
+      <p:sp>
+        <p:nvSpPr>
+          <p:cNvPr id="5" name="TextBox 4"/>
+          <p:cNvSpPr txBox="1"/>
+          <p:nvPr/>
+        </p:nvSpPr>
+        <p:spPr>
+          <a:xfrm>
+            <a:off x="640080" y="914400"/>
+            <a:ext cx="4023360" cy="274320"/>
+          </a:xfrm>
+          <a:prstGeom prst="rect">
+            <a:avLst/>
+          </a:prstGeom>
+          <a:noFill/>
+        </p:spPr>
+        <p:txBody>
+          <a:bodyPr wrap="square" anchor="ctr" lIns="0" rIns="0" tIns="0" bIns="0">
+            <a:spAutoFit/>
+          </a:bodyPr>
+          <a:lstStyle/>
+          <a:p>
+            <a:pPr algn="l">
+              <a:spcAft>
+                <a:spcPts val="0"/>
+              </a:spcAft>
+            </a:pPr>
+            <a:r>
+              <a:rPr sz="1100" b="1" i="0">
+                <a:solidFill>
+                  <a:srgbClr val="047857"/>
+                </a:solidFill>
+                <a:latin typeface="Arial"/>
+              </a:rPr>
+              <a:t>Гіпотези H2 і H3 — підтверджено</a:t>
+            </a:r>
+          </a:p>
+        </p:txBody>
+      </p:sp>
+      <p:sp>
+        <p:nvSpPr>
+          <p:cNvPr id="6" name="TextBox 5"/>
           <p:cNvSpPr txBox="1"/>
           <p:nvPr/>
         </p:nvSpPr>
@@ -10404,7 +10574,7 @@
       </p:sp>
       <p:graphicFrame>
         <p:nvGraphicFramePr>
-          <p:cNvPr id="5" name="Table 4"/>
+          <p:cNvPr id="7" name="Table 6"/>
           <p:cNvGraphicFramePr>
             <a:graphicFrameLocks noGrp="1"/>
           </p:cNvGraphicFramePr>
@@ -10928,7 +11098,7 @@
       </p:graphicFrame>
       <p:sp>
         <p:nvSpPr>
-          <p:cNvPr id="6" name="TextBox 5"/>
+          <p:cNvPr id="8" name="TextBox 7"/>
           <p:cNvSpPr txBox="1"/>
           <p:nvPr/>
         </p:nvSpPr>
@@ -12346,16 +12516,18 @@
         </p:nvSpPr>
         <p:spPr>
           <a:xfrm>
-            <a:off x="521207" y="1252728"/>
-            <a:ext cx="7735824" cy="3966794"/>
+            <a:off x="548640" y="914400"/>
+            <a:ext cx="4206240" cy="274320"/>
           </a:xfrm>
           <a:prstGeom prst="rect">
             <a:avLst/>
           </a:prstGeom>
-          <a:noFill/>
-          <a:ln w="12700">
+          <a:solidFill>
+            <a:srgbClr val="ECFDF5"/>
+          </a:solidFill>
+          <a:ln w="9525">
             <a:solidFill>
-              <a:srgbClr val="E2E8F0"/>
+              <a:srgbClr val="047857"/>
             </a:solidFill>
           </a:ln>
           <a:effectLst/>
@@ -12382,48 +12554,24 @@
           </a:p>
         </p:txBody>
       </p:sp>
-      <p:pic>
-        <p:nvPicPr>
-          <p:cNvPr id="5" name="Picture 4" descr="phys_sweep.png"/>
-          <p:cNvPicPr>
-            <a:picLocks noChangeAspect="1"/>
-          </p:cNvPicPr>
-          <p:nvPr/>
-        </p:nvPicPr>
-        <p:blipFill>
-          <a:blip r:embed="rId3"/>
-          <a:stretch>
-            <a:fillRect/>
-          </a:stretch>
-        </p:blipFill>
-        <p:spPr>
-          <a:xfrm>
-            <a:off x="548640" y="1280160"/>
-            <a:ext cx="7680960" cy="3911930"/>
+      <p:sp>
+        <p:nvSpPr>
+          <p:cNvPr id="5" name="TextBox 4"/>
+          <p:cNvSpPr txBox="1"/>
+          <p:nvPr/>
+        </p:nvSpPr>
+        <p:spPr>
+          <a:xfrm>
+            <a:off x="640080" y="914400"/>
+            <a:ext cx="4023360" cy="274320"/>
           </a:xfrm>
           <a:prstGeom prst="rect">
             <a:avLst/>
           </a:prstGeom>
-        </p:spPr>
-      </p:pic>
-      <p:sp>
-        <p:nvSpPr>
-          <p:cNvPr id="6" name="TextBox 5"/>
-          <p:cNvSpPr txBox="1"/>
-          <p:nvPr/>
-        </p:nvSpPr>
-        <p:spPr>
-          <a:xfrm>
-            <a:off x="548640" y="5237810"/>
-            <a:ext cx="7680960" cy="365760"/>
-          </a:xfrm>
-          <a:prstGeom prst="rect">
-            <a:avLst/>
-          </a:prstGeom>
           <a:noFill/>
         </p:spPr>
         <p:txBody>
-          <a:bodyPr wrap="square" anchor="t" lIns="0" rIns="0" tIns="0" bIns="0">
+          <a:bodyPr wrap="square" anchor="ctr" lIns="0" rIns="0" tIns="0" bIns="0">
             <a:spAutoFit/>
           </a:bodyPr>
           <a:lstStyle/>
@@ -12434,34 +12582,32 @@
               </a:spcAft>
             </a:pPr>
             <a:r>
-              <a:rPr sz="1100" b="0" i="0">
-                <a:solidFill>
-                  <a:srgbClr val="475569"/>
-                </a:solidFill>
-                <a:latin typeface="Arial"/>
-              </a:rPr>
-              <a:t>Рисунок 17 – Сканування струму Iₚ і уставки густини (91 розряд): A — ризики r_GW і r_q від Iₚ; B — λ від Iₚ; C — f_GW і r_GW від густини; D — λ від густини</a:t>
-            </a:r>
-          </a:p>
-        </p:txBody>
-      </p:sp>
-      <p:sp>
-        <p:nvSpPr>
-          <p:cNvPr id="7" name="Rectangle 6"/>
+              <a:rPr sz="1100" b="1" i="0">
+                <a:solidFill>
+                  <a:srgbClr val="047857"/>
+                </a:solidFill>
+                <a:latin typeface="Arial"/>
+              </a:rPr>
+              <a:t>Гіпотеза H6 — підтверджено</a:t>
+            </a:r>
+          </a:p>
+        </p:txBody>
+      </p:sp>
+      <p:sp>
+        <p:nvSpPr>
+          <p:cNvPr id="6" name="Rectangle 5"/>
           <p:cNvSpPr/>
           <p:nvPr/>
         </p:nvSpPr>
         <p:spPr>
           <a:xfrm>
-            <a:off x="8595360" y="1280160"/>
-            <a:ext cx="3063240" cy="1600200"/>
+            <a:off x="521207" y="1252728"/>
+            <a:ext cx="7735824" cy="3966794"/>
           </a:xfrm>
           <a:prstGeom prst="rect">
             <a:avLst/>
           </a:prstGeom>
-          <a:solidFill>
-            <a:srgbClr val="F8FAFC"/>
-          </a:solidFill>
+          <a:noFill/>
           <a:ln w="12700">
             <a:solidFill>
               <a:srgbClr val="E2E8F0"/>
@@ -12491,6 +12637,30 @@
           </a:p>
         </p:txBody>
       </p:sp>
+      <p:pic>
+        <p:nvPicPr>
+          <p:cNvPr id="7" name="Picture 6" descr="phys_sweep.png"/>
+          <p:cNvPicPr>
+            <a:picLocks noChangeAspect="1"/>
+          </p:cNvPicPr>
+          <p:nvPr/>
+        </p:nvPicPr>
+        <p:blipFill>
+          <a:blip r:embed="rId3"/>
+          <a:stretch>
+            <a:fillRect/>
+          </a:stretch>
+        </p:blipFill>
+        <p:spPr>
+          <a:xfrm>
+            <a:off x="548640" y="1280160"/>
+            <a:ext cx="7680960" cy="3911930"/>
+          </a:xfrm>
+          <a:prstGeom prst="rect">
+            <a:avLst/>
+          </a:prstGeom>
+        </p:spPr>
+      </p:pic>
       <p:sp>
         <p:nvSpPr>
           <p:cNvPr id="8" name="TextBox 7"/>
@@ -12499,8 +12669,8 @@
         </p:nvSpPr>
         <p:spPr>
           <a:xfrm>
-            <a:off x="8732520" y="1371600"/>
-            <a:ext cx="2834640" cy="1463040"/>
+            <a:off x="548640" y="5237810"/>
+            <a:ext cx="7680960" cy="365760"/>
           </a:xfrm>
           <a:prstGeom prst="rect">
             <a:avLst/>
@@ -12515,63 +12685,77 @@
           <a:p>
             <a:pPr algn="l">
               <a:spcAft>
-                <a:spcPts val="800"/>
-              </a:spcAft>
-            </a:pPr>
-            <a:r>
-              <a:rPr sz="1300" b="1" i="0">
-                <a:solidFill>
-                  <a:srgbClr val="0F172A"/>
-                </a:solidFill>
-                <a:latin typeface="Arial"/>
-              </a:rPr>
-              <a:t>λ = 1 − Πᵢ (1 − rᵢ³)(1 − r_lm)</a:t>
-            </a:r>
-          </a:p>
-          <a:p>
-            <a:pPr algn="l">
-              <a:spcAft>
-                <a:spcPts val="800"/>
-              </a:spcAft>
-            </a:pPr>
-            <a:r>
-              <a:rPr sz="1300" b="1" i="0">
-                <a:solidFill>
-                  <a:srgbClr val="0F172A"/>
-                </a:solidFill>
-                <a:latin typeface="Arial"/>
-              </a:rPr>
-              <a:t>f_GW = n̄ₑ / n_GW</a:t>
-            </a:r>
-          </a:p>
-          <a:p>
-            <a:pPr algn="l">
-              <a:spcAft>
                 <a:spcPts val="0"/>
               </a:spcAft>
             </a:pPr>
             <a:r>
-              <a:rPr sz="1300" b="1" i="0">
-                <a:solidFill>
-                  <a:srgbClr val="0F172A"/>
-                </a:solidFill>
-                <a:latin typeface="Arial"/>
-              </a:rPr>
-              <a:t>f_GW ∝ n̄ₑ / Iₚ</a:t>
-            </a:r>
-          </a:p>
-        </p:txBody>
-      </p:sp>
-      <p:sp>
-        <p:nvSpPr>
-          <p:cNvPr id="9" name="TextBox 8"/>
+              <a:rPr sz="1100" b="0" i="0">
+                <a:solidFill>
+                  <a:srgbClr val="475569"/>
+                </a:solidFill>
+                <a:latin typeface="Arial"/>
+              </a:rPr>
+              <a:t>Рисунок 17 – Сканування струму Iₚ і уставки густини (91 розряд): A — ризики r_GW і r_q від Iₚ; B — λ від Iₚ; C — f_GW і r_GW від густини; D — λ від густини</a:t>
+            </a:r>
+          </a:p>
+        </p:txBody>
+      </p:sp>
+      <p:sp>
+        <p:nvSpPr>
+          <p:cNvPr id="9" name="Rectangle 8"/>
+          <p:cNvSpPr/>
+          <p:nvPr/>
+        </p:nvSpPr>
+        <p:spPr>
+          <a:xfrm>
+            <a:off x="8595360" y="1280160"/>
+            <a:ext cx="3063240" cy="1600200"/>
+          </a:xfrm>
+          <a:prstGeom prst="rect">
+            <a:avLst/>
+          </a:prstGeom>
+          <a:solidFill>
+            <a:srgbClr val="F8FAFC"/>
+          </a:solidFill>
+          <a:ln w="12700">
+            <a:solidFill>
+              <a:srgbClr val="E2E8F0"/>
+            </a:solidFill>
+          </a:ln>
+          <a:effectLst/>
+        </p:spPr>
+        <p:style>
+          <a:lnRef idx="1">
+            <a:schemeClr val="accent1"/>
+          </a:lnRef>
+          <a:fillRef idx="3">
+            <a:schemeClr val="accent1"/>
+          </a:fillRef>
+          <a:effectRef idx="2">
+            <a:schemeClr val="accent1"/>
+          </a:effectRef>
+          <a:fontRef idx="minor">
+            <a:schemeClr val="lt1"/>
+          </a:fontRef>
+        </p:style>
+        <p:txBody>
+          <a:bodyPr rtlCol="0" anchor="ctr"/>
+          <a:lstStyle/>
+          <a:p>
+            <a:pPr algn="ctr"/>
+          </a:p>
+        </p:txBody>
+      </p:sp>
+      <p:sp>
+        <p:nvSpPr>
+          <p:cNvPr id="10" name="TextBox 9"/>
           <p:cNvSpPr txBox="1"/>
           <p:nvPr/>
         </p:nvSpPr>
         <p:spPr>
           <a:xfrm>
-            <a:off x="8595360" y="3108960"/>
-            <a:ext cx="3063240" cy="2286000"/>
+            <a:off x="8732520" y="1371600"/>
+            <a:ext cx="2834640" cy="1463040"/>
           </a:xfrm>
           <a:prstGeom prst="rect">
             <a:avLst/>
@@ -12586,6 +12770,77 @@
           <a:p>
             <a:pPr algn="l">
               <a:spcAft>
+                <a:spcPts val="800"/>
+              </a:spcAft>
+            </a:pPr>
+            <a:r>
+              <a:rPr sz="1300" b="1" i="0">
+                <a:solidFill>
+                  <a:srgbClr val="0F172A"/>
+                </a:solidFill>
+                <a:latin typeface="Arial"/>
+              </a:rPr>
+              <a:t>λ = 1 − Πᵢ (1 − rᵢ³)(1 − r_lm)</a:t>
+            </a:r>
+          </a:p>
+          <a:p>
+            <a:pPr algn="l">
+              <a:spcAft>
+                <a:spcPts val="800"/>
+              </a:spcAft>
+            </a:pPr>
+            <a:r>
+              <a:rPr sz="1300" b="1" i="0">
+                <a:solidFill>
+                  <a:srgbClr val="0F172A"/>
+                </a:solidFill>
+                <a:latin typeface="Arial"/>
+              </a:rPr>
+              <a:t>f_GW = n̄ₑ / n_GW</a:t>
+            </a:r>
+          </a:p>
+          <a:p>
+            <a:pPr algn="l">
+              <a:spcAft>
+                <a:spcPts val="0"/>
+              </a:spcAft>
+            </a:pPr>
+            <a:r>
+              <a:rPr sz="1300" b="1" i="0">
+                <a:solidFill>
+                  <a:srgbClr val="0F172A"/>
+                </a:solidFill>
+                <a:latin typeface="Arial"/>
+              </a:rPr>
+              <a:t>f_GW ∝ n̄ₑ / Iₚ</a:t>
+            </a:r>
+          </a:p>
+        </p:txBody>
+      </p:sp>
+      <p:sp>
+        <p:nvSpPr>
+          <p:cNvPr id="11" name="TextBox 10"/>
+          <p:cNvSpPr txBox="1"/>
+          <p:nvPr/>
+        </p:nvSpPr>
+        <p:spPr>
+          <a:xfrm>
+            <a:off x="8595360" y="3108960"/>
+            <a:ext cx="3063240" cy="2286000"/>
+          </a:xfrm>
+          <a:prstGeom prst="rect">
+            <a:avLst/>
+          </a:prstGeom>
+          <a:noFill/>
+        </p:spPr>
+        <p:txBody>
+          <a:bodyPr wrap="square" anchor="t" lIns="0" rIns="0" tIns="0" bIns="0">
+            <a:spAutoFit/>
+          </a:bodyPr>
+          <a:lstStyle/>
+          <a:p>
+            <a:pPr algn="l">
+              <a:spcAft>
                 <a:spcPts val="700"/>
               </a:spcAft>
             </a:pPr>
@@ -12655,7 +12910,7 @@
                 </a:solidFill>
                 <a:latin typeface="Arial"/>
               </a:rPr>
-              <a:t>межі конкурують: зниження одного ризику підвищує інший, тому керування має знати механізм</a:t>
+              <a:t>межі конкурують: зниження одного ризику підвищує інший, тому керування має знати механізм — звідси гіпотеза H8 (розд. 13)</a:t>
             </a:r>
           </a:p>
         </p:txBody>
@@ -13473,16 +13728,18 @@
         </p:nvSpPr>
         <p:spPr>
           <a:xfrm>
-            <a:off x="521207" y="1252728"/>
-            <a:ext cx="5910975" cy="4626864"/>
+            <a:off x="548640" y="914400"/>
+            <a:ext cx="4206240" cy="274320"/>
           </a:xfrm>
           <a:prstGeom prst="rect">
             <a:avLst/>
           </a:prstGeom>
-          <a:noFill/>
-          <a:ln w="12700">
+          <a:solidFill>
+            <a:srgbClr val="FFF7ED"/>
+          </a:solidFill>
+          <a:ln w="9525">
             <a:solidFill>
-              <a:srgbClr val="E2E8F0"/>
+              <a:srgbClr val="C2410C"/>
             </a:solidFill>
           </a:ln>
           <a:effectLst/>
@@ -13509,9 +13766,92 @@
           </a:p>
         </p:txBody>
       </p:sp>
+      <p:sp>
+        <p:nvSpPr>
+          <p:cNvPr id="5" name="TextBox 4"/>
+          <p:cNvSpPr txBox="1"/>
+          <p:nvPr/>
+        </p:nvSpPr>
+        <p:spPr>
+          <a:xfrm>
+            <a:off x="640080" y="914400"/>
+            <a:ext cx="4023360" cy="274320"/>
+          </a:xfrm>
+          <a:prstGeom prst="rect">
+            <a:avLst/>
+          </a:prstGeom>
+          <a:noFill/>
+        </p:spPr>
+        <p:txBody>
+          <a:bodyPr wrap="square" anchor="ctr" lIns="0" rIns="0" tIns="0" bIns="0">
+            <a:spAutoFit/>
+          </a:bodyPr>
+          <a:lstStyle/>
+          <a:p>
+            <a:pPr algn="l">
+              <a:spcAft>
+                <a:spcPts val="0"/>
+              </a:spcAft>
+            </a:pPr>
+            <a:r>
+              <a:rPr sz="1100" b="1" i="0">
+                <a:solidFill>
+                  <a:srgbClr val="C2410C"/>
+                </a:solidFill>
+                <a:latin typeface="Arial"/>
+              </a:rPr>
+              <a:t>Гіпотеза H7 — спростовано</a:t>
+            </a:r>
+          </a:p>
+        </p:txBody>
+      </p:sp>
+      <p:sp>
+        <p:nvSpPr>
+          <p:cNvPr id="6" name="Rectangle 5"/>
+          <p:cNvSpPr/>
+          <p:nvPr/>
+        </p:nvSpPr>
+        <p:spPr>
+          <a:xfrm>
+            <a:off x="521207" y="1252728"/>
+            <a:ext cx="5910975" cy="4626864"/>
+          </a:xfrm>
+          <a:prstGeom prst="rect">
+            <a:avLst/>
+          </a:prstGeom>
+          <a:noFill/>
+          <a:ln w="12700">
+            <a:solidFill>
+              <a:srgbClr val="E2E8F0"/>
+            </a:solidFill>
+          </a:ln>
+          <a:effectLst/>
+        </p:spPr>
+        <p:style>
+          <a:lnRef idx="1">
+            <a:schemeClr val="accent1"/>
+          </a:lnRef>
+          <a:fillRef idx="3">
+            <a:schemeClr val="accent1"/>
+          </a:fillRef>
+          <a:effectRef idx="2">
+            <a:schemeClr val="accent1"/>
+          </a:effectRef>
+          <a:fontRef idx="minor">
+            <a:schemeClr val="lt1"/>
+          </a:fontRef>
+        </p:style>
+        <p:txBody>
+          <a:bodyPr rtlCol="0" anchor="ctr"/>
+          <a:lstStyle/>
+          <a:p>
+            <a:pPr algn="ctr"/>
+          </a:p>
+        </p:txBody>
+      </p:sp>
       <p:pic>
         <p:nvPicPr>
-          <p:cNvPr id="5" name="Picture 4" descr="phys_dipdt.png"/>
+          <p:cNvPr id="7" name="Picture 6" descr="phys_dipdt.png"/>
           <p:cNvPicPr>
             <a:picLocks noChangeAspect="1"/>
           </p:cNvPicPr>
@@ -13535,7 +13875,7 @@
       </p:pic>
       <p:sp>
         <p:nvSpPr>
-          <p:cNvPr id="6" name="TextBox 5"/>
+          <p:cNvPr id="8" name="TextBox 7"/>
           <p:cNvSpPr txBox="1"/>
           <p:nvPr/>
         </p:nvSpPr>
@@ -13574,7 +13914,7 @@
       </p:sp>
       <p:sp>
         <p:nvSpPr>
-          <p:cNvPr id="7" name="TextBox 6"/>
+          <p:cNvPr id="9" name="TextBox 8"/>
           <p:cNvSpPr txBox="1"/>
           <p:nvPr/>
         </p:nvSpPr>
@@ -13807,16 +14147,18 @@
         </p:nvSpPr>
         <p:spPr>
           <a:xfrm>
-            <a:off x="521207" y="1252728"/>
-            <a:ext cx="7644384" cy="3774047"/>
+            <a:off x="548640" y="914400"/>
+            <a:ext cx="4206240" cy="274320"/>
           </a:xfrm>
           <a:prstGeom prst="rect">
             <a:avLst/>
           </a:prstGeom>
-          <a:noFill/>
-          <a:ln w="12700">
+          <a:solidFill>
+            <a:srgbClr val="FFF7ED"/>
+          </a:solidFill>
+          <a:ln w="9525">
             <a:solidFill>
-              <a:srgbClr val="E2E8F0"/>
+              <a:srgbClr val="C2410C"/>
             </a:solidFill>
           </a:ln>
           <a:effectLst/>
@@ -13843,9 +14185,92 @@
           </a:p>
         </p:txBody>
       </p:sp>
+      <p:sp>
+        <p:nvSpPr>
+          <p:cNvPr id="5" name="TextBox 4"/>
+          <p:cNvSpPr txBox="1"/>
+          <p:nvPr/>
+        </p:nvSpPr>
+        <p:spPr>
+          <a:xfrm>
+            <a:off x="640080" y="914400"/>
+            <a:ext cx="4023360" cy="274320"/>
+          </a:xfrm>
+          <a:prstGeom prst="rect">
+            <a:avLst/>
+          </a:prstGeom>
+          <a:noFill/>
+        </p:spPr>
+        <p:txBody>
+          <a:bodyPr wrap="square" anchor="ctr" lIns="0" rIns="0" tIns="0" bIns="0">
+            <a:spAutoFit/>
+          </a:bodyPr>
+          <a:lstStyle/>
+          <a:p>
+            <a:pPr algn="l">
+              <a:spcAft>
+                <a:spcPts val="0"/>
+              </a:spcAft>
+            </a:pPr>
+            <a:r>
+              <a:rPr sz="1100" b="1" i="0">
+                <a:solidFill>
+                  <a:srgbClr val="C2410C"/>
+                </a:solidFill>
+                <a:latin typeface="Arial"/>
+              </a:rPr>
+              <a:t>Гіпотеза H7 — спростовано</a:t>
+            </a:r>
+          </a:p>
+        </p:txBody>
+      </p:sp>
+      <p:sp>
+        <p:nvSpPr>
+          <p:cNvPr id="6" name="Rectangle 5"/>
+          <p:cNvSpPr/>
+          <p:nvPr/>
+        </p:nvSpPr>
+        <p:spPr>
+          <a:xfrm>
+            <a:off x="521207" y="1252728"/>
+            <a:ext cx="7644384" cy="3774047"/>
+          </a:xfrm>
+          <a:prstGeom prst="rect">
+            <a:avLst/>
+          </a:prstGeom>
+          <a:noFill/>
+          <a:ln w="12700">
+            <a:solidFill>
+              <a:srgbClr val="E2E8F0"/>
+            </a:solidFill>
+          </a:ln>
+          <a:effectLst/>
+        </p:spPr>
+        <p:style>
+          <a:lnRef idx="1">
+            <a:schemeClr val="accent1"/>
+          </a:lnRef>
+          <a:fillRef idx="3">
+            <a:schemeClr val="accent1"/>
+          </a:fillRef>
+          <a:effectRef idx="2">
+            <a:schemeClr val="accent1"/>
+          </a:effectRef>
+          <a:fontRef idx="minor">
+            <a:schemeClr val="lt1"/>
+          </a:fontRef>
+        </p:style>
+        <p:txBody>
+          <a:bodyPr rtlCol="0" anchor="ctr"/>
+          <a:lstStyle/>
+          <a:p>
+            <a:pPr algn="ctr"/>
+          </a:p>
+        </p:txBody>
+      </p:sp>
       <p:pic>
         <p:nvPicPr>
-          <p:cNvPr id="5" name="Picture 4" descr="phys_mirnov.png"/>
+          <p:cNvPr id="7" name="Picture 6" descr="phys_mirnov.png"/>
           <p:cNvPicPr>
             <a:picLocks noChangeAspect="1"/>
           </p:cNvPicPr>
@@ -13869,7 +14294,7 @@
       </p:pic>
       <p:sp>
         <p:nvSpPr>
-          <p:cNvPr id="6" name="TextBox 5"/>
+          <p:cNvPr id="8" name="TextBox 7"/>
           <p:cNvSpPr txBox="1"/>
           <p:nvPr/>
         </p:nvSpPr>
@@ -13908,7 +14333,7 @@
       </p:sp>
       <p:sp>
         <p:nvSpPr>
-          <p:cNvPr id="7" name="TextBox 6"/>
+          <p:cNvPr id="9" name="TextBox 8"/>
           <p:cNvSpPr txBox="1"/>
           <p:nvPr/>
         </p:nvSpPr>
@@ -16460,9 +16885,94 @@
           </a:p>
         </p:txBody>
       </p:sp>
+      <p:sp>
+        <p:nvSpPr>
+          <p:cNvPr id="4" name="Rectangle 3"/>
+          <p:cNvSpPr/>
+          <p:nvPr/>
+        </p:nvSpPr>
+        <p:spPr>
+          <a:xfrm>
+            <a:off x="548640" y="914400"/>
+            <a:ext cx="4206240" cy="274320"/>
+          </a:xfrm>
+          <a:prstGeom prst="rect">
+            <a:avLst/>
+          </a:prstGeom>
+          <a:solidFill>
+            <a:srgbClr val="FFF7ED"/>
+          </a:solidFill>
+          <a:ln w="9525">
+            <a:solidFill>
+              <a:srgbClr val="C2410C"/>
+            </a:solidFill>
+          </a:ln>
+          <a:effectLst/>
+        </p:spPr>
+        <p:style>
+          <a:lnRef idx="1">
+            <a:schemeClr val="accent1"/>
+          </a:lnRef>
+          <a:fillRef idx="3">
+            <a:schemeClr val="accent1"/>
+          </a:fillRef>
+          <a:effectRef idx="2">
+            <a:schemeClr val="accent1"/>
+          </a:effectRef>
+          <a:fontRef idx="minor">
+            <a:schemeClr val="lt1"/>
+          </a:fontRef>
+        </p:style>
+        <p:txBody>
+          <a:bodyPr rtlCol="0" anchor="ctr"/>
+          <a:lstStyle/>
+          <a:p>
+            <a:pPr algn="ctr"/>
+          </a:p>
+        </p:txBody>
+      </p:sp>
+      <p:sp>
+        <p:nvSpPr>
+          <p:cNvPr id="5" name="TextBox 4"/>
+          <p:cNvSpPr txBox="1"/>
+          <p:nvPr/>
+        </p:nvSpPr>
+        <p:spPr>
+          <a:xfrm>
+            <a:off x="640080" y="914400"/>
+            <a:ext cx="4023360" cy="274320"/>
+          </a:xfrm>
+          <a:prstGeom prst="rect">
+            <a:avLst/>
+          </a:prstGeom>
+          <a:noFill/>
+        </p:spPr>
+        <p:txBody>
+          <a:bodyPr wrap="square" anchor="ctr" lIns="0" rIns="0" tIns="0" bIns="0">
+            <a:spAutoFit/>
+          </a:bodyPr>
+          <a:lstStyle/>
+          <a:p>
+            <a:pPr algn="l">
+              <a:spcAft>
+                <a:spcPts val="0"/>
+              </a:spcAft>
+            </a:pPr>
+            <a:r>
+              <a:rPr sz="1100" b="1" i="0">
+                <a:solidFill>
+                  <a:srgbClr val="C2410C"/>
+                </a:solidFill>
+                <a:latin typeface="Arial"/>
+              </a:rPr>
+              <a:t>Гіпотеза H4 — спростовано, H5 — підтверджено</a:t>
+            </a:r>
+          </a:p>
+        </p:txBody>
+      </p:sp>
       <p:pic>
         <p:nvPicPr>
-          <p:cNvPr id="4" name="Picture 3" descr="oracle.png"/>
+          <p:cNvPr id="6" name="Picture 5" descr="oracle.png"/>
           <p:cNvPicPr>
             <a:picLocks noChangeAspect="1"/>
           </p:cNvPicPr>
@@ -16486,7 +16996,7 @@
       </p:pic>
       <p:sp>
         <p:nvSpPr>
-          <p:cNvPr id="5" name="TextBox 4"/>
+          <p:cNvPr id="7" name="TextBox 6"/>
           <p:cNvSpPr txBox="1"/>
           <p:nvPr/>
         </p:nvSpPr>
@@ -16525,7 +17035,7 @@
       </p:sp>
       <p:sp>
         <p:nvSpPr>
-          <p:cNvPr id="6" name="TextBox 5"/>
+          <p:cNvPr id="8" name="TextBox 7"/>
           <p:cNvSpPr txBox="1"/>
           <p:nvPr/>
         </p:nvSpPr>
@@ -16598,7 +17108,7 @@
       </p:sp>
       <p:sp>
         <p:nvSpPr>
-          <p:cNvPr id="7" name="TextBox 6"/>
+          <p:cNvPr id="9" name="TextBox 8"/>
           <p:cNvSpPr txBox="1"/>
           <p:nvPr/>
         </p:nvSpPr>
@@ -16637,7 +17147,7 @@
       </p:sp>
       <p:graphicFrame>
         <p:nvGraphicFramePr>
-          <p:cNvPr id="8" name="Table 7"/>
+          <p:cNvPr id="10" name="Table 9"/>
           <p:cNvGraphicFramePr>
             <a:graphicFrameLocks noGrp="1"/>
           </p:cNvGraphicFramePr>
@@ -17058,8 +17568,8 @@
         </p:nvSpPr>
         <p:spPr>
           <a:xfrm>
-            <a:off x="548640" y="1188720"/>
-            <a:ext cx="11109960" cy="731520"/>
+            <a:off x="548640" y="914400"/>
+            <a:ext cx="4206240" cy="274320"/>
           </a:xfrm>
           <a:prstGeom prst="rect">
             <a:avLst/>
@@ -17067,7 +17577,7 @@
           <a:solidFill>
             <a:srgbClr val="ECFDF5"/>
           </a:solidFill>
-          <a:ln w="15875">
+          <a:ln w="9525">
             <a:solidFill>
               <a:srgbClr val="047857"/>
             </a:solidFill>
@@ -17104,8 +17614,8 @@
         </p:nvSpPr>
         <p:spPr>
           <a:xfrm>
-            <a:off x="731520" y="1261872"/>
-            <a:ext cx="10789920" cy="594360"/>
+            <a:off x="640080" y="914400"/>
+            <a:ext cx="4023360" cy="274320"/>
           </a:xfrm>
           <a:prstGeom prst="rect">
             <a:avLst/>
@@ -17124,6 +17634,91 @@
               </a:spcAft>
             </a:pPr>
             <a:r>
+              <a:rPr sz="1100" b="1" i="0">
+                <a:solidFill>
+                  <a:srgbClr val="047857"/>
+                </a:solidFill>
+                <a:latin typeface="Arial"/>
+              </a:rPr>
+              <a:t>Гіпотеза H8 — підтверджено</a:t>
+            </a:r>
+          </a:p>
+        </p:txBody>
+      </p:sp>
+      <p:sp>
+        <p:nvSpPr>
+          <p:cNvPr id="6" name="Rectangle 5"/>
+          <p:cNvSpPr/>
+          <p:nvPr/>
+        </p:nvSpPr>
+        <p:spPr>
+          <a:xfrm>
+            <a:off x="548640" y="1298448"/>
+            <a:ext cx="11109960" cy="731520"/>
+          </a:xfrm>
+          <a:prstGeom prst="rect">
+            <a:avLst/>
+          </a:prstGeom>
+          <a:solidFill>
+            <a:srgbClr val="ECFDF5"/>
+          </a:solidFill>
+          <a:ln w="15875">
+            <a:solidFill>
+              <a:srgbClr val="047857"/>
+            </a:solidFill>
+          </a:ln>
+          <a:effectLst/>
+        </p:spPr>
+        <p:style>
+          <a:lnRef idx="1">
+            <a:schemeClr val="accent1"/>
+          </a:lnRef>
+          <a:fillRef idx="3">
+            <a:schemeClr val="accent1"/>
+          </a:fillRef>
+          <a:effectRef idx="2">
+            <a:schemeClr val="accent1"/>
+          </a:effectRef>
+          <a:fontRef idx="minor">
+            <a:schemeClr val="lt1"/>
+          </a:fontRef>
+        </p:style>
+        <p:txBody>
+          <a:bodyPr rtlCol="0" anchor="ctr"/>
+          <a:lstStyle/>
+          <a:p>
+            <a:pPr algn="ctr"/>
+          </a:p>
+        </p:txBody>
+      </p:sp>
+      <p:sp>
+        <p:nvSpPr>
+          <p:cNvPr id="7" name="TextBox 6"/>
+          <p:cNvSpPr txBox="1"/>
+          <p:nvPr/>
+        </p:nvSpPr>
+        <p:spPr>
+          <a:xfrm>
+            <a:off x="731520" y="1371600"/>
+            <a:ext cx="10789920" cy="594360"/>
+          </a:xfrm>
+          <a:prstGeom prst="rect">
+            <a:avLst/>
+          </a:prstGeom>
+          <a:noFill/>
+        </p:spPr>
+        <p:txBody>
+          <a:bodyPr wrap="square" anchor="ctr" lIns="0" rIns="0" tIns="0" bIns="0">
+            <a:spAutoFit/>
+          </a:bodyPr>
+          <a:lstStyle/>
+          <a:p>
+            <a:pPr algn="l">
+              <a:spcAft>
+                <a:spcPts val="0"/>
+              </a:spcAft>
+            </a:pPr>
+            <a:r>
               <a:rPr sz="1500" b="1" i="0">
                 <a:solidFill>
                   <a:srgbClr val="047857"/>
@@ -17146,7 +17741,7 @@
       </p:sp>
       <p:pic>
         <p:nvPicPr>
-          <p:cNvPr id="6" name="Picture 5" descr="fixer.png"/>
+          <p:cNvPr id="8" name="Picture 7" descr="fixer.png"/>
           <p:cNvPicPr>
             <a:picLocks noChangeAspect="1"/>
           </p:cNvPicPr>
@@ -17160,7 +17755,7 @@
         </p:blipFill>
         <p:spPr>
           <a:xfrm>
-            <a:off x="548640" y="2103120"/>
+            <a:off x="548640" y="2194560"/>
             <a:ext cx="7406640" cy="3044010"/>
           </a:xfrm>
           <a:prstGeom prst="rect">
@@ -17170,13 +17765,13 @@
       </p:pic>
       <p:sp>
         <p:nvSpPr>
-          <p:cNvPr id="7" name="TextBox 6"/>
+          <p:cNvPr id="9" name="TextBox 8"/>
           <p:cNvSpPr txBox="1"/>
           <p:nvPr/>
         </p:nvSpPr>
         <p:spPr>
           <a:xfrm>
-            <a:off x="548640" y="5192850"/>
+            <a:off x="548640" y="5284290"/>
             <a:ext cx="7406640" cy="365760"/>
           </a:xfrm>
           <a:prstGeom prst="rect">
@@ -17209,7 +17804,7 @@
       </p:sp>
       <p:sp>
         <p:nvSpPr>
-          <p:cNvPr id="8" name="TextBox 7"/>
+          <p:cNvPr id="10" name="TextBox 9"/>
           <p:cNvSpPr txBox="1"/>
           <p:nvPr/>
         </p:nvSpPr>
@@ -17264,7 +17859,7 @@
       </p:sp>
       <p:sp>
         <p:nvSpPr>
-          <p:cNvPr id="9" name="TextBox 8"/>
+          <p:cNvPr id="11" name="TextBox 10"/>
           <p:cNvSpPr txBox="1"/>
           <p:nvPr/>
         </p:nvSpPr>
@@ -17362,7 +17957,7 @@
       </p:sp>
       <p:sp>
         <p:nvSpPr>
-          <p:cNvPr id="10" name="TextBox 9"/>
+          <p:cNvPr id="12" name="TextBox 11"/>
           <p:cNvSpPr txBox="1"/>
           <p:nvPr/>
         </p:nvSpPr>
@@ -19921,7 +20516,7 @@
         </p:nvGraphicFramePr>
         <p:xfrm>
           <a:off x="548640" y="1645920"/>
-          <a:ext cx="11109960" cy="3950208"/>
+          <a:ext cx="11109960" cy="4690863"/>
         </p:xfrm>
         <a:graphic>
           <a:graphicData uri="http://schemas.openxmlformats.org/drawingml/2006/table">
@@ -19935,7 +20530,7 @@
                 <a:gridCol w="3794760"/>
                 <a:gridCol w="1828800"/>
               </a:tblGrid>
-              <a:tr h="658368">
+              <a:tr h="521207">
                 <a:tc>
                   <a:txBody>
                     <a:bodyPr wrap="square"/>
@@ -20029,7 +20624,7 @@
                   </a:tcPr>
                 </a:tc>
               </a:tr>
-              <a:tr h="658368">
+              <a:tr h="521207">
                 <a:tc>
                   <a:txBody>
                     <a:bodyPr wrap="square"/>
@@ -20037,7 +20632,7 @@
                     <a:p>
                       <a:pPr algn="l"/>
                       <a:r>
-                        <a:rPr sz="1300" b="1">
+                        <a:rPr sz="1200" b="1">
                           <a:solidFill>
                             <a:srgbClr val="0F172A"/>
                           </a:solidFill>
@@ -20060,7 +20655,7 @@
                     <a:p>
                       <a:pPr algn="ctr"/>
                       <a:r>
-                        <a:rPr sz="1300" b="0">
+                        <a:rPr sz="1200" b="0">
                           <a:solidFill>
                             <a:srgbClr val="0F172A"/>
                           </a:solidFill>
@@ -20083,7 +20678,7 @@
                     <a:p>
                       <a:pPr algn="ctr"/>
                       <a:r>
-                        <a:rPr sz="1300" b="0">
+                        <a:rPr sz="1200" b="0">
                           <a:solidFill>
                             <a:srgbClr val="0F172A"/>
                           </a:solidFill>
@@ -20106,7 +20701,7 @@
                     <a:p>
                       <a:pPr algn="ctr"/>
                       <a:r>
-                        <a:rPr sz="1300" b="0">
+                        <a:rPr sz="1200" b="0">
                           <a:solidFill>
                             <a:srgbClr val="0F172A"/>
                           </a:solidFill>
@@ -20123,7 +20718,7 @@
                   </a:tcPr>
                 </a:tc>
               </a:tr>
-              <a:tr h="658368">
+              <a:tr h="521207">
                 <a:tc>
                   <a:txBody>
                     <a:bodyPr wrap="square"/>
@@ -20131,7 +20726,7 @@
                     <a:p>
                       <a:pPr algn="l"/>
                       <a:r>
-                        <a:rPr sz="1300" b="1">
+                        <a:rPr sz="1200" b="1">
                           <a:solidFill>
                             <a:srgbClr val="0F172A"/>
                           </a:solidFill>
@@ -20154,7 +20749,7 @@
                     <a:p>
                       <a:pPr algn="ctr"/>
                       <a:r>
-                        <a:rPr sz="1300" b="0">
+                        <a:rPr sz="1200" b="0">
                           <a:solidFill>
                             <a:srgbClr val="0F172A"/>
                           </a:solidFill>
@@ -20177,7 +20772,7 @@
                     <a:p>
                       <a:pPr algn="ctr"/>
                       <a:r>
-                        <a:rPr sz="1300" b="0">
+                        <a:rPr sz="1200" b="0">
                           <a:solidFill>
                             <a:srgbClr val="0F172A"/>
                           </a:solidFill>
@@ -20200,7 +20795,7 @@
                     <a:p>
                       <a:pPr algn="ctr"/>
                       <a:r>
-                        <a:rPr sz="1300" b="0">
+                        <a:rPr sz="1200" b="0">
                           <a:solidFill>
                             <a:srgbClr val="0F172A"/>
                           </a:solidFill>
@@ -20217,7 +20812,7 @@
                   </a:tcPr>
                 </a:tc>
               </a:tr>
-              <a:tr h="658368">
+              <a:tr h="521207">
                 <a:tc>
                   <a:txBody>
                     <a:bodyPr wrap="square"/>
@@ -20225,7 +20820,7 @@
                     <a:p>
                       <a:pPr algn="l"/>
                       <a:r>
-                        <a:rPr sz="1300" b="1">
+                        <a:rPr sz="1200" b="1">
                           <a:solidFill>
                             <a:srgbClr val="0F172A"/>
                           </a:solidFill>
@@ -20248,7 +20843,7 @@
                     <a:p>
                       <a:pPr algn="ctr"/>
                       <a:r>
-                        <a:rPr sz="1300" b="0">
+                        <a:rPr sz="1200" b="0">
                           <a:solidFill>
                             <a:srgbClr val="0F172A"/>
                           </a:solidFill>
@@ -20271,7 +20866,7 @@
                     <a:p>
                       <a:pPr algn="ctr"/>
                       <a:r>
-                        <a:rPr sz="1300" b="0">
+                        <a:rPr sz="1200" b="0">
                           <a:solidFill>
                             <a:srgbClr val="0F172A"/>
                           </a:solidFill>
@@ -20294,7 +20889,7 @@
                     <a:p>
                       <a:pPr algn="ctr"/>
                       <a:r>
-                        <a:rPr sz="1300" b="0">
+                        <a:rPr sz="1200" b="0">
                           <a:solidFill>
                             <a:srgbClr val="0F172A"/>
                           </a:solidFill>
@@ -20311,7 +20906,7 @@
                   </a:tcPr>
                 </a:tc>
               </a:tr>
-              <a:tr h="658368">
+              <a:tr h="521207">
                 <a:tc>
                   <a:txBody>
                     <a:bodyPr wrap="square"/>
@@ -20319,7 +20914,7 @@
                     <a:p>
                       <a:pPr algn="l"/>
                       <a:r>
-                        <a:rPr sz="1300" b="1">
+                        <a:rPr sz="1200" b="1">
                           <a:solidFill>
                             <a:srgbClr val="0F172A"/>
                           </a:solidFill>
@@ -20342,7 +20937,7 @@
                     <a:p>
                       <a:pPr algn="ctr"/>
                       <a:r>
-                        <a:rPr sz="1300" b="0">
+                        <a:rPr sz="1200" b="0">
                           <a:solidFill>
                             <a:srgbClr val="0F172A"/>
                           </a:solidFill>
@@ -20365,7 +20960,7 @@
                     <a:p>
                       <a:pPr algn="ctr"/>
                       <a:r>
-                        <a:rPr sz="1300" b="0">
+                        <a:rPr sz="1200" b="0">
                           <a:solidFill>
                             <a:srgbClr val="0F172A"/>
                           </a:solidFill>
@@ -20388,7 +20983,7 @@
                     <a:p>
                       <a:pPr algn="ctr"/>
                       <a:r>
-                        <a:rPr sz="1300" b="0">
+                        <a:rPr sz="1200" b="0">
                           <a:solidFill>
                             <a:srgbClr val="0F172A"/>
                           </a:solidFill>
@@ -20405,7 +21000,7 @@
                   </a:tcPr>
                 </a:tc>
               </a:tr>
-              <a:tr h="658368">
+              <a:tr h="521207">
                 <a:tc>
                   <a:txBody>
                     <a:bodyPr wrap="square"/>
@@ -20413,7 +21008,7 @@
                     <a:p>
                       <a:pPr algn="l"/>
                       <a:r>
-                        <a:rPr sz="1300" b="1">
+                        <a:rPr sz="1200" b="1">
                           <a:solidFill>
                             <a:srgbClr val="0F172A"/>
                           </a:solidFill>
@@ -20436,7 +21031,7 @@
                     <a:p>
                       <a:pPr algn="ctr"/>
                       <a:r>
-                        <a:rPr sz="1300" b="0">
+                        <a:rPr sz="1200" b="0">
                           <a:solidFill>
                             <a:srgbClr val="0F172A"/>
                           </a:solidFill>
@@ -20459,7 +21054,7 @@
                     <a:p>
                       <a:pPr algn="ctr"/>
                       <a:r>
-                        <a:rPr sz="1300" b="0">
+                        <a:rPr sz="1200" b="0">
                           <a:solidFill>
                             <a:srgbClr val="0F172A"/>
                           </a:solidFill>
@@ -20482,7 +21077,289 @@
                     <a:p>
                       <a:pPr algn="ctr"/>
                       <a:r>
-                        <a:rPr sz="1300" b="0">
+                        <a:rPr sz="1200" b="0">
+                          <a:solidFill>
+                            <a:srgbClr val="0F172A"/>
+                          </a:solidFill>
+                          <a:latin typeface="Arial"/>
+                        </a:rPr>
+                        <a:t>підтверджено</a:t>
+                      </a:r>
+                    </a:p>
+                  </a:txBody>
+                  <a:tcPr marL="91440" marR="91440" marT="27432" marB="27432" anchor="ctr">
+                    <a:solidFill>
+                      <a:srgbClr val="ECFDF5"/>
+                    </a:solidFill>
+                  </a:tcPr>
+                </a:tc>
+              </a:tr>
+              <a:tr h="521207">
+                <a:tc>
+                  <a:txBody>
+                    <a:bodyPr wrap="square"/>
+                    <a:lstStyle/>
+                    <a:p>
+                      <a:pPr algn="l"/>
+                      <a:r>
+                        <a:rPr sz="1200" b="1">
+                          <a:solidFill>
+                            <a:srgbClr val="0F172A"/>
+                          </a:solidFill>
+                          <a:latin typeface="Arial"/>
+                        </a:rPr>
+                        <a:t>H6</a:t>
+                      </a:r>
+                    </a:p>
+                  </a:txBody>
+                  <a:tcPr marL="91440" marR="91440" marT="27432" marB="27432" anchor="ctr">
+                    <a:solidFill>
+                      <a:srgbClr val="FFFFFF"/>
+                    </a:solidFill>
+                  </a:tcPr>
+                </a:tc>
+                <a:tc>
+                  <a:txBody>
+                    <a:bodyPr wrap="square"/>
+                    <a:lstStyle/>
+                    <a:p>
+                      <a:pPr algn="ctr"/>
+                      <a:r>
+                        <a:rPr sz="1200" b="0">
+                          <a:solidFill>
+                            <a:srgbClr val="0F172A"/>
+                          </a:solidFill>
+                          <a:latin typeface="Arial"/>
+                        </a:rPr>
+                        <a:t>Межі Грінвальда і low-q конкурують: існує вікно струму з мінімальним ризиком</a:t>
+                      </a:r>
+                    </a:p>
+                  </a:txBody>
+                  <a:tcPr marL="91440" marR="91440" marT="27432" marB="27432" anchor="ctr">
+                    <a:solidFill>
+                      <a:srgbClr val="FFFFFF"/>
+                    </a:solidFill>
+                  </a:tcPr>
+                </a:tc>
+                <a:tc>
+                  <a:txBody>
+                    <a:bodyPr wrap="square"/>
+                    <a:lstStyle/>
+                    <a:p>
+                      <a:pPr algn="ctr"/>
+                      <a:r>
+                        <a:rPr sz="1200" b="0">
+                          <a:solidFill>
+                            <a:srgbClr val="0F172A"/>
+                          </a:solidFill>
+                          <a:latin typeface="Arial"/>
+                        </a:rPr>
+                        <a:t>мінімум λ при Iₚ ≈ 2,6–3,6 МА (сканування 91 розряду, розд. 10.1)</a:t>
+                      </a:r>
+                    </a:p>
+                  </a:txBody>
+                  <a:tcPr marL="91440" marR="91440" marT="27432" marB="27432" anchor="ctr">
+                    <a:solidFill>
+                      <a:srgbClr val="FFFFFF"/>
+                    </a:solidFill>
+                  </a:tcPr>
+                </a:tc>
+                <a:tc>
+                  <a:txBody>
+                    <a:bodyPr wrap="square"/>
+                    <a:lstStyle/>
+                    <a:p>
+                      <a:pPr algn="ctr"/>
+                      <a:r>
+                        <a:rPr sz="1200" b="0">
+                          <a:solidFill>
+                            <a:srgbClr val="0F172A"/>
+                          </a:solidFill>
+                          <a:latin typeface="Arial"/>
+                        </a:rPr>
+                        <a:t>підтверджено</a:t>
+                      </a:r>
+                    </a:p>
+                  </a:txBody>
+                  <a:tcPr marL="91440" marR="91440" marT="27432" marB="27432" anchor="ctr">
+                    <a:solidFill>
+                      <a:srgbClr val="ECFDF5"/>
+                    </a:solidFill>
+                  </a:tcPr>
+                </a:tc>
+              </a:tr>
+              <a:tr h="521207">
+                <a:tc>
+                  <a:txBody>
+                    <a:bodyPr wrap="square"/>
+                    <a:lstStyle/>
+                    <a:p>
+                      <a:pPr algn="l"/>
+                      <a:r>
+                        <a:rPr sz="1200" b="1">
+                          <a:solidFill>
+                            <a:srgbClr val="0F172A"/>
+                          </a:solidFill>
+                          <a:latin typeface="Arial"/>
+                        </a:rPr>
+                        <a:t>H7</a:t>
+                      </a:r>
+                    </a:p>
+                  </a:txBody>
+                  <a:tcPr marL="91440" marR="91440" marT="27432" marB="27432" anchor="ctr">
+                    <a:solidFill>
+                      <a:srgbClr val="FFFFFF"/>
+                    </a:solidFill>
+                  </a:tcPr>
+                </a:tc>
+                <a:tc>
+                  <a:txBody>
+                    <a:bodyPr wrap="square"/>
+                    <a:lstStyle/>
+                    <a:p>
+                      <a:pPr algn="ctr"/>
+                      <a:r>
+                        <a:rPr sz="1200" b="0">
+                          <a:solidFill>
+                            <a:srgbClr val="0F172A"/>
+                          </a:solidFill>
+                          <a:latin typeface="Arial"/>
+                        </a:rPr>
+                        <a:t>Швидкі магнітні сигнали (dIₚ/dt, котушки Мірнова) дають раннє попередження</a:t>
+                      </a:r>
+                    </a:p>
+                  </a:txBody>
+                  <a:tcPr marL="91440" marR="91440" marT="27432" marB="27432" anchor="ctr">
+                    <a:solidFill>
+                      <a:srgbClr val="FFFFFF"/>
+                    </a:solidFill>
+                  </a:tcPr>
+                </a:tc>
+                <a:tc>
+                  <a:txBody>
+                    <a:bodyPr wrap="square"/>
+                    <a:lstStyle/>
+                    <a:p>
+                      <a:pPr algn="ctr"/>
+                      <a:r>
+                        <a:rPr sz="1200" b="0">
+                          <a:solidFill>
+                            <a:srgbClr val="0F172A"/>
+                          </a:solidFill>
+                          <a:latin typeface="Arial"/>
+                        </a:rPr>
+                        <a:t>МГД-сигнали ростуть лише за 50–90 мс до гасіння (розд. 10.3–10.4)</a:t>
+                      </a:r>
+                    </a:p>
+                  </a:txBody>
+                  <a:tcPr marL="91440" marR="91440" marT="27432" marB="27432" anchor="ctr">
+                    <a:solidFill>
+                      <a:srgbClr val="FFFFFF"/>
+                    </a:solidFill>
+                  </a:tcPr>
+                </a:tc>
+                <a:tc>
+                  <a:txBody>
+                    <a:bodyPr wrap="square"/>
+                    <a:lstStyle/>
+                    <a:p>
+                      <a:pPr algn="ctr"/>
+                      <a:r>
+                        <a:rPr sz="1200" b="0">
+                          <a:solidFill>
+                            <a:srgbClr val="0F172A"/>
+                          </a:solidFill>
+                          <a:latin typeface="Arial"/>
+                        </a:rPr>
+                        <a:t>спростовано</a:t>
+                      </a:r>
+                    </a:p>
+                  </a:txBody>
+                  <a:tcPr marL="91440" marR="91440" marT="27432" marB="27432" anchor="ctr">
+                    <a:solidFill>
+                      <a:srgbClr val="FFF7ED"/>
+                    </a:solidFill>
+                  </a:tcPr>
+                </a:tc>
+              </a:tr>
+              <a:tr h="521207">
+                <a:tc>
+                  <a:txBody>
+                    <a:bodyPr wrap="square"/>
+                    <a:lstStyle/>
+                    <a:p>
+                      <a:pPr algn="l"/>
+                      <a:r>
+                        <a:rPr sz="1200" b="1">
+                          <a:solidFill>
+                            <a:srgbClr val="0F172A"/>
+                          </a:solidFill>
+                          <a:latin typeface="Arial"/>
+                        </a:rPr>
+                        <a:t>H8</a:t>
+                      </a:r>
+                    </a:p>
+                  </a:txBody>
+                  <a:tcPr marL="91440" marR="91440" marT="27432" marB="27432" anchor="ctr">
+                    <a:solidFill>
+                      <a:srgbClr val="FFFFFF"/>
+                    </a:solidFill>
+                  </a:tcPr>
+                </a:tc>
+                <a:tc>
+                  <a:txBody>
+                    <a:bodyPr wrap="square"/>
+                    <a:lstStyle/>
+                    <a:p>
+                      <a:pPr algn="ctr"/>
+                      <a:r>
+                        <a:rPr sz="1200" b="0">
+                          <a:solidFill>
+                            <a:srgbClr val="0F172A"/>
+                          </a:solidFill>
+                          <a:latin typeface="Arial"/>
+                        </a:rPr>
+                        <a:t>Знаючи причину зриву, можна вчасно змінити уставки і запобігти зриву без втрати продуктивності</a:t>
+                      </a:r>
+                    </a:p>
+                  </a:txBody>
+                  <a:tcPr marL="91440" marR="91440" marT="27432" marB="27432" anchor="ctr">
+                    <a:solidFill>
+                      <a:srgbClr val="FFFFFF"/>
+                    </a:solidFill>
+                  </a:tcPr>
+                </a:tc>
+                <a:tc>
+                  <a:txBody>
+                    <a:bodyPr wrap="square"/>
+                    <a:lstStyle/>
+                    <a:p>
+                      <a:pPr algn="ctr"/>
+                      <a:r>
+                        <a:rPr sz="1200" b="0">
+                          <a:solidFill>
+                            <a:srgbClr val="0F172A"/>
+                          </a:solidFill>
+                          <a:latin typeface="Arial"/>
+                        </a:rPr>
+                        <a:t>31 → 5 зривів на 100 нових розрядах, енергія без змін (розд. 13)</a:t>
+                      </a:r>
+                    </a:p>
+                  </a:txBody>
+                  <a:tcPr marL="91440" marR="91440" marT="27432" marB="27432" anchor="ctr">
+                    <a:solidFill>
+                      <a:srgbClr val="FFFFFF"/>
+                    </a:solidFill>
+                  </a:tcPr>
+                </a:tc>
+                <a:tc>
+                  <a:txBody>
+                    <a:bodyPr wrap="square"/>
+                    <a:lstStyle/>
+                    <a:p>
+                      <a:pPr algn="ctr"/>
+                      <a:r>
+                        <a:rPr sz="1200" b="0">
                           <a:solidFill>
                             <a:srgbClr val="0F172A"/>
                           </a:solidFill>

--- a/docs/presentation.pptx
+++ b/docs/presentation.pptx
@@ -9529,7 +9529,7 @@
         <p:spPr>
           <a:xfrm>
             <a:off x="548640" y="914400"/>
-            <a:ext cx="4206240" cy="274320"/>
+            <a:ext cx="7681874" cy="274320"/>
           </a:xfrm>
           <a:prstGeom prst="rect">
             <a:avLst/>
@@ -9575,7 +9575,7 @@
         <p:spPr>
           <a:xfrm>
             <a:off x="640080" y="914400"/>
-            <a:ext cx="4023360" cy="274320"/>
+            <a:ext cx="7498994" cy="274320"/>
           </a:xfrm>
           <a:prstGeom prst="rect">
             <a:avLst/>
@@ -9600,7 +9600,7 @@
                 </a:solidFill>
                 <a:latin typeface="Arial"/>
               </a:rPr>
-              <a:t>Гіпотеза H1 — підтверджено</a:t>
+              <a:t>Гіпотеза: детектор передвісника разом з раннім попередженням кращий за одну модель — підтверджено</a:t>
             </a:r>
           </a:p>
         </p:txBody>
@@ -10457,7 +10457,7 @@
         <p:spPr>
           <a:xfrm>
             <a:off x="548640" y="914400"/>
-            <a:ext cx="4206240" cy="274320"/>
+            <a:ext cx="7074712" cy="274320"/>
           </a:xfrm>
           <a:prstGeom prst="rect">
             <a:avLst/>
@@ -10503,7 +10503,7 @@
         <p:spPr>
           <a:xfrm>
             <a:off x="640080" y="914400"/>
-            <a:ext cx="4023360" cy="274320"/>
+            <a:ext cx="6891832" cy="274320"/>
           </a:xfrm>
           <a:prstGeom prst="rect">
             <a:avLst/>
@@ -10528,7 +10528,7 @@
                 </a:solidFill>
                 <a:latin typeface="Arial"/>
               </a:rPr>
-              <a:t>Гіпотези H2 і H3 — підтверджено</a:t>
+              <a:t>Гіпотеза: для прогнозу не потрібні ні формули шпаргалки, ні мітка сценарію — підтверджено</a:t>
             </a:r>
           </a:p>
         </p:txBody>
@@ -12517,7 +12517,7 @@
         <p:spPr>
           <a:xfrm>
             <a:off x="548640" y="914400"/>
-            <a:ext cx="4206240" cy="274320"/>
+            <a:ext cx="7985455" cy="274320"/>
           </a:xfrm>
           <a:prstGeom prst="rect">
             <a:avLst/>
@@ -12563,7 +12563,7 @@
         <p:spPr>
           <a:xfrm>
             <a:off x="640080" y="914400"/>
-            <a:ext cx="4023360" cy="274320"/>
+            <a:ext cx="7802575" cy="274320"/>
           </a:xfrm>
           <a:prstGeom prst="rect">
             <a:avLst/>
@@ -12588,7 +12588,7 @@
                 </a:solidFill>
                 <a:latin typeface="Arial"/>
               </a:rPr>
-              <a:t>Гіпотеза H6 — підтверджено</a:t>
+              <a:t>Гіпотеза: межі Грінвальда і low-q конкурують, існує вікно струму з мінімальним ризиком — підтверджено</a:t>
             </a:r>
           </a:p>
         </p:txBody>
@@ -12910,7 +12910,7 @@
                 </a:solidFill>
                 <a:latin typeface="Arial"/>
               </a:rPr>
-              <a:t>межі конкурують: зниження одного ризику підвищує інший, тому керування має знати механізм — звідси гіпотеза H8 (розд. 13)</a:t>
+              <a:t>межі конкурують: зниження одного ризику підвищує інший, тому керування має знати механізм — це перевіряємо в розділі 13</a:t>
             </a:r>
           </a:p>
         </p:txBody>
@@ -13729,7 +13729,7 @@
         <p:spPr>
           <a:xfrm>
             <a:off x="548640" y="914400"/>
-            <a:ext cx="4206240" cy="274320"/>
+            <a:ext cx="6012180" cy="274320"/>
           </a:xfrm>
           <a:prstGeom prst="rect">
             <a:avLst/>
@@ -13775,7 +13775,7 @@
         <p:spPr>
           <a:xfrm>
             <a:off x="640080" y="914400"/>
-            <a:ext cx="4023360" cy="274320"/>
+            <a:ext cx="5829300" cy="274320"/>
           </a:xfrm>
           <a:prstGeom prst="rect">
             <a:avLst/>
@@ -13800,7 +13800,7 @@
                 </a:solidFill>
                 <a:latin typeface="Arial"/>
               </a:rPr>
-              <a:t>Гіпотеза H7 — спростовано</a:t>
+              <a:t>Гіпотеза: швидка похідна струму dIₚ/dt дає раннє попередження — спростовано</a:t>
             </a:r>
           </a:p>
         </p:txBody>
@@ -14148,7 +14148,7 @@
         <p:spPr>
           <a:xfrm>
             <a:off x="548640" y="914400"/>
-            <a:ext cx="4206240" cy="274320"/>
+            <a:ext cx="5177332" cy="274320"/>
           </a:xfrm>
           <a:prstGeom prst="rect">
             <a:avLst/>
@@ -14194,7 +14194,7 @@
         <p:spPr>
           <a:xfrm>
             <a:off x="640080" y="914400"/>
-            <a:ext cx="4023360" cy="274320"/>
+            <a:ext cx="4994452" cy="274320"/>
           </a:xfrm>
           <a:prstGeom prst="rect">
             <a:avLst/>
@@ -14219,7 +14219,7 @@
                 </a:solidFill>
                 <a:latin typeface="Arial"/>
               </a:rPr>
-              <a:t>Гіпотеза H7 — спростовано</a:t>
+              <a:t>Гіпотеза: котушки Мірнова дають раннє попередження — спростовано</a:t>
             </a:r>
           </a:p>
         </p:txBody>
@@ -16894,7 +16894,7 @@
         <p:spPr>
           <a:xfrm>
             <a:off x="548640" y="914400"/>
-            <a:ext cx="4206240" cy="274320"/>
+            <a:ext cx="8744407" cy="274320"/>
           </a:xfrm>
           <a:prstGeom prst="rect">
             <a:avLst/>
@@ -16940,7 +16940,7 @@
         <p:spPr>
           <a:xfrm>
             <a:off x="640080" y="914400"/>
-            <a:ext cx="4023360" cy="274320"/>
+            <a:ext cx="8561527" cy="274320"/>
           </a:xfrm>
           <a:prstGeom prst="rect">
             <a:avLst/>
@@ -16965,7 +16965,7 @@
                 </a:solidFill>
                 <a:latin typeface="Arial"/>
               </a:rPr>
-              <a:t>Гіпотеза H4 — спростовано, H5 — підтверджено</a:t>
+              <a:t>Гіпотези: точної λ достатньо для тривоги — спростовано; фізичне апріорі дає причину без розмітки — підтверджено</a:t>
             </a:r>
           </a:p>
         </p:txBody>
@@ -17569,7 +17569,7 @@
         <p:spPr>
           <a:xfrm>
             <a:off x="548640" y="914400"/>
-            <a:ext cx="4206240" cy="274320"/>
+            <a:ext cx="7302398" cy="274320"/>
           </a:xfrm>
           <a:prstGeom prst="rect">
             <a:avLst/>
@@ -17615,7 +17615,7 @@
         <p:spPr>
           <a:xfrm>
             <a:off x="640080" y="914400"/>
-            <a:ext cx="4023360" cy="274320"/>
+            <a:ext cx="7119518" cy="274320"/>
           </a:xfrm>
           <a:prstGeom prst="rect">
             <a:avLst/>
@@ -17640,7 +17640,7 @@
                 </a:solidFill>
                 <a:latin typeface="Arial"/>
               </a:rPr>
-              <a:t>Гіпотеза H8 — підтверджено</a:t>
+              <a:t>Гіпотеза: знаючи причину зриву, можна вчасно змінити уставки і запобігти йому — підтверджено</a:t>
             </a:r>
           </a:p>
         </p:txBody>

--- a/docs/presentation.pptx
+++ b/docs/presentation.pptx
@@ -2141,7 +2141,7 @@
           <a:lstStyle/>
           <a:p>
             <a:r>
-              <a:t>≈40 с. Модель раннього попередження без формул і без підказок симулятора: об'єм 0,924 проти 0,765, ROC AUC 0,998 на 30 мс. ImpactNet визначає механізм зриву: 49 з 49. У замкненому контурі учень, що бачить лише прилади, зменшує кількість зривів, яким можна запобігти, з 31 до 5 без втрати продуктивності; на іншому рушії тривога переноситься без донавчання. Поріг спрацювання неінформативний, моделі порівнюються за ROC AUC. Код і звіти — у репозиторії.</a:t>
+              <a:t>≈40 с. Модель раннього попередження без формул і без підказок симулятора: об'єм заліку 0,924 проти 0,765 у базового рішення. ImpactNet визначає механізм зриву: 49 з 49. У замкненому контурі учень, що бачить лише прилади, зменшує кількість зривів, яким можна запобігти, з 31 до 5 без втрати продуктивності; на іншому рушії тривога переноситься без донавчання. Поріг спрацювання неінформативний, моделі порівнюються за ROC AUC. Код і звіти — у репозиторії.</a:t>
             </a:r>
           </a:p>
         </p:txBody>
@@ -2281,7 +2281,7 @@
           <a:lstStyle/>
           <a:p>
             <a:r>
-              <a:t>≈40 с. Дані генеруються симулятором за незалежними сидами, навчальна і тестова вибірки не перетинаються. Оцінка — офіційний засіб toksym score на чотирьох наборах, 747 розрядів, 228 зривів. Моделі порівнюються парним бутстрепом на тих самих розрядах, критерій прийняття P &gt; 0,9 зафіксовано до експерименту. Ознаки причинні, той самий код працює у навчанні та в заліку; мітку сценарію і формули шпаргалки вилучено, щоб уникнути витоку інформації.</a:t>
+              <a:t>≈40 с. Дані генеруються симулятором за незалежними сидами, навчальна і тестова вибірки не перетинаються. Оцінка — офіційний засіб toksym score на чотирьох наборах, 747 розрядів, 228 зривів. Моделі порівнюються парним бутстрепом на тих самих розрядах, критерій прийняття P &gt; 0,9 зафіксовано до експерименту. Ознаки не залежать від цільової змінної: модель не бачить ні заздалегідь відомих результатів, ні майбутнього розряду.</a:t>
             </a:r>
           </a:p>
         </p:txBody>
@@ -11711,8 +11711,8 @@
         </p:nvSpPr>
         <p:spPr>
           <a:xfrm>
-            <a:off x="548640" y="2011680"/>
-            <a:ext cx="10972800" cy="320040"/>
+            <a:off x="548640" y="1783080"/>
+            <a:ext cx="11064240" cy="320040"/>
           </a:xfrm>
           <a:prstGeom prst="rect">
             <a:avLst/>
@@ -11731,6 +11731,45 @@
               </a:spcAft>
             </a:pPr>
             <a:r>
+              <a:rPr sz="1200" b="0" i="0">
+                <a:solidFill>
+                  <a:srgbClr val="475569"/>
+                </a:solidFill>
+                <a:latin typeface="Arial"/>
+              </a:rPr>
+              <a:t>Простими словами: що ближче параметр до своєї межі, то більший ризик rᵢ; λ — сумарна інтенсивність зриву, 1/с</a:t>
+            </a:r>
+          </a:p>
+        </p:txBody>
+      </p:sp>
+      <p:sp>
+        <p:nvSpPr>
+          <p:cNvPr id="6" name="TextBox 5"/>
+          <p:cNvSpPr txBox="1"/>
+          <p:nvPr/>
+        </p:nvSpPr>
+        <p:spPr>
+          <a:xfrm>
+            <a:off x="548640" y="2240280"/>
+            <a:ext cx="10972800" cy="320040"/>
+          </a:xfrm>
+          <a:prstGeom prst="rect">
+            <a:avLst/>
+          </a:prstGeom>
+          <a:noFill/>
+        </p:spPr>
+        <p:txBody>
+          <a:bodyPr wrap="square" anchor="t" lIns="0" rIns="0" tIns="0" bIns="0">
+            <a:spAutoFit/>
+          </a:bodyPr>
+          <a:lstStyle/>
+          <a:p>
+            <a:pPr algn="l">
+              <a:spcAft>
+                <a:spcPts val="0"/>
+              </a:spcAft>
+            </a:pPr>
+            <a:r>
               <a:rPr sz="1100" b="0" i="0">
                 <a:solidFill>
                   <a:srgbClr val="475569"/>
@@ -11744,15 +11783,15 @@
       </p:sp>
       <p:graphicFrame>
         <p:nvGraphicFramePr>
-          <p:cNvPr id="6" name="Table 5"/>
+          <p:cNvPr id="7" name="Table 6"/>
           <p:cNvGraphicFramePr>
             <a:graphicFrameLocks noGrp="1"/>
           </p:cNvGraphicFramePr>
           <p:nvPr/>
         </p:nvGraphicFramePr>
         <p:xfrm>
-          <a:off x="548640" y="2377440"/>
-          <a:ext cx="11109960" cy="2651760"/>
+          <a:off x="548640" y="2606040"/>
+          <a:ext cx="11109960" cy="2560320"/>
         </p:xfrm>
         <a:graphic>
           <a:graphicData uri="http://schemas.openxmlformats.org/drawingml/2006/table">
@@ -11767,7 +11806,7 @@
                 <a:gridCol w="3246120"/>
                 <a:gridCol w="2651760"/>
               </a:tblGrid>
-              <a:tr h="530352">
+              <a:tr h="512064">
                 <a:tc>
                   <a:txBody>
                     <a:bodyPr wrap="square"/>
@@ -11884,7 +11923,7 @@
                   </a:tcPr>
                 </a:tc>
               </a:tr>
-              <a:tr h="530352">
+              <a:tr h="512064">
                 <a:tc>
                   <a:txBody>
                     <a:bodyPr wrap="square"/>
@@ -12001,7 +12040,7 @@
                   </a:tcPr>
                 </a:tc>
               </a:tr>
-              <a:tr h="530352">
+              <a:tr h="512064">
                 <a:tc>
                   <a:txBody>
                     <a:bodyPr wrap="square"/>
@@ -12118,7 +12157,7 @@
                   </a:tcPr>
                 </a:tc>
               </a:tr>
-              <a:tr h="530352">
+              <a:tr h="512064">
                 <a:tc>
                   <a:txBody>
                     <a:bodyPr wrap="square"/>
@@ -12235,7 +12274,7 @@
                   </a:tcPr>
                 </a:tc>
               </a:tr>
-              <a:tr h="530352">
+              <a:tr h="512064">
                 <a:tc>
                   <a:txBody>
                     <a:bodyPr wrap="square"/>
@@ -12358,13 +12397,13 @@
       </p:graphicFrame>
       <p:sp>
         <p:nvSpPr>
-          <p:cNvPr id="7" name="TextBox 6"/>
+          <p:cNvPr id="8" name="TextBox 7"/>
           <p:cNvSpPr txBox="1"/>
           <p:nvPr/>
         </p:nvSpPr>
         <p:spPr>
           <a:xfrm>
-            <a:off x="548640" y="5257800"/>
+            <a:off x="548640" y="5349240"/>
             <a:ext cx="11064240" cy="1371600"/>
           </a:xfrm>
           <a:prstGeom prst="rect">
@@ -20093,7 +20132,7 @@
                 </a:solidFill>
                 <a:latin typeface="Arial"/>
               </a:rPr>
-              <a:t>Модель раннього попередження без формул шпаргалки і мітки сценарію досягає об'єму 0,924 (базове рішення 0,765) і ROC AUC 0,998 на запасі 30 мс.</a:t>
+              <a:t>Модель раннього попередження без формул шпаргалки і мітки сценарію: об'єм заліку 0,924 (базове рішення 0,765).</a:t>
             </a:r>
           </a:p>
           <a:p>
@@ -21591,7 +21630,7 @@
         <p:spPr>
           <a:xfrm>
             <a:off x="6309360" y="1371600"/>
-            <a:ext cx="5349240" cy="2286000"/>
+            <a:ext cx="5349240" cy="1828800"/>
           </a:xfrm>
           <a:prstGeom prst="rect">
             <a:avLst/>
@@ -21616,7 +21655,7 @@
                 </a:solidFill>
                 <a:latin typeface="Arial"/>
               </a:rPr>
-              <a:t>Причинність ознак – </a:t>
+              <a:t>Відтворюваність – </a:t>
             </a:r>
             <a:r>
               <a:rPr sz="1500" b="0" i="0">
@@ -21625,7 +21664,7 @@
                 </a:solidFill>
                 <a:latin typeface="Arial"/>
               </a:rPr>
-              <a:t>використовуються лише минулі значення; один і той самий клас ознак у навчанні і на заліку</a:t>
+              <a:t>результати на ноутбуці і на сервері збігаються, оскільки симулятор детермінований</a:t>
             </a:r>
           </a:p>
           <a:p>
@@ -21641,7 +21680,7 @@
                 </a:solidFill>
                 <a:latin typeface="Arial"/>
               </a:rPr>
-              <a:t>Відтворюваність – </a:t>
+              <a:t>Відсутність витоку – </a:t>
             </a:r>
             <a:r>
               <a:rPr sz="1500" b="0" i="0">
@@ -21650,32 +21689,7 @@
                 </a:solidFill>
                 <a:latin typeface="Arial"/>
               </a:rPr>
-              <a:t>результати на ноутбуці і на сервері збігаються, оскільки симулятор детермінований</a:t>
-            </a:r>
-          </a:p>
-          <a:p>
-            <a:pPr algn="l">
-              <a:spcAft>
-                <a:spcPts val="1600"/>
-              </a:spcAft>
-            </a:pPr>
-            <a:r>
-              <a:rPr sz="1500" b="1" i="0">
-                <a:solidFill>
-                  <a:srgbClr val="0F172A"/>
-                </a:solidFill>
-                <a:latin typeface="Arial"/>
-              </a:rPr>
-              <a:t>Відсутність витоку – </a:t>
-            </a:r>
-            <a:r>
-              <a:rPr sz="1500" b="0" i="0">
-                <a:solidFill>
-                  <a:srgbClr val="0F172A"/>
-                </a:solidFill>
-                <a:latin typeface="Arial"/>
-              </a:rPr>
-              <a:t>вилучено мітку сценарію та формули шпаргалки; мітки використовуються лише як ціль навчання</a:t>
+              <a:t>гарантія повної незалежності ознак від цільової змінної під час навчання, що виключає використання заздалегідь відомих результатів або майбутніх контекстів</a:t>
             </a:r>
           </a:p>
         </p:txBody>

--- a/docs/presentation.pptx
+++ b/docs/presentation.pptx
@@ -36,6 +36,7 @@
     <p:sldId id="284" r:id="rId36"/>
     <p:sldId id="285" r:id="rId37"/>
     <p:sldId id="286" r:id="rId38"/>
+    <p:sldId id="287" r:id="rId39"/>
   </p:sldIdLst>
   <p:sldSz cx="12191695" cy="6858000" type="screen4x3"/>
   <p:notesSz cx="6858000" cy="9144000"/>
@@ -2213,6 +2214,76 @@
           <a:p>
             <a:r>
               <a:t>≈40 с. Модель раннього попередження без формул і без підказок симулятора: об'єм заліку 0,924 проти 0,765 у базового рішення. ImpactNet визначає механізм зриву: 49 з 49. У замкненому контурі учень, що бачить лише прилади, зменшує кількість зривів, яким можна запобігти, з 31 до 5 без втрати продуктивності; на іншому рушії тривога переноситься без донавчання. Поріг спрацювання неінформативний, моделі порівнюються за ROC AUC. Код і звіти — у репозиторії.</a:t>
+            </a:r>
+          </a:p>
+        </p:txBody>
+      </p:sp>
+      <p:sp>
+        <p:nvSpPr>
+          <p:cNvPr id="4" name="Slide Number Placeholder 3"/>
+          <p:cNvSpPr>
+            <a:spLocks noGrp="1"/>
+          </p:cNvSpPr>
+          <p:nvPr>
+            <p:ph type="sldNum" idx="5" sz="quarter"/>
+          </p:nvPr>
+        </p:nvSpPr>
+        <p:spPr/>
+      </p:sp>
+    </p:spTree>
+  </p:cSld>
+  <p:clrMapOvr>
+    <a:masterClrMapping/>
+  </p:clrMapOvr>
+</p:notes>
+</file>
+
+<file path=ppt/notesSlides/notesSlide32.xml><?xml version="1.0" encoding="utf-8"?>
+<p:notes xmlns:a="http://schemas.openxmlformats.org/drawingml/2006/main" xmlns:p="http://schemas.openxmlformats.org/presentationml/2006/main" xmlns:r="http://schemas.openxmlformats.org/officeDocument/2006/relationships">
+  <p:cSld>
+    <p:spTree>
+      <p:nvGrpSpPr>
+        <p:cNvPr id="1" name=""/>
+        <p:cNvGrpSpPr/>
+        <p:nvPr/>
+      </p:nvGrpSpPr>
+      <p:grpSpPr>
+        <a:xfrm>
+          <a:off x="0" y="0"/>
+          <a:ext cx="0" cy="0"/>
+          <a:chOff x="0" y="0"/>
+          <a:chExt cx="0" cy="0"/>
+        </a:xfrm>
+      </p:grpSpPr>
+      <p:sp>
+        <p:nvSpPr>
+          <p:cNvPr id="2" name="Slide Image Placeholder 1"/>
+          <p:cNvSpPr>
+            <a:spLocks noGrp="1"/>
+          </p:cNvSpPr>
+          <p:nvPr>
+            <p:ph type="sldImg" idx="2"/>
+          </p:nvPr>
+        </p:nvSpPr>
+        <p:spPr/>
+      </p:sp>
+      <p:sp>
+        <p:nvSpPr>
+          <p:cNvPr id="3" name="Notes Placeholder 2"/>
+          <p:cNvSpPr>
+            <a:spLocks noGrp="1"/>
+          </p:cNvSpPr>
+          <p:nvPr>
+            <p:ph type="body" idx="3" sz="quarter"/>
+          </p:nvPr>
+        </p:nvSpPr>
+        <p:spPr/>
+        <p:txBody>
+          <a:bodyPr/>
+          <a:lstStyle/>
+          <a:p>
+            <a:r>
+              <a:t>≈30 с і перехід до демо. Симулятор організаторів toksym генерує розряди й оцінює тривогу, але не дає змінювати параметри плазми під час розряду, тож замкнений контур на ньому неможливий. Тому на основі відкритого рушія fusionsimulator.io, на якому побудовано і toksym, ми зробили fusion-sim: усе, що вміє toksym, плюс керування уставками в реальному часі моделлю і «тінь» — ту саму плазму без втручань для порівняння. Показуємо: JET, сценарій Density limit, модель v8_fixer. Без fixer розряд зривається на 4–5 с, з fixer — ні.</a:t>
             </a:r>
           </a:p>
         </p:txBody>
@@ -21523,6 +21594,983 @@
           <a:xfrm>
             <a:off x="548640" y="5715000"/>
             <a:ext cx="7315200" cy="457200"/>
+          </a:xfrm>
+          <a:prstGeom prst="rect">
+            <a:avLst/>
+          </a:prstGeom>
+          <a:noFill/>
+        </p:spPr>
+        <p:txBody>
+          <a:bodyPr wrap="square" anchor="t" lIns="0" rIns="0" tIns="0" bIns="0">
+            <a:spAutoFit/>
+          </a:bodyPr>
+          <a:lstStyle/>
+          <a:p>
+            <a:pPr algn="l">
+              <a:spcAft>
+                <a:spcPts val="0"/>
+              </a:spcAft>
+            </a:pPr>
+            <a:r>
+              <a:rPr sz="1800" b="1" i="0">
+                <a:solidFill>
+                  <a:srgbClr val="047857"/>
+                </a:solidFill>
+                <a:latin typeface="Arial"/>
+              </a:rPr>
+              <a:t>Далі — демонстрація в реальному часі →</a:t>
+            </a:r>
+          </a:p>
+        </p:txBody>
+      </p:sp>
+    </p:spTree>
+  </p:cSld>
+  <p:clrMapOvr>
+    <a:masterClrMapping/>
+  </p:clrMapOvr>
+</p:sld>
+</file>
+
+<file path=ppt/slides/slide32.xml><?xml version="1.0" encoding="utf-8"?>
+<p:sld xmlns:a="http://schemas.openxmlformats.org/drawingml/2006/main" xmlns:p="http://schemas.openxmlformats.org/presentationml/2006/main" xmlns:r="http://schemas.openxmlformats.org/officeDocument/2006/relationships">
+  <p:cSld>
+    <p:bg>
+      <p:bgPr>
+        <a:solidFill>
+          <a:srgbClr val="FFFFFF"/>
+        </a:solidFill>
+        <a:effectLst/>
+      </p:bgPr>
+    </p:bg>
+    <p:spTree>
+      <p:nvGrpSpPr>
+        <p:cNvPr id="1" name=""/>
+        <p:cNvGrpSpPr/>
+        <p:nvPr/>
+      </p:nvGrpSpPr>
+      <p:grpSpPr/>
+      <p:sp>
+        <p:nvSpPr>
+          <p:cNvPr id="2" name="TextBox 1"/>
+          <p:cNvSpPr txBox="1"/>
+          <p:nvPr/>
+        </p:nvSpPr>
+        <p:spPr>
+          <a:xfrm>
+            <a:off x="548640" y="411480"/>
+            <a:ext cx="11064240" cy="640080"/>
+          </a:xfrm>
+          <a:prstGeom prst="rect">
+            <a:avLst/>
+          </a:prstGeom>
+          <a:noFill/>
+        </p:spPr>
+        <p:txBody>
+          <a:bodyPr wrap="square" anchor="t" lIns="0" rIns="0" tIns="0" bIns="0">
+            <a:spAutoFit/>
+          </a:bodyPr>
+          <a:lstStyle/>
+          <a:p>
+            <a:pPr algn="l">
+              <a:spcAft>
+                <a:spcPts val="0"/>
+              </a:spcAft>
+            </a:pPr>
+            <a:r>
+              <a:rPr sz="2600" b="1" i="0">
+                <a:solidFill>
+                  <a:srgbClr val="0F172A"/>
+                </a:solidFill>
+                <a:latin typeface="Arial"/>
+              </a:rPr>
+              <a:t>16 Демонстрація: запобігання зриву в реальному часі</a:t>
+            </a:r>
+          </a:p>
+        </p:txBody>
+      </p:sp>
+      <p:sp>
+        <p:nvSpPr>
+          <p:cNvPr id="3" name="TextBox 2"/>
+          <p:cNvSpPr txBox="1"/>
+          <p:nvPr/>
+        </p:nvSpPr>
+        <p:spPr>
+          <a:xfrm>
+            <a:off x="11247120" y="6446520"/>
+            <a:ext cx="457200" cy="274320"/>
+          </a:xfrm>
+          <a:prstGeom prst="rect">
+            <a:avLst/>
+          </a:prstGeom>
+          <a:noFill/>
+        </p:spPr>
+        <p:txBody>
+          <a:bodyPr wrap="square" anchor="t" lIns="0" rIns="0" tIns="0" bIns="0">
+            <a:spAutoFit/>
+          </a:bodyPr>
+          <a:lstStyle/>
+          <a:p>
+            <a:pPr algn="r">
+              <a:spcAft>
+                <a:spcPts val="0"/>
+              </a:spcAft>
+            </a:pPr>
+            <a:r>
+              <a:rPr sz="1000" b="0" i="0">
+                <a:solidFill>
+                  <a:srgbClr val="94A3B8"/>
+                </a:solidFill>
+                <a:latin typeface="Arial"/>
+              </a:rPr>
+              <a:t>32</a:t>
+            </a:r>
+          </a:p>
+        </p:txBody>
+      </p:sp>
+      <p:sp>
+        <p:nvSpPr>
+          <p:cNvPr id="4" name="TextBox 3"/>
+          <p:cNvSpPr txBox="1"/>
+          <p:nvPr/>
+        </p:nvSpPr>
+        <p:spPr>
+          <a:xfrm>
+            <a:off x="548640" y="1280160"/>
+            <a:ext cx="6035040" cy="1188720"/>
+          </a:xfrm>
+          <a:prstGeom prst="rect">
+            <a:avLst/>
+          </a:prstGeom>
+          <a:noFill/>
+        </p:spPr>
+        <p:txBody>
+          <a:bodyPr wrap="square" anchor="t" lIns="0" rIns="0" tIns="0" bIns="0">
+            <a:spAutoFit/>
+          </a:bodyPr>
+          <a:lstStyle/>
+          <a:p>
+            <a:pPr algn="l">
+              <a:spcAft>
+                <a:spcPts val="0"/>
+              </a:spcAft>
+            </a:pPr>
+            <a:r>
+              <a:rPr sz="1400" b="1" i="0">
+                <a:solidFill>
+                  <a:srgbClr val="0F172A"/>
+                </a:solidFill>
+                <a:latin typeface="Arial"/>
+              </a:rPr>
+              <a:t>Чому власний симулятор. </a:t>
+            </a:r>
+            <a:r>
+              <a:rPr sz="1400" b="0" i="0">
+                <a:solidFill>
+                  <a:srgbClr val="0F172A"/>
+                </a:solidFill>
+                <a:latin typeface="Arial"/>
+              </a:rPr>
+              <a:t>Симулятор організаторів toksym генерує розряди й оцінює тривогу, але не дає змінювати параметри плазми під час розряду, тож замкнений контур на ньому неможливий. Тому на основі відкритого рушія fusionsimulator.io, на якому побудовано і toksym, ми зробили власний — fusion-sim.</a:t>
+            </a:r>
+          </a:p>
+        </p:txBody>
+      </p:sp>
+      <p:sp>
+        <p:nvSpPr>
+          <p:cNvPr id="5" name="TextBox 4"/>
+          <p:cNvSpPr txBox="1"/>
+          <p:nvPr/>
+        </p:nvSpPr>
+        <p:spPr>
+          <a:xfrm>
+            <a:off x="548640" y="2697480"/>
+            <a:ext cx="6035040" cy="320040"/>
+          </a:xfrm>
+          <a:prstGeom prst="rect">
+            <a:avLst/>
+          </a:prstGeom>
+          <a:noFill/>
+        </p:spPr>
+        <p:txBody>
+          <a:bodyPr wrap="square" anchor="t" lIns="0" rIns="0" tIns="0" bIns="0">
+            <a:spAutoFit/>
+          </a:bodyPr>
+          <a:lstStyle/>
+          <a:p>
+            <a:pPr algn="l">
+              <a:spcAft>
+                <a:spcPts val="0"/>
+              </a:spcAft>
+            </a:pPr>
+            <a:r>
+              <a:rPr sz="1100" b="0" i="0">
+                <a:solidFill>
+                  <a:srgbClr val="475569"/>
+                </a:solidFill>
+                <a:latin typeface="Arial"/>
+              </a:rPr>
+              <a:t>Таблиця 16 – Можливості симуляторів</a:t>
+            </a:r>
+          </a:p>
+        </p:txBody>
+      </p:sp>
+      <p:graphicFrame>
+        <p:nvGraphicFramePr>
+          <p:cNvPr id="6" name="Table 5"/>
+          <p:cNvGraphicFramePr>
+            <a:graphicFrameLocks noGrp="1"/>
+          </p:cNvGraphicFramePr>
+          <p:nvPr/>
+        </p:nvGraphicFramePr>
+        <p:xfrm>
+          <a:off x="548640" y="3063240"/>
+          <a:ext cx="6035040" cy="2816352"/>
+        </p:xfrm>
+        <a:graphic>
+          <a:graphicData uri="http://schemas.openxmlformats.org/drawingml/2006/table">
+            <a:tbl>
+              <a:tblPr firstRow="0" bandRow="0">
+                <a:tableStyleId>{5C22544A-7EE6-4342-B048-85BDC9FD1C3A}</a:tableStyleId>
+              </a:tblPr>
+              <a:tblGrid>
+                <a:gridCol w="3017520"/>
+                <a:gridCol w="1097280"/>
+                <a:gridCol w="1920240"/>
+              </a:tblGrid>
+              <a:tr h="402336">
+                <a:tc>
+                  <a:txBody>
+                    <a:bodyPr wrap="square"/>
+                    <a:lstStyle/>
+                    <a:p>
+                      <a:pPr algn="l"/>
+                      <a:r>
+                        <a:rPr sz="1100" b="1">
+                          <a:solidFill>
+                            <a:srgbClr val="475569"/>
+                          </a:solidFill>
+                          <a:latin typeface="Arial"/>
+                        </a:rPr>
+                        <a:t>можливість</a:t>
+                      </a:r>
+                    </a:p>
+                  </a:txBody>
+                  <a:tcPr marL="91440" marR="91440" marT="27432" marB="27432" anchor="ctr">
+                    <a:solidFill>
+                      <a:srgbClr val="F1F5F9"/>
+                    </a:solidFill>
+                  </a:tcPr>
+                </a:tc>
+                <a:tc>
+                  <a:txBody>
+                    <a:bodyPr wrap="square"/>
+                    <a:lstStyle/>
+                    <a:p>
+                      <a:pPr algn="ctr"/>
+                      <a:r>
+                        <a:rPr sz="1100" b="1">
+                          <a:solidFill>
+                            <a:srgbClr val="475569"/>
+                          </a:solidFill>
+                          <a:latin typeface="Arial"/>
+                        </a:rPr>
+                        <a:t>toksym</a:t>
+                      </a:r>
+                    </a:p>
+                  </a:txBody>
+                  <a:tcPr marL="91440" marR="91440" marT="27432" marB="27432" anchor="ctr">
+                    <a:solidFill>
+                      <a:srgbClr val="F1F5F9"/>
+                    </a:solidFill>
+                  </a:tcPr>
+                </a:tc>
+                <a:tc>
+                  <a:txBody>
+                    <a:bodyPr wrap="square"/>
+                    <a:lstStyle/>
+                    <a:p>
+                      <a:pPr algn="ctr"/>
+                      <a:r>
+                        <a:rPr sz="1100" b="1">
+                          <a:solidFill>
+                            <a:srgbClr val="475569"/>
+                          </a:solidFill>
+                          <a:latin typeface="Arial"/>
+                        </a:rPr>
+                        <a:t>fusion-sim</a:t>
+                      </a:r>
+                    </a:p>
+                  </a:txBody>
+                  <a:tcPr marL="91440" marR="91440" marT="27432" marB="27432" anchor="ctr">
+                    <a:solidFill>
+                      <a:srgbClr val="F1F5F9"/>
+                    </a:solidFill>
+                  </a:tcPr>
+                </a:tc>
+              </a:tr>
+              <a:tr h="402336">
+                <a:tc>
+                  <a:txBody>
+                    <a:bodyPr wrap="square"/>
+                    <a:lstStyle/>
+                    <a:p>
+                      <a:pPr algn="l"/>
+                      <a:r>
+                        <a:rPr sz="1100" b="1">
+                          <a:solidFill>
+                            <a:srgbClr val="0F172A"/>
+                          </a:solidFill>
+                          <a:latin typeface="Arial"/>
+                        </a:rPr>
+                        <a:t>генерація розрядів, залік моделі, звіт</a:t>
+                      </a:r>
+                    </a:p>
+                  </a:txBody>
+                  <a:tcPr marL="91440" marR="91440" marT="27432" marB="27432" anchor="ctr">
+                    <a:solidFill>
+                      <a:srgbClr val="FFFFFF"/>
+                    </a:solidFill>
+                  </a:tcPr>
+                </a:tc>
+                <a:tc>
+                  <a:txBody>
+                    <a:bodyPr wrap="square"/>
+                    <a:lstStyle/>
+                    <a:p>
+                      <a:pPr algn="ctr"/>
+                      <a:r>
+                        <a:rPr sz="1200" b="0">
+                          <a:solidFill>
+                            <a:srgbClr val="0F172A"/>
+                          </a:solidFill>
+                          <a:latin typeface="Arial"/>
+                        </a:rPr>
+                        <a:t>так</a:t>
+                      </a:r>
+                    </a:p>
+                  </a:txBody>
+                  <a:tcPr marL="91440" marR="91440" marT="27432" marB="27432" anchor="ctr">
+                    <a:solidFill>
+                      <a:srgbClr val="FFFFFF"/>
+                    </a:solidFill>
+                  </a:tcPr>
+                </a:tc>
+                <a:tc>
+                  <a:txBody>
+                    <a:bodyPr wrap="square"/>
+                    <a:lstStyle/>
+                    <a:p>
+                      <a:pPr algn="ctr"/>
+                      <a:r>
+                        <a:rPr sz="1100" b="0">
+                          <a:solidFill>
+                            <a:srgbClr val="0F172A"/>
+                          </a:solidFill>
+                          <a:latin typeface="Arial"/>
+                        </a:rPr>
+                        <a:t>так</a:t>
+                      </a:r>
+                    </a:p>
+                  </a:txBody>
+                  <a:tcPr marL="91440" marR="91440" marT="27432" marB="27432" anchor="ctr">
+                    <a:solidFill>
+                      <a:srgbClr val="FFFFFF"/>
+                    </a:solidFill>
+                  </a:tcPr>
+                </a:tc>
+              </a:tr>
+              <a:tr h="402336">
+                <a:tc>
+                  <a:txBody>
+                    <a:bodyPr wrap="square"/>
+                    <a:lstStyle/>
+                    <a:p>
+                      <a:pPr algn="l"/>
+                      <a:r>
+                        <a:rPr sz="1100" b="1">
+                          <a:solidFill>
+                            <a:srgbClr val="0F172A"/>
+                          </a:solidFill>
+                          <a:latin typeface="Arial"/>
+                        </a:rPr>
+                        <a:t>зміна уставок під час розряду</a:t>
+                      </a:r>
+                    </a:p>
+                  </a:txBody>
+                  <a:tcPr marL="91440" marR="91440" marT="27432" marB="27432" anchor="ctr">
+                    <a:solidFill>
+                      <a:srgbClr val="FFFFFF"/>
+                    </a:solidFill>
+                  </a:tcPr>
+                </a:tc>
+                <a:tc>
+                  <a:txBody>
+                    <a:bodyPr wrap="square"/>
+                    <a:lstStyle/>
+                    <a:p>
+                      <a:pPr algn="ctr"/>
+                      <a:r>
+                        <a:rPr sz="1200" b="0">
+                          <a:solidFill>
+                            <a:srgbClr val="0F172A"/>
+                          </a:solidFill>
+                          <a:latin typeface="Arial"/>
+                        </a:rPr>
+                        <a:t>ні</a:t>
+                      </a:r>
+                    </a:p>
+                  </a:txBody>
+                  <a:tcPr marL="91440" marR="91440" marT="27432" marB="27432" anchor="ctr">
+                    <a:solidFill>
+                      <a:srgbClr val="FFFFFF"/>
+                    </a:solidFill>
+                  </a:tcPr>
+                </a:tc>
+                <a:tc>
+                  <a:txBody>
+                    <a:bodyPr wrap="square"/>
+                    <a:lstStyle/>
+                    <a:p>
+                      <a:pPr algn="ctr"/>
+                      <a:r>
+                        <a:rPr sz="1100" b="0">
+                          <a:solidFill>
+                            <a:srgbClr val="0F172A"/>
+                          </a:solidFill>
+                          <a:latin typeface="Arial"/>
+                        </a:rPr>
+                        <a:t>так, вручну або моделлю</a:t>
+                      </a:r>
+                    </a:p>
+                  </a:txBody>
+                  <a:tcPr marL="91440" marR="91440" marT="27432" marB="27432" anchor="ctr">
+                    <a:solidFill>
+                      <a:srgbClr val="FFFFFF"/>
+                    </a:solidFill>
+                  </a:tcPr>
+                </a:tc>
+              </a:tr>
+              <a:tr h="402336">
+                <a:tc>
+                  <a:txBody>
+                    <a:bodyPr wrap="square"/>
+                    <a:lstStyle/>
+                    <a:p>
+                      <a:pPr algn="l"/>
+                      <a:r>
+                        <a:rPr sz="1100" b="1">
+                          <a:solidFill>
+                            <a:srgbClr val="0F172A"/>
+                          </a:solidFill>
+                          <a:latin typeface="Arial"/>
+                        </a:rPr>
+                        <a:t>модель керує плазмою в реальному часі</a:t>
+                      </a:r>
+                    </a:p>
+                  </a:txBody>
+                  <a:tcPr marL="91440" marR="91440" marT="27432" marB="27432" anchor="ctr">
+                    <a:solidFill>
+                      <a:srgbClr val="FFFFFF"/>
+                    </a:solidFill>
+                  </a:tcPr>
+                </a:tc>
+                <a:tc>
+                  <a:txBody>
+                    <a:bodyPr wrap="square"/>
+                    <a:lstStyle/>
+                    <a:p>
+                      <a:pPr algn="ctr"/>
+                      <a:r>
+                        <a:rPr sz="1200" b="0">
+                          <a:solidFill>
+                            <a:srgbClr val="0F172A"/>
+                          </a:solidFill>
+                          <a:latin typeface="Arial"/>
+                        </a:rPr>
+                        <a:t>ні</a:t>
+                      </a:r>
+                    </a:p>
+                  </a:txBody>
+                  <a:tcPr marL="91440" marR="91440" marT="27432" marB="27432" anchor="ctr">
+                    <a:solidFill>
+                      <a:srgbClr val="FFFFFF"/>
+                    </a:solidFill>
+                  </a:tcPr>
+                </a:tc>
+                <a:tc>
+                  <a:txBody>
+                    <a:bodyPr wrap="square"/>
+                    <a:lstStyle/>
+                    <a:p>
+                      <a:pPr algn="ctr"/>
+                      <a:r>
+                        <a:rPr sz="1100" b="0">
+                          <a:solidFill>
+                            <a:srgbClr val="0F172A"/>
+                          </a:solidFill>
+                          <a:latin typeface="Arial"/>
+                        </a:rPr>
+                        <a:t>так, fixer кожні 0,25 с</a:t>
+                      </a:r>
+                    </a:p>
+                  </a:txBody>
+                  <a:tcPr marL="91440" marR="91440" marT="27432" marB="27432" anchor="ctr">
+                    <a:solidFill>
+                      <a:srgbClr val="FFFFFF"/>
+                    </a:solidFill>
+                  </a:tcPr>
+                </a:tc>
+              </a:tr>
+              <a:tr h="402336">
+                <a:tc>
+                  <a:txBody>
+                    <a:bodyPr wrap="square"/>
+                    <a:lstStyle/>
+                    <a:p>
+                      <a:pPr algn="l"/>
+                      <a:r>
+                        <a:rPr sz="1100" b="1">
+                          <a:solidFill>
+                            <a:srgbClr val="0F172A"/>
+                          </a:solidFill>
+                          <a:latin typeface="Arial"/>
+                        </a:rPr>
+                        <a:t>«тінь»: та сама плазма без втручань</a:t>
+                      </a:r>
+                    </a:p>
+                  </a:txBody>
+                  <a:tcPr marL="91440" marR="91440" marT="27432" marB="27432" anchor="ctr">
+                    <a:solidFill>
+                      <a:srgbClr val="FFFFFF"/>
+                    </a:solidFill>
+                  </a:tcPr>
+                </a:tc>
+                <a:tc>
+                  <a:txBody>
+                    <a:bodyPr wrap="square"/>
+                    <a:lstStyle/>
+                    <a:p>
+                      <a:pPr algn="ctr"/>
+                      <a:r>
+                        <a:rPr sz="1200" b="0">
+                          <a:solidFill>
+                            <a:srgbClr val="0F172A"/>
+                          </a:solidFill>
+                          <a:latin typeface="Arial"/>
+                        </a:rPr>
+                        <a:t>ні</a:t>
+                      </a:r>
+                    </a:p>
+                  </a:txBody>
+                  <a:tcPr marL="91440" marR="91440" marT="27432" marB="27432" anchor="ctr">
+                    <a:solidFill>
+                      <a:srgbClr val="FFFFFF"/>
+                    </a:solidFill>
+                  </a:tcPr>
+                </a:tc>
+                <a:tc>
+                  <a:txBody>
+                    <a:bodyPr wrap="square"/>
+                    <a:lstStyle/>
+                    <a:p>
+                      <a:pPr algn="ctr"/>
+                      <a:r>
+                        <a:rPr sz="1100" b="0">
+                          <a:solidFill>
+                            <a:srgbClr val="0F172A"/>
+                          </a:solidFill>
+                          <a:latin typeface="Arial"/>
+                        </a:rPr>
+                        <a:t>так, доказ «зірвалася б»</a:t>
+                      </a:r>
+                    </a:p>
+                  </a:txBody>
+                  <a:tcPr marL="91440" marR="91440" marT="27432" marB="27432" anchor="ctr">
+                    <a:solidFill>
+                      <a:srgbClr val="FFFFFF"/>
+                    </a:solidFill>
+                  </a:tcPr>
+                </a:tc>
+              </a:tr>
+              <a:tr h="402336">
+                <a:tc>
+                  <a:txBody>
+                    <a:bodyPr wrap="square"/>
+                    <a:lstStyle/>
+                    <a:p>
+                      <a:pPr algn="l"/>
+                      <a:r>
+                        <a:rPr sz="1100" b="1">
+                          <a:solidFill>
+                            <a:srgbClr val="0F172A"/>
+                          </a:solidFill>
+                          <a:latin typeface="Arial"/>
+                        </a:rPr>
+                        <a:t>причини зриву в інтерфейсі</a:t>
+                      </a:r>
+                    </a:p>
+                  </a:txBody>
+                  <a:tcPr marL="91440" marR="91440" marT="27432" marB="27432" anchor="ctr">
+                    <a:solidFill>
+                      <a:srgbClr val="FFFFFF"/>
+                    </a:solidFill>
+                  </a:tcPr>
+                </a:tc>
+                <a:tc>
+                  <a:txBody>
+                    <a:bodyPr wrap="square"/>
+                    <a:lstStyle/>
+                    <a:p>
+                      <a:pPr algn="ctr"/>
+                      <a:r>
+                        <a:rPr sz="1200" b="0">
+                          <a:solidFill>
+                            <a:srgbClr val="0F172A"/>
+                          </a:solidFill>
+                          <a:latin typeface="Arial"/>
+                        </a:rPr>
+                        <a:t>ні</a:t>
+                      </a:r>
+                    </a:p>
+                  </a:txBody>
+                  <a:tcPr marL="91440" marR="91440" marT="27432" marB="27432" anchor="ctr">
+                    <a:solidFill>
+                      <a:srgbClr val="FFFFFF"/>
+                    </a:solidFill>
+                  </a:tcPr>
+                </a:tc>
+                <a:tc>
+                  <a:txBody>
+                    <a:bodyPr wrap="square"/>
+                    <a:lstStyle/>
+                    <a:p>
+                      <a:pPr algn="ctr"/>
+                      <a:r>
+                        <a:rPr sz="1100" b="0">
+                          <a:solidFill>
+                            <a:srgbClr val="0F172A"/>
+                          </a:solidFill>
+                          <a:latin typeface="Arial"/>
+                        </a:rPr>
+                        <a:t>так, частки ImpactNet</a:t>
+                      </a:r>
+                    </a:p>
+                  </a:txBody>
+                  <a:tcPr marL="91440" marR="91440" marT="27432" marB="27432" anchor="ctr">
+                    <a:solidFill>
+                      <a:srgbClr val="FFFFFF"/>
+                    </a:solidFill>
+                  </a:tcPr>
+                </a:tc>
+              </a:tr>
+              <a:tr h="402336">
+                <a:tc>
+                  <a:txBody>
+                    <a:bodyPr wrap="square"/>
+                    <a:lstStyle/>
+                    <a:p>
+                      <a:pPr algn="l"/>
+                      <a:r>
+                        <a:rPr sz="1100" b="1">
+                          <a:solidFill>
+                            <a:srgbClr val="0F172A"/>
+                          </a:solidFill>
+                          <a:latin typeface="Arial"/>
+                        </a:rPr>
+                        <a:t>шум приладів</a:t>
+                      </a:r>
+                    </a:p>
+                  </a:txBody>
+                  <a:tcPr marL="91440" marR="91440" marT="27432" marB="27432" anchor="ctr">
+                    <a:solidFill>
+                      <a:srgbClr val="FFFFFF"/>
+                    </a:solidFill>
+                  </a:tcPr>
+                </a:tc>
+                <a:tc>
+                  <a:txBody>
+                    <a:bodyPr wrap="square"/>
+                    <a:lstStyle/>
+                    <a:p>
+                      <a:pPr algn="ctr"/>
+                      <a:r>
+                        <a:rPr sz="1200" b="0">
+                          <a:solidFill>
+                            <a:srgbClr val="0F172A"/>
+                          </a:solidFill>
+                          <a:latin typeface="Arial"/>
+                        </a:rPr>
+                        <a:t>так</a:t>
+                      </a:r>
+                    </a:p>
+                  </a:txBody>
+                  <a:tcPr marL="91440" marR="91440" marT="27432" marB="27432" anchor="ctr">
+                    <a:solidFill>
+                      <a:srgbClr val="FFFFFF"/>
+                    </a:solidFill>
+                  </a:tcPr>
+                </a:tc>
+                <a:tc>
+                  <a:txBody>
+                    <a:bodyPr wrap="square"/>
+                    <a:lstStyle/>
+                    <a:p>
+                      <a:pPr algn="ctr"/>
+                      <a:r>
+                        <a:rPr sz="1100" b="0">
+                          <a:solidFill>
+                            <a:srgbClr val="0F172A"/>
+                          </a:solidFill>
+                          <a:latin typeface="Arial"/>
+                        </a:rPr>
+                        <a:t>ні (наступний крок)</a:t>
+                      </a:r>
+                    </a:p>
+                  </a:txBody>
+                  <a:tcPr marL="91440" marR="91440" marT="27432" marB="27432" anchor="ctr">
+                    <a:solidFill>
+                      <a:srgbClr val="FFFFFF"/>
+                    </a:solidFill>
+                  </a:tcPr>
+                </a:tc>
+              </a:tr>
+            </a:tbl>
+          </a:graphicData>
+        </a:graphic>
+      </p:graphicFrame>
+      <p:sp>
+        <p:nvSpPr>
+          <p:cNvPr id="7" name="Rectangle 6"/>
+          <p:cNvSpPr/>
+          <p:nvPr/>
+        </p:nvSpPr>
+        <p:spPr>
+          <a:xfrm>
+            <a:off x="6995160" y="1280160"/>
+            <a:ext cx="4663440" cy="2926080"/>
+          </a:xfrm>
+          <a:prstGeom prst="rect">
+            <a:avLst/>
+          </a:prstGeom>
+          <a:solidFill>
+            <a:srgbClr val="ECFDF5"/>
+          </a:solidFill>
+          <a:ln w="15875">
+            <a:solidFill>
+              <a:srgbClr val="047857"/>
+            </a:solidFill>
+          </a:ln>
+          <a:effectLst/>
+        </p:spPr>
+        <p:style>
+          <a:lnRef idx="1">
+            <a:schemeClr val="accent1"/>
+          </a:lnRef>
+          <a:fillRef idx="3">
+            <a:schemeClr val="accent1"/>
+          </a:fillRef>
+          <a:effectRef idx="2">
+            <a:schemeClr val="accent1"/>
+          </a:effectRef>
+          <a:fontRef idx="minor">
+            <a:schemeClr val="lt1"/>
+          </a:fontRef>
+        </p:style>
+        <p:txBody>
+          <a:bodyPr rtlCol="0" anchor="ctr"/>
+          <a:lstStyle/>
+          <a:p>
+            <a:pPr algn="ctr"/>
+          </a:p>
+        </p:txBody>
+      </p:sp>
+      <p:sp>
+        <p:nvSpPr>
+          <p:cNvPr id="8" name="TextBox 7"/>
+          <p:cNvSpPr txBox="1"/>
+          <p:nvPr/>
+        </p:nvSpPr>
+        <p:spPr>
+          <a:xfrm>
+            <a:off x="7223760" y="1417320"/>
+            <a:ext cx="4251960" cy="3291840"/>
+          </a:xfrm>
+          <a:prstGeom prst="rect">
+            <a:avLst/>
+          </a:prstGeom>
+          <a:noFill/>
+        </p:spPr>
+        <p:txBody>
+          <a:bodyPr wrap="square" anchor="t" lIns="0" rIns="0" tIns="0" bIns="0">
+            <a:spAutoFit/>
+          </a:bodyPr>
+          <a:lstStyle/>
+          <a:p>
+            <a:pPr algn="l">
+              <a:spcAft>
+                <a:spcPts val="800"/>
+              </a:spcAft>
+            </a:pPr>
+            <a:r>
+              <a:rPr sz="1600" b="1" i="0">
+                <a:solidFill>
+                  <a:srgbClr val="047857"/>
+                </a:solidFill>
+                <a:latin typeface="Arial"/>
+              </a:rPr>
+              <a:t>Що покажемо наживо</a:t>
+            </a:r>
+          </a:p>
+          <a:p>
+            <a:pPr algn="l">
+              <a:spcAft>
+                <a:spcPts val="800"/>
+              </a:spcAft>
+            </a:pPr>
+            <a:r>
+              <a:rPr sz="1300" b="0" i="0">
+                <a:solidFill>
+                  <a:srgbClr val="0F172A"/>
+                </a:solidFill>
+                <a:latin typeface="Arial"/>
+              </a:rPr>
+              <a:t>JET → сценарій Density limit → паливо DD, модель v8_fixer</a:t>
+            </a:r>
+          </a:p>
+          <a:p>
+            <a:pPr algn="l">
+              <a:spcAft>
+                <a:spcPts val="600"/>
+              </a:spcAft>
+            </a:pPr>
+            <a:r>
+              <a:rPr sz="1300" b="0" i="0">
+                <a:solidFill>
+                  <a:srgbClr val="0F172A"/>
+                </a:solidFill>
+                <a:latin typeface="Arial"/>
+              </a:rPr>
+              <a:t>Без fixer: розряд зривається на 4–5 с</a:t>
+            </a:r>
+          </a:p>
+          <a:p>
+            <a:pPr algn="l">
+              <a:spcAft>
+                <a:spcPts val="600"/>
+              </a:spcAft>
+            </a:pPr>
+            <a:r>
+              <a:rPr sz="1300" b="1" i="0">
+                <a:solidFill>
+                  <a:srgbClr val="0F172A"/>
+                </a:solidFill>
+                <a:latin typeface="Arial"/>
+              </a:rPr>
+              <a:t>З fixer: ⚠ ПРОГНОЗ ЗРИВУ → FIXER ВНІС ЗМІНИ → ✓ Зрив відвернуто</a:t>
+            </a:r>
+          </a:p>
+          <a:p>
+            <a:pPr algn="l">
+              <a:spcAft>
+                <a:spcPts val="0"/>
+              </a:spcAft>
+            </a:pPr>
+            <a:r>
+              <a:rPr sz="1300" b="0" i="0">
+                <a:solidFill>
+                  <a:srgbClr val="0F172A"/>
+                </a:solidFill>
+                <a:latin typeface="Arial"/>
+              </a:rPr>
+              <a:t>«Тінь» поруч показує, що та сама плазма без fixer зірвалася б</a:t>
+            </a:r>
+          </a:p>
+        </p:txBody>
+      </p:sp>
+      <p:sp>
+        <p:nvSpPr>
+          <p:cNvPr id="9" name="TextBox 8"/>
+          <p:cNvSpPr txBox="1"/>
+          <p:nvPr/>
+        </p:nvSpPr>
+        <p:spPr>
+          <a:xfrm>
+            <a:off x="6995160" y="4434840"/>
+            <a:ext cx="4663440" cy="411480"/>
+          </a:xfrm>
+          <a:prstGeom prst="rect">
+            <a:avLst/>
+          </a:prstGeom>
+          <a:noFill/>
+        </p:spPr>
+        <p:txBody>
+          <a:bodyPr wrap="none" lIns="0" rIns="0" tIns="0" bIns="0">
+            <a:spAutoFit/>
+          </a:bodyPr>
+          <a:lstStyle/>
+          <a:p>
+            <a:r>
+              <a:rPr sz="1400" b="1">
+                <a:solidFill>
+                  <a:srgbClr val="1D4ED8"/>
+                </a:solidFill>
+                <a:latin typeface="Arial"/>
+                <a:hlinkClick r:id="rId3"/>
+              </a:rPr>
+              <a:t>Відкрити симулятор: http://127.0.0.1:9999</a:t>
+            </a:r>
+          </a:p>
+        </p:txBody>
+      </p:sp>
+      <p:sp>
+        <p:nvSpPr>
+          <p:cNvPr id="10" name="TextBox 9"/>
+          <p:cNvSpPr txBox="1"/>
+          <p:nvPr/>
+        </p:nvSpPr>
+        <p:spPr>
+          <a:xfrm>
+            <a:off x="6995160" y="4846320"/>
+            <a:ext cx="4663440" cy="365760"/>
+          </a:xfrm>
+          <a:prstGeom prst="rect">
+            <a:avLst/>
+          </a:prstGeom>
+          <a:noFill/>
+        </p:spPr>
+        <p:txBody>
+          <a:bodyPr wrap="square" anchor="t" lIns="0" rIns="0" tIns="0" bIns="0">
+            <a:spAutoFit/>
+          </a:bodyPr>
+          <a:lstStyle/>
+          <a:p>
+            <a:pPr algn="l">
+              <a:spcAft>
+                <a:spcPts val="0"/>
+              </a:spcAft>
+            </a:pPr>
+            <a:r>
+              <a:rPr sz="1100" b="0" i="0">
+                <a:solidFill>
+                  <a:srgbClr val="475569"/>
+                </a:solidFill>
+                <a:latin typeface="Arial"/>
+              </a:rPr>
+              <a:t>github.com/lurbaby/plasma_simulator</a:t>
+            </a:r>
+          </a:p>
+        </p:txBody>
+      </p:sp>
+      <p:sp>
+        <p:nvSpPr>
+          <p:cNvPr id="11" name="TextBox 10"/>
+          <p:cNvSpPr txBox="1"/>
+          <p:nvPr/>
+        </p:nvSpPr>
+        <p:spPr>
+          <a:xfrm>
+            <a:off x="6995160" y="5623560"/>
+            <a:ext cx="4663440" cy="457200"/>
           </a:xfrm>
           <a:prstGeom prst="rect">
             <a:avLst/>
